--- a/data-drift/seminar.pptx
+++ b/data-drift/seminar.pptx
@@ -221,7 +221,7 @@
             <a:lstStyle/>
             <a:p>
               <a:pPr>
-                <a:defRPr sz="1200">
+                <a:defRPr sz="1500">
                   <a:solidFill>
                     <a:srgbClr val="000000"/>
                   </a:solidFill>
@@ -263,7 +263,7 @@
           <a:lstStyle/>
           <a:p>
             <a:pPr>
-              <a:defRPr sz="1300">
+              <a:defRPr sz="1600">
                 <a:solidFill>
                   <a:srgbClr val="000000"/>
                 </a:solidFill>
@@ -307,7 +307,7 @@
           <a:lstStyle/>
           <a:p>
             <a:pPr>
-              <a:defRPr sz="1300">
+              <a:defRPr sz="1500">
                 <a:solidFill>
                   <a:srgbClr val="000000"/>
                 </a:solidFill>
@@ -326,7 +326,7 @@
     <a:lstStyle/>
     <a:p>
       <a:pPr>
-        <a:defRPr sz="1400">
+        <a:defRPr sz="1600">
           <a:solidFill>
             <a:srgbClr val="000000"/>
           </a:solidFill>
@@ -504,7 +504,7 @@
             <a:lstStyle/>
             <a:p>
               <a:pPr>
-                <a:defRPr sz="1200">
+                <a:defRPr sz="1500">
                   <a:solidFill>
                     <a:srgbClr val="000000"/>
                   </a:solidFill>
@@ -548,7 +548,7 @@
           <a:lstStyle/>
           <a:p>
             <a:pPr>
-              <a:defRPr sz="1300">
+              <a:defRPr sz="1600">
                 <a:solidFill>
                   <a:srgbClr val="000000"/>
                 </a:solidFill>
@@ -595,7 +595,7 @@
           <a:lstStyle/>
           <a:p>
             <a:pPr>
-              <a:defRPr sz="1300">
+              <a:defRPr sz="1500">
                 <a:solidFill>
                   <a:srgbClr val="000000"/>
                 </a:solidFill>
@@ -616,7 +616,7 @@
         <a:lstStyle/>
         <a:p>
           <a:pPr>
-            <a:defRPr sz="1400">
+            <a:defRPr sz="1600">
               <a:solidFill>
                 <a:srgbClr val="000000"/>
               </a:solidFill>
@@ -634,7 +634,7 @@
     <a:lstStyle/>
     <a:p>
       <a:pPr>
-        <a:defRPr sz="1400">
+        <a:defRPr sz="1600">
           <a:solidFill>
             <a:srgbClr val="000000"/>
           </a:solidFill>
@@ -3639,8 +3639,8 @@
         </p:nvSpPr>
         <p:spPr>
           <a:xfrm>
-            <a:off x="640080" y="2194560"/>
-            <a:ext cx="10911535" cy="1371600"/>
+            <a:off x="640080" y="2103120"/>
+            <a:ext cx="10911535" cy="1645920"/>
           </a:xfrm>
           <a:prstGeom prst="rect">
             <a:avLst/>
@@ -3654,7 +3654,7 @@
           <a:lstStyle/>
           <a:p>
             <a:r>
-              <a:rPr sz="4200" b="1" i="0">
+              <a:rPr sz="4800" b="1" i="0">
                 <a:solidFill>
                   <a:srgbClr val="000000"/>
                 </a:solidFill>
@@ -3665,13 +3665,13 @@
           </a:p>
           <a:p>
             <a:r>
-              <a:rPr sz="2200" b="0" i="0">
-                <a:solidFill>
-                  <a:srgbClr val="000000"/>
-                </a:solidFill>
-                <a:latin typeface="Calibri"/>
-              </a:rPr>
-              <a:t>Formulation, methods, and a reproduction of Read (2018)</a:t>
+              <a:rPr sz="2600" b="0" i="0">
+                <a:solidFill>
+                  <a:srgbClr val="000000"/>
+                </a:solidFill>
+                <a:latin typeface="Calibri"/>
+              </a:rPr>
+              <a:t>Formulation, methods, and a reproduction</a:t>
             </a:r>
           </a:p>
         </p:txBody>
@@ -3684,8 +3684,8 @@
         </p:nvSpPr>
         <p:spPr>
           <a:xfrm>
-            <a:off x="640080" y="4297680"/>
-            <a:ext cx="10911535" cy="2103120"/>
+            <a:off x="640080" y="4480560"/>
+            <a:ext cx="10911535" cy="1920239"/>
           </a:xfrm>
           <a:prstGeom prst="rect">
             <a:avLst/>
@@ -3700,11 +3700,11 @@
           <a:p>
             <a:pPr>
               <a:spcAft>
-                <a:spcPts val="1000"/>
+                <a:spcPts val="1400"/>
               </a:spcAft>
             </a:pPr>
             <a:r>
-              <a:rPr sz="1700" b="0" i="0">
+              <a:rPr sz="2200" b="0" i="0">
                 <a:solidFill>
                   <a:srgbClr val="000000"/>
                 </a:solidFill>
@@ -3741,8 +3741,8 @@
         </p:nvSpPr>
         <p:spPr>
           <a:xfrm>
-            <a:off x="640080" y="365760"/>
-            <a:ext cx="10911535" cy="731520"/>
+            <a:off x="640080" y="320040"/>
+            <a:ext cx="10911535" cy="914400"/>
           </a:xfrm>
           <a:prstGeom prst="rect">
             <a:avLst/>
@@ -3756,13 +3756,13 @@
           <a:lstStyle/>
           <a:p>
             <a:r>
-              <a:rPr sz="3200" b="1" i="0">
-                <a:solidFill>
-                  <a:srgbClr val="000000"/>
-                </a:solidFill>
-                <a:latin typeface="Calibri"/>
-              </a:rPr>
-              <a:t>Limitations of the evaluation protocol</a:t>
+              <a:rPr sz="4400" b="1" i="0">
+                <a:solidFill>
+                  <a:srgbClr val="000000"/>
+                </a:solidFill>
+                <a:latin typeface="Calibri"/>
+              </a:rPr>
+              <a:t>Limits of the evaluation protocol</a:t>
             </a:r>
           </a:p>
         </p:txBody>
@@ -3775,8 +3775,8 @@
         </p:nvSpPr>
         <p:spPr>
           <a:xfrm>
-            <a:off x="640080" y="1463040"/>
-            <a:ext cx="10911535" cy="4937760"/>
+            <a:off x="640080" y="1737360"/>
+            <a:ext cx="10911535" cy="4663440"/>
           </a:xfrm>
           <a:prstGeom prst="rect">
             <a:avLst/>
@@ -3791,11 +3791,11 @@
           <a:p>
             <a:pPr>
               <a:spcAft>
-                <a:spcPts val="600"/>
+                <a:spcPts val="1200"/>
               </a:spcAft>
             </a:pPr>
             <a:r>
-              <a:rPr sz="1700" b="1" i="0">
+              <a:rPr sz="2800" b="1" i="0">
                 <a:solidFill>
                   <a:srgbClr val="000000"/>
                 </a:solidFill>
@@ -3807,145 +3807,81 @@
           <a:p>
             <a:pPr lvl="1">
               <a:spcAft>
-                <a:spcPts val="600"/>
+                <a:spcPts val="1200"/>
               </a:spcAft>
             </a:pPr>
             <a:r>
-              <a:rPr sz="1600" b="0" i="0">
-                <a:solidFill>
-                  <a:srgbClr val="000000"/>
-                </a:solidFill>
-                <a:latin typeface="Calibri"/>
-              </a:rPr>
-              <a:t>Streams switch between predefined concepts at fixed times; transfer to real</a:t>
+              <a:rPr sz="2700" b="0" i="0">
+                <a:solidFill>
+                  <a:srgbClr val="000000"/>
+                </a:solidFill>
+                <a:latin typeface="Calibri"/>
+              </a:rPr>
+              <a:t>transfer to real data is unestablished</a:t>
+            </a:r>
+          </a:p>
+          <a:p>
+            <a:pPr>
+              <a:spcAft>
+                <a:spcPts val="1200"/>
+              </a:spcAft>
+            </a:pPr>
+            <a:r>
+              <a:rPr sz="2800" b="1" i="0">
+                <a:solidFill>
+                  <a:srgbClr val="000000"/>
+                </a:solidFill>
+                <a:latin typeface="Calibri"/>
+              </a:rPr>
+              <a:t>Proxy evaluation conflates two quantities.</a:t>
             </a:r>
           </a:p>
           <a:p>
             <a:pPr lvl="1">
               <a:spcAft>
-                <a:spcPts val="600"/>
+                <a:spcPts val="1200"/>
               </a:spcAft>
             </a:pPr>
             <a:r>
-              <a:rPr sz="1600" b="0" i="0">
-                <a:solidFill>
-                  <a:srgbClr val="000000"/>
-                </a:solidFill>
-                <a:latin typeface="Calibri"/>
-              </a:rPr>
-              <a:t>data is unestablished.</a:t>
+              <a:rPr sz="2700" b="0" i="0">
+                <a:solidFill>
+                  <a:srgbClr val="000000"/>
+                </a:solidFill>
+                <a:latin typeface="Calibri"/>
+              </a:rPr>
+              <a:t>detector quality with model adaptability</a:t>
             </a:r>
           </a:p>
           <a:p>
             <a:pPr>
               <a:spcAft>
-                <a:spcPts val="600"/>
+                <a:spcPts val="1200"/>
               </a:spcAft>
             </a:pPr>
             <a:r>
-              <a:rPr sz="1700" b="1" i="0">
-                <a:solidFill>
-                  <a:srgbClr val="000000"/>
-                </a:solidFill>
-                <a:latin typeface="Calibri"/>
-              </a:rPr>
-              <a:t>Proxy evaluation conflates two quantities.</a:t>
+              <a:rPr sz="2800" b="1" i="0">
+                <a:solidFill>
+                  <a:srgbClr val="000000"/>
+                </a:solidFill>
+                <a:latin typeface="Calibri"/>
+              </a:rPr>
+              <a:t>Verification latency invalidates the classics.</a:t>
             </a:r>
           </a:p>
           <a:p>
             <a:pPr lvl="1">
               <a:spcAft>
-                <a:spcPts val="600"/>
+                <a:spcPts val="1200"/>
               </a:spcAft>
             </a:pPr>
             <a:r>
-              <a:rPr sz="1600" b="0" i="0">
-                <a:solidFill>
-                  <a:srgbClr val="000000"/>
-                </a:solidFill>
-                <a:latin typeface="Calibri"/>
-              </a:rPr>
-              <a:t>Assessing a detector by whether retraining improves accuracy confounds detector</a:t>
-            </a:r>
-          </a:p>
-          <a:p>
-            <a:pPr lvl="1">
-              <a:spcAft>
-                <a:spcPts val="600"/>
-              </a:spcAft>
-            </a:pPr>
-            <a:r>
-              <a:rPr sz="1600" b="0" i="0">
-                <a:solidFill>
-                  <a:srgbClr val="000000"/>
-                </a:solidFill>
-                <a:latin typeface="Calibri"/>
-              </a:rPr>
-              <a:t>quality with model adaptability, and measures neither accuracy nor latency.</a:t>
-            </a:r>
-          </a:p>
-          <a:p>
-            <a:pPr>
-              <a:spcAft>
-                <a:spcPts val="600"/>
-              </a:spcAft>
-            </a:pPr>
-            <a:r>
-              <a:rPr sz="1700" b="1" i="0">
-                <a:solidFill>
-                  <a:srgbClr val="000000"/>
-                </a:solidFill>
-                <a:latin typeface="Calibri"/>
-              </a:rPr>
-              <a:t>Verification latency invalidates the classical detectors.</a:t>
-            </a:r>
-          </a:p>
-          <a:p>
-            <a:pPr lvl="1">
-              <a:spcAft>
-                <a:spcPts val="600"/>
-              </a:spcAft>
-            </a:pPr>
-            <a:r>
-              <a:rPr sz="1600" b="0" i="0">
-                <a:solidFill>
-                  <a:srgbClr val="000000"/>
-                </a:solidFill>
-                <a:latin typeface="Calibri"/>
-              </a:rPr>
-              <a:t>DDM, EDDM and ADWIN assume immediate labels. In fraud detection ground truth</a:t>
-            </a:r>
-          </a:p>
-          <a:p>
-            <a:pPr lvl="1">
-              <a:spcAft>
-                <a:spcPts val="600"/>
-              </a:spcAft>
-            </a:pPr>
-            <a:r>
-              <a:rPr sz="1600" b="0" i="0">
-                <a:solidFill>
-                  <a:srgbClr val="000000"/>
-                </a:solidFill>
-                <a:latin typeface="Calibri"/>
-              </a:rPr>
-              <a:t>arrives after 30–180 days, so they are inapplicable in their original form.</a:t>
-            </a:r>
-          </a:p>
-          <a:p>
-            <a:pPr>
-              <a:spcAft>
-                <a:spcPts val="600"/>
-              </a:spcAft>
-            </a:pPr>
-            <a:r>
-              <a:rPr sz="1700" b="0" i="0">
-                <a:solidFill>
-                  <a:srgbClr val="000000"/>
-                </a:solidFill>
-                <a:latin typeface="Calibri"/>
-              </a:rPr>
-              <a:t>Where the error signal is unobservable for months, so is any method depending on it.</a:t>
+              <a:rPr sz="2700" b="0" i="0">
+                <a:solidFill>
+                  <a:srgbClr val="000000"/>
+                </a:solidFill>
+                <a:latin typeface="Calibri"/>
+              </a:rPr>
+              <a:t>fraud labels arrive after 30–180 days</a:t>
             </a:r>
           </a:p>
         </p:txBody>
@@ -3976,8 +3912,8 @@
         </p:nvSpPr>
         <p:spPr>
           <a:xfrm>
-            <a:off x="640080" y="365760"/>
-            <a:ext cx="10911535" cy="731520"/>
+            <a:off x="640080" y="320040"/>
+            <a:ext cx="10911535" cy="914400"/>
           </a:xfrm>
           <a:prstGeom prst="rect">
             <a:avLst/>
@@ -3991,62 +3927,28 @@
           <a:lstStyle/>
           <a:p>
             <a:r>
-              <a:rPr sz="3200" b="1" i="0">
+              <a:rPr sz="4400" b="1" i="0">
                 <a:solidFill>
                   <a:srgbClr val="000000"/>
                 </a:solidFill>
                 <a:latin typeface="Calibri"/>
               </a:rPr>
               <a:t>Three adaptation mechanisms</a:t>
-            </a:r>
-          </a:p>
-        </p:txBody>
-      </p:sp>
-      <p:sp>
-        <p:nvSpPr>
-          <p:cNvPr id="3" name="TextBox 2"/>
-          <p:cNvSpPr txBox="1"/>
-          <p:nvPr/>
-        </p:nvSpPr>
-        <p:spPr>
-          <a:xfrm>
-            <a:off x="640080" y="1097280"/>
-            <a:ext cx="10911535" cy="411480"/>
-          </a:xfrm>
-          <a:prstGeom prst="rect">
-            <a:avLst/>
-          </a:prstGeom>
-          <a:noFill/>
-        </p:spPr>
-        <p:txBody>
-          <a:bodyPr wrap="square" lIns="0" tIns="0" bIns="0">
-            <a:spAutoFit/>
-          </a:bodyPr>
-          <a:lstStyle/>
-          <a:p>
-            <a:r>
-              <a:rPr sz="1700" b="0" i="0">
-                <a:solidFill>
-                  <a:srgbClr val="000000"/>
-                </a:solidFill>
-                <a:latin typeface="Calibri"/>
-              </a:rPr>
-              <a:t>the model's representation determines what adaptation can mean</a:t>
             </a:r>
           </a:p>
         </p:txBody>
       </p:sp>
       <p:graphicFrame>
         <p:nvGraphicFramePr>
-          <p:cNvPr id="4" name="Table 3"/>
+          <p:cNvPr id="3" name="Table 2"/>
           <p:cNvGraphicFramePr>
             <a:graphicFrameLocks noGrp="1"/>
           </p:cNvGraphicFramePr>
           <p:nvPr/>
         </p:nvGraphicFramePr>
         <p:xfrm>
-          <a:off x="640080" y="1737360"/>
-          <a:ext cx="10911534" cy="2194560"/>
+          <a:off x="640080" y="1691640"/>
+          <a:ext cx="9692638" cy="2468880"/>
         </p:xfrm>
         <a:graphic>
           <a:graphicData uri="http://schemas.openxmlformats.org/drawingml/2006/table">
@@ -4055,21 +3957,19 @@
                 <a:tableStyleId>{5C22544A-7EE6-4342-B048-85BDC9FD1C3A}</a:tableStyleId>
               </a:tblPr>
               <a:tblGrid>
-                <a:gridCol w="3499926"/>
-                <a:gridCol w="2264658"/>
-                <a:gridCol w="2264658"/>
-                <a:gridCol w="1235268"/>
-                <a:gridCol w="1647024"/>
+                <a:gridCol w="4070908"/>
+                <a:gridCol w="3295497"/>
+                <a:gridCol w="2326233"/>
               </a:tblGrid>
-              <a:tr h="548640">
-                <a:tc>
-                  <a:txBody>
-                    <a:bodyPr/>
-                    <a:lstStyle/>
-                    <a:p>
-                      <a:pPr algn="l"/>
-                      <a:r>
-                        <a:rPr sz="1700" b="1" i="0">
+              <a:tr h="617220">
+                <a:tc>
+                  <a:txBody>
+                    <a:bodyPr/>
+                    <a:lstStyle/>
+                    <a:p>
+                      <a:pPr algn="l"/>
+                      <a:r>
+                        <a:rPr sz="2400" b="1" i="0">
                           <a:solidFill>
                             <a:srgbClr val="000000"/>
                           </a:solidFill>
@@ -4092,7 +3992,7 @@
                     <a:p>
                       <a:pPr algn="l"/>
                       <a:r>
-                        <a:rPr sz="1700" b="1" i="0">
+                        <a:rPr sz="2400" b="1" i="0">
                           <a:solidFill>
                             <a:srgbClr val="000000"/>
                           </a:solidFill>
@@ -4115,53 +4015,7 @@
                     <a:p>
                       <a:pPr algn="l"/>
                       <a:r>
-                        <a:rPr sz="1700" b="1" i="0">
-                          <a:solidFill>
-                            <a:srgbClr val="000000"/>
-                          </a:solidFill>
-                          <a:latin typeface="Calibri"/>
-                        </a:rPr>
-                        <a:t>adapts by</a:t>
-                      </a:r>
-                    </a:p>
-                  </a:txBody>
-                  <a:tcPr marL="73152" marR="73152" marT="27432" marB="27432">
-                    <a:solidFill>
-                      <a:srgbClr val="FFFFFF"/>
-                    </a:solidFill>
-                  </a:tcPr>
-                </a:tc>
-                <a:tc>
-                  <a:txBody>
-                    <a:bodyPr/>
-                    <a:lstStyle/>
-                    <a:p>
-                      <a:pPr algn="l"/>
-                      <a:r>
-                        <a:rPr sz="1700" b="1" i="0">
-                          <a:solidFill>
-                            <a:srgbClr val="000000"/>
-                          </a:solidFill>
-                          <a:latin typeface="Calibri"/>
-                        </a:rPr>
-                        <a:t>in Θ?</a:t>
-                      </a:r>
-                    </a:p>
-                  </a:txBody>
-                  <a:tcPr marL="73152" marR="73152" marT="27432" marB="27432">
-                    <a:solidFill>
-                      <a:srgbClr val="FFFFFF"/>
-                    </a:solidFill>
-                  </a:tcPr>
-                </a:tc>
-                <a:tc>
-                  <a:txBody>
-                    <a:bodyPr/>
-                    <a:lstStyle/>
-                    <a:p>
-                      <a:pPr algn="l"/>
-                      <a:r>
-                        <a:rPr sz="1700" b="1" i="0">
+                        <a:rPr sz="2400" b="1" i="0">
                           <a:solidFill>
                             <a:srgbClr val="000000"/>
                           </a:solidFill>
@@ -4178,38 +4032,38 @@
                   </a:tcPr>
                 </a:tc>
               </a:tr>
-              <a:tr h="548640">
-                <a:tc>
-                  <a:txBody>
-                    <a:bodyPr/>
-                    <a:lstStyle/>
-                    <a:p>
-                      <a:pPr algn="l"/>
-                      <a:r>
-                        <a:rPr sz="1700" b="0" i="0">
-                          <a:solidFill>
-                            <a:srgbClr val="000000"/>
-                          </a:solidFill>
-                          <a:latin typeface="Calibri"/>
-                        </a:rPr>
-                        <a:t>Forgetting — kNN, SAMkNN</a:t>
-                      </a:r>
-                    </a:p>
-                  </a:txBody>
-                  <a:tcPr marL="73152" marR="73152" marT="27432" marB="27432">
-                    <a:solidFill>
-                      <a:srgbClr val="FFFFFF"/>
-                    </a:solidFill>
-                  </a:tcPr>
-                </a:tc>
-                <a:tc>
-                  <a:txBody>
-                    <a:bodyPr/>
-                    <a:lstStyle/>
-                    <a:p>
-                      <a:pPr algn="l"/>
-                      <a:r>
-                        <a:rPr sz="1700" b="0" i="0">
+              <a:tr h="617220">
+                <a:tc>
+                  <a:txBody>
+                    <a:bodyPr/>
+                    <a:lstStyle/>
+                    <a:p>
+                      <a:pPr algn="l"/>
+                      <a:r>
+                        <a:rPr sz="2400" b="0" i="0">
+                          <a:solidFill>
+                            <a:srgbClr val="000000"/>
+                          </a:solidFill>
+                          <a:latin typeface="Calibri"/>
+                        </a:rPr>
+                        <a:t>Forgetting — kNN</a:t>
+                      </a:r>
+                    </a:p>
+                  </a:txBody>
+                  <a:tcPr marL="73152" marR="73152" marT="27432" marB="27432">
+                    <a:solidFill>
+                      <a:srgbClr val="FFFFFF"/>
+                    </a:solidFill>
+                  </a:tcPr>
+                </a:tc>
+                <a:tc>
+                  <a:txBody>
+                    <a:bodyPr/>
+                    <a:lstStyle/>
+                    <a:p>
+                      <a:pPr algn="l"/>
+                      <a:r>
+                        <a:rPr sz="2400" b="0" i="0">
                           <a:solidFill>
                             <a:srgbClr val="000000"/>
                           </a:solidFill>
@@ -4232,30 +4086,7 @@
                     <a:p>
                       <a:pPr algn="l"/>
                       <a:r>
-                        <a:rPr sz="1700" b="0" i="0">
-                          <a:solidFill>
-                            <a:srgbClr val="000000"/>
-                          </a:solidFill>
-                          <a:latin typeface="Calibri"/>
-                        </a:rPr>
-                        <a:t>replacing data</a:t>
-                      </a:r>
-                    </a:p>
-                  </a:txBody>
-                  <a:tcPr marL="73152" marR="73152" marT="27432" marB="27432">
-                    <a:solidFill>
-                      <a:srgbClr val="FFFFFF"/>
-                    </a:solidFill>
-                  </a:tcPr>
-                </a:tc>
-                <a:tc>
-                  <a:txBody>
-                    <a:bodyPr/>
-                    <a:lstStyle/>
-                    <a:p>
-                      <a:pPr algn="l"/>
-                      <a:r>
-                        <a:rPr sz="1700" b="0" i="0">
+                        <a:rPr sz="2400" b="0" i="0">
                           <a:solidFill>
                             <a:srgbClr val="000000"/>
                           </a:solidFill>
@@ -4271,14 +4102,62 @@
                     </a:solidFill>
                   </a:tcPr>
                 </a:tc>
-                <a:tc>
-                  <a:txBody>
-                    <a:bodyPr/>
-                    <a:lstStyle/>
-                    <a:p>
-                      <a:pPr algn="l"/>
-                      <a:r>
-                        <a:rPr sz="1700" b="0" i="0">
+              </a:tr>
+              <a:tr h="617220">
+                <a:tc>
+                  <a:txBody>
+                    <a:bodyPr/>
+                    <a:lstStyle/>
+                    <a:p>
+                      <a:pPr algn="l"/>
+                      <a:r>
+                        <a:rPr sz="2400" b="0" i="0">
+                          <a:solidFill>
+                            <a:srgbClr val="000000"/>
+                          </a:solidFill>
+                          <a:latin typeface="Calibri"/>
+                        </a:rPr>
+                        <a:t>Detect and reset — HT</a:t>
+                      </a:r>
+                    </a:p>
+                  </a:txBody>
+                  <a:tcPr marL="73152" marR="73152" marT="27432" marB="27432">
+                    <a:solidFill>
+                      <a:srgbClr val="FFFFFF"/>
+                    </a:solidFill>
+                  </a:tcPr>
+                </a:tc>
+                <a:tc>
+                  <a:txBody>
+                    <a:bodyPr/>
+                    <a:lstStyle/>
+                    <a:p>
+                      <a:pPr algn="l"/>
+                      <a:r>
+                        <a:rPr sz="2400" b="0" i="0">
+                          <a:solidFill>
+                            <a:srgbClr val="000000"/>
+                          </a:solidFill>
+                          <a:latin typeface="Calibri"/>
+                        </a:rPr>
+                        <a:t>a structure</a:t>
+                      </a:r>
+                    </a:p>
+                  </a:txBody>
+                  <a:tcPr marL="73152" marR="73152" marT="27432" marB="27432">
+                    <a:solidFill>
+                      <a:srgbClr val="FFFFFF"/>
+                    </a:solidFill>
+                  </a:tcPr>
+                </a:tc>
+                <a:tc>
+                  <a:txBody>
+                    <a:bodyPr/>
+                    <a:lstStyle/>
+                    <a:p>
+                      <a:pPr algn="l"/>
+                      <a:r>
+                        <a:rPr sz="2400" b="0" i="0">
                           <a:solidFill>
                             <a:srgbClr val="000000"/>
                           </a:solidFill>
@@ -4295,132 +4174,15 @@
                   </a:tcPr>
                 </a:tc>
               </a:tr>
-              <a:tr h="548640">
-                <a:tc>
-                  <a:txBody>
-                    <a:bodyPr/>
-                    <a:lstStyle/>
-                    <a:p>
-                      <a:pPr algn="l"/>
-                      <a:r>
-                        <a:rPr sz="1700" b="0" i="0">
-                          <a:solidFill>
-                            <a:srgbClr val="000000"/>
-                          </a:solidFill>
-                          <a:latin typeface="Calibri"/>
-                        </a:rPr>
-                        <a:t>Detect and reset — HT, RF-HT</a:t>
-                      </a:r>
-                    </a:p>
-                  </a:txBody>
-                  <a:tcPr marL="73152" marR="73152" marT="27432" marB="27432">
-                    <a:solidFill>
-                      <a:srgbClr val="FFFFFF"/>
-                    </a:solidFill>
-                  </a:tcPr>
-                </a:tc>
-                <a:tc>
-                  <a:txBody>
-                    <a:bodyPr/>
-                    <a:lstStyle/>
-                    <a:p>
-                      <a:pPr algn="l"/>
-                      <a:r>
-                        <a:rPr sz="1700" b="0" i="0">
-                          <a:solidFill>
-                            <a:srgbClr val="000000"/>
-                          </a:solidFill>
-                          <a:latin typeface="Calibri"/>
-                        </a:rPr>
-                        <a:t>a structure</a:t>
-                      </a:r>
-                    </a:p>
-                  </a:txBody>
-                  <a:tcPr marL="73152" marR="73152" marT="27432" marB="27432">
-                    <a:solidFill>
-                      <a:srgbClr val="FFFFFF"/>
-                    </a:solidFill>
-                  </a:tcPr>
-                </a:tc>
-                <a:tc>
-                  <a:txBody>
-                    <a:bodyPr/>
-                    <a:lstStyle/>
-                    <a:p>
-                      <a:pPr algn="l"/>
-                      <a:r>
-                        <a:rPr sz="1700" b="0" i="0">
-                          <a:solidFill>
-                            <a:srgbClr val="000000"/>
-                          </a:solidFill>
-                          <a:latin typeface="Calibri"/>
-                        </a:rPr>
-                        <a:t>rebuilding it</a:t>
-                      </a:r>
-                    </a:p>
-                  </a:txBody>
-                  <a:tcPr marL="73152" marR="73152" marT="27432" marB="27432">
-                    <a:solidFill>
-                      <a:srgbClr val="FFFFFF"/>
-                    </a:solidFill>
-                  </a:tcPr>
-                </a:tc>
-                <a:tc>
-                  <a:txBody>
-                    <a:bodyPr/>
-                    <a:lstStyle/>
-                    <a:p>
-                      <a:pPr algn="l"/>
-                      <a:r>
-                        <a:rPr sz="1700" b="0" i="0">
-                          <a:solidFill>
-                            <a:srgbClr val="000000"/>
-                          </a:solidFill>
-                          <a:latin typeface="Calibri"/>
-                        </a:rPr>
-                        <a:t>no</a:t>
-                      </a:r>
-                    </a:p>
-                  </a:txBody>
-                  <a:tcPr marL="73152" marR="73152" marT="27432" marB="27432">
-                    <a:solidFill>
-                      <a:srgbClr val="FFFFFF"/>
-                    </a:solidFill>
-                  </a:tcPr>
-                </a:tc>
-                <a:tc>
-                  <a:txBody>
-                    <a:bodyPr/>
-                    <a:lstStyle/>
-                    <a:p>
-                      <a:pPr algn="l"/>
-                      <a:r>
-                        <a:rPr sz="1700" b="0" i="0">
-                          <a:solidFill>
-                            <a:srgbClr val="000000"/>
-                          </a:solidFill>
-                          <a:latin typeface="Calibri"/>
-                        </a:rPr>
-                        <a:t>no</a:t>
-                      </a:r>
-                    </a:p>
-                  </a:txBody>
-                  <a:tcPr marL="73152" marR="73152" marT="27432" marB="27432">
-                    <a:solidFill>
-                      <a:srgbClr val="FFFFFF"/>
-                    </a:solidFill>
-                  </a:tcPr>
-                </a:tc>
-              </a:tr>
-              <a:tr h="548640">
-                <a:tc>
-                  <a:txBody>
-                    <a:bodyPr/>
-                    <a:lstStyle/>
-                    <a:p>
-                      <a:pPr algn="l"/>
-                      <a:r>
-                        <a:rPr sz="1700" b="0" i="0">
+              <a:tr h="617220">
+                <a:tc>
+                  <a:txBody>
+                    <a:bodyPr/>
+                    <a:lstStyle/>
+                    <a:p>
+                      <a:pPr algn="l"/>
+                      <a:r>
+                        <a:rPr sz="2400" b="0" i="0">
                           <a:solidFill>
                             <a:srgbClr val="000000"/>
                           </a:solidFill>
@@ -4443,7 +4205,7 @@
                     <a:p>
                       <a:pPr algn="l"/>
                       <a:r>
-                        <a:rPr sz="1700" b="0" i="0">
+                        <a:rPr sz="2400" b="0" i="0">
                           <a:solidFill>
                             <a:srgbClr val="000000"/>
                           </a:solidFill>
@@ -4466,53 +4228,7 @@
                     <a:p>
                       <a:pPr algn="l"/>
                       <a:r>
-                        <a:rPr sz="1700" b="0" i="0">
-                          <a:solidFill>
-                            <a:srgbClr val="000000"/>
-                          </a:solidFill>
-                          <a:latin typeface="Calibri"/>
-                        </a:rPr>
-                        <a:t>displacing it</a:t>
-                      </a:r>
-                    </a:p>
-                  </a:txBody>
-                  <a:tcPr marL="73152" marR="73152" marT="27432" marB="27432">
-                    <a:solidFill>
-                      <a:srgbClr val="FFFFFF"/>
-                    </a:solidFill>
-                  </a:tcPr>
-                </a:tc>
-                <a:tc>
-                  <a:txBody>
-                    <a:bodyPr/>
-                    <a:lstStyle/>
-                    <a:p>
-                      <a:pPr algn="l"/>
-                      <a:r>
-                        <a:rPr sz="1700" b="0" i="0">
-                          <a:solidFill>
-                            <a:srgbClr val="000000"/>
-                          </a:solidFill>
-                          <a:latin typeface="Calibri"/>
-                        </a:rPr>
-                        <a:t>yes</a:t>
-                      </a:r>
-                    </a:p>
-                  </a:txBody>
-                  <a:tcPr marL="73152" marR="73152" marT="27432" marB="27432">
-                    <a:solidFill>
-                      <a:srgbClr val="FFFFFF"/>
-                    </a:solidFill>
-                  </a:tcPr>
-                </a:tc>
-                <a:tc>
-                  <a:txBody>
-                    <a:bodyPr/>
-                    <a:lstStyle/>
-                    <a:p>
-                      <a:pPr algn="l"/>
-                      <a:r>
-                        <a:rPr sz="1700" b="0" i="0">
+                        <a:rPr sz="2400" b="0" i="0">
                           <a:solidFill>
                             <a:srgbClr val="000000"/>
                           </a:solidFill>
@@ -4535,14 +4251,14 @@
       </p:graphicFrame>
       <p:sp>
         <p:nvSpPr>
-          <p:cNvPr id="5" name="TextBox 4"/>
+          <p:cNvPr id="4" name="TextBox 3"/>
           <p:cNvSpPr txBox="1"/>
           <p:nvPr/>
         </p:nvSpPr>
         <p:spPr>
           <a:xfrm>
-            <a:off x="640080" y="4206240"/>
-            <a:ext cx="10911535" cy="2194560"/>
+            <a:off x="640080" y="4480560"/>
+            <a:ext cx="10911535" cy="1920239"/>
           </a:xfrm>
           <a:prstGeom prst="rect">
             <a:avLst/>
@@ -4557,81 +4273,49 @@
           <a:p>
             <a:pPr>
               <a:spcAft>
-                <a:spcPts val="700"/>
+                <a:spcPts val="800"/>
               </a:spcAft>
             </a:pPr>
             <a:r>
-              <a:rPr sz="1700" b="1" i="0">
-                <a:solidFill>
-                  <a:srgbClr val="000000"/>
-                </a:solidFill>
-                <a:latin typeface="Calibri"/>
-              </a:rPr>
-              <a:t>A tree admits no Δθ. Its parameters form a discrete structure, so no small</a:t>
+              <a:rPr sz="2700" b="1" i="0">
+                <a:solidFill>
+                  <a:srgbClr val="000000"/>
+                </a:solidFill>
+                <a:latin typeface="Calibri"/>
+              </a:rPr>
+              <a:t>A tree admits no Δθ.</a:t>
             </a:r>
           </a:p>
           <a:p>
             <a:pPr>
               <a:spcAft>
-                <a:spcPts val="700"/>
+                <a:spcPts val="800"/>
               </a:spcAft>
             </a:pPr>
             <a:r>
-              <a:rPr sz="1700" b="0" i="0">
-                <a:solidFill>
-                  <a:srgbClr val="000000"/>
-                </a:solidFill>
-                <a:latin typeface="Calibri"/>
-              </a:rPr>
-              <a:t>displacement exists; it can only be grown or destroyed. A buffer is equivalent: the</a:t>
+              <a:rPr sz="2700" b="0" i="0">
+                <a:solidFill>
+                  <a:srgbClr val="000000"/>
+                </a:solidFill>
+                <a:latin typeface="Calibri"/>
+              </a:rPr>
+              <a:t>Its parameters are discrete, so no small displacement</a:t>
             </a:r>
           </a:p>
           <a:p>
             <a:pPr>
               <a:spcAft>
-                <a:spcPts val="700"/>
+                <a:spcPts val="800"/>
               </a:spcAft>
             </a:pPr>
             <a:r>
-              <a:rPr sz="1700" b="0" i="0">
-                <a:solidFill>
-                  <a:srgbClr val="000000"/>
-                </a:solidFill>
-                <a:latin typeface="Calibri"/>
-              </a:rPr>
-              <a:t>model is the stored data, and adaptation means replacing it.</a:t>
-            </a:r>
-          </a:p>
-          <a:p>
-            <a:pPr>
-              <a:spcAft>
-                <a:spcPts val="700"/>
-              </a:spcAft>
-            </a:pPr>
-            <a:r>
-              <a:rPr sz="1700" b="0" i="0">
-                <a:solidFill>
-                  <a:srgbClr val="000000"/>
-                </a:solidFill>
-                <a:latin typeface="Calibri"/>
-              </a:rPr>
-              <a:t>Only a model whose parameters occupy a continuous space can be displaced slightly,</a:t>
-            </a:r>
-          </a:p>
-          <a:p>
-            <a:pPr>
-              <a:spcAft>
-                <a:spcPts val="700"/>
-              </a:spcAft>
-            </a:pPr>
-            <a:r>
-              <a:rPr sz="1700" b="0" i="0">
-                <a:solidFill>
-                  <a:srgbClr val="000000"/>
-                </a:solidFill>
-                <a:latin typeface="Calibri"/>
-              </a:rPr>
-              <a:t>which is the premise of the argument in §3.</a:t>
+              <a:rPr sz="2700" b="0" i="0">
+                <a:solidFill>
+                  <a:srgbClr val="000000"/>
+                </a:solidFill>
+                <a:latin typeface="Calibri"/>
+              </a:rPr>
+              <a:t>exists. Only a continuous parameter can be tracked.</a:t>
             </a:r>
           </a:p>
         </p:txBody>
@@ -4678,7 +4362,7 @@
           <a:p>
             <a:pPr algn="l"/>
             <a:r>
-              <a:rPr sz="3600" b="1" i="0">
+              <a:rPr sz="4400" b="1" i="0">
                 <a:solidFill>
                   <a:srgbClr val="000000"/>
                 </a:solidFill>
@@ -4697,8 +4381,8 @@
         </p:nvSpPr>
         <p:spPr>
           <a:xfrm>
-            <a:off x="640080" y="3566160"/>
-            <a:ext cx="10911535" cy="2834640"/>
+            <a:off x="640080" y="3657600"/>
+            <a:ext cx="10911535" cy="2743200"/>
           </a:xfrm>
           <a:prstGeom prst="rect">
             <a:avLst/>
@@ -4713,17 +4397,17 @@
           <a:p>
             <a:pPr>
               <a:spcAft>
-                <a:spcPts val="1000"/>
+                <a:spcPts val="1400"/>
               </a:spcAft>
             </a:pPr>
             <a:r>
-              <a:rPr sz="1800" b="0" i="0">
-                <a:solidFill>
-                  <a:srgbClr val="000000"/>
-                </a:solidFill>
-                <a:latin typeface="Calibri"/>
-              </a:rPr>
-              <a:t>arXiv:1810.02266 — Concept-drifting Data Streams are Time Series</a:t>
+              <a:rPr sz="2400" b="0" i="0">
+                <a:solidFill>
+                  <a:srgbClr val="000000"/>
+                </a:solidFill>
+                <a:latin typeface="Calibri"/>
+              </a:rPr>
+              <a:t>Concept-drifting Data Streams are Time Series.</a:t>
             </a:r>
           </a:p>
         </p:txBody>
@@ -4754,8 +4438,8 @@
         </p:nvSpPr>
         <p:spPr>
           <a:xfrm>
-            <a:off x="640080" y="365760"/>
-            <a:ext cx="10911535" cy="731520"/>
+            <a:off x="640080" y="320040"/>
+            <a:ext cx="10911535" cy="914400"/>
           </a:xfrm>
           <a:prstGeom prst="rect">
             <a:avLst/>
@@ -4769,7 +4453,7 @@
           <a:lstStyle/>
           <a:p>
             <a:r>
-              <a:rPr sz="3200" b="1" i="0">
+              <a:rPr sz="4400" b="1" i="0">
                 <a:solidFill>
                   <a:srgbClr val="000000"/>
                 </a:solidFill>
@@ -4783,40 +4467,6 @@
       <p:sp>
         <p:nvSpPr>
           <p:cNvPr id="3" name="TextBox 2"/>
-          <p:cNvSpPr txBox="1"/>
-          <p:nvPr/>
-        </p:nvSpPr>
-        <p:spPr>
-          <a:xfrm>
-            <a:off x="640080" y="1097280"/>
-            <a:ext cx="10911535" cy="411480"/>
-          </a:xfrm>
-          <a:prstGeom prst="rect">
-            <a:avLst/>
-          </a:prstGeom>
-          <a:noFill/>
-        </p:spPr>
-        <p:txBody>
-          <a:bodyPr wrap="square" lIns="0" tIns="0" bIns="0">
-            <a:spAutoFit/>
-          </a:bodyPr>
-          <a:lstStyle/>
-          <a:p>
-            <a:r>
-              <a:rPr sz="1700" b="0" i="0">
-                <a:solidFill>
-                  <a:srgbClr val="000000"/>
-                </a:solidFill>
-                <a:latin typeface="Calibri"/>
-              </a:rPr>
-              <a:t>Lemma 1, and the failure of the asymptotic objection</a:t>
-            </a:r>
-          </a:p>
-        </p:txBody>
-      </p:sp>
-      <p:sp>
-        <p:nvSpPr>
-          <p:cNvPr id="4" name="TextBox 3"/>
           <p:cNvSpPr txBox="1"/>
           <p:nvPr/>
         </p:nvSpPr>
@@ -4838,59 +4488,27 @@
           <a:p>
             <a:pPr>
               <a:spcAft>
-                <a:spcPts val="600"/>
+                <a:spcPts val="1000"/>
               </a:spcAft>
             </a:pPr>
             <a:r>
-              <a:rPr sz="1700" b="0" i="0">
-                <a:solidFill>
-                  <a:srgbClr val="000000"/>
-                </a:solidFill>
-                <a:latin typeface="Calibri"/>
-              </a:rPr>
-              <a:t>The literature assumes instances are i.i.d. within a concept and treats drift as an</a:t>
+              <a:rPr sz="2800" b="1" i="0">
+                <a:solidFill>
+                  <a:srgbClr val="000000"/>
+                </a:solidFill>
+                <a:latin typeface="Calibri"/>
+              </a:rPr>
+              <a:t>Lemma 1.  Drift implies temporal dependence.</a:t>
             </a:r>
           </a:p>
           <a:p>
             <a:pPr>
               <a:spcAft>
-                <a:spcPts val="600"/>
+                <a:spcPts val="1000"/>
               </a:spcAft>
             </a:pPr>
             <a:r>
-              <a:rPr sz="1700" b="0" i="0">
-                <a:solidFill>
-                  <a:srgbClr val="000000"/>
-                </a:solidFill>
-                <a:latin typeface="Calibri"/>
-              </a:rPr>
-              <a:t>event to detect, so that an i.i.d. model may be reset and redeployed.</a:t>
-            </a:r>
-          </a:p>
-          <a:p>
-            <a:pPr>
-              <a:spcAft>
-                <a:spcPts val="600"/>
-              </a:spcAft>
-            </a:pPr>
-            <a:r>
-              <a:rPr sz="1700" b="1" i="0">
-                <a:solidFill>
-                  <a:srgbClr val="000000"/>
-                </a:solidFill>
-                <a:latin typeface="Calibri"/>
-              </a:rPr>
-              <a:t>Lemma 1.  A stream exhibiting concept drift exhibits temporal dependence.</a:t>
-            </a:r>
-          </a:p>
-          <a:p>
-            <a:pPr>
-              <a:spcAft>
-                <a:spcPts val="600"/>
-              </a:spcAft>
-            </a:pPr>
-            <a:r>
-              <a:rPr sz="1700" b="0" i="0">
+              <a:rPr sz="2800" b="0" i="0">
                 <a:solidFill>
                   <a:srgbClr val="000000"/>
                 </a:solidFill>
@@ -4899,7 +4517,7 @@
               <a:t>Independence would require P(C</a:t>
             </a:r>
             <a:r>
-              <a:rPr sz="1224" b="0" i="0" baseline="-25000">
+              <a:rPr sz="2016" b="0" i="0" baseline="-25000">
                 <a:solidFill>
                   <a:srgbClr val="000000"/>
                 </a:solidFill>
@@ -4908,7 +4526,7 @@
               <a:t>t</a:t>
             </a:r>
             <a:r>
-              <a:rPr sz="1700" b="0" i="0">
+              <a:rPr sz="2800" b="0" i="0">
                 <a:solidFill>
                   <a:srgbClr val="000000"/>
                 </a:solidFill>
@@ -4917,7 +4535,7 @@
               <a:t>) = P(C</a:t>
             </a:r>
             <a:r>
-              <a:rPr sz="1224" b="0" i="0" baseline="-25000">
+              <a:rPr sz="2016" b="0" i="0" baseline="-25000">
                 <a:solidFill>
                   <a:srgbClr val="000000"/>
                 </a:solidFill>
@@ -4926,7 +4544,7 @@
               <a:t>t</a:t>
             </a:r>
             <a:r>
-              <a:rPr sz="1700" b="0" i="0">
+              <a:rPr sz="2800" b="0" i="0">
                 <a:solidFill>
                   <a:srgbClr val="000000"/>
                 </a:solidFill>
@@ -4935,7 +4553,7 @@
               <a:t> | C</a:t>
             </a:r>
             <a:r>
-              <a:rPr sz="1224" b="0" i="0" baseline="-25000">
+              <a:rPr sz="2016" b="0" i="0" baseline="-25000">
                 <a:solidFill>
                   <a:srgbClr val="000000"/>
                 </a:solidFill>
@@ -4944,43 +4562,27 @@
               <a:t>t−1</a:t>
             </a:r>
             <a:r>
-              <a:rPr sz="1700" b="0" i="0">
-                <a:solidFill>
-                  <a:srgbClr val="000000"/>
-                </a:solidFill>
-                <a:latin typeface="Calibri"/>
-              </a:rPr>
-              <a:t>). Measured on a 20-step stream</a:t>
-            </a:r>
-          </a:p>
-          <a:p>
-            <a:pPr>
-              <a:spcAft>
-                <a:spcPts val="600"/>
-              </a:spcAft>
-            </a:pPr>
-            <a:r>
-              <a:rPr sz="1700" b="0" i="0">
-                <a:solidFill>
-                  <a:srgbClr val="000000"/>
-                </a:solidFill>
-                <a:latin typeface="Calibri"/>
-              </a:rPr>
-              <a:t>with change point τ = 10:</a:t>
-            </a:r>
-          </a:p>
-        </p:txBody>
-      </p:sp>
-      <p:sp>
-        <p:nvSpPr>
-          <p:cNvPr id="5" name="TextBox 4"/>
+              <a:rPr sz="2800" b="0" i="0">
+                <a:solidFill>
+                  <a:srgbClr val="000000"/>
+                </a:solidFill>
+                <a:latin typeface="Calibri"/>
+              </a:rPr>
+              <a:t>):</a:t>
+            </a:r>
+          </a:p>
+        </p:txBody>
+      </p:sp>
+      <p:sp>
+        <p:nvSpPr>
+          <p:cNvPr id="4" name="TextBox 3"/>
           <p:cNvSpPr txBox="1"/>
           <p:nvPr/>
         </p:nvSpPr>
         <p:spPr>
           <a:xfrm>
-            <a:off x="640080" y="3840480"/>
-            <a:ext cx="10911535" cy="566928"/>
+            <a:off x="640080" y="3017520"/>
+            <a:ext cx="10911535" cy="731520"/>
           </a:xfrm>
           <a:prstGeom prst="rect">
             <a:avLst/>
@@ -4994,7 +4596,7 @@
           <a:lstStyle/>
           <a:p>
             <a:r>
-              <a:rPr sz="2400" b="0" i="1">
+              <a:rPr sz="3000" b="0" i="1">
                 <a:solidFill>
                   <a:srgbClr val="000000"/>
                 </a:solidFill>
@@ -5003,7 +4605,7 @@
               <a:t>P(C</a:t>
             </a:r>
             <a:r>
-              <a:rPr sz="1728" b="0" i="1" baseline="-25000">
+              <a:rPr sz="2160" b="0" i="1" baseline="-25000">
                 <a:solidFill>
                   <a:srgbClr val="000000"/>
                 </a:solidFill>
@@ -5012,16 +4614,16 @@
               <a:t>t</a:t>
             </a:r>
             <a:r>
-              <a:rPr sz="2400" b="0" i="1">
+              <a:rPr sz="3000" b="0" i="1">
                 <a:solidFill>
                   <a:srgbClr val="000000"/>
                 </a:solidFill>
                 <a:latin typeface="Cambria Math"/>
               </a:rPr>
-              <a:t> = 0) = 0.450          P(C</a:t>
-            </a:r>
-            <a:r>
-              <a:rPr sz="1728" b="0" i="1" baseline="-25000">
+              <a:t>=0) = 0.450      P(C</a:t>
+            </a:r>
+            <a:r>
+              <a:rPr sz="2160" b="0" i="1" baseline="-25000">
                 <a:solidFill>
                   <a:srgbClr val="000000"/>
                 </a:solidFill>
@@ -5030,16 +4632,16 @@
               <a:t>t</a:t>
             </a:r>
             <a:r>
-              <a:rPr sz="2400" b="0" i="1">
+              <a:rPr sz="3000" b="0" i="1">
                 <a:solidFill>
                   <a:srgbClr val="000000"/>
                 </a:solidFill>
                 <a:latin typeface="Cambria Math"/>
               </a:rPr>
-              <a:t> = 0 | C</a:t>
-            </a:r>
-            <a:r>
-              <a:rPr sz="1728" b="0" i="1" baseline="-25000">
+              <a:t>=0 | C</a:t>
+            </a:r>
+            <a:r>
+              <a:rPr sz="2160" b="0" i="1" baseline="-25000">
                 <a:solidFill>
                   <a:srgbClr val="000000"/>
                 </a:solidFill>
@@ -5048,27 +4650,27 @@
               <a:t>t−1</a:t>
             </a:r>
             <a:r>
-              <a:rPr sz="2400" b="0" i="1">
+              <a:rPr sz="3000" b="0" i="1">
                 <a:solidFill>
                   <a:srgbClr val="000000"/>
                 </a:solidFill>
                 <a:latin typeface="Cambria Math"/>
               </a:rPr>
-              <a:t> = 1) = 0.000</a:t>
-            </a:r>
-          </a:p>
-        </p:txBody>
-      </p:sp>
-      <p:sp>
-        <p:nvSpPr>
-          <p:cNvPr id="6" name="TextBox 5"/>
+              <a:t>=1) = 0.000</a:t>
+            </a:r>
+          </a:p>
+        </p:txBody>
+      </p:sp>
+      <p:sp>
+        <p:nvSpPr>
+          <p:cNvPr id="5" name="TextBox 4"/>
           <p:cNvSpPr txBox="1"/>
           <p:nvPr/>
         </p:nvSpPr>
         <p:spPr>
           <a:xfrm>
-            <a:off x="640080" y="4617720"/>
-            <a:ext cx="10911535" cy="1783080"/>
+            <a:off x="640080" y="4114800"/>
+            <a:ext cx="10911535" cy="2286000"/>
           </a:xfrm>
           <a:prstGeom prst="rect">
             <a:avLst/>
@@ -5083,65 +4685,67 @@
           <a:p>
             <a:pPr>
               <a:spcAft>
-                <a:spcPts val="600"/>
+                <a:spcPts val="1000"/>
               </a:spcAft>
             </a:pPr>
             <a:r>
-              <a:rPr sz="1700" b="0" i="0">
-                <a:solidFill>
-                  <a:srgbClr val="000000"/>
-                </a:solidFill>
-                <a:latin typeface="Calibri"/>
-              </a:rPr>
-              <a:t>The objection is that the concept indicator becomes constant as t grows.</a:t>
+              <a:rPr sz="2800" b="1" i="0">
+                <a:solidFill>
+                  <a:srgbClr val="000000"/>
+                </a:solidFill>
+                <a:latin typeface="Calibri"/>
+              </a:rPr>
+              <a:t>The change point τ is not observed.</a:t>
             </a:r>
           </a:p>
           <a:p>
             <a:pPr>
               <a:spcAft>
-                <a:spcPts val="600"/>
+                <a:spcPts val="1000"/>
               </a:spcAft>
             </a:pPr>
             <a:r>
-              <a:rPr sz="1700" b="1" i="0">
-                <a:solidFill>
-                  <a:srgbClr val="000000"/>
-                </a:solidFill>
-                <a:latin typeface="Calibri"/>
-              </a:rPr>
-              <a:t>The reply is that τ is not observed. Knowledge of τ would permit partitioning the</a:t>
+              <a:rPr sz="2800" b="0" i="0">
+                <a:solidFill>
+                  <a:srgbClr val="000000"/>
+                </a:solidFill>
+                <a:latin typeface="Calibri"/>
+              </a:rPr>
+              <a:t>Knowing τ would permit partitioning the stream;</a:t>
             </a:r>
           </a:p>
           <a:p>
             <a:pPr>
               <a:spcAft>
-                <a:spcPts val="600"/>
+                <a:spcPts val="1000"/>
               </a:spcAft>
             </a:pPr>
             <a:r>
-              <a:rPr sz="1700" b="0" i="0">
-                <a:solidFill>
-                  <a:srgbClr val="000000"/>
-                </a:solidFill>
-                <a:latin typeface="Calibri"/>
-              </a:rPr>
-              <a:t>stream and treating each side as i.i.d.; absent it, an instantaneous change appears</a:t>
-            </a:r>
-          </a:p>
-          <a:p>
-            <a:pPr>
-              <a:spcAft>
-                <a:spcPts val="600"/>
-              </a:spcAft>
-            </a:pPr>
-            <a:r>
-              <a:rPr sz="1700" b="0" i="0">
-                <a:solidFill>
-                  <a:srgbClr val="000000"/>
-                </a:solidFill>
-                <a:latin typeface="Calibri"/>
-              </a:rPr>
-              <a:t>as dependence in the error signal over many instances.</a:t>
+              <a:rPr sz="2800" b="0" i="0">
+                <a:solidFill>
+                  <a:srgbClr val="000000"/>
+                </a:solidFill>
+                <a:latin typeface="Calibri"/>
+              </a:rPr>
+              <a:t>absent it, a jump appears as dependence in E</a:t>
+            </a:r>
+            <a:r>
+              <a:rPr sz="2016" b="0" i="0" baseline="-25000">
+                <a:solidFill>
+                  <a:srgbClr val="000000"/>
+                </a:solidFill>
+                <a:latin typeface="Calibri"/>
+              </a:rPr>
+              <a:t>t</a:t>
+            </a:r>
+            <a:r>
+              <a:rPr sz="2800" b="0" i="0">
+                <a:solidFill>
+                  <a:srgbClr val="000000"/>
+                </a:solidFill>
+                <a:latin typeface="Calibri"/>
+              </a:rPr>
+              <a:t>.</a:t>
             </a:r>
           </a:p>
         </p:txBody>
@@ -5172,8 +4776,8 @@
         </p:nvSpPr>
         <p:spPr>
           <a:xfrm>
-            <a:off x="640080" y="365760"/>
-            <a:ext cx="10911535" cy="731520"/>
+            <a:off x="640080" y="320040"/>
+            <a:ext cx="10911535" cy="914400"/>
           </a:xfrm>
           <a:prstGeom prst="rect">
             <a:avLst/>
@@ -5187,7 +4791,7 @@
           <a:lstStyle/>
           <a:p>
             <a:r>
-              <a:rPr sz="3200" b="1" i="0">
+              <a:rPr sz="4400" b="1" i="0">
                 <a:solidFill>
                   <a:srgbClr val="000000"/>
                 </a:solidFill>
@@ -5206,8 +4810,8 @@
         </p:nvSpPr>
         <p:spPr>
           <a:xfrm>
-            <a:off x="640080" y="1097280"/>
-            <a:ext cx="10911535" cy="411480"/>
+            <a:off x="640080" y="1298448"/>
+            <a:ext cx="10911535" cy="457200"/>
           </a:xfrm>
           <a:prstGeom prst="rect">
             <a:avLst/>
@@ -5221,13 +4825,13 @@
           <a:lstStyle/>
           <a:p>
             <a:r>
-              <a:rPr sz="1700" b="0" i="0">
-                <a:solidFill>
-                  <a:srgbClr val="000000"/>
-                </a:solidFill>
-                <a:latin typeface="Calibri"/>
-              </a:rPr>
-              <a:t>a concept is a point θ ∈ Θ; drift is a path through Θ</a:t>
+              <a:rPr sz="2200" b="0" i="0">
+                <a:solidFill>
+                  <a:srgbClr val="000000"/>
+                </a:solidFill>
+                <a:latin typeface="Calibri"/>
+              </a:rPr>
+              <a:t>a concept is a point θ ∈ Θ</a:t>
             </a:r>
           </a:p>
         </p:txBody>
@@ -5241,8 +4845,8 @@
           <p:nvPr/>
         </p:nvGraphicFramePr>
         <p:xfrm>
-          <a:off x="640080" y="1691640"/>
-          <a:ext cx="10911534" cy="2377440"/>
+          <a:off x="640080" y="2057400"/>
+          <a:ext cx="8595360" cy="2651760"/>
         </p:xfrm>
         <a:graphic>
           <a:graphicData uri="http://schemas.openxmlformats.org/drawingml/2006/table">
@@ -5251,19 +4855,19 @@
                 <a:tableStyleId>{5C22544A-7EE6-4342-B048-85BDC9FD1C3A}</a:tableStyleId>
               </a:tblPr>
               <a:tblGrid>
-                <a:gridCol w="1818589"/>
-                <a:gridCol w="5455767"/>
-                <a:gridCol w="3637178"/>
+                <a:gridCol w="2483104"/>
+                <a:gridCol w="4202176"/>
+                <a:gridCol w="1910080"/>
               </a:tblGrid>
-              <a:tr h="475488">
-                <a:tc>
-                  <a:txBody>
-                    <a:bodyPr/>
-                    <a:lstStyle/>
-                    <a:p>
-                      <a:pPr algn="l"/>
-                      <a:r>
-                        <a:rPr sz="1700" b="1" i="0">
+              <a:tr h="530352">
+                <a:tc>
+                  <a:txBody>
+                    <a:bodyPr/>
+                    <a:lstStyle/>
+                    <a:p>
+                      <a:pPr algn="l"/>
+                      <a:r>
+                        <a:rPr sz="2400" b="1" i="0">
                           <a:solidFill>
                             <a:srgbClr val="000000"/>
                           </a:solidFill>
@@ -5286,7 +4890,7 @@
                     <a:p>
                       <a:pPr algn="l"/>
                       <a:r>
-                        <a:rPr sz="1700" b="1" i="0">
+                        <a:rPr sz="2400" b="1" i="0">
                           <a:solidFill>
                             <a:srgbClr val="000000"/>
                           </a:solidFill>
@@ -5309,13 +4913,13 @@
                     <a:p>
                       <a:pPr algn="l"/>
                       <a:r>
-                        <a:rPr sz="1700" b="1" i="0">
-                          <a:solidFill>
-                            <a:srgbClr val="000000"/>
-                          </a:solidFill>
-                          <a:latin typeface="Calibri"/>
-                        </a:rPr>
-                        <a:t>path to follow?</a:t>
+                        <a:rPr sz="2400" b="1" i="0">
+                          <a:solidFill>
+                            <a:srgbClr val="000000"/>
+                          </a:solidFill>
+                          <a:latin typeface="Calibri"/>
+                        </a:rPr>
+                        <a:t>path?</a:t>
                       </a:r>
                     </a:p>
                   </a:txBody>
@@ -5326,15 +4930,15 @@
                   </a:tcPr>
                 </a:tc>
               </a:tr>
-              <a:tr h="475488">
-                <a:tc>
-                  <a:txBody>
-                    <a:bodyPr/>
-                    <a:lstStyle/>
-                    <a:p>
-                      <a:pPr algn="l"/>
-                      <a:r>
-                        <a:rPr sz="1700" b="0" i="0">
+              <a:tr h="530352">
+                <a:tc>
+                  <a:txBody>
+                    <a:bodyPr/>
+                    <a:lstStyle/>
+                    <a:p>
+                      <a:pPr algn="l"/>
+                      <a:r>
+                        <a:rPr sz="2400" b="0" i="0">
                           <a:solidFill>
                             <a:srgbClr val="000000"/>
                           </a:solidFill>
@@ -5357,36 +4961,36 @@
                     <a:p>
                       <a:pPr algn="l"/>
                       <a:r>
-                        <a:rPr sz="1700" b="0" i="0">
-                          <a:solidFill>
-                            <a:srgbClr val="000000"/>
-                          </a:solidFill>
-                          <a:latin typeface="Calibri"/>
-                        </a:rPr>
-                        <a:t>θ resampled from the prior at τ</a:t>
-                      </a:r>
-                    </a:p>
-                  </a:txBody>
-                  <a:tcPr marL="73152" marR="73152" marT="27432" marB="27432">
-                    <a:solidFill>
-                      <a:srgbClr val="FFFFFF"/>
-                    </a:solidFill>
-                  </a:tcPr>
-                </a:tc>
-                <a:tc>
-                  <a:txBody>
-                    <a:bodyPr/>
-                    <a:lstStyle/>
-                    <a:p>
-                      <a:pPr algn="l"/>
-                      <a:r>
-                        <a:rPr sz="1700" b="0" i="0">
-                          <a:solidFill>
-                            <a:srgbClr val="000000"/>
-                          </a:solidFill>
-                          <a:latin typeface="Calibri"/>
-                        </a:rPr>
-                        <a:t>no — a discontinuity</a:t>
+                        <a:rPr sz="2400" b="0" i="0">
+                          <a:solidFill>
+                            <a:srgbClr val="000000"/>
+                          </a:solidFill>
+                          <a:latin typeface="Calibri"/>
+                        </a:rPr>
+                        <a:t>θ resampled at τ</a:t>
+                      </a:r>
+                    </a:p>
+                  </a:txBody>
+                  <a:tcPr marL="73152" marR="73152" marT="27432" marB="27432">
+                    <a:solidFill>
+                      <a:srgbClr val="FFFFFF"/>
+                    </a:solidFill>
+                  </a:tcPr>
+                </a:tc>
+                <a:tc>
+                  <a:txBody>
+                    <a:bodyPr/>
+                    <a:lstStyle/>
+                    <a:p>
+                      <a:pPr algn="l"/>
+                      <a:r>
+                        <a:rPr sz="2400" b="0" i="0">
+                          <a:solidFill>
+                            <a:srgbClr val="000000"/>
+                          </a:solidFill>
+                          <a:latin typeface="Calibri"/>
+                        </a:rPr>
+                        <a:t>no</a:t>
                       </a:r>
                     </a:p>
                   </a:txBody>
@@ -5397,15 +5001,15 @@
                   </a:tcPr>
                 </a:tc>
               </a:tr>
-              <a:tr h="475488">
-                <a:tc>
-                  <a:txBody>
-                    <a:bodyPr/>
-                    <a:lstStyle/>
-                    <a:p>
-                      <a:pPr algn="l"/>
-                      <a:r>
-                        <a:rPr sz="1700" b="0" i="0">
+              <a:tr h="530352">
+                <a:tc>
+                  <a:txBody>
+                    <a:bodyPr/>
+                    <a:lstStyle/>
+                    <a:p>
+                      <a:pPr algn="l"/>
+                      <a:r>
+                        <a:rPr sz="2400" b="0" i="0">
                           <a:solidFill>
                             <a:srgbClr val="000000"/>
                           </a:solidFill>
@@ -5428,7 +5032,7 @@
                     <a:p>
                       <a:pPr algn="l"/>
                       <a:r>
-                        <a:rPr sz="1700" b="0" i="0">
+                        <a:rPr sz="2400" b="0" i="0">
                           <a:solidFill>
                             <a:srgbClr val="000000"/>
                           </a:solidFill>
@@ -5437,7 +5041,7 @@
                         <a:t>θ</a:t>
                       </a:r>
                       <a:r>
-                        <a:rPr sz="1224" b="0" i="0" baseline="-25000">
+                        <a:rPr sz="1728" b="0" i="0" baseline="-25000">
                           <a:solidFill>
                             <a:srgbClr val="000000"/>
                           </a:solidFill>
@@ -5446,7 +5050,7 @@
                         <a:t>t</a:t>
                       </a:r>
                       <a:r>
-                        <a:rPr sz="1700" b="0" i="0">
+                        <a:rPr sz="2400" b="0" i="0">
                           <a:solidFill>
                             <a:srgbClr val="000000"/>
                           </a:solidFill>
@@ -5455,7 +5059,7 @@
                         <a:t> = A</a:t>
                       </a:r>
                       <a:r>
-                        <a:rPr sz="1224" b="0" i="0" baseline="30000">
+                        <a:rPr sz="1728" b="0" i="0" baseline="30000">
                           <a:solidFill>
                             <a:srgbClr val="000000"/>
                           </a:solidFill>
@@ -5464,7 +5068,7 @@
                         <a:t>⊤</a:t>
                       </a:r>
                       <a:r>
-                        <a:rPr sz="1700" b="0" i="0">
+                        <a:rPr sz="2400" b="0" i="0">
                           <a:solidFill>
                             <a:srgbClr val="000000"/>
                           </a:solidFill>
@@ -5473,7 +5077,7 @@
                         <a:t>θ</a:t>
                       </a:r>
                       <a:r>
-                        <a:rPr sz="1224" b="0" i="0" baseline="-25000">
+                        <a:rPr sz="1728" b="0" i="0" baseline="-25000">
                           <a:solidFill>
                             <a:srgbClr val="000000"/>
                           </a:solidFill>
@@ -5481,31 +5085,22 @@
                         </a:rPr>
                         <a:t>t−1</a:t>
                       </a:r>
-                      <a:r>
-                        <a:rPr sz="1700" b="0" i="0">
-                          <a:solidFill>
-                            <a:srgbClr val="000000"/>
-                          </a:solidFill>
-                          <a:latin typeface="Calibri"/>
-                        </a:rPr>
-                        <a:t>, a rotation of 0.01 rad</a:t>
-                      </a:r>
-                    </a:p>
-                  </a:txBody>
-                  <a:tcPr marL="73152" marR="73152" marT="27432" marB="27432">
-                    <a:solidFill>
-                      <a:srgbClr val="FFFFFF"/>
-                    </a:solidFill>
-                  </a:tcPr>
-                </a:tc>
-                <a:tc>
-                  <a:txBody>
-                    <a:bodyPr/>
-                    <a:lstStyle/>
-                    <a:p>
-                      <a:pPr algn="l"/>
-                      <a:r>
-                        <a:rPr sz="1700" b="0" i="0">
+                    </a:p>
+                  </a:txBody>
+                  <a:tcPr marL="73152" marR="73152" marT="27432" marB="27432">
+                    <a:solidFill>
+                      <a:srgbClr val="FFFFFF"/>
+                    </a:solidFill>
+                  </a:tcPr>
+                </a:tc>
+                <a:tc>
+                  <a:txBody>
+                    <a:bodyPr/>
+                    <a:lstStyle/>
+                    <a:p>
+                      <a:pPr algn="l"/>
+                      <a:r>
+                        <a:rPr sz="2400" b="0" i="0">
                           <a:solidFill>
                             <a:srgbClr val="000000"/>
                           </a:solidFill>
@@ -5522,15 +5117,15 @@
                   </a:tcPr>
                 </a:tc>
               </a:tr>
-              <a:tr h="475488">
-                <a:tc>
-                  <a:txBody>
-                    <a:bodyPr/>
-                    <a:lstStyle/>
-                    <a:p>
-                      <a:pPr algn="l"/>
-                      <a:r>
-                        <a:rPr sz="1700" b="0" i="0">
+              <a:tr h="530352">
+                <a:tc>
+                  <a:txBody>
+                    <a:bodyPr/>
+                    <a:lstStyle/>
+                    <a:p>
+                      <a:pPr algn="l"/>
+                      <a:r>
+                        <a:rPr sz="2400" b="0" i="0">
                           <a:solidFill>
                             <a:srgbClr val="000000"/>
                           </a:solidFill>
@@ -5553,39 +5148,16 @@
                     <a:p>
                       <a:pPr algn="l"/>
                       <a:r>
-                        <a:rPr sz="1700" b="0" i="0">
-                          <a:solidFill>
-                            <a:srgbClr val="000000"/>
-                          </a:solidFill>
-                          <a:latin typeface="Calibri"/>
-                        </a:rPr>
-                        <a:t>θ alternates between two fixed points</a:t>
-                      </a:r>
-                    </a:p>
-                  </a:txBody>
-                  <a:tcPr marL="73152" marR="73152" marT="27432" marB="27432">
-                    <a:solidFill>
-                      <a:srgbClr val="FFFFFF"/>
-                    </a:solidFill>
-                  </a:tcPr>
-                </a:tc>
-                <a:tc>
-                  <a:txBody>
-                    <a:bodyPr/>
-                    <a:lstStyle/>
-                    <a:p>
-                      <a:pPr algn="l"/>
-                      <a:r>
-                        <a:rPr sz="1700" b="0" i="0">
-                          <a:solidFill>
-                            <a:srgbClr val="000000"/>
-                          </a:solidFill>
-                          <a:latin typeface="Calibri"/>
-                        </a:rPr>
-                        <a:t>no — α</a:t>
-                      </a:r>
-                      <a:r>
-                        <a:rPr sz="1224" b="0" i="0" baseline="-25000">
+                        <a:rPr sz="2400" b="0" i="0">
+                          <a:solidFill>
+                            <a:srgbClr val="000000"/>
+                          </a:solidFill>
+                          <a:latin typeface="Calibri"/>
+                        </a:rPr>
+                        <a:t>θ alternates; α</a:t>
+                      </a:r>
+                      <a:r>
+                        <a:rPr sz="1728" b="0" i="0" baseline="-25000">
                           <a:solidFill>
                             <a:srgbClr val="000000"/>
                           </a:solidFill>
@@ -5594,13 +5166,36 @@
                         <a:t>t</a:t>
                       </a:r>
                       <a:r>
-                        <a:rPr sz="1700" b="0" i="0">
-                          <a:solidFill>
-                            <a:srgbClr val="000000"/>
-                          </a:solidFill>
-                          <a:latin typeface="Calibri"/>
-                        </a:rPr>
-                        <a:t> evolves, not θ</a:t>
+                        <a:rPr sz="2400" b="0" i="0">
+                          <a:solidFill>
+                            <a:srgbClr val="000000"/>
+                          </a:solidFill>
+                          <a:latin typeface="Calibri"/>
+                        </a:rPr>
+                        <a:t> evolves</a:t>
+                      </a:r>
+                    </a:p>
+                  </a:txBody>
+                  <a:tcPr marL="73152" marR="73152" marT="27432" marB="27432">
+                    <a:solidFill>
+                      <a:srgbClr val="FFFFFF"/>
+                    </a:solidFill>
+                  </a:tcPr>
+                </a:tc>
+                <a:tc>
+                  <a:txBody>
+                    <a:bodyPr/>
+                    <a:lstStyle/>
+                    <a:p>
+                      <a:pPr algn="l"/>
+                      <a:r>
+                        <a:rPr sz="2400" b="0" i="0">
+                          <a:solidFill>
+                            <a:srgbClr val="000000"/>
+                          </a:solidFill>
+                          <a:latin typeface="Calibri"/>
+                        </a:rPr>
+                        <a:t>no</a:t>
                       </a:r>
                     </a:p>
                   </a:txBody>
@@ -5611,15 +5206,15 @@
                   </a:tcPr>
                 </a:tc>
               </a:tr>
-              <a:tr h="475488">
-                <a:tc>
-                  <a:txBody>
-                    <a:bodyPr/>
-                    <a:lstStyle/>
-                    <a:p>
-                      <a:pPr algn="l"/>
-                      <a:r>
-                        <a:rPr sz="1700" b="0" i="0">
+              <a:tr h="530352">
+                <a:tc>
+                  <a:txBody>
+                    <a:bodyPr/>
+                    <a:lstStyle/>
+                    <a:p>
+                      <a:pPr algn="l"/>
+                      <a:r>
+                        <a:rPr sz="2400" b="0" i="0">
                           <a:solidFill>
                             <a:srgbClr val="000000"/>
                           </a:solidFill>
@@ -5642,36 +5237,36 @@
                     <a:p>
                       <a:pPr algn="l"/>
                       <a:r>
-                        <a:rPr sz="1700" b="0" i="0">
-                          <a:solidFill>
-                            <a:srgbClr val="000000"/>
-                          </a:solidFill>
-                          <a:latin typeface="Calibri"/>
-                        </a:rPr>
-                        <a:t>a cycle through a finite set of concepts</a:t>
-                      </a:r>
-                    </a:p>
-                  </a:txBody>
-                  <a:tcPr marL="73152" marR="73152" marT="27432" marB="27432">
-                    <a:solidFill>
-                      <a:srgbClr val="FFFFFF"/>
-                    </a:solidFill>
-                  </a:tcPr>
-                </a:tc>
-                <a:tc>
-                  <a:txBody>
-                    <a:bodyPr/>
-                    <a:lstStyle/>
-                    <a:p>
-                      <a:pPr algn="l"/>
-                      <a:r>
-                        <a:rPr sz="1700" b="0" i="0">
-                          <a:solidFill>
-                            <a:srgbClr val="000000"/>
-                          </a:solidFill>
-                          <a:latin typeface="Calibri"/>
-                        </a:rPr>
-                        <a:t>yes, and it repeats</a:t>
+                        <a:rPr sz="2400" b="0" i="0">
+                          <a:solidFill>
+                            <a:srgbClr val="000000"/>
+                          </a:solidFill>
+                          <a:latin typeface="Calibri"/>
+                        </a:rPr>
+                        <a:t>a cycle of concepts</a:t>
+                      </a:r>
+                    </a:p>
+                  </a:txBody>
+                  <a:tcPr marL="73152" marR="73152" marT="27432" marB="27432">
+                    <a:solidFill>
+                      <a:srgbClr val="FFFFFF"/>
+                    </a:solidFill>
+                  </a:tcPr>
+                </a:tc>
+                <a:tc>
+                  <a:txBody>
+                    <a:bodyPr/>
+                    <a:lstStyle/>
+                    <a:p>
+                      <a:pPr algn="l"/>
+                      <a:r>
+                        <a:rPr sz="2400" b="0" i="0">
+                          <a:solidFill>
+                            <a:srgbClr val="000000"/>
+                          </a:solidFill>
+                          <a:latin typeface="Calibri"/>
+                        </a:rPr>
+                        <a:t>yes</a:t>
                       </a:r>
                     </a:p>
                   </a:txBody>
@@ -5694,8 +5289,8 @@
         </p:nvSpPr>
         <p:spPr>
           <a:xfrm>
-            <a:off x="640080" y="4297680"/>
-            <a:ext cx="10911535" cy="2103120"/>
+            <a:off x="640080" y="4892040"/>
+            <a:ext cx="10911535" cy="1508760"/>
           </a:xfrm>
           <a:prstGeom prst="rect">
             <a:avLst/>
@@ -5710,51 +5305,17 @@
           <a:p>
             <a:pPr>
               <a:spcAft>
-                <a:spcPts val="600"/>
+                <a:spcPts val="1400"/>
               </a:spcAft>
             </a:pPr>
             <a:r>
-              <a:rPr sz="1700" b="0" i="0">
-                <a:solidFill>
-                  <a:srgbClr val="000000"/>
-                </a:solidFill>
-                <a:latin typeface="Calibri"/>
-              </a:rPr>
-              <a:t>A trajectory is in principle predictable, which restates the problem: solving concept</a:t>
-            </a:r>
-          </a:p>
-          <a:p>
-            <a:pPr>
-              <a:spcAft>
-                <a:spcPts val="600"/>
-              </a:spcAft>
-            </a:pPr>
-            <a:r>
-              <a:rPr sz="1700" b="0" i="0">
-                <a:solidFill>
-                  <a:srgbClr val="000000"/>
-                </a:solidFill>
-                <a:latin typeface="Calibri"/>
-              </a:rPr>
-              <a:t>drift is equivalent to forecasting θ</a:t>
-            </a:r>
-            <a:r>
-              <a:rPr sz="1224" b="0" i="0" baseline="-25000">
-                <a:solidFill>
-                  <a:srgbClr val="000000"/>
-                </a:solidFill>
-                <a:latin typeface="Calibri"/>
-              </a:rPr>
-              <a:t>t</a:t>
-            </a:r>
-            <a:r>
-              <a:rPr sz="1700" b="0" i="0">
-                <a:solidFill>
-                  <a:srgbClr val="000000"/>
-                </a:solidFill>
-                <a:latin typeface="Calibri"/>
-              </a:rPr>
-              <a:t>. The prescription follows —</a:t>
+              <a:rPr sz="2600" b="0" i="0">
+                <a:solidFill>
+                  <a:srgbClr val="000000"/>
+                </a:solidFill>
+                <a:latin typeface="Calibri"/>
+              </a:rPr>
+              <a:t>A trajectory is predictable, so track θ rather than detect:</a:t>
             </a:r>
           </a:p>
         </p:txBody>
@@ -5767,8 +5328,8 @@
         </p:nvSpPr>
         <p:spPr>
           <a:xfrm>
-            <a:off x="640080" y="5029200"/>
-            <a:ext cx="10911535" cy="566928"/>
+            <a:off x="640080" y="5623560"/>
+            <a:ext cx="10911535" cy="731520"/>
           </a:xfrm>
           <a:prstGeom prst="rect">
             <a:avLst/>
@@ -5782,7 +5343,7 @@
           <a:lstStyle/>
           <a:p>
             <a:r>
-              <a:rPr sz="2800" b="0" i="1">
+              <a:rPr sz="3600" b="0" i="1">
                 <a:solidFill>
                   <a:srgbClr val="000000"/>
                 </a:solidFill>
@@ -5791,7 +5352,7 @@
               <a:t>θ</a:t>
             </a:r>
             <a:r>
-              <a:rPr sz="2016" b="0" i="1" baseline="-25000">
+              <a:rPr sz="2592" b="0" i="1" baseline="-25000">
                 <a:solidFill>
                   <a:srgbClr val="000000"/>
                 </a:solidFill>
@@ -5800,16 +5361,16 @@
               <a:t>t+1</a:t>
             </a:r>
             <a:r>
-              <a:rPr sz="2800" b="0" i="1">
+              <a:rPr sz="3600" b="0" i="1">
                 <a:solidFill>
                   <a:srgbClr val="000000"/>
                 </a:solidFill>
                 <a:latin typeface="Cambria Math"/>
               </a:rPr>
-              <a:t>  ←  θ</a:t>
-            </a:r>
-            <a:r>
-              <a:rPr sz="2016" b="0" i="1" baseline="-25000">
+              <a:t>   ←   θ</a:t>
+            </a:r>
+            <a:r>
+              <a:rPr sz="2592" b="0" i="1" baseline="-25000">
                 <a:solidFill>
                   <a:srgbClr val="000000"/>
                 </a:solidFill>
@@ -5818,52 +5379,13 @@
               <a:t>t</a:t>
             </a:r>
             <a:r>
-              <a:rPr sz="2800" b="0" i="1">
+              <a:rPr sz="3600" b="0" i="1">
                 <a:solidFill>
                   <a:srgbClr val="000000"/>
                 </a:solidFill>
                 <a:latin typeface="Cambria Math"/>
               </a:rPr>
               <a:t> + λ ∇E</a:t>
-            </a:r>
-          </a:p>
-        </p:txBody>
-      </p:sp>
-      <p:sp>
-        <p:nvSpPr>
-          <p:cNvPr id="7" name="TextBox 6"/>
-          <p:cNvSpPr txBox="1"/>
-          <p:nvPr/>
-        </p:nvSpPr>
-        <p:spPr>
-          <a:xfrm>
-            <a:off x="640080" y="5806440"/>
-            <a:ext cx="10911535" cy="594360"/>
-          </a:xfrm>
-          <a:prstGeom prst="rect">
-            <a:avLst/>
-          </a:prstGeom>
-          <a:noFill/>
-        </p:spPr>
-        <p:txBody>
-          <a:bodyPr wrap="square" lIns="0" tIns="0" bIns="0">
-            <a:spAutoFit/>
-          </a:bodyPr>
-          <a:lstStyle/>
-          <a:p>
-            <a:pPr>
-              <a:spcAft>
-                <a:spcPts val="1000"/>
-              </a:spcAft>
-            </a:pPr>
-            <a:r>
-              <a:rPr sz="1700" b="0" i="0">
-                <a:solidFill>
-                  <a:srgbClr val="000000"/>
-                </a:solidFill>
-                <a:latin typeface="Calibri"/>
-              </a:rPr>
-              <a:t>— with no detector and no reset, subject to one condition: λ must not decay to zero.</a:t>
             </a:r>
           </a:p>
         </p:txBody>
@@ -5910,7 +5432,7 @@
           <a:p>
             <a:pPr algn="l"/>
             <a:r>
-              <a:rPr sz="3600" b="1" i="0">
+              <a:rPr sz="4400" b="1" i="0">
                 <a:solidFill>
                   <a:srgbClr val="000000"/>
                 </a:solidFill>
@@ -5929,8 +5451,8 @@
         </p:nvSpPr>
         <p:spPr>
           <a:xfrm>
-            <a:off x="640080" y="3566160"/>
-            <a:ext cx="10911535" cy="2834640"/>
+            <a:off x="640080" y="3657600"/>
+            <a:ext cx="10911535" cy="2743200"/>
           </a:xfrm>
           <a:prstGeom prst="rect">
             <a:avLst/>
@@ -5945,17 +5467,17 @@
           <a:p>
             <a:pPr>
               <a:spcAft>
-                <a:spcPts val="1000"/>
+                <a:spcPts val="1400"/>
               </a:spcAft>
             </a:pPr>
             <a:r>
-              <a:rPr sz="1800" b="0" i="0">
-                <a:solidFill>
-                  <a:srgbClr val="000000"/>
-                </a:solidFill>
-                <a:latin typeface="Calibri"/>
-              </a:rPr>
-              <a:t>All six methods of Table 2 rebuilt in the Python standard library.</a:t>
+              <a:rPr sz="2400" b="0" i="0">
+                <a:solidFill>
+                  <a:srgbClr val="000000"/>
+                </a:solidFill>
+                <a:latin typeface="Calibri"/>
+              </a:rPr>
+              <a:t>Table 2's six methods rebuilt in the standard library.</a:t>
             </a:r>
           </a:p>
         </p:txBody>
@@ -5986,8 +5508,8 @@
         </p:nvSpPr>
         <p:spPr>
           <a:xfrm>
-            <a:off x="640080" y="365760"/>
-            <a:ext cx="10911535" cy="731520"/>
+            <a:off x="640080" y="320040"/>
+            <a:ext cx="10911535" cy="914400"/>
           </a:xfrm>
           <a:prstGeom prst="rect">
             <a:avLst/>
@@ -6001,7 +5523,7 @@
           <a:lstStyle/>
           <a:p>
             <a:r>
-              <a:rPr sz="3200" b="1" i="0">
+              <a:rPr sz="4400" b="1" i="0">
                 <a:solidFill>
                   <a:srgbClr val="000000"/>
                 </a:solidFill>
@@ -6020,8 +5542,8 @@
         </p:nvSpPr>
         <p:spPr>
           <a:xfrm>
-            <a:off x="640080" y="1463040"/>
-            <a:ext cx="10911535" cy="4937760"/>
+            <a:off x="640080" y="1828800"/>
+            <a:ext cx="10911535" cy="4572000"/>
           </a:xfrm>
           <a:prstGeom prst="rect">
             <a:avLst/>
@@ -6036,132 +5558,84 @@
           <a:p>
             <a:pPr>
               <a:spcAft>
-                <a:spcPts val="600"/>
+                <a:spcPts val="1400"/>
               </a:spcAft>
             </a:pPr>
             <a:r>
-              <a:rPr sz="1700" b="1" i="0">
-                <a:solidFill>
-                  <a:srgbClr val="000000"/>
-                </a:solidFill>
-                <a:latin typeface="Calibri"/>
-              </a:rPr>
-              <a:t>Data, obtained from the repository the paper cites:</a:t>
+              <a:rPr sz="2800" b="0" i="0">
+                <a:solidFill>
+                  <a:srgbClr val="000000"/>
+                </a:solidFill>
+                <a:latin typeface="Calibri"/>
+              </a:rPr>
+              <a:t>Electricity 45,312 and CoverType 581,012</a:t>
             </a:r>
           </a:p>
           <a:p>
             <a:pPr lvl="1">
               <a:spcAft>
-                <a:spcPts val="600"/>
+                <a:spcPts val="1400"/>
               </a:spcAft>
             </a:pPr>
             <a:r>
-              <a:rPr sz="1600" b="0" i="0">
-                <a:solidFill>
-                  <a:srgbClr val="000000"/>
-                </a:solidFill>
-                <a:latin typeface="Calibri"/>
-              </a:rPr>
-              <a:t>Electricity, 45,312 instances; CoverType, 581,012 — both counts exact</a:t>
+              <a:rPr sz="2700" b="0" i="0">
+                <a:solidFill>
+                  <a:srgbClr val="000000"/>
+                </a:solidFill>
+                <a:latin typeface="Calibri"/>
+              </a:rPr>
+              <a:t>counts exact against the paper</a:t>
             </a:r>
           </a:p>
           <a:p>
             <a:pPr>
               <a:spcAft>
-                <a:spcPts val="600"/>
+                <a:spcPts val="1400"/>
               </a:spcAft>
             </a:pPr>
             <a:r>
-              <a:rPr sz="1700" b="1" i="0">
-                <a:solidFill>
-                  <a:srgbClr val="000000"/>
-                </a:solidFill>
-                <a:latin typeface="Calibri"/>
-              </a:rPr>
-              <a:t>Methods, all six of Table 2, reimplemented rather than substituted:</a:t>
+              <a:rPr sz="2800" b="0" i="0">
+                <a:solidFill>
+                  <a:srgbClr val="000000"/>
+                </a:solidFill>
+                <a:latin typeface="Calibri"/>
+              </a:rPr>
+              <a:t>All six methods of Table 2 reimplemented</a:t>
             </a:r>
           </a:p>
           <a:p>
             <a:pPr lvl="1">
               <a:spcAft>
-                <a:spcPts val="600"/>
+                <a:spcPts val="1400"/>
               </a:spcAft>
             </a:pPr>
             <a:r>
-              <a:rPr sz="1600" b="0" i="0">
-                <a:solidFill>
-                  <a:srgbClr val="000000"/>
-                </a:solidFill>
-                <a:latin typeface="Calibri"/>
-              </a:rPr>
-              <a:t>kNN · hinge-loss SGD · Hoeffding Tree with naive Bayes leaves</a:t>
-            </a:r>
-          </a:p>
-          <a:p>
-            <a:pPr lvl="1">
+              <a:rPr sz="2700" b="0" i="0">
+                <a:solidFill>
+                  <a:srgbClr val="000000"/>
+                </a:solidFill>
+                <a:latin typeface="Calibri"/>
+              </a:rPr>
+              <a:t>ADWIN2 validated: 55-instance latency, no false alarms</a:t>
+            </a:r>
+          </a:p>
+          <a:p>
+            <a:pPr>
               <a:spcAft>
-                <a:spcPts val="600"/>
+                <a:spcPts val="1400"/>
               </a:spcAft>
             </a:pPr>
             <a:r>
-              <a:rPr sz="1600" b="0" i="0">
-                <a:solidFill>
-                  <a:srgbClr val="000000"/>
-                </a:solidFill>
-                <a:latin typeface="Calibri"/>
-              </a:rPr>
-              <a:t>SAMkNN · PBF-SGD, degree-3 basis · RF-HT, 100 trees over ADWIN2</a:t>
-            </a:r>
-          </a:p>
-          <a:p>
-            <a:pPr lvl="1">
-              <a:spcAft>
-                <a:spcPts val="600"/>
-              </a:spcAft>
-            </a:pPr>
-            <a:r>
-              <a:rPr sz="1600" b="0" i="0">
-                <a:solidFill>
-                  <a:srgbClr val="000000"/>
-                </a:solidFill>
-                <a:latin typeface="Calibri"/>
-              </a:rPr>
-              <a:t>ADWIN2 validated independently: detection 55 instances after a true change,</a:t>
-            </a:r>
-          </a:p>
-          <a:p>
-            <a:pPr lvl="1">
-              <a:spcAft>
-                <a:spcPts val="600"/>
-              </a:spcAft>
-            </a:pPr>
-            <a:r>
-              <a:rPr sz="1600" b="0" i="0">
-                <a:solidFill>
-                  <a:srgbClr val="000000"/>
-                </a:solidFill>
-                <a:latin typeface="Calibri"/>
-              </a:rPr>
-              <a:t>and no false alarms across 4,000 stationary instances</a:t>
-            </a:r>
-          </a:p>
-          <a:p>
-            <a:pPr>
-              <a:spcAft>
-                <a:spcPts val="600"/>
-              </a:spcAft>
-            </a:pPr>
-            <a:r>
-              <a:rPr sz="1700" b="1" i="0">
-                <a:solidFill>
-                  <a:srgbClr val="000000"/>
-                </a:solidFill>
-                <a:latin typeface="Calibri"/>
-              </a:rPr>
-              <a:t>Streams at Table 1 parameters: T = 10K, τ</a:t>
-            </a:r>
-            <a:r>
-              <a:rPr sz="1224" b="1" i="0" baseline="-25000">
+              <a:rPr sz="2800" b="0" i="0">
+                <a:solidFill>
+                  <a:srgbClr val="000000"/>
+                </a:solidFill>
+                <a:latin typeface="Calibri"/>
+              </a:rPr>
+              <a:t>Table 1 parameters, prequential over τ</a:t>
+            </a:r>
+            <a:r>
+              <a:rPr sz="2016" b="0" i="0" baseline="-25000">
                 <a:solidFill>
                   <a:srgbClr val="000000"/>
                 </a:solidFill>
@@ -6170,83 +5644,13 @@
               <a:t>0</a:t>
             </a:r>
             <a:r>
-              <a:rPr sz="1700" b="1" i="0">
-                <a:solidFill>
-                  <a:srgbClr val="000000"/>
-                </a:solidFill>
-                <a:latin typeface="Calibri"/>
-              </a:rPr>
-              <a:t> = 1K, τ</a:t>
-            </a:r>
-            <a:r>
-              <a:rPr sz="1224" b="1" i="0" baseline="-25000">
-                <a:solidFill>
-                  <a:srgbClr val="000000"/>
-                </a:solidFill>
-                <a:latin typeface="Calibri"/>
-              </a:rPr>
-              <a:t>1</a:t>
-            </a:r>
-            <a:r>
-              <a:rPr sz="1700" b="1" i="0">
-                <a:solidFill>
-                  <a:srgbClr val="000000"/>
-                </a:solidFill>
-                <a:latin typeface="Calibri"/>
-              </a:rPr>
-              <a:t> = 5K, τ</a:t>
-            </a:r>
-            <a:r>
-              <a:rPr sz="1224" b="1" i="0" baseline="-25000">
-                <a:solidFill>
-                  <a:srgbClr val="000000"/>
-                </a:solidFill>
-                <a:latin typeface="Calibri"/>
-              </a:rPr>
-              <a:t>2</a:t>
-            </a:r>
-            <a:r>
-              <a:rPr sz="1700" b="1" i="0">
-                <a:solidFill>
-                  <a:srgbClr val="000000"/>
-                </a:solidFill>
-                <a:latin typeface="Calibri"/>
-              </a:rPr>
-              <a:t> = 6K.</a:t>
-            </a:r>
-          </a:p>
-          <a:p>
-            <a:pPr lvl="1">
-              <a:spcAft>
-                <a:spcPts val="600"/>
-              </a:spcAft>
-            </a:pPr>
-            <a:r>
-              <a:rPr sz="1600" b="0" i="0">
-                <a:solidFill>
-                  <a:srgbClr val="000000"/>
-                </a:solidFill>
-                <a:latin typeface="Calibri"/>
-              </a:rPr>
-              <a:t>Prequential evaluation; accuracy recorded over τ</a:t>
-            </a:r>
-            <a:r>
-              <a:rPr sz="1152" b="0" i="0" baseline="-25000">
-                <a:solidFill>
-                  <a:srgbClr val="000000"/>
-                </a:solidFill>
-                <a:latin typeface="Calibri"/>
-              </a:rPr>
-              <a:t>0</a:t>
-            </a:r>
-            <a:r>
-              <a:rPr sz="1600" b="0" i="0">
-                <a:solidFill>
-                  <a:srgbClr val="000000"/>
-                </a:solidFill>
-                <a:latin typeface="Calibri"/>
-              </a:rPr>
-              <a:t> … T.</a:t>
+              <a:rPr sz="2800" b="0" i="0">
+                <a:solidFill>
+                  <a:srgbClr val="000000"/>
+                </a:solidFill>
+                <a:latin typeface="Calibri"/>
+              </a:rPr>
+              <a:t> … T</a:t>
             </a:r>
           </a:p>
         </p:txBody>
@@ -6277,8 +5681,8 @@
         </p:nvSpPr>
         <p:spPr>
           <a:xfrm>
-            <a:off x="640080" y="365760"/>
-            <a:ext cx="10911535" cy="731520"/>
+            <a:off x="640080" y="320040"/>
+            <a:ext cx="10911535" cy="914400"/>
           </a:xfrm>
           <a:prstGeom prst="rect">
             <a:avLst/>
@@ -6292,7 +5696,7 @@
           <a:lstStyle/>
           <a:p>
             <a:r>
-              <a:rPr sz="3200" b="1" i="0">
+              <a:rPr sz="4400" b="1" i="0">
                 <a:solidFill>
                   <a:srgbClr val="000000"/>
                 </a:solidFill>
@@ -6311,8 +5715,8 @@
         </p:nvSpPr>
         <p:spPr>
           <a:xfrm>
-            <a:off x="640080" y="1097280"/>
-            <a:ext cx="10911535" cy="411480"/>
+            <a:off x="640080" y="1298448"/>
+            <a:ext cx="10911535" cy="457200"/>
           </a:xfrm>
           <a:prstGeom prst="rect">
             <a:avLst/>
@@ -6326,7 +5730,7 @@
           <a:lstStyle/>
           <a:p>
             <a:r>
-              <a:rPr sz="1700" b="0" i="0">
+              <a:rPr sz="2200" b="0" i="0">
                 <a:solidFill>
                   <a:srgbClr val="000000"/>
                 </a:solidFill>
@@ -6346,8 +5750,8 @@
           <p:nvPr/>
         </p:nvGraphicFramePr>
         <p:xfrm>
-          <a:off x="640080" y="1691640"/>
-          <a:ext cx="10911533" cy="2468880"/>
+          <a:off x="640080" y="2057400"/>
+          <a:ext cx="10911534" cy="2743200"/>
         </p:xfrm>
         <a:graphic>
           <a:graphicData uri="http://schemas.openxmlformats.org/drawingml/2006/table">
@@ -6356,20 +5760,20 @@
                 <a:tableStyleId>{5C22544A-7EE6-4342-B048-85BDC9FD1C3A}</a:tableStyleId>
               </a:tblPr>
               <a:tblGrid>
-                <a:gridCol w="4091825"/>
-                <a:gridCol w="2273236"/>
-                <a:gridCol w="2273236"/>
-                <a:gridCol w="2273236"/>
+                <a:gridCol w="3030981"/>
+                <a:gridCol w="2626851"/>
+                <a:gridCol w="2626851"/>
+                <a:gridCol w="2626851"/>
               </a:tblGrid>
-              <a:tr h="493776">
-                <a:tc>
-                  <a:txBody>
-                    <a:bodyPr/>
-                    <a:lstStyle/>
-                    <a:p>
-                      <a:pPr algn="l"/>
-                      <a:r>
-                        <a:rPr sz="1700" b="1" i="0">
+              <a:tr h="548640">
+                <a:tc>
+                  <a:txBody>
+                    <a:bodyPr/>
+                    <a:lstStyle/>
+                    <a:p>
+                      <a:pPr algn="l"/>
+                      <a:r>
+                        <a:rPr sz="2400" b="1" i="0">
                           <a:solidFill>
                             <a:srgbClr val="000000"/>
                           </a:solidFill>
@@ -6392,7 +5796,7 @@
                     <a:p>
                       <a:pPr algn="r"/>
                       <a:r>
-                        <a:rPr sz="1700" b="1" i="0">
+                        <a:rPr sz="2400" b="1" i="0">
                           <a:solidFill>
                             <a:srgbClr val="000000"/>
                           </a:solidFill>
@@ -6415,7 +5819,7 @@
                     <a:p>
                       <a:pPr algn="r"/>
                       <a:r>
-                        <a:rPr sz="1700" b="1" i="0">
+                        <a:rPr sz="2400" b="1" i="0">
                           <a:solidFill>
                             <a:srgbClr val="000000"/>
                           </a:solidFill>
@@ -6438,7 +5842,7 @@
                     <a:p>
                       <a:pPr algn="r"/>
                       <a:r>
-                        <a:rPr sz="1700" b="1" i="0">
+                        <a:rPr sz="2400" b="1" i="0">
                           <a:solidFill>
                             <a:srgbClr val="000000"/>
                           </a:solidFill>
@@ -6455,21 +5859,21 @@
                   </a:tcPr>
                 </a:tc>
               </a:tr>
-              <a:tr h="493776">
-                <a:tc>
-                  <a:txBody>
-                    <a:bodyPr/>
-                    <a:lstStyle/>
-                    <a:p>
-                      <a:pPr algn="l"/>
-                      <a:r>
-                        <a:rPr sz="1700" b="0" i="0">
-                          <a:solidFill>
-                            <a:srgbClr val="000000"/>
-                          </a:solidFill>
-                          <a:latin typeface="Calibri"/>
-                        </a:rPr>
-                        <a:t>Electricity, 45,312</a:t>
+              <a:tr h="548640">
+                <a:tc>
+                  <a:txBody>
+                    <a:bodyPr/>
+                    <a:lstStyle/>
+                    <a:p>
+                      <a:pPr algn="l"/>
+                      <a:r>
+                        <a:rPr sz="2400" b="0" i="0">
+                          <a:solidFill>
+                            <a:srgbClr val="000000"/>
+                          </a:solidFill>
+                          <a:latin typeface="Calibri"/>
+                        </a:rPr>
+                        <a:t>Electricity</a:t>
                       </a:r>
                     </a:p>
                   </a:txBody>
@@ -6486,7 +5890,7 @@
                     <a:p>
                       <a:pPr algn="r"/>
                       <a:r>
-                        <a:rPr sz="1700" b="0" i="0">
+                        <a:rPr sz="2400" b="0" i="0">
                           <a:solidFill>
                             <a:srgbClr val="000000"/>
                           </a:solidFill>
@@ -6509,7 +5913,7 @@
                     <a:p>
                       <a:pPr algn="r"/>
                       <a:r>
-                        <a:rPr sz="1700" b="0" i="0">
+                        <a:rPr sz="2400" b="0" i="0">
                           <a:solidFill>
                             <a:srgbClr val="000000"/>
                           </a:solidFill>
@@ -6532,7 +5936,7 @@
                     <a:p>
                       <a:pPr algn="r"/>
                       <a:r>
-                        <a:rPr sz="1700" b="0" i="0">
+                        <a:rPr sz="2400" b="0" i="0">
                           <a:solidFill>
                             <a:srgbClr val="000000"/>
                           </a:solidFill>
@@ -6549,21 +5953,21 @@
                   </a:tcPr>
                 </a:tc>
               </a:tr>
-              <a:tr h="493776">
-                <a:tc>
-                  <a:txBody>
-                    <a:bodyPr/>
-                    <a:lstStyle/>
-                    <a:p>
-                      <a:pPr algn="l"/>
-                      <a:r>
-                        <a:rPr sz="1700" b="0" i="0">
-                          <a:solidFill>
-                            <a:srgbClr val="000000"/>
-                          </a:solidFill>
-                          <a:latin typeface="Calibri"/>
-                        </a:rPr>
-                        <a:t>RTG, 10K</a:t>
+              <a:tr h="548640">
+                <a:tc>
+                  <a:txBody>
+                    <a:bodyPr/>
+                    <a:lstStyle/>
+                    <a:p>
+                      <a:pPr algn="l"/>
+                      <a:r>
+                        <a:rPr sz="2400" b="0" i="0">
+                          <a:solidFill>
+                            <a:srgbClr val="000000"/>
+                          </a:solidFill>
+                          <a:latin typeface="Calibri"/>
+                        </a:rPr>
+                        <a:t>RTG</a:t>
                       </a:r>
                     </a:p>
                   </a:txBody>
@@ -6580,7 +5984,7 @@
                     <a:p>
                       <a:pPr algn="r"/>
                       <a:r>
-                        <a:rPr sz="1700" b="0" i="0">
+                        <a:rPr sz="2400" b="0" i="0">
                           <a:solidFill>
                             <a:srgbClr val="000000"/>
                           </a:solidFill>
@@ -6603,7 +6007,7 @@
                     <a:p>
                       <a:pPr algn="r"/>
                       <a:r>
-                        <a:rPr sz="1700" b="0" i="0">
+                        <a:rPr sz="2400" b="0" i="0">
                           <a:solidFill>
                             <a:srgbClr val="000000"/>
                           </a:solidFill>
@@ -6626,7 +6030,7 @@
                     <a:p>
                       <a:pPr algn="r"/>
                       <a:r>
-                        <a:rPr sz="1700" b="0" i="0">
+                        <a:rPr sz="2400" b="0" i="0">
                           <a:solidFill>
                             <a:srgbClr val="000000"/>
                           </a:solidFill>
@@ -6643,21 +6047,21 @@
                   </a:tcPr>
                 </a:tc>
               </a:tr>
-              <a:tr h="493776">
-                <a:tc>
-                  <a:txBody>
-                    <a:bodyPr/>
-                    <a:lstStyle/>
-                    <a:p>
-                      <a:pPr algn="l"/>
-                      <a:r>
-                        <a:rPr sz="1700" b="0" i="0">
-                          <a:solidFill>
-                            <a:srgbClr val="000000"/>
-                          </a:solidFill>
-                          <a:latin typeface="Calibri"/>
-                        </a:rPr>
-                        <a:t>Synthetic, 10K</a:t>
+              <a:tr h="548640">
+                <a:tc>
+                  <a:txBody>
+                    <a:bodyPr/>
+                    <a:lstStyle/>
+                    <a:p>
+                      <a:pPr algn="l"/>
+                      <a:r>
+                        <a:rPr sz="2400" b="0" i="0">
+                          <a:solidFill>
+                            <a:srgbClr val="000000"/>
+                          </a:solidFill>
+                          <a:latin typeface="Calibri"/>
+                        </a:rPr>
+                        <a:t>Synthetic</a:t>
                       </a:r>
                     </a:p>
                   </a:txBody>
@@ -6674,7 +6078,7 @@
                     <a:p>
                       <a:pPr algn="r"/>
                       <a:r>
-                        <a:rPr sz="1700" b="0" i="0">
+                        <a:rPr sz="2400" b="0" i="0">
                           <a:solidFill>
                             <a:srgbClr val="000000"/>
                           </a:solidFill>
@@ -6697,7 +6101,7 @@
                     <a:p>
                       <a:pPr algn="r"/>
                       <a:r>
-                        <a:rPr sz="1700" b="0" i="0">
+                        <a:rPr sz="2400" b="0" i="0">
                           <a:solidFill>
                             <a:srgbClr val="000000"/>
                           </a:solidFill>
@@ -6720,7 +6124,7 @@
                     <a:p>
                       <a:pPr algn="r"/>
                       <a:r>
-                        <a:rPr sz="1700" b="0" i="0">
+                        <a:rPr sz="2400" b="0" i="0">
                           <a:solidFill>
                             <a:srgbClr val="000000"/>
                           </a:solidFill>
@@ -6737,21 +6141,21 @@
                   </a:tcPr>
                 </a:tc>
               </a:tr>
-              <a:tr h="493776">
-                <a:tc>
-                  <a:txBody>
-                    <a:bodyPr/>
-                    <a:lstStyle/>
-                    <a:p>
-                      <a:pPr algn="l"/>
-                      <a:r>
-                        <a:rPr sz="1700" b="0" i="0">
-                          <a:solidFill>
-                            <a:srgbClr val="000000"/>
-                          </a:solidFill>
-                          <a:latin typeface="Calibri"/>
-                        </a:rPr>
-                        <a:t>CoverType, 10K — not comparable</a:t>
+              <a:tr h="548640">
+                <a:tc>
+                  <a:txBody>
+                    <a:bodyPr/>
+                    <a:lstStyle/>
+                    <a:p>
+                      <a:pPr algn="l"/>
+                      <a:r>
+                        <a:rPr sz="2400" b="0" i="0">
+                          <a:solidFill>
+                            <a:srgbClr val="000000"/>
+                          </a:solidFill>
+                          <a:latin typeface="Calibri"/>
+                        </a:rPr>
+                        <a:t>CoverType †</a:t>
                       </a:r>
                     </a:p>
                   </a:txBody>
@@ -6768,7 +6172,7 @@
                     <a:p>
                       <a:pPr algn="r"/>
                       <a:r>
-                        <a:rPr sz="1700" b="0" i="0">
+                        <a:rPr sz="2400" b="0" i="0">
                           <a:solidFill>
                             <a:srgbClr val="000000"/>
                           </a:solidFill>
@@ -6791,7 +6195,7 @@
                     <a:p>
                       <a:pPr algn="r"/>
                       <a:r>
-                        <a:rPr sz="1700" b="0" i="0">
+                        <a:rPr sz="2400" b="0" i="0">
                           <a:solidFill>
                             <a:srgbClr val="000000"/>
                           </a:solidFill>
@@ -6814,7 +6218,7 @@
                     <a:p>
                       <a:pPr algn="r"/>
                       <a:r>
-                        <a:rPr sz="1700" b="0" i="0">
+                        <a:rPr sz="2400" b="0" i="0">
                           <a:solidFill>
                             <a:srgbClr val="000000"/>
                           </a:solidFill>
@@ -6843,8 +6247,8 @@
         </p:nvSpPr>
         <p:spPr>
           <a:xfrm>
-            <a:off x="640080" y="4343400"/>
-            <a:ext cx="10911535" cy="2057400"/>
+            <a:off x="640080" y="5120640"/>
+            <a:ext cx="10911535" cy="1280160"/>
           </a:xfrm>
           <a:prstGeom prst="rect">
             <a:avLst/>
@@ -6859,97 +6263,33 @@
           <a:p>
             <a:pPr>
               <a:spcAft>
-                <a:spcPts val="500"/>
+                <a:spcPts val="800"/>
               </a:spcAft>
             </a:pPr>
             <a:r>
-              <a:rPr sz="1700" b="0" i="0">
-                <a:solidFill>
-                  <a:srgbClr val="000000"/>
-                </a:solidFill>
-                <a:latin typeface="Calibri"/>
-              </a:rPr>
-              <a:t>Electricity reproduces: SAMkNN within 1.8 points, RF-HT within 1.7 at 100 trees.</a:t>
+              <a:rPr sz="2600" b="0" i="0">
+                <a:solidFill>
+                  <a:srgbClr val="000000"/>
+                </a:solidFill>
+                <a:latin typeface="Calibri"/>
+              </a:rPr>
+              <a:t>Electricity reproduces within 2 points.</a:t>
             </a:r>
           </a:p>
           <a:p>
             <a:pPr>
               <a:spcAft>
-                <a:spcPts val="500"/>
+                <a:spcPts val="800"/>
               </a:spcAft>
             </a:pPr>
             <a:r>
-              <a:rPr sz="1700" b="0" i="0">
-                <a:solidFill>
-                  <a:srgbClr val="000000"/>
-                </a:solidFill>
-                <a:latin typeface="Calibri"/>
-              </a:rPr>
-              <a:t>On RTG, PBF-SGD exceeds the reported value and the reported ranking is preserved.</a:t>
-            </a:r>
-          </a:p>
-          <a:p>
-            <a:pPr>
-              <a:spcAft>
-                <a:spcPts val="500"/>
-              </a:spcAft>
-            </a:pPr>
-            <a:r>
-              <a:rPr sz="1700" b="1" i="0">
-                <a:solidFill>
-                  <a:srgbClr val="000000"/>
-                </a:solidFill>
-                <a:latin typeface="Calibri"/>
-              </a:rPr>
-              <a:t>Two systematic deviations, both attributable:</a:t>
-            </a:r>
-          </a:p>
-          <a:p>
-            <a:pPr lvl="1">
-              <a:spcAft>
-                <a:spcPts val="500"/>
-              </a:spcAft>
-            </a:pPr>
-            <a:r>
-              <a:rPr sz="1600" b="0" i="0">
-                <a:solidFill>
-                  <a:srgbClr val="000000"/>
-                </a:solidFill>
-                <a:latin typeface="Calibri"/>
-              </a:rPr>
-              <a:t>PBF-SGD on Electricity (−5.2), attributable to the polynomial degree, not to λ</a:t>
-            </a:r>
-          </a:p>
-          <a:p>
-            <a:pPr lvl="1">
-              <a:spcAft>
-                <a:spcPts val="500"/>
-              </a:spcAft>
-            </a:pPr>
-            <a:r>
-              <a:rPr sz="1600" b="0" i="0">
-                <a:solidFill>
-                  <a:srgbClr val="000000"/>
-                </a:solidFill>
-                <a:latin typeface="Calibri"/>
-              </a:rPr>
-              <a:t>SAMkNN deviates in order (−1.8, −7.7, −14.9), tracking the load on its long-term</a:t>
-            </a:r>
-          </a:p>
-          <a:p>
-            <a:pPr lvl="1">
-              <a:spcAft>
-                <a:spcPts val="500"/>
-              </a:spcAft>
-            </a:pPr>
-            <a:r>
-              <a:rPr sz="1600" b="0" i="0">
-                <a:solidFill>
-                  <a:srgbClr val="000000"/>
-                </a:solidFill>
-                <a:latin typeface="Calibri"/>
-              </a:rPr>
-              <a:t>memory, which the reimplementation compresses more crudely</a:t>
+              <a:rPr sz="2600" b="0" i="0">
+                <a:solidFill>
+                  <a:srgbClr val="000000"/>
+                </a:solidFill>
+                <a:latin typeface="Calibri"/>
+              </a:rPr>
+              <a:t>PBF-SGD (−5.2) is the deviation; the cause is the degree.</a:t>
             </a:r>
           </a:p>
         </p:txBody>
@@ -6980,8 +6320,8 @@
         </p:nvSpPr>
         <p:spPr>
           <a:xfrm>
-            <a:off x="640080" y="365760"/>
-            <a:ext cx="10911535" cy="731520"/>
+            <a:off x="640080" y="320040"/>
+            <a:ext cx="10911535" cy="914400"/>
           </a:xfrm>
           <a:prstGeom prst="rect">
             <a:avLst/>
@@ -6995,7 +6335,7 @@
           <a:lstStyle/>
           <a:p>
             <a:r>
-              <a:rPr sz="3200" b="1" i="0">
+              <a:rPr sz="4400" b="1" i="0">
                 <a:solidFill>
                   <a:srgbClr val="000000"/>
                 </a:solidFill>
@@ -7014,8 +6354,8 @@
         </p:nvSpPr>
         <p:spPr>
           <a:xfrm>
-            <a:off x="640080" y="1097280"/>
-            <a:ext cx="10911535" cy="411480"/>
+            <a:off x="640080" y="1298448"/>
+            <a:ext cx="10911535" cy="457200"/>
           </a:xfrm>
           <a:prstGeom prst="rect">
             <a:avLst/>
@@ -7029,16 +6369,16 @@
           <a:lstStyle/>
           <a:p>
             <a:r>
-              <a:rPr sz="1700" b="0" i="0">
-                <a:solidFill>
-                  <a:srgbClr val="000000"/>
-                </a:solidFill>
-                <a:latin typeface="Calibri"/>
-              </a:rPr>
-              <a:t>accuracy lost under the schedule λ</a:t>
-            </a:r>
-            <a:r>
-              <a:rPr sz="1224" b="0" i="0" baseline="-25000">
+              <a:rPr sz="2200" b="0" i="0">
+                <a:solidFill>
+                  <a:srgbClr val="000000"/>
+                </a:solidFill>
+                <a:latin typeface="Calibri"/>
+              </a:rPr>
+              <a:t>accuracy lost under λ</a:t>
+            </a:r>
+            <a:r>
+              <a:rPr sz="1584" b="0" i="0" baseline="-25000">
                 <a:solidFill>
                   <a:srgbClr val="000000"/>
                 </a:solidFill>
@@ -7047,7 +6387,7 @@
               <a:t>t</a:t>
             </a:r>
             <a:r>
-              <a:rPr sz="1700" b="0" i="0">
+              <a:rPr sz="2200" b="0" i="0">
                 <a:solidFill>
                   <a:srgbClr val="000000"/>
                 </a:solidFill>
@@ -7056,7 +6396,7 @@
               <a:t> = λ</a:t>
             </a:r>
             <a:r>
-              <a:rPr sz="1224" b="0" i="0" baseline="-25000">
+              <a:rPr sz="1584" b="0" i="0" baseline="-25000">
                 <a:solidFill>
                   <a:srgbClr val="000000"/>
                 </a:solidFill>
@@ -7065,7 +6405,7 @@
               <a:t>0</a:t>
             </a:r>
             <a:r>
-              <a:rPr sz="1700" b="0" i="0">
+              <a:rPr sz="2200" b="0" i="0">
                 <a:solidFill>
                   <a:srgbClr val="000000"/>
                 </a:solidFill>
@@ -7085,8 +6425,8 @@
           <p:nvPr/>
         </p:nvGraphicFramePr>
         <p:xfrm>
-          <a:off x="640080" y="1783080"/>
-          <a:ext cx="6583680" cy="4023360"/>
+          <a:off x="640080" y="2011680"/>
+          <a:ext cx="10911535" cy="3108960"/>
         </p:xfrm>
         <a:graphic>
           <a:graphicData uri="http://schemas.openxmlformats.org/drawingml/2006/chart">
@@ -7102,8 +6442,8 @@
         </p:nvSpPr>
         <p:spPr>
           <a:xfrm>
-            <a:off x="7589520" y="1783080"/>
-            <a:ext cx="4114800" cy="4617720"/>
+            <a:off x="640080" y="5257800"/>
+            <a:ext cx="10911535" cy="1143000"/>
           </a:xfrm>
           <a:prstGeom prst="rect">
             <a:avLst/>
@@ -7118,193 +6458,33 @@
           <a:p>
             <a:pPr>
               <a:spcAft>
-                <a:spcPts val="200"/>
+                <a:spcPts val="600"/>
               </a:spcAft>
             </a:pPr>
             <a:r>
-              <a:rPr sz="1500" b="0" i="0">
-                <a:solidFill>
-                  <a:srgbClr val="000000"/>
-                </a:solidFill>
-                <a:latin typeface="Calibri"/>
-              </a:rPr>
-              <a:t>Read states that decay causes SGD to</a:t>
+              <a:rPr sz="2500" b="1" i="0">
+                <a:solidFill>
+                  <a:srgbClr val="000000"/>
+                </a:solidFill>
+                <a:latin typeface="Calibri"/>
+              </a:rPr>
+              <a:t>Largest after sudden drift; negligible under sustained.</a:t>
             </a:r>
           </a:p>
           <a:p>
             <a:pPr>
               <a:spcAft>
-                <a:spcPts val="200"/>
+                <a:spcPts val="600"/>
               </a:spcAft>
             </a:pPr>
             <a:r>
-              <a:rPr sz="1500" b="0" i="0">
-                <a:solidFill>
-                  <a:srgbClr val="000000"/>
-                </a:solidFill>
-                <a:latin typeface="Calibri"/>
-              </a:rPr>
-              <a:t>react progressively more slowly, and</a:t>
-            </a:r>
-          </a:p>
-          <a:p>
-            <a:pPr>
-              <a:spcAft>
-                <a:spcPts val="200"/>
-              </a:spcAft>
-            </a:pPr>
-            <a:r>
-              <a:rPr sz="1500" b="0" i="0">
-                <a:solidFill>
-                  <a:srgbClr val="000000"/>
-                </a:solidFill>
-                <a:latin typeface="Calibri"/>
-              </a:rPr>
-              <a:t>reports no experiment isolating it.</a:t>
-            </a:r>
-          </a:p>
-          <a:p>
-            <a:pPr>
-              <a:spcAft>
-                <a:spcPts val="200"/>
-              </a:spcAft>
-            </a:pPr>
-            <a:r>
-              <a:rPr sz="1500" b="1" i="0">
-                <a:solidFill>
-                  <a:srgbClr val="000000"/>
-                </a:solidFill>
-                <a:latin typeface="Calibri"/>
-              </a:rPr>
-              <a:t>The penalty is largest after sudden</a:t>
-            </a:r>
-          </a:p>
-          <a:p>
-            <a:pPr>
-              <a:spcAft>
-                <a:spcPts val="200"/>
-              </a:spcAft>
-            </a:pPr>
-            <a:r>
-              <a:rPr sz="1500" b="1" i="0">
-                <a:solidFill>
-                  <a:srgbClr val="000000"/>
-                </a:solidFill>
-                <a:latin typeface="Calibri"/>
-              </a:rPr>
-              <a:t>drift and negligible under sustained</a:t>
-            </a:r>
-          </a:p>
-          <a:p>
-            <a:pPr>
-              <a:spcAft>
-                <a:spcPts val="200"/>
-              </a:spcAft>
-            </a:pPr>
-            <a:r>
-              <a:rPr sz="1500" b="1" i="0">
-                <a:solidFill>
-                  <a:srgbClr val="000000"/>
-                </a:solidFill>
-                <a:latin typeface="Calibri"/>
-              </a:rPr>
-              <a:t>drift.</a:t>
-            </a:r>
-          </a:p>
-          <a:p>
-            <a:pPr>
-              <a:spcAft>
-                <a:spcPts val="200"/>
-              </a:spcAft>
-            </a:pPr>
-            <a:r>
-              <a:rPr sz="1500" b="0" i="0">
-                <a:solidFill>
-                  <a:srgbClr val="000000"/>
-                </a:solidFill>
-                <a:latin typeface="Calibri"/>
-              </a:rPr>
-              <a:t>Under sustained rotation a constant λ</a:t>
-            </a:r>
-          </a:p>
-          <a:p>
-            <a:pPr>
-              <a:spcAft>
-                <a:spcPts val="200"/>
-              </a:spcAft>
-            </a:pPr>
-            <a:r>
-              <a:rPr sz="1500" b="0" i="0">
-                <a:solidFill>
-                  <a:srgbClr val="000000"/>
-                </a:solidFill>
-                <a:latin typeface="Calibri"/>
-              </a:rPr>
-              <a:t>attains only 88.1, so decay forfeits</a:t>
-            </a:r>
-          </a:p>
-          <a:p>
-            <a:pPr>
-              <a:spcAft>
-                <a:spcPts val="200"/>
-              </a:spcAft>
-            </a:pPr>
-            <a:r>
-              <a:rPr sz="1500" b="0" i="0">
-                <a:solidFill>
-                  <a:srgbClr val="000000"/>
-                </a:solidFill>
-                <a:latin typeface="Calibri"/>
-              </a:rPr>
-              <a:t>little. After a resampled concept a</a:t>
-            </a:r>
-          </a:p>
-          <a:p>
-            <a:pPr>
-              <a:spcAft>
-                <a:spcPts val="200"/>
-              </a:spcAft>
-            </a:pPr>
-            <a:r>
-              <a:rPr sz="1500" b="0" i="0">
-                <a:solidFill>
-                  <a:srgbClr val="000000"/>
-                </a:solidFill>
-                <a:latin typeface="Calibri"/>
-              </a:rPr>
-              <a:t>live λ relearns; a frozen one cannot.</a:t>
-            </a:r>
-          </a:p>
-          <a:p>
-            <a:pPr>
-              <a:spcAft>
-                <a:spcPts val="200"/>
-              </a:spcAft>
-            </a:pPr>
-            <a:r>
-              <a:rPr sz="1500" b="1" i="0">
-                <a:solidFill>
-                  <a:srgbClr val="000000"/>
-                </a:solidFill>
-                <a:latin typeface="Calibri"/>
-              </a:rPr>
-              <a:t>The condition concerns</a:t>
-            </a:r>
-          </a:p>
-          <a:p>
-            <a:pPr>
-              <a:spcAft>
-                <a:spcPts val="200"/>
-              </a:spcAft>
-            </a:pPr>
-            <a:r>
-              <a:rPr sz="1500" b="1" i="0">
-                <a:solidFill>
-                  <a:srgbClr val="000000"/>
-                </a:solidFill>
-                <a:latin typeface="Calibri"/>
-              </a:rPr>
-              <a:t>recovery from discontinuities.</a:t>
+              <a:rPr sz="2500" b="0" i="0">
+                <a:solidFill>
+                  <a:srgbClr val="000000"/>
+                </a:solidFill>
+                <a:latin typeface="Calibri"/>
+              </a:rPr>
+              <a:t>The condition concerns recovery, not tracking.</a:t>
             </a:r>
           </a:p>
         </p:txBody>
@@ -7335,8 +6515,8 @@
         </p:nvSpPr>
         <p:spPr>
           <a:xfrm>
-            <a:off x="640080" y="365760"/>
-            <a:ext cx="10911535" cy="731520"/>
+            <a:off x="640080" y="320040"/>
+            <a:ext cx="10911535" cy="914400"/>
           </a:xfrm>
           <a:prstGeom prst="rect">
             <a:avLst/>
@@ -7350,7 +6530,7 @@
           <a:lstStyle/>
           <a:p>
             <a:r>
-              <a:rPr sz="3200" b="1" i="0">
+              <a:rPr sz="4400" b="1" i="0">
                 <a:solidFill>
                   <a:srgbClr val="000000"/>
                 </a:solidFill>
@@ -7369,8 +6549,8 @@
         </p:nvSpPr>
         <p:spPr>
           <a:xfrm>
-            <a:off x="640080" y="1097280"/>
-            <a:ext cx="10911535" cy="411480"/>
+            <a:off x="640080" y="1298448"/>
+            <a:ext cx="10911535" cy="457200"/>
           </a:xfrm>
           <a:prstGeom prst="rect">
             <a:avLst/>
@@ -7384,13 +6564,13 @@
           <a:lstStyle/>
           <a:p>
             <a:r>
-              <a:rPr sz="1700" b="0" i="0">
-                <a:solidFill>
-                  <a:srgbClr val="000000"/>
-                </a:solidFill>
-                <a:latin typeface="Calibri"/>
-              </a:rPr>
-              <a:t>capacity and insensitivity are the same property</a:t>
+              <a:rPr sz="2200" b="0" i="0">
+                <a:solidFill>
+                  <a:srgbClr val="000000"/>
+                </a:solidFill>
+                <a:latin typeface="Calibri"/>
+              </a:rPr>
+              <a:t>capacity and insensitivity are one property</a:t>
             </a:r>
           </a:p>
         </p:txBody>
@@ -7404,8 +6584,8 @@
           <p:nvPr/>
         </p:nvGraphicFramePr>
         <p:xfrm>
-          <a:off x="640080" y="1783080"/>
-          <a:ext cx="6583680" cy="4023360"/>
+          <a:off x="640080" y="2011680"/>
+          <a:ext cx="10911535" cy="3108960"/>
         </p:xfrm>
         <a:graphic>
           <a:graphicData uri="http://schemas.openxmlformats.org/drawingml/2006/chart">
@@ -7421,8 +6601,8 @@
         </p:nvSpPr>
         <p:spPr>
           <a:xfrm>
-            <a:off x="7589520" y="1920240"/>
-            <a:ext cx="4114800" cy="4480560"/>
+            <a:off x="640080" y="5257800"/>
+            <a:ext cx="10911535" cy="1143000"/>
           </a:xfrm>
           <a:prstGeom prst="rect">
             <a:avLst/>
@@ -7437,177 +6617,33 @@
           <a:p>
             <a:pPr>
               <a:spcAft>
-                <a:spcPts val="200"/>
+                <a:spcPts val="600"/>
               </a:spcAft>
             </a:pPr>
             <a:r>
-              <a:rPr sz="1500" b="1" i="0">
-                <a:solidFill>
-                  <a:srgbClr val="000000"/>
-                </a:solidFill>
-                <a:latin typeface="Calibri"/>
-              </a:rPr>
-              <a:t>kNN is inferior in all five regimes</a:t>
+              <a:rPr sz="2500" b="1" i="0">
+                <a:solidFill>
+                  <a:srgbClr val="000000"/>
+                </a:solidFill>
+                <a:latin typeface="Calibri"/>
+              </a:rPr>
+              <a:t>kNN varies by 0.6 points; SGD by 9.2.</a:t>
             </a:r>
           </a:p>
           <a:p>
             <a:pPr>
               <a:spcAft>
-                <a:spcPts val="200"/>
+                <a:spcPts val="600"/>
               </a:spcAft>
             </a:pPr>
             <a:r>
-              <a:rPr sz="1500" b="1" i="0">
-                <a:solidFill>
-                  <a:srgbClr val="000000"/>
-                </a:solidFill>
-                <a:latin typeface="Calibri"/>
-              </a:rPr>
-              <a:t>and invariant across them: a spread</a:t>
-            </a:r>
-          </a:p>
-          <a:p>
-            <a:pPr>
-              <a:spcAft>
-                <a:spcPts val="200"/>
-              </a:spcAft>
-            </a:pPr>
-            <a:r>
-              <a:rPr sz="1500" b="1" i="0">
-                <a:solidFill>
-                  <a:srgbClr val="000000"/>
-                </a:solidFill>
-                <a:latin typeface="Calibri"/>
-              </a:rPr>
-              <a:t>of 0.6 points against SGD's 9.2.</a:t>
-            </a:r>
-          </a:p>
-          <a:p>
-            <a:pPr>
-              <a:spcAft>
-                <a:spcPts val="200"/>
-              </a:spcAft>
-            </a:pPr>
-            <a:r>
-              <a:rPr sz="1500" b="0" i="0">
-                <a:solidFill>
-                  <a:srgbClr val="000000"/>
-                </a:solidFill>
-                <a:latin typeface="Calibri"/>
-              </a:rPr>
-              <a:t>Drift costs a buffer almost nothing,</a:t>
-            </a:r>
-          </a:p>
-          <a:p>
-            <a:pPr>
-              <a:spcAft>
-                <a:spcPts val="200"/>
-              </a:spcAft>
-            </a:pPr>
-            <a:r>
-              <a:rPr sz="1500" b="0" i="0">
-                <a:solidFill>
-                  <a:srgbClr val="000000"/>
-                </a:solidFill>
-                <a:latin typeface="Calibri"/>
-              </a:rPr>
-              <a:t>because a buffer accumulates nothing</a:t>
-            </a:r>
-          </a:p>
-          <a:p>
-            <a:pPr>
-              <a:spcAft>
-                <a:spcPts val="200"/>
-              </a:spcAft>
-            </a:pPr>
-            <a:r>
-              <a:rPr sz="1500" b="0" i="0">
-                <a:solidFill>
-                  <a:srgbClr val="000000"/>
-                </a:solidFill>
-                <a:latin typeface="Calibri"/>
-              </a:rPr>
-              <a:t>for drift to invalidate.</a:t>
-            </a:r>
-          </a:p>
-          <a:p>
-            <a:pPr>
-              <a:spcAft>
-                <a:spcPts val="200"/>
-              </a:spcAft>
-            </a:pPr>
-            <a:r>
-              <a:rPr sz="1500" b="0" i="0">
-                <a:solidFill>
-                  <a:srgbClr val="000000"/>
-                </a:solidFill>
-                <a:latin typeface="Calibri"/>
-              </a:rPr>
-              <a:t>Read records two separate</a:t>
-            </a:r>
-          </a:p>
-          <a:p>
-            <a:pPr>
-              <a:spcAft>
-                <a:spcPts val="200"/>
-              </a:spcAft>
-            </a:pPr>
-            <a:r>
-              <a:rPr sz="1500" b="0" i="0">
-                <a:solidFill>
-                  <a:srgbClr val="000000"/>
-                </a:solidFill>
-                <a:latin typeface="Calibri"/>
-              </a:rPr>
-              <a:t>observations — that buffer capacity</a:t>
-            </a:r>
-          </a:p>
-          <a:p>
-            <a:pPr>
-              <a:spcAft>
-                <a:spcPts val="200"/>
-              </a:spcAft>
-            </a:pPr>
-            <a:r>
-              <a:rPr sz="1500" b="0" i="0">
-                <a:solidFill>
-                  <a:srgbClr val="000000"/>
-                </a:solidFill>
-                <a:latin typeface="Calibri"/>
-              </a:rPr>
-              <a:t>bounds accuracy, and that kNN shows</a:t>
-            </a:r>
-          </a:p>
-          <a:p>
-            <a:pPr>
-              <a:spcAft>
-                <a:spcPts val="200"/>
-              </a:spcAft>
-            </a:pPr>
-            <a:r>
-              <a:rPr sz="1500" b="0" i="0">
-                <a:solidFill>
-                  <a:srgbClr val="000000"/>
-                </a:solidFill>
-                <a:latin typeface="Calibri"/>
-              </a:rPr>
-              <a:t>no upward trend when stationary.</a:t>
-            </a:r>
-          </a:p>
-          <a:p>
-            <a:pPr>
-              <a:spcAft>
-                <a:spcPts val="200"/>
-              </a:spcAft>
-            </a:pPr>
-            <a:r>
-              <a:rPr sz="1500" b="1" i="0">
-                <a:solidFill>
-                  <a:srgbClr val="000000"/>
-                </a:solidFill>
-                <a:latin typeface="Calibri"/>
-              </a:rPr>
-              <a:t>They are one property.</a:t>
+              <a:rPr sz="2500" b="0" i="0">
+                <a:solidFill>
+                  <a:srgbClr val="000000"/>
+                </a:solidFill>
+                <a:latin typeface="Calibri"/>
+              </a:rPr>
+              <a:t>A buffer accumulates nothing for drift to invalidate.</a:t>
             </a:r>
           </a:p>
         </p:txBody>
@@ -7638,8 +6674,8 @@
         </p:nvSpPr>
         <p:spPr>
           <a:xfrm>
-            <a:off x="640080" y="365760"/>
-            <a:ext cx="10911535" cy="731520"/>
+            <a:off x="640080" y="320040"/>
+            <a:ext cx="10911535" cy="914400"/>
           </a:xfrm>
           <a:prstGeom prst="rect">
             <a:avLst/>
@@ -7653,7 +6689,7 @@
           <a:lstStyle/>
           <a:p>
             <a:r>
-              <a:rPr sz="3200" b="1" i="0">
+              <a:rPr sz="4400" b="1" i="0">
                 <a:solidFill>
                   <a:srgbClr val="000000"/>
                 </a:solidFill>
@@ -7664,459 +6700,125 @@
           </a:p>
         </p:txBody>
       </p:sp>
-      <p:graphicFrame>
-        <p:nvGraphicFramePr>
-          <p:cNvPr id="3" name="Table 2"/>
-          <p:cNvGraphicFramePr>
-            <a:graphicFrameLocks noGrp="1"/>
-          </p:cNvGraphicFramePr>
+      <p:sp>
+        <p:nvSpPr>
+          <p:cNvPr id="3" name="TextBox 2"/>
+          <p:cNvSpPr txBox="1"/>
           <p:nvPr/>
-        </p:nvGraphicFramePr>
-        <p:xfrm>
-          <a:off x="640080" y="1554480"/>
-          <a:ext cx="10911533" cy="3566160"/>
-        </p:xfrm>
-        <a:graphic>
-          <a:graphicData uri="http://schemas.openxmlformats.org/drawingml/2006/table">
-            <a:tbl>
-              <a:tblPr bandRow="1">
-                <a:tableStyleId>{5C22544A-7EE6-4342-B048-85BDC9FD1C3A}</a:tableStyleId>
-              </a:tblPr>
-              <a:tblGrid>
-                <a:gridCol w="382860"/>
-                <a:gridCol w="2488595"/>
-                <a:gridCol w="8040078"/>
-              </a:tblGrid>
-              <a:tr h="594360">
-                <a:tc>
-                  <a:txBody>
-                    <a:bodyPr/>
-                    <a:lstStyle/>
-                    <a:p>
-                      <a:pPr algn="l"/>
-                      <a:r>
-                        <a:rPr sz="1800" b="0" i="0">
-                          <a:solidFill>
-                            <a:srgbClr val="000000"/>
-                          </a:solidFill>
-                          <a:latin typeface="Calibri"/>
-                        </a:rPr>
-                        <a:t>1</a:t>
-                      </a:r>
-                    </a:p>
-                  </a:txBody>
-                  <a:tcPr marL="73152" marR="73152" marT="27432" marB="27432">
-                    <a:solidFill>
-                      <a:srgbClr val="FFFFFF"/>
-                    </a:solidFill>
-                  </a:tcPr>
-                </a:tc>
-                <a:tc>
-                  <a:txBody>
-                    <a:bodyPr/>
-                    <a:lstStyle/>
-                    <a:p>
-                      <a:pPr algn="l"/>
-                      <a:r>
-                        <a:rPr sz="1800" b="0" i="0">
-                          <a:solidFill>
-                            <a:srgbClr val="000000"/>
-                          </a:solidFill>
-                          <a:latin typeface="Calibri"/>
-                        </a:rPr>
-                        <a:t>Formulation</a:t>
-                      </a:r>
-                    </a:p>
-                  </a:txBody>
-                  <a:tcPr marL="73152" marR="73152" marT="27432" marB="27432">
-                    <a:solidFill>
-                      <a:srgbClr val="FFFFFF"/>
-                    </a:solidFill>
-                  </a:tcPr>
-                </a:tc>
-                <a:tc>
-                  <a:txBody>
-                    <a:bodyPr/>
-                    <a:lstStyle/>
-                    <a:p>
-                      <a:pPr algn="l"/>
-                      <a:r>
-                        <a:rPr sz="1800" b="0" i="0">
-                          <a:solidFill>
-                            <a:srgbClr val="000000"/>
-                          </a:solidFill>
-                          <a:latin typeface="Calibri"/>
-                        </a:rPr>
-                        <a:t>definition, taxonomy, and which factor of the joint moves</a:t>
-                      </a:r>
-                    </a:p>
-                  </a:txBody>
-                  <a:tcPr marL="73152" marR="73152" marT="27432" marB="27432">
-                    <a:solidFill>
-                      <a:srgbClr val="FFFFFF"/>
-                    </a:solidFill>
-                  </a:tcPr>
-                </a:tc>
-              </a:tr>
-              <a:tr h="594360">
-                <a:tc>
-                  <a:txBody>
-                    <a:bodyPr/>
-                    <a:lstStyle/>
-                    <a:p>
-                      <a:pPr algn="l"/>
-                      <a:r>
-                        <a:rPr sz="1800" b="0" i="0">
-                          <a:solidFill>
-                            <a:srgbClr val="000000"/>
-                          </a:solidFill>
-                          <a:latin typeface="Calibri"/>
-                        </a:rPr>
-                        <a:t>2</a:t>
-                      </a:r>
-                    </a:p>
-                  </a:txBody>
-                  <a:tcPr marL="73152" marR="73152" marT="27432" marB="27432">
-                    <a:solidFill>
-                      <a:srgbClr val="FFFFFF"/>
-                    </a:solidFill>
-                  </a:tcPr>
-                </a:tc>
-                <a:tc>
-                  <a:txBody>
-                    <a:bodyPr/>
-                    <a:lstStyle/>
-                    <a:p>
-                      <a:pPr algn="l"/>
-                      <a:r>
-                        <a:rPr sz="1800" b="0" i="0">
-                          <a:solidFill>
-                            <a:srgbClr val="000000"/>
-                          </a:solidFill>
-                          <a:latin typeface="Calibri"/>
-                        </a:rPr>
-                        <a:t>Methods</a:t>
-                      </a:r>
-                    </a:p>
-                  </a:txBody>
-                  <a:tcPr marL="73152" marR="73152" marT="27432" marB="27432">
-                    <a:solidFill>
-                      <a:srgbClr val="FFFFFF"/>
-                    </a:solidFill>
-                  </a:tcPr>
-                </a:tc>
-                <a:tc>
-                  <a:txBody>
-                    <a:bodyPr/>
-                    <a:lstStyle/>
-                    <a:p>
-                      <a:pPr algn="l"/>
-                      <a:r>
-                        <a:rPr sz="1800" b="0" i="0">
-                          <a:solidFill>
-                            <a:srgbClr val="000000"/>
-                          </a:solidFill>
-                          <a:latin typeface="Calibri"/>
-                        </a:rPr>
-                        <a:t>drift detection, and the three adaptation mechanisms</a:t>
-                      </a:r>
-                    </a:p>
-                  </a:txBody>
-                  <a:tcPr marL="73152" marR="73152" marT="27432" marB="27432">
-                    <a:solidFill>
-                      <a:srgbClr val="FFFFFF"/>
-                    </a:solidFill>
-                  </a:tcPr>
-                </a:tc>
-              </a:tr>
-              <a:tr h="594360">
-                <a:tc>
-                  <a:txBody>
-                    <a:bodyPr/>
-                    <a:lstStyle/>
-                    <a:p>
-                      <a:pPr algn="l"/>
-                      <a:r>
-                        <a:rPr sz="1800" b="0" i="0">
-                          <a:solidFill>
-                            <a:srgbClr val="000000"/>
-                          </a:solidFill>
-                          <a:latin typeface="Calibri"/>
-                        </a:rPr>
-                        <a:t>3</a:t>
-                      </a:r>
-                    </a:p>
-                  </a:txBody>
-                  <a:tcPr marL="73152" marR="73152" marT="27432" marB="27432">
-                    <a:solidFill>
-                      <a:srgbClr val="FFFFFF"/>
-                    </a:solidFill>
-                  </a:tcPr>
-                </a:tc>
-                <a:tc>
-                  <a:txBody>
-                    <a:bodyPr/>
-                    <a:lstStyle/>
-                    <a:p>
-                      <a:pPr algn="l"/>
-                      <a:r>
-                        <a:rPr sz="1800" b="0" i="0">
-                          <a:solidFill>
-                            <a:srgbClr val="000000"/>
-                          </a:solidFill>
-                          <a:latin typeface="Calibri"/>
-                        </a:rPr>
-                        <a:t>Read (2018)</a:t>
-                      </a:r>
-                    </a:p>
-                  </a:txBody>
-                  <a:tcPr marL="73152" marR="73152" marT="27432" marB="27432">
-                    <a:solidFill>
-                      <a:srgbClr val="FFFFFF"/>
-                    </a:solidFill>
-                  </a:tcPr>
-                </a:tc>
-                <a:tc>
-                  <a:txBody>
-                    <a:bodyPr/>
-                    <a:lstStyle/>
-                    <a:p>
-                      <a:pPr algn="l"/>
-                      <a:r>
-                        <a:rPr sz="1800" b="0" i="0">
-                          <a:solidFill>
-                            <a:srgbClr val="000000"/>
-                          </a:solidFill>
-                          <a:latin typeface="Calibri"/>
-                        </a:rPr>
-                        <a:t>the argument that a drifting stream is a time series</a:t>
-                      </a:r>
-                    </a:p>
-                  </a:txBody>
-                  <a:tcPr marL="73152" marR="73152" marT="27432" marB="27432">
-                    <a:solidFill>
-                      <a:srgbClr val="FFFFFF"/>
-                    </a:solidFill>
-                  </a:tcPr>
-                </a:tc>
-              </a:tr>
-              <a:tr h="594360">
-                <a:tc>
-                  <a:txBody>
-                    <a:bodyPr/>
-                    <a:lstStyle/>
-                    <a:p>
-                      <a:pPr algn="l"/>
-                      <a:r>
-                        <a:rPr sz="1800" b="0" i="0">
-                          <a:solidFill>
-                            <a:srgbClr val="000000"/>
-                          </a:solidFill>
-                          <a:latin typeface="Calibri"/>
-                        </a:rPr>
-                        <a:t>4</a:t>
-                      </a:r>
-                    </a:p>
-                  </a:txBody>
-                  <a:tcPr marL="73152" marR="73152" marT="27432" marB="27432">
-                    <a:solidFill>
-                      <a:srgbClr val="FFFFFF"/>
-                    </a:solidFill>
-                  </a:tcPr>
-                </a:tc>
-                <a:tc>
-                  <a:txBody>
-                    <a:bodyPr/>
-                    <a:lstStyle/>
-                    <a:p>
-                      <a:pPr algn="l"/>
-                      <a:r>
-                        <a:rPr sz="1800" b="0" i="0">
-                          <a:solidFill>
-                            <a:srgbClr val="000000"/>
-                          </a:solidFill>
-                          <a:latin typeface="Calibri"/>
-                        </a:rPr>
-                        <a:t>Reproduction</a:t>
-                      </a:r>
-                    </a:p>
-                  </a:txBody>
-                  <a:tcPr marL="73152" marR="73152" marT="27432" marB="27432">
-                    <a:solidFill>
-                      <a:srgbClr val="FFFFFF"/>
-                    </a:solidFill>
-                  </a:tcPr>
-                </a:tc>
-                <a:tc>
-                  <a:txBody>
-                    <a:bodyPr/>
-                    <a:lstStyle/>
-                    <a:p>
-                      <a:pPr algn="l"/>
-                      <a:r>
-                        <a:rPr sz="1800" b="0" i="0">
-                          <a:solidFill>
-                            <a:srgbClr val="000000"/>
-                          </a:solidFill>
-                          <a:latin typeface="Calibri"/>
-                        </a:rPr>
-                        <a:t>Table 2's methods rebuilt; results and discrepancies</a:t>
-                      </a:r>
-                    </a:p>
-                  </a:txBody>
-                  <a:tcPr marL="73152" marR="73152" marT="27432" marB="27432">
-                    <a:solidFill>
-                      <a:srgbClr val="FFFFFF"/>
-                    </a:solidFill>
-                  </a:tcPr>
-                </a:tc>
-              </a:tr>
-              <a:tr h="594360">
-                <a:tc>
-                  <a:txBody>
-                    <a:bodyPr/>
-                    <a:lstStyle/>
-                    <a:p>
-                      <a:pPr algn="l"/>
-                      <a:r>
-                        <a:rPr sz="1800" b="0" i="0">
-                          <a:solidFill>
-                            <a:srgbClr val="000000"/>
-                          </a:solidFill>
-                          <a:latin typeface="Calibri"/>
-                        </a:rPr>
-                        <a:t>5</a:t>
-                      </a:r>
-                    </a:p>
-                  </a:txBody>
-                  <a:tcPr marL="73152" marR="73152" marT="27432" marB="27432">
-                    <a:solidFill>
-                      <a:srgbClr val="FFFFFF"/>
-                    </a:solidFill>
-                  </a:tcPr>
-                </a:tc>
-                <a:tc>
-                  <a:txBody>
-                    <a:bodyPr/>
-                    <a:lstStyle/>
-                    <a:p>
-                      <a:pPr algn="l"/>
-                      <a:r>
-                        <a:rPr sz="1800" b="0" i="0">
-                          <a:solidFill>
-                            <a:srgbClr val="000000"/>
-                          </a:solidFill>
-                          <a:latin typeface="Calibri"/>
-                        </a:rPr>
-                        <a:t>Subsequent work</a:t>
-                      </a:r>
-                    </a:p>
-                  </a:txBody>
-                  <a:tcPr marL="73152" marR="73152" marT="27432" marB="27432">
-                    <a:solidFill>
-                      <a:srgbClr val="FFFFFF"/>
-                    </a:solidFill>
-                  </a:tcPr>
-                </a:tc>
-                <a:tc>
-                  <a:txBody>
-                    <a:bodyPr/>
-                    <a:lstStyle/>
-                    <a:p>
-                      <a:pPr algn="l"/>
-                      <a:r>
-                        <a:rPr sz="1800" b="0" i="0">
-                          <a:solidFill>
-                            <a:srgbClr val="000000"/>
-                          </a:solidFill>
-                          <a:latin typeface="Calibri"/>
-                        </a:rPr>
-                        <a:t>normalisation, online ensembles, proactive adaptation</a:t>
-                      </a:r>
-                    </a:p>
-                  </a:txBody>
-                  <a:tcPr marL="73152" marR="73152" marT="27432" marB="27432">
-                    <a:solidFill>
-                      <a:srgbClr val="FFFFFF"/>
-                    </a:solidFill>
-                  </a:tcPr>
-                </a:tc>
-              </a:tr>
-              <a:tr h="594360">
-                <a:tc>
-                  <a:txBody>
-                    <a:bodyPr/>
-                    <a:lstStyle/>
-                    <a:p>
-                      <a:pPr algn="l"/>
-                      <a:r>
-                        <a:rPr sz="1800" b="0" i="0">
-                          <a:solidFill>
-                            <a:srgbClr val="000000"/>
-                          </a:solidFill>
-                          <a:latin typeface="Calibri"/>
-                        </a:rPr>
-                        <a:t>6</a:t>
-                      </a:r>
-                    </a:p>
-                  </a:txBody>
-                  <a:tcPr marL="73152" marR="73152" marT="27432" marB="27432">
-                    <a:solidFill>
-                      <a:srgbClr val="FFFFFF"/>
-                    </a:solidFill>
-                  </a:tcPr>
-                </a:tc>
-                <a:tc>
-                  <a:txBody>
-                    <a:bodyPr/>
-                    <a:lstStyle/>
-                    <a:p>
-                      <a:pPr algn="l"/>
-                      <a:r>
-                        <a:rPr sz="1800" b="0" i="0">
-                          <a:solidFill>
-                            <a:srgbClr val="000000"/>
-                          </a:solidFill>
-                          <a:latin typeface="Calibri"/>
-                        </a:rPr>
-                        <a:t>Open problems</a:t>
-                      </a:r>
-                    </a:p>
-                  </a:txBody>
-                  <a:tcPr marL="73152" marR="73152" marT="27432" marB="27432">
-                    <a:solidFill>
-                      <a:srgbClr val="FFFFFF"/>
-                    </a:solidFill>
-                  </a:tcPr>
-                </a:tc>
-                <a:tc>
-                  <a:txBody>
-                    <a:bodyPr/>
-                    <a:lstStyle/>
-                    <a:p>
-                      <a:pPr algn="l"/>
-                      <a:r>
-                        <a:rPr sz="1800" b="0" i="0">
-                          <a:solidFill>
-                            <a:srgbClr val="000000"/>
-                          </a:solidFill>
-                          <a:latin typeface="Calibri"/>
-                        </a:rPr>
-                        <a:t>unresolved questions and proposed experiments</a:t>
-                      </a:r>
-                    </a:p>
-                  </a:txBody>
-                  <a:tcPr marL="73152" marR="73152" marT="27432" marB="27432">
-                    <a:solidFill>
-                      <a:srgbClr val="FFFFFF"/>
-                    </a:solidFill>
-                  </a:tcPr>
-                </a:tc>
-              </a:tr>
-            </a:tbl>
-          </a:graphicData>
-        </a:graphic>
-      </p:graphicFrame>
+        </p:nvSpPr>
+        <p:spPr>
+          <a:xfrm>
+            <a:off x="640080" y="1691640"/>
+            <a:ext cx="10911535" cy="4709160"/>
+          </a:xfrm>
+          <a:prstGeom prst="rect">
+            <a:avLst/>
+          </a:prstGeom>
+          <a:noFill/>
+        </p:spPr>
+        <p:txBody>
+          <a:bodyPr wrap="square" lIns="0" tIns="0" bIns="0">
+            <a:spAutoFit/>
+          </a:bodyPr>
+          <a:lstStyle/>
+          <a:p>
+            <a:pPr>
+              <a:spcAft>
+                <a:spcPts val="1600"/>
+              </a:spcAft>
+            </a:pPr>
+            <a:r>
+              <a:rPr sz="3000" b="0" i="0">
+                <a:solidFill>
+                  <a:srgbClr val="000000"/>
+                </a:solidFill>
+                <a:latin typeface="Calibri"/>
+              </a:rPr>
+              <a:t>1.   Formulation</a:t>
+            </a:r>
+          </a:p>
+          <a:p>
+            <a:pPr>
+              <a:spcAft>
+                <a:spcPts val="1600"/>
+              </a:spcAft>
+            </a:pPr>
+            <a:r>
+              <a:rPr sz="3000" b="0" i="0">
+                <a:solidFill>
+                  <a:srgbClr val="000000"/>
+                </a:solidFill>
+                <a:latin typeface="Calibri"/>
+              </a:rPr>
+              <a:t>2.   Methods</a:t>
+            </a:r>
+          </a:p>
+          <a:p>
+            <a:pPr>
+              <a:spcAft>
+                <a:spcPts val="1600"/>
+              </a:spcAft>
+            </a:pPr>
+            <a:r>
+              <a:rPr sz="3000" b="0" i="0">
+                <a:solidFill>
+                  <a:srgbClr val="000000"/>
+                </a:solidFill>
+                <a:latin typeface="Calibri"/>
+              </a:rPr>
+              <a:t>3.   Read (2018)</a:t>
+            </a:r>
+          </a:p>
+          <a:p>
+            <a:pPr>
+              <a:spcAft>
+                <a:spcPts val="1600"/>
+              </a:spcAft>
+            </a:pPr>
+            <a:r>
+              <a:rPr sz="3000" b="0" i="0">
+                <a:solidFill>
+                  <a:srgbClr val="000000"/>
+                </a:solidFill>
+                <a:latin typeface="Calibri"/>
+              </a:rPr>
+              <a:t>4.   Reproduction</a:t>
+            </a:r>
+          </a:p>
+          <a:p>
+            <a:pPr>
+              <a:spcAft>
+                <a:spcPts val="1600"/>
+              </a:spcAft>
+            </a:pPr>
+            <a:r>
+              <a:rPr sz="3000" b="0" i="0">
+                <a:solidFill>
+                  <a:srgbClr val="000000"/>
+                </a:solidFill>
+                <a:latin typeface="Calibri"/>
+              </a:rPr>
+              <a:t>5.   Subsequent work</a:t>
+            </a:r>
+          </a:p>
+          <a:p>
+            <a:pPr>
+              <a:spcAft>
+                <a:spcPts val="1600"/>
+              </a:spcAft>
+            </a:pPr>
+            <a:r>
+              <a:rPr sz="3000" b="0" i="0">
+                <a:solidFill>
+                  <a:srgbClr val="000000"/>
+                </a:solidFill>
+                <a:latin typeface="Calibri"/>
+              </a:rPr>
+              <a:t>6.   Open problems</a:t>
+            </a:r>
+          </a:p>
+        </p:txBody>
+      </p:sp>
     </p:spTree>
   </p:cSld>
   <p:clrMapOvr>
@@ -8143,8 +6845,8 @@
         </p:nvSpPr>
         <p:spPr>
           <a:xfrm>
-            <a:off x="640080" y="365760"/>
-            <a:ext cx="10911535" cy="731520"/>
+            <a:off x="640080" y="320040"/>
+            <a:ext cx="10911535" cy="914400"/>
           </a:xfrm>
           <a:prstGeom prst="rect">
             <a:avLst/>
@@ -8158,62 +6860,28 @@
           <a:lstStyle/>
           <a:p>
             <a:r>
-              <a:rPr sz="3200" b="1" i="0">
+              <a:rPr sz="4400" b="1" i="0">
                 <a:solidFill>
                   <a:srgbClr val="000000"/>
                 </a:solidFill>
                 <a:latin typeface="Calibri"/>
               </a:rPr>
               <a:t>Unstated parameters</a:t>
-            </a:r>
-          </a:p>
-        </p:txBody>
-      </p:sp>
-      <p:sp>
-        <p:nvSpPr>
-          <p:cNvPr id="3" name="TextBox 2"/>
-          <p:cNvSpPr txBox="1"/>
-          <p:nvPr/>
-        </p:nvSpPr>
-        <p:spPr>
-          <a:xfrm>
-            <a:off x="640080" y="1097280"/>
-            <a:ext cx="10911535" cy="411480"/>
-          </a:xfrm>
-          <a:prstGeom prst="rect">
-            <a:avLst/>
-          </a:prstGeom>
-          <a:noFill/>
-        </p:spPr>
-        <p:txBody>
-          <a:bodyPr wrap="square" lIns="0" tIns="0" bIns="0">
-            <a:spAutoFit/>
-          </a:bodyPr>
-          <a:lstStyle/>
-          <a:p>
-            <a:r>
-              <a:rPr sz="1700" b="0" i="0">
-                <a:solidFill>
-                  <a:srgbClr val="000000"/>
-                </a:solidFill>
-                <a:latin typeface="Calibri"/>
-              </a:rPr>
-              <a:t>each alters the reported figures more than any method does</a:t>
             </a:r>
           </a:p>
         </p:txBody>
       </p:sp>
       <p:graphicFrame>
         <p:nvGraphicFramePr>
-          <p:cNvPr id="4" name="Table 3"/>
+          <p:cNvPr id="3" name="Table 2"/>
           <p:cNvGraphicFramePr>
             <a:graphicFrameLocks noGrp="1"/>
           </p:cNvGraphicFramePr>
           <p:nvPr/>
         </p:nvGraphicFramePr>
         <p:xfrm>
-          <a:off x="640080" y="1691640"/>
-          <a:ext cx="10911534" cy="2468880"/>
+          <a:off x="640080" y="1737360"/>
+          <a:ext cx="10911534" cy="2377440"/>
         </p:xfrm>
         <a:graphic>
           <a:graphicData uri="http://schemas.openxmlformats.org/drawingml/2006/table">
@@ -8222,18 +6890,18 @@
                 <a:tableStyleId>{5C22544A-7EE6-4342-B048-85BDC9FD1C3A}</a:tableStyleId>
               </a:tblPr>
               <a:tblGrid>
-                <a:gridCol w="3254317"/>
-                <a:gridCol w="7657217"/>
+                <a:gridCol w="3762598"/>
+                <a:gridCol w="7148936"/>
               </a:tblGrid>
-              <a:tr h="493776">
-                <a:tc>
-                  <a:txBody>
-                    <a:bodyPr/>
-                    <a:lstStyle/>
-                    <a:p>
-                      <a:pPr algn="l"/>
-                      <a:r>
-                        <a:rPr sz="1700" b="1" i="0">
+              <a:tr h="594360">
+                <a:tc>
+                  <a:txBody>
+                    <a:bodyPr/>
+                    <a:lstStyle/>
+                    <a:p>
+                      <a:pPr algn="l"/>
+                      <a:r>
+                        <a:rPr sz="2400" b="1" i="0">
                           <a:solidFill>
                             <a:srgbClr val="000000"/>
                           </a:solidFill>
@@ -8256,7 +6924,7 @@
                     <a:p>
                       <a:pPr algn="l"/>
                       <a:r>
-                        <a:rPr sz="1700" b="1" i="0">
+                        <a:rPr sz="2400" b="1" i="0">
                           <a:solidFill>
                             <a:srgbClr val="000000"/>
                           </a:solidFill>
@@ -8273,44 +6941,44 @@
                   </a:tcPr>
                 </a:tc>
               </a:tr>
-              <a:tr h="493776">
-                <a:tc>
-                  <a:txBody>
-                    <a:bodyPr/>
-                    <a:lstStyle/>
-                    <a:p>
-                      <a:pPr algn="l"/>
-                      <a:r>
-                        <a:rPr sz="1700" b="0" i="0">
-                          <a:solidFill>
-                            <a:srgbClr val="000000"/>
-                          </a:solidFill>
-                          <a:latin typeface="Calibri"/>
-                        </a:rPr>
-                        <a:t>Synthetic input dimension</a:t>
-                      </a:r>
-                    </a:p>
-                  </a:txBody>
-                  <a:tcPr marL="73152" marR="73152" marT="27432" marB="27432">
-                    <a:solidFill>
-                      <a:srgbClr val="FFFFFF"/>
-                    </a:solidFill>
-                  </a:tcPr>
-                </a:tc>
-                <a:tc>
-                  <a:txBody>
-                    <a:bodyPr/>
-                    <a:lstStyle/>
-                    <a:p>
-                      <a:pPr algn="l"/>
-                      <a:r>
-                        <a:rPr sz="1700" b="0" i="0">
-                          <a:solidFill>
-                            <a:srgbClr val="000000"/>
-                          </a:solidFill>
-                          <a:latin typeface="Calibri"/>
-                        </a:rPr>
-                        <a:t>SGD attains 57.7 / 74.5 / 83.1 / 92.2 at d = 2 / 5 / 10 / 20</a:t>
+              <a:tr h="594360">
+                <a:tc>
+                  <a:txBody>
+                    <a:bodyPr/>
+                    <a:lstStyle/>
+                    <a:p>
+                      <a:pPr algn="l"/>
+                      <a:r>
+                        <a:rPr sz="2400" b="0" i="0">
+                          <a:solidFill>
+                            <a:srgbClr val="000000"/>
+                          </a:solidFill>
+                          <a:latin typeface="Calibri"/>
+                        </a:rPr>
+                        <a:t>Synthetic dimension</a:t>
+                      </a:r>
+                    </a:p>
+                  </a:txBody>
+                  <a:tcPr marL="73152" marR="73152" marT="27432" marB="27432">
+                    <a:solidFill>
+                      <a:srgbClr val="FFFFFF"/>
+                    </a:solidFill>
+                  </a:tcPr>
+                </a:tc>
+                <a:tc>
+                  <a:txBody>
+                    <a:bodyPr/>
+                    <a:lstStyle/>
+                    <a:p>
+                      <a:pPr algn="l"/>
+                      <a:r>
+                        <a:rPr sz="2400" b="0" i="0">
+                          <a:solidFill>
+                            <a:srgbClr val="000000"/>
+                          </a:solidFill>
+                          <a:latin typeface="Calibri"/>
+                        </a:rPr>
+                        <a:t>SGD 57.7 → 92.2 as d = 2 → 20</a:t>
                       </a:r>
                     </a:p>
                   </a:txBody>
@@ -8321,44 +6989,44 @@
                   </a:tcPr>
                 </a:tc>
               </a:tr>
-              <a:tr h="493776">
-                <a:tc>
-                  <a:txBody>
-                    <a:bodyPr/>
-                    <a:lstStyle/>
-                    <a:p>
-                      <a:pPr algn="l"/>
-                      <a:r>
-                        <a:rPr sz="1700" b="0" i="0">
-                          <a:solidFill>
-                            <a:srgbClr val="000000"/>
-                          </a:solidFill>
-                          <a:latin typeface="Calibri"/>
-                        </a:rPr>
-                        <a:t>PBF-SGD polynomial degree</a:t>
-                      </a:r>
-                    </a:p>
-                  </a:txBody>
-                  <a:tcPr marL="73152" marR="73152" marT="27432" marB="27432">
-                    <a:solidFill>
-                      <a:srgbClr val="FFFFFF"/>
-                    </a:solidFill>
-                  </a:tcPr>
-                </a:tc>
-                <a:tc>
-                  <a:txBody>
-                    <a:bodyPr/>
-                    <a:lstStyle/>
-                    <a:p>
-                      <a:pPr algn="l"/>
-                      <a:r>
-                        <a:rPr sz="1700" b="0" i="0">
-                          <a:solidFill>
-                            <a:srgbClr val="000000"/>
-                          </a:solidFill>
-                          <a:latin typeface="Calibri"/>
-                        </a:rPr>
-                        <a:t>the specified degree 3 is 3.3 points below degree 2</a:t>
+              <a:tr h="594360">
+                <a:tc>
+                  <a:txBody>
+                    <a:bodyPr/>
+                    <a:lstStyle/>
+                    <a:p>
+                      <a:pPr algn="l"/>
+                      <a:r>
+                        <a:rPr sz="2400" b="0" i="0">
+                          <a:solidFill>
+                            <a:srgbClr val="000000"/>
+                          </a:solidFill>
+                          <a:latin typeface="Calibri"/>
+                        </a:rPr>
+                        <a:t>PBF-SGD degree</a:t>
+                      </a:r>
+                    </a:p>
+                  </a:txBody>
+                  <a:tcPr marL="73152" marR="73152" marT="27432" marB="27432">
+                    <a:solidFill>
+                      <a:srgbClr val="FFFFFF"/>
+                    </a:solidFill>
+                  </a:tcPr>
+                </a:tc>
+                <a:tc>
+                  <a:txBody>
+                    <a:bodyPr/>
+                    <a:lstStyle/>
+                    <a:p>
+                      <a:pPr algn="l"/>
+                      <a:r>
+                        <a:rPr sz="2400" b="0" i="0">
+                          <a:solidFill>
+                            <a:srgbClr val="000000"/>
+                          </a:solidFill>
+                          <a:latin typeface="Calibri"/>
+                        </a:rPr>
+                        <a:t>degree 3 is 3.3 points below degree 2</a:t>
                       </a:r>
                     </a:p>
                   </a:txBody>
@@ -8369,92 +7037,44 @@
                   </a:tcPr>
                 </a:tc>
               </a:tr>
-              <a:tr h="493776">
-                <a:tc>
-                  <a:txBody>
-                    <a:bodyPr/>
-                    <a:lstStyle/>
-                    <a:p>
-                      <a:pPr algn="l"/>
-                      <a:r>
-                        <a:rPr sz="1700" b="0" i="0">
-                          <a:solidFill>
-                            <a:srgbClr val="000000"/>
-                          </a:solidFill>
-                          <a:latin typeface="Calibri"/>
-                        </a:rPr>
-                        <a:t>Electricity attribute count</a:t>
-                      </a:r>
-                    </a:p>
-                  </a:txBody>
-                  <a:tcPr marL="73152" marR="73152" marT="27432" marB="27432">
-                    <a:solidFill>
-                      <a:srgbClr val="FFFFFF"/>
-                    </a:solidFill>
-                  </a:tcPr>
-                </a:tc>
-                <a:tc>
-                  <a:txBody>
-                    <a:bodyPr/>
-                    <a:lstStyle/>
-                    <a:p>
-                      <a:pPr algn="l"/>
-                      <a:r>
-                        <a:rPr sz="1700" b="0" i="0">
-                          <a:solidFill>
-                            <a:srgbClr val="000000"/>
-                          </a:solidFill>
-                          <a:latin typeface="Calibri"/>
-                        </a:rPr>
-                        <a:t>stated as 6; the data file declares 8</a:t>
-                      </a:r>
-                    </a:p>
-                  </a:txBody>
-                  <a:tcPr marL="73152" marR="73152" marT="27432" marB="27432">
-                    <a:solidFill>
-                      <a:srgbClr val="FFFFFF"/>
-                    </a:solidFill>
-                  </a:tcPr>
-                </a:tc>
-              </a:tr>
-              <a:tr h="493776">
-                <a:tc>
-                  <a:txBody>
-                    <a:bodyPr/>
-                    <a:lstStyle/>
-                    <a:p>
-                      <a:pPr algn="l"/>
-                      <a:r>
-                        <a:rPr sz="1700" b="0" i="0">
-                          <a:solidFill>
-                            <a:srgbClr val="000000"/>
-                          </a:solidFill>
-                          <a:latin typeface="Calibri"/>
-                        </a:rPr>
-                        <a:t>L2 strength for SGD</a:t>
-                      </a:r>
-                    </a:p>
-                  </a:txBody>
-                  <a:tcPr marL="73152" marR="73152" marT="27432" marB="27432">
-                    <a:solidFill>
-                      <a:srgbClr val="FFFFFF"/>
-                    </a:solidFill>
-                  </a:tcPr>
-                </a:tc>
-                <a:tc>
-                  <a:txBody>
-                    <a:bodyPr/>
-                    <a:lstStyle/>
-                    <a:p>
-                      <a:pPr algn="l"/>
-                      <a:r>
-                        <a:rPr sz="1700" b="0" i="0">
-                          <a:solidFill>
-                            <a:srgbClr val="000000"/>
-                          </a:solidFill>
-                          <a:latin typeface="Calibri"/>
-                        </a:rPr>
-                        <a:t>unstated; scikit-multiflow default assumed</a:t>
+              <a:tr h="594360">
+                <a:tc>
+                  <a:txBody>
+                    <a:bodyPr/>
+                    <a:lstStyle/>
+                    <a:p>
+                      <a:pPr algn="l"/>
+                      <a:r>
+                        <a:rPr sz="2400" b="0" i="0">
+                          <a:solidFill>
+                            <a:srgbClr val="000000"/>
+                          </a:solidFill>
+                          <a:latin typeface="Calibri"/>
+                        </a:rPr>
+                        <a:t>Electricity attributes</a:t>
+                      </a:r>
+                    </a:p>
+                  </a:txBody>
+                  <a:tcPr marL="73152" marR="73152" marT="27432" marB="27432">
+                    <a:solidFill>
+                      <a:srgbClr val="FFFFFF"/>
+                    </a:solidFill>
+                  </a:tcPr>
+                </a:tc>
+                <a:tc>
+                  <a:txBody>
+                    <a:bodyPr/>
+                    <a:lstStyle/>
+                    <a:p>
+                      <a:pPr algn="l"/>
+                      <a:r>
+                        <a:rPr sz="2400" b="0" i="0">
+                          <a:solidFill>
+                            <a:srgbClr val="000000"/>
+                          </a:solidFill>
+                          <a:latin typeface="Calibri"/>
+                        </a:rPr>
+                        <a:t>stated as 6; the file declares 8</a:t>
                       </a:r>
                     </a:p>
                   </a:txBody>
@@ -8471,14 +7091,14 @@
       </p:graphicFrame>
       <p:sp>
         <p:nvSpPr>
-          <p:cNvPr id="5" name="TextBox 4"/>
+          <p:cNvPr id="4" name="TextBox 3"/>
           <p:cNvSpPr txBox="1"/>
           <p:nvPr/>
         </p:nvSpPr>
         <p:spPr>
           <a:xfrm>
-            <a:off x="640080" y="4343400"/>
-            <a:ext cx="10911535" cy="2057400"/>
+            <a:off x="640080" y="4434840"/>
+            <a:ext cx="10911535" cy="1965960"/>
           </a:xfrm>
           <a:prstGeom prst="rect">
             <a:avLst/>
@@ -8493,99 +7113,33 @@
           <a:p>
             <a:pPr>
               <a:spcAft>
-                <a:spcPts val="600"/>
+                <a:spcPts val="800"/>
               </a:spcAft>
             </a:pPr>
             <a:r>
-              <a:rPr sz="1700" b="0" i="0">
-                <a:solidFill>
-                  <a:srgbClr val="000000"/>
-                </a:solidFill>
-                <a:latin typeface="Calibri"/>
-              </a:rPr>
-              <a:t>The dimension is decisive. The reported Synthetic row, 93.6–96.0, is attainable only</a:t>
+              <a:rPr sz="2700" b="0" i="0">
+                <a:solidFill>
+                  <a:srgbClr val="000000"/>
+                </a:solidFill>
+                <a:latin typeface="Calibri"/>
+              </a:rPr>
+              <a:t>The reported Synthetic row is attainable only at large d —</a:t>
             </a:r>
           </a:p>
           <a:p>
             <a:pPr>
               <a:spcAft>
-                <a:spcPts val="600"/>
+                <a:spcPts val="800"/>
               </a:spcAft>
             </a:pPr>
             <a:r>
-              <a:rPr sz="1700" b="0" i="0">
-                <a:solidFill>
-                  <a:srgbClr val="000000"/>
-                </a:solidFill>
-                <a:latin typeface="Calibri"/>
-              </a:rPr>
-              <a:t>at the upper end, and not at the d = 2 of the paper's Figure 4.</a:t>
-            </a:r>
-          </a:p>
-          <a:p>
-            <a:pPr>
-              <a:spcAft>
-                <a:spcPts val="600"/>
-              </a:spcAft>
-            </a:pPr>
-            <a:r>
-              <a:rPr sz="1700" b="1" i="0">
-                <a:solidFill>
-                  <a:srgbClr val="000000"/>
-                </a:solidFill>
-                <a:latin typeface="Calibri"/>
-              </a:rPr>
-              <a:t>A related observation: on the Synthetic stream SGD attains 92.2 and PBF-SGD 88.5.</a:t>
-            </a:r>
-          </a:p>
-          <a:p>
-            <a:pPr>
-              <a:spcAft>
-                <a:spcPts val="600"/>
-              </a:spcAft>
-            </a:pPr>
-            <a:r>
-              <a:rPr sz="1700" b="0" i="0">
-                <a:solidFill>
-                  <a:srgbClr val="000000"/>
-                </a:solidFill>
-                <a:latin typeface="Calibri"/>
-              </a:rPr>
-              <a:t>That concept is a hyperplane θ</a:t>
-            </a:r>
-            <a:r>
-              <a:rPr sz="1224" b="0" i="0" baseline="30000">
-                <a:solidFill>
-                  <a:srgbClr val="000000"/>
-                </a:solidFill>
-                <a:latin typeface="Calibri"/>
-              </a:rPr>
-              <a:t>⊤</a:t>
-            </a:r>
-            <a:r>
-              <a:rPr sz="1700" b="0" i="0">
-                <a:solidFill>
-                  <a:srgbClr val="000000"/>
-                </a:solidFill>
-                <a:latin typeface="Calibri"/>
-              </a:rPr>
-              <a:t>x = 0, linear by construction, so a degree-3 basis</a:t>
-            </a:r>
-          </a:p>
-          <a:p>
-            <a:pPr>
-              <a:spcAft>
-                <a:spcPts val="600"/>
-              </a:spcAft>
-            </a:pPr>
-            <a:r>
-              <a:rPr sz="1700" b="0" i="0">
-                <a:solidFill>
-                  <a:srgbClr val="000000"/>
-                </a:solidFill>
-                <a:latin typeface="Calibri"/>
-              </a:rPr>
-              <a:t>contributes 1,770 parameters of variance and no expressive power.</a:t>
+              <a:rPr sz="2700" b="0" i="0">
+                <a:solidFill>
+                  <a:srgbClr val="000000"/>
+                </a:solidFill>
+                <a:latin typeface="Calibri"/>
+              </a:rPr>
+              <a:t>not at the d = 2 of the paper's own Figure 4.</a:t>
             </a:r>
           </a:p>
         </p:txBody>
@@ -8632,7 +7186,7 @@
           <a:p>
             <a:pPr algn="l"/>
             <a:r>
-              <a:rPr sz="3600" b="1" i="0">
+              <a:rPr sz="4400" b="1" i="0">
                 <a:solidFill>
                   <a:srgbClr val="000000"/>
                 </a:solidFill>
@@ -8651,8 +7205,8 @@
         </p:nvSpPr>
         <p:spPr>
           <a:xfrm>
-            <a:off x="640080" y="3566160"/>
-            <a:ext cx="10911535" cy="2834640"/>
+            <a:off x="640080" y="3657600"/>
+            <a:ext cx="10911535" cy="2743200"/>
           </a:xfrm>
           <a:prstGeom prst="rect">
             <a:avLst/>
@@ -8667,17 +7221,17 @@
           <a:p>
             <a:pPr>
               <a:spcAft>
-                <a:spcPts val="1000"/>
+                <a:spcPts val="1400"/>
               </a:spcAft>
             </a:pPr>
             <a:r>
-              <a:rPr sz="1800" b="0" i="0">
-                <a:solidFill>
-                  <a:srgbClr val="000000"/>
-                </a:solidFill>
-                <a:latin typeface="Calibri"/>
-              </a:rPr>
-              <a:t>The forecasting problem Read posed was formulated and solved in 2025.</a:t>
+              <a:rPr sz="2400" b="0" i="0">
+                <a:solidFill>
+                  <a:srgbClr val="000000"/>
+                </a:solidFill>
+                <a:latin typeface="Calibri"/>
+              </a:rPr>
+              <a:t>The forecasting problem Read posed was solved in 2025.</a:t>
             </a:r>
           </a:p>
         </p:txBody>
@@ -8708,8 +7262,8 @@
         </p:nvSpPr>
         <p:spPr>
           <a:xfrm>
-            <a:off x="640080" y="365760"/>
-            <a:ext cx="10911535" cy="731520"/>
+            <a:off x="640080" y="320040"/>
+            <a:ext cx="10911535" cy="914400"/>
           </a:xfrm>
           <a:prstGeom prst="rect">
             <a:avLst/>
@@ -8723,7 +7277,7 @@
           <a:lstStyle/>
           <a:p>
             <a:r>
-              <a:rPr sz="3200" b="1" i="0">
+              <a:rPr sz="4400" b="1" i="0">
                 <a:solidFill>
                   <a:srgbClr val="000000"/>
                 </a:solidFill>
@@ -8743,8 +7297,8 @@
           <p:nvPr/>
         </p:nvGraphicFramePr>
         <p:xfrm>
-          <a:off x="640080" y="1463040"/>
-          <a:ext cx="10911534" cy="2743200"/>
+          <a:off x="640080" y="1691640"/>
+          <a:ext cx="10911533" cy="2651760"/>
         </p:xfrm>
         <a:graphic>
           <a:graphicData uri="http://schemas.openxmlformats.org/drawingml/2006/table">
@@ -8753,19 +7307,19 @@
                 <a:tableStyleId>{5C22544A-7EE6-4342-B048-85BDC9FD1C3A}</a:tableStyleId>
               </a:tblPr>
               <a:tblGrid>
-                <a:gridCol w="2182307"/>
-                <a:gridCol w="5637626"/>
-                <a:gridCol w="3091601"/>
+                <a:gridCol w="3010078"/>
+                <a:gridCol w="4891377"/>
+                <a:gridCol w="3010078"/>
               </a:tblGrid>
-              <a:tr h="548640">
-                <a:tc>
-                  <a:txBody>
-                    <a:bodyPr/>
-                    <a:lstStyle/>
-                    <a:p>
-                      <a:pPr algn="l"/>
-                      <a:r>
-                        <a:rPr sz="1700" b="1" i="0">
+              <a:tr h="530352">
+                <a:tc>
+                  <a:txBody>
+                    <a:bodyPr/>
+                    <a:lstStyle/>
+                    <a:p>
+                      <a:pPr algn="l"/>
+                      <a:r>
+                        <a:rPr sz="2300" b="1" i="0">
                           <a:solidFill>
                             <a:srgbClr val="000000"/>
                           </a:solidFill>
@@ -8788,7 +7342,7 @@
                     <a:p>
                       <a:pPr algn="l"/>
                       <a:r>
-                        <a:rPr sz="1700" b="1" i="0">
+                        <a:rPr sz="2300" b="1" i="0">
                           <a:solidFill>
                             <a:srgbClr val="000000"/>
                           </a:solidFill>
@@ -8811,13 +7365,13 @@
                     <a:p>
                       <a:pPr algn="l"/>
                       <a:r>
-                        <a:rPr sz="1700" b="1" i="0">
-                          <a:solidFill>
-                            <a:srgbClr val="000000"/>
-                          </a:solidFill>
-                          <a:latin typeface="Calibri"/>
-                        </a:rPr>
-                        <a:t>representative work</a:t>
+                        <a:rPr sz="2300" b="1" i="0">
+                          <a:solidFill>
+                            <a:srgbClr val="000000"/>
+                          </a:solidFill>
+                          <a:latin typeface="Calibri"/>
+                        </a:rPr>
+                        <a:t>work</a:t>
                       </a:r>
                     </a:p>
                   </a:txBody>
@@ -8828,15 +7382,15 @@
                   </a:tcPr>
                 </a:tc>
               </a:tr>
-              <a:tr h="548640">
-                <a:tc>
-                  <a:txBody>
-                    <a:bodyPr/>
-                    <a:lstStyle/>
-                    <a:p>
-                      <a:pPr algn="l"/>
-                      <a:r>
-                        <a:rPr sz="1700" b="0" i="0">
+              <a:tr h="530352">
+                <a:tc>
+                  <a:txBody>
+                    <a:bodyPr/>
+                    <a:lstStyle/>
+                    <a:p>
+                      <a:pPr algn="l"/>
+                      <a:r>
+                        <a:rPr sz="2300" b="0" i="0">
                           <a:solidFill>
                             <a:srgbClr val="000000"/>
                           </a:solidFill>
@@ -8859,36 +7413,36 @@
                     <a:p>
                       <a:pPr algn="l"/>
                       <a:r>
-                        <a:rPr sz="1700" b="0" i="0">
-                          <a:solidFill>
-                            <a:srgbClr val="000000"/>
-                          </a:solidFill>
-                          <a:latin typeface="Calibri"/>
-                        </a:rPr>
-                        <a:t>remove shifting marginals; leave p(y | x) alone</a:t>
-                      </a:r>
-                    </a:p>
-                  </a:txBody>
-                  <a:tcPr marL="73152" marR="73152" marT="27432" marB="27432">
-                    <a:solidFill>
-                      <a:srgbClr val="FFFFFF"/>
-                    </a:solidFill>
-                  </a:tcPr>
-                </a:tc>
-                <a:tc>
-                  <a:txBody>
-                    <a:bodyPr/>
-                    <a:lstStyle/>
-                    <a:p>
-                      <a:pPr algn="l"/>
-                      <a:r>
-                        <a:rPr sz="1700" b="0" i="0">
-                          <a:solidFill>
-                            <a:srgbClr val="000000"/>
-                          </a:solidFill>
-                          <a:latin typeface="Calibri"/>
-                        </a:rPr>
-                        <a:t>RevIN, Dish-TS, SAN</a:t>
+                        <a:rPr sz="2300" b="0" i="0">
+                          <a:solidFill>
+                            <a:srgbClr val="000000"/>
+                          </a:solidFill>
+                          <a:latin typeface="Calibri"/>
+                        </a:rPr>
+                        <a:t>remove shifting marginals</a:t>
+                      </a:r>
+                    </a:p>
+                  </a:txBody>
+                  <a:tcPr marL="73152" marR="73152" marT="27432" marB="27432">
+                    <a:solidFill>
+                      <a:srgbClr val="FFFFFF"/>
+                    </a:solidFill>
+                  </a:tcPr>
+                </a:tc>
+                <a:tc>
+                  <a:txBody>
+                    <a:bodyPr/>
+                    <a:lstStyle/>
+                    <a:p>
+                      <a:pPr algn="l"/>
+                      <a:r>
+                        <a:rPr sz="2300" b="0" i="0">
+                          <a:solidFill>
+                            <a:srgbClr val="000000"/>
+                          </a:solidFill>
+                          <a:latin typeface="Calibri"/>
+                        </a:rPr>
+                        <a:t>RevIN, SAN</a:t>
                       </a:r>
                     </a:p>
                   </a:txBody>
@@ -8899,15 +7453,15 @@
                   </a:tcPr>
                 </a:tc>
               </a:tr>
-              <a:tr h="548640">
-                <a:tc>
-                  <a:txBody>
-                    <a:bodyPr/>
-                    <a:lstStyle/>
-                    <a:p>
-                      <a:pPr algn="l"/>
-                      <a:r>
-                        <a:rPr sz="1700" b="0" i="0">
+              <a:tr h="530352">
+                <a:tc>
+                  <a:txBody>
+                    <a:bodyPr/>
+                    <a:lstStyle/>
+                    <a:p>
+                      <a:pPr algn="l"/>
+                      <a:r>
+                        <a:rPr sz="2300" b="0" i="0">
                           <a:solidFill>
                             <a:srgbClr val="000000"/>
                           </a:solidFill>
@@ -8930,30 +7484,30 @@
                     <a:p>
                       <a:pPr algn="l"/>
                       <a:r>
-                        <a:rPr sz="1700" b="0" i="0">
-                          <a:solidFill>
-                            <a:srgbClr val="000000"/>
-                          </a:solidFill>
-                          <a:latin typeface="Calibri"/>
-                        </a:rPr>
-                        <a:t>balance adaptation against recall of prior patterns</a:t>
-                      </a:r>
-                    </a:p>
-                  </a:txBody>
-                  <a:tcPr marL="73152" marR="73152" marT="27432" marB="27432">
-                    <a:solidFill>
-                      <a:srgbClr val="FFFFFF"/>
-                    </a:solidFill>
-                  </a:tcPr>
-                </a:tc>
-                <a:tc>
-                  <a:txBody>
-                    <a:bodyPr/>
-                    <a:lstStyle/>
-                    <a:p>
-                      <a:pPr algn="l"/>
-                      <a:r>
-                        <a:rPr sz="1700" b="0" i="0">
+                        <a:rPr sz="2300" b="0" i="0">
+                          <a:solidFill>
+                            <a:srgbClr val="000000"/>
+                          </a:solidFill>
+                          <a:latin typeface="Calibri"/>
+                        </a:rPr>
+                        <a:t>adapt vs recall old patterns</a:t>
+                      </a:r>
+                    </a:p>
+                  </a:txBody>
+                  <a:tcPr marL="73152" marR="73152" marT="27432" marB="27432">
+                    <a:solidFill>
+                      <a:srgbClr val="FFFFFF"/>
+                    </a:solidFill>
+                  </a:tcPr>
+                </a:tc>
+                <a:tc>
+                  <a:txBody>
+                    <a:bodyPr/>
+                    <a:lstStyle/>
+                    <a:p>
+                      <a:pPr algn="l"/>
+                      <a:r>
+                        <a:rPr sz="2300" b="0" i="0">
                           <a:solidFill>
                             <a:srgbClr val="000000"/>
                           </a:solidFill>
@@ -8970,15 +7524,15 @@
                   </a:tcPr>
                 </a:tc>
               </a:tr>
-              <a:tr h="548640">
-                <a:tc>
-                  <a:txBody>
-                    <a:bodyPr/>
-                    <a:lstStyle/>
-                    <a:p>
-                      <a:pPr algn="l"/>
-                      <a:r>
-                        <a:rPr sz="1700" b="0" i="0">
+              <a:tr h="530352">
+                <a:tc>
+                  <a:txBody>
+                    <a:bodyPr/>
+                    <a:lstStyle/>
+                    <a:p>
+                      <a:pPr algn="l"/>
+                      <a:r>
+                        <a:rPr sz="2300" b="0" i="0">
                           <a:solidFill>
                             <a:srgbClr val="000000"/>
                           </a:solidFill>
@@ -9001,36 +7555,36 @@
                     <a:p>
                       <a:pPr algn="l"/>
                       <a:r>
-                        <a:rPr sz="1700" b="0" i="0">
-                          <a:solidFill>
-                            <a:srgbClr val="000000"/>
-                          </a:solidFill>
-                          <a:latin typeface="Calibri"/>
-                        </a:rPr>
-                        <a:t>retain one model per concept; select the nearest</a:t>
-                      </a:r>
-                    </a:p>
-                  </a:txBody>
-                  <a:tcPr marL="73152" marR="73152" marT="27432" marB="27432">
-                    <a:solidFill>
-                      <a:srgbClr val="FFFFFF"/>
-                    </a:solidFill>
-                  </a:tcPr>
-                </a:tc>
-                <a:tc>
-                  <a:txBody>
-                    <a:bodyPr/>
-                    <a:lstStyle/>
-                    <a:p>
-                      <a:pPr algn="l"/>
-                      <a:r>
-                        <a:rPr sz="1700" b="0" i="0">
-                          <a:solidFill>
-                            <a:srgbClr val="000000"/>
-                          </a:solidFill>
-                          <a:latin typeface="Calibri"/>
-                        </a:rPr>
-                        <a:t>CEP, for recurrence</a:t>
+                        <a:rPr sz="2300" b="0" i="0">
+                          <a:solidFill>
+                            <a:srgbClr val="000000"/>
+                          </a:solidFill>
+                          <a:latin typeface="Calibri"/>
+                        </a:rPr>
+                        <a:t>one model per concept</a:t>
+                      </a:r>
+                    </a:p>
+                  </a:txBody>
+                  <a:tcPr marL="73152" marR="73152" marT="27432" marB="27432">
+                    <a:solidFill>
+                      <a:srgbClr val="FFFFFF"/>
+                    </a:solidFill>
+                  </a:tcPr>
+                </a:tc>
+                <a:tc>
+                  <a:txBody>
+                    <a:bodyPr/>
+                    <a:lstStyle/>
+                    <a:p>
+                      <a:pPr algn="l"/>
+                      <a:r>
+                        <a:rPr sz="2300" b="0" i="0">
+                          <a:solidFill>
+                            <a:srgbClr val="000000"/>
+                          </a:solidFill>
+                          <a:latin typeface="Calibri"/>
+                        </a:rPr>
+                        <a:t>CEP</a:t>
                       </a:r>
                     </a:p>
                   </a:txBody>
@@ -9041,15 +7595,15 @@
                   </a:tcPr>
                 </a:tc>
               </a:tr>
-              <a:tr h="548640">
-                <a:tc>
-                  <a:txBody>
-                    <a:bodyPr/>
-                    <a:lstStyle/>
-                    <a:p>
-                      <a:pPr algn="l"/>
-                      <a:r>
-                        <a:rPr sz="1700" b="0" i="0">
+              <a:tr h="530352">
+                <a:tc>
+                  <a:txBody>
+                    <a:bodyPr/>
+                    <a:lstStyle/>
+                    <a:p>
+                      <a:pPr algn="l"/>
+                      <a:r>
+                        <a:rPr sz="2300" b="0" i="0">
                           <a:solidFill>
                             <a:srgbClr val="000000"/>
                           </a:solidFill>
@@ -9072,36 +7626,36 @@
                     <a:p>
                       <a:pPr algn="l"/>
                       <a:r>
-                        <a:rPr sz="1700" b="0" i="0">
-                          <a:solidFill>
-                            <a:srgbClr val="000000"/>
-                          </a:solidFill>
-                          <a:latin typeface="Calibri"/>
-                        </a:rPr>
-                        <a:t>predict the parameter shift before error accrues</a:t>
-                      </a:r>
-                    </a:p>
-                  </a:txBody>
-                  <a:tcPr marL="73152" marR="73152" marT="27432" marB="27432">
-                    <a:solidFill>
-                      <a:srgbClr val="FFFFFF"/>
-                    </a:solidFill>
-                  </a:tcPr>
-                </a:tc>
-                <a:tc>
-                  <a:txBody>
-                    <a:bodyPr/>
-                    <a:lstStyle/>
-                    <a:p>
-                      <a:pPr algn="l"/>
-                      <a:r>
-                        <a:rPr sz="1700" b="0" i="0">
-                          <a:solidFill>
-                            <a:srgbClr val="000000"/>
-                          </a:solidFill>
-                          <a:latin typeface="Calibri"/>
-                        </a:rPr>
-                        <a:t>Proceed, KDD'25</a:t>
+                        <a:rPr sz="2300" b="0" i="0">
+                          <a:solidFill>
+                            <a:srgbClr val="000000"/>
+                          </a:solidFill>
+                          <a:latin typeface="Calibri"/>
+                        </a:rPr>
+                        <a:t>predict the parameter shift</a:t>
+                      </a:r>
+                    </a:p>
+                  </a:txBody>
+                  <a:tcPr marL="73152" marR="73152" marT="27432" marB="27432">
+                    <a:solidFill>
+                      <a:srgbClr val="FFFFFF"/>
+                    </a:solidFill>
+                  </a:tcPr>
+                </a:tc>
+                <a:tc>
+                  <a:txBody>
+                    <a:bodyPr/>
+                    <a:lstStyle/>
+                    <a:p>
+                      <a:pPr algn="l"/>
+                      <a:r>
+                        <a:rPr sz="2300" b="0" i="0">
+                          <a:solidFill>
+                            <a:srgbClr val="000000"/>
+                          </a:solidFill>
+                          <a:latin typeface="Calibri"/>
+                        </a:rPr>
+                        <a:t>Proceed</a:t>
                       </a:r>
                     </a:p>
                   </a:txBody>
@@ -9124,8 +7678,8 @@
         </p:nvSpPr>
         <p:spPr>
           <a:xfrm>
-            <a:off x="640080" y="4434840"/>
-            <a:ext cx="10911535" cy="1965960"/>
+            <a:off x="640080" y="4617720"/>
+            <a:ext cx="10911535" cy="1783080"/>
           </a:xfrm>
           <a:prstGeom prst="rect">
             <a:avLst/>
@@ -9144,13 +7698,13 @@
               </a:spcAft>
             </a:pPr>
             <a:r>
-              <a:rPr sz="1700" b="0" i="0">
-                <a:solidFill>
-                  <a:srgbClr val="000000"/>
-                </a:solidFill>
-                <a:latin typeface="Calibri"/>
-              </a:rPr>
-              <a:t>Only the last realises Read's proposal. Proceed estimates the drift between recent</a:t>
+              <a:rPr sz="2600" b="0" i="0">
+                <a:solidFill>
+                  <a:srgbClr val="000000"/>
+                </a:solidFill>
+                <a:latin typeface="Calibri"/>
+              </a:rPr>
+              <a:t>Only Proceed realises Read's proposal, mapping drift to</a:t>
             </a:r>
           </a:p>
           <a:p>
@@ -9160,29 +7714,13 @@
               </a:spcAft>
             </a:pPr>
             <a:r>
-              <a:rPr sz="1700" b="0" i="0">
-                <a:solidFill>
-                  <a:srgbClr val="000000"/>
-                </a:solidFill>
-                <a:latin typeface="Calibri"/>
-              </a:rPr>
-              <a:t>training data and the current test instance, then maps that estimate to a parameter</a:t>
-            </a:r>
-          </a:p>
-          <a:p>
-            <a:pPr>
-              <a:spcAft>
-                <a:spcPts val="600"/>
-              </a:spcAft>
-            </a:pPr>
-            <a:r>
-              <a:rPr sz="1700" b="0" i="0">
-                <a:solidFill>
-                  <a:srgbClr val="000000"/>
-                </a:solidFill>
-                <a:latin typeface="Calibri"/>
-              </a:rPr>
-              <a:t>adjustment through a learned generator:</a:t>
+              <a:rPr sz="2600" b="0" i="0">
+                <a:solidFill>
+                  <a:srgbClr val="000000"/>
+                </a:solidFill>
+                <a:latin typeface="Calibri"/>
+              </a:rPr>
+              <a:t>a parameter adjustment through a learned generator:</a:t>
             </a:r>
           </a:p>
         </p:txBody>
@@ -9195,8 +7733,8 @@
         </p:nvSpPr>
         <p:spPr>
           <a:xfrm>
-            <a:off x="640080" y="5715000"/>
-            <a:ext cx="10911535" cy="566928"/>
+            <a:off x="640080" y="5806440"/>
+            <a:ext cx="10911535" cy="731520"/>
           </a:xfrm>
           <a:prstGeom prst="rect">
             <a:avLst/>
@@ -9210,16 +7748,16 @@
           <a:lstStyle/>
           <a:p>
             <a:r>
-              <a:rPr sz="2600" b="0" i="1">
+              <a:rPr sz="3200" b="0" i="1">
                 <a:solidFill>
                   <a:srgbClr val="000000"/>
                 </a:solidFill>
                 <a:latin typeface="Cambria Math"/>
               </a:rPr>
-              <a:t>Δθ  =  g</a:t>
-            </a:r>
-            <a:r>
-              <a:rPr sz="1872" b="0" i="1" baseline="-25000">
+              <a:t>Δθ   =   g</a:t>
+            </a:r>
+            <a:r>
+              <a:rPr sz="2304" b="0" i="1" baseline="-25000">
                 <a:solidFill>
                   <a:srgbClr val="000000"/>
                 </a:solidFill>
@@ -9228,7 +7766,7 @@
               <a:t>φ</a:t>
             </a:r>
             <a:r>
-              <a:rPr sz="2600" b="0" i="1">
+              <a:rPr sz="3200" b="0" i="1">
                 <a:solidFill>
                   <a:srgbClr val="000000"/>
                 </a:solidFill>
@@ -9265,8 +7803,8 @@
         </p:nvSpPr>
         <p:spPr>
           <a:xfrm>
-            <a:off x="640080" y="365760"/>
-            <a:ext cx="10911535" cy="731520"/>
+            <a:off x="640080" y="320040"/>
+            <a:ext cx="10911535" cy="914400"/>
           </a:xfrm>
           <a:prstGeom prst="rect">
             <a:avLst/>
@@ -9280,7 +7818,7 @@
           <a:lstStyle/>
           <a:p>
             <a:r>
-              <a:rPr sz="3200" b="1" i="0">
+              <a:rPr sz="4400" b="1" i="0">
                 <a:solidFill>
                   <a:srgbClr val="000000"/>
                 </a:solidFill>
@@ -9299,8 +7837,8 @@
         </p:nvSpPr>
         <p:spPr>
           <a:xfrm>
-            <a:off x="640080" y="1097280"/>
-            <a:ext cx="10911535" cy="411480"/>
+            <a:off x="640080" y="1737360"/>
+            <a:ext cx="10911535" cy="4663440"/>
           </a:xfrm>
           <a:prstGeom prst="rect">
             <a:avLst/>
@@ -9313,197 +7851,115 @@
           </a:bodyPr>
           <a:lstStyle/>
           <a:p>
-            <a:r>
-              <a:rPr sz="1700" b="0" i="0">
-                <a:solidFill>
-                  <a:srgbClr val="000000"/>
-                </a:solidFill>
-                <a:latin typeface="Calibri"/>
-              </a:rPr>
-              <a:t>when the parameters are not available for adaptation</a:t>
-            </a:r>
-          </a:p>
-        </p:txBody>
-      </p:sp>
-      <p:sp>
-        <p:nvSpPr>
-          <p:cNvPr id="4" name="TextBox 3"/>
-          <p:cNvSpPr txBox="1"/>
-          <p:nvPr/>
-        </p:nvSpPr>
-        <p:spPr>
-          <a:xfrm>
-            <a:off x="640080" y="1691640"/>
-            <a:ext cx="10911535" cy="4709160"/>
-          </a:xfrm>
-          <a:prstGeom prst="rect">
-            <a:avLst/>
-          </a:prstGeom>
-          <a:noFill/>
-        </p:spPr>
-        <p:txBody>
-          <a:bodyPr wrap="square" lIns="0" tIns="0" bIns="0">
-            <a:spAutoFit/>
-          </a:bodyPr>
-          <a:lstStyle/>
-          <a:p>
             <a:pPr>
               <a:spcAft>
-                <a:spcPts val="600"/>
+                <a:spcPts val="1100"/>
               </a:spcAft>
             </a:pPr>
             <a:r>
-              <a:rPr sz="1700" b="0" i="0">
-                <a:solidFill>
-                  <a:srgbClr val="000000"/>
-                </a:solidFill>
-                <a:latin typeface="Calibri"/>
-              </a:rPr>
-              <a:t>Time-series foundation models — Chronos, Moirai and successors — are pretrained on</a:t>
+              <a:rPr sz="2800" b="0" i="0">
+                <a:solidFill>
+                  <a:srgbClr val="000000"/>
+                </a:solidFill>
+                <a:latin typeface="Calibri"/>
+              </a:rPr>
+              <a:t>Pretrained models are applied zero-shot; drift persists.</a:t>
             </a:r>
           </a:p>
           <a:p>
             <a:pPr>
               <a:spcAft>
-                <a:spcPts val="600"/>
+                <a:spcPts val="1100"/>
               </a:spcAft>
             </a:pPr>
             <a:r>
-              <a:rPr sz="1700" b="0" i="0">
-                <a:solidFill>
-                  <a:srgbClr val="000000"/>
-                </a:solidFill>
-                <a:latin typeface="Calibri"/>
-              </a:rPr>
-              <a:t>large corpora and applied zero-shot. Drift does not disappear; its locus moves.</a:t>
+              <a:rPr sz="2800" b="1" i="0">
+                <a:solidFill>
+                  <a:srgbClr val="000000"/>
+                </a:solidFill>
+                <a:latin typeface="Calibri"/>
+              </a:rPr>
+              <a:t>Black-box adaptation.</a:t>
+            </a:r>
+          </a:p>
+          <a:p>
+            <a:pPr lvl="1">
+              <a:spcAft>
+                <a:spcPts val="1100"/>
+              </a:spcAft>
+            </a:pPr>
+            <a:r>
+              <a:rPr sz="2700" b="0" i="0">
+                <a:solidFill>
+                  <a:srgbClr val="000000"/>
+                </a:solidFill>
+                <a:latin typeface="Calibri"/>
+              </a:rPr>
+              <a:t>weights are unavailable — learn the error structure</a:t>
             </a:r>
           </a:p>
           <a:p>
             <a:pPr>
               <a:spcAft>
-                <a:spcPts val="600"/>
+                <a:spcPts val="1100"/>
               </a:spcAft>
             </a:pPr>
             <a:r>
-              <a:rPr sz="1700" b="1" i="0">
-                <a:solidFill>
-                  <a:srgbClr val="000000"/>
-                </a:solidFill>
-                <a:latin typeface="Calibri"/>
-              </a:rPr>
-              <a:t>Black-box adaptation.</a:t>
+              <a:rPr sz="2800" b="1" i="0">
+                <a:solidFill>
+                  <a:srgbClr val="000000"/>
+                </a:solidFill>
+                <a:latin typeface="Calibri"/>
+              </a:rPr>
+              <a:t>Drift-resilient priors.</a:t>
             </a:r>
           </a:p>
           <a:p>
             <a:pPr lvl="1">
               <a:spcAft>
-                <a:spcPts val="600"/>
+                <a:spcPts val="1100"/>
               </a:spcAft>
             </a:pPr>
             <a:r>
-              <a:rPr sz="1600" b="0" i="0">
-                <a:solidFill>
-                  <a:srgbClr val="000000"/>
-                </a:solidFill>
-                <a:latin typeface="Calibri"/>
-              </a:rPr>
-              <a:t>Where the model is served behind an API, the weights cannot be modified; adaptation</a:t>
-            </a:r>
-          </a:p>
-          <a:p>
-            <a:pPr lvl="1">
+              <a:rPr sz="2700" b="0" i="0">
+                <a:solidFill>
+                  <a:srgbClr val="000000"/>
+                </a:solidFill>
+                <a:latin typeface="Calibri"/>
+              </a:rPr>
+              <a:t>build change into the in-context prior</a:t>
+            </a:r>
+          </a:p>
+          <a:p>
+            <a:pPr>
               <a:spcAft>
-                <a:spcPts val="600"/>
+                <a:spcPts val="1100"/>
               </a:spcAft>
             </a:pPr>
             <a:r>
-              <a:rPr sz="1600" b="0" i="0">
-                <a:solidFill>
-                  <a:srgbClr val="000000"/>
-                </a:solidFill>
-                <a:latin typeface="Calibri"/>
-              </a:rPr>
-              <a:t>proceeds by learning the structure of the model's errors in context.</a:t>
+              <a:rPr sz="2800" b="0" i="0">
+                <a:solidFill>
+                  <a:srgbClr val="000000"/>
+                </a:solidFill>
+                <a:latin typeface="Calibri"/>
+              </a:rPr>
+              <a:t>Both are continuous adaptation; the parameters merely</a:t>
             </a:r>
           </a:p>
           <a:p>
             <a:pPr>
               <a:spcAft>
-                <a:spcPts val="600"/>
+                <a:spcPts val="1100"/>
               </a:spcAft>
             </a:pPr>
             <a:r>
-              <a:rPr sz="1700" b="1" i="0">
-                <a:solidFill>
-                  <a:srgbClr val="000000"/>
-                </a:solidFill>
-                <a:latin typeface="Calibri"/>
-              </a:rPr>
-              <a:t>Drift-resilient priors.</a:t>
-            </a:r>
-          </a:p>
-          <a:p>
-            <a:pPr lvl="1">
-              <a:spcAft>
-                <a:spcPts val="600"/>
-              </a:spcAft>
-            </a:pPr>
-            <a:r>
-              <a:rPr sz="1600" b="0" i="0">
-                <a:solidFill>
-                  <a:srgbClr val="000000"/>
-                </a:solidFill>
-                <a:latin typeface="Calibri"/>
-              </a:rPr>
-              <a:t>Alternatively, drift is incorporated into the in-context prior, so the model learns to</a:t>
-            </a:r>
-          </a:p>
-          <a:p>
-            <a:pPr lvl="1">
-              <a:spcAft>
-                <a:spcPts val="600"/>
-              </a:spcAft>
-            </a:pPr>
-            <a:r>
-              <a:rPr sz="1600" b="0" i="0">
-                <a:solidFill>
-                  <a:srgbClr val="000000"/>
-                </a:solidFill>
-                <a:latin typeface="Calibri"/>
-              </a:rPr>
-              <a:t>estimate, adapt to and extrapolate change — Drift-Resilient TabPFN, NeurIPS'24.</a:t>
-            </a:r>
-          </a:p>
-          <a:p>
-            <a:pPr>
-              <a:spcAft>
-                <a:spcPts val="600"/>
-              </a:spcAft>
-            </a:pPr>
-            <a:r>
-              <a:rPr sz="1700" b="0" i="0">
-                <a:solidFill>
-                  <a:srgbClr val="000000"/>
-                </a:solidFill>
-                <a:latin typeface="Calibri"/>
-              </a:rPr>
-              <a:t>Both are continuous adaptation in the sense of §2; the parameters simply reside in</a:t>
-            </a:r>
-          </a:p>
-          <a:p>
-            <a:pPr>
-              <a:spcAft>
-                <a:spcPts val="600"/>
-              </a:spcAft>
-            </a:pPr>
-            <a:r>
-              <a:rPr sz="1700" b="0" i="0">
-                <a:solidFill>
-                  <a:srgbClr val="000000"/>
-                </a:solidFill>
-                <a:latin typeface="Calibri"/>
-              </a:rPr>
-              <a:t>the context or in a residual corrector rather than in the weights.</a:t>
+              <a:rPr sz="2800" b="0" i="0">
+                <a:solidFill>
+                  <a:srgbClr val="000000"/>
+                </a:solidFill>
+                <a:latin typeface="Calibri"/>
+              </a:rPr>
+              <a:t>reside elsewhere.</a:t>
             </a:r>
           </a:p>
         </p:txBody>
@@ -9550,7 +8006,7 @@
           <a:p>
             <a:pPr algn="l"/>
             <a:r>
-              <a:rPr sz="3600" b="1" i="0">
+              <a:rPr sz="4400" b="1" i="0">
                 <a:solidFill>
                   <a:srgbClr val="000000"/>
                 </a:solidFill>
@@ -9569,8 +8025,8 @@
         </p:nvSpPr>
         <p:spPr>
           <a:xfrm>
-            <a:off x="640080" y="3566160"/>
-            <a:ext cx="10911535" cy="2834640"/>
+            <a:off x="640080" y="3657600"/>
+            <a:ext cx="10911535" cy="2743200"/>
           </a:xfrm>
           <a:prstGeom prst="rect">
             <a:avLst/>
@@ -9585,17 +8041,17 @@
           <a:p>
             <a:pPr>
               <a:spcAft>
-                <a:spcPts val="1000"/>
+                <a:spcPts val="1400"/>
               </a:spcAft>
             </a:pPr>
             <a:r>
-              <a:rPr sz="1800" b="0" i="0">
-                <a:solidFill>
-                  <a:srgbClr val="000000"/>
-                </a:solidFill>
-                <a:latin typeface="Calibri"/>
-              </a:rPr>
-              <a:t>What remains unresolved, and what the present harness can test.</a:t>
+              <a:rPr sz="2400" b="0" i="0">
+                <a:solidFill>
+                  <a:srgbClr val="000000"/>
+                </a:solidFill>
+                <a:latin typeface="Calibri"/>
+              </a:rPr>
+              <a:t>What remains unresolved, and what can now be tested.</a:t>
             </a:r>
           </a:p>
         </p:txBody>
@@ -9626,8 +8082,8 @@
         </p:nvSpPr>
         <p:spPr>
           <a:xfrm>
-            <a:off x="640080" y="365760"/>
-            <a:ext cx="10911535" cy="731520"/>
+            <a:off x="640080" y="320040"/>
+            <a:ext cx="10911535" cy="914400"/>
           </a:xfrm>
           <a:prstGeom prst="rect">
             <a:avLst/>
@@ -9641,7 +8097,7 @@
           <a:lstStyle/>
           <a:p>
             <a:r>
-              <a:rPr sz="3200" b="1" i="0">
+              <a:rPr sz="4400" b="1" i="0">
                 <a:solidFill>
                   <a:srgbClr val="000000"/>
                 </a:solidFill>
@@ -9660,8 +8116,8 @@
         </p:nvSpPr>
         <p:spPr>
           <a:xfrm>
-            <a:off x="640080" y="1463040"/>
-            <a:ext cx="10911535" cy="4937760"/>
+            <a:off x="640080" y="1737360"/>
+            <a:ext cx="10911535" cy="4663440"/>
           </a:xfrm>
           <a:prstGeom prst="rect">
             <a:avLst/>
@@ -9676,161 +8132,97 @@
           <a:p>
             <a:pPr>
               <a:spcAft>
-                <a:spcPts val="600"/>
+                <a:spcPts val="1200"/>
               </a:spcAft>
             </a:pPr>
             <a:r>
-              <a:rPr sz="1700" b="1" i="0">
-                <a:solidFill>
-                  <a:srgbClr val="000000"/>
-                </a:solidFill>
-                <a:latin typeface="Calibri"/>
-              </a:rPr>
-              <a:t>No criterion distinguishes real drift from omitted context.</a:t>
+              <a:rPr sz="2800" b="1" i="0">
+                <a:solidFill>
+                  <a:srgbClr val="000000"/>
+                </a:solidFill>
+                <a:latin typeface="Calibri"/>
+              </a:rPr>
+              <a:t>No criterion separates real drift from omitted context.</a:t>
             </a:r>
           </a:p>
           <a:p>
             <a:pPr lvl="1">
               <a:spcAft>
-                <a:spcPts val="600"/>
+                <a:spcPts val="1200"/>
               </a:spcAft>
             </a:pPr>
             <a:r>
-              <a:rPr sz="1600" b="0" i="0">
-                <a:solidFill>
-                  <a:srgbClr val="000000"/>
-                </a:solidFill>
-                <a:latin typeface="Calibri"/>
-              </a:rPr>
-              <a:t>CDS holds that p(y | x) only appears to move because c was never conditioned on;</a:t>
+              <a:rPr sz="2700" b="0" i="0">
+                <a:solidFill>
+                  <a:srgbClr val="000000"/>
+                </a:solidFill>
+                <a:latin typeface="Calibri"/>
+              </a:rPr>
+              <a:t>tracking a periodic context is wasted work</a:t>
+            </a:r>
+          </a:p>
+          <a:p>
+            <a:pPr>
+              <a:spcAft>
+                <a:spcPts val="1200"/>
+              </a:spcAft>
+            </a:pPr>
+            <a:r>
+              <a:rPr sz="2800" b="1" i="0">
+                <a:solidFill>
+                  <a:srgbClr val="000000"/>
+                </a:solidFill>
+                <a:latin typeface="Calibri"/>
+              </a:rPr>
+              <a:t>Recurrence and sustained drift partition the methods.</a:t>
             </a:r>
           </a:p>
           <a:p>
             <a:pPr lvl="1">
               <a:spcAft>
-                <a:spcPts val="600"/>
+                <a:spcPts val="1200"/>
               </a:spcAft>
             </a:pPr>
             <a:r>
-              <a:rPr sz="1600" b="0" i="0">
-                <a:solidFill>
-                  <a:srgbClr val="000000"/>
-                </a:solidFill>
-                <a:latin typeface="Calibri"/>
-              </a:rPr>
-              <a:t>Read holds that θ genuinely traverses Θ. Where c is observable and periodic,</a:t>
+              <a:rPr sz="2700" b="0" i="0">
+                <a:solidFill>
+                  <a:srgbClr val="000000"/>
+                </a:solidFill>
+                <a:latin typeface="Calibri"/>
+              </a:rPr>
+              <a:t>the crossover has no published characterisation</a:t>
+            </a:r>
+          </a:p>
+          <a:p>
+            <a:pPr>
+              <a:spcAft>
+                <a:spcPts val="1200"/>
+              </a:spcAft>
+            </a:pPr>
+            <a:r>
+              <a:rPr sz="2800" b="1" i="0">
+                <a:solidFill>
+                  <a:srgbClr val="000000"/>
+                </a:solidFill>
+                <a:latin typeface="Calibri"/>
+              </a:rPr>
+              <a:t>Evaluation is synthetic and label-immediate.</a:t>
             </a:r>
           </a:p>
           <a:p>
             <a:pPr lvl="1">
               <a:spcAft>
-                <a:spcPts val="600"/>
+                <a:spcPts val="1200"/>
               </a:spcAft>
             </a:pPr>
             <a:r>
-              <a:rPr sz="1600" b="0" i="0">
-                <a:solidFill>
-                  <a:srgbClr val="000000"/>
-                </a:solidFill>
-                <a:latin typeface="Calibri"/>
-              </a:rPr>
-              <a:t>tracking is wasted; where it is latent, conditioning is impossible. No published</a:t>
-            </a:r>
-          </a:p>
-          <a:p>
-            <a:pPr lvl="1">
-              <a:spcAft>
-                <a:spcPts val="600"/>
-              </a:spcAft>
-            </a:pPr>
-            <a:r>
-              <a:rPr sz="1600" b="0" i="0">
-                <a:solidFill>
-                  <a:srgbClr val="000000"/>
-                </a:solidFill>
-                <a:latin typeface="Calibri"/>
-              </a:rPr>
-              <a:t>criterion identifies which regime obtains.</a:t>
-            </a:r>
-          </a:p>
-          <a:p>
-            <a:pPr>
-              <a:spcAft>
-                <a:spcPts val="600"/>
-              </a:spcAft>
-            </a:pPr>
-            <a:r>
-              <a:rPr sz="1700" b="1" i="0">
-                <a:solidFill>
-                  <a:srgbClr val="000000"/>
-                </a:solidFill>
-                <a:latin typeface="Calibri"/>
-              </a:rPr>
-              <a:t>Recurrence and sustained drift partition the method space.</a:t>
-            </a:r>
-          </a:p>
-          <a:p>
-            <a:pPr lvl="1">
-              <a:spcAft>
-                <a:spcPts val="600"/>
-              </a:spcAft>
-            </a:pPr>
-            <a:r>
-              <a:rPr sz="1600" b="0" i="0">
-                <a:solidFill>
-                  <a:srgbClr val="000000"/>
-                </a:solidFill>
-                <a:latin typeface="Calibri"/>
-              </a:rPr>
-              <a:t>A pool presumes concepts return; a tracker presumes smooth displacement. The</a:t>
-            </a:r>
-          </a:p>
-          <a:p>
-            <a:pPr lvl="1">
-              <a:spcAft>
-                <a:spcPts val="600"/>
-              </a:spcAft>
-            </a:pPr>
-            <a:r>
-              <a:rPr sz="1600" b="0" i="0">
-                <a:solidFill>
-                  <a:srgbClr val="000000"/>
-                </a:solidFill>
-                <a:latin typeface="Calibri"/>
-              </a:rPr>
-              <a:t>crossover between the two has no published characterisation.</a:t>
-            </a:r>
-          </a:p>
-          <a:p>
-            <a:pPr>
-              <a:spcAft>
-                <a:spcPts val="600"/>
-              </a:spcAft>
-            </a:pPr>
-            <a:r>
-              <a:rPr sz="1700" b="1" i="0">
-                <a:solidFill>
-                  <a:srgbClr val="000000"/>
-                </a:solidFill>
-                <a:latin typeface="Calibri"/>
-              </a:rPr>
-              <a:t>Evaluation remains synthetic and label-immediate, while the applications that</a:t>
-            </a:r>
-          </a:p>
-          <a:p>
-            <a:pPr>
-              <a:spcAft>
-                <a:spcPts val="600"/>
-              </a:spcAft>
-            </a:pPr>
-            <a:r>
-              <a:rPr sz="1700" b="1" i="0">
-                <a:solidFill>
-                  <a:srgbClr val="000000"/>
-                </a:solidFill>
-                <a:latin typeface="Calibri"/>
-              </a:rPr>
-              <a:t>motivate the field are neither.</a:t>
+              <a:rPr sz="2700" b="0" i="0">
+                <a:solidFill>
+                  <a:srgbClr val="000000"/>
+                </a:solidFill>
+                <a:latin typeface="Calibri"/>
+              </a:rPr>
+              <a:t>the motivating applications are neither</a:t>
             </a:r>
           </a:p>
         </p:txBody>
@@ -9861,8 +8253,8 @@
         </p:nvSpPr>
         <p:spPr>
           <a:xfrm>
-            <a:off x="640080" y="365760"/>
-            <a:ext cx="10911535" cy="731520"/>
+            <a:off x="640080" y="320040"/>
+            <a:ext cx="10911535" cy="914400"/>
           </a:xfrm>
           <a:prstGeom prst="rect">
             <a:avLst/>
@@ -9876,7 +8268,7 @@
           <a:lstStyle/>
           <a:p>
             <a:r>
-              <a:rPr sz="3200" b="1" i="0">
+              <a:rPr sz="4400" b="1" i="0">
                 <a:solidFill>
                   <a:srgbClr val="000000"/>
                 </a:solidFill>
@@ -9895,8 +8287,8 @@
         </p:nvSpPr>
         <p:spPr>
           <a:xfrm>
-            <a:off x="640080" y="1097280"/>
-            <a:ext cx="10911535" cy="411480"/>
+            <a:off x="640080" y="1298448"/>
+            <a:ext cx="10911535" cy="457200"/>
           </a:xfrm>
           <a:prstGeom prst="rect">
             <a:avLst/>
@@ -9910,13 +8302,13 @@
           <a:lstStyle/>
           <a:p>
             <a:r>
-              <a:rPr sz="1700" b="0" i="0">
-                <a:solidFill>
-                  <a:srgbClr val="000000"/>
-                </a:solidFill>
-                <a:latin typeface="Calibri"/>
-              </a:rPr>
-              <a:t>each stated as a falsifiable prediction</a:t>
+              <a:rPr sz="2200" b="0" i="0">
+                <a:solidFill>
+                  <a:srgbClr val="000000"/>
+                </a:solidFill>
+                <a:latin typeface="Calibri"/>
+              </a:rPr>
+              <a:t>each a falsifiable prediction</a:t>
             </a:r>
           </a:p>
         </p:txBody>
@@ -9930,7 +8322,7 @@
           <p:nvPr/>
         </p:nvGraphicFramePr>
         <p:xfrm>
-          <a:off x="640080" y="1691640"/>
+          <a:off x="640080" y="2057400"/>
           <a:ext cx="10911534" cy="3017520"/>
         </p:xfrm>
         <a:graphic>
@@ -9940,9 +8332,9 @@
                 <a:tableStyleId>{5C22544A-7EE6-4342-B048-85BDC9FD1C3A}</a:tableStyleId>
               </a:tblPr>
               <a:tblGrid>
-                <a:gridCol w="389697"/>
-                <a:gridCol w="3312430"/>
-                <a:gridCol w="7209407"/>
+                <a:gridCol w="470324"/>
+                <a:gridCol w="4326988"/>
+                <a:gridCol w="6114222"/>
               </a:tblGrid>
               <a:tr h="603504">
                 <a:tc>
@@ -9966,7 +8358,7 @@
                     <a:p>
                       <a:pPr algn="l"/>
                       <a:r>
-                        <a:rPr sz="1600" b="1" i="0">
+                        <a:rPr sz="2300" b="1" i="0">
                           <a:solidFill>
                             <a:srgbClr val="000000"/>
                           </a:solidFill>
@@ -9989,7 +8381,7 @@
                     <a:p>
                       <a:pPr algn="l"/>
                       <a:r>
-                        <a:rPr sz="1600" b="1" i="0">
+                        <a:rPr sz="2300" b="1" i="0">
                           <a:solidFill>
                             <a:srgbClr val="000000"/>
                           </a:solidFill>
@@ -10014,7 +8406,7 @@
                     <a:p>
                       <a:pPr algn="l"/>
                       <a:r>
-                        <a:rPr sz="1600" b="0" i="0">
+                        <a:rPr sz="2300" b="0" i="0">
                           <a:solidFill>
                             <a:srgbClr val="000000"/>
                           </a:solidFill>
@@ -10037,37 +8429,37 @@
                     <a:p>
                       <a:pPr algn="l"/>
                       <a:r>
-                        <a:rPr sz="1600" b="0" i="0">
-                          <a:solidFill>
-                            <a:srgbClr val="000000"/>
-                          </a:solidFill>
-                          <a:latin typeface="Calibri"/>
-                        </a:rPr>
-                        <a:t>Why does momentum not assist?</a:t>
-                      </a:r>
-                    </a:p>
-                  </a:txBody>
-                  <a:tcPr marL="73152" marR="73152" marT="27432" marB="27432">
-                    <a:solidFill>
-                      <a:srgbClr val="FFFFFF"/>
-                    </a:solidFill>
-                  </a:tcPr>
-                </a:tc>
-                <a:tc>
-                  <a:txBody>
-                    <a:bodyPr/>
-                    <a:lstStyle/>
-                    <a:p>
-                      <a:pPr algn="l"/>
-                      <a:r>
-                        <a:rPr sz="1600" b="0" i="0">
-                          <a:solidFill>
-                            <a:srgbClr val="000000"/>
-                          </a:solidFill>
-                          <a:latin typeface="Calibri"/>
-                        </a:rPr>
-                        <a:t>A rotation-aware extrapolator closes the tracking gap, and has
-no effect on sudden drift</a:t>
+                        <a:rPr sz="2300" b="0" i="0">
+                          <a:solidFill>
+                            <a:srgbClr val="000000"/>
+                          </a:solidFill>
+                          <a:latin typeface="Calibri"/>
+                        </a:rPr>
+                        <a:t>Why no gain from momentum?</a:t>
+                      </a:r>
+                    </a:p>
+                  </a:txBody>
+                  <a:tcPr marL="73152" marR="73152" marT="27432" marB="27432">
+                    <a:solidFill>
+                      <a:srgbClr val="FFFFFF"/>
+                    </a:solidFill>
+                  </a:tcPr>
+                </a:tc>
+                <a:tc>
+                  <a:txBody>
+                    <a:bodyPr/>
+                    <a:lstStyle/>
+                    <a:p>
+                      <a:pPr algn="l"/>
+                      <a:r>
+                        <a:rPr sz="2300" b="0" i="0">
+                          <a:solidFill>
+                            <a:srgbClr val="000000"/>
+                          </a:solidFill>
+                          <a:latin typeface="Calibri"/>
+                        </a:rPr>
+                        <a:t>a rotation-aware extrapolator
+closes the gap</a:t>
                       </a:r>
                     </a:p>
                   </a:txBody>
@@ -10086,7 +8478,7 @@
                     <a:p>
                       <a:pPr algn="l"/>
                       <a:r>
-                        <a:rPr sz="1600" b="0" i="0">
+                        <a:rPr sz="2300" b="0" i="0">
                           <a:solidFill>
                             <a:srgbClr val="000000"/>
                           </a:solidFill>
@@ -10109,30 +8501,30 @@
                     <a:p>
                       <a:pPr algn="l"/>
                       <a:r>
-                        <a:rPr sz="1600" b="0" i="0">
-                          <a:solidFill>
-                            <a:srgbClr val="000000"/>
-                          </a:solidFill>
-                          <a:latin typeface="Calibri"/>
-                        </a:rPr>
-                        <a:t>Real drift, or omitted context?</a:t>
-                      </a:r>
-                    </a:p>
-                  </a:txBody>
-                  <a:tcPr marL="73152" marR="73152" marT="27432" marB="27432">
-                    <a:solidFill>
-                      <a:srgbClr val="FFFFFF"/>
-                    </a:solidFill>
-                  </a:tcPr>
-                </a:tc>
-                <a:tc>
-                  <a:txBody>
-                    <a:bodyPr/>
-                    <a:lstStyle/>
-                    <a:p>
-                      <a:pPr algn="l"/>
-                      <a:r>
-                        <a:rPr sz="1600" b="0" i="0">
+                        <a:rPr sz="2300" b="0" i="0">
+                          <a:solidFill>
+                            <a:srgbClr val="000000"/>
+                          </a:solidFill>
+                          <a:latin typeface="Calibri"/>
+                        </a:rPr>
+                        <a:t>Drift, or omitted context?</a:t>
+                      </a:r>
+                    </a:p>
+                  </a:txBody>
+                  <a:tcPr marL="73152" marR="73152" marT="27432" marB="27432">
+                    <a:solidFill>
+                      <a:srgbClr val="FFFFFF"/>
+                    </a:solidFill>
+                  </a:tcPr>
+                </a:tc>
+                <a:tc>
+                  <a:txBody>
+                    <a:bodyPr/>
+                    <a:lstStyle/>
+                    <a:p>
+                      <a:pPr algn="l"/>
+                      <a:r>
+                        <a:rPr sz="2300" b="0" i="0">
                           <a:solidFill>
                             <a:srgbClr val="000000"/>
                           </a:solidFill>
@@ -10141,7 +8533,7 @@
                         <a:t>I(E</a:t>
                       </a:r>
                       <a:r>
-                        <a:rPr sz="1152" b="0" i="0" baseline="-25000">
+                        <a:rPr sz="1655" b="0" i="0" baseline="-25000">
                           <a:solidFill>
                             <a:srgbClr val="000000"/>
                           </a:solidFill>
@@ -10150,7 +8542,7 @@
                         <a:t>t</a:t>
                       </a:r>
                       <a:r>
-                        <a:rPr sz="1600" b="0" i="0">
+                        <a:rPr sz="2300" b="0" i="0">
                           <a:solidFill>
                             <a:srgbClr val="000000"/>
                           </a:solidFill>
@@ -10159,7 +8551,7 @@
                         <a:t> ; c</a:t>
                       </a:r>
                       <a:r>
-                        <a:rPr sz="1152" b="0" i="0" baseline="-25000">
+                        <a:rPr sz="1655" b="0" i="0" baseline="-25000">
                           <a:solidFill>
                             <a:srgbClr val="000000"/>
                           </a:solidFill>
@@ -10168,13 +8560,13 @@
                         <a:t>t</a:t>
                       </a:r>
                       <a:r>
-                        <a:rPr sz="1600" b="0" i="0">
-                          <a:solidFill>
-                            <a:srgbClr val="000000"/>
-                          </a:solidFill>
-                          <a:latin typeface="Calibri"/>
-                        </a:rPr>
-                        <a:t>) separates the regimes; autocorrelation does not</a:t>
+                        <a:rPr sz="2300" b="0" i="0">
+                          <a:solidFill>
+                            <a:srgbClr val="000000"/>
+                          </a:solidFill>
+                          <a:latin typeface="Calibri"/>
+                        </a:rPr>
+                        <a:t>) separates them</a:t>
                       </a:r>
                     </a:p>
                   </a:txBody>
@@ -10193,7 +8585,7 @@
                     <a:p>
                       <a:pPr algn="l"/>
                       <a:r>
-                        <a:rPr sz="1600" b="0" i="0">
+                        <a:rPr sz="2300" b="0" i="0">
                           <a:solidFill>
                             <a:srgbClr val="000000"/>
                           </a:solidFill>
@@ -10216,36 +8608,36 @@
                     <a:p>
                       <a:pPr algn="l"/>
                       <a:r>
-                        <a:rPr sz="1600" b="0" i="0">
-                          <a:solidFill>
-                            <a:srgbClr val="000000"/>
-                          </a:solidFill>
-                          <a:latin typeface="Calibri"/>
-                        </a:rPr>
-                        <a:t>When does tracking lose to storage?</a:t>
-                      </a:r>
-                    </a:p>
-                  </a:txBody>
-                  <a:tcPr marL="73152" marR="73152" marT="27432" marB="27432">
-                    <a:solidFill>
-                      <a:srgbClr val="FFFFFF"/>
-                    </a:solidFill>
-                  </a:tcPr>
-                </a:tc>
-                <a:tc>
-                  <a:txBody>
-                    <a:bodyPr/>
-                    <a:lstStyle/>
-                    <a:p>
-                      <a:pPr algn="l"/>
-                      <a:r>
-                        <a:rPr sz="1600" b="0" i="0">
-                          <a:solidFill>
-                            <a:srgbClr val="000000"/>
-                          </a:solidFill>
-                          <a:latin typeface="Calibri"/>
-                        </a:rPr>
-                        <a:t>A crossover period p* exists, below which a pool dominates</a:t>
+                        <a:rPr sz="2300" b="0" i="0">
+                          <a:solidFill>
+                            <a:srgbClr val="000000"/>
+                          </a:solidFill>
+                          <a:latin typeface="Calibri"/>
+                        </a:rPr>
+                        <a:t>Tracking or storage?</a:t>
+                      </a:r>
+                    </a:p>
+                  </a:txBody>
+                  <a:tcPr marL="73152" marR="73152" marT="27432" marB="27432">
+                    <a:solidFill>
+                      <a:srgbClr val="FFFFFF"/>
+                    </a:solidFill>
+                  </a:tcPr>
+                </a:tc>
+                <a:tc>
+                  <a:txBody>
+                    <a:bodyPr/>
+                    <a:lstStyle/>
+                    <a:p>
+                      <a:pPr algn="l"/>
+                      <a:r>
+                        <a:rPr sz="2300" b="0" i="0">
+                          <a:solidFill>
+                            <a:srgbClr val="000000"/>
+                          </a:solidFill>
+                          <a:latin typeface="Calibri"/>
+                        </a:rPr>
+                        <a:t>a crossover period p* exists</a:t>
                       </a:r>
                     </a:p>
                   </a:txBody>
@@ -10264,7 +8656,7 @@
                     <a:p>
                       <a:pPr algn="l"/>
                       <a:r>
-                        <a:rPr sz="1600" b="0" i="0">
+                        <a:rPr sz="2300" b="0" i="0">
                           <a:solidFill>
                             <a:srgbClr val="000000"/>
                           </a:solidFill>
@@ -10287,7 +8679,7 @@
                     <a:p>
                       <a:pPr algn="l"/>
                       <a:r>
-                        <a:rPr sz="1600" b="0" i="0">
+                        <a:rPr sz="2300" b="0" i="0">
                           <a:solidFill>
                             <a:srgbClr val="000000"/>
                           </a:solidFill>
@@ -10310,13 +8702,13 @@
                     <a:p>
                       <a:pPr algn="l"/>
                       <a:r>
-                        <a:rPr sz="1600" b="0" i="0">
-                          <a:solidFill>
-                            <a:srgbClr val="000000"/>
-                          </a:solidFill>
-                          <a:latin typeface="Calibri"/>
-                        </a:rPr>
-                        <a:t>λ* scales as the square root of the drift rate</a:t>
+                        <a:rPr sz="2300" b="0" i="0">
+                          <a:solidFill>
+                            <a:srgbClr val="000000"/>
+                          </a:solidFill>
+                          <a:latin typeface="Calibri"/>
+                        </a:rPr>
+                        <a:t>λ* ∝ √(drift rate)</a:t>
                       </a:r>
                     </a:p>
                   </a:txBody>
@@ -10339,8 +8731,8 @@
         </p:nvSpPr>
         <p:spPr>
           <a:xfrm>
-            <a:off x="640080" y="4937760"/>
-            <a:ext cx="10911535" cy="1463039"/>
+            <a:off x="640080" y="5394960"/>
+            <a:ext cx="10911535" cy="1005839"/>
           </a:xfrm>
           <a:prstGeom prst="rect">
             <a:avLst/>
@@ -10355,49 +8747,17 @@
           <a:p>
             <a:pPr>
               <a:spcAft>
-                <a:spcPts val="600"/>
+                <a:spcPts val="1400"/>
               </a:spcAft>
             </a:pPr>
             <a:r>
-              <a:rPr sz="1700" b="0" i="0">
-                <a:solidFill>
-                  <a:srgbClr val="000000"/>
-                </a:solidFill>
-                <a:latin typeface="Calibri"/>
-              </a:rPr>
-              <a:t>B addresses the first open problem. Electricity carries an observable periodic</a:t>
-            </a:r>
-          </a:p>
-          <a:p>
-            <a:pPr>
-              <a:spcAft>
-                <a:spcPts val="600"/>
-              </a:spcAft>
-            </a:pPr>
-            <a:r>
-              <a:rPr sz="1700" b="0" i="0">
-                <a:solidFill>
-                  <a:srgbClr val="000000"/>
-                </a:solidFill>
-                <a:latin typeface="Calibri"/>
-              </a:rPr>
-              <a:t>context, and the synthetic streams expose the ground-truth concept, so both</a:t>
-            </a:r>
-          </a:p>
-          <a:p>
-            <a:pPr>
-              <a:spcAft>
-                <a:spcPts val="600"/>
-              </a:spcAft>
-            </a:pPr>
-            <a:r>
-              <a:rPr sz="1700" b="0" i="0">
-                <a:solidFill>
-                  <a:srgbClr val="000000"/>
-                </a:solidFill>
-                <a:latin typeface="Calibri"/>
-              </a:rPr>
-              <a:t>regimes can be constructed and separated on one harness.</a:t>
+              <a:rPr sz="2700" b="0" i="0">
+                <a:solidFill>
+                  <a:srgbClr val="000000"/>
+                </a:solidFill>
+                <a:latin typeface="Calibri"/>
+              </a:rPr>
+              <a:t>B is testable on the present harness.</a:t>
             </a:r>
           </a:p>
         </p:txBody>
@@ -10428,8 +8788,8 @@
         </p:nvSpPr>
         <p:spPr>
           <a:xfrm>
-            <a:off x="640080" y="365760"/>
-            <a:ext cx="10911535" cy="731520"/>
+            <a:off x="640080" y="320040"/>
+            <a:ext cx="10911535" cy="914400"/>
           </a:xfrm>
           <a:prstGeom prst="rect">
             <a:avLst/>
@@ -10443,7 +8803,7 @@
           <a:lstStyle/>
           <a:p>
             <a:r>
-              <a:rPr sz="3200" b="1" i="0">
+              <a:rPr sz="4400" b="1" i="0">
                 <a:solidFill>
                   <a:srgbClr val="000000"/>
                 </a:solidFill>
@@ -10462,8 +8822,8 @@
         </p:nvSpPr>
         <p:spPr>
           <a:xfrm>
-            <a:off x="640080" y="1463040"/>
-            <a:ext cx="10911535" cy="4937760"/>
+            <a:off x="640080" y="1737360"/>
+            <a:ext cx="10911535" cy="4663440"/>
           </a:xfrm>
           <a:prstGeom prst="rect">
             <a:avLst/>
@@ -10478,161 +8838,97 @@
           <a:p>
             <a:pPr>
               <a:spcAft>
-                <a:spcPts val="1100"/>
+                <a:spcPts val="1400"/>
               </a:spcAft>
             </a:pPr>
             <a:r>
-              <a:rPr sz="1800" b="0" i="0">
-                <a:solidFill>
-                  <a:srgbClr val="000000"/>
-                </a:solidFill>
-                <a:latin typeface="Calibri"/>
-              </a:rPr>
-              <a:t>Concept drift is a change in p(y | x) with time, distinct from covariate shift; most</a:t>
+              <a:rPr sz="2800" b="0" i="0">
+                <a:solidFill>
+                  <a:srgbClr val="000000"/>
+                </a:solidFill>
+                <a:latin typeface="Calibri"/>
+              </a:rPr>
+              <a:t>Drift is a change in p(y | x), distinct from covariate shift.</a:t>
             </a:r>
           </a:p>
           <a:p>
             <a:pPr>
               <a:spcAft>
-                <a:spcPts val="1100"/>
+                <a:spcPts val="1400"/>
               </a:spcAft>
             </a:pPr>
             <a:r>
-              <a:rPr sz="1800" b="0" i="0">
-                <a:solidFill>
-                  <a:srgbClr val="000000"/>
-                </a:solidFill>
-                <a:latin typeface="Calibri"/>
-              </a:rPr>
-              <a:t>recent forecasting work addresses the latter.</a:t>
+              <a:rPr sz="2800" b="0" i="0">
+                <a:solidFill>
+                  <a:srgbClr val="000000"/>
+                </a:solidFill>
+                <a:latin typeface="Calibri"/>
+              </a:rPr>
+              <a:t>A tree admits no Δθ; only a vector can be tracked.</a:t>
             </a:r>
           </a:p>
           <a:p>
             <a:pPr>
               <a:spcAft>
-                <a:spcPts val="1100"/>
+                <a:spcPts val="1400"/>
               </a:spcAft>
             </a:pPr>
             <a:r>
-              <a:rPr sz="1800" b="0" i="0">
-                <a:solidFill>
-                  <a:srgbClr val="000000"/>
-                </a:solidFill>
-                <a:latin typeface="Calibri"/>
-              </a:rPr>
-              <a:t>Which adaptation mechanism is available follows from the model's representation:</a:t>
+              <a:rPr sz="2800" b="0" i="0">
+                <a:solidFill>
+                  <a:srgbClr val="000000"/>
+                </a:solidFill>
+                <a:latin typeface="Calibri"/>
+              </a:rPr>
+              <a:t>Two of three methods reproduce within 2 points.</a:t>
             </a:r>
           </a:p>
           <a:p>
             <a:pPr>
               <a:spcAft>
-                <a:spcPts val="1100"/>
+                <a:spcPts val="1400"/>
               </a:spcAft>
             </a:pPr>
             <a:r>
-              <a:rPr sz="1800" b="0" i="0">
-                <a:solidFill>
-                  <a:srgbClr val="000000"/>
-                </a:solidFill>
-                <a:latin typeface="Calibri"/>
-              </a:rPr>
-              <a:t>a tree admits no Δθ.</a:t>
+              <a:rPr sz="2800" b="0" i="0">
+                <a:solidFill>
+                  <a:srgbClr val="000000"/>
+                </a:solidFill>
+                <a:latin typeface="Calibri"/>
+              </a:rPr>
+              <a:t>The condition on λ concerns recovery, not tracking.</a:t>
             </a:r>
           </a:p>
           <a:p>
             <a:pPr>
               <a:spcAft>
-                <a:spcPts val="1100"/>
+                <a:spcPts val="1400"/>
               </a:spcAft>
             </a:pPr>
             <a:r>
-              <a:rPr sz="1800" b="0" i="0">
-                <a:solidFill>
-                  <a:srgbClr val="000000"/>
-                </a:solidFill>
-                <a:latin typeface="Calibri"/>
-              </a:rPr>
-              <a:t>Read (2018) argues drift implies temporal dependence, hence a drifting stream is a</a:t>
+              <a:rPr sz="2800" b="0" i="0">
+                <a:solidFill>
+                  <a:srgbClr val="000000"/>
+                </a:solidFill>
+                <a:latin typeface="Calibri"/>
+              </a:rPr>
+              <a:t>Proceed realises the forecasting proposal.</a:t>
             </a:r>
           </a:p>
           <a:p>
             <a:pPr>
               <a:spcAft>
-                <a:spcPts val="1100"/>
+                <a:spcPts val="1400"/>
               </a:spcAft>
             </a:pPr>
             <a:r>
-              <a:rPr sz="1800" b="0" i="0">
-                <a:solidFill>
-                  <a:srgbClr val="000000"/>
-                </a:solidFill>
-                <a:latin typeface="Calibri"/>
-              </a:rPr>
-              <a:t>time series and the concept should be tracked rather than detected.</a:t>
-            </a:r>
-          </a:p>
-          <a:p>
-            <a:pPr>
-              <a:spcAft>
-                <a:spcPts val="1100"/>
-              </a:spcAft>
-            </a:pPr>
-            <a:r>
-              <a:rPr sz="1800" b="0" i="0">
-                <a:solidFill>
-                  <a:srgbClr val="000000"/>
-                </a:solidFill>
-                <a:latin typeface="Calibri"/>
-              </a:rPr>
-              <a:t>Reproduced: two of three methods within 2 points on Electricity. The condition on λ</a:t>
-            </a:r>
-          </a:p>
-          <a:p>
-            <a:pPr>
-              <a:spcAft>
-                <a:spcPts val="1100"/>
-              </a:spcAft>
-            </a:pPr>
-            <a:r>
-              <a:rPr sz="1800" b="0" i="0">
-                <a:solidFill>
-                  <a:srgbClr val="000000"/>
-                </a:solidFill>
-                <a:latin typeface="Calibri"/>
-              </a:rPr>
-              <a:t>holds, but concerns recovery from discontinuities rather than tracking.</a:t>
-            </a:r>
-          </a:p>
-          <a:p>
-            <a:pPr>
-              <a:spcAft>
-                <a:spcPts val="1100"/>
-              </a:spcAft>
-            </a:pPr>
-            <a:r>
-              <a:rPr sz="1800" b="0" i="0">
-                <a:solidFill>
-                  <a:srgbClr val="000000"/>
-                </a:solidFill>
-                <a:latin typeface="Calibri"/>
-              </a:rPr>
-              <a:t>Proceed (KDD'25) realises the forecasting proposal seven years later.</a:t>
-            </a:r>
-          </a:p>
-          <a:p>
-            <a:pPr>
-              <a:spcAft>
-                <a:spcPts val="1100"/>
-              </a:spcAft>
-            </a:pPr>
-            <a:r>
-              <a:rPr sz="1800" b="0" i="0">
-                <a:solidFill>
-                  <a:srgbClr val="000000"/>
-                </a:solidFill>
-                <a:latin typeface="Calibri"/>
-              </a:rPr>
-              <a:t>The open question is separating genuine drift from context never modelled.</a:t>
+              <a:rPr sz="2800" b="0" i="0">
+                <a:solidFill>
+                  <a:srgbClr val="000000"/>
+                </a:solidFill>
+                <a:latin typeface="Calibri"/>
+              </a:rPr>
+              <a:t>Open: separating drift from context never modelled.</a:t>
             </a:r>
           </a:p>
         </p:txBody>
@@ -10679,7 +8975,7 @@
           <a:p>
             <a:pPr algn="l"/>
             <a:r>
-              <a:rPr sz="3600" b="1" i="0">
+              <a:rPr sz="4400" b="1" i="0">
                 <a:solidFill>
                   <a:srgbClr val="000000"/>
                 </a:solidFill>
@@ -10698,8 +8994,8 @@
         </p:nvSpPr>
         <p:spPr>
           <a:xfrm>
-            <a:off x="640080" y="3566160"/>
-            <a:ext cx="10911535" cy="2834640"/>
+            <a:off x="640080" y="3657600"/>
+            <a:ext cx="10911535" cy="2743200"/>
           </a:xfrm>
           <a:prstGeom prst="rect">
             <a:avLst/>
@@ -10714,17 +9010,17 @@
           <a:p>
             <a:pPr>
               <a:spcAft>
-                <a:spcPts val="1000"/>
+                <a:spcPts val="1400"/>
               </a:spcAft>
             </a:pPr>
             <a:r>
-              <a:rPr sz="1800" b="0" i="0">
-                <a:solidFill>
-                  <a:srgbClr val="000000"/>
-                </a:solidFill>
-                <a:latin typeface="Calibri"/>
-              </a:rPr>
-              <a:t>The target distribution is a function of time, not a fixed object.</a:t>
+              <a:rPr sz="2400" b="0" i="0">
+                <a:solidFill>
+                  <a:srgbClr val="000000"/>
+                </a:solidFill>
+                <a:latin typeface="Calibri"/>
+              </a:rPr>
+              <a:t>The target distribution is a function of time.</a:t>
             </a:r>
           </a:p>
         </p:txBody>
@@ -10755,7 +9051,96 @@
         </p:nvSpPr>
         <p:spPr>
           <a:xfrm>
-            <a:off x="640080" y="365760"/>
+            <a:off x="640080" y="320040"/>
+            <a:ext cx="10911535" cy="914400"/>
+          </a:xfrm>
+          <a:prstGeom prst="rect">
+            <a:avLst/>
+          </a:prstGeom>
+          <a:noFill/>
+        </p:spPr>
+        <p:txBody>
+          <a:bodyPr wrap="square" lIns="0" tIns="0" bIns="0">
+            <a:spAutoFit/>
+          </a:bodyPr>
+          <a:lstStyle/>
+          <a:p>
+            <a:r>
+              <a:rPr sz="4400" b="1" i="0">
+                <a:solidFill>
+                  <a:srgbClr val="000000"/>
+                </a:solidFill>
+                <a:latin typeface="Calibri"/>
+              </a:rPr>
+              <a:t>The problem</a:t>
+            </a:r>
+          </a:p>
+        </p:txBody>
+      </p:sp>
+      <p:sp>
+        <p:nvSpPr>
+          <p:cNvPr id="3" name="TextBox 2"/>
+          <p:cNvSpPr txBox="1"/>
+          <p:nvPr/>
+        </p:nvSpPr>
+        <p:spPr>
+          <a:xfrm>
+            <a:off x="640080" y="1600200"/>
+            <a:ext cx="10911535" cy="4800600"/>
+          </a:xfrm>
+          <a:prstGeom prst="rect">
+            <a:avLst/>
+          </a:prstGeom>
+          <a:noFill/>
+        </p:spPr>
+        <p:txBody>
+          <a:bodyPr wrap="square" lIns="0" tIns="0" bIns="0">
+            <a:spAutoFit/>
+          </a:bodyPr>
+          <a:lstStyle/>
+          <a:p>
+            <a:pPr>
+              <a:spcAft>
+                <a:spcPts val="1200"/>
+              </a:spcAft>
+            </a:pPr>
+            <a:r>
+              <a:rPr sz="2800" b="0" i="0">
+                <a:solidFill>
+                  <a:srgbClr val="000000"/>
+                </a:solidFill>
+                <a:latin typeface="Calibri"/>
+              </a:rPr>
+              <a:t>Batch learning assumes a fixed joint law p(x, y).</a:t>
+            </a:r>
+          </a:p>
+          <a:p>
+            <a:pPr>
+              <a:spcAft>
+                <a:spcPts val="1200"/>
+              </a:spcAft>
+            </a:pPr>
+            <a:r>
+              <a:rPr sz="2800" b="0" i="0">
+                <a:solidFill>
+                  <a:srgbClr val="000000"/>
+                </a:solidFill>
+                <a:latin typeface="Calibri"/>
+              </a:rPr>
+              <a:t>In a stream that law itself evolves:</a:t>
+            </a:r>
+          </a:p>
+        </p:txBody>
+      </p:sp>
+      <p:sp>
+        <p:nvSpPr>
+          <p:cNvPr id="4" name="TextBox 3"/>
+          <p:cNvSpPr txBox="1"/>
+          <p:nvPr/>
+        </p:nvSpPr>
+        <p:spPr>
+          <a:xfrm>
+            <a:off x="640080" y="2880360"/>
             <a:ext cx="10911535" cy="731520"/>
           </a:xfrm>
           <a:prstGeom prst="rect">
@@ -10770,118 +9155,49 @@
           <a:lstStyle/>
           <a:p>
             <a:r>
-              <a:rPr sz="3200" b="1" i="0">
-                <a:solidFill>
-                  <a:srgbClr val="000000"/>
-                </a:solidFill>
-                <a:latin typeface="Calibri"/>
-              </a:rPr>
-              <a:t>The problem</a:t>
-            </a:r>
-          </a:p>
-        </p:txBody>
-      </p:sp>
-      <p:sp>
-        <p:nvSpPr>
-          <p:cNvPr id="3" name="TextBox 2"/>
-          <p:cNvSpPr txBox="1"/>
-          <p:nvPr/>
-        </p:nvSpPr>
-        <p:spPr>
-          <a:xfrm>
-            <a:off x="640080" y="1097280"/>
-            <a:ext cx="10911535" cy="411480"/>
-          </a:xfrm>
-          <a:prstGeom prst="rect">
-            <a:avLst/>
-          </a:prstGeom>
-          <a:noFill/>
-        </p:spPr>
-        <p:txBody>
-          <a:bodyPr wrap="square" lIns="0" tIns="0" bIns="0">
-            <a:spAutoFit/>
-          </a:bodyPr>
-          <a:lstStyle/>
-          <a:p>
-            <a:r>
-              <a:rPr sz="1700" b="0" i="0">
-                <a:solidFill>
-                  <a:srgbClr val="000000"/>
-                </a:solidFill>
-                <a:latin typeface="Calibri"/>
-              </a:rPr>
-              <a:t>supervised learning assumes a distribution that streams do not provide</a:t>
-            </a:r>
-          </a:p>
-        </p:txBody>
-      </p:sp>
-      <p:sp>
-        <p:nvSpPr>
-          <p:cNvPr id="4" name="TextBox 3"/>
-          <p:cNvSpPr txBox="1"/>
-          <p:nvPr/>
-        </p:nvSpPr>
-        <p:spPr>
-          <a:xfrm>
-            <a:off x="640080" y="1691640"/>
-            <a:ext cx="10911535" cy="4709160"/>
-          </a:xfrm>
-          <a:prstGeom prst="rect">
-            <a:avLst/>
-          </a:prstGeom>
-          <a:noFill/>
-        </p:spPr>
-        <p:txBody>
-          <a:bodyPr wrap="square" lIns="0" tIns="0" bIns="0">
-            <a:spAutoFit/>
-          </a:bodyPr>
-          <a:lstStyle/>
-          <a:p>
-            <a:pPr>
-              <a:spcAft>
-                <a:spcPts val="800"/>
-              </a:spcAft>
-            </a:pPr>
-            <a:r>
-              <a:rPr sz="1800" b="0" i="0">
-                <a:solidFill>
-                  <a:srgbClr val="000000"/>
-                </a:solidFill>
-                <a:latin typeface="Calibri"/>
-              </a:rPr>
-              <a:t>Batch learning assumes a fixed joint distribution p(x, y): a model fitted to a</a:t>
-            </a:r>
-          </a:p>
-          <a:p>
-            <a:pPr>
-              <a:spcAft>
-                <a:spcPts val="800"/>
-              </a:spcAft>
-            </a:pPr>
-            <a:r>
-              <a:rPr sz="1800" b="0" i="0">
-                <a:solidFill>
-                  <a:srgbClr val="000000"/>
-                </a:solidFill>
-                <a:latin typeface="Calibri"/>
-              </a:rPr>
-              <a:t>sample generalises because the sample and the deployment share that law.</a:t>
-            </a:r>
-          </a:p>
-          <a:p>
-            <a:pPr>
-              <a:spcAft>
-                <a:spcPts val="800"/>
-              </a:spcAft>
-            </a:pPr>
-            <a:r>
-              <a:rPr sz="1800" b="1" i="0">
-                <a:solidFill>
-                  <a:srgbClr val="000000"/>
-                </a:solidFill>
-                <a:latin typeface="Calibri"/>
-              </a:rPr>
-              <a:t>In a data stream the law itself evolves.</a:t>
+              <a:rPr sz="3600" b="0" i="1">
+                <a:solidFill>
+                  <a:srgbClr val="000000"/>
+                </a:solidFill>
+                <a:latin typeface="Cambria Math"/>
+              </a:rPr>
+              <a:t>p</a:t>
+            </a:r>
+            <a:r>
+              <a:rPr sz="2592" b="0" i="1" baseline="-25000">
+                <a:solidFill>
+                  <a:srgbClr val="000000"/>
+                </a:solidFill>
+                <a:latin typeface="Cambria Math"/>
+              </a:rPr>
+              <a:t>t</a:t>
+            </a:r>
+            <a:r>
+              <a:rPr sz="3600" b="0" i="1">
+                <a:solidFill>
+                  <a:srgbClr val="000000"/>
+                </a:solidFill>
+                <a:latin typeface="Cambria Math"/>
+              </a:rPr>
+              <a:t>(y | x)   ≠   p</a:t>
+            </a:r>
+            <a:r>
+              <a:rPr sz="2592" b="0" i="1" baseline="-25000">
+                <a:solidFill>
+                  <a:srgbClr val="000000"/>
+                </a:solidFill>
+                <a:latin typeface="Cambria Math"/>
+              </a:rPr>
+              <a:t>t+k</a:t>
+            </a:r>
+            <a:r>
+              <a:rPr sz="3600" b="0" i="1">
+                <a:solidFill>
+                  <a:srgbClr val="000000"/>
+                </a:solidFill>
+                <a:latin typeface="Cambria Math"/>
+              </a:rPr>
+              <a:t>(y | x)</a:t>
             </a:r>
           </a:p>
         </p:txBody>
@@ -10889,76 +9205,6 @@
       <p:sp>
         <p:nvSpPr>
           <p:cNvPr id="5" name="TextBox 4"/>
-          <p:cNvSpPr txBox="1"/>
-          <p:nvPr/>
-        </p:nvSpPr>
-        <p:spPr>
-          <a:xfrm>
-            <a:off x="640080" y="3154680"/>
-            <a:ext cx="10911535" cy="566928"/>
-          </a:xfrm>
-          <a:prstGeom prst="rect">
-            <a:avLst/>
-          </a:prstGeom>
-          <a:noFill/>
-        </p:spPr>
-        <p:txBody>
-          <a:bodyPr wrap="square" lIns="0" tIns="0" bIns="0">
-            <a:spAutoFit/>
-          </a:bodyPr>
-          <a:lstStyle/>
-          <a:p>
-            <a:r>
-              <a:rPr sz="2800" b="0" i="1">
-                <a:solidFill>
-                  <a:srgbClr val="000000"/>
-                </a:solidFill>
-                <a:latin typeface="Cambria Math"/>
-              </a:rPr>
-              <a:t>p</a:t>
-            </a:r>
-            <a:r>
-              <a:rPr sz="2016" b="0" i="1" baseline="-25000">
-                <a:solidFill>
-                  <a:srgbClr val="000000"/>
-                </a:solidFill>
-                <a:latin typeface="Cambria Math"/>
-              </a:rPr>
-              <a:t>t</a:t>
-            </a:r>
-            <a:r>
-              <a:rPr sz="2800" b="0" i="1">
-                <a:solidFill>
-                  <a:srgbClr val="000000"/>
-                </a:solidFill>
-                <a:latin typeface="Cambria Math"/>
-              </a:rPr>
-              <a:t>(y | x)  ≠  p</a:t>
-            </a:r>
-            <a:r>
-              <a:rPr sz="2016" b="0" i="1" baseline="-25000">
-                <a:solidFill>
-                  <a:srgbClr val="000000"/>
-                </a:solidFill>
-                <a:latin typeface="Cambria Math"/>
-              </a:rPr>
-              <a:t>t+k</a:t>
-            </a:r>
-            <a:r>
-              <a:rPr sz="2800" b="0" i="1">
-                <a:solidFill>
-                  <a:srgbClr val="000000"/>
-                </a:solidFill>
-                <a:latin typeface="Cambria Math"/>
-              </a:rPr>
-              <a:t>(y | x)</a:t>
-            </a:r>
-          </a:p>
-        </p:txBody>
-      </p:sp>
-      <p:sp>
-        <p:nvSpPr>
-          <p:cNvPr id="6" name="TextBox 5"/>
           <p:cNvSpPr txBox="1"/>
           <p:nvPr/>
         </p:nvSpPr>
@@ -10980,81 +9226,65 @@
           <a:p>
             <a:pPr>
               <a:spcAft>
-                <a:spcPts val="800"/>
+                <a:spcPts val="1000"/>
               </a:spcAft>
             </a:pPr>
             <a:r>
-              <a:rPr sz="1700" b="0" i="0">
-                <a:solidFill>
-                  <a:srgbClr val="000000"/>
-                </a:solidFill>
-                <a:latin typeface="Calibri"/>
-              </a:rPr>
-              <a:t>The mapping from input to label is time-dependent, so a deployed model is not</a:t>
+              <a:rPr sz="2800" b="0" i="0">
+                <a:solidFill>
+                  <a:srgbClr val="000000"/>
+                </a:solidFill>
+                <a:latin typeface="Calibri"/>
+              </a:rPr>
+              <a:t>A deployed model is not stale but misspecified.</a:t>
             </a:r>
           </a:p>
           <a:p>
             <a:pPr>
               <a:spcAft>
-                <a:spcPts val="800"/>
+                <a:spcPts val="1000"/>
               </a:spcAft>
             </a:pPr>
             <a:r>
-              <a:rPr sz="1700" b="0" i="0">
-                <a:solidFill>
-                  <a:srgbClr val="000000"/>
-                </a:solidFill>
-                <a:latin typeface="Calibri"/>
-              </a:rPr>
-              <a:t>stale but misspecified: it estimates a target that no longer exists.</a:t>
-            </a:r>
-          </a:p>
-          <a:p>
-            <a:pPr>
+              <a:rPr sz="2800" b="1" i="0">
+                <a:solidFill>
+                  <a:srgbClr val="000000"/>
+                </a:solidFill>
+                <a:latin typeface="Calibri"/>
+              </a:rPr>
+              <a:t>Two consequences:</a:t>
+            </a:r>
+          </a:p>
+          <a:p>
+            <a:pPr lvl="1">
               <a:spcAft>
-                <a:spcPts val="800"/>
+                <a:spcPts val="1000"/>
               </a:spcAft>
             </a:pPr>
             <a:r>
-              <a:rPr sz="1700" b="1" i="0">
-                <a:solidFill>
-                  <a:srgbClr val="000000"/>
-                </a:solidFill>
-                <a:latin typeface="Calibri"/>
-              </a:rPr>
-              <a:t>Two consequences constrain every method that follows:</a:t>
+              <a:rPr sz="2700" b="0" i="0">
+                <a:solidFill>
+                  <a:srgbClr val="000000"/>
+                </a:solidFill>
+                <a:latin typeface="Calibri"/>
+              </a:rPr>
+              <a:t>degradation is silent</a:t>
             </a:r>
           </a:p>
           <a:p>
             <a:pPr lvl="1">
               <a:spcAft>
-                <a:spcPts val="800"/>
+                <a:spcPts val="1000"/>
               </a:spcAft>
             </a:pPr>
             <a:r>
-              <a:rPr sz="1600" b="0" i="0">
-                <a:solidFill>
-                  <a:srgbClr val="000000"/>
-                </a:solidFill>
-                <a:latin typeface="Calibri"/>
-              </a:rPr>
-              <a:t>degradation is silent — no failure is raised, the error rate simply rises</a:t>
-            </a:r>
-          </a:p>
-          <a:p>
-            <a:pPr lvl="1">
-              <a:spcAft>
-                <a:spcPts val="800"/>
-              </a:spcAft>
-            </a:pPr>
-            <a:r>
-              <a:rPr sz="1600" b="0" i="0">
-                <a:solidFill>
-                  <a:srgbClr val="000000"/>
-                </a:solidFill>
-                <a:latin typeface="Calibri"/>
-              </a:rPr>
-              <a:t>retraining from scratch is unavailable — the stream is unbounded, labels are late</a:t>
+              <a:rPr sz="2700" b="0" i="0">
+                <a:solidFill>
+                  <a:srgbClr val="000000"/>
+                </a:solidFill>
+                <a:latin typeface="Calibri"/>
+              </a:rPr>
+              <a:t>retraining from scratch is unavailable</a:t>
             </a:r>
           </a:p>
         </p:txBody>
@@ -11085,8 +9315,8 @@
         </p:nvSpPr>
         <p:spPr>
           <a:xfrm>
-            <a:off x="640080" y="365760"/>
-            <a:ext cx="10911535" cy="731520"/>
+            <a:off x="640080" y="320040"/>
+            <a:ext cx="10911535" cy="914400"/>
           </a:xfrm>
           <a:prstGeom prst="rect">
             <a:avLst/>
@@ -11100,7 +9330,7 @@
           <a:lstStyle/>
           <a:p>
             <a:r>
-              <a:rPr sz="3200" b="1" i="0">
+              <a:rPr sz="4400" b="1" i="0">
                 <a:solidFill>
                   <a:srgbClr val="000000"/>
                 </a:solidFill>
@@ -11119,8 +9349,8 @@
         </p:nvSpPr>
         <p:spPr>
           <a:xfrm>
-            <a:off x="640080" y="1097280"/>
-            <a:ext cx="10911535" cy="411480"/>
+            <a:off x="640080" y="1298448"/>
+            <a:ext cx="10911535" cy="457200"/>
           </a:xfrm>
           <a:prstGeom prst="rect">
             <a:avLst/>
@@ -11134,13 +9364,13 @@
           <a:lstStyle/>
           <a:p>
             <a:r>
-              <a:rPr sz="1700" b="0" i="0">
-                <a:solidFill>
-                  <a:srgbClr val="000000"/>
-                </a:solidFill>
-                <a:latin typeface="Calibri"/>
-              </a:rPr>
-              <a:t>Gama et al. (2014); Read (2018) §3.1–3.4</a:t>
+              <a:rPr sz="2200" b="0" i="0">
+                <a:solidFill>
+                  <a:srgbClr val="000000"/>
+                </a:solidFill>
+                <a:latin typeface="Calibri"/>
+              </a:rPr>
+              <a:t>Gama et al. (2014); Read §3</a:t>
             </a:r>
           </a:p>
         </p:txBody>
@@ -11154,8 +9384,8 @@
           <p:nvPr/>
         </p:nvGraphicFramePr>
         <p:xfrm>
-          <a:off x="640080" y="1691640"/>
-          <a:ext cx="10911533" cy="2560320"/>
+          <a:off x="640080" y="2057400"/>
+          <a:ext cx="10911533" cy="2743200"/>
         </p:xfrm>
         <a:graphic>
           <a:graphicData uri="http://schemas.openxmlformats.org/drawingml/2006/table">
@@ -11164,19 +9394,19 @@
                 <a:tableStyleId>{5C22544A-7EE6-4342-B048-85BDC9FD1C3A}</a:tableStyleId>
               </a:tblPr>
               <a:tblGrid>
-                <a:gridCol w="1818589"/>
-                <a:gridCol w="5657832"/>
-                <a:gridCol w="3435112"/>
+                <a:gridCol w="2380698"/>
+                <a:gridCol w="4959788"/>
+                <a:gridCol w="3571047"/>
               </a:tblGrid>
-              <a:tr h="512064">
-                <a:tc>
-                  <a:txBody>
-                    <a:bodyPr/>
-                    <a:lstStyle/>
-                    <a:p>
-                      <a:pPr algn="l"/>
-                      <a:r>
-                        <a:rPr sz="1700" b="1" i="0">
+              <a:tr h="548640">
+                <a:tc>
+                  <a:txBody>
+                    <a:bodyPr/>
+                    <a:lstStyle/>
+                    <a:p>
+                      <a:pPr algn="l"/>
+                      <a:r>
+                        <a:rPr sz="2400" b="1" i="0">
                           <a:solidFill>
                             <a:srgbClr val="000000"/>
                           </a:solidFill>
@@ -11199,7 +9429,7 @@
                     <a:p>
                       <a:pPr algn="l"/>
                       <a:r>
-                        <a:rPr sz="1700" b="1" i="0">
+                        <a:rPr sz="2400" b="1" i="0">
                           <a:solidFill>
                             <a:srgbClr val="000000"/>
                           </a:solidFill>
@@ -11222,7 +9452,7 @@
                     <a:p>
                       <a:pPr algn="l"/>
                       <a:r>
-                        <a:rPr sz="1700" b="1" i="0">
+                        <a:rPr sz="2400" b="1" i="0">
                           <a:solidFill>
                             <a:srgbClr val="000000"/>
                           </a:solidFill>
@@ -11239,15 +9469,15 @@
                   </a:tcPr>
                 </a:tc>
               </a:tr>
-              <a:tr h="512064">
-                <a:tc>
-                  <a:txBody>
-                    <a:bodyPr/>
-                    <a:lstStyle/>
-                    <a:p>
-                      <a:pPr algn="l"/>
-                      <a:r>
-                        <a:rPr sz="1700" b="0" i="0">
+              <a:tr h="548640">
+                <a:tc>
+                  <a:txBody>
+                    <a:bodyPr/>
+                    <a:lstStyle/>
+                    <a:p>
+                      <a:pPr algn="l"/>
+                      <a:r>
+                        <a:rPr sz="2400" b="0" i="0">
                           <a:solidFill>
                             <a:srgbClr val="000000"/>
                           </a:solidFill>
@@ -11270,30 +9500,30 @@
                     <a:p>
                       <a:pPr algn="l"/>
                       <a:r>
-                        <a:rPr sz="1700" b="0" i="0">
-                          <a:solidFill>
-                            <a:srgbClr val="000000"/>
-                          </a:solidFill>
-                          <a:latin typeface="Calibri"/>
-                        </a:rPr>
-                        <a:t>one concept replaces another at a change point</a:t>
-                      </a:r>
-                    </a:p>
-                  </a:txBody>
-                  <a:tcPr marL="73152" marR="73152" marT="27432" marB="27432">
-                    <a:solidFill>
-                      <a:srgbClr val="FFFFFF"/>
-                    </a:solidFill>
-                  </a:tcPr>
-                </a:tc>
-                <a:tc>
-                  <a:txBody>
-                    <a:bodyPr/>
-                    <a:lstStyle/>
-                    <a:p>
-                      <a:pPr algn="l"/>
-                      <a:r>
-                        <a:rPr sz="1700" b="0" i="0">
+                        <a:rPr sz="2400" b="0" i="0">
+                          <a:solidFill>
+                            <a:srgbClr val="000000"/>
+                          </a:solidFill>
+                          <a:latin typeface="Calibri"/>
+                        </a:rPr>
+                        <a:t>one concept replaces another</a:t>
+                      </a:r>
+                    </a:p>
+                  </a:txBody>
+                  <a:tcPr marL="73152" marR="73152" marT="27432" marB="27432">
+                    <a:solidFill>
+                      <a:srgbClr val="FFFFFF"/>
+                    </a:solidFill>
+                  </a:tcPr>
+                </a:tc>
+                <a:tc>
+                  <a:txBody>
+                    <a:bodyPr/>
+                    <a:lstStyle/>
+                    <a:p>
+                      <a:pPr algn="l"/>
+                      <a:r>
+                        <a:rPr sz="2400" b="0" i="0">
                           <a:solidFill>
                             <a:srgbClr val="000000"/>
                           </a:solidFill>
@@ -11310,15 +9540,15 @@
                   </a:tcPr>
                 </a:tc>
               </a:tr>
-              <a:tr h="512064">
-                <a:tc>
-                  <a:txBody>
-                    <a:bodyPr/>
-                    <a:lstStyle/>
-                    <a:p>
-                      <a:pPr algn="l"/>
-                      <a:r>
-                        <a:rPr sz="1700" b="0" i="0">
+              <a:tr h="548640">
+                <a:tc>
+                  <a:txBody>
+                    <a:bodyPr/>
+                    <a:lstStyle/>
+                    <a:p>
+                      <a:pPr algn="l"/>
+                      <a:r>
+                        <a:rPr sz="2400" b="0" i="0">
                           <a:solidFill>
                             <a:srgbClr val="000000"/>
                           </a:solidFill>
@@ -11341,30 +9571,30 @@
                     <a:p>
                       <a:pPr algn="l"/>
                       <a:r>
-                        <a:rPr sz="1700" b="0" i="0">
-                          <a:solidFill>
-                            <a:srgbClr val="000000"/>
-                          </a:solidFill>
-                          <a:latin typeface="Calibri"/>
-                        </a:rPr>
-                        <a:t>the concept advances through a sequence of states</a:t>
-                      </a:r>
-                    </a:p>
-                  </a:txBody>
-                  <a:tcPr marL="73152" marR="73152" marT="27432" marB="27432">
-                    <a:solidFill>
-                      <a:srgbClr val="FFFFFF"/>
-                    </a:solidFill>
-                  </a:tcPr>
-                </a:tc>
-                <a:tc>
-                  <a:txBody>
-                    <a:bodyPr/>
-                    <a:lstStyle/>
-                    <a:p>
-                      <a:pPr algn="l"/>
-                      <a:r>
-                        <a:rPr sz="1700" b="0" i="0">
+                        <a:rPr sz="2400" b="0" i="0">
+                          <a:solidFill>
+                            <a:srgbClr val="000000"/>
+                          </a:solidFill>
+                          <a:latin typeface="Calibri"/>
+                        </a:rPr>
+                        <a:t>the concept advances by steps</a:t>
+                      </a:r>
+                    </a:p>
+                  </a:txBody>
+                  <a:tcPr marL="73152" marR="73152" marT="27432" marB="27432">
+                    <a:solidFill>
+                      <a:srgbClr val="FFFFFF"/>
+                    </a:solidFill>
+                  </a:tcPr>
+                </a:tc>
+                <a:tc>
+                  <a:txBody>
+                    <a:bodyPr/>
+                    <a:lstStyle/>
+                    <a:p>
+                      <a:pPr algn="l"/>
+                      <a:r>
+                        <a:rPr sz="2400" b="0" i="0">
                           <a:solidFill>
                             <a:srgbClr val="000000"/>
                           </a:solidFill>
@@ -11381,15 +9611,15 @@
                   </a:tcPr>
                 </a:tc>
               </a:tr>
-              <a:tr h="512064">
-                <a:tc>
-                  <a:txBody>
-                    <a:bodyPr/>
-                    <a:lstStyle/>
-                    <a:p>
-                      <a:pPr algn="l"/>
-                      <a:r>
-                        <a:rPr sz="1700" b="0" i="0">
+              <a:tr h="548640">
+                <a:tc>
+                  <a:txBody>
+                    <a:bodyPr/>
+                    <a:lstStyle/>
+                    <a:p>
+                      <a:pPr algn="l"/>
+                      <a:r>
+                        <a:rPr sz="2400" b="0" i="0">
                           <a:solidFill>
                             <a:srgbClr val="000000"/>
                           </a:solidFill>
@@ -11412,30 +9642,30 @@
                     <a:p>
                       <a:pPr algn="l"/>
                       <a:r>
-                        <a:rPr sz="1700" b="0" i="0">
-                          <a:solidFill>
-                            <a:srgbClr val="000000"/>
-                          </a:solidFill>
-                          <a:latin typeface="Calibri"/>
-                        </a:rPr>
-                        <a:t>two concepts alternate, mixing weight shifting</a:t>
-                      </a:r>
-                    </a:p>
-                  </a:txBody>
-                  <a:tcPr marL="73152" marR="73152" marT="27432" marB="27432">
-                    <a:solidFill>
-                      <a:srgbClr val="FFFFFF"/>
-                    </a:solidFill>
-                  </a:tcPr>
-                </a:tc>
-                <a:tc>
-                  <a:txBody>
-                    <a:bodyPr/>
-                    <a:lstStyle/>
-                    <a:p>
-                      <a:pPr algn="l"/>
-                      <a:r>
-                        <a:rPr sz="1700" b="0" i="0">
+                        <a:rPr sz="2400" b="0" i="0">
+                          <a:solidFill>
+                            <a:srgbClr val="000000"/>
+                          </a:solidFill>
+                          <a:latin typeface="Calibri"/>
+                        </a:rPr>
+                        <a:t>two concepts alternate</a:t>
+                      </a:r>
+                    </a:p>
+                  </a:txBody>
+                  <a:tcPr marL="73152" marR="73152" marT="27432" marB="27432">
+                    <a:solidFill>
+                      <a:srgbClr val="FFFFFF"/>
+                    </a:solidFill>
+                  </a:tcPr>
+                </a:tc>
+                <a:tc>
+                  <a:txBody>
+                    <a:bodyPr/>
+                    <a:lstStyle/>
+                    <a:p>
+                      <a:pPr algn="l"/>
+                      <a:r>
+                        <a:rPr sz="2400" b="0" i="0">
                           <a:solidFill>
                             <a:srgbClr val="000000"/>
                           </a:solidFill>
@@ -11452,15 +9682,15 @@
                   </a:tcPr>
                 </a:tc>
               </a:tr>
-              <a:tr h="512064">
-                <a:tc>
-                  <a:txBody>
-                    <a:bodyPr/>
-                    <a:lstStyle/>
-                    <a:p>
-                      <a:pPr algn="l"/>
-                      <a:r>
-                        <a:rPr sz="1700" b="0" i="0">
+              <a:tr h="548640">
+                <a:tc>
+                  <a:txBody>
+                    <a:bodyPr/>
+                    <a:lstStyle/>
+                    <a:p>
+                      <a:pPr algn="l"/>
+                      <a:r>
+                        <a:rPr sz="2400" b="0" i="0">
                           <a:solidFill>
                             <a:srgbClr val="000000"/>
                           </a:solidFill>
@@ -11483,30 +9713,30 @@
                     <a:p>
                       <a:pPr algn="l"/>
                       <a:r>
-                        <a:rPr sz="1700" b="0" i="0">
-                          <a:solidFill>
-                            <a:srgbClr val="000000"/>
-                          </a:solidFill>
-                          <a:latin typeface="Calibri"/>
-                        </a:rPr>
-                        <a:t>concepts return, frequently with a period</a:t>
-                      </a:r>
-                    </a:p>
-                  </a:txBody>
-                  <a:tcPr marL="73152" marR="73152" marT="27432" marB="27432">
-                    <a:solidFill>
-                      <a:srgbClr val="FFFFFF"/>
-                    </a:solidFill>
-                  </a:tcPr>
-                </a:tc>
-                <a:tc>
-                  <a:txBody>
-                    <a:bodyPr/>
-                    <a:lstStyle/>
-                    <a:p>
-                      <a:pPr algn="l"/>
-                      <a:r>
-                        <a:rPr sz="1700" b="0" i="0">
+                        <a:rPr sz="2400" b="0" i="0">
+                          <a:solidFill>
+                            <a:srgbClr val="000000"/>
+                          </a:solidFill>
+                          <a:latin typeface="Calibri"/>
+                        </a:rPr>
+                        <a:t>concepts return periodically</a:t>
+                      </a:r>
+                    </a:p>
+                  </a:txBody>
+                  <a:tcPr marL="73152" marR="73152" marT="27432" marB="27432">
+                    <a:solidFill>
+                      <a:srgbClr val="FFFFFF"/>
+                    </a:solidFill>
+                  </a:tcPr>
+                </a:tc>
+                <a:tc>
+                  <a:txBody>
+                    <a:bodyPr/>
+                    <a:lstStyle/>
+                    <a:p>
+                      <a:pPr algn="l"/>
+                      <a:r>
+                        <a:rPr sz="2400" b="0" i="0">
                           <a:solidFill>
                             <a:srgbClr val="000000"/>
                           </a:solidFill>
@@ -11535,8 +9765,8 @@
         </p:nvSpPr>
         <p:spPr>
           <a:xfrm>
-            <a:off x="640080" y="4572000"/>
-            <a:ext cx="10911535" cy="1828800"/>
+            <a:off x="640080" y="5166360"/>
+            <a:ext cx="10911535" cy="1234439"/>
           </a:xfrm>
           <a:prstGeom prst="rect">
             <a:avLst/>
@@ -11551,49 +9781,17 @@
           <a:p>
             <a:pPr>
               <a:spcAft>
-                <a:spcPts val="600"/>
+                <a:spcPts val="1400"/>
               </a:spcAft>
             </a:pPr>
             <a:r>
-              <a:rPr sz="1700" b="0" i="0">
-                <a:solidFill>
-                  <a:srgbClr val="000000"/>
-                </a:solidFill>
-                <a:latin typeface="Calibri"/>
-              </a:rPr>
-              <a:t>The third column governs method design. Incremental drift admits a path through</a:t>
-            </a:r>
-          </a:p>
-          <a:p>
-            <a:pPr>
-              <a:spcAft>
-                <a:spcPts val="600"/>
-              </a:spcAft>
-            </a:pPr>
-            <a:r>
-              <a:rPr sz="1700" b="0" i="0">
-                <a:solidFill>
-                  <a:srgbClr val="000000"/>
-                </a:solidFill>
-                <a:latin typeface="Calibri"/>
-              </a:rPr>
-              <a:t>parameter space; gradual drift does not, since the concept alternates between two</a:t>
-            </a:r>
-          </a:p>
-          <a:p>
-            <a:pPr>
-              <a:spcAft>
-                <a:spcPts val="600"/>
-              </a:spcAft>
-            </a:pPr>
-            <a:r>
-              <a:rPr sz="1700" b="0" i="0">
-                <a:solidFill>
-                  <a:srgbClr val="000000"/>
-                </a:solidFill>
-                <a:latin typeface="Calibri"/>
-              </a:rPr>
-              <a:t>fixed points and only the mixing weight evolves smoothly.</a:t>
+              <a:rPr sz="2800" b="0" i="0">
+                <a:solidFill>
+                  <a:srgbClr val="000000"/>
+                </a:solidFill>
+                <a:latin typeface="Calibri"/>
+              </a:rPr>
+              <a:t>Only incremental drift offers a path to follow.</a:t>
             </a:r>
           </a:p>
         </p:txBody>
@@ -11624,7 +9822,41 @@
         </p:nvSpPr>
         <p:spPr>
           <a:xfrm>
-            <a:off x="640080" y="365760"/>
+            <a:off x="640080" y="320040"/>
+            <a:ext cx="10911535" cy="914400"/>
+          </a:xfrm>
+          <a:prstGeom prst="rect">
+            <a:avLst/>
+          </a:prstGeom>
+          <a:noFill/>
+        </p:spPr>
+        <p:txBody>
+          <a:bodyPr wrap="square" lIns="0" tIns="0" bIns="0">
+            <a:spAutoFit/>
+          </a:bodyPr>
+          <a:lstStyle/>
+          <a:p>
+            <a:r>
+              <a:rPr sz="4400" b="1" i="0">
+                <a:solidFill>
+                  <a:srgbClr val="000000"/>
+                </a:solidFill>
+                <a:latin typeface="Calibri"/>
+              </a:rPr>
+              <a:t>Which factor moves</a:t>
+            </a:r>
+          </a:p>
+        </p:txBody>
+      </p:sp>
+      <p:sp>
+        <p:nvSpPr>
+          <p:cNvPr id="3" name="TextBox 2"/>
+          <p:cNvSpPr txBox="1"/>
+          <p:nvPr/>
+        </p:nvSpPr>
+        <p:spPr>
+          <a:xfrm>
+            <a:off x="640080" y="1554480"/>
             <a:ext cx="10911535" cy="731520"/>
           </a:xfrm>
           <a:prstGeom prst="rect">
@@ -11639,96 +9871,28 @@
           <a:lstStyle/>
           <a:p>
             <a:r>
-              <a:rPr sz="3200" b="1" i="0">
-                <a:solidFill>
-                  <a:srgbClr val="000000"/>
-                </a:solidFill>
-                <a:latin typeface="Calibri"/>
-              </a:rPr>
-              <a:t>Which factor moves</a:t>
-            </a:r>
-          </a:p>
-        </p:txBody>
-      </p:sp>
-      <p:sp>
-        <p:nvSpPr>
-          <p:cNvPr id="3" name="TextBox 2"/>
-          <p:cNvSpPr txBox="1"/>
-          <p:nvPr/>
-        </p:nvSpPr>
-        <p:spPr>
-          <a:xfrm>
-            <a:off x="640080" y="1097280"/>
-            <a:ext cx="10911535" cy="411480"/>
-          </a:xfrm>
-          <a:prstGeom prst="rect">
-            <a:avLst/>
-          </a:prstGeom>
-          <a:noFill/>
-        </p:spPr>
-        <p:txBody>
-          <a:bodyPr wrap="square" lIns="0" tIns="0" bIns="0">
-            <a:spAutoFit/>
-          </a:bodyPr>
-          <a:lstStyle/>
-          <a:p>
-            <a:r>
-              <a:rPr sz="1700" b="0" i="0">
-                <a:solidFill>
-                  <a:srgbClr val="000000"/>
-                </a:solidFill>
-                <a:latin typeface="Calibri"/>
-              </a:rPr>
-              <a:t>the joint admits exactly two loci of change</a:t>
-            </a:r>
-          </a:p>
-        </p:txBody>
-      </p:sp>
-      <p:sp>
-        <p:nvSpPr>
-          <p:cNvPr id="4" name="TextBox 3"/>
-          <p:cNvSpPr txBox="1"/>
-          <p:nvPr/>
-        </p:nvSpPr>
-        <p:spPr>
-          <a:xfrm>
-            <a:off x="640080" y="1691640"/>
-            <a:ext cx="10911535" cy="566928"/>
-          </a:xfrm>
-          <a:prstGeom prst="rect">
-            <a:avLst/>
-          </a:prstGeom>
-          <a:noFill/>
-        </p:spPr>
-        <p:txBody>
-          <a:bodyPr wrap="square" lIns="0" tIns="0" bIns="0">
-            <a:spAutoFit/>
-          </a:bodyPr>
-          <a:lstStyle/>
-          <a:p>
-            <a:r>
-              <a:rPr sz="2800" b="0" i="1">
+              <a:rPr sz="3600" b="0" i="1">
                 <a:solidFill>
                   <a:srgbClr val="000000"/>
                 </a:solidFill>
                 <a:latin typeface="Cambria Math"/>
               </a:rPr>
-              <a:t>p(x, y)  =  p(x) · p(y | x)</a:t>
+              <a:t>p(x, y)   =   p(x) · p(y | x)</a:t>
             </a:r>
           </a:p>
         </p:txBody>
       </p:sp>
       <p:graphicFrame>
         <p:nvGraphicFramePr>
-          <p:cNvPr id="5" name="Table 4"/>
+          <p:cNvPr id="4" name="Table 3"/>
           <p:cNvGraphicFramePr>
             <a:graphicFrameLocks noGrp="1"/>
           </p:cNvGraphicFramePr>
           <p:nvPr/>
         </p:nvGraphicFramePr>
         <p:xfrm>
-          <a:off x="640080" y="2514600"/>
-          <a:ext cx="10911532" cy="1737360"/>
+          <a:off x="640080" y="2651760"/>
+          <a:ext cx="8778238" cy="1737360"/>
         </p:xfrm>
         <a:graphic>
           <a:graphicData uri="http://schemas.openxmlformats.org/drawingml/2006/table">
@@ -11737,10 +9901,9 @@
                 <a:tableStyleId>{5C22544A-7EE6-4342-B048-85BDC9FD1C3A}</a:tableStyleId>
               </a:tblPr>
               <a:tblGrid>
-                <a:gridCol w="2546024"/>
-                <a:gridCol w="3455319"/>
-                <a:gridCol w="2546024"/>
-                <a:gridCol w="2364165"/>
+                <a:gridCol w="3175108"/>
+                <a:gridCol w="2801565"/>
+                <a:gridCol w="2801565"/>
               </a:tblGrid>
               <a:tr h="579120">
                 <a:tc>
@@ -11764,59 +9927,36 @@
                     <a:p>
                       <a:pPr algn="l"/>
                       <a:r>
-                        <a:rPr sz="1600" b="1" i="0">
-                          <a:solidFill>
-                            <a:srgbClr val="000000"/>
-                          </a:solidFill>
-                          <a:latin typeface="Calibri"/>
-                        </a:rPr>
-                        <a:t>definition</a:t>
-                      </a:r>
-                    </a:p>
-                  </a:txBody>
-                  <a:tcPr marL="73152" marR="73152" marT="27432" marB="27432">
-                    <a:solidFill>
-                      <a:srgbClr val="FFFFFF"/>
-                    </a:solidFill>
-                  </a:tcPr>
-                </a:tc>
-                <a:tc>
-                  <a:txBody>
-                    <a:bodyPr/>
-                    <a:lstStyle/>
-                    <a:p>
-                      <a:pPr algn="l"/>
-                      <a:r>
-                        <a:rPr sz="1600" b="1" i="0">
-                          <a:solidFill>
-                            <a:srgbClr val="000000"/>
-                          </a:solidFill>
-                          <a:latin typeface="Calibri"/>
-                        </a:rPr>
-                        <a:t>conventional name</a:t>
-                      </a:r>
-                    </a:p>
-                  </a:txBody>
-                  <a:tcPr marL="73152" marR="73152" marT="27432" marB="27432">
-                    <a:solidFill>
-                      <a:srgbClr val="FFFFFF"/>
-                    </a:solidFill>
-                  </a:tcPr>
-                </a:tc>
-                <a:tc>
-                  <a:txBody>
-                    <a:bodyPr/>
-                    <a:lstStyle/>
-                    <a:p>
-                      <a:pPr algn="l"/>
-                      <a:r>
-                        <a:rPr sz="1600" b="1" i="0">
-                          <a:solidFill>
-                            <a:srgbClr val="000000"/>
-                          </a:solidFill>
-                          <a:latin typeface="Calibri"/>
-                        </a:rPr>
-                        <a:t>typical remedy</a:t>
+                        <a:rPr sz="2400" b="1" i="0">
+                          <a:solidFill>
+                            <a:srgbClr val="000000"/>
+                          </a:solidFill>
+                          <a:latin typeface="Calibri"/>
+                        </a:rPr>
+                        <a:t>changes</a:t>
+                      </a:r>
+                    </a:p>
+                  </a:txBody>
+                  <a:tcPr marL="73152" marR="73152" marT="27432" marB="27432">
+                    <a:solidFill>
+                      <a:srgbClr val="FFFFFF"/>
+                    </a:solidFill>
+                  </a:tcPr>
+                </a:tc>
+                <a:tc>
+                  <a:txBody>
+                    <a:bodyPr/>
+                    <a:lstStyle/>
+                    <a:p>
+                      <a:pPr algn="l"/>
+                      <a:r>
+                        <a:rPr sz="2400" b="1" i="0">
+                          <a:solidFill>
+                            <a:srgbClr val="000000"/>
+                          </a:solidFill>
+                          <a:latin typeface="Calibri"/>
+                        </a:rPr>
+                        <a:t>remedy</a:t>
                       </a:r>
                     </a:p>
                   </a:txBody>
@@ -11835,7 +9975,7 @@
                     <a:p>
                       <a:pPr algn="l"/>
                       <a:r>
-                        <a:rPr sz="1600" b="0" i="0">
+                        <a:rPr sz="2400" b="0" i="0">
                           <a:solidFill>
                             <a:srgbClr val="000000"/>
                           </a:solidFill>
@@ -11858,53 +9998,30 @@
                     <a:p>
                       <a:pPr algn="l"/>
                       <a:r>
-                        <a:rPr sz="1600" b="0" i="0">
-                          <a:solidFill>
-                            <a:srgbClr val="000000"/>
-                          </a:solidFill>
-                          <a:latin typeface="Calibri"/>
-                        </a:rPr>
-                        <a:t>p(x) changes, p(y | x) fixed</a:t>
-                      </a:r>
-                    </a:p>
-                  </a:txBody>
-                  <a:tcPr marL="73152" marR="73152" marT="27432" marB="27432">
-                    <a:solidFill>
-                      <a:srgbClr val="FFFFFF"/>
-                    </a:solidFill>
-                  </a:tcPr>
-                </a:tc>
-                <a:tc>
-                  <a:txBody>
-                    <a:bodyPr/>
-                    <a:lstStyle/>
-                    <a:p>
-                      <a:pPr algn="l"/>
-                      <a:r>
-                        <a:rPr sz="1600" b="0" i="0">
-                          <a:solidFill>
-                            <a:srgbClr val="000000"/>
-                          </a:solidFill>
-                          <a:latin typeface="Calibri"/>
-                        </a:rPr>
-                        <a:t>covariate shift</a:t>
-                      </a:r>
-                    </a:p>
-                  </a:txBody>
-                  <a:tcPr marL="73152" marR="73152" marT="27432" marB="27432">
-                    <a:solidFill>
-                      <a:srgbClr val="FFFFFF"/>
-                    </a:solidFill>
-                  </a:tcPr>
-                </a:tc>
-                <a:tc>
-                  <a:txBody>
-                    <a:bodyPr/>
-                    <a:lstStyle/>
-                    <a:p>
-                      <a:pPr algn="l"/>
-                      <a:r>
-                        <a:rPr sz="1600" b="0" i="0">
+                        <a:rPr sz="2400" b="0" i="0">
+                          <a:solidFill>
+                            <a:srgbClr val="000000"/>
+                          </a:solidFill>
+                          <a:latin typeface="Calibri"/>
+                        </a:rPr>
+                        <a:t>p(x)</a:t>
+                      </a:r>
+                    </a:p>
+                  </a:txBody>
+                  <a:tcPr marL="73152" marR="73152" marT="27432" marB="27432">
+                    <a:solidFill>
+                      <a:srgbClr val="FFFFFF"/>
+                    </a:solidFill>
+                  </a:tcPr>
+                </a:tc>
+                <a:tc>
+                  <a:txBody>
+                    <a:bodyPr/>
+                    <a:lstStyle/>
+                    <a:p>
+                      <a:pPr algn="l"/>
+                      <a:r>
+                        <a:rPr sz="2400" b="0" i="0">
                           <a:solidFill>
                             <a:srgbClr val="000000"/>
                           </a:solidFill>
@@ -11929,7 +10046,7 @@
                     <a:p>
                       <a:pPr algn="l"/>
                       <a:r>
-                        <a:rPr sz="1600" b="0" i="0">
+                        <a:rPr sz="2400" b="0" i="0">
                           <a:solidFill>
                             <a:srgbClr val="000000"/>
                           </a:solidFill>
@@ -11952,53 +10069,30 @@
                     <a:p>
                       <a:pPr algn="l"/>
                       <a:r>
-                        <a:rPr sz="1600" b="0" i="0">
-                          <a:solidFill>
-                            <a:srgbClr val="000000"/>
-                          </a:solidFill>
-                          <a:latin typeface="Calibri"/>
-                        </a:rPr>
-                        <a:t>p(y | x) changes</a:t>
-                      </a:r>
-                    </a:p>
-                  </a:txBody>
-                  <a:tcPr marL="73152" marR="73152" marT="27432" marB="27432">
-                    <a:solidFill>
-                      <a:srgbClr val="FFFFFF"/>
-                    </a:solidFill>
-                  </a:tcPr>
-                </a:tc>
-                <a:tc>
-                  <a:txBody>
-                    <a:bodyPr/>
-                    <a:lstStyle/>
-                    <a:p>
-                      <a:pPr algn="l"/>
-                      <a:r>
-                        <a:rPr sz="1600" b="0" i="0">
-                          <a:solidFill>
-                            <a:srgbClr val="000000"/>
-                          </a:solidFill>
-                          <a:latin typeface="Calibri"/>
-                        </a:rPr>
-                        <a:t>concept drift</a:t>
-                      </a:r>
-                    </a:p>
-                  </a:txBody>
-                  <a:tcPr marL="73152" marR="73152" marT="27432" marB="27432">
-                    <a:solidFill>
-                      <a:srgbClr val="FFFFFF"/>
-                    </a:solidFill>
-                  </a:tcPr>
-                </a:tc>
-                <a:tc>
-                  <a:txBody>
-                    <a:bodyPr/>
-                    <a:lstStyle/>
-                    <a:p>
-                      <a:pPr algn="l"/>
-                      <a:r>
-                        <a:rPr sz="1600" b="0" i="0">
+                        <a:rPr sz="2400" b="0" i="0">
+                          <a:solidFill>
+                            <a:srgbClr val="000000"/>
+                          </a:solidFill>
+                          <a:latin typeface="Calibri"/>
+                        </a:rPr>
+                        <a:t>p(y | x)</a:t>
+                      </a:r>
+                    </a:p>
+                  </a:txBody>
+                  <a:tcPr marL="73152" marR="73152" marT="27432" marB="27432">
+                    <a:solidFill>
+                      <a:srgbClr val="FFFFFF"/>
+                    </a:solidFill>
+                  </a:tcPr>
+                </a:tc>
+                <a:tc>
+                  <a:txBody>
+                    <a:bodyPr/>
+                    <a:lstStyle/>
+                    <a:p>
+                      <a:pPr algn="l"/>
+                      <a:r>
+                        <a:rPr sz="2400" b="0" i="0">
                           <a:solidFill>
                             <a:srgbClr val="000000"/>
                           </a:solidFill>
@@ -12021,14 +10115,14 @@
       </p:graphicFrame>
       <p:sp>
         <p:nvSpPr>
-          <p:cNvPr id="6" name="TextBox 5"/>
+          <p:cNvPr id="5" name="TextBox 4"/>
           <p:cNvSpPr txBox="1"/>
           <p:nvPr/>
         </p:nvSpPr>
         <p:spPr>
           <a:xfrm>
-            <a:off x="640080" y="4526280"/>
-            <a:ext cx="10911535" cy="1874519"/>
+            <a:off x="640080" y="4754880"/>
+            <a:ext cx="10911535" cy="1645919"/>
           </a:xfrm>
           <a:prstGeom prst="rect">
             <a:avLst/>
@@ -12043,65 +10137,33 @@
           <a:p>
             <a:pPr>
               <a:spcAft>
-                <a:spcPts val="700"/>
+                <a:spcPts val="1000"/>
               </a:spcAft>
             </a:pPr>
             <a:r>
-              <a:rPr sz="1700" b="0" i="0">
-                <a:solidFill>
-                  <a:srgbClr val="000000"/>
-                </a:solidFill>
-                <a:latin typeface="Calibri"/>
-              </a:rPr>
-              <a:t>Only the second displaces the decision boundary, and therefore only the second</a:t>
+              <a:rPr sz="2800" b="0" i="0">
+                <a:solidFill>
+                  <a:srgbClr val="000000"/>
+                </a:solidFill>
+                <a:latin typeface="Calibri"/>
+              </a:rPr>
+              <a:t>Only the second moves the decision boundary.</a:t>
             </a:r>
           </a:p>
           <a:p>
             <a:pPr>
               <a:spcAft>
-                <a:spcPts val="700"/>
+                <a:spcPts val="1000"/>
               </a:spcAft>
             </a:pPr>
             <a:r>
-              <a:rPr sz="1700" b="0" i="0">
-                <a:solidFill>
-                  <a:srgbClr val="000000"/>
-                </a:solidFill>
-                <a:latin typeface="Calibri"/>
-              </a:rPr>
-              <a:t>necessarily costs accuracy. Most recent forecasting work addresses the first:</a:t>
-            </a:r>
-          </a:p>
-          <a:p>
-            <a:pPr>
-              <a:spcAft>
-                <a:spcPts val="700"/>
-              </a:spcAft>
-            </a:pPr>
-            <a:r>
-              <a:rPr sz="1700" b="0" i="0">
-                <a:solidFill>
-                  <a:srgbClr val="000000"/>
-                </a:solidFill>
-                <a:latin typeface="Calibri"/>
-              </a:rPr>
-              <a:t>RevIN, Dish-TS and SAN normalise shifting marginals and leave p(y | x) untouched.</a:t>
-            </a:r>
-          </a:p>
-          <a:p>
-            <a:pPr>
-              <a:spcAft>
-                <a:spcPts val="700"/>
-              </a:spcAft>
-            </a:pPr>
-            <a:r>
-              <a:rPr sz="1700" b="1" i="0">
-                <a:solidFill>
-                  <a:srgbClr val="000000"/>
-                </a:solidFill>
-                <a:latin typeface="Calibri"/>
-              </a:rPr>
-              <a:t>An unlabelled detector observes only p(x), and so cannot distinguish the two cases.</a:t>
+              <a:rPr sz="2800" b="0" i="0">
+                <a:solidFill>
+                  <a:srgbClr val="000000"/>
+                </a:solidFill>
+                <a:latin typeface="Calibri"/>
+              </a:rPr>
+              <a:t>Most recent work addresses the first.</a:t>
             </a:r>
           </a:p>
         </p:txBody>
@@ -12132,8 +10194,8 @@
         </p:nvSpPr>
         <p:spPr>
           <a:xfrm>
-            <a:off x="640080" y="365760"/>
-            <a:ext cx="10911535" cy="731520"/>
+            <a:off x="640080" y="320040"/>
+            <a:ext cx="10911535" cy="914400"/>
           </a:xfrm>
           <a:prstGeom prst="rect">
             <a:avLst/>
@@ -12147,62 +10209,28 @@
           <a:lstStyle/>
           <a:p>
             <a:r>
-              <a:rPr sz="3200" b="1" i="0">
+              <a:rPr sz="4400" b="1" i="0">
                 <a:solidFill>
                   <a:srgbClr val="000000"/>
                 </a:solidFill>
                 <a:latin typeface="Calibri"/>
               </a:rPr>
               <a:t>Three referents of “context drift”</a:t>
-            </a:r>
-          </a:p>
-        </p:txBody>
-      </p:sp>
-      <p:sp>
-        <p:nvSpPr>
-          <p:cNvPr id="3" name="TextBox 2"/>
-          <p:cNvSpPr txBox="1"/>
-          <p:nvPr/>
-        </p:nvSpPr>
-        <p:spPr>
-          <a:xfrm>
-            <a:off x="640080" y="1097280"/>
-            <a:ext cx="10911535" cy="411480"/>
-          </a:xfrm>
-          <a:prstGeom prst="rect">
-            <a:avLst/>
-          </a:prstGeom>
-          <a:noFill/>
-        </p:spPr>
-        <p:txBody>
-          <a:bodyPr wrap="square" lIns="0" tIns="0" bIns="0">
-            <a:spAutoFit/>
-          </a:bodyPr>
-          <a:lstStyle/>
-          <a:p>
-            <a:r>
-              <a:rPr sz="1700" b="0" i="0">
-                <a:solidFill>
-                  <a:srgbClr val="000000"/>
-                </a:solidFill>
-                <a:latin typeface="Calibri"/>
-              </a:rPr>
-              <a:t>the term is used for distinct phenomena with opposed remedies</a:t>
             </a:r>
           </a:p>
         </p:txBody>
       </p:sp>
       <p:graphicFrame>
         <p:nvGraphicFramePr>
-          <p:cNvPr id="4" name="Table 3"/>
+          <p:cNvPr id="3" name="Table 2"/>
           <p:cNvGraphicFramePr>
             <a:graphicFrameLocks noGrp="1"/>
           </p:cNvGraphicFramePr>
           <p:nvPr/>
         </p:nvGraphicFramePr>
         <p:xfrm>
-          <a:off x="640080" y="1691640"/>
-          <a:ext cx="10911533" cy="2286000"/>
+          <a:off x="640080" y="1737360"/>
+          <a:ext cx="10911534" cy="2286000"/>
         </p:xfrm>
         <a:graphic>
           <a:graphicData uri="http://schemas.openxmlformats.org/drawingml/2006/table">
@@ -12211,9 +10239,9 @@
                 <a:tableStyleId>{5C22544A-7EE6-4342-B048-85BDC9FD1C3A}</a:tableStyleId>
               </a:tblPr>
               <a:tblGrid>
-                <a:gridCol w="2589177"/>
-                <a:gridCol w="5178355"/>
-                <a:gridCol w="3144001"/>
+                <a:gridCol w="3062887"/>
+                <a:gridCol w="4594330"/>
+                <a:gridCol w="3254317"/>
               </a:tblGrid>
               <a:tr h="571500">
                 <a:tc>
@@ -12223,7 +10251,7 @@
                     <a:p>
                       <a:pPr algn="l"/>
                       <a:r>
-                        <a:rPr sz="1700" b="1" i="0">
+                        <a:rPr sz="2300" b="1" i="0">
                           <a:solidFill>
                             <a:srgbClr val="000000"/>
                           </a:solidFill>
@@ -12246,7 +10274,7 @@
                     <a:p>
                       <a:pPr algn="l"/>
                       <a:r>
-                        <a:rPr sz="1700" b="1" i="0">
+                        <a:rPr sz="2300" b="1" i="0">
                           <a:solidFill>
                             <a:srgbClr val="000000"/>
                           </a:solidFill>
@@ -12269,13 +10297,13 @@
                     <a:p>
                       <a:pPr algn="l"/>
                       <a:r>
-                        <a:rPr sz="1700" b="1" i="0">
-                          <a:solidFill>
-                            <a:srgbClr val="000000"/>
-                          </a:solidFill>
-                          <a:latin typeface="Calibri"/>
-                        </a:rPr>
-                        <a:t>implied response</a:t>
+                        <a:rPr sz="2300" b="1" i="0">
+                          <a:solidFill>
+                            <a:srgbClr val="000000"/>
+                          </a:solidFill>
+                          <a:latin typeface="Calibri"/>
+                        </a:rPr>
+                        <a:t>response</a:t>
                       </a:r>
                     </a:p>
                   </a:txBody>
@@ -12294,7 +10322,7 @@
                     <a:p>
                       <a:pPr algn="l"/>
                       <a:r>
-                        <a:rPr sz="1700" b="0" i="0">
+                        <a:rPr sz="2300" b="0" i="0">
                           <a:solidFill>
                             <a:srgbClr val="000000"/>
                           </a:solidFill>
@@ -12317,7 +10345,7 @@
                     <a:p>
                       <a:pPr algn="l"/>
                       <a:r>
-                        <a:rPr sz="1700" b="0" i="0">
+                        <a:rPr sz="2300" b="0" i="0">
                           <a:solidFill>
                             <a:srgbClr val="000000"/>
                           </a:solidFill>
@@ -12340,13 +10368,13 @@
                     <a:p>
                       <a:pPr algn="l"/>
                       <a:r>
-                        <a:rPr sz="1700" b="0" i="0">
-                          <a:solidFill>
-                            <a:srgbClr val="000000"/>
-                          </a:solidFill>
-                          <a:latin typeface="Calibri"/>
-                        </a:rPr>
-                        <a:t>track or reset the model</a:t>
+                        <a:rPr sz="2300" b="0" i="0">
+                          <a:solidFill>
+                            <a:srgbClr val="000000"/>
+                          </a:solidFill>
+                          <a:latin typeface="Calibri"/>
+                        </a:rPr>
+                        <a:t>track the model</a:t>
                       </a:r>
                     </a:p>
                   </a:txBody>
@@ -12365,7 +10393,7 @@
                     <a:p>
                       <a:pPr algn="l"/>
                       <a:r>
-                        <a:rPr sz="1700" b="0" i="0">
+                        <a:rPr sz="2300" b="0" i="0">
                           <a:solidFill>
                             <a:srgbClr val="000000"/>
                           </a:solidFill>
@@ -12388,30 +10416,30 @@
                     <a:p>
                       <a:pPr algn="l"/>
                       <a:r>
-                        <a:rPr sz="1700" b="0" i="0">
-                          <a:solidFill>
-                            <a:srgbClr val="000000"/>
-                          </a:solidFill>
-                          <a:latin typeface="Calibri"/>
-                        </a:rPr>
-                        <a:t>p(y | x, c) fixed; c omitted from the model</a:t>
-                      </a:r>
-                    </a:p>
-                  </a:txBody>
-                  <a:tcPr marL="73152" marR="73152" marT="27432" marB="27432">
-                    <a:solidFill>
-                      <a:srgbClr val="FFFFFF"/>
-                    </a:solidFill>
-                  </a:tcPr>
-                </a:tc>
-                <a:tc>
-                  <a:txBody>
-                    <a:bodyPr/>
-                    <a:lstStyle/>
-                    <a:p>
-                      <a:pPr algn="l"/>
-                      <a:r>
-                        <a:rPr sz="1700" b="0" i="0">
+                        <a:rPr sz="2300" b="0" i="0">
+                          <a:solidFill>
+                            <a:srgbClr val="000000"/>
+                          </a:solidFill>
+                          <a:latin typeface="Calibri"/>
+                        </a:rPr>
+                        <a:t>p(y | x, c) fixed; c omitted</a:t>
+                      </a:r>
+                    </a:p>
+                  </a:txBody>
+                  <a:tcPr marL="73152" marR="73152" marT="27432" marB="27432">
+                    <a:solidFill>
+                      <a:srgbClr val="FFFFFF"/>
+                    </a:solidFill>
+                  </a:tcPr>
+                </a:tc>
+                <a:tc>
+                  <a:txBody>
+                    <a:bodyPr/>
+                    <a:lstStyle/>
+                    <a:p>
+                      <a:pPr algn="l"/>
+                      <a:r>
+                        <a:rPr sz="2300" b="0" i="0">
                           <a:solidFill>
                             <a:srgbClr val="000000"/>
                           </a:solidFill>
@@ -12436,53 +10464,53 @@
                     <a:p>
                       <a:pPr algn="l"/>
                       <a:r>
-                        <a:rPr sz="1700" b="0" i="0">
-                          <a:solidFill>
-                            <a:srgbClr val="000000"/>
-                          </a:solidFill>
-                          <a:latin typeface="Calibri"/>
-                        </a:rPr>
-                        <a:t>Context-window drift</a:t>
-                      </a:r>
-                    </a:p>
-                  </a:txBody>
-                  <a:tcPr marL="73152" marR="73152" marT="27432" marB="27432">
-                    <a:solidFill>
-                      <a:srgbClr val="FFFFFF"/>
-                    </a:solidFill>
-                  </a:tcPr>
-                </a:tc>
-                <a:tc>
-                  <a:txBody>
-                    <a:bodyPr/>
-                    <a:lstStyle/>
-                    <a:p>
-                      <a:pPr algn="l"/>
-                      <a:r>
-                        <a:rPr sz="1700" b="0" i="0">
-                          <a:solidFill>
-                            <a:srgbClr val="000000"/>
-                          </a:solidFill>
-                          <a:latin typeface="Calibri"/>
-                        </a:rPr>
-                        <a:t>the inference window leaves the pretraining law</a:t>
-                      </a:r>
-                    </a:p>
-                  </a:txBody>
-                  <a:tcPr marL="73152" marR="73152" marT="27432" marB="27432">
-                    <a:solidFill>
-                      <a:srgbClr val="FFFFFF"/>
-                    </a:solidFill>
-                  </a:tcPr>
-                </a:tc>
-                <a:tc>
-                  <a:txBody>
-                    <a:bodyPr/>
-                    <a:lstStyle/>
-                    <a:p>
-                      <a:pPr algn="l"/>
-                      <a:r>
-                        <a:rPr sz="1700" b="0" i="0">
+                        <a:rPr sz="2300" b="0" i="0">
+                          <a:solidFill>
+                            <a:srgbClr val="000000"/>
+                          </a:solidFill>
+                          <a:latin typeface="Calibri"/>
+                        </a:rPr>
+                        <a:t>Context-window</a:t>
+                      </a:r>
+                    </a:p>
+                  </a:txBody>
+                  <a:tcPr marL="73152" marR="73152" marT="27432" marB="27432">
+                    <a:solidFill>
+                      <a:srgbClr val="FFFFFF"/>
+                    </a:solidFill>
+                  </a:tcPr>
+                </a:tc>
+                <a:tc>
+                  <a:txBody>
+                    <a:bodyPr/>
+                    <a:lstStyle/>
+                    <a:p>
+                      <a:pPr algn="l"/>
+                      <a:r>
+                        <a:rPr sz="2300" b="0" i="0">
+                          <a:solidFill>
+                            <a:srgbClr val="000000"/>
+                          </a:solidFill>
+                          <a:latin typeface="Calibri"/>
+                        </a:rPr>
+                        <a:t>leaves the pretraining law</a:t>
+                      </a:r>
+                    </a:p>
+                  </a:txBody>
+                  <a:tcPr marL="73152" marR="73152" marT="27432" marB="27432">
+                    <a:solidFill>
+                      <a:srgbClr val="FFFFFF"/>
+                    </a:solidFill>
+                  </a:tcPr>
+                </a:tc>
+                <a:tc>
+                  <a:txBody>
+                    <a:bodyPr/>
+                    <a:lstStyle/>
+                    <a:p>
+                      <a:pPr algn="l"/>
+                      <a:r>
+                        <a:rPr sz="2300" b="0" i="0">
                           <a:solidFill>
                             <a:srgbClr val="000000"/>
                           </a:solidFill>
@@ -12505,14 +10533,14 @@
       </p:graphicFrame>
       <p:sp>
         <p:nvSpPr>
-          <p:cNvPr id="5" name="TextBox 4"/>
+          <p:cNvPr id="4" name="TextBox 3"/>
           <p:cNvSpPr txBox="1"/>
           <p:nvPr/>
         </p:nvSpPr>
         <p:spPr>
           <a:xfrm>
-            <a:off x="640080" y="4206240"/>
-            <a:ext cx="10911535" cy="2194560"/>
+            <a:off x="640080" y="4343400"/>
+            <a:ext cx="10911535" cy="2057400"/>
           </a:xfrm>
           <a:prstGeom prst="rect">
             <a:avLst/>
@@ -12527,95 +10555,47 @@
           <a:p>
             <a:pPr>
               <a:spcAft>
-                <a:spcPts val="600"/>
+                <a:spcPts val="800"/>
               </a:spcAft>
             </a:pPr>
             <a:r>
-              <a:rPr sz="1700" b="1" i="0">
-                <a:solidFill>
-                  <a:srgbClr val="000000"/>
-                </a:solidFill>
-                <a:latin typeface="Calibri"/>
-              </a:rPr>
-              <a:t>The first two present the same symptom — error correlated with time — and require</a:t>
+              <a:rPr sz="2600" b="1" i="0">
+                <a:solidFill>
+                  <a:srgbClr val="000000"/>
+                </a:solidFill>
+                <a:latin typeface="Calibri"/>
+              </a:rPr>
+              <a:t>The first two share a symptom and need opposite fixes.</a:t>
             </a:r>
           </a:p>
           <a:p>
             <a:pPr>
               <a:spcAft>
-                <a:spcPts val="600"/>
+                <a:spcPts val="800"/>
               </a:spcAft>
             </a:pPr>
             <a:r>
-              <a:rPr sz="1700" b="1" i="0">
-                <a:solidFill>
-                  <a:srgbClr val="000000"/>
-                </a:solidFill>
-                <a:latin typeface="Calibri"/>
-              </a:rPr>
-              <a:t>opposite responses. Where a periodic context accounts for the change, adaptation is</a:t>
-            </a:r>
-          </a:p>
-          <a:p>
-            <a:pPr>
-              <a:spcAft>
-                <a:spcPts val="600"/>
-              </a:spcAft>
-            </a:pPr>
-            <a:r>
-              <a:rPr sz="1700" b="1" i="0">
-                <a:solidFill>
-                  <a:srgbClr val="000000"/>
-                </a:solidFill>
-                <a:latin typeface="Calibri"/>
-              </a:rPr>
-              <a:t>wasted and will be reversed on the following cycle.</a:t>
-            </a:r>
-          </a:p>
-          <a:p>
-            <a:pPr>
-              <a:spcAft>
-                <a:spcPts val="600"/>
-              </a:spcAft>
-            </a:pPr>
-            <a:r>
-              <a:rPr sz="1700" b="0" i="0">
-                <a:solidFill>
-                  <a:srgbClr val="000000"/>
-                </a:solidFill>
-                <a:latin typeface="Calibri"/>
-              </a:rPr>
-              <a:t>SOLID (KDD'24) scores the second directly, by mutual information between prediction</a:t>
-            </a:r>
-          </a:p>
-          <a:p>
-            <a:pPr>
-              <a:spcAft>
-                <a:spcPts val="600"/>
-              </a:spcAft>
-            </a:pPr>
-            <a:r>
-              <a:rPr sz="1700" b="0" i="0">
-                <a:solidFill>
-                  <a:srgbClr val="000000"/>
-                </a:solidFill>
-                <a:latin typeface="Calibri"/>
-              </a:rPr>
-              <a:t>residuals and the candidate context:</a:t>
-            </a:r>
-          </a:p>
-        </p:txBody>
-      </p:sp>
-      <p:sp>
-        <p:nvSpPr>
-          <p:cNvPr id="6" name="TextBox 5"/>
+              <a:rPr sz="2600" b="0" i="0">
+                <a:solidFill>
+                  <a:srgbClr val="000000"/>
+                </a:solidFill>
+                <a:latin typeface="Calibri"/>
+              </a:rPr>
+              <a:t>SOLID scores the second by</a:t>
+            </a:r>
+          </a:p>
+        </p:txBody>
+      </p:sp>
+      <p:sp>
+        <p:nvSpPr>
+          <p:cNvPr id="5" name="TextBox 4"/>
           <p:cNvSpPr txBox="1"/>
           <p:nvPr/>
         </p:nvSpPr>
         <p:spPr>
           <a:xfrm>
-            <a:off x="640080" y="5806440"/>
-            <a:ext cx="10911535" cy="566928"/>
+            <a:off x="640080" y="5669280"/>
+            <a:ext cx="10911535" cy="731520"/>
           </a:xfrm>
           <a:prstGeom prst="rect">
             <a:avLst/>
@@ -12629,7 +10609,7 @@
           <a:lstStyle/>
           <a:p>
             <a:r>
-              <a:rPr sz="2600" b="0" i="1">
+              <a:rPr sz="3200" b="0" i="1">
                 <a:solidFill>
                   <a:srgbClr val="000000"/>
                 </a:solidFill>
@@ -12638,7 +10618,7 @@
               <a:t>I(E</a:t>
             </a:r>
             <a:r>
-              <a:rPr sz="1872" b="0" i="1" baseline="-25000">
+              <a:rPr sz="2304" b="0" i="1" baseline="-25000">
                 <a:solidFill>
                   <a:srgbClr val="000000"/>
                 </a:solidFill>
@@ -12647,7 +10627,7 @@
               <a:t>t</a:t>
             </a:r>
             <a:r>
-              <a:rPr sz="2600" b="0" i="1">
+              <a:rPr sz="3200" b="0" i="1">
                 <a:solidFill>
                   <a:srgbClr val="000000"/>
                 </a:solidFill>
@@ -12656,7 +10636,7 @@
               <a:t> ; c</a:t>
             </a:r>
             <a:r>
-              <a:rPr sz="1872" b="0" i="1" baseline="-25000">
+              <a:rPr sz="2304" b="0" i="1" baseline="-25000">
                 <a:solidFill>
                   <a:srgbClr val="000000"/>
                 </a:solidFill>
@@ -12665,7 +10645,7 @@
               <a:t>t</a:t>
             </a:r>
             <a:r>
-              <a:rPr sz="2600" b="0" i="1">
+              <a:rPr sz="3200" b="0" i="1">
                 <a:solidFill>
                   <a:srgbClr val="000000"/>
                 </a:solidFill>
@@ -12718,7 +10698,7 @@
           <a:p>
             <a:pPr algn="l"/>
             <a:r>
-              <a:rPr sz="3600" b="1" i="0">
+              <a:rPr sz="4400" b="1" i="0">
                 <a:solidFill>
                   <a:srgbClr val="000000"/>
                 </a:solidFill>
@@ -12737,8 +10717,8 @@
         </p:nvSpPr>
         <p:spPr>
           <a:xfrm>
-            <a:off x="640080" y="3566160"/>
-            <a:ext cx="10911535" cy="2834640"/>
+            <a:off x="640080" y="3657600"/>
+            <a:ext cx="10911535" cy="2743200"/>
           </a:xfrm>
           <a:prstGeom prst="rect">
             <a:avLst/>
@@ -12753,17 +10733,17 @@
           <a:p>
             <a:pPr>
               <a:spcAft>
-                <a:spcPts val="1000"/>
+                <a:spcPts val="1400"/>
               </a:spcAft>
             </a:pPr>
             <a:r>
-              <a:rPr sz="1800" b="0" i="0">
-                <a:solidFill>
-                  <a:srgbClr val="000000"/>
-                </a:solidFill>
-                <a:latin typeface="Calibri"/>
-              </a:rPr>
-              <a:t>Detecting that drift occurred, and adapting the model once it has.</a:t>
+              <a:rPr sz="2400" b="0" i="0">
+                <a:solidFill>
+                  <a:srgbClr val="000000"/>
+                </a:solidFill>
+                <a:latin typeface="Calibri"/>
+              </a:rPr>
+              <a:t>Detecting drift, and adapting once it has occurred.</a:t>
             </a:r>
           </a:p>
         </p:txBody>
@@ -12794,8 +10774,8 @@
         </p:nvSpPr>
         <p:spPr>
           <a:xfrm>
-            <a:off x="640080" y="365760"/>
-            <a:ext cx="10911535" cy="731520"/>
+            <a:off x="640080" y="320040"/>
+            <a:ext cx="10911535" cy="914400"/>
           </a:xfrm>
           <a:prstGeom prst="rect">
             <a:avLst/>
@@ -12809,7 +10789,7 @@
           <a:lstStyle/>
           <a:p>
             <a:r>
-              <a:rPr sz="3200" b="1" i="0">
+              <a:rPr sz="4400" b="1" i="0">
                 <a:solidFill>
                   <a:srgbClr val="000000"/>
                 </a:solidFill>
@@ -12828,8 +10808,8 @@
         </p:nvSpPr>
         <p:spPr>
           <a:xfrm>
-            <a:off x="640080" y="1097280"/>
-            <a:ext cx="10911535" cy="411480"/>
+            <a:off x="640080" y="1298448"/>
+            <a:ext cx="10911535" cy="457200"/>
           </a:xfrm>
           <a:prstGeom prst="rect">
             <a:avLst/>
@@ -12843,13 +10823,13 @@
           <a:lstStyle/>
           <a:p>
             <a:r>
-              <a:rPr sz="1700" b="0" i="0">
-                <a:solidFill>
-                  <a:srgbClr val="000000"/>
-                </a:solidFill>
-                <a:latin typeface="Calibri"/>
-              </a:rPr>
-              <a:t>detectors observe the error sequence, not the data</a:t>
+              <a:rPr sz="2200" b="0" i="0">
+                <a:solidFill>
+                  <a:srgbClr val="000000"/>
+                </a:solidFill>
+                <a:latin typeface="Calibri"/>
+              </a:rPr>
+              <a:t>detectors observe the error sequence</a:t>
             </a:r>
           </a:p>
         </p:txBody>
@@ -12863,8 +10843,8 @@
           <p:nvPr/>
         </p:nvGraphicFramePr>
         <p:xfrm>
-          <a:off x="640080" y="1691640"/>
-          <a:ext cx="10911534" cy="2286000"/>
+          <a:off x="640080" y="2057400"/>
+          <a:ext cx="10911533" cy="2560320"/>
         </p:xfrm>
         <a:graphic>
           <a:graphicData uri="http://schemas.openxmlformats.org/drawingml/2006/table">
@@ -12873,19 +10853,19 @@
                 <a:tableStyleId>{5C22544A-7EE6-4342-B048-85BDC9FD1C3A}</a:tableStyleId>
               </a:tblPr>
               <a:tblGrid>
-                <a:gridCol w="1914304"/>
-                <a:gridCol w="5360052"/>
-                <a:gridCol w="3637178"/>
+                <a:gridCol w="1983915"/>
+                <a:gridCol w="5356571"/>
+                <a:gridCol w="3571047"/>
               </a:tblGrid>
-              <a:tr h="571500">
-                <a:tc>
-                  <a:txBody>
-                    <a:bodyPr/>
-                    <a:lstStyle/>
-                    <a:p>
-                      <a:pPr algn="l"/>
-                      <a:r>
-                        <a:rPr sz="1700" b="1" i="0">
+              <a:tr h="640080">
+                <a:tc>
+                  <a:txBody>
+                    <a:bodyPr/>
+                    <a:lstStyle/>
+                    <a:p>
+                      <a:pPr algn="l"/>
+                      <a:r>
+                        <a:rPr sz="2300" b="1" i="0">
                           <a:solidFill>
                             <a:srgbClr val="000000"/>
                           </a:solidFill>
@@ -12908,7 +10888,7 @@
                     <a:p>
                       <a:pPr algn="l"/>
                       <a:r>
-                        <a:rPr sz="1700" b="1" i="0">
+                        <a:rPr sz="2300" b="1" i="0">
                           <a:solidFill>
                             <a:srgbClr val="000000"/>
                           </a:solidFill>
@@ -12931,7 +10911,7 @@
                     <a:p>
                       <a:pPr algn="l"/>
                       <a:r>
-                        <a:rPr sz="1700" b="1" i="0">
+                        <a:rPr sz="2300" b="1" i="0">
                           <a:solidFill>
                             <a:srgbClr val="000000"/>
                           </a:solidFill>
@@ -12948,67 +10928,67 @@
                   </a:tcPr>
                 </a:tc>
               </a:tr>
-              <a:tr h="571500">
-                <a:tc>
-                  <a:txBody>
-                    <a:bodyPr/>
-                    <a:lstStyle/>
-                    <a:p>
-                      <a:pPr algn="l"/>
-                      <a:r>
-                        <a:rPr sz="1700" b="0" i="0">
-                          <a:solidFill>
-                            <a:srgbClr val="000000"/>
-                          </a:solidFill>
-                          <a:latin typeface="Calibri"/>
-                        </a:rPr>
-                        <a:t>DDM (2004)</a:t>
-                      </a:r>
-                    </a:p>
-                  </a:txBody>
-                  <a:tcPr marL="73152" marR="73152" marT="27432" marB="27432">
-                    <a:solidFill>
-                      <a:srgbClr val="FFFFFF"/>
-                    </a:solidFill>
-                  </a:tcPr>
-                </a:tc>
-                <a:tc>
-                  <a:txBody>
-                    <a:bodyPr/>
-                    <a:lstStyle/>
-                    <a:p>
-                      <a:pPr algn="l"/>
-                      <a:r>
-                        <a:rPr sz="1700" b="0" i="0">
-                          <a:solidFill>
-                            <a:srgbClr val="000000"/>
-                          </a:solidFill>
-                          <a:latin typeface="Calibri"/>
-                        </a:rPr>
-                        <a:t>error rate exceeds a running minimum by kσ</a:t>
-                      </a:r>
-                    </a:p>
-                  </a:txBody>
-                  <a:tcPr marL="73152" marR="73152" marT="27432" marB="27432">
-                    <a:solidFill>
-                      <a:srgbClr val="FFFFFF"/>
-                    </a:solidFill>
-                  </a:tcPr>
-                </a:tc>
-                <a:tc>
-                  <a:txBody>
-                    <a:bodyPr/>
-                    <a:lstStyle/>
-                    <a:p>
-                      <a:pPr algn="l"/>
-                      <a:r>
-                        <a:rPr sz="1700" b="0" i="0">
-                          <a:solidFill>
-                            <a:srgbClr val="000000"/>
-                          </a:solidFill>
-                          <a:latin typeface="Calibri"/>
-                        </a:rPr>
-                        <a:t>heuristic thresholds</a:t>
+              <a:tr h="640080">
+                <a:tc>
+                  <a:txBody>
+                    <a:bodyPr/>
+                    <a:lstStyle/>
+                    <a:p>
+                      <a:pPr algn="l"/>
+                      <a:r>
+                        <a:rPr sz="2300" b="0" i="0">
+                          <a:solidFill>
+                            <a:srgbClr val="000000"/>
+                          </a:solidFill>
+                          <a:latin typeface="Calibri"/>
+                        </a:rPr>
+                        <a:t>DDM</a:t>
+                      </a:r>
+                    </a:p>
+                  </a:txBody>
+                  <a:tcPr marL="73152" marR="73152" marT="27432" marB="27432">
+                    <a:solidFill>
+                      <a:srgbClr val="FFFFFF"/>
+                    </a:solidFill>
+                  </a:tcPr>
+                </a:tc>
+                <a:tc>
+                  <a:txBody>
+                    <a:bodyPr/>
+                    <a:lstStyle/>
+                    <a:p>
+                      <a:pPr algn="l"/>
+                      <a:r>
+                        <a:rPr sz="2300" b="0" i="0">
+                          <a:solidFill>
+                            <a:srgbClr val="000000"/>
+                          </a:solidFill>
+                          <a:latin typeface="Calibri"/>
+                        </a:rPr>
+                        <a:t>error exceeds a running minimum</a:t>
+                      </a:r>
+                    </a:p>
+                  </a:txBody>
+                  <a:tcPr marL="73152" marR="73152" marT="27432" marB="27432">
+                    <a:solidFill>
+                      <a:srgbClr val="FFFFFF"/>
+                    </a:solidFill>
+                  </a:tcPr>
+                </a:tc>
+                <a:tc>
+                  <a:txBody>
+                    <a:bodyPr/>
+                    <a:lstStyle/>
+                    <a:p>
+                      <a:pPr algn="l"/>
+                      <a:r>
+                        <a:rPr sz="2300" b="0" i="0">
+                          <a:solidFill>
+                            <a:srgbClr val="000000"/>
+                          </a:solidFill>
+                          <a:latin typeface="Calibri"/>
+                        </a:rPr>
+                        <a:t>heuristic</a:t>
                       </a:r>
                     </a:p>
                   </a:txBody>
@@ -13019,67 +10999,67 @@
                   </a:tcPr>
                 </a:tc>
               </a:tr>
-              <a:tr h="571500">
-                <a:tc>
-                  <a:txBody>
-                    <a:bodyPr/>
-                    <a:lstStyle/>
-                    <a:p>
-                      <a:pPr algn="l"/>
-                      <a:r>
-                        <a:rPr sz="1700" b="0" i="0">
-                          <a:solidFill>
-                            <a:srgbClr val="000000"/>
-                          </a:solidFill>
-                          <a:latin typeface="Calibri"/>
-                        </a:rPr>
-                        <a:t>EDDM (2006)</a:t>
-                      </a:r>
-                    </a:p>
-                  </a:txBody>
-                  <a:tcPr marL="73152" marR="73152" marT="27432" marB="27432">
-                    <a:solidFill>
-                      <a:srgbClr val="FFFFFF"/>
-                    </a:solidFill>
-                  </a:tcPr>
-                </a:tc>
-                <a:tc>
-                  <a:txBody>
-                    <a:bodyPr/>
-                    <a:lstStyle/>
-                    <a:p>
-                      <a:pPr algn="l"/>
-                      <a:r>
-                        <a:rPr sz="1700" b="0" i="0">
-                          <a:solidFill>
-                            <a:srgbClr val="000000"/>
-                          </a:solidFill>
-                          <a:latin typeface="Calibri"/>
-                        </a:rPr>
-                        <a:t>distance between consecutive errors contracts</a:t>
-                      </a:r>
-                    </a:p>
-                  </a:txBody>
-                  <a:tcPr marL="73152" marR="73152" marT="27432" marB="27432">
-                    <a:solidFill>
-                      <a:srgbClr val="FFFFFF"/>
-                    </a:solidFill>
-                  </a:tcPr>
-                </a:tc>
-                <a:tc>
-                  <a:txBody>
-                    <a:bodyPr/>
-                    <a:lstStyle/>
-                    <a:p>
-                      <a:pPr algn="l"/>
-                      <a:r>
-                        <a:rPr sz="1700" b="0" i="0">
-                          <a:solidFill>
-                            <a:srgbClr val="000000"/>
-                          </a:solidFill>
-                          <a:latin typeface="Calibri"/>
-                        </a:rPr>
-                        <a:t>improved on gradual drift</a:t>
+              <a:tr h="640080">
+                <a:tc>
+                  <a:txBody>
+                    <a:bodyPr/>
+                    <a:lstStyle/>
+                    <a:p>
+                      <a:pPr algn="l"/>
+                      <a:r>
+                        <a:rPr sz="2300" b="0" i="0">
+                          <a:solidFill>
+                            <a:srgbClr val="000000"/>
+                          </a:solidFill>
+                          <a:latin typeface="Calibri"/>
+                        </a:rPr>
+                        <a:t>EDDM</a:t>
+                      </a:r>
+                    </a:p>
+                  </a:txBody>
+                  <a:tcPr marL="73152" marR="73152" marT="27432" marB="27432">
+                    <a:solidFill>
+                      <a:srgbClr val="FFFFFF"/>
+                    </a:solidFill>
+                  </a:tcPr>
+                </a:tc>
+                <a:tc>
+                  <a:txBody>
+                    <a:bodyPr/>
+                    <a:lstStyle/>
+                    <a:p>
+                      <a:pPr algn="l"/>
+                      <a:r>
+                        <a:rPr sz="2300" b="0" i="0">
+                          <a:solidFill>
+                            <a:srgbClr val="000000"/>
+                          </a:solidFill>
+                          <a:latin typeface="Calibri"/>
+                        </a:rPr>
+                        <a:t>distance between errors contracts</a:t>
+                      </a:r>
+                    </a:p>
+                  </a:txBody>
+                  <a:tcPr marL="73152" marR="73152" marT="27432" marB="27432">
+                    <a:solidFill>
+                      <a:srgbClr val="FFFFFF"/>
+                    </a:solidFill>
+                  </a:tcPr>
+                </a:tc>
+                <a:tc>
+                  <a:txBody>
+                    <a:bodyPr/>
+                    <a:lstStyle/>
+                    <a:p>
+                      <a:pPr algn="l"/>
+                      <a:r>
+                        <a:rPr sz="2300" b="0" i="0">
+                          <a:solidFill>
+                            <a:srgbClr val="000000"/>
+                          </a:solidFill>
+                          <a:latin typeface="Calibri"/>
+                        </a:rPr>
+                        <a:t>better on gradual</a:t>
                       </a:r>
                     </a:p>
                   </a:txBody>
@@ -13090,67 +11070,67 @@
                   </a:tcPr>
                 </a:tc>
               </a:tr>
-              <a:tr h="571500">
-                <a:tc>
-                  <a:txBody>
-                    <a:bodyPr/>
-                    <a:lstStyle/>
-                    <a:p>
-                      <a:pPr algn="l"/>
-                      <a:r>
-                        <a:rPr sz="1700" b="0" i="0">
-                          <a:solidFill>
-                            <a:srgbClr val="000000"/>
-                          </a:solidFill>
-                          <a:latin typeface="Calibri"/>
-                        </a:rPr>
-                        <a:t>ADWIN (2007)</a:t>
-                      </a:r>
-                    </a:p>
-                  </a:txBody>
-                  <a:tcPr marL="73152" marR="73152" marT="27432" marB="27432">
-                    <a:solidFill>
-                      <a:srgbClr val="FFFFFF"/>
-                    </a:solidFill>
-                  </a:tcPr>
-                </a:tc>
-                <a:tc>
-                  <a:txBody>
-                    <a:bodyPr/>
-                    <a:lstStyle/>
-                    <a:p>
-                      <a:pPr algn="l"/>
-                      <a:r>
-                        <a:rPr sz="1700" b="0" i="0">
-                          <a:solidFill>
-                            <a:srgbClr val="000000"/>
-                          </a:solidFill>
-                          <a:latin typeface="Calibri"/>
-                        </a:rPr>
-                        <a:t>window split; cut when the two halves differ</a:t>
-                      </a:r>
-                    </a:p>
-                  </a:txBody>
-                  <a:tcPr marL="73152" marR="73152" marT="27432" marB="27432">
-                    <a:solidFill>
-                      <a:srgbClr val="FFFFFF"/>
-                    </a:solidFill>
-                  </a:tcPr>
-                </a:tc>
-                <a:tc>
-                  <a:txBody>
-                    <a:bodyPr/>
-                    <a:lstStyle/>
-                    <a:p>
-                      <a:pPr algn="l"/>
-                      <a:r>
-                        <a:rPr sz="1700" b="0" i="0">
-                          <a:solidFill>
-                            <a:srgbClr val="000000"/>
-                          </a:solidFill>
-                          <a:latin typeface="Calibri"/>
-                        </a:rPr>
-                        <a:t>false positives bounded by δ</a:t>
+              <a:tr h="640080">
+                <a:tc>
+                  <a:txBody>
+                    <a:bodyPr/>
+                    <a:lstStyle/>
+                    <a:p>
+                      <a:pPr algn="l"/>
+                      <a:r>
+                        <a:rPr sz="2300" b="0" i="0">
+                          <a:solidFill>
+                            <a:srgbClr val="000000"/>
+                          </a:solidFill>
+                          <a:latin typeface="Calibri"/>
+                        </a:rPr>
+                        <a:t>ADWIN</a:t>
+                      </a:r>
+                    </a:p>
+                  </a:txBody>
+                  <a:tcPr marL="73152" marR="73152" marT="27432" marB="27432">
+                    <a:solidFill>
+                      <a:srgbClr val="FFFFFF"/>
+                    </a:solidFill>
+                  </a:tcPr>
+                </a:tc>
+                <a:tc>
+                  <a:txBody>
+                    <a:bodyPr/>
+                    <a:lstStyle/>
+                    <a:p>
+                      <a:pPr algn="l"/>
+                      <a:r>
+                        <a:rPr sz="2300" b="0" i="0">
+                          <a:solidFill>
+                            <a:srgbClr val="000000"/>
+                          </a:solidFill>
+                          <a:latin typeface="Calibri"/>
+                        </a:rPr>
+                        <a:t>split the window; cut if halves differ</a:t>
+                      </a:r>
+                    </a:p>
+                  </a:txBody>
+                  <a:tcPr marL="73152" marR="73152" marT="27432" marB="27432">
+                    <a:solidFill>
+                      <a:srgbClr val="FFFFFF"/>
+                    </a:solidFill>
+                  </a:tcPr>
+                </a:tc>
+                <a:tc>
+                  <a:txBody>
+                    <a:bodyPr/>
+                    <a:lstStyle/>
+                    <a:p>
+                      <a:pPr algn="l"/>
+                      <a:r>
+                        <a:rPr sz="2300" b="0" i="0">
+                          <a:solidFill>
+                            <a:srgbClr val="000000"/>
+                          </a:solidFill>
+                          <a:latin typeface="Calibri"/>
+                        </a:rPr>
+                        <a:t>false positives ≤ δ</a:t>
                       </a:r>
                     </a:p>
                   </a:txBody>
@@ -13173,8 +11153,8 @@
         </p:nvSpPr>
         <p:spPr>
           <a:xfrm>
-            <a:off x="640080" y="4251960"/>
-            <a:ext cx="10911535" cy="2148839"/>
+            <a:off x="640080" y="4892040"/>
+            <a:ext cx="10911535" cy="1508760"/>
           </a:xfrm>
           <a:prstGeom prst="rect">
             <a:avLst/>
@@ -13193,13 +11173,31 @@
               </a:spcAft>
             </a:pPr>
             <a:r>
-              <a:rPr sz="1700" b="0" i="0">
-                <a:solidFill>
-                  <a:srgbClr val="000000"/>
-                </a:solidFill>
-                <a:latin typeface="Calibri"/>
-              </a:rPr>
-              <a:t>ADWIN maintains an exponential histogram, giving O(log W) memory, and the surviving</a:t>
+              <a:rPr sz="2700" b="0" i="0">
+                <a:solidFill>
+                  <a:srgbClr val="000000"/>
+                </a:solidFill>
+                <a:latin typeface="Calibri"/>
+              </a:rPr>
+              <a:t>A detector asks whether the series E</a:t>
+            </a:r>
+            <a:r>
+              <a:rPr sz="1943" b="0" i="0" baseline="-25000">
+                <a:solidFill>
+                  <a:srgbClr val="000000"/>
+                </a:solidFill>
+                <a:latin typeface="Calibri"/>
+              </a:rPr>
+              <a:t>t</a:t>
+            </a:r>
+            <a:r>
+              <a:rPr sz="2700" b="0" i="0">
+                <a:solidFill>
+                  <a:srgbClr val="000000"/>
+                </a:solidFill>
+                <a:latin typeface="Calibri"/>
+              </a:rPr>
+              <a:t> has changed.</a:t>
             </a:r>
           </a:p>
           <a:p>
@@ -13209,63 +11207,13 @@
               </a:spcAft>
             </a:pPr>
             <a:r>
-              <a:rPr sz="1700" b="0" i="0">
-                <a:solidFill>
-                  <a:srgbClr val="000000"/>
-                </a:solidFill>
-                <a:latin typeface="Calibri"/>
-              </a:rPr>
-              <a:t>window length is itself an estimate of the current concept's extent.</a:t>
-            </a:r>
-          </a:p>
-          <a:p>
-            <a:pPr>
-              <a:spcAft>
-                <a:spcPts val="800"/>
-              </a:spcAft>
-            </a:pPr>
-            <a:r>
-              <a:rPr sz="1700" b="1" i="0">
-                <a:solidFill>
-                  <a:srgbClr val="000000"/>
-                </a:solidFill>
-                <a:latin typeface="Calibri"/>
-              </a:rPr>
-              <a:t>A detector reads E</a:t>
-            </a:r>
-            <a:r>
-              <a:rPr sz="1224" b="1" i="0" baseline="-25000">
-                <a:solidFill>
-                  <a:srgbClr val="000000"/>
-                </a:solidFill>
-                <a:latin typeface="Calibri"/>
-              </a:rPr>
-              <a:t>t</a:t>
-            </a:r>
-            <a:r>
-              <a:rPr sz="1700" b="1" i="0">
-                <a:solidFill>
-                  <a:srgbClr val="000000"/>
-                </a:solidFill>
-                <a:latin typeface="Calibri"/>
-              </a:rPr>
-              <a:t> over time and decides whether that sequence has changed.</a:t>
-            </a:r>
-          </a:p>
-          <a:p>
-            <a:pPr>
-              <a:spcAft>
-                <a:spcPts val="800"/>
-              </a:spcAft>
-            </a:pPr>
-            <a:r>
-              <a:rPr sz="1700" b="1" i="0">
-                <a:solidFill>
-                  <a:srgbClr val="000000"/>
-                </a:solidFill>
-                <a:latin typeface="Calibri"/>
-              </a:rPr>
-              <a:t>Every drift detector is therefore already a time-series method.</a:t>
+              <a:rPr sz="2700" b="1" i="0">
+                <a:solidFill>
+                  <a:srgbClr val="000000"/>
+                </a:solidFill>
+                <a:latin typeface="Calibri"/>
+              </a:rPr>
+              <a:t>Every detector is already a time-series method.</a:t>
             </a:r>
           </a:p>
         </p:txBody>

--- a/data-drift/seminar.pptx
+++ b/data-drift/seminar.pptx
@@ -648,6 +648,2246 @@
     <c:autoUpdate val="0"/>
   </c:externalData>
 </c:chartSpace>
+</file>
+
+<file path=ppt/notesMasters/notesMaster1.xml><?xml version="1.0" encoding="utf-8"?>
+<p:notesMaster xmlns:a="http://schemas.openxmlformats.org/drawingml/2006/main" xmlns:p="http://schemas.openxmlformats.org/presentationml/2006/main" xmlns:r="http://schemas.openxmlformats.org/officeDocument/2006/relationships">
+  <p:cSld>
+    <p:bg>
+      <p:bgRef idx="1001">
+        <a:schemeClr val="bg1"/>
+      </p:bgRef>
+    </p:bg>
+    <p:spTree>
+      <p:nvGrpSpPr>
+        <p:cNvPr id="1" name=""/>
+        <p:cNvGrpSpPr/>
+        <p:nvPr/>
+      </p:nvGrpSpPr>
+      <p:grpSpPr>
+        <a:xfrm>
+          <a:off x="0" y="0"/>
+          <a:ext cx="0" cy="0"/>
+          <a:chOff x="0" y="0"/>
+          <a:chExt cx="0" cy="0"/>
+        </a:xfrm>
+      </p:grpSpPr>
+      <p:sp>
+        <p:nvSpPr>
+          <p:cNvPr id="2" name="Header Placeholder 1"/>
+          <p:cNvSpPr>
+            <a:spLocks noGrp="1"/>
+          </p:cNvSpPr>
+          <p:nvPr>
+            <p:ph type="hdr" sz="quarter"/>
+          </p:nvPr>
+        </p:nvSpPr>
+        <p:spPr>
+          <a:xfrm>
+            <a:off x="0" y="0"/>
+            <a:ext cx="2971800" cy="457200"/>
+          </a:xfrm>
+          <a:prstGeom prst="rect">
+            <a:avLst/>
+          </a:prstGeom>
+        </p:spPr>
+        <p:txBody>
+          <a:bodyPr vert="horz" lIns="91440" tIns="45720" rIns="91440" bIns="45720" rtlCol="0"/>
+          <a:lstStyle>
+            <a:lvl1pPr algn="l">
+              <a:defRPr sz="1200"/>
+            </a:lvl1pPr>
+          </a:lstStyle>
+          <a:p>
+            <a:endParaRPr lang="en-US"/>
+          </a:p>
+        </p:txBody>
+      </p:sp>
+      <p:sp>
+        <p:nvSpPr>
+          <p:cNvPr id="3" name="Date Placeholder 2"/>
+          <p:cNvSpPr>
+            <a:spLocks noGrp="1"/>
+          </p:cNvSpPr>
+          <p:nvPr>
+            <p:ph type="dt" idx="1"/>
+          </p:nvPr>
+        </p:nvSpPr>
+        <p:spPr>
+          <a:xfrm>
+            <a:off x="3884613" y="0"/>
+            <a:ext cx="2971800" cy="457200"/>
+          </a:xfrm>
+          <a:prstGeom prst="rect">
+            <a:avLst/>
+          </a:prstGeom>
+        </p:spPr>
+        <p:txBody>
+          <a:bodyPr vert="horz" lIns="91440" tIns="45720" rIns="91440" bIns="45720" rtlCol="0"/>
+          <a:lstStyle>
+            <a:lvl1pPr algn="r">
+              <a:defRPr sz="1200"/>
+            </a:lvl1pPr>
+          </a:lstStyle>
+          <a:p>
+            <a:fld id="{0F89C1C7-3DCD-1040-A9CF-14679D8B5DDD}" type="datetimeFigureOut">
+              <a:rPr lang="en-US" smtClean="0"/>
+              <a:t>10/17/16</a:t>
+            </a:fld>
+            <a:endParaRPr lang="en-US"/>
+          </a:p>
+        </p:txBody>
+      </p:sp>
+      <p:sp>
+        <p:nvSpPr>
+          <p:cNvPr id="4" name="Slide Image Placeholder 3"/>
+          <p:cNvSpPr>
+            <a:spLocks noGrp="1" noRot="1" noChangeAspect="1"/>
+          </p:cNvSpPr>
+          <p:nvPr>
+            <p:ph type="sldImg" idx="2"/>
+          </p:nvPr>
+        </p:nvSpPr>
+        <p:spPr>
+          <a:xfrm>
+            <a:off x="1143000" y="685800"/>
+            <a:ext cx="4572000" cy="3429000"/>
+          </a:xfrm>
+          <a:prstGeom prst="rect">
+            <a:avLst/>
+          </a:prstGeom>
+          <a:noFill/>
+          <a:ln w="12700">
+            <a:solidFill>
+              <a:prstClr val="black"/>
+            </a:solidFill>
+          </a:ln>
+        </p:spPr>
+        <p:txBody>
+          <a:bodyPr vert="horz" lIns="91440" tIns="45720" rIns="91440" bIns="45720" rtlCol="0" anchor="ctr"/>
+          <a:lstStyle/>
+          <a:p>
+            <a:endParaRPr lang="en-US"/>
+          </a:p>
+        </p:txBody>
+      </p:sp>
+      <p:sp>
+        <p:nvSpPr>
+          <p:cNvPr id="5" name="Notes Placeholder 4"/>
+          <p:cNvSpPr>
+            <a:spLocks noGrp="1"/>
+          </p:cNvSpPr>
+          <p:nvPr>
+            <p:ph type="body" sz="quarter" idx="3"/>
+          </p:nvPr>
+        </p:nvSpPr>
+        <p:spPr>
+          <a:xfrm>
+            <a:off x="685800" y="4343400"/>
+            <a:ext cx="5486400" cy="4114800"/>
+          </a:xfrm>
+          <a:prstGeom prst="rect">
+            <a:avLst/>
+          </a:prstGeom>
+        </p:spPr>
+        <p:txBody>
+          <a:bodyPr vert="horz" lIns="91440" tIns="45720" rIns="91440" bIns="45720" rtlCol="0"/>
+          <a:lstStyle/>
+          <a:p>
+            <a:pPr lvl="0"/>
+            <a:r>
+              <a:rPr lang="en-US" smtClean="0"/>
+              <a:t>Click to edit Master text styles</a:t>
+            </a:r>
+          </a:p>
+          <a:p>
+            <a:pPr lvl="1"/>
+            <a:r>
+              <a:rPr lang="en-US" smtClean="0"/>
+              <a:t>Second level</a:t>
+            </a:r>
+          </a:p>
+          <a:p>
+            <a:pPr lvl="2"/>
+            <a:r>
+              <a:rPr lang="en-US" smtClean="0"/>
+              <a:t>Third level</a:t>
+            </a:r>
+          </a:p>
+          <a:p>
+            <a:pPr lvl="3"/>
+            <a:r>
+              <a:rPr lang="en-US" smtClean="0"/>
+              <a:t>Fourth level</a:t>
+            </a:r>
+          </a:p>
+          <a:p>
+            <a:pPr lvl="4"/>
+            <a:r>
+              <a:rPr lang="en-US" smtClean="0"/>
+              <a:t>Fifth level</a:t>
+            </a:r>
+            <a:endParaRPr lang="en-US"/>
+          </a:p>
+        </p:txBody>
+      </p:sp>
+      <p:sp>
+        <p:nvSpPr>
+          <p:cNvPr id="6" name="Footer Placeholder 5"/>
+          <p:cNvSpPr>
+            <a:spLocks noGrp="1"/>
+          </p:cNvSpPr>
+          <p:nvPr>
+            <p:ph type="ftr" sz="quarter" idx="4"/>
+          </p:nvPr>
+        </p:nvSpPr>
+        <p:spPr>
+          <a:xfrm>
+            <a:off x="0" y="8685213"/>
+            <a:ext cx="2971800" cy="457200"/>
+          </a:xfrm>
+          <a:prstGeom prst="rect">
+            <a:avLst/>
+          </a:prstGeom>
+        </p:spPr>
+        <p:txBody>
+          <a:bodyPr vert="horz" lIns="91440" tIns="45720" rIns="91440" bIns="45720" rtlCol="0" anchor="b"/>
+          <a:lstStyle>
+            <a:lvl1pPr algn="l">
+              <a:defRPr sz="1200"/>
+            </a:lvl1pPr>
+          </a:lstStyle>
+          <a:p>
+            <a:endParaRPr lang="en-US"/>
+          </a:p>
+        </p:txBody>
+      </p:sp>
+      <p:sp>
+        <p:nvSpPr>
+          <p:cNvPr id="7" name="Slide Number Placeholder 6"/>
+          <p:cNvSpPr>
+            <a:spLocks noGrp="1"/>
+          </p:cNvSpPr>
+          <p:nvPr>
+            <p:ph type="sldNum" sz="quarter" idx="5"/>
+          </p:nvPr>
+        </p:nvSpPr>
+        <p:spPr>
+          <a:xfrm>
+            <a:off x="3884613" y="8685213"/>
+            <a:ext cx="2971800" cy="457200"/>
+          </a:xfrm>
+          <a:prstGeom prst="rect">
+            <a:avLst/>
+          </a:prstGeom>
+        </p:spPr>
+        <p:txBody>
+          <a:bodyPr vert="horz" lIns="91440" tIns="45720" rIns="91440" bIns="45720" rtlCol="0" anchor="b"/>
+          <a:lstStyle>
+            <a:lvl1pPr algn="r">
+              <a:defRPr sz="1200"/>
+            </a:lvl1pPr>
+          </a:lstStyle>
+          <a:p>
+            <a:fld id="{BB5E49A5-4136-284D-997B-48E1D791AD67}" type="slidenum">
+              <a:rPr lang="en-US" smtClean="0"/>
+              <a:t>‹#›</a:t>
+            </a:fld>
+            <a:endParaRPr lang="en-US"/>
+          </a:p>
+        </p:txBody>
+      </p:sp>
+    </p:spTree>
+    <p:extLst>
+      <p:ext uri="{BB962C8B-B14F-4D97-AF65-F5344CB8AC3E}">
+        <p14:creationId xmlns:p14="http://schemas.microsoft.com/office/powerpoint/2010/main" val="2623252185"/>
+      </p:ext>
+    </p:extLst>
+  </p:cSld>
+  <p:clrMap bg1="lt1" tx1="dk1" bg2="lt2" tx2="dk2" accent1="accent1" accent2="accent2" accent3="accent3" accent4="accent4" accent5="accent5" accent6="accent6" hlink="hlink" folHlink="folHlink"/>
+  <p:notesStyle>
+    <a:lvl1pPr marL="0" algn="l" defTabSz="457200" rtl="0" eaLnBrk="1" latinLnBrk="0" hangingPunct="1">
+      <a:defRPr sz="1200" kern="1200">
+        <a:solidFill>
+          <a:schemeClr val="tx1"/>
+        </a:solidFill>
+        <a:latin typeface="+mn-lt"/>
+        <a:ea typeface="+mn-ea"/>
+        <a:cs typeface="+mn-cs"/>
+      </a:defRPr>
+    </a:lvl1pPr>
+    <a:lvl2pPr marL="457200" algn="l" defTabSz="457200" rtl="0" eaLnBrk="1" latinLnBrk="0" hangingPunct="1">
+      <a:defRPr sz="1200" kern="1200">
+        <a:solidFill>
+          <a:schemeClr val="tx1"/>
+        </a:solidFill>
+        <a:latin typeface="+mn-lt"/>
+        <a:ea typeface="+mn-ea"/>
+        <a:cs typeface="+mn-cs"/>
+      </a:defRPr>
+    </a:lvl2pPr>
+    <a:lvl3pPr marL="914400" algn="l" defTabSz="457200" rtl="0" eaLnBrk="1" latinLnBrk="0" hangingPunct="1">
+      <a:defRPr sz="1200" kern="1200">
+        <a:solidFill>
+          <a:schemeClr val="tx1"/>
+        </a:solidFill>
+        <a:latin typeface="+mn-lt"/>
+        <a:ea typeface="+mn-ea"/>
+        <a:cs typeface="+mn-cs"/>
+      </a:defRPr>
+    </a:lvl3pPr>
+    <a:lvl4pPr marL="1371600" algn="l" defTabSz="457200" rtl="0" eaLnBrk="1" latinLnBrk="0" hangingPunct="1">
+      <a:defRPr sz="1200" kern="1200">
+        <a:solidFill>
+          <a:schemeClr val="tx1"/>
+        </a:solidFill>
+        <a:latin typeface="+mn-lt"/>
+        <a:ea typeface="+mn-ea"/>
+        <a:cs typeface="+mn-cs"/>
+      </a:defRPr>
+    </a:lvl4pPr>
+    <a:lvl5pPr marL="1828800" algn="l" defTabSz="457200" rtl="0" eaLnBrk="1" latinLnBrk="0" hangingPunct="1">
+      <a:defRPr sz="1200" kern="1200">
+        <a:solidFill>
+          <a:schemeClr val="tx1"/>
+        </a:solidFill>
+        <a:latin typeface="+mn-lt"/>
+        <a:ea typeface="+mn-ea"/>
+        <a:cs typeface="+mn-cs"/>
+      </a:defRPr>
+    </a:lvl5pPr>
+    <a:lvl6pPr marL="2286000" algn="l" defTabSz="457200" rtl="0" eaLnBrk="1" latinLnBrk="0" hangingPunct="1">
+      <a:defRPr sz="1200" kern="1200">
+        <a:solidFill>
+          <a:schemeClr val="tx1"/>
+        </a:solidFill>
+        <a:latin typeface="+mn-lt"/>
+        <a:ea typeface="+mn-ea"/>
+        <a:cs typeface="+mn-cs"/>
+      </a:defRPr>
+    </a:lvl6pPr>
+    <a:lvl7pPr marL="2743200" algn="l" defTabSz="457200" rtl="0" eaLnBrk="1" latinLnBrk="0" hangingPunct="1">
+      <a:defRPr sz="1200" kern="1200">
+        <a:solidFill>
+          <a:schemeClr val="tx1"/>
+        </a:solidFill>
+        <a:latin typeface="+mn-lt"/>
+        <a:ea typeface="+mn-ea"/>
+        <a:cs typeface="+mn-cs"/>
+      </a:defRPr>
+    </a:lvl7pPr>
+    <a:lvl8pPr marL="3200400" algn="l" defTabSz="457200" rtl="0" eaLnBrk="1" latinLnBrk="0" hangingPunct="1">
+      <a:defRPr sz="1200" kern="1200">
+        <a:solidFill>
+          <a:schemeClr val="tx1"/>
+        </a:solidFill>
+        <a:latin typeface="+mn-lt"/>
+        <a:ea typeface="+mn-ea"/>
+        <a:cs typeface="+mn-cs"/>
+      </a:defRPr>
+    </a:lvl8pPr>
+    <a:lvl9pPr marL="3657600" algn="l" defTabSz="457200" rtl="0" eaLnBrk="1" latinLnBrk="0" hangingPunct="1">
+      <a:defRPr sz="1200" kern="1200">
+        <a:solidFill>
+          <a:schemeClr val="tx1"/>
+        </a:solidFill>
+        <a:latin typeface="+mn-lt"/>
+        <a:ea typeface="+mn-ea"/>
+        <a:cs typeface="+mn-cs"/>
+      </a:defRPr>
+    </a:lvl9pPr>
+  </p:notesStyle>
+</p:notesMaster>
+</file>
+
+<file path=ppt/notesSlides/notesSlide1.xml><?xml version="1.0" encoding="utf-8"?>
+<p:notes xmlns:a="http://schemas.openxmlformats.org/drawingml/2006/main" xmlns:p="http://schemas.openxmlformats.org/presentationml/2006/main" xmlns:r="http://schemas.openxmlformats.org/officeDocument/2006/relationships">
+  <p:cSld>
+    <p:spTree>
+      <p:nvGrpSpPr>
+        <p:cNvPr id="1" name=""/>
+        <p:cNvGrpSpPr/>
+        <p:nvPr/>
+      </p:nvGrpSpPr>
+      <p:grpSpPr>
+        <a:xfrm>
+          <a:off x="0" y="0"/>
+          <a:ext cx="0" cy="0"/>
+          <a:chOff x="0" y="0"/>
+          <a:chExt cx="0" cy="0"/>
+        </a:xfrm>
+      </p:grpSpPr>
+      <p:sp>
+        <p:nvSpPr>
+          <p:cNvPr id="2" name="Slide Image Placeholder 1"/>
+          <p:cNvSpPr>
+            <a:spLocks noGrp="1"/>
+          </p:cNvSpPr>
+          <p:nvPr>
+            <p:ph type="sldImg" idx="2"/>
+          </p:nvPr>
+        </p:nvSpPr>
+        <p:spPr/>
+      </p:sp>
+      <p:sp>
+        <p:nvSpPr>
+          <p:cNvPr id="3" name="Notes Placeholder 2"/>
+          <p:cNvSpPr>
+            <a:spLocks noGrp="1"/>
+          </p:cNvSpPr>
+          <p:nvPr>
+            <p:ph type="body" idx="3" sz="quarter"/>
+          </p:nvPr>
+        </p:nvSpPr>
+        <p:spPr/>
+        <p:txBody>
+          <a:bodyPr/>
+          <a:lstStyle/>
+          <a:p>
+            <a:r>
+              <a:t>Giới thiệu: bài trình bày gồm ba phần — khái niệm trôi (concept drift) là gì, cách cộng đồng nghiên cứu xử lý nó, và kết quả tái lập bài báo Read (2018). Phần tái lập chỉ là một mục trong sáu mục, không phải trọng tâm duy nhất.</a:t>
+            </a:r>
+          </a:p>
+        </p:txBody>
+      </p:sp>
+      <p:sp>
+        <p:nvSpPr>
+          <p:cNvPr id="4" name="Slide Number Placeholder 3"/>
+          <p:cNvSpPr>
+            <a:spLocks noGrp="1"/>
+          </p:cNvSpPr>
+          <p:nvPr>
+            <p:ph type="sldNum" idx="5" sz="quarter"/>
+          </p:nvPr>
+        </p:nvSpPr>
+        <p:spPr/>
+      </p:sp>
+    </p:spTree>
+  </p:cSld>
+  <p:clrMapOvr>
+    <a:masterClrMapping/>
+  </p:clrMapOvr>
+</p:notes>
+</file>
+
+<file path=ppt/notesSlides/notesSlide10.xml><?xml version="1.0" encoding="utf-8"?>
+<p:notes xmlns:a="http://schemas.openxmlformats.org/drawingml/2006/main" xmlns:p="http://schemas.openxmlformats.org/presentationml/2006/main" xmlns:r="http://schemas.openxmlformats.org/officeDocument/2006/relationships">
+  <p:cSld>
+    <p:spTree>
+      <p:nvGrpSpPr>
+        <p:cNvPr id="1" name=""/>
+        <p:cNvGrpSpPr/>
+        <p:nvPr/>
+      </p:nvGrpSpPr>
+      <p:grpSpPr>
+        <a:xfrm>
+          <a:off x="0" y="0"/>
+          <a:ext cx="0" cy="0"/>
+          <a:chOff x="0" y="0"/>
+          <a:chExt cx="0" cy="0"/>
+        </a:xfrm>
+      </p:grpSpPr>
+      <p:sp>
+        <p:nvSpPr>
+          <p:cNvPr id="2" name="Slide Image Placeholder 1"/>
+          <p:cNvSpPr>
+            <a:spLocks noGrp="1"/>
+          </p:cNvSpPr>
+          <p:nvPr>
+            <p:ph type="sldImg" idx="2"/>
+          </p:nvPr>
+        </p:nvSpPr>
+        <p:spPr/>
+      </p:sp>
+      <p:sp>
+        <p:nvSpPr>
+          <p:cNvPr id="3" name="Notes Placeholder 2"/>
+          <p:cNvSpPr>
+            <a:spLocks noGrp="1"/>
+          </p:cNvSpPr>
+          <p:nvPr>
+            <p:ph type="body" idx="3" sz="quarter"/>
+          </p:nvPr>
+        </p:nvSpPr>
+        <p:spPr/>
+        <p:txBody>
+          <a:bodyPr/>
+          <a:lstStyle/>
+          <a:p>
+            <a:r>
+              <a:t>Ba hạn chế của quy trình đánh giá hiện hành. Hạn chế thứ ba là nghiêm trọng nhất trong thực tế: các bộ phát hiện kinh điển đều giả định nhãn có ngay lập tức, trong khi ở bài toán gian lận thẻ, nhãn đến sau 30–180 ngày. Nếu tín hiệu sai số không quan sát được trong nhiều tháng thì mọi phương pháp dựa vào nó đều không dùng được.</a:t>
+            </a:r>
+          </a:p>
+        </p:txBody>
+      </p:sp>
+      <p:sp>
+        <p:nvSpPr>
+          <p:cNvPr id="4" name="Slide Number Placeholder 3"/>
+          <p:cNvSpPr>
+            <a:spLocks noGrp="1"/>
+          </p:cNvSpPr>
+          <p:nvPr>
+            <p:ph type="sldNum" idx="5" sz="quarter"/>
+          </p:nvPr>
+        </p:nvSpPr>
+        <p:spPr/>
+      </p:sp>
+    </p:spTree>
+  </p:cSld>
+  <p:clrMapOvr>
+    <a:masterClrMapping/>
+  </p:clrMapOvr>
+</p:notes>
+</file>
+
+<file path=ppt/notesSlides/notesSlide11.xml><?xml version="1.0" encoding="utf-8"?>
+<p:notes xmlns:a="http://schemas.openxmlformats.org/drawingml/2006/main" xmlns:p="http://schemas.openxmlformats.org/presentationml/2006/main" xmlns:r="http://schemas.openxmlformats.org/officeDocument/2006/relationships">
+  <p:cSld>
+    <p:spTree>
+      <p:nvGrpSpPr>
+        <p:cNvPr id="1" name=""/>
+        <p:cNvGrpSpPr/>
+        <p:nvPr/>
+      </p:nvGrpSpPr>
+      <p:grpSpPr>
+        <a:xfrm>
+          <a:off x="0" y="0"/>
+          <a:ext cx="0" cy="0"/>
+          <a:chOff x="0" y="0"/>
+          <a:chExt cx="0" cy="0"/>
+        </a:xfrm>
+      </p:grpSpPr>
+      <p:sp>
+        <p:nvSpPr>
+          <p:cNvPr id="2" name="Slide Image Placeholder 1"/>
+          <p:cNvSpPr>
+            <a:spLocks noGrp="1"/>
+          </p:cNvSpPr>
+          <p:nvPr>
+            <p:ph type="sldImg" idx="2"/>
+          </p:nvPr>
+        </p:nvSpPr>
+        <p:spPr/>
+      </p:sp>
+      <p:sp>
+        <p:nvSpPr>
+          <p:cNvPr id="3" name="Notes Placeholder 2"/>
+          <p:cNvSpPr>
+            <a:spLocks noGrp="1"/>
+          </p:cNvSpPr>
+          <p:nvPr>
+            <p:ph type="body" idx="3" sz="quarter"/>
+          </p:nvPr>
+        </p:nvSpPr>
+        <p:spPr/>
+        <p:txBody>
+          <a:bodyPr/>
+          <a:lstStyle/>
+          <a:p>
+            <a:r>
+              <a:t>Đây là slide quan trọng nhất của phần này. Cơ chế thích nghi khả dụng được quyết định bởi mô hình được cấu tạo từ cái gì. Cây quyết định có tham số là một cấu trúc rời rạc nên không tồn tại bước dịch chuyển nhỏ — chỉ có thể mọc thêm hoặc phá đi. Bộ đệm cũng vậy: mô hình chính là dữ liệu lưu trữ. Chỉ mô hình có tham số liên tục mới bám theo được khái niệm.</a:t>
+            </a:r>
+          </a:p>
+        </p:txBody>
+      </p:sp>
+      <p:sp>
+        <p:nvSpPr>
+          <p:cNvPr id="4" name="Slide Number Placeholder 3"/>
+          <p:cNvSpPr>
+            <a:spLocks noGrp="1"/>
+          </p:cNvSpPr>
+          <p:nvPr>
+            <p:ph type="sldNum" idx="5" sz="quarter"/>
+          </p:nvPr>
+        </p:nvSpPr>
+        <p:spPr/>
+      </p:sp>
+    </p:spTree>
+  </p:cSld>
+  <p:clrMapOvr>
+    <a:masterClrMapping/>
+  </p:clrMapOvr>
+</p:notes>
+</file>
+
+<file path=ppt/notesSlides/notesSlide12.xml><?xml version="1.0" encoding="utf-8"?>
+<p:notes xmlns:a="http://schemas.openxmlformats.org/drawingml/2006/main" xmlns:p="http://schemas.openxmlformats.org/presentationml/2006/main" xmlns:r="http://schemas.openxmlformats.org/officeDocument/2006/relationships">
+  <p:cSld>
+    <p:spTree>
+      <p:nvGrpSpPr>
+        <p:cNvPr id="1" name=""/>
+        <p:cNvGrpSpPr/>
+        <p:nvPr/>
+      </p:nvGrpSpPr>
+      <p:grpSpPr>
+        <a:xfrm>
+          <a:off x="0" y="0"/>
+          <a:ext cx="0" cy="0"/>
+          <a:chOff x="0" y="0"/>
+          <a:chExt cx="0" cy="0"/>
+        </a:xfrm>
+      </p:grpSpPr>
+      <p:sp>
+        <p:nvSpPr>
+          <p:cNvPr id="2" name="Slide Image Placeholder 1"/>
+          <p:cNvSpPr>
+            <a:spLocks noGrp="1"/>
+          </p:cNvSpPr>
+          <p:nvPr>
+            <p:ph type="sldImg" idx="2"/>
+          </p:nvPr>
+        </p:nvSpPr>
+        <p:spPr/>
+      </p:sp>
+      <p:sp>
+        <p:nvSpPr>
+          <p:cNvPr id="3" name="Notes Placeholder 2"/>
+          <p:cNvSpPr>
+            <a:spLocks noGrp="1"/>
+          </p:cNvSpPr>
+          <p:nvPr>
+            <p:ph type="body" idx="3" sz="quarter"/>
+          </p:nvPr>
+        </p:nvSpPr>
+        <p:spPr/>
+        <p:txBody>
+          <a:bodyPr/>
+          <a:lstStyle/>
+          <a:p>
+            <a:r>
+              <a:t>Chuyển sang bài báo Read (2018), nền tảng cho phần tái lập tiếp theo.</a:t>
+            </a:r>
+          </a:p>
+        </p:txBody>
+      </p:sp>
+      <p:sp>
+        <p:nvSpPr>
+          <p:cNvPr id="4" name="Slide Number Placeholder 3"/>
+          <p:cNvSpPr>
+            <a:spLocks noGrp="1"/>
+          </p:cNvSpPr>
+          <p:nvPr>
+            <p:ph type="sldNum" idx="5" sz="quarter"/>
+          </p:nvPr>
+        </p:nvSpPr>
+        <p:spPr/>
+      </p:sp>
+    </p:spTree>
+  </p:cSld>
+  <p:clrMapOvr>
+    <a:masterClrMapping/>
+  </p:clrMapOvr>
+</p:notes>
+</file>
+
+<file path=ppt/notesSlides/notesSlide13.xml><?xml version="1.0" encoding="utf-8"?>
+<p:notes xmlns:a="http://schemas.openxmlformats.org/drawingml/2006/main" xmlns:p="http://schemas.openxmlformats.org/presentationml/2006/main" xmlns:r="http://schemas.openxmlformats.org/officeDocument/2006/relationships">
+  <p:cSld>
+    <p:spTree>
+      <p:nvGrpSpPr>
+        <p:cNvPr id="1" name=""/>
+        <p:cNvGrpSpPr/>
+        <p:nvPr/>
+      </p:nvGrpSpPr>
+      <p:grpSpPr>
+        <a:xfrm>
+          <a:off x="0" y="0"/>
+          <a:ext cx="0" cy="0"/>
+          <a:chOff x="0" y="0"/>
+          <a:chExt cx="0" cy="0"/>
+        </a:xfrm>
+      </p:grpSpPr>
+      <p:sp>
+        <p:nvSpPr>
+          <p:cNvPr id="2" name="Slide Image Placeholder 1"/>
+          <p:cNvSpPr>
+            <a:spLocks noGrp="1"/>
+          </p:cNvSpPr>
+          <p:nvPr>
+            <p:ph type="sldImg" idx="2"/>
+          </p:nvPr>
+        </p:nvSpPr>
+        <p:spPr/>
+      </p:sp>
+      <p:sp>
+        <p:nvSpPr>
+          <p:cNvPr id="3" name="Notes Placeholder 2"/>
+          <p:cNvSpPr>
+            <a:spLocks noGrp="1"/>
+          </p:cNvSpPr>
+          <p:nvPr>
+            <p:ph type="body" idx="3" sz="quarter"/>
+          </p:nvPr>
+        </p:nvSpPr>
+        <p:spPr/>
+        <p:txBody>
+          <a:bodyPr/>
+          <a:lstStyle/>
+          <a:p>
+            <a:r>
+              <a:t>Lập luận cốt lõi. Cộng đồng giả định dữ liệu độc lập cùng phân phối trong mỗi khái niệm, nhưng trôi khái niệm chính là sự thay đổi khái niệm đó — nên giả định tự mâu thuẫn. Con số minh họa được đếm trực tiếp trên luồng 20 bước. Điểm then chốt: thời điểm đổi τ không quan sát được. Nếu biết τ thì có thể cắt luồng làm đôi và toàn bộ lập luận sụp đổ; vì không biết, một bước nhảy tức thời biểu hiện thành phụ thuộc thời gian kéo dài trong tín hiệu sai số.</a:t>
+            </a:r>
+          </a:p>
+        </p:txBody>
+      </p:sp>
+      <p:sp>
+        <p:nvSpPr>
+          <p:cNvPr id="4" name="Slide Number Placeholder 3"/>
+          <p:cNvSpPr>
+            <a:spLocks noGrp="1"/>
+          </p:cNvSpPr>
+          <p:nvPr>
+            <p:ph type="sldNum" idx="5" sz="quarter"/>
+          </p:nvPr>
+        </p:nvSpPr>
+        <p:spPr/>
+      </p:sp>
+    </p:spTree>
+  </p:cSld>
+  <p:clrMapOvr>
+    <a:masterClrMapping/>
+  </p:clrMapOvr>
+</p:notes>
+</file>
+
+<file path=ppt/notesSlides/notesSlide14.xml><?xml version="1.0" encoding="utf-8"?>
+<p:notes xmlns:a="http://schemas.openxmlformats.org/drawingml/2006/main" xmlns:p="http://schemas.openxmlformats.org/presentationml/2006/main" xmlns:r="http://schemas.openxmlformats.org/officeDocument/2006/relationships">
+  <p:cSld>
+    <p:spTree>
+      <p:nvGrpSpPr>
+        <p:cNvPr id="1" name=""/>
+        <p:cNvGrpSpPr/>
+        <p:nvPr/>
+      </p:nvGrpSpPr>
+      <p:grpSpPr>
+        <a:xfrm>
+          <a:off x="0" y="0"/>
+          <a:ext cx="0" cy="0"/>
+          <a:chOff x="0" y="0"/>
+          <a:chExt cx="0" cy="0"/>
+        </a:xfrm>
+      </p:grpSpPr>
+      <p:sp>
+        <p:nvSpPr>
+          <p:cNvPr id="2" name="Slide Image Placeholder 1"/>
+          <p:cNvSpPr>
+            <a:spLocks noGrp="1"/>
+          </p:cNvSpPr>
+          <p:nvPr>
+            <p:ph type="sldImg" idx="2"/>
+          </p:nvPr>
+        </p:nvSpPr>
+        <p:spPr/>
+      </p:sp>
+      <p:sp>
+        <p:nvSpPr>
+          <p:cNvPr id="3" name="Notes Placeholder 2"/>
+          <p:cNvSpPr>
+            <a:spLocks noGrp="1"/>
+          </p:cNvSpPr>
+          <p:nvPr>
+            <p:ph type="body" idx="3" sz="quarter"/>
+          </p:nvPr>
+        </p:nvSpPr>
+        <p:spPr/>
+        <p:txBody>
+          <a:bodyPr/>
+          <a:lstStyle/>
+          <a:p>
+            <a:r>
+              <a:t>Cách diễn đạt lại: mỗi khái niệm là một điểm trong không gian tham số, trôi là một quỹ đạo. Nếu là quỹ đạo thì về nguyên tắc có thể dự báo được, và bài toán trôi khái niệm trở thành bài toán dự báo tham số. Công thức cuối là toàn bộ đơn thuốc của bài báo: bám theo, không cần bộ phát hiện, không cần khởi tạo lại.</a:t>
+            </a:r>
+          </a:p>
+        </p:txBody>
+      </p:sp>
+      <p:sp>
+        <p:nvSpPr>
+          <p:cNvPr id="4" name="Slide Number Placeholder 3"/>
+          <p:cNvSpPr>
+            <a:spLocks noGrp="1"/>
+          </p:cNvSpPr>
+          <p:nvPr>
+            <p:ph type="sldNum" idx="5" sz="quarter"/>
+          </p:nvPr>
+        </p:nvSpPr>
+        <p:spPr/>
+      </p:sp>
+    </p:spTree>
+  </p:cSld>
+  <p:clrMapOvr>
+    <a:masterClrMapping/>
+  </p:clrMapOvr>
+</p:notes>
+</file>
+
+<file path=ppt/notesSlides/notesSlide15.xml><?xml version="1.0" encoding="utf-8"?>
+<p:notes xmlns:a="http://schemas.openxmlformats.org/drawingml/2006/main" xmlns:p="http://schemas.openxmlformats.org/presentationml/2006/main" xmlns:r="http://schemas.openxmlformats.org/officeDocument/2006/relationships">
+  <p:cSld>
+    <p:spTree>
+      <p:nvGrpSpPr>
+        <p:cNvPr id="1" name=""/>
+        <p:cNvGrpSpPr/>
+        <p:nvPr/>
+      </p:nvGrpSpPr>
+      <p:grpSpPr>
+        <a:xfrm>
+          <a:off x="0" y="0"/>
+          <a:ext cx="0" cy="0"/>
+          <a:chOff x="0" y="0"/>
+          <a:chExt cx="0" cy="0"/>
+        </a:xfrm>
+      </p:grpSpPr>
+      <p:sp>
+        <p:nvSpPr>
+          <p:cNvPr id="2" name="Slide Image Placeholder 1"/>
+          <p:cNvSpPr>
+            <a:spLocks noGrp="1"/>
+          </p:cNvSpPr>
+          <p:nvPr>
+            <p:ph type="sldImg" idx="2"/>
+          </p:nvPr>
+        </p:nvSpPr>
+        <p:spPr/>
+      </p:sp>
+      <p:sp>
+        <p:nvSpPr>
+          <p:cNvPr id="3" name="Notes Placeholder 2"/>
+          <p:cNvSpPr>
+            <a:spLocks noGrp="1"/>
+          </p:cNvSpPr>
+          <p:nvPr>
+            <p:ph type="body" idx="3" sz="quarter"/>
+          </p:nvPr>
+        </p:nvSpPr>
+        <p:spPr/>
+        <p:txBody>
+          <a:bodyPr/>
+          <a:lstStyle/>
+          <a:p>
+            <a:r>
+              <a:t>Chuyển sang phần thực nghiệm: cài đặt lại toàn bộ sáu phương pháp trong Bảng 2 bằng thư viện chuẩn của Python, chạy trên chính dữ liệu của bài báo.</a:t>
+            </a:r>
+          </a:p>
+        </p:txBody>
+      </p:sp>
+      <p:sp>
+        <p:nvSpPr>
+          <p:cNvPr id="4" name="Slide Number Placeholder 3"/>
+          <p:cNvSpPr>
+            <a:spLocks noGrp="1"/>
+          </p:cNvSpPr>
+          <p:nvPr>
+            <p:ph type="sldNum" idx="5" sz="quarter"/>
+          </p:nvPr>
+        </p:nvSpPr>
+        <p:spPr/>
+      </p:sp>
+    </p:spTree>
+  </p:cSld>
+  <p:clrMapOvr>
+    <a:masterClrMapping/>
+  </p:clrMapOvr>
+</p:notes>
+</file>
+
+<file path=ppt/notesSlides/notesSlide16.xml><?xml version="1.0" encoding="utf-8"?>
+<p:notes xmlns:a="http://schemas.openxmlformats.org/drawingml/2006/main" xmlns:p="http://schemas.openxmlformats.org/presentationml/2006/main" xmlns:r="http://schemas.openxmlformats.org/officeDocument/2006/relationships">
+  <p:cSld>
+    <p:spTree>
+      <p:nvGrpSpPr>
+        <p:cNvPr id="1" name=""/>
+        <p:cNvGrpSpPr/>
+        <p:nvPr/>
+      </p:nvGrpSpPr>
+      <p:grpSpPr>
+        <a:xfrm>
+          <a:off x="0" y="0"/>
+          <a:ext cx="0" cy="0"/>
+          <a:chOff x="0" y="0"/>
+          <a:chExt cx="0" cy="0"/>
+        </a:xfrm>
+      </p:grpSpPr>
+      <p:sp>
+        <p:nvSpPr>
+          <p:cNvPr id="2" name="Slide Image Placeholder 1"/>
+          <p:cNvSpPr>
+            <a:spLocks noGrp="1"/>
+          </p:cNvSpPr>
+          <p:nvPr>
+            <p:ph type="sldImg" idx="2"/>
+          </p:nvPr>
+        </p:nvSpPr>
+        <p:spPr/>
+      </p:sp>
+      <p:sp>
+        <p:nvSpPr>
+          <p:cNvPr id="3" name="Notes Placeholder 2"/>
+          <p:cNvSpPr>
+            <a:spLocks noGrp="1"/>
+          </p:cNvSpPr>
+          <p:nvPr>
+            <p:ph type="body" idx="3" sz="quarter"/>
+          </p:nvPr>
+        </p:nvSpPr>
+        <p:spPr/>
+        <p:txBody>
+          <a:bodyPr/>
+          <a:lstStyle/>
+          <a:p>
+            <a:r>
+              <a:t>Số lượng mẫu của hai tập dữ liệu khớp chính xác với con số bài báo nêu. Các phương pháp được cài đặt lại chứ không thay thế bằng mô hình tương đương — kể cả cây Hoeffding và ADWIN2. ADWIN2 được kiểm chứng riêng: phát hiện sau 55 mẫu kể từ điểm đổi thật, và không có báo động giả nào trên 4.000 mẫu dừng.</a:t>
+            </a:r>
+          </a:p>
+        </p:txBody>
+      </p:sp>
+      <p:sp>
+        <p:nvSpPr>
+          <p:cNvPr id="4" name="Slide Number Placeholder 3"/>
+          <p:cNvSpPr>
+            <a:spLocks noGrp="1"/>
+          </p:cNvSpPr>
+          <p:nvPr>
+            <p:ph type="sldNum" idx="5" sz="quarter"/>
+          </p:nvPr>
+        </p:nvSpPr>
+        <p:spPr/>
+      </p:sp>
+    </p:spTree>
+  </p:cSld>
+  <p:clrMapOvr>
+    <a:masterClrMapping/>
+  </p:clrMapOvr>
+</p:notes>
+</file>
+
+<file path=ppt/notesSlides/notesSlide17.xml><?xml version="1.0" encoding="utf-8"?>
+<p:notes xmlns:a="http://schemas.openxmlformats.org/drawingml/2006/main" xmlns:p="http://schemas.openxmlformats.org/presentationml/2006/main" xmlns:r="http://schemas.openxmlformats.org/officeDocument/2006/relationships">
+  <p:cSld>
+    <p:spTree>
+      <p:nvGrpSpPr>
+        <p:cNvPr id="1" name=""/>
+        <p:cNvGrpSpPr/>
+        <p:nvPr/>
+      </p:nvGrpSpPr>
+      <p:grpSpPr>
+        <a:xfrm>
+          <a:off x="0" y="0"/>
+          <a:ext cx="0" cy="0"/>
+          <a:chOff x="0" y="0"/>
+          <a:chExt cx="0" cy="0"/>
+        </a:xfrm>
+      </p:grpSpPr>
+      <p:sp>
+        <p:nvSpPr>
+          <p:cNvPr id="2" name="Slide Image Placeholder 1"/>
+          <p:cNvSpPr>
+            <a:spLocks noGrp="1"/>
+          </p:cNvSpPr>
+          <p:nvPr>
+            <p:ph type="sldImg" idx="2"/>
+          </p:nvPr>
+        </p:nvSpPr>
+        <p:spPr/>
+      </p:sp>
+      <p:sp>
+        <p:nvSpPr>
+          <p:cNvPr id="3" name="Notes Placeholder 2"/>
+          <p:cNvSpPr>
+            <a:spLocks noGrp="1"/>
+          </p:cNvSpPr>
+          <p:nvPr>
+            <p:ph type="body" idx="3" sz="quarter"/>
+          </p:nvPr>
+        </p:nvSpPr>
+        <p:spPr/>
+        <p:txBody>
+          <a:bodyPr/>
+          <a:lstStyle/>
+          <a:p>
+            <a:r>
+              <a:t>Electricity tái lập tốt: hai trong ba phương pháp nâng cao lệch dưới 2 điểm. PBF-SGD lệch 5,2 điểm — nguyên nhân nằm ở bậc đa thức chứ không phải tốc độ học, sẽ nói rõ ở slide sau. CoverType không so sánh được vì bài báo phân loại đủ bảy lớp còn ở đây rút về nhị phân.</a:t>
+            </a:r>
+          </a:p>
+        </p:txBody>
+      </p:sp>
+      <p:sp>
+        <p:nvSpPr>
+          <p:cNvPr id="4" name="Slide Number Placeholder 3"/>
+          <p:cNvSpPr>
+            <a:spLocks noGrp="1"/>
+          </p:cNvSpPr>
+          <p:nvPr>
+            <p:ph type="sldNum" idx="5" sz="quarter"/>
+          </p:nvPr>
+        </p:nvSpPr>
+        <p:spPr/>
+      </p:sp>
+    </p:spTree>
+  </p:cSld>
+  <p:clrMapOvr>
+    <a:masterClrMapping/>
+  </p:clrMapOvr>
+</p:notes>
+</file>
+
+<file path=ppt/notesSlides/notesSlide18.xml><?xml version="1.0" encoding="utf-8"?>
+<p:notes xmlns:a="http://schemas.openxmlformats.org/drawingml/2006/main" xmlns:p="http://schemas.openxmlformats.org/presentationml/2006/main" xmlns:r="http://schemas.openxmlformats.org/officeDocument/2006/relationships">
+  <p:cSld>
+    <p:spTree>
+      <p:nvGrpSpPr>
+        <p:cNvPr id="1" name=""/>
+        <p:cNvGrpSpPr/>
+        <p:nvPr/>
+      </p:nvGrpSpPr>
+      <p:grpSpPr>
+        <a:xfrm>
+          <a:off x="0" y="0"/>
+          <a:ext cx="0" cy="0"/>
+          <a:chOff x="0" y="0"/>
+          <a:chExt cx="0" cy="0"/>
+        </a:xfrm>
+      </p:grpSpPr>
+      <p:sp>
+        <p:nvSpPr>
+          <p:cNvPr id="2" name="Slide Image Placeholder 1"/>
+          <p:cNvSpPr>
+            <a:spLocks noGrp="1"/>
+          </p:cNvSpPr>
+          <p:nvPr>
+            <p:ph type="sldImg" idx="2"/>
+          </p:nvPr>
+        </p:nvSpPr>
+        <p:spPr/>
+      </p:sp>
+      <p:sp>
+        <p:nvSpPr>
+          <p:cNvPr id="3" name="Notes Placeholder 2"/>
+          <p:cNvSpPr>
+            <a:spLocks noGrp="1"/>
+          </p:cNvSpPr>
+          <p:nvPr>
+            <p:ph type="body" idx="3" sz="quarter"/>
+          </p:nvPr>
+        </p:nvSpPr>
+        <p:spPr/>
+        <p:txBody>
+          <a:bodyPr/>
+          <a:lstStyle/>
+          <a:p>
+            <a:r>
+              <a:t>Bài báo nêu điều kiện không được để tốc độ học giảm về 0, nhưng không có thực nghiệm tách riêng. Kết quả cho thấy hình phạt lớn nhất là sau trôi đột ngột (18,6 điểm) và gần như bằng không dưới trôi kéo dài (0,8 điểm) — ngược với trực giác. Lý do: dưới trôi kéo dài, tốc độ học hằng số cũng chỉ đạt 88,1 nên việc giảm không làm mất thêm gì; còn sau khi khái niệm bị lấy mẫu lại, tốc độ học còn sống thì học lại được, đóng băng thì không.</a:t>
+            </a:r>
+          </a:p>
+        </p:txBody>
+      </p:sp>
+      <p:sp>
+        <p:nvSpPr>
+          <p:cNvPr id="4" name="Slide Number Placeholder 3"/>
+          <p:cNvSpPr>
+            <a:spLocks noGrp="1"/>
+          </p:cNvSpPr>
+          <p:nvPr>
+            <p:ph type="sldNum" idx="5" sz="quarter"/>
+          </p:nvPr>
+        </p:nvSpPr>
+        <p:spPr/>
+      </p:sp>
+    </p:spTree>
+  </p:cSld>
+  <p:clrMapOvr>
+    <a:masterClrMapping/>
+  </p:clrMapOvr>
+</p:notes>
+</file>
+
+<file path=ppt/notesSlides/notesSlide19.xml><?xml version="1.0" encoding="utf-8"?>
+<p:notes xmlns:a="http://schemas.openxmlformats.org/drawingml/2006/main" xmlns:p="http://schemas.openxmlformats.org/presentationml/2006/main" xmlns:r="http://schemas.openxmlformats.org/officeDocument/2006/relationships">
+  <p:cSld>
+    <p:spTree>
+      <p:nvGrpSpPr>
+        <p:cNvPr id="1" name=""/>
+        <p:cNvGrpSpPr/>
+        <p:nvPr/>
+      </p:nvGrpSpPr>
+      <p:grpSpPr>
+        <a:xfrm>
+          <a:off x="0" y="0"/>
+          <a:ext cx="0" cy="0"/>
+          <a:chOff x="0" y="0"/>
+          <a:chExt cx="0" cy="0"/>
+        </a:xfrm>
+      </p:grpSpPr>
+      <p:sp>
+        <p:nvSpPr>
+          <p:cNvPr id="2" name="Slide Image Placeholder 1"/>
+          <p:cNvSpPr>
+            <a:spLocks noGrp="1"/>
+          </p:cNvSpPr>
+          <p:nvPr>
+            <p:ph type="sldImg" idx="2"/>
+          </p:nvPr>
+        </p:nvSpPr>
+        <p:spPr/>
+      </p:sp>
+      <p:sp>
+        <p:nvSpPr>
+          <p:cNvPr id="3" name="Notes Placeholder 2"/>
+          <p:cNvSpPr>
+            <a:spLocks noGrp="1"/>
+          </p:cNvSpPr>
+          <p:nvPr>
+            <p:ph type="body" idx="3" sz="quarter"/>
+          </p:nvPr>
+        </p:nvSpPr>
+        <p:spPr/>
+        <p:txBody>
+          <a:bodyPr/>
+          <a:lstStyle/>
+          <a:p>
+            <a:r>
+              <a:t>Đường kNN gần như nằm ngang qua cả năm kịch bản — biên độ 0,6 điểm so với 9,2 điểm của SGD. Trôi gần như không làm kNN tệ đi, vì kNN chưa bao giờ tích lũy được gì để trôi làm hỏng. Bài báo nêu hai nhận xét riêng biệt (khả năng bị chặn bởi kích thước bộ đệm, và không có xu hướng tăng khi dừng); thực ra đó là cùng một tính chất.</a:t>
+            </a:r>
+          </a:p>
+        </p:txBody>
+      </p:sp>
+      <p:sp>
+        <p:nvSpPr>
+          <p:cNvPr id="4" name="Slide Number Placeholder 3"/>
+          <p:cNvSpPr>
+            <a:spLocks noGrp="1"/>
+          </p:cNvSpPr>
+          <p:nvPr>
+            <p:ph type="sldNum" idx="5" sz="quarter"/>
+          </p:nvPr>
+        </p:nvSpPr>
+        <p:spPr/>
+      </p:sp>
+    </p:spTree>
+  </p:cSld>
+  <p:clrMapOvr>
+    <a:masterClrMapping/>
+  </p:clrMapOvr>
+</p:notes>
+</file>
+
+<file path=ppt/notesSlides/notesSlide2.xml><?xml version="1.0" encoding="utf-8"?>
+<p:notes xmlns:a="http://schemas.openxmlformats.org/drawingml/2006/main" xmlns:p="http://schemas.openxmlformats.org/presentationml/2006/main" xmlns:r="http://schemas.openxmlformats.org/officeDocument/2006/relationships">
+  <p:cSld>
+    <p:spTree>
+      <p:nvGrpSpPr>
+        <p:cNvPr id="1" name=""/>
+        <p:cNvGrpSpPr/>
+        <p:nvPr/>
+      </p:nvGrpSpPr>
+      <p:grpSpPr>
+        <a:xfrm>
+          <a:off x="0" y="0"/>
+          <a:ext cx="0" cy="0"/>
+          <a:chOff x="0" y="0"/>
+          <a:chExt cx="0" cy="0"/>
+        </a:xfrm>
+      </p:grpSpPr>
+      <p:sp>
+        <p:nvSpPr>
+          <p:cNvPr id="2" name="Slide Image Placeholder 1"/>
+          <p:cNvSpPr>
+            <a:spLocks noGrp="1"/>
+          </p:cNvSpPr>
+          <p:nvPr>
+            <p:ph type="sldImg" idx="2"/>
+          </p:nvPr>
+        </p:nvSpPr>
+        <p:spPr/>
+      </p:sp>
+      <p:sp>
+        <p:nvSpPr>
+          <p:cNvPr id="3" name="Notes Placeholder 2"/>
+          <p:cNvSpPr>
+            <a:spLocks noGrp="1"/>
+          </p:cNvSpPr>
+          <p:nvPr>
+            <p:ph type="body" idx="3" sz="quarter"/>
+          </p:nvPr>
+        </p:nvSpPr>
+        <p:spPr/>
+        <p:txBody>
+          <a:bodyPr/>
+          <a:lstStyle/>
+          <a:p>
+            <a:r>
+              <a:t>Nêu nhanh sáu phần. Nhấn mạnh mạch bài: từ định nghĩa bài toán, sang phương pháp, rồi đến một lập luận cụ thể, phần kiểm chứng bằng thực nghiệm, và cuối cùng là các câu hỏi còn bỏ ngỏ.</a:t>
+            </a:r>
+          </a:p>
+        </p:txBody>
+      </p:sp>
+      <p:sp>
+        <p:nvSpPr>
+          <p:cNvPr id="4" name="Slide Number Placeholder 3"/>
+          <p:cNvSpPr>
+            <a:spLocks noGrp="1"/>
+          </p:cNvSpPr>
+          <p:nvPr>
+            <p:ph type="sldNum" idx="5" sz="quarter"/>
+          </p:nvPr>
+        </p:nvSpPr>
+        <p:spPr/>
+      </p:sp>
+    </p:spTree>
+  </p:cSld>
+  <p:clrMapOvr>
+    <a:masterClrMapping/>
+  </p:clrMapOvr>
+</p:notes>
+</file>
+
+<file path=ppt/notesSlides/notesSlide20.xml><?xml version="1.0" encoding="utf-8"?>
+<p:notes xmlns:a="http://schemas.openxmlformats.org/drawingml/2006/main" xmlns:p="http://schemas.openxmlformats.org/presentationml/2006/main" xmlns:r="http://schemas.openxmlformats.org/officeDocument/2006/relationships">
+  <p:cSld>
+    <p:spTree>
+      <p:nvGrpSpPr>
+        <p:cNvPr id="1" name=""/>
+        <p:cNvGrpSpPr/>
+        <p:nvPr/>
+      </p:nvGrpSpPr>
+      <p:grpSpPr>
+        <a:xfrm>
+          <a:off x="0" y="0"/>
+          <a:ext cx="0" cy="0"/>
+          <a:chOff x="0" y="0"/>
+          <a:chExt cx="0" cy="0"/>
+        </a:xfrm>
+      </p:grpSpPr>
+      <p:sp>
+        <p:nvSpPr>
+          <p:cNvPr id="2" name="Slide Image Placeholder 1"/>
+          <p:cNvSpPr>
+            <a:spLocks noGrp="1"/>
+          </p:cNvSpPr>
+          <p:nvPr>
+            <p:ph type="sldImg" idx="2"/>
+          </p:nvPr>
+        </p:nvSpPr>
+        <p:spPr/>
+      </p:sp>
+      <p:sp>
+        <p:nvSpPr>
+          <p:cNvPr id="3" name="Notes Placeholder 2"/>
+          <p:cNvSpPr>
+            <a:spLocks noGrp="1"/>
+          </p:cNvSpPr>
+          <p:nvPr>
+            <p:ph type="body" idx="3" sz="quarter"/>
+          </p:nvPr>
+        </p:nvSpPr>
+        <p:spPr/>
+        <p:txBody>
+          <a:bodyPr/>
+          <a:lstStyle/>
+          <a:p>
+            <a:r>
+              <a:t>Ba tham số bài báo không nêu, trong đó số chiều dữ liệu tổng hợp là quan trọng nhất: nó đưa SGD từ 57,7 lên 92,2. Nghĩa là hàng Synthetic trong Bảng 3 chỉ đạt được ở số chiều lớn, không phải ở d = 2 như chính Hình 4 của bài báo vẽ. Ai trích dẫn cột đó nên biết điều này.</a:t>
+            </a:r>
+          </a:p>
+        </p:txBody>
+      </p:sp>
+      <p:sp>
+        <p:nvSpPr>
+          <p:cNvPr id="4" name="Slide Number Placeholder 3"/>
+          <p:cNvSpPr>
+            <a:spLocks noGrp="1"/>
+          </p:cNvSpPr>
+          <p:nvPr>
+            <p:ph type="sldNum" idx="5" sz="quarter"/>
+          </p:nvPr>
+        </p:nvSpPr>
+        <p:spPr/>
+      </p:sp>
+    </p:spTree>
+  </p:cSld>
+  <p:clrMapOvr>
+    <a:masterClrMapping/>
+  </p:clrMapOvr>
+</p:notes>
+</file>
+
+<file path=ppt/notesSlides/notesSlide21.xml><?xml version="1.0" encoding="utf-8"?>
+<p:notes xmlns:a="http://schemas.openxmlformats.org/drawingml/2006/main" xmlns:p="http://schemas.openxmlformats.org/presentationml/2006/main" xmlns:r="http://schemas.openxmlformats.org/officeDocument/2006/relationships">
+  <p:cSld>
+    <p:spTree>
+      <p:nvGrpSpPr>
+        <p:cNvPr id="1" name=""/>
+        <p:cNvGrpSpPr/>
+        <p:nvPr/>
+      </p:nvGrpSpPr>
+      <p:grpSpPr>
+        <a:xfrm>
+          <a:off x="0" y="0"/>
+          <a:ext cx="0" cy="0"/>
+          <a:chOff x="0" y="0"/>
+          <a:chExt cx="0" cy="0"/>
+        </a:xfrm>
+      </p:grpSpPr>
+      <p:sp>
+        <p:nvSpPr>
+          <p:cNvPr id="2" name="Slide Image Placeholder 1"/>
+          <p:cNvSpPr>
+            <a:spLocks noGrp="1"/>
+          </p:cNvSpPr>
+          <p:nvPr>
+            <p:ph type="sldImg" idx="2"/>
+          </p:nvPr>
+        </p:nvSpPr>
+        <p:spPr/>
+      </p:sp>
+      <p:sp>
+        <p:nvSpPr>
+          <p:cNvPr id="3" name="Notes Placeholder 2"/>
+          <p:cNvSpPr>
+            <a:spLocks noGrp="1"/>
+          </p:cNvSpPr>
+          <p:nvPr>
+            <p:ph type="body" idx="3" sz="quarter"/>
+          </p:nvPr>
+        </p:nvSpPr>
+        <p:spPr/>
+        <p:txBody>
+          <a:bodyPr/>
+          <a:lstStyle/>
+          <a:p>
+            <a:r>
+              <a:t>Chuyển sang các công trình sau 2018 — đặc biệt là công trình đã hiện thực hóa đúng điều Read đề xuất.</a:t>
+            </a:r>
+          </a:p>
+        </p:txBody>
+      </p:sp>
+      <p:sp>
+        <p:nvSpPr>
+          <p:cNvPr id="4" name="Slide Number Placeholder 3"/>
+          <p:cNvSpPr>
+            <a:spLocks noGrp="1"/>
+          </p:cNvSpPr>
+          <p:nvPr>
+            <p:ph type="sldNum" idx="5" sz="quarter"/>
+          </p:nvPr>
+        </p:nvSpPr>
+        <p:spPr/>
+      </p:sp>
+    </p:spTree>
+  </p:cSld>
+  <p:clrMapOvr>
+    <a:masterClrMapping/>
+  </p:clrMapOvr>
+</p:notes>
+</file>
+
+<file path=ppt/notesSlides/notesSlide22.xml><?xml version="1.0" encoding="utf-8"?>
+<p:notes xmlns:a="http://schemas.openxmlformats.org/drawingml/2006/main" xmlns:p="http://schemas.openxmlformats.org/presentationml/2006/main" xmlns:r="http://schemas.openxmlformats.org/officeDocument/2006/relationships">
+  <p:cSld>
+    <p:spTree>
+      <p:nvGrpSpPr>
+        <p:cNvPr id="1" name=""/>
+        <p:cNvGrpSpPr/>
+        <p:nvPr/>
+      </p:nvGrpSpPr>
+      <p:grpSpPr>
+        <a:xfrm>
+          <a:off x="0" y="0"/>
+          <a:ext cx="0" cy="0"/>
+          <a:chOff x="0" y="0"/>
+          <a:chExt cx="0" cy="0"/>
+        </a:xfrm>
+      </p:grpSpPr>
+      <p:sp>
+        <p:nvSpPr>
+          <p:cNvPr id="2" name="Slide Image Placeholder 1"/>
+          <p:cNvSpPr>
+            <a:spLocks noGrp="1"/>
+          </p:cNvSpPr>
+          <p:nvPr>
+            <p:ph type="sldImg" idx="2"/>
+          </p:nvPr>
+        </p:nvSpPr>
+        <p:spPr/>
+      </p:sp>
+      <p:sp>
+        <p:nvSpPr>
+          <p:cNvPr id="3" name="Notes Placeholder 2"/>
+          <p:cNvSpPr>
+            <a:spLocks noGrp="1"/>
+          </p:cNvSpPr>
+          <p:nvPr>
+            <p:ph type="body" idx="3" sz="quarter"/>
+          </p:nvPr>
+        </p:nvSpPr>
+        <p:spPr/>
+        <p:txBody>
+          <a:bodyPr/>
+          <a:lstStyle/>
+          <a:p>
+            <a:r>
+              <a:t>Bốn hướng tiếp cận chính hiện nay. Chỉ hướng cuối cùng thực sự làm điều Read lập luận: Proceed ước lượng độ trôi giữa dữ liệu huấn luyện gần nhất và mẫu kiểm tra hiện tại, rồi ánh xạ ước lượng đó thành điều chỉnh tham số qua một bộ sinh được học. Read lập luận nhưng không xây dựng; bảy năm sau Proceed xây dựng đúng ánh xạ đó.</a:t>
+            </a:r>
+          </a:p>
+        </p:txBody>
+      </p:sp>
+      <p:sp>
+        <p:nvSpPr>
+          <p:cNvPr id="4" name="Slide Number Placeholder 3"/>
+          <p:cNvSpPr>
+            <a:spLocks noGrp="1"/>
+          </p:cNvSpPr>
+          <p:nvPr>
+            <p:ph type="sldNum" idx="5" sz="quarter"/>
+          </p:nvPr>
+        </p:nvSpPr>
+        <p:spPr/>
+      </p:sp>
+    </p:spTree>
+  </p:cSld>
+  <p:clrMapOvr>
+    <a:masterClrMapping/>
+  </p:clrMapOvr>
+</p:notes>
+</file>
+
+<file path=ppt/notesSlides/notesSlide23.xml><?xml version="1.0" encoding="utf-8"?>
+<p:notes xmlns:a="http://schemas.openxmlformats.org/drawingml/2006/main" xmlns:p="http://schemas.openxmlformats.org/presentationml/2006/main" xmlns:r="http://schemas.openxmlformats.org/officeDocument/2006/relationships">
+  <p:cSld>
+    <p:spTree>
+      <p:nvGrpSpPr>
+        <p:cNvPr id="1" name=""/>
+        <p:cNvGrpSpPr/>
+        <p:nvPr/>
+      </p:nvGrpSpPr>
+      <p:grpSpPr>
+        <a:xfrm>
+          <a:off x="0" y="0"/>
+          <a:ext cx="0" cy="0"/>
+          <a:chOff x="0" y="0"/>
+          <a:chExt cx="0" cy="0"/>
+        </a:xfrm>
+      </p:grpSpPr>
+      <p:sp>
+        <p:nvSpPr>
+          <p:cNvPr id="2" name="Slide Image Placeholder 1"/>
+          <p:cNvSpPr>
+            <a:spLocks noGrp="1"/>
+          </p:cNvSpPr>
+          <p:nvPr>
+            <p:ph type="sldImg" idx="2"/>
+          </p:nvPr>
+        </p:nvSpPr>
+        <p:spPr/>
+      </p:sp>
+      <p:sp>
+        <p:nvSpPr>
+          <p:cNvPr id="3" name="Notes Placeholder 2"/>
+          <p:cNvSpPr>
+            <a:spLocks noGrp="1"/>
+          </p:cNvSpPr>
+          <p:nvPr>
+            <p:ph type="body" idx="3" sz="quarter"/>
+          </p:nvPr>
+        </p:nvSpPr>
+        <p:spPr/>
+        <p:txBody>
+          <a:bodyPr/>
+          <a:lstStyle/>
+          <a:p>
+            <a:r>
+              <a:t>Với mô hình nền tảng, trôi khái niệm không biến mất mà chuyển vị trí. Nếu mô hình được phục vụ qua API thì không thể sửa trọng số, nên phải thích nghi bằng cách học cấu trúc sai số trong ngữ cảnh. Cả hai hướng vẫn là thích nghi liên tục theo nghĩa ở phần 2 — chỉ khác là tham số nằm ở chỗ khác.</a:t>
+            </a:r>
+          </a:p>
+        </p:txBody>
+      </p:sp>
+      <p:sp>
+        <p:nvSpPr>
+          <p:cNvPr id="4" name="Slide Number Placeholder 3"/>
+          <p:cNvSpPr>
+            <a:spLocks noGrp="1"/>
+          </p:cNvSpPr>
+          <p:nvPr>
+            <p:ph type="sldNum" idx="5" sz="quarter"/>
+          </p:nvPr>
+        </p:nvSpPr>
+        <p:spPr/>
+      </p:sp>
+    </p:spTree>
+  </p:cSld>
+  <p:clrMapOvr>
+    <a:masterClrMapping/>
+  </p:clrMapOvr>
+</p:notes>
+</file>
+
+<file path=ppt/notesSlides/notesSlide24.xml><?xml version="1.0" encoding="utf-8"?>
+<p:notes xmlns:a="http://schemas.openxmlformats.org/drawingml/2006/main" xmlns:p="http://schemas.openxmlformats.org/presentationml/2006/main" xmlns:r="http://schemas.openxmlformats.org/officeDocument/2006/relationships">
+  <p:cSld>
+    <p:spTree>
+      <p:nvGrpSpPr>
+        <p:cNvPr id="1" name=""/>
+        <p:cNvGrpSpPr/>
+        <p:nvPr/>
+      </p:nvGrpSpPr>
+      <p:grpSpPr>
+        <a:xfrm>
+          <a:off x="0" y="0"/>
+          <a:ext cx="0" cy="0"/>
+          <a:chOff x="0" y="0"/>
+          <a:chExt cx="0" cy="0"/>
+        </a:xfrm>
+      </p:grpSpPr>
+      <p:sp>
+        <p:nvSpPr>
+          <p:cNvPr id="2" name="Slide Image Placeholder 1"/>
+          <p:cNvSpPr>
+            <a:spLocks noGrp="1"/>
+          </p:cNvSpPr>
+          <p:nvPr>
+            <p:ph type="sldImg" idx="2"/>
+          </p:nvPr>
+        </p:nvSpPr>
+        <p:spPr/>
+      </p:sp>
+      <p:sp>
+        <p:nvSpPr>
+          <p:cNvPr id="3" name="Notes Placeholder 2"/>
+          <p:cNvSpPr>
+            <a:spLocks noGrp="1"/>
+          </p:cNvSpPr>
+          <p:nvPr>
+            <p:ph type="body" idx="3" sz="quarter"/>
+          </p:nvPr>
+        </p:nvSpPr>
+        <p:spPr/>
+        <p:txBody>
+          <a:bodyPr/>
+          <a:lstStyle/>
+          <a:p>
+            <a:r>
+              <a:t>Chuyển sang phần cuối: những gì còn bỏ ngỏ và những thí nghiệm có thể làm ngay.</a:t>
+            </a:r>
+          </a:p>
+        </p:txBody>
+      </p:sp>
+      <p:sp>
+        <p:nvSpPr>
+          <p:cNvPr id="4" name="Slide Number Placeholder 3"/>
+          <p:cNvSpPr>
+            <a:spLocks noGrp="1"/>
+          </p:cNvSpPr>
+          <p:nvPr>
+            <p:ph type="sldNum" idx="5" sz="quarter"/>
+          </p:nvPr>
+        </p:nvSpPr>
+        <p:spPr/>
+      </p:sp>
+    </p:spTree>
+  </p:cSld>
+  <p:clrMapOvr>
+    <a:masterClrMapping/>
+  </p:clrMapOvr>
+</p:notes>
+</file>
+
+<file path=ppt/notesSlides/notesSlide25.xml><?xml version="1.0" encoding="utf-8"?>
+<p:notes xmlns:a="http://schemas.openxmlformats.org/drawingml/2006/main" xmlns:p="http://schemas.openxmlformats.org/presentationml/2006/main" xmlns:r="http://schemas.openxmlformats.org/officeDocument/2006/relationships">
+  <p:cSld>
+    <p:spTree>
+      <p:nvGrpSpPr>
+        <p:cNvPr id="1" name=""/>
+        <p:cNvGrpSpPr/>
+        <p:nvPr/>
+      </p:nvGrpSpPr>
+      <p:grpSpPr>
+        <a:xfrm>
+          <a:off x="0" y="0"/>
+          <a:ext cx="0" cy="0"/>
+          <a:chOff x="0" y="0"/>
+          <a:chExt cx="0" cy="0"/>
+        </a:xfrm>
+      </p:grpSpPr>
+      <p:sp>
+        <p:nvSpPr>
+          <p:cNvPr id="2" name="Slide Image Placeholder 1"/>
+          <p:cNvSpPr>
+            <a:spLocks noGrp="1"/>
+          </p:cNvSpPr>
+          <p:nvPr>
+            <p:ph type="sldImg" idx="2"/>
+          </p:nvPr>
+        </p:nvSpPr>
+        <p:spPr/>
+      </p:sp>
+      <p:sp>
+        <p:nvSpPr>
+          <p:cNvPr id="3" name="Notes Placeholder 2"/>
+          <p:cNvSpPr>
+            <a:spLocks noGrp="1"/>
+          </p:cNvSpPr>
+          <p:nvPr>
+            <p:ph type="body" idx="3" sz="quarter"/>
+          </p:nvPr>
+        </p:nvSpPr>
+        <p:spPr/>
+        <p:txBody>
+          <a:bodyPr/>
+          <a:lstStyle/>
+          <a:p>
+            <a:r>
+              <a:t>Vấn đề mở quan trọng nhất là vấn đề thứ nhất: chưa có tiêu chí nào phân biệt trôi thật với ngữ cảnh bị bỏ sót. Hai cách giải thích đòi hỏi hai cách xử lý ngược nhau, mà không có công trình nào chỉ ra đang ở trường hợp nào.</a:t>
+            </a:r>
+          </a:p>
+        </p:txBody>
+      </p:sp>
+      <p:sp>
+        <p:nvSpPr>
+          <p:cNvPr id="4" name="Slide Number Placeholder 3"/>
+          <p:cNvSpPr>
+            <a:spLocks noGrp="1"/>
+          </p:cNvSpPr>
+          <p:nvPr>
+            <p:ph type="sldNum" idx="5" sz="quarter"/>
+          </p:nvPr>
+        </p:nvSpPr>
+        <p:spPr/>
+      </p:sp>
+    </p:spTree>
+  </p:cSld>
+  <p:clrMapOvr>
+    <a:masterClrMapping/>
+  </p:clrMapOvr>
+</p:notes>
+</file>
+
+<file path=ppt/notesSlides/notesSlide26.xml><?xml version="1.0" encoding="utf-8"?>
+<p:notes xmlns:a="http://schemas.openxmlformats.org/drawingml/2006/main" xmlns:p="http://schemas.openxmlformats.org/presentationml/2006/main" xmlns:r="http://schemas.openxmlformats.org/officeDocument/2006/relationships">
+  <p:cSld>
+    <p:spTree>
+      <p:nvGrpSpPr>
+        <p:cNvPr id="1" name=""/>
+        <p:cNvGrpSpPr/>
+        <p:nvPr/>
+      </p:nvGrpSpPr>
+      <p:grpSpPr>
+        <a:xfrm>
+          <a:off x="0" y="0"/>
+          <a:ext cx="0" cy="0"/>
+          <a:chOff x="0" y="0"/>
+          <a:chExt cx="0" cy="0"/>
+        </a:xfrm>
+      </p:grpSpPr>
+      <p:sp>
+        <p:nvSpPr>
+          <p:cNvPr id="2" name="Slide Image Placeholder 1"/>
+          <p:cNvSpPr>
+            <a:spLocks noGrp="1"/>
+          </p:cNvSpPr>
+          <p:nvPr>
+            <p:ph type="sldImg" idx="2"/>
+          </p:nvPr>
+        </p:nvSpPr>
+        <p:spPr/>
+      </p:sp>
+      <p:sp>
+        <p:nvSpPr>
+          <p:cNvPr id="3" name="Notes Placeholder 2"/>
+          <p:cNvSpPr>
+            <a:spLocks noGrp="1"/>
+          </p:cNvSpPr>
+          <p:nvPr>
+            <p:ph type="body" idx="3" sz="quarter"/>
+          </p:nvPr>
+        </p:nvSpPr>
+        <p:spPr/>
+        <p:txBody>
+          <a:bodyPr/>
+          <a:lstStyle/>
+          <a:p>
+            <a:r>
+              <a:t>Bốn thí nghiệm, mỗi thí nghiệm nêu kèm một dự đoán có thể bị bác bỏ — đó là điều phân biệt đề xuất với mong muốn. Nếu trình bày thiếu thời gian, hãy ưu tiên thí nghiệm B: nó trả lời trực tiếp vấn đề mở thứ nhất, và dữ liệu Electricity đã sẵn có ngữ cảnh chu kỳ quan sát được.</a:t>
+            </a:r>
+          </a:p>
+        </p:txBody>
+      </p:sp>
+      <p:sp>
+        <p:nvSpPr>
+          <p:cNvPr id="4" name="Slide Number Placeholder 3"/>
+          <p:cNvSpPr>
+            <a:spLocks noGrp="1"/>
+          </p:cNvSpPr>
+          <p:nvPr>
+            <p:ph type="sldNum" idx="5" sz="quarter"/>
+          </p:nvPr>
+        </p:nvSpPr>
+        <p:spPr/>
+      </p:sp>
+    </p:spTree>
+  </p:cSld>
+  <p:clrMapOvr>
+    <a:masterClrMapping/>
+  </p:clrMapOvr>
+</p:notes>
+</file>
+
+<file path=ppt/notesSlides/notesSlide27.xml><?xml version="1.0" encoding="utf-8"?>
+<p:notes xmlns:a="http://schemas.openxmlformats.org/drawingml/2006/main" xmlns:p="http://schemas.openxmlformats.org/presentationml/2006/main" xmlns:r="http://schemas.openxmlformats.org/officeDocument/2006/relationships">
+  <p:cSld>
+    <p:spTree>
+      <p:nvGrpSpPr>
+        <p:cNvPr id="1" name=""/>
+        <p:cNvGrpSpPr/>
+        <p:nvPr/>
+      </p:nvGrpSpPr>
+      <p:grpSpPr>
+        <a:xfrm>
+          <a:off x="0" y="0"/>
+          <a:ext cx="0" cy="0"/>
+          <a:chOff x="0" y="0"/>
+          <a:chExt cx="0" cy="0"/>
+        </a:xfrm>
+      </p:grpSpPr>
+      <p:sp>
+        <p:nvSpPr>
+          <p:cNvPr id="2" name="Slide Image Placeholder 1"/>
+          <p:cNvSpPr>
+            <a:spLocks noGrp="1"/>
+          </p:cNvSpPr>
+          <p:nvPr>
+            <p:ph type="sldImg" idx="2"/>
+          </p:nvPr>
+        </p:nvSpPr>
+        <p:spPr/>
+      </p:sp>
+      <p:sp>
+        <p:nvSpPr>
+          <p:cNvPr id="3" name="Notes Placeholder 2"/>
+          <p:cNvSpPr>
+            <a:spLocks noGrp="1"/>
+          </p:cNvSpPr>
+          <p:nvPr>
+            <p:ph type="body" idx="3" sz="quarter"/>
+          </p:nvPr>
+        </p:nvSpPr>
+        <p:spPr/>
+        <p:txBody>
+          <a:bodyPr/>
+          <a:lstStyle/>
+          <a:p>
+            <a:r>
+              <a:t>Tóm tắt sáu ý. Nếu còn thời gian, nên kết thúc bằng câu hỏi mở ở slide trước thay vì bằng slide tóm tắt — kết ở một câu hỏi mình có điều kiện trả lời sẽ mở ra trao đổi.</a:t>
+            </a:r>
+          </a:p>
+        </p:txBody>
+      </p:sp>
+      <p:sp>
+        <p:nvSpPr>
+          <p:cNvPr id="4" name="Slide Number Placeholder 3"/>
+          <p:cNvSpPr>
+            <a:spLocks noGrp="1"/>
+          </p:cNvSpPr>
+          <p:nvPr>
+            <p:ph type="sldNum" idx="5" sz="quarter"/>
+          </p:nvPr>
+        </p:nvSpPr>
+        <p:spPr/>
+      </p:sp>
+    </p:spTree>
+  </p:cSld>
+  <p:clrMapOvr>
+    <a:masterClrMapping/>
+  </p:clrMapOvr>
+</p:notes>
+</file>
+
+<file path=ppt/notesSlides/notesSlide3.xml><?xml version="1.0" encoding="utf-8"?>
+<p:notes xmlns:a="http://schemas.openxmlformats.org/drawingml/2006/main" xmlns:p="http://schemas.openxmlformats.org/presentationml/2006/main" xmlns:r="http://schemas.openxmlformats.org/officeDocument/2006/relationships">
+  <p:cSld>
+    <p:spTree>
+      <p:nvGrpSpPr>
+        <p:cNvPr id="1" name=""/>
+        <p:cNvGrpSpPr/>
+        <p:nvPr/>
+      </p:nvGrpSpPr>
+      <p:grpSpPr>
+        <a:xfrm>
+          <a:off x="0" y="0"/>
+          <a:ext cx="0" cy="0"/>
+          <a:chOff x="0" y="0"/>
+          <a:chExt cx="0" cy="0"/>
+        </a:xfrm>
+      </p:grpSpPr>
+      <p:sp>
+        <p:nvSpPr>
+          <p:cNvPr id="2" name="Slide Image Placeholder 1"/>
+          <p:cNvSpPr>
+            <a:spLocks noGrp="1"/>
+          </p:cNvSpPr>
+          <p:nvPr>
+            <p:ph type="sldImg" idx="2"/>
+          </p:nvPr>
+        </p:nvSpPr>
+        <p:spPr/>
+      </p:sp>
+      <p:sp>
+        <p:nvSpPr>
+          <p:cNvPr id="3" name="Notes Placeholder 2"/>
+          <p:cNvSpPr>
+            <a:spLocks noGrp="1"/>
+          </p:cNvSpPr>
+          <p:nvPr>
+            <p:ph type="body" idx="3" sz="quarter"/>
+          </p:nvPr>
+        </p:nvSpPr>
+        <p:spPr/>
+        <p:txBody>
+          <a:bodyPr/>
+          <a:lstStyle/>
+          <a:p>
+            <a:r>
+              <a:t>Chuyển sang phần định nghĩa bài toán. Ý chính: phân phối mục tiêu không cố định mà thay đổi theo thời gian.</a:t>
+            </a:r>
+          </a:p>
+        </p:txBody>
+      </p:sp>
+      <p:sp>
+        <p:nvSpPr>
+          <p:cNvPr id="4" name="Slide Number Placeholder 3"/>
+          <p:cNvSpPr>
+            <a:spLocks noGrp="1"/>
+          </p:cNvSpPr>
+          <p:nvPr>
+            <p:ph type="sldNum" idx="5" sz="quarter"/>
+          </p:nvPr>
+        </p:nvSpPr>
+        <p:spPr/>
+      </p:sp>
+    </p:spTree>
+  </p:cSld>
+  <p:clrMapOvr>
+    <a:masterClrMapping/>
+  </p:clrMapOvr>
+</p:notes>
+</file>
+
+<file path=ppt/notesSlides/notesSlide4.xml><?xml version="1.0" encoding="utf-8"?>
+<p:notes xmlns:a="http://schemas.openxmlformats.org/drawingml/2006/main" xmlns:p="http://schemas.openxmlformats.org/presentationml/2006/main" xmlns:r="http://schemas.openxmlformats.org/officeDocument/2006/relationships">
+  <p:cSld>
+    <p:spTree>
+      <p:nvGrpSpPr>
+        <p:cNvPr id="1" name=""/>
+        <p:cNvGrpSpPr/>
+        <p:nvPr/>
+      </p:nvGrpSpPr>
+      <p:grpSpPr>
+        <a:xfrm>
+          <a:off x="0" y="0"/>
+          <a:ext cx="0" cy="0"/>
+          <a:chOff x="0" y="0"/>
+          <a:chExt cx="0" cy="0"/>
+        </a:xfrm>
+      </p:grpSpPr>
+      <p:sp>
+        <p:nvSpPr>
+          <p:cNvPr id="2" name="Slide Image Placeholder 1"/>
+          <p:cNvSpPr>
+            <a:spLocks noGrp="1"/>
+          </p:cNvSpPr>
+          <p:nvPr>
+            <p:ph type="sldImg" idx="2"/>
+          </p:nvPr>
+        </p:nvSpPr>
+        <p:spPr/>
+      </p:sp>
+      <p:sp>
+        <p:nvSpPr>
+          <p:cNvPr id="3" name="Notes Placeholder 2"/>
+          <p:cNvSpPr>
+            <a:spLocks noGrp="1"/>
+          </p:cNvSpPr>
+          <p:nvPr>
+            <p:ph type="body" idx="3" sz="quarter"/>
+          </p:nvPr>
+        </p:nvSpPr>
+        <p:spPr/>
+        <p:txBody>
+          <a:bodyPr/>
+          <a:lstStyle/>
+          <a:p>
+            <a:r>
+              <a:t>Học máy truyền thống giả định phân phối đồng thời p(x, y) cố định — mô hình khớp với mẫu huấn luyện thì cũng khớp với dữ liệu triển khai. Luồng dữ liệu phá vỡ giả định đó. Nhấn mạnh: mô hình không chỉ 'cũ' mà là 'sai đặc tả', vì nó ước lượng một mục tiêu không còn tồn tại. Hai hệ quả quan trọng: suy giảm diễn ra âm thầm (không có lỗi nào được báo), và không thể huấn luyện lại từ đầu vì luồng là vô hạn và nhãn đến muộn.</a:t>
+            </a:r>
+          </a:p>
+        </p:txBody>
+      </p:sp>
+      <p:sp>
+        <p:nvSpPr>
+          <p:cNvPr id="4" name="Slide Number Placeholder 3"/>
+          <p:cNvSpPr>
+            <a:spLocks noGrp="1"/>
+          </p:cNvSpPr>
+          <p:nvPr>
+            <p:ph type="sldNum" idx="5" sz="quarter"/>
+          </p:nvPr>
+        </p:nvSpPr>
+        <p:spPr/>
+      </p:sp>
+    </p:spTree>
+  </p:cSld>
+  <p:clrMapOvr>
+    <a:masterClrMapping/>
+  </p:clrMapOvr>
+</p:notes>
+</file>
+
+<file path=ppt/notesSlides/notesSlide5.xml><?xml version="1.0" encoding="utf-8"?>
+<p:notes xmlns:a="http://schemas.openxmlformats.org/drawingml/2006/main" xmlns:p="http://schemas.openxmlformats.org/presentationml/2006/main" xmlns:r="http://schemas.openxmlformats.org/officeDocument/2006/relationships">
+  <p:cSld>
+    <p:spTree>
+      <p:nvGrpSpPr>
+        <p:cNvPr id="1" name=""/>
+        <p:cNvGrpSpPr/>
+        <p:nvPr/>
+      </p:nvGrpSpPr>
+      <p:grpSpPr>
+        <a:xfrm>
+          <a:off x="0" y="0"/>
+          <a:ext cx="0" cy="0"/>
+          <a:chOff x="0" y="0"/>
+          <a:chExt cx="0" cy="0"/>
+        </a:xfrm>
+      </p:grpSpPr>
+      <p:sp>
+        <p:nvSpPr>
+          <p:cNvPr id="2" name="Slide Image Placeholder 1"/>
+          <p:cNvSpPr>
+            <a:spLocks noGrp="1"/>
+          </p:cNvSpPr>
+          <p:nvPr>
+            <p:ph type="sldImg" idx="2"/>
+          </p:nvPr>
+        </p:nvSpPr>
+        <p:spPr/>
+      </p:sp>
+      <p:sp>
+        <p:nvSpPr>
+          <p:cNvPr id="3" name="Notes Placeholder 2"/>
+          <p:cNvSpPr>
+            <a:spLocks noGrp="1"/>
+          </p:cNvSpPr>
+          <p:nvPr>
+            <p:ph type="body" idx="3" sz="quarter"/>
+          </p:nvPr>
+        </p:nvSpPr>
+        <p:spPr/>
+        <p:txBody>
+          <a:bodyPr/>
+          <a:lstStyle/>
+          <a:p>
+            <a:r>
+              <a:t>Bốn dạng trôi theo phân loại kinh điển. Cột thứ ba là cột quan trọng nhất cho việc thiết kế phương pháp: chỉ trôi tăng dần (incremental) mới tạo ra các trạng thái trung gian là khái niệm thật, tức là có một quỹ đạo để bám theo. Trôi dần dần (gradual) chỉ là sự pha trộn giữa hai khái niệm cố định.</a:t>
+            </a:r>
+          </a:p>
+        </p:txBody>
+      </p:sp>
+      <p:sp>
+        <p:nvSpPr>
+          <p:cNvPr id="4" name="Slide Number Placeholder 3"/>
+          <p:cNvSpPr>
+            <a:spLocks noGrp="1"/>
+          </p:cNvSpPr>
+          <p:nvPr>
+            <p:ph type="sldNum" idx="5" sz="quarter"/>
+          </p:nvPr>
+        </p:nvSpPr>
+        <p:spPr/>
+      </p:sp>
+    </p:spTree>
+  </p:cSld>
+  <p:clrMapOvr>
+    <a:masterClrMapping/>
+  </p:clrMapOvr>
+</p:notes>
+</file>
+
+<file path=ppt/notesSlides/notesSlide6.xml><?xml version="1.0" encoding="utf-8"?>
+<p:notes xmlns:a="http://schemas.openxmlformats.org/drawingml/2006/main" xmlns:p="http://schemas.openxmlformats.org/presentationml/2006/main" xmlns:r="http://schemas.openxmlformats.org/officeDocument/2006/relationships">
+  <p:cSld>
+    <p:spTree>
+      <p:nvGrpSpPr>
+        <p:cNvPr id="1" name=""/>
+        <p:cNvGrpSpPr/>
+        <p:nvPr/>
+      </p:nvGrpSpPr>
+      <p:grpSpPr>
+        <a:xfrm>
+          <a:off x="0" y="0"/>
+          <a:ext cx="0" cy="0"/>
+          <a:chOff x="0" y="0"/>
+          <a:chExt cx="0" cy="0"/>
+        </a:xfrm>
+      </p:grpSpPr>
+      <p:sp>
+        <p:nvSpPr>
+          <p:cNvPr id="2" name="Slide Image Placeholder 1"/>
+          <p:cNvSpPr>
+            <a:spLocks noGrp="1"/>
+          </p:cNvSpPr>
+          <p:nvPr>
+            <p:ph type="sldImg" idx="2"/>
+          </p:nvPr>
+        </p:nvSpPr>
+        <p:spPr/>
+      </p:sp>
+      <p:sp>
+        <p:nvSpPr>
+          <p:cNvPr id="3" name="Notes Placeholder 2"/>
+          <p:cNvSpPr>
+            <a:spLocks noGrp="1"/>
+          </p:cNvSpPr>
+          <p:nvPr>
+            <p:ph type="body" idx="3" sz="quarter"/>
+          </p:nvPr>
+        </p:nvSpPr>
+        <p:spPr/>
+        <p:txBody>
+          <a:bodyPr/>
+          <a:lstStyle/>
+          <a:p>
+            <a:r>
+              <a:t>Phân tích phân phối đồng thời thành hai thừa số cho thấy có đúng hai chỗ có thể thay đổi. Chỉ thay đổi ở phân phối có điều kiện mới làm dịch chuyển biên quyết định, nên chỉ nó mới nhất thiết làm giảm độ chính xác. Điểm đáng lưu ý: phần lớn công trình gần đây về dự báo chuỗi thời gian lại xử lý thừa số thứ nhất.</a:t>
+            </a:r>
+          </a:p>
+        </p:txBody>
+      </p:sp>
+      <p:sp>
+        <p:nvSpPr>
+          <p:cNvPr id="4" name="Slide Number Placeholder 3"/>
+          <p:cNvSpPr>
+            <a:spLocks noGrp="1"/>
+          </p:cNvSpPr>
+          <p:nvPr>
+            <p:ph type="sldNum" idx="5" sz="quarter"/>
+          </p:nvPr>
+        </p:nvSpPr>
+        <p:spPr/>
+      </p:sp>
+    </p:spTree>
+  </p:cSld>
+  <p:clrMapOvr>
+    <a:masterClrMapping/>
+  </p:clrMapOvr>
+</p:notes>
+</file>
+
+<file path=ppt/notesSlides/notesSlide7.xml><?xml version="1.0" encoding="utf-8"?>
+<p:notes xmlns:a="http://schemas.openxmlformats.org/drawingml/2006/main" xmlns:p="http://schemas.openxmlformats.org/presentationml/2006/main" xmlns:r="http://schemas.openxmlformats.org/officeDocument/2006/relationships">
+  <p:cSld>
+    <p:spTree>
+      <p:nvGrpSpPr>
+        <p:cNvPr id="1" name=""/>
+        <p:cNvGrpSpPr/>
+        <p:nvPr/>
+      </p:nvGrpSpPr>
+      <p:grpSpPr>
+        <a:xfrm>
+          <a:off x="0" y="0"/>
+          <a:ext cx="0" cy="0"/>
+          <a:chOff x="0" y="0"/>
+          <a:chExt cx="0" cy="0"/>
+        </a:xfrm>
+      </p:grpSpPr>
+      <p:sp>
+        <p:nvSpPr>
+          <p:cNvPr id="2" name="Slide Image Placeholder 1"/>
+          <p:cNvSpPr>
+            <a:spLocks noGrp="1"/>
+          </p:cNvSpPr>
+          <p:nvPr>
+            <p:ph type="sldImg" idx="2"/>
+          </p:nvPr>
+        </p:nvSpPr>
+        <p:spPr/>
+      </p:sp>
+      <p:sp>
+        <p:nvSpPr>
+          <p:cNvPr id="3" name="Notes Placeholder 2"/>
+          <p:cNvSpPr>
+            <a:spLocks noGrp="1"/>
+          </p:cNvSpPr>
+          <p:nvPr>
+            <p:ph type="body" idx="3" sz="quarter"/>
+          </p:nvPr>
+        </p:nvSpPr>
+        <p:spPr/>
+        <p:txBody>
+          <a:bodyPr/>
+          <a:lstStyle/>
+          <a:p>
+            <a:r>
+              <a:t>Thuật ngữ 'context drift' được dùng cho ba hiện tượng khác nhau. Nghĩa thứ nhất và thứ hai biểu hiện giống hệt nhau — sai số tăng theo thời gian — nhưng đòi hỏi cách xử lý ngược nhau. Nếu một ngữ cảnh có chu kỳ giải thích được sự thay đổi thì việc thích nghi là lãng phí, vì chu kỳ sau sẽ đảo ngược nó.</a:t>
+            </a:r>
+          </a:p>
+        </p:txBody>
+      </p:sp>
+      <p:sp>
+        <p:nvSpPr>
+          <p:cNvPr id="4" name="Slide Number Placeholder 3"/>
+          <p:cNvSpPr>
+            <a:spLocks noGrp="1"/>
+          </p:cNvSpPr>
+          <p:nvPr>
+            <p:ph type="sldNum" idx="5" sz="quarter"/>
+          </p:nvPr>
+        </p:nvSpPr>
+        <p:spPr/>
+      </p:sp>
+    </p:spTree>
+  </p:cSld>
+  <p:clrMapOvr>
+    <a:masterClrMapping/>
+  </p:clrMapOvr>
+</p:notes>
+</file>
+
+<file path=ppt/notesSlides/notesSlide8.xml><?xml version="1.0" encoding="utf-8"?>
+<p:notes xmlns:a="http://schemas.openxmlformats.org/drawingml/2006/main" xmlns:p="http://schemas.openxmlformats.org/presentationml/2006/main" xmlns:r="http://schemas.openxmlformats.org/officeDocument/2006/relationships">
+  <p:cSld>
+    <p:spTree>
+      <p:nvGrpSpPr>
+        <p:cNvPr id="1" name=""/>
+        <p:cNvGrpSpPr/>
+        <p:nvPr/>
+      </p:nvGrpSpPr>
+      <p:grpSpPr>
+        <a:xfrm>
+          <a:off x="0" y="0"/>
+          <a:ext cx="0" cy="0"/>
+          <a:chOff x="0" y="0"/>
+          <a:chExt cx="0" cy="0"/>
+        </a:xfrm>
+      </p:grpSpPr>
+      <p:sp>
+        <p:nvSpPr>
+          <p:cNvPr id="2" name="Slide Image Placeholder 1"/>
+          <p:cNvSpPr>
+            <a:spLocks noGrp="1"/>
+          </p:cNvSpPr>
+          <p:nvPr>
+            <p:ph type="sldImg" idx="2"/>
+          </p:nvPr>
+        </p:nvSpPr>
+        <p:spPr/>
+      </p:sp>
+      <p:sp>
+        <p:nvSpPr>
+          <p:cNvPr id="3" name="Notes Placeholder 2"/>
+          <p:cNvSpPr>
+            <a:spLocks noGrp="1"/>
+          </p:cNvSpPr>
+          <p:nvPr>
+            <p:ph type="body" idx="3" sz="quarter"/>
+          </p:nvPr>
+        </p:nvSpPr>
+        <p:spPr/>
+        <p:txBody>
+          <a:bodyPr/>
+          <a:lstStyle/>
+          <a:p>
+            <a:r>
+              <a:t>Chuyển sang phần phương pháp: phát hiện trôi, và thích nghi sau khi trôi đã xảy ra.</a:t>
+            </a:r>
+          </a:p>
+        </p:txBody>
+      </p:sp>
+      <p:sp>
+        <p:nvSpPr>
+          <p:cNvPr id="4" name="Slide Number Placeholder 3"/>
+          <p:cNvSpPr>
+            <a:spLocks noGrp="1"/>
+          </p:cNvSpPr>
+          <p:nvPr>
+            <p:ph type="sldNum" idx="5" sz="quarter"/>
+          </p:nvPr>
+        </p:nvSpPr>
+        <p:spPr/>
+      </p:sp>
+    </p:spTree>
+  </p:cSld>
+  <p:clrMapOvr>
+    <a:masterClrMapping/>
+  </p:clrMapOvr>
+</p:notes>
+</file>
+
+<file path=ppt/notesSlides/notesSlide9.xml><?xml version="1.0" encoding="utf-8"?>
+<p:notes xmlns:a="http://schemas.openxmlformats.org/drawingml/2006/main" xmlns:p="http://schemas.openxmlformats.org/presentationml/2006/main" xmlns:r="http://schemas.openxmlformats.org/officeDocument/2006/relationships">
+  <p:cSld>
+    <p:spTree>
+      <p:nvGrpSpPr>
+        <p:cNvPr id="1" name=""/>
+        <p:cNvGrpSpPr/>
+        <p:nvPr/>
+      </p:nvGrpSpPr>
+      <p:grpSpPr>
+        <a:xfrm>
+          <a:off x="0" y="0"/>
+          <a:ext cx="0" cy="0"/>
+          <a:chOff x="0" y="0"/>
+          <a:chExt cx="0" cy="0"/>
+        </a:xfrm>
+      </p:grpSpPr>
+      <p:sp>
+        <p:nvSpPr>
+          <p:cNvPr id="2" name="Slide Image Placeholder 1"/>
+          <p:cNvSpPr>
+            <a:spLocks noGrp="1"/>
+          </p:cNvSpPr>
+          <p:nvPr>
+            <p:ph type="sldImg" idx="2"/>
+          </p:nvPr>
+        </p:nvSpPr>
+        <p:spPr/>
+      </p:sp>
+      <p:sp>
+        <p:nvSpPr>
+          <p:cNvPr id="3" name="Notes Placeholder 2"/>
+          <p:cNvSpPr>
+            <a:spLocks noGrp="1"/>
+          </p:cNvSpPr>
+          <p:nvPr>
+            <p:ph type="body" idx="3" sz="quarter"/>
+          </p:nvPr>
+        </p:nvSpPr>
+        <p:spPr/>
+        <p:txBody>
+          <a:bodyPr/>
+          <a:lstStyle/>
+          <a:p>
+            <a:r>
+              <a:t>Các bộ phát hiện không quan sát dữ liệu mà quan sát chuỗi sai số. ADWIN là lựa chọn mặc định trên thực tế vì có cận sai dương rõ ràng và bộ nhớ chỉ O(log W). Điểm cần nhấn: một bộ phát hiện trôi thực chất đang hỏi 'chuỗi thời gian này có thay đổi không', nên bản thân nó đã là một phương pháp chuỗi thời gian.</a:t>
+            </a:r>
+          </a:p>
+        </p:txBody>
+      </p:sp>
+      <p:sp>
+        <p:nvSpPr>
+          <p:cNvPr id="4" name="Slide Number Placeholder 3"/>
+          <p:cNvSpPr>
+            <a:spLocks noGrp="1"/>
+          </p:cNvSpPr>
+          <p:nvPr>
+            <p:ph type="sldNum" idx="5" sz="quarter"/>
+          </p:nvPr>
+        </p:nvSpPr>
+        <p:spPr/>
+      </p:sp>
+    </p:spTree>
+  </p:cSld>
+  <p:clrMapOvr>
+    <a:masterClrMapping/>
+  </p:clrMapOvr>
+</p:notes>
 </file>
 
 <file path=ppt/slideLayouts/slideLayout1.xml><?xml version="1.0" encoding="utf-8"?>
@@ -3817,7 +6057,7 @@
                 </a:solidFill>
                 <a:latin typeface="Calibri"/>
               </a:rPr>
-              <a:t>transfer to real data is unestablished</a:t>
+              <a:t>Transfer to real data is unestablished</a:t>
             </a:r>
           </a:p>
           <a:p>
@@ -3849,7 +6089,7 @@
                 </a:solidFill>
                 <a:latin typeface="Calibri"/>
               </a:rPr>
-              <a:t>detector quality with model adaptability</a:t>
+              <a:t>Detector quality with model adaptability</a:t>
             </a:r>
           </a:p>
           <a:p>
@@ -3881,7 +6121,7 @@
                 </a:solidFill>
                 <a:latin typeface="Calibri"/>
               </a:rPr>
-              <a:t>fraud labels arrive after 30–180 days</a:t>
+              <a:t>Fraud labels arrive after 30–180 days</a:t>
             </a:r>
           </a:p>
         </p:txBody>
@@ -3975,11 +6215,31 @@
                           </a:solidFill>
                           <a:latin typeface="Calibri"/>
                         </a:rPr>
-                        <a:t>mechanism</a:t>
+                        <a:t>Mechanism</a:t>
                       </a:r>
                     </a:p>
                   </a:txBody>
                   <a:tcPr marL="73152" marR="73152" marT="27432" marB="27432">
+                    <a:lnL w="9525" cap="flat" cmpd="sng" algn="ctr">
+                      <a:solidFill>
+                        <a:srgbClr val="000000"/>
+                      </a:solidFill>
+                    </a:lnL>
+                    <a:lnR w="9525" cap="flat" cmpd="sng" algn="ctr">
+                      <a:solidFill>
+                        <a:srgbClr val="000000"/>
+                      </a:solidFill>
+                    </a:lnR>
+                    <a:lnT w="9525" cap="flat" cmpd="sng" algn="ctr">
+                      <a:solidFill>
+                        <a:srgbClr val="000000"/>
+                      </a:solidFill>
+                    </a:lnT>
+                    <a:lnB w="9525" cap="flat" cmpd="sng" algn="ctr">
+                      <a:solidFill>
+                        <a:srgbClr val="000000"/>
+                      </a:solidFill>
+                    </a:lnB>
                     <a:solidFill>
                       <a:srgbClr val="FFFFFF"/>
                     </a:solidFill>
@@ -3998,11 +6258,31 @@
                           </a:solidFill>
                           <a:latin typeface="Calibri"/>
                         </a:rPr>
-                        <a:t>representation</a:t>
+                        <a:t>Representation</a:t>
                       </a:r>
                     </a:p>
                   </a:txBody>
                   <a:tcPr marL="73152" marR="73152" marT="27432" marB="27432">
+                    <a:lnL w="9525" cap="flat" cmpd="sng" algn="ctr">
+                      <a:solidFill>
+                        <a:srgbClr val="000000"/>
+                      </a:solidFill>
+                    </a:lnL>
+                    <a:lnR w="9525" cap="flat" cmpd="sng" algn="ctr">
+                      <a:solidFill>
+                        <a:srgbClr val="000000"/>
+                      </a:solidFill>
+                    </a:lnR>
+                    <a:lnT w="9525" cap="flat" cmpd="sng" algn="ctr">
+                      <a:solidFill>
+                        <a:srgbClr val="000000"/>
+                      </a:solidFill>
+                    </a:lnT>
+                    <a:lnB w="9525" cap="flat" cmpd="sng" algn="ctr">
+                      <a:solidFill>
+                        <a:srgbClr val="000000"/>
+                      </a:solidFill>
+                    </a:lnB>
                     <a:solidFill>
                       <a:srgbClr val="FFFFFF"/>
                     </a:solidFill>
@@ -4021,11 +6301,31 @@
                           </a:solidFill>
                           <a:latin typeface="Calibri"/>
                         </a:rPr>
-                        <a:t>admits Δθ?</a:t>
+                        <a:t>Admits Δθ?</a:t>
                       </a:r>
                     </a:p>
                   </a:txBody>
                   <a:tcPr marL="73152" marR="73152" marT="27432" marB="27432">
+                    <a:lnL w="9525" cap="flat" cmpd="sng" algn="ctr">
+                      <a:solidFill>
+                        <a:srgbClr val="000000"/>
+                      </a:solidFill>
+                    </a:lnL>
+                    <a:lnR w="9525" cap="flat" cmpd="sng" algn="ctr">
+                      <a:solidFill>
+                        <a:srgbClr val="000000"/>
+                      </a:solidFill>
+                    </a:lnR>
+                    <a:lnT w="9525" cap="flat" cmpd="sng" algn="ctr">
+                      <a:solidFill>
+                        <a:srgbClr val="000000"/>
+                      </a:solidFill>
+                    </a:lnT>
+                    <a:lnB w="9525" cap="flat" cmpd="sng" algn="ctr">
+                      <a:solidFill>
+                        <a:srgbClr val="000000"/>
+                      </a:solidFill>
+                    </a:lnB>
                     <a:solidFill>
                       <a:srgbClr val="FFFFFF"/>
                     </a:solidFill>
@@ -4051,6 +6351,26 @@
                     </a:p>
                   </a:txBody>
                   <a:tcPr marL="73152" marR="73152" marT="27432" marB="27432">
+                    <a:lnL w="9525" cap="flat" cmpd="sng" algn="ctr">
+                      <a:solidFill>
+                        <a:srgbClr val="000000"/>
+                      </a:solidFill>
+                    </a:lnL>
+                    <a:lnR w="9525" cap="flat" cmpd="sng" algn="ctr">
+                      <a:solidFill>
+                        <a:srgbClr val="000000"/>
+                      </a:solidFill>
+                    </a:lnR>
+                    <a:lnT w="9525" cap="flat" cmpd="sng" algn="ctr">
+                      <a:solidFill>
+                        <a:srgbClr val="000000"/>
+                      </a:solidFill>
+                    </a:lnT>
+                    <a:lnB w="9525" cap="flat" cmpd="sng" algn="ctr">
+                      <a:solidFill>
+                        <a:srgbClr val="000000"/>
+                      </a:solidFill>
+                    </a:lnB>
                     <a:solidFill>
                       <a:srgbClr val="FFFFFF"/>
                     </a:solidFill>
@@ -4069,11 +6389,31 @@
                           </a:solidFill>
                           <a:latin typeface="Calibri"/>
                         </a:rPr>
-                        <a:t>stored data</a:t>
+                        <a:t>Stored data</a:t>
                       </a:r>
                     </a:p>
                   </a:txBody>
                   <a:tcPr marL="73152" marR="73152" marT="27432" marB="27432">
+                    <a:lnL w="9525" cap="flat" cmpd="sng" algn="ctr">
+                      <a:solidFill>
+                        <a:srgbClr val="000000"/>
+                      </a:solidFill>
+                    </a:lnL>
+                    <a:lnR w="9525" cap="flat" cmpd="sng" algn="ctr">
+                      <a:solidFill>
+                        <a:srgbClr val="000000"/>
+                      </a:solidFill>
+                    </a:lnR>
+                    <a:lnT w="9525" cap="flat" cmpd="sng" algn="ctr">
+                      <a:solidFill>
+                        <a:srgbClr val="000000"/>
+                      </a:solidFill>
+                    </a:lnT>
+                    <a:lnB w="9525" cap="flat" cmpd="sng" algn="ctr">
+                      <a:solidFill>
+                        <a:srgbClr val="000000"/>
+                      </a:solidFill>
+                    </a:lnB>
                     <a:solidFill>
                       <a:srgbClr val="FFFFFF"/>
                     </a:solidFill>
@@ -4092,11 +6432,31 @@
                           </a:solidFill>
                           <a:latin typeface="Calibri"/>
                         </a:rPr>
-                        <a:t>no</a:t>
+                        <a:t>No</a:t>
                       </a:r>
                     </a:p>
                   </a:txBody>
                   <a:tcPr marL="73152" marR="73152" marT="27432" marB="27432">
+                    <a:lnL w="9525" cap="flat" cmpd="sng" algn="ctr">
+                      <a:solidFill>
+                        <a:srgbClr val="000000"/>
+                      </a:solidFill>
+                    </a:lnL>
+                    <a:lnR w="9525" cap="flat" cmpd="sng" algn="ctr">
+                      <a:solidFill>
+                        <a:srgbClr val="000000"/>
+                      </a:solidFill>
+                    </a:lnR>
+                    <a:lnT w="9525" cap="flat" cmpd="sng" algn="ctr">
+                      <a:solidFill>
+                        <a:srgbClr val="000000"/>
+                      </a:solidFill>
+                    </a:lnT>
+                    <a:lnB w="9525" cap="flat" cmpd="sng" algn="ctr">
+                      <a:solidFill>
+                        <a:srgbClr val="000000"/>
+                      </a:solidFill>
+                    </a:lnB>
                     <a:solidFill>
                       <a:srgbClr val="FFFFFF"/>
                     </a:solidFill>
@@ -4122,6 +6482,26 @@
                     </a:p>
                   </a:txBody>
                   <a:tcPr marL="73152" marR="73152" marT="27432" marB="27432">
+                    <a:lnL w="9525" cap="flat" cmpd="sng" algn="ctr">
+                      <a:solidFill>
+                        <a:srgbClr val="000000"/>
+                      </a:solidFill>
+                    </a:lnL>
+                    <a:lnR w="9525" cap="flat" cmpd="sng" algn="ctr">
+                      <a:solidFill>
+                        <a:srgbClr val="000000"/>
+                      </a:solidFill>
+                    </a:lnR>
+                    <a:lnT w="9525" cap="flat" cmpd="sng" algn="ctr">
+                      <a:solidFill>
+                        <a:srgbClr val="000000"/>
+                      </a:solidFill>
+                    </a:lnT>
+                    <a:lnB w="9525" cap="flat" cmpd="sng" algn="ctr">
+                      <a:solidFill>
+                        <a:srgbClr val="000000"/>
+                      </a:solidFill>
+                    </a:lnB>
                     <a:solidFill>
                       <a:srgbClr val="FFFFFF"/>
                     </a:solidFill>
@@ -4140,11 +6520,31 @@
                           </a:solidFill>
                           <a:latin typeface="Calibri"/>
                         </a:rPr>
-                        <a:t>a structure</a:t>
+                        <a:t>A structure</a:t>
                       </a:r>
                     </a:p>
                   </a:txBody>
                   <a:tcPr marL="73152" marR="73152" marT="27432" marB="27432">
+                    <a:lnL w="9525" cap="flat" cmpd="sng" algn="ctr">
+                      <a:solidFill>
+                        <a:srgbClr val="000000"/>
+                      </a:solidFill>
+                    </a:lnL>
+                    <a:lnR w="9525" cap="flat" cmpd="sng" algn="ctr">
+                      <a:solidFill>
+                        <a:srgbClr val="000000"/>
+                      </a:solidFill>
+                    </a:lnR>
+                    <a:lnT w="9525" cap="flat" cmpd="sng" algn="ctr">
+                      <a:solidFill>
+                        <a:srgbClr val="000000"/>
+                      </a:solidFill>
+                    </a:lnT>
+                    <a:lnB w="9525" cap="flat" cmpd="sng" algn="ctr">
+                      <a:solidFill>
+                        <a:srgbClr val="000000"/>
+                      </a:solidFill>
+                    </a:lnB>
                     <a:solidFill>
                       <a:srgbClr val="FFFFFF"/>
                     </a:solidFill>
@@ -4163,11 +6563,31 @@
                           </a:solidFill>
                           <a:latin typeface="Calibri"/>
                         </a:rPr>
-                        <a:t>no</a:t>
+                        <a:t>No</a:t>
                       </a:r>
                     </a:p>
                   </a:txBody>
                   <a:tcPr marL="73152" marR="73152" marT="27432" marB="27432">
+                    <a:lnL w="9525" cap="flat" cmpd="sng" algn="ctr">
+                      <a:solidFill>
+                        <a:srgbClr val="000000"/>
+                      </a:solidFill>
+                    </a:lnL>
+                    <a:lnR w="9525" cap="flat" cmpd="sng" algn="ctr">
+                      <a:solidFill>
+                        <a:srgbClr val="000000"/>
+                      </a:solidFill>
+                    </a:lnR>
+                    <a:lnT w="9525" cap="flat" cmpd="sng" algn="ctr">
+                      <a:solidFill>
+                        <a:srgbClr val="000000"/>
+                      </a:solidFill>
+                    </a:lnT>
+                    <a:lnB w="9525" cap="flat" cmpd="sng" algn="ctr">
+                      <a:solidFill>
+                        <a:srgbClr val="000000"/>
+                      </a:solidFill>
+                    </a:lnB>
                     <a:solidFill>
                       <a:srgbClr val="FFFFFF"/>
                     </a:solidFill>
@@ -4193,6 +6613,26 @@
                     </a:p>
                   </a:txBody>
                   <a:tcPr marL="73152" marR="73152" marT="27432" marB="27432">
+                    <a:lnL w="9525" cap="flat" cmpd="sng" algn="ctr">
+                      <a:solidFill>
+                        <a:srgbClr val="000000"/>
+                      </a:solidFill>
+                    </a:lnL>
+                    <a:lnR w="9525" cap="flat" cmpd="sng" algn="ctr">
+                      <a:solidFill>
+                        <a:srgbClr val="000000"/>
+                      </a:solidFill>
+                    </a:lnR>
+                    <a:lnT w="9525" cap="flat" cmpd="sng" algn="ctr">
+                      <a:solidFill>
+                        <a:srgbClr val="000000"/>
+                      </a:solidFill>
+                    </a:lnT>
+                    <a:lnB w="9525" cap="flat" cmpd="sng" algn="ctr">
+                      <a:solidFill>
+                        <a:srgbClr val="000000"/>
+                      </a:solidFill>
+                    </a:lnB>
                     <a:solidFill>
                       <a:srgbClr val="FFFFFF"/>
                     </a:solidFill>
@@ -4211,11 +6651,31 @@
                           </a:solidFill>
                           <a:latin typeface="Calibri"/>
                         </a:rPr>
-                        <a:t>a vector</a:t>
+                        <a:t>A vector</a:t>
                       </a:r>
                     </a:p>
                   </a:txBody>
                   <a:tcPr marL="73152" marR="73152" marT="27432" marB="27432">
+                    <a:lnL w="9525" cap="flat" cmpd="sng" algn="ctr">
+                      <a:solidFill>
+                        <a:srgbClr val="000000"/>
+                      </a:solidFill>
+                    </a:lnL>
+                    <a:lnR w="9525" cap="flat" cmpd="sng" algn="ctr">
+                      <a:solidFill>
+                        <a:srgbClr val="000000"/>
+                      </a:solidFill>
+                    </a:lnR>
+                    <a:lnT w="9525" cap="flat" cmpd="sng" algn="ctr">
+                      <a:solidFill>
+                        <a:srgbClr val="000000"/>
+                      </a:solidFill>
+                    </a:lnT>
+                    <a:lnB w="9525" cap="flat" cmpd="sng" algn="ctr">
+                      <a:solidFill>
+                        <a:srgbClr val="000000"/>
+                      </a:solidFill>
+                    </a:lnB>
                     <a:solidFill>
                       <a:srgbClr val="FFFFFF"/>
                     </a:solidFill>
@@ -4234,11 +6694,31 @@
                           </a:solidFill>
                           <a:latin typeface="Calibri"/>
                         </a:rPr>
-                        <a:t>yes</a:t>
+                        <a:t>Yes</a:t>
                       </a:r>
                     </a:p>
                   </a:txBody>
                   <a:tcPr marL="73152" marR="73152" marT="27432" marB="27432">
+                    <a:lnL w="9525" cap="flat" cmpd="sng" algn="ctr">
+                      <a:solidFill>
+                        <a:srgbClr val="000000"/>
+                      </a:solidFill>
+                    </a:lnL>
+                    <a:lnR w="9525" cap="flat" cmpd="sng" algn="ctr">
+                      <a:solidFill>
+                        <a:srgbClr val="000000"/>
+                      </a:solidFill>
+                    </a:lnR>
+                    <a:lnT w="9525" cap="flat" cmpd="sng" algn="ctr">
+                      <a:solidFill>
+                        <a:srgbClr val="000000"/>
+                      </a:solidFill>
+                    </a:lnT>
+                    <a:lnB w="9525" cap="flat" cmpd="sng" algn="ctr">
+                      <a:solidFill>
+                        <a:srgbClr val="000000"/>
+                      </a:solidFill>
+                    </a:lnB>
                     <a:solidFill>
                       <a:srgbClr val="FFFFFF"/>
                     </a:solidFill>
@@ -4299,7 +6779,7 @@
                 </a:solidFill>
                 <a:latin typeface="Calibri"/>
               </a:rPr>
-              <a:t>Its parameters are discrete, so no small displacement</a:t>
+              <a:t>Its parameters are discrete, so no small step exists.</a:t>
             </a:r>
           </a:p>
           <a:p>
@@ -4315,7 +6795,7 @@
                 </a:solidFill>
                 <a:latin typeface="Calibri"/>
               </a:rPr>
-              <a:t>exists. Only a continuous parameter can be tracked.</a:t>
+              <a:t>Only a continuous parameter can be tracked.</a:t>
             </a:r>
           </a:p>
         </p:txBody>
@@ -4711,7 +7191,7 @@
                 </a:solidFill>
                 <a:latin typeface="Calibri"/>
               </a:rPr>
-              <a:t>Knowing τ would permit partitioning the stream;</a:t>
+              <a:t>Knowing τ would permit partitioning the stream.</a:t>
             </a:r>
           </a:p>
           <a:p>
@@ -4727,7 +7207,7 @@
                 </a:solidFill>
                 <a:latin typeface="Calibri"/>
               </a:rPr>
-              <a:t>absent it, a jump appears as dependence in E</a:t>
+              <a:t>Absent that, a jump appears as dependence in E</a:t>
             </a:r>
             <a:r>
               <a:rPr sz="2016" b="0" i="0" baseline="-25000">
@@ -4873,11 +7353,31 @@
                           </a:solidFill>
                           <a:latin typeface="Calibri"/>
                         </a:rPr>
-                        <a:t>type</a:t>
+                        <a:t>Type</a:t>
                       </a:r>
                     </a:p>
                   </a:txBody>
                   <a:tcPr marL="73152" marR="73152" marT="27432" marB="27432">
+                    <a:lnL w="9525" cap="flat" cmpd="sng" algn="ctr">
+                      <a:solidFill>
+                        <a:srgbClr val="000000"/>
+                      </a:solidFill>
+                    </a:lnL>
+                    <a:lnR w="9525" cap="flat" cmpd="sng" algn="ctr">
+                      <a:solidFill>
+                        <a:srgbClr val="000000"/>
+                      </a:solidFill>
+                    </a:lnR>
+                    <a:lnT w="9525" cap="flat" cmpd="sng" algn="ctr">
+                      <a:solidFill>
+                        <a:srgbClr val="000000"/>
+                      </a:solidFill>
+                    </a:lnT>
+                    <a:lnB w="9525" cap="flat" cmpd="sng" algn="ctr">
+                      <a:solidFill>
+                        <a:srgbClr val="000000"/>
+                      </a:solidFill>
+                    </a:lnB>
                     <a:solidFill>
                       <a:srgbClr val="FFFFFF"/>
                     </a:solidFill>
@@ -4896,11 +7396,31 @@
                           </a:solidFill>
                           <a:latin typeface="Calibri"/>
                         </a:rPr>
-                        <a:t>trajectory</a:t>
+                        <a:t>Trajectory</a:t>
                       </a:r>
                     </a:p>
                   </a:txBody>
                   <a:tcPr marL="73152" marR="73152" marT="27432" marB="27432">
+                    <a:lnL w="9525" cap="flat" cmpd="sng" algn="ctr">
+                      <a:solidFill>
+                        <a:srgbClr val="000000"/>
+                      </a:solidFill>
+                    </a:lnL>
+                    <a:lnR w="9525" cap="flat" cmpd="sng" algn="ctr">
+                      <a:solidFill>
+                        <a:srgbClr val="000000"/>
+                      </a:solidFill>
+                    </a:lnR>
+                    <a:lnT w="9525" cap="flat" cmpd="sng" algn="ctr">
+                      <a:solidFill>
+                        <a:srgbClr val="000000"/>
+                      </a:solidFill>
+                    </a:lnT>
+                    <a:lnB w="9525" cap="flat" cmpd="sng" algn="ctr">
+                      <a:solidFill>
+                        <a:srgbClr val="000000"/>
+                      </a:solidFill>
+                    </a:lnB>
                     <a:solidFill>
                       <a:srgbClr val="FFFFFF"/>
                     </a:solidFill>
@@ -4919,11 +7439,31 @@
                           </a:solidFill>
                           <a:latin typeface="Calibri"/>
                         </a:rPr>
-                        <a:t>path?</a:t>
+                        <a:t>Path?</a:t>
                       </a:r>
                     </a:p>
                   </a:txBody>
                   <a:tcPr marL="73152" marR="73152" marT="27432" marB="27432">
+                    <a:lnL w="9525" cap="flat" cmpd="sng" algn="ctr">
+                      <a:solidFill>
+                        <a:srgbClr val="000000"/>
+                      </a:solidFill>
+                    </a:lnL>
+                    <a:lnR w="9525" cap="flat" cmpd="sng" algn="ctr">
+                      <a:solidFill>
+                        <a:srgbClr val="000000"/>
+                      </a:solidFill>
+                    </a:lnR>
+                    <a:lnT w="9525" cap="flat" cmpd="sng" algn="ctr">
+                      <a:solidFill>
+                        <a:srgbClr val="000000"/>
+                      </a:solidFill>
+                    </a:lnT>
+                    <a:lnB w="9525" cap="flat" cmpd="sng" algn="ctr">
+                      <a:solidFill>
+                        <a:srgbClr val="000000"/>
+                      </a:solidFill>
+                    </a:lnB>
                     <a:solidFill>
                       <a:srgbClr val="FFFFFF"/>
                     </a:solidFill>
@@ -4949,6 +7489,26 @@
                     </a:p>
                   </a:txBody>
                   <a:tcPr marL="73152" marR="73152" marT="27432" marB="27432">
+                    <a:lnL w="9525" cap="flat" cmpd="sng" algn="ctr">
+                      <a:solidFill>
+                        <a:srgbClr val="000000"/>
+                      </a:solidFill>
+                    </a:lnL>
+                    <a:lnR w="9525" cap="flat" cmpd="sng" algn="ctr">
+                      <a:solidFill>
+                        <a:srgbClr val="000000"/>
+                      </a:solidFill>
+                    </a:lnR>
+                    <a:lnT w="9525" cap="flat" cmpd="sng" algn="ctr">
+                      <a:solidFill>
+                        <a:srgbClr val="000000"/>
+                      </a:solidFill>
+                    </a:lnT>
+                    <a:lnB w="9525" cap="flat" cmpd="sng" algn="ctr">
+                      <a:solidFill>
+                        <a:srgbClr val="000000"/>
+                      </a:solidFill>
+                    </a:lnB>
                     <a:solidFill>
                       <a:srgbClr val="FFFFFF"/>
                     </a:solidFill>
@@ -4972,6 +7532,26 @@
                     </a:p>
                   </a:txBody>
                   <a:tcPr marL="73152" marR="73152" marT="27432" marB="27432">
+                    <a:lnL w="9525" cap="flat" cmpd="sng" algn="ctr">
+                      <a:solidFill>
+                        <a:srgbClr val="000000"/>
+                      </a:solidFill>
+                    </a:lnL>
+                    <a:lnR w="9525" cap="flat" cmpd="sng" algn="ctr">
+                      <a:solidFill>
+                        <a:srgbClr val="000000"/>
+                      </a:solidFill>
+                    </a:lnR>
+                    <a:lnT w="9525" cap="flat" cmpd="sng" algn="ctr">
+                      <a:solidFill>
+                        <a:srgbClr val="000000"/>
+                      </a:solidFill>
+                    </a:lnT>
+                    <a:lnB w="9525" cap="flat" cmpd="sng" algn="ctr">
+                      <a:solidFill>
+                        <a:srgbClr val="000000"/>
+                      </a:solidFill>
+                    </a:lnB>
                     <a:solidFill>
                       <a:srgbClr val="FFFFFF"/>
                     </a:solidFill>
@@ -4990,11 +7570,31 @@
                           </a:solidFill>
                           <a:latin typeface="Calibri"/>
                         </a:rPr>
-                        <a:t>no</a:t>
+                        <a:t>No</a:t>
                       </a:r>
                     </a:p>
                   </a:txBody>
                   <a:tcPr marL="73152" marR="73152" marT="27432" marB="27432">
+                    <a:lnL w="9525" cap="flat" cmpd="sng" algn="ctr">
+                      <a:solidFill>
+                        <a:srgbClr val="000000"/>
+                      </a:solidFill>
+                    </a:lnL>
+                    <a:lnR w="9525" cap="flat" cmpd="sng" algn="ctr">
+                      <a:solidFill>
+                        <a:srgbClr val="000000"/>
+                      </a:solidFill>
+                    </a:lnR>
+                    <a:lnT w="9525" cap="flat" cmpd="sng" algn="ctr">
+                      <a:solidFill>
+                        <a:srgbClr val="000000"/>
+                      </a:solidFill>
+                    </a:lnT>
+                    <a:lnB w="9525" cap="flat" cmpd="sng" algn="ctr">
+                      <a:solidFill>
+                        <a:srgbClr val="000000"/>
+                      </a:solidFill>
+                    </a:lnB>
                     <a:solidFill>
                       <a:srgbClr val="FFFFFF"/>
                     </a:solidFill>
@@ -5020,6 +7620,26 @@
                     </a:p>
                   </a:txBody>
                   <a:tcPr marL="73152" marR="73152" marT="27432" marB="27432">
+                    <a:lnL w="9525" cap="flat" cmpd="sng" algn="ctr">
+                      <a:solidFill>
+                        <a:srgbClr val="000000"/>
+                      </a:solidFill>
+                    </a:lnL>
+                    <a:lnR w="9525" cap="flat" cmpd="sng" algn="ctr">
+                      <a:solidFill>
+                        <a:srgbClr val="000000"/>
+                      </a:solidFill>
+                    </a:lnR>
+                    <a:lnT w="9525" cap="flat" cmpd="sng" algn="ctr">
+                      <a:solidFill>
+                        <a:srgbClr val="000000"/>
+                      </a:solidFill>
+                    </a:lnT>
+                    <a:lnB w="9525" cap="flat" cmpd="sng" algn="ctr">
+                      <a:solidFill>
+                        <a:srgbClr val="000000"/>
+                      </a:solidFill>
+                    </a:lnB>
                     <a:solidFill>
                       <a:srgbClr val="FFFFFF"/>
                     </a:solidFill>
@@ -5088,6 +7708,26 @@
                     </a:p>
                   </a:txBody>
                   <a:tcPr marL="73152" marR="73152" marT="27432" marB="27432">
+                    <a:lnL w="9525" cap="flat" cmpd="sng" algn="ctr">
+                      <a:solidFill>
+                        <a:srgbClr val="000000"/>
+                      </a:solidFill>
+                    </a:lnL>
+                    <a:lnR w="9525" cap="flat" cmpd="sng" algn="ctr">
+                      <a:solidFill>
+                        <a:srgbClr val="000000"/>
+                      </a:solidFill>
+                    </a:lnR>
+                    <a:lnT w="9525" cap="flat" cmpd="sng" algn="ctr">
+                      <a:solidFill>
+                        <a:srgbClr val="000000"/>
+                      </a:solidFill>
+                    </a:lnT>
+                    <a:lnB w="9525" cap="flat" cmpd="sng" algn="ctr">
+                      <a:solidFill>
+                        <a:srgbClr val="000000"/>
+                      </a:solidFill>
+                    </a:lnB>
                     <a:solidFill>
                       <a:srgbClr val="FFFFFF"/>
                     </a:solidFill>
@@ -5106,11 +7746,31 @@
                           </a:solidFill>
                           <a:latin typeface="Calibri"/>
                         </a:rPr>
-                        <a:t>yes</a:t>
+                        <a:t>Yes</a:t>
                       </a:r>
                     </a:p>
                   </a:txBody>
                   <a:tcPr marL="73152" marR="73152" marT="27432" marB="27432">
+                    <a:lnL w="9525" cap="flat" cmpd="sng" algn="ctr">
+                      <a:solidFill>
+                        <a:srgbClr val="000000"/>
+                      </a:solidFill>
+                    </a:lnL>
+                    <a:lnR w="9525" cap="flat" cmpd="sng" algn="ctr">
+                      <a:solidFill>
+                        <a:srgbClr val="000000"/>
+                      </a:solidFill>
+                    </a:lnR>
+                    <a:lnT w="9525" cap="flat" cmpd="sng" algn="ctr">
+                      <a:solidFill>
+                        <a:srgbClr val="000000"/>
+                      </a:solidFill>
+                    </a:lnT>
+                    <a:lnB w="9525" cap="flat" cmpd="sng" algn="ctr">
+                      <a:solidFill>
+                        <a:srgbClr val="000000"/>
+                      </a:solidFill>
+                    </a:lnB>
                     <a:solidFill>
                       <a:srgbClr val="FFFFFF"/>
                     </a:solidFill>
@@ -5136,6 +7796,26 @@
                     </a:p>
                   </a:txBody>
                   <a:tcPr marL="73152" marR="73152" marT="27432" marB="27432">
+                    <a:lnL w="9525" cap="flat" cmpd="sng" algn="ctr">
+                      <a:solidFill>
+                        <a:srgbClr val="000000"/>
+                      </a:solidFill>
+                    </a:lnL>
+                    <a:lnR w="9525" cap="flat" cmpd="sng" algn="ctr">
+                      <a:solidFill>
+                        <a:srgbClr val="000000"/>
+                      </a:solidFill>
+                    </a:lnR>
+                    <a:lnT w="9525" cap="flat" cmpd="sng" algn="ctr">
+                      <a:solidFill>
+                        <a:srgbClr val="000000"/>
+                      </a:solidFill>
+                    </a:lnT>
+                    <a:lnB w="9525" cap="flat" cmpd="sng" algn="ctr">
+                      <a:solidFill>
+                        <a:srgbClr val="000000"/>
+                      </a:solidFill>
+                    </a:lnB>
                     <a:solidFill>
                       <a:srgbClr val="FFFFFF"/>
                     </a:solidFill>
@@ -5177,6 +7857,26 @@
                     </a:p>
                   </a:txBody>
                   <a:tcPr marL="73152" marR="73152" marT="27432" marB="27432">
+                    <a:lnL w="9525" cap="flat" cmpd="sng" algn="ctr">
+                      <a:solidFill>
+                        <a:srgbClr val="000000"/>
+                      </a:solidFill>
+                    </a:lnL>
+                    <a:lnR w="9525" cap="flat" cmpd="sng" algn="ctr">
+                      <a:solidFill>
+                        <a:srgbClr val="000000"/>
+                      </a:solidFill>
+                    </a:lnR>
+                    <a:lnT w="9525" cap="flat" cmpd="sng" algn="ctr">
+                      <a:solidFill>
+                        <a:srgbClr val="000000"/>
+                      </a:solidFill>
+                    </a:lnT>
+                    <a:lnB w="9525" cap="flat" cmpd="sng" algn="ctr">
+                      <a:solidFill>
+                        <a:srgbClr val="000000"/>
+                      </a:solidFill>
+                    </a:lnB>
                     <a:solidFill>
                       <a:srgbClr val="FFFFFF"/>
                     </a:solidFill>
@@ -5195,11 +7895,31 @@
                           </a:solidFill>
                           <a:latin typeface="Calibri"/>
                         </a:rPr>
-                        <a:t>no</a:t>
+                        <a:t>No</a:t>
                       </a:r>
                     </a:p>
                   </a:txBody>
                   <a:tcPr marL="73152" marR="73152" marT="27432" marB="27432">
+                    <a:lnL w="9525" cap="flat" cmpd="sng" algn="ctr">
+                      <a:solidFill>
+                        <a:srgbClr val="000000"/>
+                      </a:solidFill>
+                    </a:lnL>
+                    <a:lnR w="9525" cap="flat" cmpd="sng" algn="ctr">
+                      <a:solidFill>
+                        <a:srgbClr val="000000"/>
+                      </a:solidFill>
+                    </a:lnR>
+                    <a:lnT w="9525" cap="flat" cmpd="sng" algn="ctr">
+                      <a:solidFill>
+                        <a:srgbClr val="000000"/>
+                      </a:solidFill>
+                    </a:lnT>
+                    <a:lnB w="9525" cap="flat" cmpd="sng" algn="ctr">
+                      <a:solidFill>
+                        <a:srgbClr val="000000"/>
+                      </a:solidFill>
+                    </a:lnB>
                     <a:solidFill>
                       <a:srgbClr val="FFFFFF"/>
                     </a:solidFill>
@@ -5225,6 +7945,26 @@
                     </a:p>
                   </a:txBody>
                   <a:tcPr marL="73152" marR="73152" marT="27432" marB="27432">
+                    <a:lnL w="9525" cap="flat" cmpd="sng" algn="ctr">
+                      <a:solidFill>
+                        <a:srgbClr val="000000"/>
+                      </a:solidFill>
+                    </a:lnL>
+                    <a:lnR w="9525" cap="flat" cmpd="sng" algn="ctr">
+                      <a:solidFill>
+                        <a:srgbClr val="000000"/>
+                      </a:solidFill>
+                    </a:lnR>
+                    <a:lnT w="9525" cap="flat" cmpd="sng" algn="ctr">
+                      <a:solidFill>
+                        <a:srgbClr val="000000"/>
+                      </a:solidFill>
+                    </a:lnT>
+                    <a:lnB w="9525" cap="flat" cmpd="sng" algn="ctr">
+                      <a:solidFill>
+                        <a:srgbClr val="000000"/>
+                      </a:solidFill>
+                    </a:lnB>
                     <a:solidFill>
                       <a:srgbClr val="FFFFFF"/>
                     </a:solidFill>
@@ -5243,11 +7983,31 @@
                           </a:solidFill>
                           <a:latin typeface="Calibri"/>
                         </a:rPr>
-                        <a:t>a cycle of concepts</a:t>
+                        <a:t>A cycle of concepts</a:t>
                       </a:r>
                     </a:p>
                   </a:txBody>
                   <a:tcPr marL="73152" marR="73152" marT="27432" marB="27432">
+                    <a:lnL w="9525" cap="flat" cmpd="sng" algn="ctr">
+                      <a:solidFill>
+                        <a:srgbClr val="000000"/>
+                      </a:solidFill>
+                    </a:lnL>
+                    <a:lnR w="9525" cap="flat" cmpd="sng" algn="ctr">
+                      <a:solidFill>
+                        <a:srgbClr val="000000"/>
+                      </a:solidFill>
+                    </a:lnR>
+                    <a:lnT w="9525" cap="flat" cmpd="sng" algn="ctr">
+                      <a:solidFill>
+                        <a:srgbClr val="000000"/>
+                      </a:solidFill>
+                    </a:lnT>
+                    <a:lnB w="9525" cap="flat" cmpd="sng" algn="ctr">
+                      <a:solidFill>
+                        <a:srgbClr val="000000"/>
+                      </a:solidFill>
+                    </a:lnB>
                     <a:solidFill>
                       <a:srgbClr val="FFFFFF"/>
                     </a:solidFill>
@@ -5266,11 +8026,31 @@
                           </a:solidFill>
                           <a:latin typeface="Calibri"/>
                         </a:rPr>
-                        <a:t>yes</a:t>
+                        <a:t>Yes</a:t>
                       </a:r>
                     </a:p>
                   </a:txBody>
                   <a:tcPr marL="73152" marR="73152" marT="27432" marB="27432">
+                    <a:lnL w="9525" cap="flat" cmpd="sng" algn="ctr">
+                      <a:solidFill>
+                        <a:srgbClr val="000000"/>
+                      </a:solidFill>
+                    </a:lnL>
+                    <a:lnR w="9525" cap="flat" cmpd="sng" algn="ctr">
+                      <a:solidFill>
+                        <a:srgbClr val="000000"/>
+                      </a:solidFill>
+                    </a:lnR>
+                    <a:lnT w="9525" cap="flat" cmpd="sng" algn="ctr">
+                      <a:solidFill>
+                        <a:srgbClr val="000000"/>
+                      </a:solidFill>
+                    </a:lnT>
+                    <a:lnB w="9525" cap="flat" cmpd="sng" algn="ctr">
+                      <a:solidFill>
+                        <a:srgbClr val="000000"/>
+                      </a:solidFill>
+                    </a:lnB>
                     <a:solidFill>
                       <a:srgbClr val="FFFFFF"/>
                     </a:solidFill>
@@ -5584,7 +8364,7 @@
                 </a:solidFill>
                 <a:latin typeface="Calibri"/>
               </a:rPr>
-              <a:t>counts exact against the paper</a:t>
+              <a:t>Counts exact against the paper</a:t>
             </a:r>
           </a:p>
           <a:p>
@@ -5779,11 +8559,31 @@
                           </a:solidFill>
                           <a:latin typeface="Calibri"/>
                         </a:rPr>
-                        <a:t>stream</a:t>
+                        <a:t>Stream</a:t>
                       </a:r>
                     </a:p>
                   </a:txBody>
                   <a:tcPr marL="73152" marR="73152" marT="27432" marB="27432">
+                    <a:lnL w="9525" cap="flat" cmpd="sng" algn="ctr">
+                      <a:solidFill>
+                        <a:srgbClr val="000000"/>
+                      </a:solidFill>
+                    </a:lnL>
+                    <a:lnR w="9525" cap="flat" cmpd="sng" algn="ctr">
+                      <a:solidFill>
+                        <a:srgbClr val="000000"/>
+                      </a:solidFill>
+                    </a:lnR>
+                    <a:lnT w="9525" cap="flat" cmpd="sng" algn="ctr">
+                      <a:solidFill>
+                        <a:srgbClr val="000000"/>
+                      </a:solidFill>
+                    </a:lnT>
+                    <a:lnB w="9525" cap="flat" cmpd="sng" algn="ctr">
+                      <a:solidFill>
+                        <a:srgbClr val="000000"/>
+                      </a:solidFill>
+                    </a:lnB>
                     <a:solidFill>
                       <a:srgbClr val="FFFFFF"/>
                     </a:solidFill>
@@ -5807,6 +8607,26 @@
                     </a:p>
                   </a:txBody>
                   <a:tcPr marL="73152" marR="73152" marT="27432" marB="27432">
+                    <a:lnL w="9525" cap="flat" cmpd="sng" algn="ctr">
+                      <a:solidFill>
+                        <a:srgbClr val="000000"/>
+                      </a:solidFill>
+                    </a:lnL>
+                    <a:lnR w="9525" cap="flat" cmpd="sng" algn="ctr">
+                      <a:solidFill>
+                        <a:srgbClr val="000000"/>
+                      </a:solidFill>
+                    </a:lnR>
+                    <a:lnT w="9525" cap="flat" cmpd="sng" algn="ctr">
+                      <a:solidFill>
+                        <a:srgbClr val="000000"/>
+                      </a:solidFill>
+                    </a:lnT>
+                    <a:lnB w="9525" cap="flat" cmpd="sng" algn="ctr">
+                      <a:solidFill>
+                        <a:srgbClr val="000000"/>
+                      </a:solidFill>
+                    </a:lnB>
                     <a:solidFill>
                       <a:srgbClr val="FFFFFF"/>
                     </a:solidFill>
@@ -5830,6 +8650,26 @@
                     </a:p>
                   </a:txBody>
                   <a:tcPr marL="73152" marR="73152" marT="27432" marB="27432">
+                    <a:lnL w="9525" cap="flat" cmpd="sng" algn="ctr">
+                      <a:solidFill>
+                        <a:srgbClr val="000000"/>
+                      </a:solidFill>
+                    </a:lnL>
+                    <a:lnR w="9525" cap="flat" cmpd="sng" algn="ctr">
+                      <a:solidFill>
+                        <a:srgbClr val="000000"/>
+                      </a:solidFill>
+                    </a:lnR>
+                    <a:lnT w="9525" cap="flat" cmpd="sng" algn="ctr">
+                      <a:solidFill>
+                        <a:srgbClr val="000000"/>
+                      </a:solidFill>
+                    </a:lnT>
+                    <a:lnB w="9525" cap="flat" cmpd="sng" algn="ctr">
+                      <a:solidFill>
+                        <a:srgbClr val="000000"/>
+                      </a:solidFill>
+                    </a:lnB>
                     <a:solidFill>
                       <a:srgbClr val="FFFFFF"/>
                     </a:solidFill>
@@ -5853,6 +8693,26 @@
                     </a:p>
                   </a:txBody>
                   <a:tcPr marL="73152" marR="73152" marT="27432" marB="27432">
+                    <a:lnL w="9525" cap="flat" cmpd="sng" algn="ctr">
+                      <a:solidFill>
+                        <a:srgbClr val="000000"/>
+                      </a:solidFill>
+                    </a:lnL>
+                    <a:lnR w="9525" cap="flat" cmpd="sng" algn="ctr">
+                      <a:solidFill>
+                        <a:srgbClr val="000000"/>
+                      </a:solidFill>
+                    </a:lnR>
+                    <a:lnT w="9525" cap="flat" cmpd="sng" algn="ctr">
+                      <a:solidFill>
+                        <a:srgbClr val="000000"/>
+                      </a:solidFill>
+                    </a:lnT>
+                    <a:lnB w="9525" cap="flat" cmpd="sng" algn="ctr">
+                      <a:solidFill>
+                        <a:srgbClr val="000000"/>
+                      </a:solidFill>
+                    </a:lnB>
                     <a:solidFill>
                       <a:srgbClr val="FFFFFF"/>
                     </a:solidFill>
@@ -5878,6 +8738,26 @@
                     </a:p>
                   </a:txBody>
                   <a:tcPr marL="73152" marR="73152" marT="27432" marB="27432">
+                    <a:lnL w="9525" cap="flat" cmpd="sng" algn="ctr">
+                      <a:solidFill>
+                        <a:srgbClr val="000000"/>
+                      </a:solidFill>
+                    </a:lnL>
+                    <a:lnR w="9525" cap="flat" cmpd="sng" algn="ctr">
+                      <a:solidFill>
+                        <a:srgbClr val="000000"/>
+                      </a:solidFill>
+                    </a:lnR>
+                    <a:lnT w="9525" cap="flat" cmpd="sng" algn="ctr">
+                      <a:solidFill>
+                        <a:srgbClr val="000000"/>
+                      </a:solidFill>
+                    </a:lnT>
+                    <a:lnB w="9525" cap="flat" cmpd="sng" algn="ctr">
+                      <a:solidFill>
+                        <a:srgbClr val="000000"/>
+                      </a:solidFill>
+                    </a:lnB>
                     <a:solidFill>
                       <a:srgbClr val="FFFFFF"/>
                     </a:solidFill>
@@ -5901,6 +8781,26 @@
                     </a:p>
                   </a:txBody>
                   <a:tcPr marL="73152" marR="73152" marT="27432" marB="27432">
+                    <a:lnL w="9525" cap="flat" cmpd="sng" algn="ctr">
+                      <a:solidFill>
+                        <a:srgbClr val="000000"/>
+                      </a:solidFill>
+                    </a:lnL>
+                    <a:lnR w="9525" cap="flat" cmpd="sng" algn="ctr">
+                      <a:solidFill>
+                        <a:srgbClr val="000000"/>
+                      </a:solidFill>
+                    </a:lnR>
+                    <a:lnT w="9525" cap="flat" cmpd="sng" algn="ctr">
+                      <a:solidFill>
+                        <a:srgbClr val="000000"/>
+                      </a:solidFill>
+                    </a:lnT>
+                    <a:lnB w="9525" cap="flat" cmpd="sng" algn="ctr">
+                      <a:solidFill>
+                        <a:srgbClr val="000000"/>
+                      </a:solidFill>
+                    </a:lnB>
                     <a:solidFill>
                       <a:srgbClr val="FFFFFF"/>
                     </a:solidFill>
@@ -5924,6 +8824,26 @@
                     </a:p>
                   </a:txBody>
                   <a:tcPr marL="73152" marR="73152" marT="27432" marB="27432">
+                    <a:lnL w="9525" cap="flat" cmpd="sng" algn="ctr">
+                      <a:solidFill>
+                        <a:srgbClr val="000000"/>
+                      </a:solidFill>
+                    </a:lnL>
+                    <a:lnR w="9525" cap="flat" cmpd="sng" algn="ctr">
+                      <a:solidFill>
+                        <a:srgbClr val="000000"/>
+                      </a:solidFill>
+                    </a:lnR>
+                    <a:lnT w="9525" cap="flat" cmpd="sng" algn="ctr">
+                      <a:solidFill>
+                        <a:srgbClr val="000000"/>
+                      </a:solidFill>
+                    </a:lnT>
+                    <a:lnB w="9525" cap="flat" cmpd="sng" algn="ctr">
+                      <a:solidFill>
+                        <a:srgbClr val="000000"/>
+                      </a:solidFill>
+                    </a:lnB>
                     <a:solidFill>
                       <a:srgbClr val="FFFFFF"/>
                     </a:solidFill>
@@ -5947,6 +8867,26 @@
                     </a:p>
                   </a:txBody>
                   <a:tcPr marL="73152" marR="73152" marT="27432" marB="27432">
+                    <a:lnL w="9525" cap="flat" cmpd="sng" algn="ctr">
+                      <a:solidFill>
+                        <a:srgbClr val="000000"/>
+                      </a:solidFill>
+                    </a:lnL>
+                    <a:lnR w="9525" cap="flat" cmpd="sng" algn="ctr">
+                      <a:solidFill>
+                        <a:srgbClr val="000000"/>
+                      </a:solidFill>
+                    </a:lnR>
+                    <a:lnT w="9525" cap="flat" cmpd="sng" algn="ctr">
+                      <a:solidFill>
+                        <a:srgbClr val="000000"/>
+                      </a:solidFill>
+                    </a:lnT>
+                    <a:lnB w="9525" cap="flat" cmpd="sng" algn="ctr">
+                      <a:solidFill>
+                        <a:srgbClr val="000000"/>
+                      </a:solidFill>
+                    </a:lnB>
                     <a:solidFill>
                       <a:srgbClr val="FFFFFF"/>
                     </a:solidFill>
@@ -5972,6 +8912,26 @@
                     </a:p>
                   </a:txBody>
                   <a:tcPr marL="73152" marR="73152" marT="27432" marB="27432">
+                    <a:lnL w="9525" cap="flat" cmpd="sng" algn="ctr">
+                      <a:solidFill>
+                        <a:srgbClr val="000000"/>
+                      </a:solidFill>
+                    </a:lnL>
+                    <a:lnR w="9525" cap="flat" cmpd="sng" algn="ctr">
+                      <a:solidFill>
+                        <a:srgbClr val="000000"/>
+                      </a:solidFill>
+                    </a:lnR>
+                    <a:lnT w="9525" cap="flat" cmpd="sng" algn="ctr">
+                      <a:solidFill>
+                        <a:srgbClr val="000000"/>
+                      </a:solidFill>
+                    </a:lnT>
+                    <a:lnB w="9525" cap="flat" cmpd="sng" algn="ctr">
+                      <a:solidFill>
+                        <a:srgbClr val="000000"/>
+                      </a:solidFill>
+                    </a:lnB>
                     <a:solidFill>
                       <a:srgbClr val="FFFFFF"/>
                     </a:solidFill>
@@ -5995,6 +8955,26 @@
                     </a:p>
                   </a:txBody>
                   <a:tcPr marL="73152" marR="73152" marT="27432" marB="27432">
+                    <a:lnL w="9525" cap="flat" cmpd="sng" algn="ctr">
+                      <a:solidFill>
+                        <a:srgbClr val="000000"/>
+                      </a:solidFill>
+                    </a:lnL>
+                    <a:lnR w="9525" cap="flat" cmpd="sng" algn="ctr">
+                      <a:solidFill>
+                        <a:srgbClr val="000000"/>
+                      </a:solidFill>
+                    </a:lnR>
+                    <a:lnT w="9525" cap="flat" cmpd="sng" algn="ctr">
+                      <a:solidFill>
+                        <a:srgbClr val="000000"/>
+                      </a:solidFill>
+                    </a:lnT>
+                    <a:lnB w="9525" cap="flat" cmpd="sng" algn="ctr">
+                      <a:solidFill>
+                        <a:srgbClr val="000000"/>
+                      </a:solidFill>
+                    </a:lnB>
                     <a:solidFill>
                       <a:srgbClr val="FFFFFF"/>
                     </a:solidFill>
@@ -6018,6 +8998,26 @@
                     </a:p>
                   </a:txBody>
                   <a:tcPr marL="73152" marR="73152" marT="27432" marB="27432">
+                    <a:lnL w="9525" cap="flat" cmpd="sng" algn="ctr">
+                      <a:solidFill>
+                        <a:srgbClr val="000000"/>
+                      </a:solidFill>
+                    </a:lnL>
+                    <a:lnR w="9525" cap="flat" cmpd="sng" algn="ctr">
+                      <a:solidFill>
+                        <a:srgbClr val="000000"/>
+                      </a:solidFill>
+                    </a:lnR>
+                    <a:lnT w="9525" cap="flat" cmpd="sng" algn="ctr">
+                      <a:solidFill>
+                        <a:srgbClr val="000000"/>
+                      </a:solidFill>
+                    </a:lnT>
+                    <a:lnB w="9525" cap="flat" cmpd="sng" algn="ctr">
+                      <a:solidFill>
+                        <a:srgbClr val="000000"/>
+                      </a:solidFill>
+                    </a:lnB>
                     <a:solidFill>
                       <a:srgbClr val="FFFFFF"/>
                     </a:solidFill>
@@ -6041,6 +9041,26 @@
                     </a:p>
                   </a:txBody>
                   <a:tcPr marL="73152" marR="73152" marT="27432" marB="27432">
+                    <a:lnL w="9525" cap="flat" cmpd="sng" algn="ctr">
+                      <a:solidFill>
+                        <a:srgbClr val="000000"/>
+                      </a:solidFill>
+                    </a:lnL>
+                    <a:lnR w="9525" cap="flat" cmpd="sng" algn="ctr">
+                      <a:solidFill>
+                        <a:srgbClr val="000000"/>
+                      </a:solidFill>
+                    </a:lnR>
+                    <a:lnT w="9525" cap="flat" cmpd="sng" algn="ctr">
+                      <a:solidFill>
+                        <a:srgbClr val="000000"/>
+                      </a:solidFill>
+                    </a:lnT>
+                    <a:lnB w="9525" cap="flat" cmpd="sng" algn="ctr">
+                      <a:solidFill>
+                        <a:srgbClr val="000000"/>
+                      </a:solidFill>
+                    </a:lnB>
                     <a:solidFill>
                       <a:srgbClr val="FFFFFF"/>
                     </a:solidFill>
@@ -6066,6 +9086,26 @@
                     </a:p>
                   </a:txBody>
                   <a:tcPr marL="73152" marR="73152" marT="27432" marB="27432">
+                    <a:lnL w="9525" cap="flat" cmpd="sng" algn="ctr">
+                      <a:solidFill>
+                        <a:srgbClr val="000000"/>
+                      </a:solidFill>
+                    </a:lnL>
+                    <a:lnR w="9525" cap="flat" cmpd="sng" algn="ctr">
+                      <a:solidFill>
+                        <a:srgbClr val="000000"/>
+                      </a:solidFill>
+                    </a:lnR>
+                    <a:lnT w="9525" cap="flat" cmpd="sng" algn="ctr">
+                      <a:solidFill>
+                        <a:srgbClr val="000000"/>
+                      </a:solidFill>
+                    </a:lnT>
+                    <a:lnB w="9525" cap="flat" cmpd="sng" algn="ctr">
+                      <a:solidFill>
+                        <a:srgbClr val="000000"/>
+                      </a:solidFill>
+                    </a:lnB>
                     <a:solidFill>
                       <a:srgbClr val="FFFFFF"/>
                     </a:solidFill>
@@ -6089,6 +9129,26 @@
                     </a:p>
                   </a:txBody>
                   <a:tcPr marL="73152" marR="73152" marT="27432" marB="27432">
+                    <a:lnL w="9525" cap="flat" cmpd="sng" algn="ctr">
+                      <a:solidFill>
+                        <a:srgbClr val="000000"/>
+                      </a:solidFill>
+                    </a:lnL>
+                    <a:lnR w="9525" cap="flat" cmpd="sng" algn="ctr">
+                      <a:solidFill>
+                        <a:srgbClr val="000000"/>
+                      </a:solidFill>
+                    </a:lnR>
+                    <a:lnT w="9525" cap="flat" cmpd="sng" algn="ctr">
+                      <a:solidFill>
+                        <a:srgbClr val="000000"/>
+                      </a:solidFill>
+                    </a:lnT>
+                    <a:lnB w="9525" cap="flat" cmpd="sng" algn="ctr">
+                      <a:solidFill>
+                        <a:srgbClr val="000000"/>
+                      </a:solidFill>
+                    </a:lnB>
                     <a:solidFill>
                       <a:srgbClr val="FFFFFF"/>
                     </a:solidFill>
@@ -6112,6 +9172,26 @@
                     </a:p>
                   </a:txBody>
                   <a:tcPr marL="73152" marR="73152" marT="27432" marB="27432">
+                    <a:lnL w="9525" cap="flat" cmpd="sng" algn="ctr">
+                      <a:solidFill>
+                        <a:srgbClr val="000000"/>
+                      </a:solidFill>
+                    </a:lnL>
+                    <a:lnR w="9525" cap="flat" cmpd="sng" algn="ctr">
+                      <a:solidFill>
+                        <a:srgbClr val="000000"/>
+                      </a:solidFill>
+                    </a:lnR>
+                    <a:lnT w="9525" cap="flat" cmpd="sng" algn="ctr">
+                      <a:solidFill>
+                        <a:srgbClr val="000000"/>
+                      </a:solidFill>
+                    </a:lnT>
+                    <a:lnB w="9525" cap="flat" cmpd="sng" algn="ctr">
+                      <a:solidFill>
+                        <a:srgbClr val="000000"/>
+                      </a:solidFill>
+                    </a:lnB>
                     <a:solidFill>
                       <a:srgbClr val="FFFFFF"/>
                     </a:solidFill>
@@ -6135,6 +9215,26 @@
                     </a:p>
                   </a:txBody>
                   <a:tcPr marL="73152" marR="73152" marT="27432" marB="27432">
+                    <a:lnL w="9525" cap="flat" cmpd="sng" algn="ctr">
+                      <a:solidFill>
+                        <a:srgbClr val="000000"/>
+                      </a:solidFill>
+                    </a:lnL>
+                    <a:lnR w="9525" cap="flat" cmpd="sng" algn="ctr">
+                      <a:solidFill>
+                        <a:srgbClr val="000000"/>
+                      </a:solidFill>
+                    </a:lnR>
+                    <a:lnT w="9525" cap="flat" cmpd="sng" algn="ctr">
+                      <a:solidFill>
+                        <a:srgbClr val="000000"/>
+                      </a:solidFill>
+                    </a:lnT>
+                    <a:lnB w="9525" cap="flat" cmpd="sng" algn="ctr">
+                      <a:solidFill>
+                        <a:srgbClr val="000000"/>
+                      </a:solidFill>
+                    </a:lnB>
                     <a:solidFill>
                       <a:srgbClr val="FFFFFF"/>
                     </a:solidFill>
@@ -6160,6 +9260,26 @@
                     </a:p>
                   </a:txBody>
                   <a:tcPr marL="73152" marR="73152" marT="27432" marB="27432">
+                    <a:lnL w="9525" cap="flat" cmpd="sng" algn="ctr">
+                      <a:solidFill>
+                        <a:srgbClr val="000000"/>
+                      </a:solidFill>
+                    </a:lnL>
+                    <a:lnR w="9525" cap="flat" cmpd="sng" algn="ctr">
+                      <a:solidFill>
+                        <a:srgbClr val="000000"/>
+                      </a:solidFill>
+                    </a:lnR>
+                    <a:lnT w="9525" cap="flat" cmpd="sng" algn="ctr">
+                      <a:solidFill>
+                        <a:srgbClr val="000000"/>
+                      </a:solidFill>
+                    </a:lnT>
+                    <a:lnB w="9525" cap="flat" cmpd="sng" algn="ctr">
+                      <a:solidFill>
+                        <a:srgbClr val="000000"/>
+                      </a:solidFill>
+                    </a:lnB>
                     <a:solidFill>
                       <a:srgbClr val="FFFFFF"/>
                     </a:solidFill>
@@ -6183,6 +9303,26 @@
                     </a:p>
                   </a:txBody>
                   <a:tcPr marL="73152" marR="73152" marT="27432" marB="27432">
+                    <a:lnL w="9525" cap="flat" cmpd="sng" algn="ctr">
+                      <a:solidFill>
+                        <a:srgbClr val="000000"/>
+                      </a:solidFill>
+                    </a:lnL>
+                    <a:lnR w="9525" cap="flat" cmpd="sng" algn="ctr">
+                      <a:solidFill>
+                        <a:srgbClr val="000000"/>
+                      </a:solidFill>
+                    </a:lnR>
+                    <a:lnT w="9525" cap="flat" cmpd="sng" algn="ctr">
+                      <a:solidFill>
+                        <a:srgbClr val="000000"/>
+                      </a:solidFill>
+                    </a:lnT>
+                    <a:lnB w="9525" cap="flat" cmpd="sng" algn="ctr">
+                      <a:solidFill>
+                        <a:srgbClr val="000000"/>
+                      </a:solidFill>
+                    </a:lnB>
                     <a:solidFill>
                       <a:srgbClr val="FFFFFF"/>
                     </a:solidFill>
@@ -6206,6 +9346,26 @@
                     </a:p>
                   </a:txBody>
                   <a:tcPr marL="73152" marR="73152" marT="27432" marB="27432">
+                    <a:lnL w="9525" cap="flat" cmpd="sng" algn="ctr">
+                      <a:solidFill>
+                        <a:srgbClr val="000000"/>
+                      </a:solidFill>
+                    </a:lnL>
+                    <a:lnR w="9525" cap="flat" cmpd="sng" algn="ctr">
+                      <a:solidFill>
+                        <a:srgbClr val="000000"/>
+                      </a:solidFill>
+                    </a:lnR>
+                    <a:lnT w="9525" cap="flat" cmpd="sng" algn="ctr">
+                      <a:solidFill>
+                        <a:srgbClr val="000000"/>
+                      </a:solidFill>
+                    </a:lnT>
+                    <a:lnB w="9525" cap="flat" cmpd="sng" algn="ctr">
+                      <a:solidFill>
+                        <a:srgbClr val="000000"/>
+                      </a:solidFill>
+                    </a:lnB>
                     <a:solidFill>
                       <a:srgbClr val="FFFFFF"/>
                     </a:solidFill>
@@ -6229,6 +9389,26 @@
                     </a:p>
                   </a:txBody>
                   <a:tcPr marL="73152" marR="73152" marT="27432" marB="27432">
+                    <a:lnL w="9525" cap="flat" cmpd="sng" algn="ctr">
+                      <a:solidFill>
+                        <a:srgbClr val="000000"/>
+                      </a:solidFill>
+                    </a:lnL>
+                    <a:lnR w="9525" cap="flat" cmpd="sng" algn="ctr">
+                      <a:solidFill>
+                        <a:srgbClr val="000000"/>
+                      </a:solidFill>
+                    </a:lnR>
+                    <a:lnT w="9525" cap="flat" cmpd="sng" algn="ctr">
+                      <a:solidFill>
+                        <a:srgbClr val="000000"/>
+                      </a:solidFill>
+                    </a:lnT>
+                    <a:lnB w="9525" cap="flat" cmpd="sng" algn="ctr">
+                      <a:solidFill>
+                        <a:srgbClr val="000000"/>
+                      </a:solidFill>
+                    </a:lnB>
                     <a:solidFill>
                       <a:srgbClr val="FFFFFF"/>
                     </a:solidFill>
@@ -6907,11 +10087,31 @@
                           </a:solidFill>
                           <a:latin typeface="Calibri"/>
                         </a:rPr>
-                        <a:t>parameter</a:t>
+                        <a:t>Parameter</a:t>
                       </a:r>
                     </a:p>
                   </a:txBody>
                   <a:tcPr marL="73152" marR="73152" marT="27432" marB="27432">
+                    <a:lnL w="9525" cap="flat" cmpd="sng" algn="ctr">
+                      <a:solidFill>
+                        <a:srgbClr val="000000"/>
+                      </a:solidFill>
+                    </a:lnL>
+                    <a:lnR w="9525" cap="flat" cmpd="sng" algn="ctr">
+                      <a:solidFill>
+                        <a:srgbClr val="000000"/>
+                      </a:solidFill>
+                    </a:lnR>
+                    <a:lnT w="9525" cap="flat" cmpd="sng" algn="ctr">
+                      <a:solidFill>
+                        <a:srgbClr val="000000"/>
+                      </a:solidFill>
+                    </a:lnT>
+                    <a:lnB w="9525" cap="flat" cmpd="sng" algn="ctr">
+                      <a:solidFill>
+                        <a:srgbClr val="000000"/>
+                      </a:solidFill>
+                    </a:lnB>
                     <a:solidFill>
                       <a:srgbClr val="FFFFFF"/>
                     </a:solidFill>
@@ -6930,11 +10130,31 @@
                           </a:solidFill>
                           <a:latin typeface="Calibri"/>
                         </a:rPr>
-                        <a:t>measured effect</a:t>
+                        <a:t>Measured effect</a:t>
                       </a:r>
                     </a:p>
                   </a:txBody>
                   <a:tcPr marL="73152" marR="73152" marT="27432" marB="27432">
+                    <a:lnL w="9525" cap="flat" cmpd="sng" algn="ctr">
+                      <a:solidFill>
+                        <a:srgbClr val="000000"/>
+                      </a:solidFill>
+                    </a:lnL>
+                    <a:lnR w="9525" cap="flat" cmpd="sng" algn="ctr">
+                      <a:solidFill>
+                        <a:srgbClr val="000000"/>
+                      </a:solidFill>
+                    </a:lnR>
+                    <a:lnT w="9525" cap="flat" cmpd="sng" algn="ctr">
+                      <a:solidFill>
+                        <a:srgbClr val="000000"/>
+                      </a:solidFill>
+                    </a:lnT>
+                    <a:lnB w="9525" cap="flat" cmpd="sng" algn="ctr">
+                      <a:solidFill>
+                        <a:srgbClr val="000000"/>
+                      </a:solidFill>
+                    </a:lnB>
                     <a:solidFill>
                       <a:srgbClr val="FFFFFF"/>
                     </a:solidFill>
@@ -6960,6 +10180,26 @@
                     </a:p>
                   </a:txBody>
                   <a:tcPr marL="73152" marR="73152" marT="27432" marB="27432">
+                    <a:lnL w="9525" cap="flat" cmpd="sng" algn="ctr">
+                      <a:solidFill>
+                        <a:srgbClr val="000000"/>
+                      </a:solidFill>
+                    </a:lnL>
+                    <a:lnR w="9525" cap="flat" cmpd="sng" algn="ctr">
+                      <a:solidFill>
+                        <a:srgbClr val="000000"/>
+                      </a:solidFill>
+                    </a:lnR>
+                    <a:lnT w="9525" cap="flat" cmpd="sng" algn="ctr">
+                      <a:solidFill>
+                        <a:srgbClr val="000000"/>
+                      </a:solidFill>
+                    </a:lnT>
+                    <a:lnB w="9525" cap="flat" cmpd="sng" algn="ctr">
+                      <a:solidFill>
+                        <a:srgbClr val="000000"/>
+                      </a:solidFill>
+                    </a:lnB>
                     <a:solidFill>
                       <a:srgbClr val="FFFFFF"/>
                     </a:solidFill>
@@ -6983,6 +10223,26 @@
                     </a:p>
                   </a:txBody>
                   <a:tcPr marL="73152" marR="73152" marT="27432" marB="27432">
+                    <a:lnL w="9525" cap="flat" cmpd="sng" algn="ctr">
+                      <a:solidFill>
+                        <a:srgbClr val="000000"/>
+                      </a:solidFill>
+                    </a:lnL>
+                    <a:lnR w="9525" cap="flat" cmpd="sng" algn="ctr">
+                      <a:solidFill>
+                        <a:srgbClr val="000000"/>
+                      </a:solidFill>
+                    </a:lnR>
+                    <a:lnT w="9525" cap="flat" cmpd="sng" algn="ctr">
+                      <a:solidFill>
+                        <a:srgbClr val="000000"/>
+                      </a:solidFill>
+                    </a:lnT>
+                    <a:lnB w="9525" cap="flat" cmpd="sng" algn="ctr">
+                      <a:solidFill>
+                        <a:srgbClr val="000000"/>
+                      </a:solidFill>
+                    </a:lnB>
                     <a:solidFill>
                       <a:srgbClr val="FFFFFF"/>
                     </a:solidFill>
@@ -7008,6 +10268,26 @@
                     </a:p>
                   </a:txBody>
                   <a:tcPr marL="73152" marR="73152" marT="27432" marB="27432">
+                    <a:lnL w="9525" cap="flat" cmpd="sng" algn="ctr">
+                      <a:solidFill>
+                        <a:srgbClr val="000000"/>
+                      </a:solidFill>
+                    </a:lnL>
+                    <a:lnR w="9525" cap="flat" cmpd="sng" algn="ctr">
+                      <a:solidFill>
+                        <a:srgbClr val="000000"/>
+                      </a:solidFill>
+                    </a:lnR>
+                    <a:lnT w="9525" cap="flat" cmpd="sng" algn="ctr">
+                      <a:solidFill>
+                        <a:srgbClr val="000000"/>
+                      </a:solidFill>
+                    </a:lnT>
+                    <a:lnB w="9525" cap="flat" cmpd="sng" algn="ctr">
+                      <a:solidFill>
+                        <a:srgbClr val="000000"/>
+                      </a:solidFill>
+                    </a:lnB>
                     <a:solidFill>
                       <a:srgbClr val="FFFFFF"/>
                     </a:solidFill>
@@ -7026,11 +10306,31 @@
                           </a:solidFill>
                           <a:latin typeface="Calibri"/>
                         </a:rPr>
-                        <a:t>degree 3 is 3.3 points below degree 2</a:t>
+                        <a:t>Degree 3 is 3.3 points below degree 2</a:t>
                       </a:r>
                     </a:p>
                   </a:txBody>
                   <a:tcPr marL="73152" marR="73152" marT="27432" marB="27432">
+                    <a:lnL w="9525" cap="flat" cmpd="sng" algn="ctr">
+                      <a:solidFill>
+                        <a:srgbClr val="000000"/>
+                      </a:solidFill>
+                    </a:lnL>
+                    <a:lnR w="9525" cap="flat" cmpd="sng" algn="ctr">
+                      <a:solidFill>
+                        <a:srgbClr val="000000"/>
+                      </a:solidFill>
+                    </a:lnR>
+                    <a:lnT w="9525" cap="flat" cmpd="sng" algn="ctr">
+                      <a:solidFill>
+                        <a:srgbClr val="000000"/>
+                      </a:solidFill>
+                    </a:lnT>
+                    <a:lnB w="9525" cap="flat" cmpd="sng" algn="ctr">
+                      <a:solidFill>
+                        <a:srgbClr val="000000"/>
+                      </a:solidFill>
+                    </a:lnB>
                     <a:solidFill>
                       <a:srgbClr val="FFFFFF"/>
                     </a:solidFill>
@@ -7056,6 +10356,26 @@
                     </a:p>
                   </a:txBody>
                   <a:tcPr marL="73152" marR="73152" marT="27432" marB="27432">
+                    <a:lnL w="9525" cap="flat" cmpd="sng" algn="ctr">
+                      <a:solidFill>
+                        <a:srgbClr val="000000"/>
+                      </a:solidFill>
+                    </a:lnL>
+                    <a:lnR w="9525" cap="flat" cmpd="sng" algn="ctr">
+                      <a:solidFill>
+                        <a:srgbClr val="000000"/>
+                      </a:solidFill>
+                    </a:lnR>
+                    <a:lnT w="9525" cap="flat" cmpd="sng" algn="ctr">
+                      <a:solidFill>
+                        <a:srgbClr val="000000"/>
+                      </a:solidFill>
+                    </a:lnT>
+                    <a:lnB w="9525" cap="flat" cmpd="sng" algn="ctr">
+                      <a:solidFill>
+                        <a:srgbClr val="000000"/>
+                      </a:solidFill>
+                    </a:lnB>
                     <a:solidFill>
                       <a:srgbClr val="FFFFFF"/>
                     </a:solidFill>
@@ -7074,11 +10394,31 @@
                           </a:solidFill>
                           <a:latin typeface="Calibri"/>
                         </a:rPr>
-                        <a:t>stated as 6; the file declares 8</a:t>
+                        <a:t>Stated as 6; the file declares 8</a:t>
                       </a:r>
                     </a:p>
                   </a:txBody>
                   <a:tcPr marL="73152" marR="73152" marT="27432" marB="27432">
+                    <a:lnL w="9525" cap="flat" cmpd="sng" algn="ctr">
+                      <a:solidFill>
+                        <a:srgbClr val="000000"/>
+                      </a:solidFill>
+                    </a:lnL>
+                    <a:lnR w="9525" cap="flat" cmpd="sng" algn="ctr">
+                      <a:solidFill>
+                        <a:srgbClr val="000000"/>
+                      </a:solidFill>
+                    </a:lnR>
+                    <a:lnT w="9525" cap="flat" cmpd="sng" algn="ctr">
+                      <a:solidFill>
+                        <a:srgbClr val="000000"/>
+                      </a:solidFill>
+                    </a:lnT>
+                    <a:lnB w="9525" cap="flat" cmpd="sng" algn="ctr">
+                      <a:solidFill>
+                        <a:srgbClr val="000000"/>
+                      </a:solidFill>
+                    </a:lnB>
                     <a:solidFill>
                       <a:srgbClr val="FFFFFF"/>
                     </a:solidFill>
@@ -7123,7 +10463,7 @@
                 </a:solidFill>
                 <a:latin typeface="Calibri"/>
               </a:rPr>
-              <a:t>The reported Synthetic row is attainable only at large d —</a:t>
+              <a:t>The reported Synthetic row needs large d.</a:t>
             </a:r>
           </a:p>
           <a:p>
@@ -7139,7 +10479,7 @@
                 </a:solidFill>
                 <a:latin typeface="Calibri"/>
               </a:rPr>
-              <a:t>not at the d = 2 of the paper's own Figure 4.</a:t>
+              <a:t>It is not attainable at the d = 2 of Figure 4.</a:t>
             </a:r>
           </a:p>
         </p:txBody>
@@ -7325,11 +10665,31 @@
                           </a:solidFill>
                           <a:latin typeface="Calibri"/>
                         </a:rPr>
-                        <a:t>family</a:t>
+                        <a:t>Family</a:t>
                       </a:r>
                     </a:p>
                   </a:txBody>
                   <a:tcPr marL="73152" marR="73152" marT="27432" marB="27432">
+                    <a:lnL w="9525" cap="flat" cmpd="sng" algn="ctr">
+                      <a:solidFill>
+                        <a:srgbClr val="000000"/>
+                      </a:solidFill>
+                    </a:lnL>
+                    <a:lnR w="9525" cap="flat" cmpd="sng" algn="ctr">
+                      <a:solidFill>
+                        <a:srgbClr val="000000"/>
+                      </a:solidFill>
+                    </a:lnR>
+                    <a:lnT w="9525" cap="flat" cmpd="sng" algn="ctr">
+                      <a:solidFill>
+                        <a:srgbClr val="000000"/>
+                      </a:solidFill>
+                    </a:lnT>
+                    <a:lnB w="9525" cap="flat" cmpd="sng" algn="ctr">
+                      <a:solidFill>
+                        <a:srgbClr val="000000"/>
+                      </a:solidFill>
+                    </a:lnB>
                     <a:solidFill>
                       <a:srgbClr val="FFFFFF"/>
                     </a:solidFill>
@@ -7348,11 +10708,31 @@
                           </a:solidFill>
                           <a:latin typeface="Calibri"/>
                         </a:rPr>
-                        <a:t>principle</a:t>
+                        <a:t>Principle</a:t>
                       </a:r>
                     </a:p>
                   </a:txBody>
                   <a:tcPr marL="73152" marR="73152" marT="27432" marB="27432">
+                    <a:lnL w="9525" cap="flat" cmpd="sng" algn="ctr">
+                      <a:solidFill>
+                        <a:srgbClr val="000000"/>
+                      </a:solidFill>
+                    </a:lnL>
+                    <a:lnR w="9525" cap="flat" cmpd="sng" algn="ctr">
+                      <a:solidFill>
+                        <a:srgbClr val="000000"/>
+                      </a:solidFill>
+                    </a:lnR>
+                    <a:lnT w="9525" cap="flat" cmpd="sng" algn="ctr">
+                      <a:solidFill>
+                        <a:srgbClr val="000000"/>
+                      </a:solidFill>
+                    </a:lnT>
+                    <a:lnB w="9525" cap="flat" cmpd="sng" algn="ctr">
+                      <a:solidFill>
+                        <a:srgbClr val="000000"/>
+                      </a:solidFill>
+                    </a:lnB>
                     <a:solidFill>
                       <a:srgbClr val="FFFFFF"/>
                     </a:solidFill>
@@ -7371,11 +10751,31 @@
                           </a:solidFill>
                           <a:latin typeface="Calibri"/>
                         </a:rPr>
-                        <a:t>work</a:t>
+                        <a:t>Work</a:t>
                       </a:r>
                     </a:p>
                   </a:txBody>
                   <a:tcPr marL="73152" marR="73152" marT="27432" marB="27432">
+                    <a:lnL w="9525" cap="flat" cmpd="sng" algn="ctr">
+                      <a:solidFill>
+                        <a:srgbClr val="000000"/>
+                      </a:solidFill>
+                    </a:lnL>
+                    <a:lnR w="9525" cap="flat" cmpd="sng" algn="ctr">
+                      <a:solidFill>
+                        <a:srgbClr val="000000"/>
+                      </a:solidFill>
+                    </a:lnR>
+                    <a:lnT w="9525" cap="flat" cmpd="sng" algn="ctr">
+                      <a:solidFill>
+                        <a:srgbClr val="000000"/>
+                      </a:solidFill>
+                    </a:lnT>
+                    <a:lnB w="9525" cap="flat" cmpd="sng" algn="ctr">
+                      <a:solidFill>
+                        <a:srgbClr val="000000"/>
+                      </a:solidFill>
+                    </a:lnB>
                     <a:solidFill>
                       <a:srgbClr val="FFFFFF"/>
                     </a:solidFill>
@@ -7401,6 +10801,26 @@
                     </a:p>
                   </a:txBody>
                   <a:tcPr marL="73152" marR="73152" marT="27432" marB="27432">
+                    <a:lnL w="9525" cap="flat" cmpd="sng" algn="ctr">
+                      <a:solidFill>
+                        <a:srgbClr val="000000"/>
+                      </a:solidFill>
+                    </a:lnL>
+                    <a:lnR w="9525" cap="flat" cmpd="sng" algn="ctr">
+                      <a:solidFill>
+                        <a:srgbClr val="000000"/>
+                      </a:solidFill>
+                    </a:lnR>
+                    <a:lnT w="9525" cap="flat" cmpd="sng" algn="ctr">
+                      <a:solidFill>
+                        <a:srgbClr val="000000"/>
+                      </a:solidFill>
+                    </a:lnT>
+                    <a:lnB w="9525" cap="flat" cmpd="sng" algn="ctr">
+                      <a:solidFill>
+                        <a:srgbClr val="000000"/>
+                      </a:solidFill>
+                    </a:lnB>
                     <a:solidFill>
                       <a:srgbClr val="FFFFFF"/>
                     </a:solidFill>
@@ -7419,11 +10839,31 @@
                           </a:solidFill>
                           <a:latin typeface="Calibri"/>
                         </a:rPr>
-                        <a:t>remove shifting marginals</a:t>
+                        <a:t>Remove shifting marginals</a:t>
                       </a:r>
                     </a:p>
                   </a:txBody>
                   <a:tcPr marL="73152" marR="73152" marT="27432" marB="27432">
+                    <a:lnL w="9525" cap="flat" cmpd="sng" algn="ctr">
+                      <a:solidFill>
+                        <a:srgbClr val="000000"/>
+                      </a:solidFill>
+                    </a:lnL>
+                    <a:lnR w="9525" cap="flat" cmpd="sng" algn="ctr">
+                      <a:solidFill>
+                        <a:srgbClr val="000000"/>
+                      </a:solidFill>
+                    </a:lnR>
+                    <a:lnT w="9525" cap="flat" cmpd="sng" algn="ctr">
+                      <a:solidFill>
+                        <a:srgbClr val="000000"/>
+                      </a:solidFill>
+                    </a:lnT>
+                    <a:lnB w="9525" cap="flat" cmpd="sng" algn="ctr">
+                      <a:solidFill>
+                        <a:srgbClr val="000000"/>
+                      </a:solidFill>
+                    </a:lnB>
                     <a:solidFill>
                       <a:srgbClr val="FFFFFF"/>
                     </a:solidFill>
@@ -7447,6 +10887,26 @@
                     </a:p>
                   </a:txBody>
                   <a:tcPr marL="73152" marR="73152" marT="27432" marB="27432">
+                    <a:lnL w="9525" cap="flat" cmpd="sng" algn="ctr">
+                      <a:solidFill>
+                        <a:srgbClr val="000000"/>
+                      </a:solidFill>
+                    </a:lnL>
+                    <a:lnR w="9525" cap="flat" cmpd="sng" algn="ctr">
+                      <a:solidFill>
+                        <a:srgbClr val="000000"/>
+                      </a:solidFill>
+                    </a:lnR>
+                    <a:lnT w="9525" cap="flat" cmpd="sng" algn="ctr">
+                      <a:solidFill>
+                        <a:srgbClr val="000000"/>
+                      </a:solidFill>
+                    </a:lnT>
+                    <a:lnB w="9525" cap="flat" cmpd="sng" algn="ctr">
+                      <a:solidFill>
+                        <a:srgbClr val="000000"/>
+                      </a:solidFill>
+                    </a:lnB>
                     <a:solidFill>
                       <a:srgbClr val="FFFFFF"/>
                     </a:solidFill>
@@ -7472,6 +10932,26 @@
                     </a:p>
                   </a:txBody>
                   <a:tcPr marL="73152" marR="73152" marT="27432" marB="27432">
+                    <a:lnL w="9525" cap="flat" cmpd="sng" algn="ctr">
+                      <a:solidFill>
+                        <a:srgbClr val="000000"/>
+                      </a:solidFill>
+                    </a:lnL>
+                    <a:lnR w="9525" cap="flat" cmpd="sng" algn="ctr">
+                      <a:solidFill>
+                        <a:srgbClr val="000000"/>
+                      </a:solidFill>
+                    </a:lnR>
+                    <a:lnT w="9525" cap="flat" cmpd="sng" algn="ctr">
+                      <a:solidFill>
+                        <a:srgbClr val="000000"/>
+                      </a:solidFill>
+                    </a:lnT>
+                    <a:lnB w="9525" cap="flat" cmpd="sng" algn="ctr">
+                      <a:solidFill>
+                        <a:srgbClr val="000000"/>
+                      </a:solidFill>
+                    </a:lnB>
                     <a:solidFill>
                       <a:srgbClr val="FFFFFF"/>
                     </a:solidFill>
@@ -7490,11 +10970,31 @@
                           </a:solidFill>
                           <a:latin typeface="Calibri"/>
                         </a:rPr>
-                        <a:t>adapt vs recall old patterns</a:t>
+                        <a:t>Adapt vs recall old patterns</a:t>
                       </a:r>
                     </a:p>
                   </a:txBody>
                   <a:tcPr marL="73152" marR="73152" marT="27432" marB="27432">
+                    <a:lnL w="9525" cap="flat" cmpd="sng" algn="ctr">
+                      <a:solidFill>
+                        <a:srgbClr val="000000"/>
+                      </a:solidFill>
+                    </a:lnL>
+                    <a:lnR w="9525" cap="flat" cmpd="sng" algn="ctr">
+                      <a:solidFill>
+                        <a:srgbClr val="000000"/>
+                      </a:solidFill>
+                    </a:lnR>
+                    <a:lnT w="9525" cap="flat" cmpd="sng" algn="ctr">
+                      <a:solidFill>
+                        <a:srgbClr val="000000"/>
+                      </a:solidFill>
+                    </a:lnT>
+                    <a:lnB w="9525" cap="flat" cmpd="sng" algn="ctr">
+                      <a:solidFill>
+                        <a:srgbClr val="000000"/>
+                      </a:solidFill>
+                    </a:lnB>
                     <a:solidFill>
                       <a:srgbClr val="FFFFFF"/>
                     </a:solidFill>
@@ -7518,6 +11018,26 @@
                     </a:p>
                   </a:txBody>
                   <a:tcPr marL="73152" marR="73152" marT="27432" marB="27432">
+                    <a:lnL w="9525" cap="flat" cmpd="sng" algn="ctr">
+                      <a:solidFill>
+                        <a:srgbClr val="000000"/>
+                      </a:solidFill>
+                    </a:lnL>
+                    <a:lnR w="9525" cap="flat" cmpd="sng" algn="ctr">
+                      <a:solidFill>
+                        <a:srgbClr val="000000"/>
+                      </a:solidFill>
+                    </a:lnR>
+                    <a:lnT w="9525" cap="flat" cmpd="sng" algn="ctr">
+                      <a:solidFill>
+                        <a:srgbClr val="000000"/>
+                      </a:solidFill>
+                    </a:lnT>
+                    <a:lnB w="9525" cap="flat" cmpd="sng" algn="ctr">
+                      <a:solidFill>
+                        <a:srgbClr val="000000"/>
+                      </a:solidFill>
+                    </a:lnB>
                     <a:solidFill>
                       <a:srgbClr val="FFFFFF"/>
                     </a:solidFill>
@@ -7543,6 +11063,26 @@
                     </a:p>
                   </a:txBody>
                   <a:tcPr marL="73152" marR="73152" marT="27432" marB="27432">
+                    <a:lnL w="9525" cap="flat" cmpd="sng" algn="ctr">
+                      <a:solidFill>
+                        <a:srgbClr val="000000"/>
+                      </a:solidFill>
+                    </a:lnL>
+                    <a:lnR w="9525" cap="flat" cmpd="sng" algn="ctr">
+                      <a:solidFill>
+                        <a:srgbClr val="000000"/>
+                      </a:solidFill>
+                    </a:lnR>
+                    <a:lnT w="9525" cap="flat" cmpd="sng" algn="ctr">
+                      <a:solidFill>
+                        <a:srgbClr val="000000"/>
+                      </a:solidFill>
+                    </a:lnT>
+                    <a:lnB w="9525" cap="flat" cmpd="sng" algn="ctr">
+                      <a:solidFill>
+                        <a:srgbClr val="000000"/>
+                      </a:solidFill>
+                    </a:lnB>
                     <a:solidFill>
                       <a:srgbClr val="FFFFFF"/>
                     </a:solidFill>
@@ -7561,11 +11101,31 @@
                           </a:solidFill>
                           <a:latin typeface="Calibri"/>
                         </a:rPr>
-                        <a:t>one model per concept</a:t>
+                        <a:t>One model per concept</a:t>
                       </a:r>
                     </a:p>
                   </a:txBody>
                   <a:tcPr marL="73152" marR="73152" marT="27432" marB="27432">
+                    <a:lnL w="9525" cap="flat" cmpd="sng" algn="ctr">
+                      <a:solidFill>
+                        <a:srgbClr val="000000"/>
+                      </a:solidFill>
+                    </a:lnL>
+                    <a:lnR w="9525" cap="flat" cmpd="sng" algn="ctr">
+                      <a:solidFill>
+                        <a:srgbClr val="000000"/>
+                      </a:solidFill>
+                    </a:lnR>
+                    <a:lnT w="9525" cap="flat" cmpd="sng" algn="ctr">
+                      <a:solidFill>
+                        <a:srgbClr val="000000"/>
+                      </a:solidFill>
+                    </a:lnT>
+                    <a:lnB w="9525" cap="flat" cmpd="sng" algn="ctr">
+                      <a:solidFill>
+                        <a:srgbClr val="000000"/>
+                      </a:solidFill>
+                    </a:lnB>
                     <a:solidFill>
                       <a:srgbClr val="FFFFFF"/>
                     </a:solidFill>
@@ -7589,6 +11149,26 @@
                     </a:p>
                   </a:txBody>
                   <a:tcPr marL="73152" marR="73152" marT="27432" marB="27432">
+                    <a:lnL w="9525" cap="flat" cmpd="sng" algn="ctr">
+                      <a:solidFill>
+                        <a:srgbClr val="000000"/>
+                      </a:solidFill>
+                    </a:lnL>
+                    <a:lnR w="9525" cap="flat" cmpd="sng" algn="ctr">
+                      <a:solidFill>
+                        <a:srgbClr val="000000"/>
+                      </a:solidFill>
+                    </a:lnR>
+                    <a:lnT w="9525" cap="flat" cmpd="sng" algn="ctr">
+                      <a:solidFill>
+                        <a:srgbClr val="000000"/>
+                      </a:solidFill>
+                    </a:lnT>
+                    <a:lnB w="9525" cap="flat" cmpd="sng" algn="ctr">
+                      <a:solidFill>
+                        <a:srgbClr val="000000"/>
+                      </a:solidFill>
+                    </a:lnB>
                     <a:solidFill>
                       <a:srgbClr val="FFFFFF"/>
                     </a:solidFill>
@@ -7614,6 +11194,26 @@
                     </a:p>
                   </a:txBody>
                   <a:tcPr marL="73152" marR="73152" marT="27432" marB="27432">
+                    <a:lnL w="9525" cap="flat" cmpd="sng" algn="ctr">
+                      <a:solidFill>
+                        <a:srgbClr val="000000"/>
+                      </a:solidFill>
+                    </a:lnL>
+                    <a:lnR w="9525" cap="flat" cmpd="sng" algn="ctr">
+                      <a:solidFill>
+                        <a:srgbClr val="000000"/>
+                      </a:solidFill>
+                    </a:lnR>
+                    <a:lnT w="9525" cap="flat" cmpd="sng" algn="ctr">
+                      <a:solidFill>
+                        <a:srgbClr val="000000"/>
+                      </a:solidFill>
+                    </a:lnT>
+                    <a:lnB w="9525" cap="flat" cmpd="sng" algn="ctr">
+                      <a:solidFill>
+                        <a:srgbClr val="000000"/>
+                      </a:solidFill>
+                    </a:lnB>
                     <a:solidFill>
                       <a:srgbClr val="FFFFFF"/>
                     </a:solidFill>
@@ -7632,11 +11232,31 @@
                           </a:solidFill>
                           <a:latin typeface="Calibri"/>
                         </a:rPr>
-                        <a:t>predict the parameter shift</a:t>
+                        <a:t>Predict the parameter shift</a:t>
                       </a:r>
                     </a:p>
                   </a:txBody>
                   <a:tcPr marL="73152" marR="73152" marT="27432" marB="27432">
+                    <a:lnL w="9525" cap="flat" cmpd="sng" algn="ctr">
+                      <a:solidFill>
+                        <a:srgbClr val="000000"/>
+                      </a:solidFill>
+                    </a:lnL>
+                    <a:lnR w="9525" cap="flat" cmpd="sng" algn="ctr">
+                      <a:solidFill>
+                        <a:srgbClr val="000000"/>
+                      </a:solidFill>
+                    </a:lnR>
+                    <a:lnT w="9525" cap="flat" cmpd="sng" algn="ctr">
+                      <a:solidFill>
+                        <a:srgbClr val="000000"/>
+                      </a:solidFill>
+                    </a:lnT>
+                    <a:lnB w="9525" cap="flat" cmpd="sng" algn="ctr">
+                      <a:solidFill>
+                        <a:srgbClr val="000000"/>
+                      </a:solidFill>
+                    </a:lnB>
                     <a:solidFill>
                       <a:srgbClr val="FFFFFF"/>
                     </a:solidFill>
@@ -7660,6 +11280,26 @@
                     </a:p>
                   </a:txBody>
                   <a:tcPr marL="73152" marR="73152" marT="27432" marB="27432">
+                    <a:lnL w="9525" cap="flat" cmpd="sng" algn="ctr">
+                      <a:solidFill>
+                        <a:srgbClr val="000000"/>
+                      </a:solidFill>
+                    </a:lnL>
+                    <a:lnR w="9525" cap="flat" cmpd="sng" algn="ctr">
+                      <a:solidFill>
+                        <a:srgbClr val="000000"/>
+                      </a:solidFill>
+                    </a:lnR>
+                    <a:lnT w="9525" cap="flat" cmpd="sng" algn="ctr">
+                      <a:solidFill>
+                        <a:srgbClr val="000000"/>
+                      </a:solidFill>
+                    </a:lnT>
+                    <a:lnB w="9525" cap="flat" cmpd="sng" algn="ctr">
+                      <a:solidFill>
+                        <a:srgbClr val="000000"/>
+                      </a:solidFill>
+                    </a:lnB>
                     <a:solidFill>
                       <a:srgbClr val="FFFFFF"/>
                     </a:solidFill>
@@ -7704,7 +11344,7 @@
                 </a:solidFill>
                 <a:latin typeface="Calibri"/>
               </a:rPr>
-              <a:t>Only Proceed realises Read's proposal, mapping drift to</a:t>
+              <a:t>Only Proceed realises Read's proposal.</a:t>
             </a:r>
           </a:p>
           <a:p>
@@ -7720,7 +11360,7 @@
                 </a:solidFill>
                 <a:latin typeface="Calibri"/>
               </a:rPr>
-              <a:t>a parameter adjustment through a learned generator:</a:t>
+              <a:t>It maps drift to a parameter adjustment:</a:t>
             </a:r>
           </a:p>
         </p:txBody>
@@ -7895,7 +11535,7 @@
                 </a:solidFill>
                 <a:latin typeface="Calibri"/>
               </a:rPr>
-              <a:t>weights are unavailable — learn the error structure</a:t>
+              <a:t>Weights are unavailable — learn the error structure</a:t>
             </a:r>
           </a:p>
           <a:p>
@@ -7927,7 +11567,7 @@
                 </a:solidFill>
                 <a:latin typeface="Calibri"/>
               </a:rPr>
-              <a:t>build change into the in-context prior</a:t>
+              <a:t>Build change into the in-context prior</a:t>
             </a:r>
           </a:p>
           <a:p>
@@ -7943,7 +11583,7 @@
                 </a:solidFill>
                 <a:latin typeface="Calibri"/>
               </a:rPr>
-              <a:t>Both are continuous adaptation; the parameters merely</a:t>
+              <a:t>Both are continuous adaptation.</a:t>
             </a:r>
           </a:p>
           <a:p>
@@ -7959,7 +11599,7 @@
                 </a:solidFill>
                 <a:latin typeface="Calibri"/>
               </a:rPr>
-              <a:t>reside elsewhere.</a:t>
+              <a:t>The parameters merely reside elsewhere.</a:t>
             </a:r>
           </a:p>
         </p:txBody>
@@ -8158,7 +11798,7 @@
                 </a:solidFill>
                 <a:latin typeface="Calibri"/>
               </a:rPr>
-              <a:t>tracking a periodic context is wasted work</a:t>
+              <a:t>Tracking a periodic context is wasted work</a:t>
             </a:r>
           </a:p>
           <a:p>
@@ -8190,7 +11830,7 @@
                 </a:solidFill>
                 <a:latin typeface="Calibri"/>
               </a:rPr>
-              <a:t>the crossover has no published characterisation</a:t>
+              <a:t>The crossover has no published characterisation</a:t>
             </a:r>
           </a:p>
           <a:p>
@@ -8222,7 +11862,7 @@
                 </a:solidFill>
                 <a:latin typeface="Calibri"/>
               </a:rPr>
-              <a:t>the motivating applications are neither</a:t>
+              <a:t>The motivating applications are neither</a:t>
             </a:r>
           </a:p>
         </p:txBody>
@@ -8346,6 +11986,26 @@
                     </a:p>
                   </a:txBody>
                   <a:tcPr marL="73152" marR="73152" marT="27432" marB="27432">
+                    <a:lnL w="9525" cap="flat" cmpd="sng" algn="ctr">
+                      <a:solidFill>
+                        <a:srgbClr val="000000"/>
+                      </a:solidFill>
+                    </a:lnL>
+                    <a:lnR w="9525" cap="flat" cmpd="sng" algn="ctr">
+                      <a:solidFill>
+                        <a:srgbClr val="000000"/>
+                      </a:solidFill>
+                    </a:lnR>
+                    <a:lnT w="9525" cap="flat" cmpd="sng" algn="ctr">
+                      <a:solidFill>
+                        <a:srgbClr val="000000"/>
+                      </a:solidFill>
+                    </a:lnT>
+                    <a:lnB w="9525" cap="flat" cmpd="sng" algn="ctr">
+                      <a:solidFill>
+                        <a:srgbClr val="000000"/>
+                      </a:solidFill>
+                    </a:lnB>
                     <a:solidFill>
                       <a:srgbClr val="FFFFFF"/>
                     </a:solidFill>
@@ -8364,11 +12024,31 @@
                           </a:solidFill>
                           <a:latin typeface="Calibri"/>
                         </a:rPr>
-                        <a:t>question</a:t>
+                        <a:t>Question</a:t>
                       </a:r>
                     </a:p>
                   </a:txBody>
                   <a:tcPr marL="73152" marR="73152" marT="27432" marB="27432">
+                    <a:lnL w="9525" cap="flat" cmpd="sng" algn="ctr">
+                      <a:solidFill>
+                        <a:srgbClr val="000000"/>
+                      </a:solidFill>
+                    </a:lnL>
+                    <a:lnR w="9525" cap="flat" cmpd="sng" algn="ctr">
+                      <a:solidFill>
+                        <a:srgbClr val="000000"/>
+                      </a:solidFill>
+                    </a:lnR>
+                    <a:lnT w="9525" cap="flat" cmpd="sng" algn="ctr">
+                      <a:solidFill>
+                        <a:srgbClr val="000000"/>
+                      </a:solidFill>
+                    </a:lnT>
+                    <a:lnB w="9525" cap="flat" cmpd="sng" algn="ctr">
+                      <a:solidFill>
+                        <a:srgbClr val="000000"/>
+                      </a:solidFill>
+                    </a:lnB>
                     <a:solidFill>
                       <a:srgbClr val="FFFFFF"/>
                     </a:solidFill>
@@ -8387,11 +12067,31 @@
                           </a:solidFill>
                           <a:latin typeface="Calibri"/>
                         </a:rPr>
-                        <a:t>prediction</a:t>
+                        <a:t>Prediction</a:t>
                       </a:r>
                     </a:p>
                   </a:txBody>
                   <a:tcPr marL="73152" marR="73152" marT="27432" marB="27432">
+                    <a:lnL w="9525" cap="flat" cmpd="sng" algn="ctr">
+                      <a:solidFill>
+                        <a:srgbClr val="000000"/>
+                      </a:solidFill>
+                    </a:lnL>
+                    <a:lnR w="9525" cap="flat" cmpd="sng" algn="ctr">
+                      <a:solidFill>
+                        <a:srgbClr val="000000"/>
+                      </a:solidFill>
+                    </a:lnR>
+                    <a:lnT w="9525" cap="flat" cmpd="sng" algn="ctr">
+                      <a:solidFill>
+                        <a:srgbClr val="000000"/>
+                      </a:solidFill>
+                    </a:lnT>
+                    <a:lnB w="9525" cap="flat" cmpd="sng" algn="ctr">
+                      <a:solidFill>
+                        <a:srgbClr val="000000"/>
+                      </a:solidFill>
+                    </a:lnB>
                     <a:solidFill>
                       <a:srgbClr val="FFFFFF"/>
                     </a:solidFill>
@@ -8417,6 +12117,26 @@
                     </a:p>
                   </a:txBody>
                   <a:tcPr marL="73152" marR="73152" marT="27432" marB="27432">
+                    <a:lnL w="9525" cap="flat" cmpd="sng" algn="ctr">
+                      <a:solidFill>
+                        <a:srgbClr val="000000"/>
+                      </a:solidFill>
+                    </a:lnL>
+                    <a:lnR w="9525" cap="flat" cmpd="sng" algn="ctr">
+                      <a:solidFill>
+                        <a:srgbClr val="000000"/>
+                      </a:solidFill>
+                    </a:lnR>
+                    <a:lnT w="9525" cap="flat" cmpd="sng" algn="ctr">
+                      <a:solidFill>
+                        <a:srgbClr val="000000"/>
+                      </a:solidFill>
+                    </a:lnT>
+                    <a:lnB w="9525" cap="flat" cmpd="sng" algn="ctr">
+                      <a:solidFill>
+                        <a:srgbClr val="000000"/>
+                      </a:solidFill>
+                    </a:lnB>
                     <a:solidFill>
                       <a:srgbClr val="FFFFFF"/>
                     </a:solidFill>
@@ -8440,6 +12160,26 @@
                     </a:p>
                   </a:txBody>
                   <a:tcPr marL="73152" marR="73152" marT="27432" marB="27432">
+                    <a:lnL w="9525" cap="flat" cmpd="sng" algn="ctr">
+                      <a:solidFill>
+                        <a:srgbClr val="000000"/>
+                      </a:solidFill>
+                    </a:lnL>
+                    <a:lnR w="9525" cap="flat" cmpd="sng" algn="ctr">
+                      <a:solidFill>
+                        <a:srgbClr val="000000"/>
+                      </a:solidFill>
+                    </a:lnR>
+                    <a:lnT w="9525" cap="flat" cmpd="sng" algn="ctr">
+                      <a:solidFill>
+                        <a:srgbClr val="000000"/>
+                      </a:solidFill>
+                    </a:lnT>
+                    <a:lnB w="9525" cap="flat" cmpd="sng" algn="ctr">
+                      <a:solidFill>
+                        <a:srgbClr val="000000"/>
+                      </a:solidFill>
+                    </a:lnB>
                     <a:solidFill>
                       <a:srgbClr val="FFFFFF"/>
                     </a:solidFill>
@@ -8458,12 +12198,32 @@
                           </a:solidFill>
                           <a:latin typeface="Calibri"/>
                         </a:rPr>
-                        <a:t>a rotation-aware extrapolator
+                        <a:t>A rotation-aware extrapolator
 closes the gap</a:t>
                       </a:r>
                     </a:p>
                   </a:txBody>
                   <a:tcPr marL="73152" marR="73152" marT="27432" marB="27432">
+                    <a:lnL w="9525" cap="flat" cmpd="sng" algn="ctr">
+                      <a:solidFill>
+                        <a:srgbClr val="000000"/>
+                      </a:solidFill>
+                    </a:lnL>
+                    <a:lnR w="9525" cap="flat" cmpd="sng" algn="ctr">
+                      <a:solidFill>
+                        <a:srgbClr val="000000"/>
+                      </a:solidFill>
+                    </a:lnR>
+                    <a:lnT w="9525" cap="flat" cmpd="sng" algn="ctr">
+                      <a:solidFill>
+                        <a:srgbClr val="000000"/>
+                      </a:solidFill>
+                    </a:lnT>
+                    <a:lnB w="9525" cap="flat" cmpd="sng" algn="ctr">
+                      <a:solidFill>
+                        <a:srgbClr val="000000"/>
+                      </a:solidFill>
+                    </a:lnB>
                     <a:solidFill>
                       <a:srgbClr val="FFFFFF"/>
                     </a:solidFill>
@@ -8489,6 +12249,26 @@
                     </a:p>
                   </a:txBody>
                   <a:tcPr marL="73152" marR="73152" marT="27432" marB="27432">
+                    <a:lnL w="9525" cap="flat" cmpd="sng" algn="ctr">
+                      <a:solidFill>
+                        <a:srgbClr val="000000"/>
+                      </a:solidFill>
+                    </a:lnL>
+                    <a:lnR w="9525" cap="flat" cmpd="sng" algn="ctr">
+                      <a:solidFill>
+                        <a:srgbClr val="000000"/>
+                      </a:solidFill>
+                    </a:lnR>
+                    <a:lnT w="9525" cap="flat" cmpd="sng" algn="ctr">
+                      <a:solidFill>
+                        <a:srgbClr val="000000"/>
+                      </a:solidFill>
+                    </a:lnT>
+                    <a:lnB w="9525" cap="flat" cmpd="sng" algn="ctr">
+                      <a:solidFill>
+                        <a:srgbClr val="000000"/>
+                      </a:solidFill>
+                    </a:lnB>
                     <a:solidFill>
                       <a:srgbClr val="FFFFFF"/>
                     </a:solidFill>
@@ -8512,6 +12292,26 @@
                     </a:p>
                   </a:txBody>
                   <a:tcPr marL="73152" marR="73152" marT="27432" marB="27432">
+                    <a:lnL w="9525" cap="flat" cmpd="sng" algn="ctr">
+                      <a:solidFill>
+                        <a:srgbClr val="000000"/>
+                      </a:solidFill>
+                    </a:lnL>
+                    <a:lnR w="9525" cap="flat" cmpd="sng" algn="ctr">
+                      <a:solidFill>
+                        <a:srgbClr val="000000"/>
+                      </a:solidFill>
+                    </a:lnR>
+                    <a:lnT w="9525" cap="flat" cmpd="sng" algn="ctr">
+                      <a:solidFill>
+                        <a:srgbClr val="000000"/>
+                      </a:solidFill>
+                    </a:lnT>
+                    <a:lnB w="9525" cap="flat" cmpd="sng" algn="ctr">
+                      <a:solidFill>
+                        <a:srgbClr val="000000"/>
+                      </a:solidFill>
+                    </a:lnB>
                     <a:solidFill>
                       <a:srgbClr val="FFFFFF"/>
                     </a:solidFill>
@@ -8571,6 +12371,26 @@
                     </a:p>
                   </a:txBody>
                   <a:tcPr marL="73152" marR="73152" marT="27432" marB="27432">
+                    <a:lnL w="9525" cap="flat" cmpd="sng" algn="ctr">
+                      <a:solidFill>
+                        <a:srgbClr val="000000"/>
+                      </a:solidFill>
+                    </a:lnL>
+                    <a:lnR w="9525" cap="flat" cmpd="sng" algn="ctr">
+                      <a:solidFill>
+                        <a:srgbClr val="000000"/>
+                      </a:solidFill>
+                    </a:lnR>
+                    <a:lnT w="9525" cap="flat" cmpd="sng" algn="ctr">
+                      <a:solidFill>
+                        <a:srgbClr val="000000"/>
+                      </a:solidFill>
+                    </a:lnT>
+                    <a:lnB w="9525" cap="flat" cmpd="sng" algn="ctr">
+                      <a:solidFill>
+                        <a:srgbClr val="000000"/>
+                      </a:solidFill>
+                    </a:lnB>
                     <a:solidFill>
                       <a:srgbClr val="FFFFFF"/>
                     </a:solidFill>
@@ -8596,6 +12416,26 @@
                     </a:p>
                   </a:txBody>
                   <a:tcPr marL="73152" marR="73152" marT="27432" marB="27432">
+                    <a:lnL w="9525" cap="flat" cmpd="sng" algn="ctr">
+                      <a:solidFill>
+                        <a:srgbClr val="000000"/>
+                      </a:solidFill>
+                    </a:lnL>
+                    <a:lnR w="9525" cap="flat" cmpd="sng" algn="ctr">
+                      <a:solidFill>
+                        <a:srgbClr val="000000"/>
+                      </a:solidFill>
+                    </a:lnR>
+                    <a:lnT w="9525" cap="flat" cmpd="sng" algn="ctr">
+                      <a:solidFill>
+                        <a:srgbClr val="000000"/>
+                      </a:solidFill>
+                    </a:lnT>
+                    <a:lnB w="9525" cap="flat" cmpd="sng" algn="ctr">
+                      <a:solidFill>
+                        <a:srgbClr val="000000"/>
+                      </a:solidFill>
+                    </a:lnB>
                     <a:solidFill>
                       <a:srgbClr val="FFFFFF"/>
                     </a:solidFill>
@@ -8619,6 +12459,26 @@
                     </a:p>
                   </a:txBody>
                   <a:tcPr marL="73152" marR="73152" marT="27432" marB="27432">
+                    <a:lnL w="9525" cap="flat" cmpd="sng" algn="ctr">
+                      <a:solidFill>
+                        <a:srgbClr val="000000"/>
+                      </a:solidFill>
+                    </a:lnL>
+                    <a:lnR w="9525" cap="flat" cmpd="sng" algn="ctr">
+                      <a:solidFill>
+                        <a:srgbClr val="000000"/>
+                      </a:solidFill>
+                    </a:lnR>
+                    <a:lnT w="9525" cap="flat" cmpd="sng" algn="ctr">
+                      <a:solidFill>
+                        <a:srgbClr val="000000"/>
+                      </a:solidFill>
+                    </a:lnT>
+                    <a:lnB w="9525" cap="flat" cmpd="sng" algn="ctr">
+                      <a:solidFill>
+                        <a:srgbClr val="000000"/>
+                      </a:solidFill>
+                    </a:lnB>
                     <a:solidFill>
                       <a:srgbClr val="FFFFFF"/>
                     </a:solidFill>
@@ -8637,11 +12497,31 @@
                           </a:solidFill>
                           <a:latin typeface="Calibri"/>
                         </a:rPr>
-                        <a:t>a crossover period p* exists</a:t>
+                        <a:t>A crossover period p* exists</a:t>
                       </a:r>
                     </a:p>
                   </a:txBody>
                   <a:tcPr marL="73152" marR="73152" marT="27432" marB="27432">
+                    <a:lnL w="9525" cap="flat" cmpd="sng" algn="ctr">
+                      <a:solidFill>
+                        <a:srgbClr val="000000"/>
+                      </a:solidFill>
+                    </a:lnL>
+                    <a:lnR w="9525" cap="flat" cmpd="sng" algn="ctr">
+                      <a:solidFill>
+                        <a:srgbClr val="000000"/>
+                      </a:solidFill>
+                    </a:lnR>
+                    <a:lnT w="9525" cap="flat" cmpd="sng" algn="ctr">
+                      <a:solidFill>
+                        <a:srgbClr val="000000"/>
+                      </a:solidFill>
+                    </a:lnT>
+                    <a:lnB w="9525" cap="flat" cmpd="sng" algn="ctr">
+                      <a:solidFill>
+                        <a:srgbClr val="000000"/>
+                      </a:solidFill>
+                    </a:lnB>
                     <a:solidFill>
                       <a:srgbClr val="FFFFFF"/>
                     </a:solidFill>
@@ -8667,6 +12547,26 @@
                     </a:p>
                   </a:txBody>
                   <a:tcPr marL="73152" marR="73152" marT="27432" marB="27432">
+                    <a:lnL w="9525" cap="flat" cmpd="sng" algn="ctr">
+                      <a:solidFill>
+                        <a:srgbClr val="000000"/>
+                      </a:solidFill>
+                    </a:lnL>
+                    <a:lnR w="9525" cap="flat" cmpd="sng" algn="ctr">
+                      <a:solidFill>
+                        <a:srgbClr val="000000"/>
+                      </a:solidFill>
+                    </a:lnR>
+                    <a:lnT w="9525" cap="flat" cmpd="sng" algn="ctr">
+                      <a:solidFill>
+                        <a:srgbClr val="000000"/>
+                      </a:solidFill>
+                    </a:lnT>
+                    <a:lnB w="9525" cap="flat" cmpd="sng" algn="ctr">
+                      <a:solidFill>
+                        <a:srgbClr val="000000"/>
+                      </a:solidFill>
+                    </a:lnB>
                     <a:solidFill>
                       <a:srgbClr val="FFFFFF"/>
                     </a:solidFill>
@@ -8690,6 +12590,26 @@
                     </a:p>
                   </a:txBody>
                   <a:tcPr marL="73152" marR="73152" marT="27432" marB="27432">
+                    <a:lnL w="9525" cap="flat" cmpd="sng" algn="ctr">
+                      <a:solidFill>
+                        <a:srgbClr val="000000"/>
+                      </a:solidFill>
+                    </a:lnL>
+                    <a:lnR w="9525" cap="flat" cmpd="sng" algn="ctr">
+                      <a:solidFill>
+                        <a:srgbClr val="000000"/>
+                      </a:solidFill>
+                    </a:lnR>
+                    <a:lnT w="9525" cap="flat" cmpd="sng" algn="ctr">
+                      <a:solidFill>
+                        <a:srgbClr val="000000"/>
+                      </a:solidFill>
+                    </a:lnT>
+                    <a:lnB w="9525" cap="flat" cmpd="sng" algn="ctr">
+                      <a:solidFill>
+                        <a:srgbClr val="000000"/>
+                      </a:solidFill>
+                    </a:lnB>
                     <a:solidFill>
                       <a:srgbClr val="FFFFFF"/>
                     </a:solidFill>
@@ -8713,6 +12633,26 @@
                     </a:p>
                   </a:txBody>
                   <a:tcPr marL="73152" marR="73152" marT="27432" marB="27432">
+                    <a:lnL w="9525" cap="flat" cmpd="sng" algn="ctr">
+                      <a:solidFill>
+                        <a:srgbClr val="000000"/>
+                      </a:solidFill>
+                    </a:lnL>
+                    <a:lnR w="9525" cap="flat" cmpd="sng" algn="ctr">
+                      <a:solidFill>
+                        <a:srgbClr val="000000"/>
+                      </a:solidFill>
+                    </a:lnR>
+                    <a:lnT w="9525" cap="flat" cmpd="sng" algn="ctr">
+                      <a:solidFill>
+                        <a:srgbClr val="000000"/>
+                      </a:solidFill>
+                    </a:lnT>
+                    <a:lnB w="9525" cap="flat" cmpd="sng" algn="ctr">
+                      <a:solidFill>
+                        <a:srgbClr val="000000"/>
+                      </a:solidFill>
+                    </a:lnB>
                     <a:solidFill>
                       <a:srgbClr val="FFFFFF"/>
                     </a:solidFill>
@@ -9268,7 +13208,7 @@
                 </a:solidFill>
                 <a:latin typeface="Calibri"/>
               </a:rPr>
-              <a:t>degradation is silent</a:t>
+              <a:t>Degradation is silent</a:t>
             </a:r>
           </a:p>
           <a:p>
@@ -9284,7 +13224,7 @@
                 </a:solidFill>
                 <a:latin typeface="Calibri"/>
               </a:rPr>
-              <a:t>retraining from scratch is unavailable</a:t>
+              <a:t>Retraining from scratch is unavailable</a:t>
             </a:r>
           </a:p>
         </p:txBody>
@@ -9385,7 +13325,7 @@
         </p:nvGraphicFramePr>
         <p:xfrm>
           <a:off x="640080" y="2057400"/>
-          <a:ext cx="10911533" cy="2743200"/>
+          <a:ext cx="10911533" cy="2468880"/>
         </p:xfrm>
         <a:graphic>
           <a:graphicData uri="http://schemas.openxmlformats.org/drawingml/2006/table">
@@ -9398,7 +13338,7 @@
                 <a:gridCol w="4959788"/>
                 <a:gridCol w="3571047"/>
               </a:tblGrid>
-              <a:tr h="548640">
+              <a:tr h="493776">
                 <a:tc>
                   <a:txBody>
                     <a:bodyPr/>
@@ -9412,11 +13352,31 @@
                           </a:solidFill>
                           <a:latin typeface="Calibri"/>
                         </a:rPr>
-                        <a:t>type</a:t>
+                        <a:t>Type</a:t>
                       </a:r>
                     </a:p>
                   </a:txBody>
                   <a:tcPr marL="73152" marR="73152" marT="27432" marB="27432">
+                    <a:lnL w="9525" cap="flat" cmpd="sng" algn="ctr">
+                      <a:solidFill>
+                        <a:srgbClr val="000000"/>
+                      </a:solidFill>
+                    </a:lnL>
+                    <a:lnR w="9525" cap="flat" cmpd="sng" algn="ctr">
+                      <a:solidFill>
+                        <a:srgbClr val="000000"/>
+                      </a:solidFill>
+                    </a:lnR>
+                    <a:lnT w="9525" cap="flat" cmpd="sng" algn="ctr">
+                      <a:solidFill>
+                        <a:srgbClr val="000000"/>
+                      </a:solidFill>
+                    </a:lnT>
+                    <a:lnB w="9525" cap="flat" cmpd="sng" algn="ctr">
+                      <a:solidFill>
+                        <a:srgbClr val="000000"/>
+                      </a:solidFill>
+                    </a:lnB>
                     <a:solidFill>
                       <a:srgbClr val="FFFFFF"/>
                     </a:solidFill>
@@ -9435,11 +13395,31 @@
                           </a:solidFill>
                           <a:latin typeface="Calibri"/>
                         </a:rPr>
-                        <a:t>behaviour</a:t>
+                        <a:t>Behaviour</a:t>
                       </a:r>
                     </a:p>
                   </a:txBody>
                   <a:tcPr marL="73152" marR="73152" marT="27432" marB="27432">
+                    <a:lnL w="9525" cap="flat" cmpd="sng" algn="ctr">
+                      <a:solidFill>
+                        <a:srgbClr val="000000"/>
+                      </a:solidFill>
+                    </a:lnL>
+                    <a:lnR w="9525" cap="flat" cmpd="sng" algn="ctr">
+                      <a:solidFill>
+                        <a:srgbClr val="000000"/>
+                      </a:solidFill>
+                    </a:lnR>
+                    <a:lnT w="9525" cap="flat" cmpd="sng" algn="ctr">
+                      <a:solidFill>
+                        <a:srgbClr val="000000"/>
+                      </a:solidFill>
+                    </a:lnT>
+                    <a:lnB w="9525" cap="flat" cmpd="sng" algn="ctr">
+                      <a:solidFill>
+                        <a:srgbClr val="000000"/>
+                      </a:solidFill>
+                    </a:lnB>
                     <a:solidFill>
                       <a:srgbClr val="FFFFFF"/>
                     </a:solidFill>
@@ -9458,18 +13438,38 @@
                           </a:solidFill>
                           <a:latin typeface="Calibri"/>
                         </a:rPr>
-                        <a:t>intermediate states</a:t>
+                        <a:t>Intermediate states</a:t>
                       </a:r>
                     </a:p>
                   </a:txBody>
                   <a:tcPr marL="73152" marR="73152" marT="27432" marB="27432">
+                    <a:lnL w="9525" cap="flat" cmpd="sng" algn="ctr">
+                      <a:solidFill>
+                        <a:srgbClr val="000000"/>
+                      </a:solidFill>
+                    </a:lnL>
+                    <a:lnR w="9525" cap="flat" cmpd="sng" algn="ctr">
+                      <a:solidFill>
+                        <a:srgbClr val="000000"/>
+                      </a:solidFill>
+                    </a:lnR>
+                    <a:lnT w="9525" cap="flat" cmpd="sng" algn="ctr">
+                      <a:solidFill>
+                        <a:srgbClr val="000000"/>
+                      </a:solidFill>
+                    </a:lnT>
+                    <a:lnB w="9525" cap="flat" cmpd="sng" algn="ctr">
+                      <a:solidFill>
+                        <a:srgbClr val="000000"/>
+                      </a:solidFill>
+                    </a:lnB>
                     <a:solidFill>
                       <a:srgbClr val="FFFFFF"/>
                     </a:solidFill>
                   </a:tcPr>
                 </a:tc>
               </a:tr>
-              <a:tr h="548640">
+              <a:tr h="493776">
                 <a:tc>
                   <a:txBody>
                     <a:bodyPr/>
@@ -9488,6 +13488,26 @@
                     </a:p>
                   </a:txBody>
                   <a:tcPr marL="73152" marR="73152" marT="27432" marB="27432">
+                    <a:lnL w="9525" cap="flat" cmpd="sng" algn="ctr">
+                      <a:solidFill>
+                        <a:srgbClr val="000000"/>
+                      </a:solidFill>
+                    </a:lnL>
+                    <a:lnR w="9525" cap="flat" cmpd="sng" algn="ctr">
+                      <a:solidFill>
+                        <a:srgbClr val="000000"/>
+                      </a:solidFill>
+                    </a:lnR>
+                    <a:lnT w="9525" cap="flat" cmpd="sng" algn="ctr">
+                      <a:solidFill>
+                        <a:srgbClr val="000000"/>
+                      </a:solidFill>
+                    </a:lnT>
+                    <a:lnB w="9525" cap="flat" cmpd="sng" algn="ctr">
+                      <a:solidFill>
+                        <a:srgbClr val="000000"/>
+                      </a:solidFill>
+                    </a:lnB>
                     <a:solidFill>
                       <a:srgbClr val="FFFFFF"/>
                     </a:solidFill>
@@ -9506,11 +13526,31 @@
                           </a:solidFill>
                           <a:latin typeface="Calibri"/>
                         </a:rPr>
-                        <a:t>one concept replaces another</a:t>
+                        <a:t>One concept replaces another</a:t>
                       </a:r>
                     </a:p>
                   </a:txBody>
                   <a:tcPr marL="73152" marR="73152" marT="27432" marB="27432">
+                    <a:lnL w="9525" cap="flat" cmpd="sng" algn="ctr">
+                      <a:solidFill>
+                        <a:srgbClr val="000000"/>
+                      </a:solidFill>
+                    </a:lnL>
+                    <a:lnR w="9525" cap="flat" cmpd="sng" algn="ctr">
+                      <a:solidFill>
+                        <a:srgbClr val="000000"/>
+                      </a:solidFill>
+                    </a:lnR>
+                    <a:lnT w="9525" cap="flat" cmpd="sng" algn="ctr">
+                      <a:solidFill>
+                        <a:srgbClr val="000000"/>
+                      </a:solidFill>
+                    </a:lnT>
+                    <a:lnB w="9525" cap="flat" cmpd="sng" algn="ctr">
+                      <a:solidFill>
+                        <a:srgbClr val="000000"/>
+                      </a:solidFill>
+                    </a:lnB>
                     <a:solidFill>
                       <a:srgbClr val="FFFFFF"/>
                     </a:solidFill>
@@ -9529,18 +13569,38 @@
                           </a:solidFill>
                           <a:latin typeface="Calibri"/>
                         </a:rPr>
-                        <a:t>none</a:t>
+                        <a:t>None</a:t>
                       </a:r>
                     </a:p>
                   </a:txBody>
                   <a:tcPr marL="73152" marR="73152" marT="27432" marB="27432">
+                    <a:lnL w="9525" cap="flat" cmpd="sng" algn="ctr">
+                      <a:solidFill>
+                        <a:srgbClr val="000000"/>
+                      </a:solidFill>
+                    </a:lnL>
+                    <a:lnR w="9525" cap="flat" cmpd="sng" algn="ctr">
+                      <a:solidFill>
+                        <a:srgbClr val="000000"/>
+                      </a:solidFill>
+                    </a:lnR>
+                    <a:lnT w="9525" cap="flat" cmpd="sng" algn="ctr">
+                      <a:solidFill>
+                        <a:srgbClr val="000000"/>
+                      </a:solidFill>
+                    </a:lnT>
+                    <a:lnB w="9525" cap="flat" cmpd="sng" algn="ctr">
+                      <a:solidFill>
+                        <a:srgbClr val="000000"/>
+                      </a:solidFill>
+                    </a:lnB>
                     <a:solidFill>
                       <a:srgbClr val="FFFFFF"/>
                     </a:solidFill>
                   </a:tcPr>
                 </a:tc>
               </a:tr>
-              <a:tr h="548640">
+              <a:tr h="493776">
                 <a:tc>
                   <a:txBody>
                     <a:bodyPr/>
@@ -9559,6 +13619,26 @@
                     </a:p>
                   </a:txBody>
                   <a:tcPr marL="73152" marR="73152" marT="27432" marB="27432">
+                    <a:lnL w="9525" cap="flat" cmpd="sng" algn="ctr">
+                      <a:solidFill>
+                        <a:srgbClr val="000000"/>
+                      </a:solidFill>
+                    </a:lnL>
+                    <a:lnR w="9525" cap="flat" cmpd="sng" algn="ctr">
+                      <a:solidFill>
+                        <a:srgbClr val="000000"/>
+                      </a:solidFill>
+                    </a:lnR>
+                    <a:lnT w="9525" cap="flat" cmpd="sng" algn="ctr">
+                      <a:solidFill>
+                        <a:srgbClr val="000000"/>
+                      </a:solidFill>
+                    </a:lnT>
+                    <a:lnB w="9525" cap="flat" cmpd="sng" algn="ctr">
+                      <a:solidFill>
+                        <a:srgbClr val="000000"/>
+                      </a:solidFill>
+                    </a:lnB>
                     <a:solidFill>
                       <a:srgbClr val="FFFFFF"/>
                     </a:solidFill>
@@ -9577,11 +13657,31 @@
                           </a:solidFill>
                           <a:latin typeface="Calibri"/>
                         </a:rPr>
-                        <a:t>the concept advances by steps</a:t>
+                        <a:t>Advances stepwise</a:t>
                       </a:r>
                     </a:p>
                   </a:txBody>
                   <a:tcPr marL="73152" marR="73152" marT="27432" marB="27432">
+                    <a:lnL w="9525" cap="flat" cmpd="sng" algn="ctr">
+                      <a:solidFill>
+                        <a:srgbClr val="000000"/>
+                      </a:solidFill>
+                    </a:lnL>
+                    <a:lnR w="9525" cap="flat" cmpd="sng" algn="ctr">
+                      <a:solidFill>
+                        <a:srgbClr val="000000"/>
+                      </a:solidFill>
+                    </a:lnR>
+                    <a:lnT w="9525" cap="flat" cmpd="sng" algn="ctr">
+                      <a:solidFill>
+                        <a:srgbClr val="000000"/>
+                      </a:solidFill>
+                    </a:lnT>
+                    <a:lnB w="9525" cap="flat" cmpd="sng" algn="ctr">
+                      <a:solidFill>
+                        <a:srgbClr val="000000"/>
+                      </a:solidFill>
+                    </a:lnB>
                     <a:solidFill>
                       <a:srgbClr val="FFFFFF"/>
                     </a:solidFill>
@@ -9600,18 +13700,38 @@
                           </a:solidFill>
                           <a:latin typeface="Calibri"/>
                         </a:rPr>
-                        <a:t>genuine concepts</a:t>
+                        <a:t>Genuine concepts</a:t>
                       </a:r>
                     </a:p>
                   </a:txBody>
                   <a:tcPr marL="73152" marR="73152" marT="27432" marB="27432">
+                    <a:lnL w="9525" cap="flat" cmpd="sng" algn="ctr">
+                      <a:solidFill>
+                        <a:srgbClr val="000000"/>
+                      </a:solidFill>
+                    </a:lnL>
+                    <a:lnR w="9525" cap="flat" cmpd="sng" algn="ctr">
+                      <a:solidFill>
+                        <a:srgbClr val="000000"/>
+                      </a:solidFill>
+                    </a:lnR>
+                    <a:lnT w="9525" cap="flat" cmpd="sng" algn="ctr">
+                      <a:solidFill>
+                        <a:srgbClr val="000000"/>
+                      </a:solidFill>
+                    </a:lnT>
+                    <a:lnB w="9525" cap="flat" cmpd="sng" algn="ctr">
+                      <a:solidFill>
+                        <a:srgbClr val="000000"/>
+                      </a:solidFill>
+                    </a:lnB>
                     <a:solidFill>
                       <a:srgbClr val="FFFFFF"/>
                     </a:solidFill>
                   </a:tcPr>
                 </a:tc>
               </a:tr>
-              <a:tr h="548640">
+              <a:tr h="493776">
                 <a:tc>
                   <a:txBody>
                     <a:bodyPr/>
@@ -9630,6 +13750,26 @@
                     </a:p>
                   </a:txBody>
                   <a:tcPr marL="73152" marR="73152" marT="27432" marB="27432">
+                    <a:lnL w="9525" cap="flat" cmpd="sng" algn="ctr">
+                      <a:solidFill>
+                        <a:srgbClr val="000000"/>
+                      </a:solidFill>
+                    </a:lnL>
+                    <a:lnR w="9525" cap="flat" cmpd="sng" algn="ctr">
+                      <a:solidFill>
+                        <a:srgbClr val="000000"/>
+                      </a:solidFill>
+                    </a:lnR>
+                    <a:lnT w="9525" cap="flat" cmpd="sng" algn="ctr">
+                      <a:solidFill>
+                        <a:srgbClr val="000000"/>
+                      </a:solidFill>
+                    </a:lnT>
+                    <a:lnB w="9525" cap="flat" cmpd="sng" algn="ctr">
+                      <a:solidFill>
+                        <a:srgbClr val="000000"/>
+                      </a:solidFill>
+                    </a:lnB>
                     <a:solidFill>
                       <a:srgbClr val="FFFFFF"/>
                     </a:solidFill>
@@ -9648,11 +13788,31 @@
                           </a:solidFill>
                           <a:latin typeface="Calibri"/>
                         </a:rPr>
-                        <a:t>two concepts alternate</a:t>
+                        <a:t>Two concepts alternate</a:t>
                       </a:r>
                     </a:p>
                   </a:txBody>
                   <a:tcPr marL="73152" marR="73152" marT="27432" marB="27432">
+                    <a:lnL w="9525" cap="flat" cmpd="sng" algn="ctr">
+                      <a:solidFill>
+                        <a:srgbClr val="000000"/>
+                      </a:solidFill>
+                    </a:lnL>
+                    <a:lnR w="9525" cap="flat" cmpd="sng" algn="ctr">
+                      <a:solidFill>
+                        <a:srgbClr val="000000"/>
+                      </a:solidFill>
+                    </a:lnR>
+                    <a:lnT w="9525" cap="flat" cmpd="sng" algn="ctr">
+                      <a:solidFill>
+                        <a:srgbClr val="000000"/>
+                      </a:solidFill>
+                    </a:lnT>
+                    <a:lnB w="9525" cap="flat" cmpd="sng" algn="ctr">
+                      <a:solidFill>
+                        <a:srgbClr val="000000"/>
+                      </a:solidFill>
+                    </a:lnB>
                     <a:solidFill>
                       <a:srgbClr val="FFFFFF"/>
                     </a:solidFill>
@@ -9671,18 +13831,38 @@
                           </a:solidFill>
                           <a:latin typeface="Calibri"/>
                         </a:rPr>
-                        <a:t>no new concepts</a:t>
+                        <a:t>No new concepts</a:t>
                       </a:r>
                     </a:p>
                   </a:txBody>
                   <a:tcPr marL="73152" marR="73152" marT="27432" marB="27432">
+                    <a:lnL w="9525" cap="flat" cmpd="sng" algn="ctr">
+                      <a:solidFill>
+                        <a:srgbClr val="000000"/>
+                      </a:solidFill>
+                    </a:lnL>
+                    <a:lnR w="9525" cap="flat" cmpd="sng" algn="ctr">
+                      <a:solidFill>
+                        <a:srgbClr val="000000"/>
+                      </a:solidFill>
+                    </a:lnR>
+                    <a:lnT w="9525" cap="flat" cmpd="sng" algn="ctr">
+                      <a:solidFill>
+                        <a:srgbClr val="000000"/>
+                      </a:solidFill>
+                    </a:lnT>
+                    <a:lnB w="9525" cap="flat" cmpd="sng" algn="ctr">
+                      <a:solidFill>
+                        <a:srgbClr val="000000"/>
+                      </a:solidFill>
+                    </a:lnB>
                     <a:solidFill>
                       <a:srgbClr val="FFFFFF"/>
                     </a:solidFill>
                   </a:tcPr>
                 </a:tc>
               </a:tr>
-              <a:tr h="548640">
+              <a:tr h="493776">
                 <a:tc>
                   <a:txBody>
                     <a:bodyPr/>
@@ -9701,6 +13881,26 @@
                     </a:p>
                   </a:txBody>
                   <a:tcPr marL="73152" marR="73152" marT="27432" marB="27432">
+                    <a:lnL w="9525" cap="flat" cmpd="sng" algn="ctr">
+                      <a:solidFill>
+                        <a:srgbClr val="000000"/>
+                      </a:solidFill>
+                    </a:lnL>
+                    <a:lnR w="9525" cap="flat" cmpd="sng" algn="ctr">
+                      <a:solidFill>
+                        <a:srgbClr val="000000"/>
+                      </a:solidFill>
+                    </a:lnR>
+                    <a:lnT w="9525" cap="flat" cmpd="sng" algn="ctr">
+                      <a:solidFill>
+                        <a:srgbClr val="000000"/>
+                      </a:solidFill>
+                    </a:lnT>
+                    <a:lnB w="9525" cap="flat" cmpd="sng" algn="ctr">
+                      <a:solidFill>
+                        <a:srgbClr val="000000"/>
+                      </a:solidFill>
+                    </a:lnB>
                     <a:solidFill>
                       <a:srgbClr val="FFFFFF"/>
                     </a:solidFill>
@@ -9719,11 +13919,31 @@
                           </a:solidFill>
                           <a:latin typeface="Calibri"/>
                         </a:rPr>
-                        <a:t>concepts return periodically</a:t>
+                        <a:t>Concepts return periodically</a:t>
                       </a:r>
                     </a:p>
                   </a:txBody>
                   <a:tcPr marL="73152" marR="73152" marT="27432" marB="27432">
+                    <a:lnL w="9525" cap="flat" cmpd="sng" algn="ctr">
+                      <a:solidFill>
+                        <a:srgbClr val="000000"/>
+                      </a:solidFill>
+                    </a:lnL>
+                    <a:lnR w="9525" cap="flat" cmpd="sng" algn="ctr">
+                      <a:solidFill>
+                        <a:srgbClr val="000000"/>
+                      </a:solidFill>
+                    </a:lnR>
+                    <a:lnT w="9525" cap="flat" cmpd="sng" algn="ctr">
+                      <a:solidFill>
+                        <a:srgbClr val="000000"/>
+                      </a:solidFill>
+                    </a:lnT>
+                    <a:lnB w="9525" cap="flat" cmpd="sng" algn="ctr">
+                      <a:solidFill>
+                        <a:srgbClr val="000000"/>
+                      </a:solidFill>
+                    </a:lnB>
                     <a:solidFill>
                       <a:srgbClr val="FFFFFF"/>
                     </a:solidFill>
@@ -9742,11 +13962,31 @@
                           </a:solidFill>
                           <a:latin typeface="Calibri"/>
                         </a:rPr>
-                        <a:t>previously seen</a:t>
+                        <a:t>Previously seen</a:t>
                       </a:r>
                     </a:p>
                   </a:txBody>
                   <a:tcPr marL="73152" marR="73152" marT="27432" marB="27432">
+                    <a:lnL w="9525" cap="flat" cmpd="sng" algn="ctr">
+                      <a:solidFill>
+                        <a:srgbClr val="000000"/>
+                      </a:solidFill>
+                    </a:lnL>
+                    <a:lnR w="9525" cap="flat" cmpd="sng" algn="ctr">
+                      <a:solidFill>
+                        <a:srgbClr val="000000"/>
+                      </a:solidFill>
+                    </a:lnR>
+                    <a:lnT w="9525" cap="flat" cmpd="sng" algn="ctr">
+                      <a:solidFill>
+                        <a:srgbClr val="000000"/>
+                      </a:solidFill>
+                    </a:lnT>
+                    <a:lnB w="9525" cap="flat" cmpd="sng" algn="ctr">
+                      <a:solidFill>
+                        <a:srgbClr val="000000"/>
+                      </a:solidFill>
+                    </a:lnB>
                     <a:solidFill>
                       <a:srgbClr val="FFFFFF"/>
                     </a:solidFill>
@@ -9765,8 +14005,8 @@
         </p:nvSpPr>
         <p:spPr>
           <a:xfrm>
-            <a:off x="640080" y="5166360"/>
-            <a:ext cx="10911535" cy="1234439"/>
+            <a:off x="640080" y="5029200"/>
+            <a:ext cx="10911535" cy="1371600"/>
           </a:xfrm>
           <a:prstGeom prst="rect">
             <a:avLst/>
@@ -9915,6 +14155,26 @@
                     </a:p>
                   </a:txBody>
                   <a:tcPr marL="73152" marR="73152" marT="27432" marB="27432">
+                    <a:lnL w="9525" cap="flat" cmpd="sng" algn="ctr">
+                      <a:solidFill>
+                        <a:srgbClr val="000000"/>
+                      </a:solidFill>
+                    </a:lnL>
+                    <a:lnR w="9525" cap="flat" cmpd="sng" algn="ctr">
+                      <a:solidFill>
+                        <a:srgbClr val="000000"/>
+                      </a:solidFill>
+                    </a:lnR>
+                    <a:lnT w="9525" cap="flat" cmpd="sng" algn="ctr">
+                      <a:solidFill>
+                        <a:srgbClr val="000000"/>
+                      </a:solidFill>
+                    </a:lnT>
+                    <a:lnB w="9525" cap="flat" cmpd="sng" algn="ctr">
+                      <a:solidFill>
+                        <a:srgbClr val="000000"/>
+                      </a:solidFill>
+                    </a:lnB>
                     <a:solidFill>
                       <a:srgbClr val="FFFFFF"/>
                     </a:solidFill>
@@ -9933,11 +14193,31 @@
                           </a:solidFill>
                           <a:latin typeface="Calibri"/>
                         </a:rPr>
-                        <a:t>changes</a:t>
+                        <a:t>Changes</a:t>
                       </a:r>
                     </a:p>
                   </a:txBody>
                   <a:tcPr marL="73152" marR="73152" marT="27432" marB="27432">
+                    <a:lnL w="9525" cap="flat" cmpd="sng" algn="ctr">
+                      <a:solidFill>
+                        <a:srgbClr val="000000"/>
+                      </a:solidFill>
+                    </a:lnL>
+                    <a:lnR w="9525" cap="flat" cmpd="sng" algn="ctr">
+                      <a:solidFill>
+                        <a:srgbClr val="000000"/>
+                      </a:solidFill>
+                    </a:lnR>
+                    <a:lnT w="9525" cap="flat" cmpd="sng" algn="ctr">
+                      <a:solidFill>
+                        <a:srgbClr val="000000"/>
+                      </a:solidFill>
+                    </a:lnT>
+                    <a:lnB w="9525" cap="flat" cmpd="sng" algn="ctr">
+                      <a:solidFill>
+                        <a:srgbClr val="000000"/>
+                      </a:solidFill>
+                    </a:lnB>
                     <a:solidFill>
                       <a:srgbClr val="FFFFFF"/>
                     </a:solidFill>
@@ -9956,11 +14236,31 @@
                           </a:solidFill>
                           <a:latin typeface="Calibri"/>
                         </a:rPr>
-                        <a:t>remedy</a:t>
+                        <a:t>Remedy</a:t>
                       </a:r>
                     </a:p>
                   </a:txBody>
                   <a:tcPr marL="73152" marR="73152" marT="27432" marB="27432">
+                    <a:lnL w="9525" cap="flat" cmpd="sng" algn="ctr">
+                      <a:solidFill>
+                        <a:srgbClr val="000000"/>
+                      </a:solidFill>
+                    </a:lnL>
+                    <a:lnR w="9525" cap="flat" cmpd="sng" algn="ctr">
+                      <a:solidFill>
+                        <a:srgbClr val="000000"/>
+                      </a:solidFill>
+                    </a:lnR>
+                    <a:lnT w="9525" cap="flat" cmpd="sng" algn="ctr">
+                      <a:solidFill>
+                        <a:srgbClr val="000000"/>
+                      </a:solidFill>
+                    </a:lnT>
+                    <a:lnB w="9525" cap="flat" cmpd="sng" algn="ctr">
+                      <a:solidFill>
+                        <a:srgbClr val="000000"/>
+                      </a:solidFill>
+                    </a:lnB>
                     <a:solidFill>
                       <a:srgbClr val="FFFFFF"/>
                     </a:solidFill>
@@ -9986,6 +14286,26 @@
                     </a:p>
                   </a:txBody>
                   <a:tcPr marL="73152" marR="73152" marT="27432" marB="27432">
+                    <a:lnL w="9525" cap="flat" cmpd="sng" algn="ctr">
+                      <a:solidFill>
+                        <a:srgbClr val="000000"/>
+                      </a:solidFill>
+                    </a:lnL>
+                    <a:lnR w="9525" cap="flat" cmpd="sng" algn="ctr">
+                      <a:solidFill>
+                        <a:srgbClr val="000000"/>
+                      </a:solidFill>
+                    </a:lnR>
+                    <a:lnT w="9525" cap="flat" cmpd="sng" algn="ctr">
+                      <a:solidFill>
+                        <a:srgbClr val="000000"/>
+                      </a:solidFill>
+                    </a:lnT>
+                    <a:lnB w="9525" cap="flat" cmpd="sng" algn="ctr">
+                      <a:solidFill>
+                        <a:srgbClr val="000000"/>
+                      </a:solidFill>
+                    </a:lnB>
                     <a:solidFill>
                       <a:srgbClr val="FFFFFF"/>
                     </a:solidFill>
@@ -10009,6 +14329,26 @@
                     </a:p>
                   </a:txBody>
                   <a:tcPr marL="73152" marR="73152" marT="27432" marB="27432">
+                    <a:lnL w="9525" cap="flat" cmpd="sng" algn="ctr">
+                      <a:solidFill>
+                        <a:srgbClr val="000000"/>
+                      </a:solidFill>
+                    </a:lnL>
+                    <a:lnR w="9525" cap="flat" cmpd="sng" algn="ctr">
+                      <a:solidFill>
+                        <a:srgbClr val="000000"/>
+                      </a:solidFill>
+                    </a:lnR>
+                    <a:lnT w="9525" cap="flat" cmpd="sng" algn="ctr">
+                      <a:solidFill>
+                        <a:srgbClr val="000000"/>
+                      </a:solidFill>
+                    </a:lnT>
+                    <a:lnB w="9525" cap="flat" cmpd="sng" algn="ctr">
+                      <a:solidFill>
+                        <a:srgbClr val="000000"/>
+                      </a:solidFill>
+                    </a:lnB>
                     <a:solidFill>
                       <a:srgbClr val="FFFFFF"/>
                     </a:solidFill>
@@ -10027,11 +14367,31 @@
                           </a:solidFill>
                           <a:latin typeface="Calibri"/>
                         </a:rPr>
-                        <a:t>normalisation</a:t>
+                        <a:t>Normalisation</a:t>
                       </a:r>
                     </a:p>
                   </a:txBody>
                   <a:tcPr marL="73152" marR="73152" marT="27432" marB="27432">
+                    <a:lnL w="9525" cap="flat" cmpd="sng" algn="ctr">
+                      <a:solidFill>
+                        <a:srgbClr val="000000"/>
+                      </a:solidFill>
+                    </a:lnL>
+                    <a:lnR w="9525" cap="flat" cmpd="sng" algn="ctr">
+                      <a:solidFill>
+                        <a:srgbClr val="000000"/>
+                      </a:solidFill>
+                    </a:lnR>
+                    <a:lnT w="9525" cap="flat" cmpd="sng" algn="ctr">
+                      <a:solidFill>
+                        <a:srgbClr val="000000"/>
+                      </a:solidFill>
+                    </a:lnT>
+                    <a:lnB w="9525" cap="flat" cmpd="sng" algn="ctr">
+                      <a:solidFill>
+                        <a:srgbClr val="000000"/>
+                      </a:solidFill>
+                    </a:lnB>
                     <a:solidFill>
                       <a:srgbClr val="FFFFFF"/>
                     </a:solidFill>
@@ -10057,6 +14417,26 @@
                     </a:p>
                   </a:txBody>
                   <a:tcPr marL="73152" marR="73152" marT="27432" marB="27432">
+                    <a:lnL w="9525" cap="flat" cmpd="sng" algn="ctr">
+                      <a:solidFill>
+                        <a:srgbClr val="000000"/>
+                      </a:solidFill>
+                    </a:lnL>
+                    <a:lnR w="9525" cap="flat" cmpd="sng" algn="ctr">
+                      <a:solidFill>
+                        <a:srgbClr val="000000"/>
+                      </a:solidFill>
+                    </a:lnR>
+                    <a:lnT w="9525" cap="flat" cmpd="sng" algn="ctr">
+                      <a:solidFill>
+                        <a:srgbClr val="000000"/>
+                      </a:solidFill>
+                    </a:lnT>
+                    <a:lnB w="9525" cap="flat" cmpd="sng" algn="ctr">
+                      <a:solidFill>
+                        <a:srgbClr val="000000"/>
+                      </a:solidFill>
+                    </a:lnB>
                     <a:solidFill>
                       <a:srgbClr val="FFFFFF"/>
                     </a:solidFill>
@@ -10080,6 +14460,26 @@
                     </a:p>
                   </a:txBody>
                   <a:tcPr marL="73152" marR="73152" marT="27432" marB="27432">
+                    <a:lnL w="9525" cap="flat" cmpd="sng" algn="ctr">
+                      <a:solidFill>
+                        <a:srgbClr val="000000"/>
+                      </a:solidFill>
+                    </a:lnL>
+                    <a:lnR w="9525" cap="flat" cmpd="sng" algn="ctr">
+                      <a:solidFill>
+                        <a:srgbClr val="000000"/>
+                      </a:solidFill>
+                    </a:lnR>
+                    <a:lnT w="9525" cap="flat" cmpd="sng" algn="ctr">
+                      <a:solidFill>
+                        <a:srgbClr val="000000"/>
+                      </a:solidFill>
+                    </a:lnT>
+                    <a:lnB w="9525" cap="flat" cmpd="sng" algn="ctr">
+                      <a:solidFill>
+                        <a:srgbClr val="000000"/>
+                      </a:solidFill>
+                    </a:lnB>
                     <a:solidFill>
                       <a:srgbClr val="FFFFFF"/>
                     </a:solidFill>
@@ -10098,11 +14498,31 @@
                           </a:solidFill>
                           <a:latin typeface="Calibri"/>
                         </a:rPr>
-                        <a:t>adaptation</a:t>
+                        <a:t>Adaptation</a:t>
                       </a:r>
                     </a:p>
                   </a:txBody>
                   <a:tcPr marL="73152" marR="73152" marT="27432" marB="27432">
+                    <a:lnL w="9525" cap="flat" cmpd="sng" algn="ctr">
+                      <a:solidFill>
+                        <a:srgbClr val="000000"/>
+                      </a:solidFill>
+                    </a:lnL>
+                    <a:lnR w="9525" cap="flat" cmpd="sng" algn="ctr">
+                      <a:solidFill>
+                        <a:srgbClr val="000000"/>
+                      </a:solidFill>
+                    </a:lnR>
+                    <a:lnT w="9525" cap="flat" cmpd="sng" algn="ctr">
+                      <a:solidFill>
+                        <a:srgbClr val="000000"/>
+                      </a:solidFill>
+                    </a:lnT>
+                    <a:lnB w="9525" cap="flat" cmpd="sng" algn="ctr">
+                      <a:solidFill>
+                        <a:srgbClr val="000000"/>
+                      </a:solidFill>
+                    </a:lnB>
                     <a:solidFill>
                       <a:srgbClr val="FFFFFF"/>
                     </a:solidFill>
@@ -10257,11 +14677,31 @@
                           </a:solidFill>
                           <a:latin typeface="Calibri"/>
                         </a:rPr>
-                        <a:t>sense</a:t>
+                        <a:t>Sense</a:t>
                       </a:r>
                     </a:p>
                   </a:txBody>
                   <a:tcPr marL="73152" marR="73152" marT="27432" marB="27432">
+                    <a:lnL w="9525" cap="flat" cmpd="sng" algn="ctr">
+                      <a:solidFill>
+                        <a:srgbClr val="000000"/>
+                      </a:solidFill>
+                    </a:lnL>
+                    <a:lnR w="9525" cap="flat" cmpd="sng" algn="ctr">
+                      <a:solidFill>
+                        <a:srgbClr val="000000"/>
+                      </a:solidFill>
+                    </a:lnR>
+                    <a:lnT w="9525" cap="flat" cmpd="sng" algn="ctr">
+                      <a:solidFill>
+                        <a:srgbClr val="000000"/>
+                      </a:solidFill>
+                    </a:lnT>
+                    <a:lnB w="9525" cap="flat" cmpd="sng" algn="ctr">
+                      <a:solidFill>
+                        <a:srgbClr val="000000"/>
+                      </a:solidFill>
+                    </a:lnB>
                     <a:solidFill>
                       <a:srgbClr val="FFFFFF"/>
                     </a:solidFill>
@@ -10280,11 +14720,31 @@
                           </a:solidFill>
                           <a:latin typeface="Calibri"/>
                         </a:rPr>
-                        <a:t>what changes</a:t>
+                        <a:t>What changes</a:t>
                       </a:r>
                     </a:p>
                   </a:txBody>
                   <a:tcPr marL="73152" marR="73152" marT="27432" marB="27432">
+                    <a:lnL w="9525" cap="flat" cmpd="sng" algn="ctr">
+                      <a:solidFill>
+                        <a:srgbClr val="000000"/>
+                      </a:solidFill>
+                    </a:lnL>
+                    <a:lnR w="9525" cap="flat" cmpd="sng" algn="ctr">
+                      <a:solidFill>
+                        <a:srgbClr val="000000"/>
+                      </a:solidFill>
+                    </a:lnR>
+                    <a:lnT w="9525" cap="flat" cmpd="sng" algn="ctr">
+                      <a:solidFill>
+                        <a:srgbClr val="000000"/>
+                      </a:solidFill>
+                    </a:lnT>
+                    <a:lnB w="9525" cap="flat" cmpd="sng" algn="ctr">
+                      <a:solidFill>
+                        <a:srgbClr val="000000"/>
+                      </a:solidFill>
+                    </a:lnB>
                     <a:solidFill>
                       <a:srgbClr val="FFFFFF"/>
                     </a:solidFill>
@@ -10303,11 +14763,31 @@
                           </a:solidFill>
                           <a:latin typeface="Calibri"/>
                         </a:rPr>
-                        <a:t>response</a:t>
+                        <a:t>Response</a:t>
                       </a:r>
                     </a:p>
                   </a:txBody>
                   <a:tcPr marL="73152" marR="73152" marT="27432" marB="27432">
+                    <a:lnL w="9525" cap="flat" cmpd="sng" algn="ctr">
+                      <a:solidFill>
+                        <a:srgbClr val="000000"/>
+                      </a:solidFill>
+                    </a:lnL>
+                    <a:lnR w="9525" cap="flat" cmpd="sng" algn="ctr">
+                      <a:solidFill>
+                        <a:srgbClr val="000000"/>
+                      </a:solidFill>
+                    </a:lnR>
+                    <a:lnT w="9525" cap="flat" cmpd="sng" algn="ctr">
+                      <a:solidFill>
+                        <a:srgbClr val="000000"/>
+                      </a:solidFill>
+                    </a:lnT>
+                    <a:lnB w="9525" cap="flat" cmpd="sng" algn="ctr">
+                      <a:solidFill>
+                        <a:srgbClr val="000000"/>
+                      </a:solidFill>
+                    </a:lnB>
                     <a:solidFill>
                       <a:srgbClr val="FFFFFF"/>
                     </a:solidFill>
@@ -10333,6 +14813,26 @@
                     </a:p>
                   </a:txBody>
                   <a:tcPr marL="73152" marR="73152" marT="27432" marB="27432">
+                    <a:lnL w="9525" cap="flat" cmpd="sng" algn="ctr">
+                      <a:solidFill>
+                        <a:srgbClr val="000000"/>
+                      </a:solidFill>
+                    </a:lnL>
+                    <a:lnR w="9525" cap="flat" cmpd="sng" algn="ctr">
+                      <a:solidFill>
+                        <a:srgbClr val="000000"/>
+                      </a:solidFill>
+                    </a:lnR>
+                    <a:lnT w="9525" cap="flat" cmpd="sng" algn="ctr">
+                      <a:solidFill>
+                        <a:srgbClr val="000000"/>
+                      </a:solidFill>
+                    </a:lnT>
+                    <a:lnB w="9525" cap="flat" cmpd="sng" algn="ctr">
+                      <a:solidFill>
+                        <a:srgbClr val="000000"/>
+                      </a:solidFill>
+                    </a:lnB>
                     <a:solidFill>
                       <a:srgbClr val="FFFFFF"/>
                     </a:solidFill>
@@ -10356,6 +14856,26 @@
                     </a:p>
                   </a:txBody>
                   <a:tcPr marL="73152" marR="73152" marT="27432" marB="27432">
+                    <a:lnL w="9525" cap="flat" cmpd="sng" algn="ctr">
+                      <a:solidFill>
+                        <a:srgbClr val="000000"/>
+                      </a:solidFill>
+                    </a:lnL>
+                    <a:lnR w="9525" cap="flat" cmpd="sng" algn="ctr">
+                      <a:solidFill>
+                        <a:srgbClr val="000000"/>
+                      </a:solidFill>
+                    </a:lnR>
+                    <a:lnT w="9525" cap="flat" cmpd="sng" algn="ctr">
+                      <a:solidFill>
+                        <a:srgbClr val="000000"/>
+                      </a:solidFill>
+                    </a:lnT>
+                    <a:lnB w="9525" cap="flat" cmpd="sng" algn="ctr">
+                      <a:solidFill>
+                        <a:srgbClr val="000000"/>
+                      </a:solidFill>
+                    </a:lnB>
                     <a:solidFill>
                       <a:srgbClr val="FFFFFF"/>
                     </a:solidFill>
@@ -10374,11 +14894,31 @@
                           </a:solidFill>
                           <a:latin typeface="Calibri"/>
                         </a:rPr>
-                        <a:t>track the model</a:t>
+                        <a:t>Track the model</a:t>
                       </a:r>
                     </a:p>
                   </a:txBody>
                   <a:tcPr marL="73152" marR="73152" marT="27432" marB="27432">
+                    <a:lnL w="9525" cap="flat" cmpd="sng" algn="ctr">
+                      <a:solidFill>
+                        <a:srgbClr val="000000"/>
+                      </a:solidFill>
+                    </a:lnL>
+                    <a:lnR w="9525" cap="flat" cmpd="sng" algn="ctr">
+                      <a:solidFill>
+                        <a:srgbClr val="000000"/>
+                      </a:solidFill>
+                    </a:lnR>
+                    <a:lnT w="9525" cap="flat" cmpd="sng" algn="ctr">
+                      <a:solidFill>
+                        <a:srgbClr val="000000"/>
+                      </a:solidFill>
+                    </a:lnT>
+                    <a:lnB w="9525" cap="flat" cmpd="sng" algn="ctr">
+                      <a:solidFill>
+                        <a:srgbClr val="000000"/>
+                      </a:solidFill>
+                    </a:lnB>
                     <a:solidFill>
                       <a:srgbClr val="FFFFFF"/>
                     </a:solidFill>
@@ -10404,6 +14944,26 @@
                     </a:p>
                   </a:txBody>
                   <a:tcPr marL="73152" marR="73152" marT="27432" marB="27432">
+                    <a:lnL w="9525" cap="flat" cmpd="sng" algn="ctr">
+                      <a:solidFill>
+                        <a:srgbClr val="000000"/>
+                      </a:solidFill>
+                    </a:lnL>
+                    <a:lnR w="9525" cap="flat" cmpd="sng" algn="ctr">
+                      <a:solidFill>
+                        <a:srgbClr val="000000"/>
+                      </a:solidFill>
+                    </a:lnR>
+                    <a:lnT w="9525" cap="flat" cmpd="sng" algn="ctr">
+                      <a:solidFill>
+                        <a:srgbClr val="000000"/>
+                      </a:solidFill>
+                    </a:lnT>
+                    <a:lnB w="9525" cap="flat" cmpd="sng" algn="ctr">
+                      <a:solidFill>
+                        <a:srgbClr val="000000"/>
+                      </a:solidFill>
+                    </a:lnB>
                     <a:solidFill>
                       <a:srgbClr val="FFFFFF"/>
                     </a:solidFill>
@@ -10427,6 +14987,26 @@
                     </a:p>
                   </a:txBody>
                   <a:tcPr marL="73152" marR="73152" marT="27432" marB="27432">
+                    <a:lnL w="9525" cap="flat" cmpd="sng" algn="ctr">
+                      <a:solidFill>
+                        <a:srgbClr val="000000"/>
+                      </a:solidFill>
+                    </a:lnL>
+                    <a:lnR w="9525" cap="flat" cmpd="sng" algn="ctr">
+                      <a:solidFill>
+                        <a:srgbClr val="000000"/>
+                      </a:solidFill>
+                    </a:lnR>
+                    <a:lnT w="9525" cap="flat" cmpd="sng" algn="ctr">
+                      <a:solidFill>
+                        <a:srgbClr val="000000"/>
+                      </a:solidFill>
+                    </a:lnT>
+                    <a:lnB w="9525" cap="flat" cmpd="sng" algn="ctr">
+                      <a:solidFill>
+                        <a:srgbClr val="000000"/>
+                      </a:solidFill>
+                    </a:lnB>
                     <a:solidFill>
                       <a:srgbClr val="FFFFFF"/>
                     </a:solidFill>
@@ -10445,11 +15025,31 @@
                           </a:solidFill>
                           <a:latin typeface="Calibri"/>
                         </a:rPr>
-                        <a:t>condition on c</a:t>
+                        <a:t>Condition on c</a:t>
                       </a:r>
                     </a:p>
                   </a:txBody>
                   <a:tcPr marL="73152" marR="73152" marT="27432" marB="27432">
+                    <a:lnL w="9525" cap="flat" cmpd="sng" algn="ctr">
+                      <a:solidFill>
+                        <a:srgbClr val="000000"/>
+                      </a:solidFill>
+                    </a:lnL>
+                    <a:lnR w="9525" cap="flat" cmpd="sng" algn="ctr">
+                      <a:solidFill>
+                        <a:srgbClr val="000000"/>
+                      </a:solidFill>
+                    </a:lnR>
+                    <a:lnT w="9525" cap="flat" cmpd="sng" algn="ctr">
+                      <a:solidFill>
+                        <a:srgbClr val="000000"/>
+                      </a:solidFill>
+                    </a:lnT>
+                    <a:lnB w="9525" cap="flat" cmpd="sng" algn="ctr">
+                      <a:solidFill>
+                        <a:srgbClr val="000000"/>
+                      </a:solidFill>
+                    </a:lnB>
                     <a:solidFill>
                       <a:srgbClr val="FFFFFF"/>
                     </a:solidFill>
@@ -10475,6 +15075,26 @@
                     </a:p>
                   </a:txBody>
                   <a:tcPr marL="73152" marR="73152" marT="27432" marB="27432">
+                    <a:lnL w="9525" cap="flat" cmpd="sng" algn="ctr">
+                      <a:solidFill>
+                        <a:srgbClr val="000000"/>
+                      </a:solidFill>
+                    </a:lnL>
+                    <a:lnR w="9525" cap="flat" cmpd="sng" algn="ctr">
+                      <a:solidFill>
+                        <a:srgbClr val="000000"/>
+                      </a:solidFill>
+                    </a:lnR>
+                    <a:lnT w="9525" cap="flat" cmpd="sng" algn="ctr">
+                      <a:solidFill>
+                        <a:srgbClr val="000000"/>
+                      </a:solidFill>
+                    </a:lnT>
+                    <a:lnB w="9525" cap="flat" cmpd="sng" algn="ctr">
+                      <a:solidFill>
+                        <a:srgbClr val="000000"/>
+                      </a:solidFill>
+                    </a:lnB>
                     <a:solidFill>
                       <a:srgbClr val="FFFFFF"/>
                     </a:solidFill>
@@ -10493,11 +15113,31 @@
                           </a:solidFill>
                           <a:latin typeface="Calibri"/>
                         </a:rPr>
-                        <a:t>leaves the pretraining law</a:t>
+                        <a:t>Leaves the pretraining law</a:t>
                       </a:r>
                     </a:p>
                   </a:txBody>
                   <a:tcPr marL="73152" marR="73152" marT="27432" marB="27432">
+                    <a:lnL w="9525" cap="flat" cmpd="sng" algn="ctr">
+                      <a:solidFill>
+                        <a:srgbClr val="000000"/>
+                      </a:solidFill>
+                    </a:lnL>
+                    <a:lnR w="9525" cap="flat" cmpd="sng" algn="ctr">
+                      <a:solidFill>
+                        <a:srgbClr val="000000"/>
+                      </a:solidFill>
+                    </a:lnR>
+                    <a:lnT w="9525" cap="flat" cmpd="sng" algn="ctr">
+                      <a:solidFill>
+                        <a:srgbClr val="000000"/>
+                      </a:solidFill>
+                    </a:lnT>
+                    <a:lnB w="9525" cap="flat" cmpd="sng" algn="ctr">
+                      <a:solidFill>
+                        <a:srgbClr val="000000"/>
+                      </a:solidFill>
+                    </a:lnB>
                     <a:solidFill>
                       <a:srgbClr val="FFFFFF"/>
                     </a:solidFill>
@@ -10516,11 +15156,31 @@
                           </a:solidFill>
                           <a:latin typeface="Calibri"/>
                         </a:rPr>
-                        <a:t>adapt at inference</a:t>
+                        <a:t>Adapt at inference</a:t>
                       </a:r>
                     </a:p>
                   </a:txBody>
                   <a:tcPr marL="73152" marR="73152" marT="27432" marB="27432">
+                    <a:lnL w="9525" cap="flat" cmpd="sng" algn="ctr">
+                      <a:solidFill>
+                        <a:srgbClr val="000000"/>
+                      </a:solidFill>
+                    </a:lnL>
+                    <a:lnR w="9525" cap="flat" cmpd="sng" algn="ctr">
+                      <a:solidFill>
+                        <a:srgbClr val="000000"/>
+                      </a:solidFill>
+                    </a:lnR>
+                    <a:lnT w="9525" cap="flat" cmpd="sng" algn="ctr">
+                      <a:solidFill>
+                        <a:srgbClr val="000000"/>
+                      </a:solidFill>
+                    </a:lnT>
+                    <a:lnB w="9525" cap="flat" cmpd="sng" algn="ctr">
+                      <a:solidFill>
+                        <a:srgbClr val="000000"/>
+                      </a:solidFill>
+                    </a:lnB>
                     <a:solidFill>
                       <a:srgbClr val="FFFFFF"/>
                     </a:solidFill>
@@ -10871,11 +15531,31 @@
                           </a:solidFill>
                           <a:latin typeface="Calibri"/>
                         </a:rPr>
-                        <a:t>detector</a:t>
+                        <a:t>Detector</a:t>
                       </a:r>
                     </a:p>
                   </a:txBody>
                   <a:tcPr marL="73152" marR="73152" marT="27432" marB="27432">
+                    <a:lnL w="9525" cap="flat" cmpd="sng" algn="ctr">
+                      <a:solidFill>
+                        <a:srgbClr val="000000"/>
+                      </a:solidFill>
+                    </a:lnL>
+                    <a:lnR w="9525" cap="flat" cmpd="sng" algn="ctr">
+                      <a:solidFill>
+                        <a:srgbClr val="000000"/>
+                      </a:solidFill>
+                    </a:lnR>
+                    <a:lnT w="9525" cap="flat" cmpd="sng" algn="ctr">
+                      <a:solidFill>
+                        <a:srgbClr val="000000"/>
+                      </a:solidFill>
+                    </a:lnT>
+                    <a:lnB w="9525" cap="flat" cmpd="sng" algn="ctr">
+                      <a:solidFill>
+                        <a:srgbClr val="000000"/>
+                      </a:solidFill>
+                    </a:lnB>
                     <a:solidFill>
                       <a:srgbClr val="FFFFFF"/>
                     </a:solidFill>
@@ -10894,11 +15574,31 @@
                           </a:solidFill>
                           <a:latin typeface="Calibri"/>
                         </a:rPr>
-                        <a:t>test statistic</a:t>
+                        <a:t>Test statistic</a:t>
                       </a:r>
                     </a:p>
                   </a:txBody>
                   <a:tcPr marL="73152" marR="73152" marT="27432" marB="27432">
+                    <a:lnL w="9525" cap="flat" cmpd="sng" algn="ctr">
+                      <a:solidFill>
+                        <a:srgbClr val="000000"/>
+                      </a:solidFill>
+                    </a:lnL>
+                    <a:lnR w="9525" cap="flat" cmpd="sng" algn="ctr">
+                      <a:solidFill>
+                        <a:srgbClr val="000000"/>
+                      </a:solidFill>
+                    </a:lnR>
+                    <a:lnT w="9525" cap="flat" cmpd="sng" algn="ctr">
+                      <a:solidFill>
+                        <a:srgbClr val="000000"/>
+                      </a:solidFill>
+                    </a:lnT>
+                    <a:lnB w="9525" cap="flat" cmpd="sng" algn="ctr">
+                      <a:solidFill>
+                        <a:srgbClr val="000000"/>
+                      </a:solidFill>
+                    </a:lnB>
                     <a:solidFill>
                       <a:srgbClr val="FFFFFF"/>
                     </a:solidFill>
@@ -10917,11 +15617,31 @@
                           </a:solidFill>
                           <a:latin typeface="Calibri"/>
                         </a:rPr>
-                        <a:t>guarantee</a:t>
+                        <a:t>Guarantee</a:t>
                       </a:r>
                     </a:p>
                   </a:txBody>
                   <a:tcPr marL="73152" marR="73152" marT="27432" marB="27432">
+                    <a:lnL w="9525" cap="flat" cmpd="sng" algn="ctr">
+                      <a:solidFill>
+                        <a:srgbClr val="000000"/>
+                      </a:solidFill>
+                    </a:lnL>
+                    <a:lnR w="9525" cap="flat" cmpd="sng" algn="ctr">
+                      <a:solidFill>
+                        <a:srgbClr val="000000"/>
+                      </a:solidFill>
+                    </a:lnR>
+                    <a:lnT w="9525" cap="flat" cmpd="sng" algn="ctr">
+                      <a:solidFill>
+                        <a:srgbClr val="000000"/>
+                      </a:solidFill>
+                    </a:lnT>
+                    <a:lnB w="9525" cap="flat" cmpd="sng" algn="ctr">
+                      <a:solidFill>
+                        <a:srgbClr val="000000"/>
+                      </a:solidFill>
+                    </a:lnB>
                     <a:solidFill>
                       <a:srgbClr val="FFFFFF"/>
                     </a:solidFill>
@@ -10947,6 +15667,26 @@
                     </a:p>
                   </a:txBody>
                   <a:tcPr marL="73152" marR="73152" marT="27432" marB="27432">
+                    <a:lnL w="9525" cap="flat" cmpd="sng" algn="ctr">
+                      <a:solidFill>
+                        <a:srgbClr val="000000"/>
+                      </a:solidFill>
+                    </a:lnL>
+                    <a:lnR w="9525" cap="flat" cmpd="sng" algn="ctr">
+                      <a:solidFill>
+                        <a:srgbClr val="000000"/>
+                      </a:solidFill>
+                    </a:lnR>
+                    <a:lnT w="9525" cap="flat" cmpd="sng" algn="ctr">
+                      <a:solidFill>
+                        <a:srgbClr val="000000"/>
+                      </a:solidFill>
+                    </a:lnT>
+                    <a:lnB w="9525" cap="flat" cmpd="sng" algn="ctr">
+                      <a:solidFill>
+                        <a:srgbClr val="000000"/>
+                      </a:solidFill>
+                    </a:lnB>
                     <a:solidFill>
                       <a:srgbClr val="FFFFFF"/>
                     </a:solidFill>
@@ -10965,11 +15705,31 @@
                           </a:solidFill>
                           <a:latin typeface="Calibri"/>
                         </a:rPr>
-                        <a:t>error exceeds a running minimum</a:t>
+                        <a:t>Error exceeds a running minimum</a:t>
                       </a:r>
                     </a:p>
                   </a:txBody>
                   <a:tcPr marL="73152" marR="73152" marT="27432" marB="27432">
+                    <a:lnL w="9525" cap="flat" cmpd="sng" algn="ctr">
+                      <a:solidFill>
+                        <a:srgbClr val="000000"/>
+                      </a:solidFill>
+                    </a:lnL>
+                    <a:lnR w="9525" cap="flat" cmpd="sng" algn="ctr">
+                      <a:solidFill>
+                        <a:srgbClr val="000000"/>
+                      </a:solidFill>
+                    </a:lnR>
+                    <a:lnT w="9525" cap="flat" cmpd="sng" algn="ctr">
+                      <a:solidFill>
+                        <a:srgbClr val="000000"/>
+                      </a:solidFill>
+                    </a:lnT>
+                    <a:lnB w="9525" cap="flat" cmpd="sng" algn="ctr">
+                      <a:solidFill>
+                        <a:srgbClr val="000000"/>
+                      </a:solidFill>
+                    </a:lnB>
                     <a:solidFill>
                       <a:srgbClr val="FFFFFF"/>
                     </a:solidFill>
@@ -10988,11 +15748,31 @@
                           </a:solidFill>
                           <a:latin typeface="Calibri"/>
                         </a:rPr>
-                        <a:t>heuristic</a:t>
+                        <a:t>Heuristic</a:t>
                       </a:r>
                     </a:p>
                   </a:txBody>
                   <a:tcPr marL="73152" marR="73152" marT="27432" marB="27432">
+                    <a:lnL w="9525" cap="flat" cmpd="sng" algn="ctr">
+                      <a:solidFill>
+                        <a:srgbClr val="000000"/>
+                      </a:solidFill>
+                    </a:lnL>
+                    <a:lnR w="9525" cap="flat" cmpd="sng" algn="ctr">
+                      <a:solidFill>
+                        <a:srgbClr val="000000"/>
+                      </a:solidFill>
+                    </a:lnR>
+                    <a:lnT w="9525" cap="flat" cmpd="sng" algn="ctr">
+                      <a:solidFill>
+                        <a:srgbClr val="000000"/>
+                      </a:solidFill>
+                    </a:lnT>
+                    <a:lnB w="9525" cap="flat" cmpd="sng" algn="ctr">
+                      <a:solidFill>
+                        <a:srgbClr val="000000"/>
+                      </a:solidFill>
+                    </a:lnB>
                     <a:solidFill>
                       <a:srgbClr val="FFFFFF"/>
                     </a:solidFill>
@@ -11018,6 +15798,26 @@
                     </a:p>
                   </a:txBody>
                   <a:tcPr marL="73152" marR="73152" marT="27432" marB="27432">
+                    <a:lnL w="9525" cap="flat" cmpd="sng" algn="ctr">
+                      <a:solidFill>
+                        <a:srgbClr val="000000"/>
+                      </a:solidFill>
+                    </a:lnL>
+                    <a:lnR w="9525" cap="flat" cmpd="sng" algn="ctr">
+                      <a:solidFill>
+                        <a:srgbClr val="000000"/>
+                      </a:solidFill>
+                    </a:lnR>
+                    <a:lnT w="9525" cap="flat" cmpd="sng" algn="ctr">
+                      <a:solidFill>
+                        <a:srgbClr val="000000"/>
+                      </a:solidFill>
+                    </a:lnT>
+                    <a:lnB w="9525" cap="flat" cmpd="sng" algn="ctr">
+                      <a:solidFill>
+                        <a:srgbClr val="000000"/>
+                      </a:solidFill>
+                    </a:lnB>
                     <a:solidFill>
                       <a:srgbClr val="FFFFFF"/>
                     </a:solidFill>
@@ -11036,11 +15836,31 @@
                           </a:solidFill>
                           <a:latin typeface="Calibri"/>
                         </a:rPr>
-                        <a:t>distance between errors contracts</a:t>
+                        <a:t>Distance between errors contracts</a:t>
                       </a:r>
                     </a:p>
                   </a:txBody>
                   <a:tcPr marL="73152" marR="73152" marT="27432" marB="27432">
+                    <a:lnL w="9525" cap="flat" cmpd="sng" algn="ctr">
+                      <a:solidFill>
+                        <a:srgbClr val="000000"/>
+                      </a:solidFill>
+                    </a:lnL>
+                    <a:lnR w="9525" cap="flat" cmpd="sng" algn="ctr">
+                      <a:solidFill>
+                        <a:srgbClr val="000000"/>
+                      </a:solidFill>
+                    </a:lnR>
+                    <a:lnT w="9525" cap="flat" cmpd="sng" algn="ctr">
+                      <a:solidFill>
+                        <a:srgbClr val="000000"/>
+                      </a:solidFill>
+                    </a:lnT>
+                    <a:lnB w="9525" cap="flat" cmpd="sng" algn="ctr">
+                      <a:solidFill>
+                        <a:srgbClr val="000000"/>
+                      </a:solidFill>
+                    </a:lnB>
                     <a:solidFill>
                       <a:srgbClr val="FFFFFF"/>
                     </a:solidFill>
@@ -11059,11 +15879,31 @@
                           </a:solidFill>
                           <a:latin typeface="Calibri"/>
                         </a:rPr>
-                        <a:t>better on gradual</a:t>
+                        <a:t>Better on gradual</a:t>
                       </a:r>
                     </a:p>
                   </a:txBody>
                   <a:tcPr marL="73152" marR="73152" marT="27432" marB="27432">
+                    <a:lnL w="9525" cap="flat" cmpd="sng" algn="ctr">
+                      <a:solidFill>
+                        <a:srgbClr val="000000"/>
+                      </a:solidFill>
+                    </a:lnL>
+                    <a:lnR w="9525" cap="flat" cmpd="sng" algn="ctr">
+                      <a:solidFill>
+                        <a:srgbClr val="000000"/>
+                      </a:solidFill>
+                    </a:lnR>
+                    <a:lnT w="9525" cap="flat" cmpd="sng" algn="ctr">
+                      <a:solidFill>
+                        <a:srgbClr val="000000"/>
+                      </a:solidFill>
+                    </a:lnT>
+                    <a:lnB w="9525" cap="flat" cmpd="sng" algn="ctr">
+                      <a:solidFill>
+                        <a:srgbClr val="000000"/>
+                      </a:solidFill>
+                    </a:lnB>
                     <a:solidFill>
                       <a:srgbClr val="FFFFFF"/>
                     </a:solidFill>
@@ -11089,6 +15929,26 @@
                     </a:p>
                   </a:txBody>
                   <a:tcPr marL="73152" marR="73152" marT="27432" marB="27432">
+                    <a:lnL w="9525" cap="flat" cmpd="sng" algn="ctr">
+                      <a:solidFill>
+                        <a:srgbClr val="000000"/>
+                      </a:solidFill>
+                    </a:lnL>
+                    <a:lnR w="9525" cap="flat" cmpd="sng" algn="ctr">
+                      <a:solidFill>
+                        <a:srgbClr val="000000"/>
+                      </a:solidFill>
+                    </a:lnR>
+                    <a:lnT w="9525" cap="flat" cmpd="sng" algn="ctr">
+                      <a:solidFill>
+                        <a:srgbClr val="000000"/>
+                      </a:solidFill>
+                    </a:lnT>
+                    <a:lnB w="9525" cap="flat" cmpd="sng" algn="ctr">
+                      <a:solidFill>
+                        <a:srgbClr val="000000"/>
+                      </a:solidFill>
+                    </a:lnB>
                     <a:solidFill>
                       <a:srgbClr val="FFFFFF"/>
                     </a:solidFill>
@@ -11107,11 +15967,31 @@
                           </a:solidFill>
                           <a:latin typeface="Calibri"/>
                         </a:rPr>
-                        <a:t>split the window; cut if halves differ</a:t>
+                        <a:t>Cut the window if halves differ</a:t>
                       </a:r>
                     </a:p>
                   </a:txBody>
                   <a:tcPr marL="73152" marR="73152" marT="27432" marB="27432">
+                    <a:lnL w="9525" cap="flat" cmpd="sng" algn="ctr">
+                      <a:solidFill>
+                        <a:srgbClr val="000000"/>
+                      </a:solidFill>
+                    </a:lnL>
+                    <a:lnR w="9525" cap="flat" cmpd="sng" algn="ctr">
+                      <a:solidFill>
+                        <a:srgbClr val="000000"/>
+                      </a:solidFill>
+                    </a:lnR>
+                    <a:lnT w="9525" cap="flat" cmpd="sng" algn="ctr">
+                      <a:solidFill>
+                        <a:srgbClr val="000000"/>
+                      </a:solidFill>
+                    </a:lnT>
+                    <a:lnB w="9525" cap="flat" cmpd="sng" algn="ctr">
+                      <a:solidFill>
+                        <a:srgbClr val="000000"/>
+                      </a:solidFill>
+                    </a:lnB>
                     <a:solidFill>
                       <a:srgbClr val="FFFFFF"/>
                     </a:solidFill>
@@ -11130,11 +16010,31 @@
                           </a:solidFill>
                           <a:latin typeface="Calibri"/>
                         </a:rPr>
-                        <a:t>false positives ≤ δ</a:t>
+                        <a:t>False positives ≤ δ</a:t>
                       </a:r>
                     </a:p>
                   </a:txBody>
                   <a:tcPr marL="73152" marR="73152" marT="27432" marB="27432">
+                    <a:lnL w="9525" cap="flat" cmpd="sng" algn="ctr">
+                      <a:solidFill>
+                        <a:srgbClr val="000000"/>
+                      </a:solidFill>
+                    </a:lnL>
+                    <a:lnR w="9525" cap="flat" cmpd="sng" algn="ctr">
+                      <a:solidFill>
+                        <a:srgbClr val="000000"/>
+                      </a:solidFill>
+                    </a:lnR>
+                    <a:lnT w="9525" cap="flat" cmpd="sng" algn="ctr">
+                      <a:solidFill>
+                        <a:srgbClr val="000000"/>
+                      </a:solidFill>
+                    </a:lnT>
+                    <a:lnB w="9525" cap="flat" cmpd="sng" algn="ctr">
+                      <a:solidFill>
+                        <a:srgbClr val="000000"/>
+                      </a:solidFill>
+                    </a:lnB>
                     <a:solidFill>
                       <a:srgbClr val="FFFFFF"/>
                     </a:solidFill>
@@ -11544,4 +16444,324 @@
   </a:objectDefaults>
   <a:extraClrSchemeLst/>
 </a:theme>
+</file>
+
+<file path=ppt/theme/theme2.xml><?xml version="1.0" encoding="utf-8"?>
+<a:theme xmlns:a="http://schemas.openxmlformats.org/drawingml/2006/main" name="Office Theme">
+  <a:themeElements>
+    <a:clrScheme name="Office">
+      <a:dk1>
+        <a:sysClr val="windowText" lastClr="000000"/>
+      </a:dk1>
+      <a:lt1>
+        <a:sysClr val="window" lastClr="FFFFFF"/>
+      </a:lt1>
+      <a:dk2>
+        <a:srgbClr val="1F497D"/>
+      </a:dk2>
+      <a:lt2>
+        <a:srgbClr val="EEECE1"/>
+      </a:lt2>
+      <a:accent1>
+        <a:srgbClr val="4F81BD"/>
+      </a:accent1>
+      <a:accent2>
+        <a:srgbClr val="C0504D"/>
+      </a:accent2>
+      <a:accent3>
+        <a:srgbClr val="9BBB59"/>
+      </a:accent3>
+      <a:accent4>
+        <a:srgbClr val="8064A2"/>
+      </a:accent4>
+      <a:accent5>
+        <a:srgbClr val="4BACC6"/>
+      </a:accent5>
+      <a:accent6>
+        <a:srgbClr val="F79646"/>
+      </a:accent6>
+      <a:hlink>
+        <a:srgbClr val="0000FF"/>
+      </a:hlink>
+      <a:folHlink>
+        <a:srgbClr val="800080"/>
+      </a:folHlink>
+    </a:clrScheme>
+    <a:fontScheme name="Office">
+      <a:majorFont>
+        <a:latin typeface="Calibri"/>
+        <a:ea typeface=""/>
+        <a:cs typeface=""/>
+        <a:font script="Jpan" typeface="ＭＳ Ｐゴシック"/>
+        <a:font script="Hang" typeface="맑은 고딕"/>
+        <a:font script="Hans" typeface="宋体"/>
+        <a:font script="Hant" typeface="新細明體"/>
+        <a:font script="Arab" typeface="Times New Roman"/>
+        <a:font script="Hebr" typeface="Times New Roman"/>
+        <a:font script="Thai" typeface="Angsana New"/>
+        <a:font script="Ethi" typeface="Nyala"/>
+        <a:font script="Beng" typeface="Vrinda"/>
+        <a:font script="Gujr" typeface="Shruti"/>
+        <a:font script="Khmr" typeface="MoolBoran"/>
+        <a:font script="Knda" typeface="Tunga"/>
+        <a:font script="Guru" typeface="Raavi"/>
+        <a:font script="Cans" typeface="Euphemia"/>
+        <a:font script="Cher" typeface="Plantagenet Cherokee"/>
+        <a:font script="Yiii" typeface="Microsoft Yi Baiti"/>
+        <a:font script="Tibt" typeface="Microsoft Himalaya"/>
+        <a:font script="Thaa" typeface="MV Boli"/>
+        <a:font script="Deva" typeface="Mangal"/>
+        <a:font script="Telu" typeface="Gautami"/>
+        <a:font script="Taml" typeface="Latha"/>
+        <a:font script="Syrc" typeface="Estrangelo Edessa"/>
+        <a:font script="Orya" typeface="Kalinga"/>
+        <a:font script="Mlym" typeface="Kartika"/>
+        <a:font script="Laoo" typeface="DokChampa"/>
+        <a:font script="Sinh" typeface="Iskoola Pota"/>
+        <a:font script="Mong" typeface="Mongolian Baiti"/>
+        <a:font script="Viet" typeface="Times New Roman"/>
+        <a:font script="Uigh" typeface="Microsoft Uighur"/>
+        <a:font script="Geor" typeface="Sylfaen"/>
+      </a:majorFont>
+      <a:minorFont>
+        <a:latin typeface="Calibri"/>
+        <a:ea typeface=""/>
+        <a:cs typeface=""/>
+        <a:font script="Jpan" typeface="ＭＳ Ｐゴシック"/>
+        <a:font script="Hang" typeface="맑은 고딕"/>
+        <a:font script="Hans" typeface="宋体"/>
+        <a:font script="Hant" typeface="新細明體"/>
+        <a:font script="Arab" typeface="Arial"/>
+        <a:font script="Hebr" typeface="Arial"/>
+        <a:font script="Thai" typeface="Cordia New"/>
+        <a:font script="Ethi" typeface="Nyala"/>
+        <a:font script="Beng" typeface="Vrinda"/>
+        <a:font script="Gujr" typeface="Shruti"/>
+        <a:font script="Khmr" typeface="DaunPenh"/>
+        <a:font script="Knda" typeface="Tunga"/>
+        <a:font script="Guru" typeface="Raavi"/>
+        <a:font script="Cans" typeface="Euphemia"/>
+        <a:font script="Cher" typeface="Plantagenet Cherokee"/>
+        <a:font script="Yiii" typeface="Microsoft Yi Baiti"/>
+        <a:font script="Tibt" typeface="Microsoft Himalaya"/>
+        <a:font script="Thaa" typeface="MV Boli"/>
+        <a:font script="Deva" typeface="Mangal"/>
+        <a:font script="Telu" typeface="Gautami"/>
+        <a:font script="Taml" typeface="Latha"/>
+        <a:font script="Syrc" typeface="Estrangelo Edessa"/>
+        <a:font script="Orya" typeface="Kalinga"/>
+        <a:font script="Mlym" typeface="Kartika"/>
+        <a:font script="Laoo" typeface="DokChampa"/>
+        <a:font script="Sinh" typeface="Iskoola Pota"/>
+        <a:font script="Mong" typeface="Mongolian Baiti"/>
+        <a:font script="Viet" typeface="Arial"/>
+        <a:font script="Uigh" typeface="Microsoft Uighur"/>
+        <a:font script="Geor" typeface="Sylfaen"/>
+      </a:minorFont>
+    </a:fontScheme>
+    <a:fmtScheme name="Office">
+      <a:fillStyleLst>
+        <a:solidFill>
+          <a:schemeClr val="phClr"/>
+        </a:solidFill>
+        <a:gradFill rotWithShape="1">
+          <a:gsLst>
+            <a:gs pos="0">
+              <a:schemeClr val="phClr">
+                <a:tint val="50000"/>
+                <a:satMod val="300000"/>
+              </a:schemeClr>
+            </a:gs>
+            <a:gs pos="35000">
+              <a:schemeClr val="phClr">
+                <a:tint val="37000"/>
+                <a:satMod val="300000"/>
+              </a:schemeClr>
+            </a:gs>
+            <a:gs pos="100000">
+              <a:schemeClr val="phClr">
+                <a:tint val="15000"/>
+                <a:satMod val="350000"/>
+              </a:schemeClr>
+            </a:gs>
+          </a:gsLst>
+          <a:lin ang="16200000" scaled="1"/>
+        </a:gradFill>
+        <a:gradFill rotWithShape="1">
+          <a:gsLst>
+            <a:gs pos="0">
+              <a:schemeClr val="phClr">
+                <a:tint val="100000"/>
+                <a:shade val="100000"/>
+                <a:satMod val="130000"/>
+              </a:schemeClr>
+            </a:gs>
+            <a:gs pos="100000">
+              <a:schemeClr val="phClr">
+                <a:tint val="50000"/>
+                <a:shade val="100000"/>
+                <a:satMod val="350000"/>
+              </a:schemeClr>
+            </a:gs>
+          </a:gsLst>
+          <a:lin ang="16200000" scaled="0"/>
+        </a:gradFill>
+      </a:fillStyleLst>
+      <a:lnStyleLst>
+        <a:ln w="9525" cap="flat" cmpd="sng" algn="ctr">
+          <a:solidFill>
+            <a:schemeClr val="phClr">
+              <a:shade val="95000"/>
+              <a:satMod val="105000"/>
+            </a:schemeClr>
+          </a:solidFill>
+          <a:prstDash val="solid"/>
+        </a:ln>
+        <a:ln w="25400" cap="flat" cmpd="sng" algn="ctr">
+          <a:solidFill>
+            <a:schemeClr val="phClr"/>
+          </a:solidFill>
+          <a:prstDash val="solid"/>
+        </a:ln>
+        <a:ln w="38100" cap="flat" cmpd="sng" algn="ctr">
+          <a:solidFill>
+            <a:schemeClr val="phClr"/>
+          </a:solidFill>
+          <a:prstDash val="solid"/>
+        </a:ln>
+      </a:lnStyleLst>
+      <a:effectStyleLst>
+        <a:effectStyle>
+          <a:effectLst>
+            <a:outerShdw blurRad="40000" dist="20000" dir="5400000" rotWithShape="0">
+              <a:srgbClr val="000000">
+                <a:alpha val="38000"/>
+              </a:srgbClr>
+            </a:outerShdw>
+          </a:effectLst>
+        </a:effectStyle>
+        <a:effectStyle>
+          <a:effectLst>
+            <a:outerShdw blurRad="40000" dist="23000" dir="5400000" rotWithShape="0">
+              <a:srgbClr val="000000">
+                <a:alpha val="35000"/>
+              </a:srgbClr>
+            </a:outerShdw>
+          </a:effectLst>
+        </a:effectStyle>
+        <a:effectStyle>
+          <a:effectLst>
+            <a:outerShdw blurRad="40000" dist="23000" dir="5400000" rotWithShape="0">
+              <a:srgbClr val="000000">
+                <a:alpha val="35000"/>
+              </a:srgbClr>
+            </a:outerShdw>
+          </a:effectLst>
+          <a:scene3d>
+            <a:camera prst="orthographicFront">
+              <a:rot lat="0" lon="0" rev="0"/>
+            </a:camera>
+            <a:lightRig rig="threePt" dir="t">
+              <a:rot lat="0" lon="0" rev="1200000"/>
+            </a:lightRig>
+          </a:scene3d>
+          <a:sp3d>
+            <a:bevelT w="63500" h="25400"/>
+          </a:sp3d>
+        </a:effectStyle>
+      </a:effectStyleLst>
+      <a:bgFillStyleLst>
+        <a:solidFill>
+          <a:schemeClr val="phClr"/>
+        </a:solidFill>
+        <a:gradFill rotWithShape="1">
+          <a:gsLst>
+            <a:gs pos="0">
+              <a:schemeClr val="phClr">
+                <a:tint val="40000"/>
+                <a:satMod val="350000"/>
+              </a:schemeClr>
+            </a:gs>
+            <a:gs pos="40000">
+              <a:schemeClr val="phClr">
+                <a:tint val="45000"/>
+                <a:shade val="99000"/>
+                <a:satMod val="350000"/>
+              </a:schemeClr>
+            </a:gs>
+            <a:gs pos="100000">
+              <a:schemeClr val="phClr">
+                <a:shade val="20000"/>
+                <a:satMod val="255000"/>
+              </a:schemeClr>
+            </a:gs>
+          </a:gsLst>
+          <a:path path="circle">
+            <a:fillToRect l="50000" t="-80000" r="50000" b="180000"/>
+          </a:path>
+        </a:gradFill>
+        <a:gradFill rotWithShape="1">
+          <a:gsLst>
+            <a:gs pos="0">
+              <a:schemeClr val="phClr">
+                <a:tint val="80000"/>
+                <a:satMod val="300000"/>
+              </a:schemeClr>
+            </a:gs>
+            <a:gs pos="100000">
+              <a:schemeClr val="phClr">
+                <a:shade val="30000"/>
+                <a:satMod val="200000"/>
+              </a:schemeClr>
+            </a:gs>
+          </a:gsLst>
+          <a:path path="circle">
+            <a:fillToRect l="50000" t="50000" r="50000" b="50000"/>
+          </a:path>
+        </a:gradFill>
+      </a:bgFillStyleLst>
+    </a:fmtScheme>
+  </a:themeElements>
+  <a:objectDefaults>
+    <a:spDef>
+      <a:spPr/>
+      <a:bodyPr/>
+      <a:lstStyle/>
+      <a:style>
+        <a:lnRef idx="1">
+          <a:schemeClr val="accent1"/>
+        </a:lnRef>
+        <a:fillRef idx="3">
+          <a:schemeClr val="accent1"/>
+        </a:fillRef>
+        <a:effectRef idx="2">
+          <a:schemeClr val="accent1"/>
+        </a:effectRef>
+        <a:fontRef idx="minor">
+          <a:schemeClr val="lt1"/>
+        </a:fontRef>
+      </a:style>
+    </a:spDef>
+    <a:lnDef>
+      <a:spPr/>
+      <a:bodyPr/>
+      <a:lstStyle/>
+      <a:style>
+        <a:lnRef idx="2">
+          <a:schemeClr val="accent1"/>
+        </a:lnRef>
+        <a:fillRef idx="0">
+          <a:schemeClr val="accent1"/>
+        </a:fillRef>
+        <a:effectRef idx="1">
+          <a:schemeClr val="accent1"/>
+        </a:effectRef>
+        <a:fontRef idx="minor">
+          <a:schemeClr val="tx1"/>
+        </a:fontRef>
+      </a:style>
+    </a:lnDef>
+  </a:objectDefaults>
+  <a:extraClrSchemeLst/>
+</a:theme>
 </file>
--- a/data-drift/seminar.pptx
+++ b/data-drift/seminar.pptx
@@ -1045,7 +1045,19 @@
           <a:lstStyle/>
           <a:p>
             <a:r>
-              <a:t>Giới thiệu: bài trình bày gồm ba phần — khái niệm trôi (concept drift) là gì, cách cộng đồng nghiên cứu xử lý nó, và kết quả tái lập bài báo Read (2018). Phần tái lập chỉ là một mục trong sáu mục, không phải trọng tâm duy nhất.</a:t>
+              <a:t>MỞ ĐẦU (~1 phút). Bài gồm ba khối: (a) trôi khái niệm là gì và cộng đồng xử lý ra sao — đây là phần khảo sát, chiếm nhiều nhất; (b) một lập luận cụ thể của Read (2018) và kết quả tái lập của mình; (c) các vấn đề còn mở.</a:t>
+            </a:r>
+          </a:p>
+          <a:p/>
+          <a:p>
+            <a:r>
+              <a:t>Nói rõ ngay từ đầu rằng phần tái lập chỉ là một trong sáu mục, để người nghe không chờ đợi một bài báo cáo thực nghiệm thuần túy.</a:t>
+            </a:r>
+          </a:p>
+          <a:p/>
+          <a:p>
+            <a:r>
+              <a:t>Phân bổ thời gian gợi ý: phần 1–2 khoảng 12 phút, phần 3 khoảng 6 phút, phần 4 khoảng 10 phút, phần 5–6 khoảng 7 phút.</a:t>
             </a:r>
           </a:p>
         </p:txBody>
@@ -1115,7 +1127,31 @@
           <a:lstStyle/>
           <a:p>
             <a:r>
-              <a:t>Ba hạn chế của quy trình đánh giá hiện hành. Hạn chế thứ ba là nghiêm trọng nhất trong thực tế: các bộ phát hiện kinh điển đều giả định nhãn có ngay lập tức, trong khi ở bài toán gian lận thẻ, nhãn đến sau 30–180 ngày. Nếu tín hiệu sai số không quan sát được trong nhiều tháng thì mọi phương pháp dựa vào nó đều không dùng được.</a:t>
+              <a:t>HẠN CHẾ ĐÁNH GIÁ (~2 phút). Ba hạn chế, nói theo thứ tự tăng dần mức nghiêm trọng.</a:t>
+            </a:r>
+          </a:p>
+          <a:p/>
+          <a:p>
+            <a:r>
+              <a:t>(1) Dữ liệu tổng hợp chiếm đa số: các luồng chuyển giữa những khái niệm định sẵn tại những thời điểm cố định, phân phối đơn giản, động lực trôi không thực tế. Chưa có bằng chứng kết quả chuyển được sang dữ liệu thật.</a:t>
+            </a:r>
+          </a:p>
+          <a:p/>
+          <a:p>
+            <a:r>
+              <a:t>(2) Đánh giá gián tiếp: lấy 'huấn luyện lại có cải thiện không' làm thước đo sẽ trộn lẫn chất lượng bộ phát hiện với khả năng thích nghi của mô hình, và không cho biết độ chính xác lẫn độ trễ phát hiện.</a:t>
+            </a:r>
+          </a:p>
+          <a:p/>
+          <a:p>
+            <a:r>
+              <a:t>(3) Nghiêm trọng nhất — độ trễ nhãn. DDM, EDDM, ADWIN đều giả định nhãn có ngay. Trong phát hiện gian lận, nhãn thật đến sau 30–180 ngày, nên các phương pháp này không dùng được ở dạng gốc.</a:t>
+            </a:r>
+          </a:p>
+          <a:p/>
+          <a:p>
+            <a:r>
+              <a:t>Ý cần chốt, và nên nói rõ vì nó cắt cả hai phía: nếu tín hiệu sai số không quan sát được trong nhiều tháng thì KHÔNG chỉ bộ phát hiện gặp khó — mọi phương pháp dựa vào sai số, kể cả phương pháp bám theo ở phần 3, đều gặp khó như nhau.</a:t>
             </a:r>
           </a:p>
         </p:txBody>
@@ -1185,7 +1221,25 @@
           <a:lstStyle/>
           <a:p>
             <a:r>
-              <a:t>Đây là slide quan trọng nhất của phần này. Cơ chế thích nghi khả dụng được quyết định bởi mô hình được cấu tạo từ cái gì. Cây quyết định có tham số là một cấu trúc rời rạc nên không tồn tại bước dịch chuyển nhỏ — chỉ có thể mọc thêm hoặc phá đi. Bộ đệm cũng vậy: mô hình chính là dữ liệu lưu trữ. Chỉ mô hình có tham số liên tục mới bám theo được khái niệm.</a:t>
+              <a:t>BA CƠ CHẾ THÍCH NGHI (~3 phút). Đây là slide quan trọng nhất của phần khảo sát; nên dành thời gian.</a:t>
+            </a:r>
+          </a:p>
+          <a:p/>
+          <a:p>
+            <a:r>
+              <a:t>Luận điểm: cơ chế thích nghi nào KHẢ DỤNG là do mô hình được cấu tạo từ cái gì, chứ không phải do người thiết kế chọn.</a:t>
+            </a:r>
+          </a:p>
+          <a:p/>
+          <a:p>
+            <a:r>
+              <a:t>kNN: mô hình CHÍNH LÀ dữ liệu lưu trữ, nên 'thích nghi' nghĩa là thay dữ liệu — một thao tác thay thế, không có mức độ. Cây Hoeffding: tham số là một cấu trúc rời rạc (nút và ngưỡng), nên không tồn tại phép dịch chuyển nhỏ; chỉ có thể mọc thêm hoặc phá đi rồi dựng lại. SGD: tham số là một vector trong không gian liên tục, nên cộng thêm một lượng nhỏ là thao tác hợp lệ.</a:t>
+            </a:r>
+          </a:p>
+          <a:p/>
+          <a:p>
+            <a:r>
+              <a:t>Nếu được hỏi 'đây là lập luận hay kết quả', trả lời: là tính chất cấu trúc, không cần thực nghiệm. Trong phần cài đặt của mình, điều này hiện ra thành kiểu trả về: hàm theta_hat() trả về vector cho SGD và PBF-SGD, trả về None cho kNN, SAMkNN, HT và RF-HT. Đó không phải hàm chưa cài đặt — mà là không tồn tại θ để trả về.</a:t>
             </a:r>
           </a:p>
         </p:txBody>
@@ -1255,7 +1309,7 @@
           <a:lstStyle/>
           <a:p>
             <a:r>
-              <a:t>Chuyển sang bài báo Read (2018), nền tảng cho phần tái lập tiếp theo.</a:t>
+              <a:t>CHUYỂN MỤC. 'Phần vừa rồi cho thấy có ba cơ chế. Bài báo sau đây lập luận rằng cộng đồng đã chọn nhầm cơ chế.'</a:t>
             </a:r>
           </a:p>
         </p:txBody>
@@ -1325,7 +1379,25 @@
           <a:lstStyle/>
           <a:p>
             <a:r>
-              <a:t>Lập luận cốt lõi. Cộng đồng giả định dữ liệu độc lập cùng phân phối trong mỗi khái niệm, nhưng trôi khái niệm chính là sự thay đổi khái niệm đó — nên giả định tự mâu thuẫn. Con số minh họa được đếm trực tiếp trên luồng 20 bước. Điểm then chốt: thời điểm đổi τ không quan sát được. Nếu biết τ thì có thể cắt luồng làm đôi và toàn bộ lập luận sụp đổ; vì không biết, một bước nhảy tức thời biểu hiện thành phụ thuộc thời gian kéo dài trong tín hiệu sai số.</a:t>
+              <a:t>MÂU THUẪN VÀ BỔ ĐỀ 1 (~3 phút). Trình bày theo ba bước.</a:t>
+            </a:r>
+          </a:p>
+          <a:p/>
+          <a:p>
+            <a:r>
+              <a:t>Bước 1 — mâu thuẫn: cộng đồng giả định dữ liệu độc lập cùng phân phối TRONG mỗi khái niệm, rồi coi trôi là một sự kiện cần phát hiện để khởi tạo lại mô hình i.i.d. Nhưng trôi chính là sự thay đổi khái niệm, nên giả định tự mâu thuẫn.</a:t>
+            </a:r>
+          </a:p>
+          <a:p/>
+          <a:p>
+            <a:r>
+              <a:t>Bước 2 — số liệu: nếu độc lập thì phải có P(C_t) = P(C_t | C_{t−1}). Đếm trực tiếp trên luồng 20 bước với τ = 10 được 0,450 so với 0,000. Giải thích tại sao xác suất thứ hai bằng đúng 0: trôi đột ngột là không đảo ngược, một khi C đã lật thì không quay lại.</a:t>
+            </a:r>
+          </a:p>
+          <a:p/>
+          <a:p>
+            <a:r>
+              <a:t>Bước 3 — phản biện và trả lời: có người sẽ nói khi t đủ lớn thì chỉ số khái niệm trở thành hằng, nên độc lập được khôi phục trong từng khái niệm. Trả lời: ta KHÔNG quan sát được τ. Nếu biết τ thì cắt luồng tại đó và mỗi nửa là i.i.d., toàn bộ bài báo sụp đổ. Vì không biết, một bước nhảy tức thời biểu hiện thành phụ thuộc thời gian kéo dài trong tín hiệu sai số. Chính sự KHÔNG QUAN SÁT ĐƯỢC của τ mới biến một bước nhảy thành một chuỗi thời gian.</a:t>
             </a:r>
           </a:p>
         </p:txBody>
@@ -1395,7 +1467,31 @@
           <a:lstStyle/>
           <a:p>
             <a:r>
-              <a:t>Cách diễn đạt lại: mỗi khái niệm là một điểm trong không gian tham số, trôi là một quỹ đạo. Nếu là quỹ đạo thì về nguyên tắc có thể dự báo được, và bài toán trôi khái niệm trở thành bài toán dự báo tham số. Công thức cuối là toàn bộ đơn thuốc của bài báo: bám theo, không cần bộ phát hiện, không cần khởi tạo lại.</a:t>
+              <a:t>QUỸ ĐẠO (~3 phút). Đây là đóng góp chính của bài báo: diễn đạt lại bài toán chứ không đề xuất thuật toán mới.</a:t>
+            </a:r>
+          </a:p>
+          <a:p/>
+          <a:p>
+            <a:r>
+              <a:t>Mỗi khái niệm là một điểm θ trong không gian tham số Θ; trôi trở thành một quỹ đạo. Đọc bảng theo cột cuối: chỉ trôi tăng dần và trôi lặp lại mới có quỹ đạo để bám. Nhắc lại ý từ slide 5 — với trôi dần dần thì α_t mới là chuỗi thời gian, còn θ chỉ nhảy qua lại giữa hai điểm; bài báo thừa nhận điều này và để lại cho nghiên cứu sau.</a:t>
+            </a:r>
+          </a:p>
+          <a:p/>
+          <a:p>
+            <a:r>
+              <a:t>Bước suy luận then chốt: nếu là quỹ đạo thì về nguyên tắc DỰ BÁO ĐƯỢC. Khi đó bài toán trôi khái niệm trở thành bài toán dự báo θ_t — nguyên văn: 'giải bài toán trôi khái niệm đồng nhất với giải bài toán dự báo θ_t'.</a:t>
+            </a:r>
+          </a:p>
+          <a:p/>
+          <a:p>
+            <a:r>
+              <a:t>Công thức cuối là toàn bộ đơn thuốc: cập nhật theo gradient, không bộ phát hiện, không khởi tạo lại. Kèm đúng một điều kiện — λ không được giảm về 0 — sẽ kiểm chứng ở slide 18.</a:t>
+            </a:r>
+          </a:p>
+          <a:p/>
+          <a:p>
+            <a:r>
+              <a:t>Lưu ý khi bị hỏi: đây vẫn là bám theo có tính phản ứng (reactive), chưa phải dự báo thật sự. Bài báo lập luận cho dự báo nhưng không xây dựng nó; phần 5 sẽ cho thấy ai đã xây dựng.</a:t>
             </a:r>
           </a:p>
         </p:txBody>
@@ -1465,7 +1561,7 @@
           <a:lstStyle/>
           <a:p>
             <a:r>
-              <a:t>Chuyển sang phần thực nghiệm: cài đặt lại toàn bộ sáu phương pháp trong Bảng 2 bằng thư viện chuẩn của Python, chạy trên chính dữ liệu của bài báo.</a:t>
+              <a:t>CHUYỂN MỤC. 'Lập luận đã rõ. Phần này kiểm chứng nó bằng cách cài đặt lại toàn bộ phương pháp của bài báo và chạy trên chính dữ liệu của bài báo.'</a:t>
             </a:r>
           </a:p>
         </p:txBody>
@@ -1535,7 +1631,31 @@
           <a:lstStyle/>
           <a:p>
             <a:r>
-              <a:t>Số lượng mẫu của hai tập dữ liệu khớp chính xác với con số bài báo nêu. Các phương pháp được cài đặt lại chứ không thay thế bằng mô hình tương đương — kể cả cây Hoeffding và ADWIN2. ADWIN2 được kiểm chứng riêng: phát hiện sau 55 mẫu kể từ điểm đổi thật, và không có báo động giả nào trên 4.000 mẫu dừng.</a:t>
+              <a:t>THIẾT LẬP THỰC NGHIỆM (~2 phút). Ba điểm cần nhấn.</a:t>
+            </a:r>
+          </a:p>
+          <a:p/>
+          <a:p>
+            <a:r>
+              <a:t>(1) Dữ liệu lấy từ đúng nguồn bài báo trích dẫn (kho MOA). Số mẫu khớp CHÍNH XÁC: Electricity 45.312 và CoverType 581.012. Đây là kiểm tra đầu tiên cho thấy đang dùng đúng tập dữ liệu.</a:t>
+            </a:r>
+          </a:p>
+          <a:p/>
+          <a:p>
+            <a:r>
+              <a:t>(2) Cài đặt lại chứ không thay thế: cây Hoeffding thật (tách theo cận Hoeffding, bộ ước lượng Gauss cho thuộc tính số, naive Bayes ở lá), ADWIN2 thật với exponential histogram, RF-HT với 100 cây, không gian con ngẫu nhiên và lấy mẫu Poisson(6). Toàn bộ bằng thư viện chuẩn Python, không scikit-multiflow, không numpy — nên mọi con số đều truy được về một dòng mã đọc được.</a:t>
+            </a:r>
+          </a:p>
+          <a:p/>
+          <a:p>
+            <a:r>
+              <a:t>(3) ADWIN2 được kiểm chứng ĐỘC LẬP trước khi dùng: trên luồng nhảy từ 0,2 lên 0,8 tại bước 1.000, nó phát hiện sau 55 mẫu; trên 4.000 mẫu dừng, không có báo động giả nào. Nếu bị hỏi 'làm sao tin bản cài đặt', đây là câu trả lời.</a:t>
+            </a:r>
+          </a:p>
+          <a:p/>
+          <a:p>
+            <a:r>
+              <a:t>Cũng nên nói: độ chính xác chỉ tính từ τ_0 = T/10 trở đi, đúng như Bảng 1 quy định và Bảng 5 xác nhận — nếu tính cả giai đoạn khởi động thì mọi phương pháp đều bị trừ điểm oan.</a:t>
             </a:r>
           </a:p>
         </p:txBody>
@@ -1605,7 +1725,31 @@
           <a:lstStyle/>
           <a:p>
             <a:r>
-              <a:t>Electricity tái lập tốt: hai trong ba phương pháp nâng cao lệch dưới 2 điểm. PBF-SGD lệch 5,2 điểm — nguyên nhân nằm ở bậc đa thức chứ không phải tốc độ học, sẽ nói rõ ở slide sau. CoverType không so sánh được vì bài báo phân loại đủ bảy lớp còn ở đây rút về nhị phân.</a:t>
+              <a:t>KẾT QUẢ (~3 phút). Đọc bảng theo hàng, không đọc hết mọi số.</a:t>
+            </a:r>
+          </a:p>
+          <a:p/>
+          <a:p>
+            <a:r>
+              <a:t>Electricity là hàng sạch nhất: SAMkNN 78,0 so với 79,8 (lệch 1,8) và RF-HT 84,5 so với 86,2 (lệch 1,7) với đủ 100 cây. Hai trên ba phương pháp nâng cao tái lập trong vòng 2 điểm — đủ để nói bản cài đặt là đúng.</a:t>
+            </a:r>
+          </a:p>
+          <a:p/>
+          <a:p>
+            <a:r>
+              <a:t>RTG: PBF-SGD đạt 82,8 so với 81,8 của bài báo, tức VƯỢT; và thứ hạng bài báo công bố ở hàng này (PBF-SGD dẫn đầu) cũng được giữ nguyên.</a:t>
+            </a:r>
+          </a:p>
+          <a:p/>
+          <a:p>
+            <a:r>
+              <a:t>Hai sai lệch có hệ thống, cả hai đều truy được nguyên nhân. Thứ nhất, PBF-SGD trên Electricity lệch 5,2 điểm — nguyên nhân là bậc đa thức chứ không phải λ, chứng minh ở slide 20. Thứ hai, SAMkNN lệch theo thứ tự tăng dần: 1,8 rồi 7,7 rồi 14,9. Chính THỨ TỰ này là bằng chứng: bản cài đặt của mình nén bộ nhớ dài hạn bằng FIFO thay vì kMeans++ như Losing et al., nên sai lệch phải lớn dần ở những luồng mà bộ nhớ dài hạn gánh nhiều việc hơn — và đúng như vậy. Nói rõ: không nên trích dẫn con số SAMkNN này như con số của SAMkNN gốc.</a:t>
+            </a:r>
+          </a:p>
+          <a:p/>
+          <a:p>
+            <a:r>
+              <a:t>CoverType không so sánh được: bài báo phân loại đủ 7 lớp, ở đây rút về nhị phân một-chống-tất-cả trên một tập con. Chỉ để xếp hạng tương đối giữa các phương pháp.</a:t>
             </a:r>
           </a:p>
         </p:txBody>
@@ -1675,7 +1819,37 @@
           <a:lstStyle/>
           <a:p>
             <a:r>
-              <a:t>Bài báo nêu điều kiện không được để tốc độ học giảm về 0, nhưng không có thực nghiệm tách riêng. Kết quả cho thấy hình phạt lớn nhất là sau trôi đột ngột (18,6 điểm) và gần như bằng không dưới trôi kéo dài (0,8 điểm) — ngược với trực giác. Lý do: dưới trôi kéo dài, tốc độ học hằng số cũng chỉ đạt 88,1 nên việc giảm không làm mất thêm gì; còn sau khi khái niệm bị lấy mẫu lại, tốc độ học còn sống thì học lại được, đóng băng thì không.</a:t>
+              <a:t>ĐIỀU KIỆN VỀ λ (~3 phút). Đây là kết quả đáng nói nhất của phần thực nghiệm, vì nó SỬA trực giác.</a:t>
+            </a:r>
+          </a:p>
+          <a:p/>
+          <a:p>
+            <a:r>
+              <a:t>Bài báo chỉ nêu điều kiện 'không để λ giảm về 0' với lý do mô hình sẽ phản ứng ngày càng chậm với trôi, và không có thực nghiệm nào tách riêng điều kiện này.</a:t>
+            </a:r>
+          </a:p>
+          <a:p/>
+          <a:p>
+            <a:r>
+              <a:t>Kết quả đo được: hình phạt lớn nhất là sau trôi ĐỘT NGỘT (18,6 điểm) và gần như bằng không dưới trôi KÉO DÀI (0,8 điểm). Ngược hẳn với cách diễn đạt của bài báo, vốn gợi ý rằng trôi liên tục mới là nơi mô hình đóng băng chịu thiệt nhất.</a:t>
+            </a:r>
+          </a:p>
+          <a:p/>
+          <a:p>
+            <a:r>
+              <a:t>Giải thích cơ chế — đây là phần quan trọng: dưới trôi kéo dài (xoay 0,01 rad mỗi bước), λ hằng số cũng chỉ đạt 88,1 vì khái niệm di chuyển nhanh hơn mọi bước cố định; đã không bám được thì giảm λ cũng chẳng mất thêm gì. Ngược lại, sau khi khái niệm bị lấy mẫu lại, λ còn sống thì học lại được khái niệm mới, λ đóng băng thì không — nên mất trọn 18,6 điểm.</a:t>
+            </a:r>
+          </a:p>
+          <a:p/>
+          <a:p>
+            <a:r>
+              <a:t>Phòng câu hỏi 'có phải do λ_0 = 0,01 quá nhỏ không': đã kiểm tra trên dải 50 lần, λ_0 ∈ {0,01; 0,1; 0,5}. Hình phạt ở trôi kéo dài giữ nguyên mức nhỏ (1,0 / 1,2 / 1,4) ở mọi λ_0, nên không phải hiện tượng giả do tham số.</a:t>
+            </a:r>
+          </a:p>
+          <a:p/>
+          <a:p>
+            <a:r>
+              <a:t>Kết luận cần chốt: điều kiện này thực chất nói về khả năng PHỤC HỒI sau gián đoạn, chứ không phải về việc bám theo trôi liên tục.</a:t>
             </a:r>
           </a:p>
         </p:txBody>
@@ -1745,7 +1919,31 @@
           <a:lstStyle/>
           <a:p>
             <a:r>
-              <a:t>Đường kNN gần như nằm ngang qua cả năm kịch bản — biên độ 0,6 điểm so với 9,2 điểm của SGD. Trôi gần như không làm kNN tệ đi, vì kNN chưa bao giờ tích lũy được gì để trôi làm hỏng. Bài báo nêu hai nhận xét riêng biệt (khả năng bị chặn bởi kích thước bộ đệm, và không có xu hướng tăng khi dừng); thực ra đó là cùng một tính chất.</a:t>
+              <a:t>PHƯƠNG PHÁP BỘ ĐỆM (~2 phút). Chỉ vào hình trước khi nói: đường kNN gần như nằm ngang.</a:t>
+            </a:r>
+          </a:p>
+          <a:p/>
+          <a:p>
+            <a:r>
+              <a:t>Số liệu: kNN dao động 0,6 điểm qua cả năm kịch bản (72,7 đến 73,3), trong khi SGD dao động 9,2 điểm (88,1 đến 97,3).</a:t>
+            </a:r>
+          </a:p>
+          <a:p/>
+          <a:p>
+            <a:r>
+              <a:t>Giải thích: trôi hầu như không làm kNN tệ đi, vì kNN chưa bao giờ tích lũy được gì để trôi làm hỏng. Mô hình chính là 100 mẫu gần nhất, và 100 mẫu gần nhất thì luôn thuộc khái niệm hiện tại dù có trôi hay không.</a:t>
+            </a:r>
+          </a:p>
+          <a:p/>
+          <a:p>
+            <a:r>
+              <a:t>Điểm đóng góp của slide: bài báo nêu HAI nhận xét riêng biệt — mục 7 nói năng lực bị chặn bởi kích thước bộ đệm, và Hình 5a nhận xét kNN không có xu hướng tăng ngay cả khi khái niệm đứng yên. Thực ra đó là CÙNG một tính chất: không tích lũy được thì vừa bị chặn trên, vừa không bị trôi làm hại. Trần năng lực và tính trơ là một.</a:t>
+            </a:r>
+          </a:p>
+          <a:p/>
+          <a:p>
+            <a:r>
+              <a:t>Nếu bị hỏi về SAMkNN: SAMkNN khắc phục đúng điểm này bằng bộ nhớ dài hạn, và đó là lý do nó tốt hơn kNN thuần trong Bảng 3.</a:t>
             </a:r>
           </a:p>
         </p:txBody>
@@ -1815,7 +2013,19 @@
           <a:lstStyle/>
           <a:p>
             <a:r>
-              <a:t>Nêu nhanh sáu phần. Nhấn mạnh mạch bài: từ định nghĩa bài toán, sang phương pháp, rồi đến một lập luận cụ thể, phần kiểm chứng bằng thực nghiệm, và cuối cùng là các câu hỏi còn bỏ ngỏ.</a:t>
+              <a:t>DÀN Ý (~30 giây). Đọc lướt sáu mục, không giải thích từng mục.</a:t>
+            </a:r>
+          </a:p>
+          <a:p/>
+          <a:p>
+            <a:r>
+              <a:t>Mạch lập luận cần làm rõ: bài toán (1) → cách xử lý hiện có (2) → một lập luận cụ thể nói rằng cách xử lý phổ biến là sai hướng (3) → kiểm chứng lập luận đó bằng thực nghiệm (4) → những gì đã xảy ra sau đó (5) → những gì còn lại (6).</a:t>
+            </a:r>
+          </a:p>
+          <a:p/>
+          <a:p>
+            <a:r>
+              <a:t>Nếu bị hỏi 'tại sao chọn bài báo 2018 cũ như vậy', trả lời trước: vì đề xuất trong đó mãi đến 2025 mới được hiện thực hóa, và đó chính là nội dung phần 5.</a:t>
             </a:r>
           </a:p>
         </p:txBody>
@@ -1885,7 +2095,31 @@
           <a:lstStyle/>
           <a:p>
             <a:r>
-              <a:t>Ba tham số bài báo không nêu, trong đó số chiều dữ liệu tổng hợp là quan trọng nhất: nó đưa SGD từ 57,7 lên 92,2. Nghĩa là hàng Synthetic trong Bảng 3 chỉ đạt được ở số chiều lớn, không phải ở d = 2 như chính Hình 4 của bài báo vẽ. Ai trích dẫn cột đó nên biết điều này.</a:t>
+              <a:t>THAM SỐ KHÔNG ĐƯỢC NÊU (~2 phút). Ba tham số bài báo không ghi, xếp theo mức ảnh hưởng.</a:t>
+            </a:r>
+          </a:p>
+          <a:p/>
+          <a:p>
+            <a:r>
+              <a:t>Quan trọng nhất là số chiều dữ liệu tổng hợp: SGD đạt 57,7 / 74,5 / 83,1 / 92,2 ứng với d = 2 / 5 / 10 / 20. Biên độ này lớn hơn chênh lệch giữa bất kỳ hai phương pháp nào trong Bảng 3.</a:t>
+            </a:r>
+          </a:p>
+          <a:p/>
+          <a:p>
+            <a:r>
+              <a:t>Hệ quả: hàng Synthetic của bài báo (93,6–96,0) chỉ đạt được ở d lớn, KHÔNG đạt được ở d = 2 như chính Hình 4 của bài báo vẽ. Ai trích dẫn cột đó nên biết nó phụ thuộc vào một tham số tự do không được công bố.</a:t>
+            </a:r>
+          </a:p>
+          <a:p/>
+          <a:p>
+            <a:r>
+              <a:t>Giải thích nguyên nhân nếu có thời gian: phép quay ở đây là quay Givens trong một mặt phẳng tọa độ, nên chỉ làm nhiễu 2 trong d thành phần — d càng lớn thì càng nhiều phần của θ sống sót sau mỗi bước. Cũng có thể bài báo hiểu 'ma trận quay góc 0,01' theo nghĩa khác (quay ngẫu nhiên toàn phần), khi đó phụ thuộc vào d sẽ biến mất. Văn bản không cho phép kết luận, nên nêu là điểm chưa giải quyết chứ đừng khẳng định.</a:t>
+            </a:r>
+          </a:p>
+          <a:p/>
+          <a:p>
+            <a:r>
+              <a:t>Quan sát kèm theo, khá bất ngờ: trên luồng Synthetic, SGD thuần đạt 92,2 còn PBF-SGD chỉ 88,5 — khai triển cơ sở làm TỆ ĐI. Lý do: khái niệm ở đó là siêu phẳng θᵀx = 0, tuyến tính theo định nghĩa, nên cơ sở đa thức bậc 3 thêm 1.770 tham số chỉ đóng góp phương sai mà không thêm năng lực biểu diễn. Khai triển cơ sở là một canh bạc đặt vào tính phi tuyến, và đây đúng là ô mà canh bạc đó chắc chắn thua.</a:t>
             </a:r>
           </a:p>
         </p:txBody>
@@ -1955,7 +2189,7 @@
           <a:lstStyle/>
           <a:p>
             <a:r>
-              <a:t>Chuyển sang các công trình sau 2018 — đặc biệt là công trình đã hiện thực hóa đúng điều Read đề xuất.</a:t>
+              <a:t>CHUYỂN MỤC. 'Bài báo 2018 đề xuất dự báo θ nhưng không xây dựng. Phần này xem điều gì đã xảy ra sau đó.'</a:t>
             </a:r>
           </a:p>
         </p:txBody>
@@ -2025,7 +2259,31 @@
           <a:lstStyle/>
           <a:p>
             <a:r>
-              <a:t>Bốn hướng tiếp cận chính hiện nay. Chỉ hướng cuối cùng thực sự làm điều Read lập luận: Proceed ước lượng độ trôi giữa dữ liệu huấn luyện gần nhất và mẫu kiểm tra hiện tại, rồi ánh xạ ước lượng đó thành điều chỉnh tham số qua một bộ sinh được học. Read lập luận nhưng không xây dựng; bảy năm sau Proceed xây dựng đúng ánh xạ đó.</a:t>
+              <a:t>BỐN HƯỚNG TIẾP CẬN (~2 phút). Đọc bảng nhanh, dừng lại ở hàng cuối.</a:t>
+            </a:r>
+          </a:p>
+          <a:p/>
+          <a:p>
+            <a:r>
+              <a:t>Ba hướng đầu đều mang tính phản ứng: chuẩn hóa xử lý phân phối biên; fast/slow cân bằng giữa thích nghi nhanh và nhớ lại mẫu cũ; bể khái niệm giả định khái niệm sẽ quay lại nên lưu sẵn mô hình cho từng khái niệm.</a:t>
+            </a:r>
+          </a:p>
+          <a:p/>
+          <a:p>
+            <a:r>
+              <a:t>Chỉ Proceed (KDD'25) làm đúng điều Read lập luận. Cơ chế: ước lượng độ trôi giữa dữ liệu huấn luyện gần nhất và mẫu kiểm tra hiện tại, rồi dùng một bộ sinh ĐƯỢC HỌC để chuyển ước lượng đó thành điều chỉnh tham số — tức là một ánh xạ từ dịch chuyển trong không gian khái niệm sang dịch chuyển trong không gian tham số. Bộ sinh được huấn luyện trước trên các kiểu trôi tổng hợp đa dạng.</a:t>
+            </a:r>
+          </a:p>
+          <a:p/>
+          <a:p>
+            <a:r>
+              <a:t>Câu chốt nên nói rõ ràng: Read lập luận rằng giải bài toán trôi đồng nghĩa với dự báo θ, nhưng không xây dựng. Bảy năm sau Proceed xây dựng đúng ánh xạ đó, theo đúng hướng ông đề xuất. Đây là lý do bài báo 2018 vẫn đáng đọc.</a:t>
+            </a:r>
+          </a:p>
+          <a:p/>
+          <a:p>
+            <a:r>
+              <a:t>Phân biệt với động lượng (momentum): động lượng ngoại suy tuyến tính trên gradient; Proceed học hẳn một ánh xạ. Đây cũng là nền cho thí nghiệm A ở slide 26.</a:t>
             </a:r>
           </a:p>
         </p:txBody>
@@ -2095,7 +2353,31 @@
           <a:lstStyle/>
           <a:p>
             <a:r>
-              <a:t>Với mô hình nền tảng, trôi khái niệm không biến mất mà chuyển vị trí. Nếu mô hình được phục vụ qua API thì không thể sửa trọng số, nên phải thích nghi bằng cách học cấu trúc sai số trong ngữ cảnh. Cả hai hướng vẫn là thích nghi liên tục theo nghĩa ở phần 2 — chỉ khác là tham số nằm ở chỗ khác.</a:t>
+              <a:t>MÔ HÌNH NỀN TẢNG (~2 phút). Ý chính: trôi khái niệm không biến mất, chỉ đổi vị trí.</a:t>
+            </a:r>
+          </a:p>
+          <a:p/>
+          <a:p>
+            <a:r>
+              <a:t>Các mô hình nền tảng cho chuỗi thời gian (Chronos, Moirai và các mô hình kế tiếp) được huấn luyện trước trên kho dữ liệu lớn và dùng ở chế độ zero-shot. Dữ liệu luồng vẫn trôi như thường.</a:t>
+            </a:r>
+          </a:p>
+          <a:p/>
+          <a:p>
+            <a:r>
+              <a:t>Hướng 1 — thích nghi hộp đen: nếu mô hình được phục vụ qua API thương mại thì không thể sửa trọng số. Công trình gần đây thích nghi bằng cách học CẤU TRÚC SAI SỐ của mô hình theo ngữ cảnh, rồi hiệu chỉnh đầu ra.</a:t>
+            </a:r>
+          </a:p>
+          <a:p/>
+          <a:p>
+            <a:r>
+              <a:t>Hướng 2 — tiên nghiệm kháng trôi: đưa giả định 'mô hình thay đổi theo thời gian' vào ngay trong tiên nghiệm học trong ngữ cảnh, để mô hình học cách ước lượng, thích nghi và ngoại suy sự thay đổi (Drift-Resilient TabPFN, NeurIPS'24).</a:t>
+            </a:r>
+          </a:p>
+          <a:p/>
+          <a:p>
+            <a:r>
+              <a:t>Liên hệ ngược về phần 2: cả hai vẫn là thích nghi liên tục theo đúng nghĩa đã định nghĩa — tham số chỉ nằm ở chỗ khác, trong ngữ cảnh hoặc trong bộ hiệu chỉnh phần dư, chứ không nằm trong trọng số.</a:t>
             </a:r>
           </a:p>
         </p:txBody>
@@ -2165,7 +2447,7 @@
           <a:lstStyle/>
           <a:p>
             <a:r>
-              <a:t>Chuyển sang phần cuối: những gì còn bỏ ngỏ và những thí nghiệm có thể làm ngay.</a:t>
+              <a:t>CHUYỂN MỤC. 'Phần cuối: những gì chưa ai giải quyết, và những thí nghiệm có thể làm ngay trên bộ công cụ hiện có.'</a:t>
             </a:r>
           </a:p>
         </p:txBody>
@@ -2235,7 +2517,25 @@
           <a:lstStyle/>
           <a:p>
             <a:r>
-              <a:t>Vấn đề mở quan trọng nhất là vấn đề thứ nhất: chưa có tiêu chí nào phân biệt trôi thật với ngữ cảnh bị bỏ sót. Hai cách giải thích đòi hỏi hai cách xử lý ngược nhau, mà không có công trình nào chỉ ra đang ở trường hợp nào.</a:t>
+              <a:t>VẤN ĐỀ MỞ (~2 phút). Ba vấn đề, vấn đề đầu là quan trọng nhất.</a:t>
+            </a:r>
+          </a:p>
+          <a:p/>
+          <a:p>
+            <a:r>
+              <a:t>(1) Chưa có tiêu chí phân biệt trôi thật với ngữ cảnh bị bỏ sót. CDS cho rằng p(y|x) chỉ CÓ VẺ thay đổi vì thiếu biến c; Read cho rằng θ thật sự di chuyển trong Θ. Nếu c quan sát được và có chu kỳ thì bám theo là lãng phí; nếu c tiềm ẩn và không lặp thì điều kiện hóa là bất khả. Không công trình nào chỉ ra đang ở trường hợp nào — mà đây lại là câu hỏi phải trả lời TRƯỚC khi chọn phương pháp.</a:t>
+            </a:r>
+          </a:p>
+          <a:p/>
+          <a:p>
+            <a:r>
+              <a:t>(2) Trôi lặp lại và trôi kéo dài chia đôi không gian phương pháp: bể khái niệm giả định khái niệm quay lại, bộ bám theo giả định dịch chuyển trơn. Ranh giới giữa hai giả định này chưa được đặc tả.</a:t>
+            </a:r>
+          </a:p>
+          <a:p/>
+          <a:p>
+            <a:r>
+              <a:t>(3) Đánh giá vẫn tổng hợp và giả định nhãn tức thì, trong khi các ứng dụng làm nên động lực của lĩnh vực đều không như vậy. Nhắc lại slide 10 nếu cần.</a:t>
             </a:r>
           </a:p>
         </p:txBody>
@@ -2305,7 +2605,43 @@
           <a:lstStyle/>
           <a:p>
             <a:r>
-              <a:t>Bốn thí nghiệm, mỗi thí nghiệm nêu kèm một dự đoán có thể bị bác bỏ — đó là điều phân biệt đề xuất với mong muốn. Nếu trình bày thiếu thời gian, hãy ưu tiên thí nghiệm B: nó trả lời trực tiếp vấn đề mở thứ nhất, và dữ liệu Electricity đã sẵn có ngữ cảnh chu kỳ quan sát được.</a:t>
+              <a:t>THÍ NGHIỆM ĐỀ XUẤT (~3 phút). Mỗi thí nghiệm kèm một dự đoán CÓ THỂ SAI — đó là điều phân biệt đề xuất nghiên cứu với mong muốn.</a:t>
+            </a:r>
+          </a:p>
+          <a:p/>
+          <a:p>
+            <a:r>
+              <a:t>Thứ tự trình bày nên là D → A → C → B: rẻ nhất và chắc chắn nhất trước, tham vọng nhất sau cùng, vì người nghe thường đánh giá thấp một danh sách mở đầu bằng thí nghiệm khó nhất.</a:t>
+            </a:r>
+          </a:p>
+          <a:p/>
+          <a:p>
+            <a:r>
+              <a:t>D (rẻ nhất): quét lưới tốc độ trôi × λ, tìm λ tối ưu cho mỗi tốc độ, khớp số mũ trên đồ thị log-log. Nếu ra gần 0,5 thì biến cảnh báo ở mục 5 thành quy tắc chỉnh tham số.</a:t>
+            </a:r>
+          </a:p>
+          <a:p/>
+          <a:p>
+            <a:r>
+              <a:t>A: giải thích vì sao động lượng không giúp gì. Quỹ đạo thật là phép QUAY, tức đường cong, còn động lượng ngoại suy TUYẾN TÍNH — nên về dài hạn triệt tiêu. Thay bằng bộ ngoại suy khớp đúng dạng hàm (ước lượng ma trận quay từ lịch sử θ̂). Dự đoán có thể sai: nó phải thu hẹp khoảng cách bám ở trôi tăng dần VÀ không có tác dụng ở trôi đột ngột — nếu giúp ở mọi nơi thì chỉ là tăng hệ số khuếch đại, tức không chứng minh được gì.</a:t>
+            </a:r>
+          </a:p>
+          <a:p/>
+          <a:p>
+            <a:r>
+              <a:t>C: quét chu kỳ lặp, so bộ bám theo với bể khái niệm, tìm điểm giao p*. Đây là ranh giới trung thực cho chính luận điểm của mình, nên trình bày nó làm tăng độ tin cậy.</a:t>
+            </a:r>
+          </a:p>
+          <a:p/>
+          <a:p>
+            <a:r>
+              <a:t>B (để cuối, là thí nghiệm muốn người nghe nhớ): trả lời trực tiếp vấn đề mở thứ nhất. Thêm một kiểu trôi mới trong đó θ phụ thuộc một ngữ cảnh có chu kỳ QUAN SÁT ĐƯỢC, rồi so hai chẩn đoán: tự tương quan của phần dư (chẩn đoán kiểu Read) và thông tin tương hỗ giữa phần dư với ngữ cảnh (chẩn đoán kiểu CDS). Dự đoán: tự tương quan phát hiện CẢ HAI nên không phân biệt được, còn thông tin tương hỗ chỉ phát hiện trường hợp thứ hai. Nếu đúng, ta có một quy tắc quyết định chưa ai công bố.</a:t>
+            </a:r>
+          </a:p>
+          <a:p/>
+          <a:p>
+            <a:r>
+              <a:t>Lý do B khả thi ngay: Electricity đã có sẵn ngữ cảnh chu kỳ quan sát được (48 khung nửa giờ trong ngày, và thứ trong tuần), còn luồng tổng hợp thì cho biết θ thật — nên dựng và tách được cả hai trường hợp trên cùng một bộ công cụ.</a:t>
             </a:r>
           </a:p>
         </p:txBody>
@@ -2375,7 +2711,34 @@
           <a:lstStyle/>
           <a:p>
             <a:r>
-              <a:t>Tóm tắt sáu ý. Nếu còn thời gian, nên kết thúc bằng câu hỏi mở ở slide trước thay vì bằng slide tóm tắt — kết ở một câu hỏi mình có điều kiện trả lời sẽ mở ra trao đổi.</a:t>
+              <a:t>TÓM TẮT (~1 phút). Sáu ý, đọc nhanh, không giải thích lại.</a:t>
+            </a:r>
+          </a:p>
+          <a:p/>
+          <a:p>
+            <a:r>
+              <a:t>Nếu còn thời gian, nên kết thúc bằng câu hỏi mở ở slide 26 thay vì bằng slide tóm tắt: kết ở một câu hỏi mà mình có điều kiện trả lời sẽ mở ra trao đổi, và đó cũng là cách xin được buổi làm việc tiếp theo.</a:t>
+            </a:r>
+          </a:p>
+          <a:p/>
+          <a:p>
+            <a:r>
+              <a:t>Câu hỏi có thể gặp và hướng trả lời:</a:t>
+            </a:r>
+          </a:p>
+          <a:p>
+            <a:r>
+              <a:t>• 'Sao không dùng scikit-multiflow cho nhanh?' — vì mục tiêu là truy được mọi con số về mã nguồn đọc được, và vì bản cài đặt lại đã phát hiện ra chính những chỗ bài báo không ghi rõ.</a:t>
+            </a:r>
+          </a:p>
+          <a:p>
+            <a:r>
+              <a:t>• 'Kết quả không khớp thì có phải bản cài đặt sai?' — hai trong ba phương pháp khớp trong 2 điểm, ADWIN được kiểm chứng độc lập, và các sai lệch đều truy được nguyên nhân cụ thể (bậc đa thức, cách nén bộ nhớ dài hạn).</a:t>
+            </a:r>
+          </a:p>
+          <a:p>
+            <a:r>
+              <a:t>• 'Bài báo 2018 còn giá trị không?' — luận điểm cấu trúc (cây không có Δθ) vẫn đúng và không cần thực nghiệm; còn đề xuất dự báo θ thì đã được Proceed hiện thực hóa năm 2025.</a:t>
             </a:r>
           </a:p>
         </p:txBody>
@@ -2445,7 +2808,7 @@
           <a:lstStyle/>
           <a:p>
             <a:r>
-              <a:t>Chuyển sang phần định nghĩa bài toán. Ý chính: phân phối mục tiêu không cố định mà thay đổi theo thời gian.</a:t>
+              <a:t>CHUYỂN MỤC. Một câu: 'Trước hết cần định nghĩa chính xác bài toán, vì thuật ngữ trong lĩnh vực này được dùng khá lỏng lẻo.'</a:t>
             </a:r>
           </a:p>
         </p:txBody>
@@ -2515,7 +2878,25 @@
           <a:lstStyle/>
           <a:p>
             <a:r>
-              <a:t>Học máy truyền thống giả định phân phối đồng thời p(x, y) cố định — mô hình khớp với mẫu huấn luyện thì cũng khớp với dữ liệu triển khai. Luồng dữ liệu phá vỡ giả định đó. Nhấn mạnh: mô hình không chỉ 'cũ' mà là 'sai đặc tả', vì nó ước lượng một mục tiêu không còn tồn tại. Hai hệ quả quan trọng: suy giảm diễn ra âm thầm (không có lỗi nào được báo), và không thể huấn luyện lại từ đầu vì luồng là vô hạn và nhãn đến muộn.</a:t>
+              <a:t>BÀI TOÁN (~2 phút). Bắt đầu từ giả định của học máy truyền thống: phân phối đồng thời p(x, y) cố định, nên mô hình khớp với mẫu huấn luyện thì cũng khớp với dữ liệu triển khai. Luồng dữ liệu phá vỡ đúng giả định này.</a:t>
+            </a:r>
+          </a:p>
+          <a:p/>
+          <a:p>
+            <a:r>
+              <a:t>Nhấn mạnh cách diễn đạt: mô hình không 'cũ' mà 'sai đặc tả' (misspecified) — nó ước lượng một mục tiêu không còn tồn tại. Đây không phải vấn đề thiếu dữ liệu.</a:t>
+            </a:r>
+          </a:p>
+          <a:p/>
+          <a:p>
+            <a:r>
+              <a:t>Ví dụ thực tế nên nêu 1–2 cái: nhu cầu điện (thói quen tiêu dùng, thời tiết), phát hiện gian lận (đối thủ thay đổi chiến thuật), phát hiện xâm nhập mạng.</a:t>
+            </a:r>
+          </a:p>
+          <a:p/>
+          <a:p>
+            <a:r>
+              <a:t>Hai hệ quả là phần quan trọng nhất slide này: (1) suy giảm âm thầm — không có exception nào được ném ra, chỉ có độ chính xác tụt dần, nên nếu không đo thì không biết; (2) không thể huấn luyện lại từ đầu — luồng vô hạn, và nhãn thường đến muộn (sẽ quay lại ý này ở slide 10).</a:t>
             </a:r>
           </a:p>
         </p:txBody>
@@ -2585,7 +2966,25 @@
           <a:lstStyle/>
           <a:p>
             <a:r>
-              <a:t>Bốn dạng trôi theo phân loại kinh điển. Cột thứ ba là cột quan trọng nhất cho việc thiết kế phương pháp: chỉ trôi tăng dần (incremental) mới tạo ra các trạng thái trung gian là khái niệm thật, tức là có một quỹ đạo để bám theo. Trôi dần dần (gradual) chỉ là sự pha trộn giữa hai khái niệm cố định.</a:t>
+              <a:t>PHÂN LOẠI (~2 phút). Bốn dạng theo Gama et al. (2014), Read dùng lại ở mục 3.</a:t>
+            </a:r>
+          </a:p>
+          <a:p/>
+          <a:p>
+            <a:r>
+              <a:t>Ví dụ nhanh cho từng dạng: đột ngột — cảm biến được hiệu chuẩn lại; tăng dần — máy móc mòn đi theo thời gian; dần dần — thói quen người dùng chuyển từ A sang B; lặp lại — nhu cầu điện ngày thường so với cuối tuần.</a:t>
+            </a:r>
+          </a:p>
+          <a:p/>
+          <a:p>
+            <a:r>
+              <a:t>Cột thứ ba mới là cột đáng nói. Với trôi tăng dần, các trạng thái trung gian là khái niệm THẬT, tức tồn tại một quỹ đạo liên tục để bám theo. Với trôi dần dần thì không: chỉ có hai khái niệm cố định và một trọng số pha trộn α thay đổi — nên không có quỹ đạo nào để dự báo. Ý này sẽ được dùng lại ở slide 14, nên cần nói kỹ ở đây.</a:t>
+            </a:r>
+          </a:p>
+          <a:p/>
+          <a:p>
+            <a:r>
+              <a:t>Trôi lặp lại là một trục riêng, không loại trừ ba dạng kia: bất kỳ dạng nào cũng có thể lặp.</a:t>
             </a:r>
           </a:p>
         </p:txBody>
@@ -2655,7 +3054,25 @@
           <a:lstStyle/>
           <a:p>
             <a:r>
-              <a:t>Phân tích phân phối đồng thời thành hai thừa số cho thấy có đúng hai chỗ có thể thay đổi. Chỉ thay đổi ở phân phối có điều kiện mới làm dịch chuyển biên quyết định, nên chỉ nó mới nhất thiết làm giảm độ chính xác. Điểm đáng lưu ý: phần lớn công trình gần đây về dự báo chuỗi thời gian lại xử lý thừa số thứ nhất.</a:t>
+              <a:t>HAI VỊ TRÍ THAY ĐỔI (~2 phút). Viết phân tích p(x, y) = p(x)·p(y|x) lên bảng nếu có, vì cả slide này xoay quanh nó: phân phối đồng thời chỉ có đúng hai thừa số, nên chỉ có đúng hai chỗ để thay đổi.</a:t>
+            </a:r>
+          </a:p>
+          <a:p/>
+          <a:p>
+            <a:r>
+              <a:t>Trôi ảo (virtual drift): p(x) đổi nhưng biên quyết định đứng yên — mô hình vẫn đúng, chỉ là dữ liệu đến từ vùng khác. Trôi khái niệm thật: p(y|x) đổi, biên quyết định dịch chuyển, độ chính xác nhất thiết giảm.</a:t>
+            </a:r>
+          </a:p>
+          <a:p/>
+          <a:p>
+            <a:r>
+              <a:t>Điểm gây ngạc nhiên nên nhấn: phần lớn công trình dự báo chuỗi thời gian 2022–2024 (RevIN, Dish-TS, SAN) xử lý thừa số THỨ NHẤT. Chúng chuẩn hóa phân phối biên rồi khôi phục lại, hoàn toàn không đụng tới p(y|x).</a:t>
+            </a:r>
+          </a:p>
+          <a:p/>
+          <a:p>
+            <a:r>
+              <a:t>Hệ quả thực tiễn: một bộ phát hiện không dùng nhãn chỉ quan sát được p(x), nên về nguyên tắc không thể phân biệt hai trường hợp này. Đây là lý do vấn đề nhãn muộn ở slide 10 nghiêm trọng đến vậy.</a:t>
             </a:r>
           </a:p>
         </p:txBody>
@@ -2725,7 +3142,25 @@
           <a:lstStyle/>
           <a:p>
             <a:r>
-              <a:t>Thuật ngữ 'context drift' được dùng cho ba hiện tượng khác nhau. Nghĩa thứ nhất và thứ hai biểu hiện giống hệt nhau — sai số tăng theo thời gian — nhưng đòi hỏi cách xử lý ngược nhau. Nếu một ngữ cảnh có chu kỳ giải thích được sự thay đổi thì việc thích nghi là lãng phí, vì chu kỳ sau sẽ đảo ngược nó.</a:t>
+              <a:t>BA NGHĨA CỦA 'CONTEXT DRIFT' (~2 phút). Slide này để gỡ rối thuật ngữ trước khi đọc tài liệu, vì ba nghĩa bị dùng lẫn lộn.</a:t>
+            </a:r>
+          </a:p>
+          <a:p/>
+          <a:p>
+            <a:r>
+              <a:t>Nghĩa 1 là trôi khái niệm đúng nghĩa. Nghĩa 2 (CDS) nói rằng p(y|x) chỉ CÓ VẺ thay đổi, thực ra p(y|x, c) vẫn cố định — chỉ là biến ngữ cảnh c không được đưa vào mô hình. Nghĩa 3 thuộc về mô hình nền tảng, sẽ nói ở slide 23.</a:t>
+            </a:r>
+          </a:p>
+          <a:p/>
+          <a:p>
+            <a:r>
+              <a:t>Đây là điểm quan trọng nhất: nghĩa 1 và 2 cho CÙNG một triệu chứng — sai số tăng theo thời gian — nhưng đòi hỏi xử lý NGƯỢC nhau. Nếu c là chu kỳ quan sát được (ví dụ giờ trong ngày), thì thích nghi là lãng phí: chu kỳ sau sẽ đảo ngược mọi điều chỉnh vừa làm. Cách đúng là điều kiện hóa theo c, không phải bám theo.</a:t>
+            </a:r>
+          </a:p>
+          <a:p/>
+          <a:p>
+            <a:r>
+              <a:t>SOLID (KDD'24) đo trực tiếp bằng thông tin tương hỗ giữa phần dư dự báo và ngữ cảnh ứng viên. Công thức này sẽ quay lại ở thí nghiệm B, slide 26.</a:t>
             </a:r>
           </a:p>
         </p:txBody>
@@ -2795,7 +3230,7 @@
           <a:lstStyle/>
           <a:p>
             <a:r>
-              <a:t>Chuyển sang phần phương pháp: phát hiện trôi, và thích nghi sau khi trôi đã xảy ra.</a:t>
+              <a:t>CHUYỂN MỤC. 'Đã có bài toán, giờ xem cộng đồng xử lý thế nào — gồm hai câu hỏi tách biệt: làm sao biết trôi đã xảy ra, và làm gì sau khi biết.'</a:t>
             </a:r>
           </a:p>
         </p:txBody>
@@ -2865,7 +3300,25 @@
           <a:lstStyle/>
           <a:p>
             <a:r>
-              <a:t>Các bộ phát hiện không quan sát dữ liệu mà quan sát chuỗi sai số. ADWIN là lựa chọn mặc định trên thực tế vì có cận sai dương rõ ràng và bộ nhớ chỉ O(log W). Điểm cần nhấn: một bộ phát hiện trôi thực chất đang hỏi 'chuỗi thời gian này có thay đổi không', nên bản thân nó đã là một phương pháp chuỗi thời gian.</a:t>
+              <a:t>PHÁT HIỆN TRÔI (~2 phút). Nhấn ngay: các bộ phát hiện KHÔNG quan sát dữ liệu mà quan sát chuỗi sai số của mô hình.</a:t>
+            </a:r>
+          </a:p>
+          <a:p/>
+          <a:p>
+            <a:r>
+              <a:t>DDM và EDDM dùng ngưỡng mang tính kinh nghiệm. ADWIN là lựa chọn mặc định trên thực tế vì có bảo đảm lý thuyết: giữ một cửa sổ W, xét mọi cách cắt W thành W0·W1, và cắt khi hai nửa khác nhau quá ngưỡng; xác suất báo động giả bị chặn bởi δ.</a:t>
+            </a:r>
+          </a:p>
+          <a:p/>
+          <a:p>
+            <a:r>
+              <a:t>Chi tiết đáng nói nếu có thời gian: ADWIN lưu cửa sổ dưới dạng exponential histogram nên bộ nhớ chỉ O(log W) thay vì O(W); và độ dài cửa sổ còn lại chính là ước lượng 'khái niệm hiện tại kéo dài bao xa về quá khứ'.</a:t>
+            </a:r>
+          </a:p>
+          <a:p/>
+          <a:p>
+            <a:r>
+              <a:t>Câu chốt của slide, cũng là cầu nối sang phần 3: một bộ phát hiện đang hỏi 'chuỗi E_t này có thay đổi không' — tức bản thân nó đã là một phương pháp chuỗi thời gian, chỉ là không tự nhận.</a:t>
             </a:r>
           </a:p>
         </p:txBody>

--- a/data-drift/seminar.pptx
+++ b/data-drift/seminar.pptx
@@ -1045,19 +1045,19 @@
           <a:lstStyle/>
           <a:p>
             <a:r>
-              <a:t>MỞ ĐẦU (~1 phút). Bài gồm ba khối: (a) trôi khái niệm là gì và cộng đồng xử lý ra sao — đây là phần khảo sát, chiếm nhiều nhất; (b) một lập luận cụ thể của Read (2018) và kết quả tái lập của mình; (c) các vấn đề còn mở.</a:t>
+              <a:t>Xin chào mọi người. Hôm nay tôi trình bày về trôi khái niệm trong luồng dữ liệu.</a:t>
             </a:r>
           </a:p>
           <a:p/>
           <a:p>
             <a:r>
-              <a:t>Nói rõ ngay từ đầu rằng phần tái lập chỉ là một trong sáu mục, để người nghe không chờ đợi một bài báo cáo thực nghiệm thuần túy.</a:t>
+              <a:t>Bài gồm ba khối. Khối thứ nhất là bài toán: trôi khái niệm là gì, và cộng đồng nghiên cứu đã xử lý nó bằng những cách nào. Khối thứ hai là một lập luận cụ thể của Jesse Read năm 2018, cho rằng cách xử lý phổ biến hiện nay là sai hướng, cùng với kết quả tôi tái lập lại bài báo đó. Khối thứ ba là những gì đã xảy ra sau năm 2018 và những câu hỏi còn bỏ ngỏ.</a:t>
             </a:r>
           </a:p>
           <a:p/>
           <a:p>
             <a:r>
-              <a:t>Phân bổ thời gian gợi ý: phần 1–2 khoảng 12 phút, phần 3 khoảng 6 phút, phần 4 khoảng 10 phút, phần 5–6 khoảng 7 phút.</a:t>
+              <a:t>Phần tái lập chỉ là một trong sáu mục, nên đây không phải một báo cáo thực nghiệm thuần túy mà là một bài khảo sát có kèm phần kiểm chứng.</a:t>
             </a:r>
           </a:p>
         </p:txBody>
@@ -1127,31 +1127,31 @@
           <a:lstStyle/>
           <a:p>
             <a:r>
-              <a:t>HẠN CHẾ ĐÁNH GIÁ (~2 phút). Ba hạn chế, nói theo thứ tự tăng dần mức nghiêm trọng.</a:t>
+              <a:t>Quy trình đánh giá hiện nay có ba hạn chế.</a:t>
             </a:r>
           </a:p>
           <a:p/>
           <a:p>
             <a:r>
-              <a:t>(1) Dữ liệu tổng hợp chiếm đa số: các luồng chuyển giữa những khái niệm định sẵn tại những thời điểm cố định, phân phối đơn giản, động lực trôi không thực tế. Chưa có bằng chứng kết quả chuyển được sang dữ liệu thật.</a:t>
+              <a:t>Thứ nhất, dữ liệu tổng hợp chiếm đa số. Các luồng chuẩn thường chuyển giữa những khái niệm định sẵn tại những thời điểm cố định, với phân phối đơn giản và động lực trôi không thực tế. Chưa có bằng chứng cho thấy kết luận rút ra từ đó chuyển được sang dữ liệu thật.</a:t>
             </a:r>
           </a:p>
           <a:p/>
           <a:p>
             <a:r>
-              <a:t>(2) Đánh giá gián tiếp: lấy 'huấn luyện lại có cải thiện không' làm thước đo sẽ trộn lẫn chất lượng bộ phát hiện với khả năng thích nghi của mô hình, và không cho biết độ chính xác lẫn độ trễ phát hiện.</a:t>
+              <a:t>Thứ hai, nhiều nghiên cứu đánh giá gián tiếp, tức lấy tiêu chí huấn luyện lại có cải thiện hay không. Cách này trộn lẫn chất lượng của bộ phát hiện với khả năng thích nghi của mô hình, và không cho biết bộ phát hiện chính xác đến đâu hay phát hiện nhanh đến đâu.</a:t>
             </a:r>
           </a:p>
           <a:p/>
           <a:p>
             <a:r>
-              <a:t>(3) Nghiêm trọng nhất — độ trễ nhãn. DDM, EDDM, ADWIN đều giả định nhãn có ngay. Trong phát hiện gian lận, nhãn thật đến sau 30–180 ngày, nên các phương pháp này không dùng được ở dạng gốc.</a:t>
+              <a:t>Thứ ba, và nghiêm trọng nhất, là độ trễ nhãn. DDM, EDDM và ADWIN đều giả định nhãn có gần như ngay lập tức. Nhưng trong phát hiện gian lận, nhãn thật chỉ đến sau ba mươi đến một trăm tám mươi ngày. Ở dạng gốc, các phương pháp này không dùng được.</a:t>
             </a:r>
           </a:p>
           <a:p/>
           <a:p>
             <a:r>
-              <a:t>Ý cần chốt, và nên nói rõ vì nó cắt cả hai phía: nếu tín hiệu sai số không quan sát được trong nhiều tháng thì KHÔNG chỉ bộ phát hiện gặp khó — mọi phương pháp dựa vào sai số, kể cả phương pháp bám theo ở phần 3, đều gặp khó như nhau.</a:t>
+              <a:t>Điều này cắt về cả hai phía. Nếu tín hiệu sai số không quan sát được trong nhiều tháng, thì không chỉ bộ phát hiện gặp khó — mọi phương pháp dựa vào sai số, kể cả phương pháp bám theo mà tôi sẽ trình bày ở phần sau, đều gặp khó y như vậy.</a:t>
             </a:r>
           </a:p>
         </p:txBody>
@@ -1221,25 +1221,31 @@
           <a:lstStyle/>
           <a:p>
             <a:r>
-              <a:t>BA CƠ CHẾ THÍCH NGHI (~3 phút). Đây là slide quan trọng nhất của phần khảo sát; nên dành thời gian.</a:t>
+              <a:t>Sau khi phát hiện được trôi thì làm gì. Có ba cơ chế, và điều đáng nói là cơ chế nào khả dụng không phải do người thiết kế chọn, mà do mô hình được cấu tạo từ cái gì.</a:t>
             </a:r>
           </a:p>
           <a:p/>
           <a:p>
             <a:r>
-              <a:t>Luận điểm: cơ chế thích nghi nào KHẢ DỤNG là do mô hình được cấu tạo từ cái gì, chứ không phải do người thiết kế chọn.</a:t>
+              <a:t>Với k láng giềng gần nhất, mô hình chính là dữ liệu được lưu. Thích nghi nghĩa là thay dữ liệu cũ bằng dữ liệu mới. Đó là một thao tác thay thế, không có mức độ: ta không thể thay một chút.</a:t>
             </a:r>
           </a:p>
           <a:p/>
           <a:p>
             <a:r>
-              <a:t>kNN: mô hình CHÍNH LÀ dữ liệu lưu trữ, nên 'thích nghi' nghĩa là thay dữ liệu — một thao tác thay thế, không có mức độ. Cây Hoeffding: tham số là một cấu trúc rời rạc (nút và ngưỡng), nên không tồn tại phép dịch chuyển nhỏ; chỉ có thể mọc thêm hoặc phá đi rồi dựng lại. SGD: tham số là một vector trong không gian liên tục, nên cộng thêm một lượng nhỏ là thao tác hợp lệ.</a:t>
+              <a:t>Với cây Hoeffding, tham số là một cấu trúc rời rạc gồm các nút và các ngưỡng. Không tồn tại phép dịch chuyển nhỏ trên một cấu trúc như vậy. Cây chỉ có thể mọc thêm, hoặc bị phá đi rồi dựng lại từ đầu.</a:t>
             </a:r>
           </a:p>
           <a:p/>
           <a:p>
             <a:r>
-              <a:t>Nếu được hỏi 'đây là lập luận hay kết quả', trả lời: là tính chất cấu trúc, không cần thực nghiệm. Trong phần cài đặt của mình, điều này hiện ra thành kiểu trả về: hàm theta_hat() trả về vector cho SGD và PBF-SGD, trả về None cho kNN, SAMkNN, HT và RF-HT. Đó không phải hàm chưa cài đặt — mà là không tồn tại θ để trả về.</a:t>
+              <a:t>Với hạ gradient ngẫu nhiên, tham số là một vector trong không gian liên tục, nên cộng thêm một lượng nhỏ là thao tác hoàn toàn hợp lệ.</a:t>
+            </a:r>
+          </a:p>
+          <a:p/>
+          <a:p>
+            <a:r>
+              <a:t>Nói cách khác, một cái cây không có đại lượng delta theta. Đây là tính chất cấu trúc, không cần thực nghiệm nào để chứng minh. Trong phần cài đặt của tôi, điều này hiện ra thành kiểu trả về của hàm: hàm theta_hat trả về một vector đối với SGD và PBF-SGD, và trả về None đối với kNN, SAMkNN, cây Hoeffding và rừng ngẫu nhiên. Đó không phải hàm chưa được cài đặt, mà là không tồn tại tham số nào để trả về.</a:t>
             </a:r>
           </a:p>
         </p:txBody>
@@ -1309,7 +1315,7 @@
           <a:lstStyle/>
           <a:p>
             <a:r>
-              <a:t>CHUYỂN MỤC. 'Phần vừa rồi cho thấy có ba cơ chế. Bài báo sau đây lập luận rằng cộng đồng đã chọn nhầm cơ chế.'</a:t>
+              <a:t>Phần vừa rồi cho thấy có ba cơ chế thích nghi. Bài báo sau đây lập luận rằng cộng đồng nghiên cứu đã chọn nhầm cơ chế, và lý do nằm ngay trong giả định nền tảng.</a:t>
             </a:r>
           </a:p>
         </p:txBody>
@@ -1379,25 +1385,19 @@
           <a:lstStyle/>
           <a:p>
             <a:r>
-              <a:t>MÂU THUẪN VÀ BỔ ĐỀ 1 (~3 phút). Trình bày theo ba bước.</a:t>
+              <a:t>Lập luận bắt đầu từ một mâu thuẫn. Tài liệu trong lĩnh vực giả định rằng các mẫu là độc lập cùng phân phối ở trong mỗi khái niệm, rồi coi trôi là một sự kiện cần phát hiện để có thể khởi tạo lại một mô hình độc lập cùng phân phối. Nhưng trôi chính là sự thay đổi của khái niệm, nên giả định này tự mâu thuẫn với chính nó.</a:t>
             </a:r>
           </a:p>
           <a:p/>
           <a:p>
             <a:r>
-              <a:t>Bước 1 — mâu thuẫn: cộng đồng giả định dữ liệu độc lập cùng phân phối TRONG mỗi khái niệm, rồi coi trôi là một sự kiện cần phát hiện để khởi tạo lại mô hình i.i.d. Nhưng trôi chính là sự thay đổi khái niệm, nên giả định tự mâu thuẫn.</a:t>
+              <a:t>Bổ đề 1 phát biểu rằng một luồng có trôi khái niệm thì tất yếu có phụ thuộc thời gian. Nếu thật sự độc lập thì xác suất của chỉ số khái niệm tại thời điểm t phải bằng xác suất đó khi đã biết chỉ số tại thời điểm trước. Đếm trực tiếp trên một luồng hai mươi bước với điểm đổi tại bước thứ mười, ta được 0,450 so với 0,000. Xác suất thứ hai bằng đúng không, bởi vì trôi đột ngột là không đảo ngược: một khi đã chuyển sang khái niệm mới thì không quay lại khái niệm cũ nữa.</a:t>
             </a:r>
           </a:p>
           <a:p/>
           <a:p>
             <a:r>
-              <a:t>Bước 2 — số liệu: nếu độc lập thì phải có P(C_t) = P(C_t | C_{t−1}). Đếm trực tiếp trên luồng 20 bước với τ = 10 được 0,450 so với 0,000. Giải thích tại sao xác suất thứ hai bằng đúng 0: trôi đột ngột là không đảo ngược, một khi C đã lật thì không quay lại.</a:t>
-            </a:r>
-          </a:p>
-          <a:p/>
-          <a:p>
-            <a:r>
-              <a:t>Bước 3 — phản biện và trả lời: có người sẽ nói khi t đủ lớn thì chỉ số khái niệm trở thành hằng, nên độc lập được khôi phục trong từng khái niệm. Trả lời: ta KHÔNG quan sát được τ. Nếu biết τ thì cắt luồng tại đó và mỗi nửa là i.i.d., toàn bộ bài báo sụp đổ. Vì không biết, một bước nhảy tức thời biểu hiện thành phụ thuộc thời gian kéo dài trong tín hiệu sai số. Chính sự KHÔNG QUAN SÁT ĐƯỢC của τ mới biến một bước nhảy thành một chuỗi thời gian.</a:t>
+              <a:t>Có một phản biện tự nhiên: khi t đủ lớn thì chỉ số khái niệm trở thành hằng số, nên tính độc lập được khôi phục ở trong từng khái niệm. Câu trả lời nằm ở một điểm duy nhất: ta không quan sát được thời điểm đổi tau. Nếu biết tau thì ta cắt luồng tại đó, mỗi nửa là độc lập cùng phân phối, và toàn bộ bài báo sụp đổ. Vì không biết, một bước nhảy tức thời giữa hai thời điểm lại biểu hiện thành phụ thuộc thời gian kéo dài trong tín hiệu sai số. Chính sự không quan sát được của tau mới biến một bước nhảy thành một chuỗi thời gian.</a:t>
             </a:r>
           </a:p>
         </p:txBody>
@@ -1467,31 +1467,31 @@
           <a:lstStyle/>
           <a:p>
             <a:r>
-              <a:t>QUỸ ĐẠO (~3 phút). Đây là đóng góp chính của bài báo: diễn đạt lại bài toán chứ không đề xuất thuật toán mới.</a:t>
+              <a:t>Từ đó bài báo diễn đạt lại bài toán. Mỗi khái niệm là một điểm theta trong không gian tham số, và trôi trở thành một quỹ đạo đi qua không gian đó.</a:t>
             </a:r>
           </a:p>
           <a:p/>
           <a:p>
             <a:r>
-              <a:t>Mỗi khái niệm là một điểm θ trong không gian tham số Θ; trôi trở thành một quỹ đạo. Đọc bảng theo cột cuối: chỉ trôi tăng dần và trôi lặp lại mới có quỹ đạo để bám. Nhắc lại ý từ slide 5 — với trôi dần dần thì α_t mới là chuỗi thời gian, còn θ chỉ nhảy qua lại giữa hai điểm; bài báo thừa nhận điều này và để lại cho nghiên cứu sau.</a:t>
+              <a:t>Với trôi đột ngột, theta được lấy mẫu lại từ phân phối tiên nghiệm, nên không có quỹ đạo, chỉ có một điểm gián đoạn. Với trôi tăng dần, theta tại thời điểm t bằng ma trận quay nhân với theta tại thời điểm trước, góc quay là 0,01 radian mỗi bước; đây là một quỹ đạo thật sự. Với trôi dần dần, theta chỉ nhảy qua lại giữa hai điểm cố định, cái biến thiên là trọng số pha trộn, nên không có gì để bám theo; bài báo thừa nhận điều này và để lại cho nghiên cứu sau. Với trôi lặp lại, quỹ đạo là một chu trình.</a:t>
             </a:r>
           </a:p>
           <a:p/>
           <a:p>
             <a:r>
-              <a:t>Bước suy luận then chốt: nếu là quỹ đạo thì về nguyên tắc DỰ BÁO ĐƯỢC. Khi đó bài toán trôi khái niệm trở thành bài toán dự báo θ_t — nguyên văn: 'giải bài toán trôi khái niệm đồng nhất với giải bài toán dự báo θ_t'.</a:t>
+              <a:t>Bước suy luận then chốt là: nếu trôi là một quỹ đạo thì về nguyên tắc nó dự báo được. Khi đó, theo nguyên văn bài báo, giải bài toán trôi khái niệm đồng nhất với giải bài toán dự báo theta tại thời điểm t.</a:t>
             </a:r>
           </a:p>
           <a:p/>
           <a:p>
             <a:r>
-              <a:t>Công thức cuối là toàn bộ đơn thuốc: cập nhật theo gradient, không bộ phát hiện, không khởi tạo lại. Kèm đúng một điều kiện — λ không được giảm về 0 — sẽ kiểm chứng ở slide 18.</a:t>
+              <a:t>Và đơn thuốc là công thức ở cuối slide: theta mới bằng theta cũ cộng lambda nhân gradient của sai số. Không cần bộ phát hiện, không cần khởi tạo lại mô hình. Chỉ kèm đúng một điều kiện, là lambda không được giảm dần về không — tôi sẽ kiểm chứng điều kiện này bằng thực nghiệm.</a:t>
             </a:r>
           </a:p>
           <a:p/>
           <a:p>
             <a:r>
-              <a:t>Lưu ý khi bị hỏi: đây vẫn là bám theo có tính phản ứng (reactive), chưa phải dự báo thật sự. Bài báo lập luận cho dự báo nhưng không xây dựng nó; phần 5 sẽ cho thấy ai đã xây dựng.</a:t>
+              <a:t>Cần nói thêm cho công bằng: đây vẫn là bám theo có tính phản ứng, chưa phải dự báo thật sự. Bài báo lập luận cho việc dự báo nhưng không xây dựng nó. Ai đã xây dựng thì tôi sẽ nói ở phần năm.</a:t>
             </a:r>
           </a:p>
         </p:txBody>
@@ -1561,7 +1561,7 @@
           <a:lstStyle/>
           <a:p>
             <a:r>
-              <a:t>CHUYỂN MỤC. 'Lập luận đã rõ. Phần này kiểm chứng nó bằng cách cài đặt lại toàn bộ phương pháp của bài báo và chạy trên chính dữ liệu của bài báo.'</a:t>
+              <a:t>Lập luận đã rõ. Phần này tôi kiểm chứng nó, bằng cách cài đặt lại toàn bộ các phương pháp của bài báo và chạy trên chính dữ liệu mà bài báo dùng.</a:t>
             </a:r>
           </a:p>
         </p:txBody>
@@ -1631,31 +1631,25 @@
           <a:lstStyle/>
           <a:p>
             <a:r>
-              <a:t>THIẾT LẬP THỰC NGHIỆM (~2 phút). Ba điểm cần nhấn.</a:t>
+              <a:t>Dữ liệu tôi lấy từ đúng kho mà bài báo trích dẫn, tức kho MOA của Waikato. Số mẫu khớp chính xác: Electricity có 45.312 mẫu và CoverType có 581.012 mẫu, đúng như bài báo ghi. Đây là kiểm tra đầu tiên cho thấy tôi đang dùng đúng tập dữ liệu.</a:t>
             </a:r>
           </a:p>
           <a:p/>
           <a:p>
             <a:r>
-              <a:t>(1) Dữ liệu lấy từ đúng nguồn bài báo trích dẫn (kho MOA). Số mẫu khớp CHÍNH XÁC: Electricity 45.312 và CoverType 581.012. Đây là kiểm tra đầu tiên cho thấy đang dùng đúng tập dữ liệu.</a:t>
+              <a:t>Cả sáu phương pháp trong Bảng 2 đều được cài đặt lại, chứ không thay thế bằng mô hình tương đương. Cụ thể là cây Hoeffding thật, với phép tách theo cận Hoeffding, bộ ước lượng Gauss cho thuộc tính số và naive Bayes ở lá; ADWIN2 thật với exponential histogram; và rừng ngẫu nhiên thích nghi với một trăm cây, không gian con ngẫu nhiên và lấy mẫu Poisson với lambda bằng sáu. Toàn bộ viết bằng thư viện chuẩn của Python, không dùng scikit-multiflow, không dùng numpy. Nhờ vậy mọi con số đều truy ngược được về một dòng mã đọc được.</a:t>
             </a:r>
           </a:p>
           <a:p/>
           <a:p>
             <a:r>
-              <a:t>(2) Cài đặt lại chứ không thay thế: cây Hoeffding thật (tách theo cận Hoeffding, bộ ước lượng Gauss cho thuộc tính số, naive Bayes ở lá), ADWIN2 thật với exponential histogram, RF-HT với 100 cây, không gian con ngẫu nhiên và lấy mẫu Poisson(6). Toàn bộ bằng thư viện chuẩn Python, không scikit-multiflow, không numpy — nên mọi con số đều truy được về một dòng mã đọc được.</a:t>
+              <a:t>ADWIN2 được kiểm chứng độc lập trước khi đem dùng. Trên một luồng nhảy từ 0,2 lên 0,8 tại bước một nghìn, nó phát hiện sau 55 mẫu. Trên bốn nghìn mẫu ở trạng thái dừng, nó không đưa ra báo động giả nào.</a:t>
             </a:r>
           </a:p>
           <a:p/>
           <a:p>
             <a:r>
-              <a:t>(3) ADWIN2 được kiểm chứng ĐỘC LẬP trước khi dùng: trên luồng nhảy từ 0,2 lên 0,8 tại bước 1.000, nó phát hiện sau 55 mẫu; trên 4.000 mẫu dừng, không có báo động giả nào. Nếu bị hỏi 'làm sao tin bản cài đặt', đây là câu trả lời.</a:t>
-            </a:r>
-          </a:p>
-          <a:p/>
-          <a:p>
-            <a:r>
-              <a:t>Cũng nên nói: độ chính xác chỉ tính từ τ_0 = T/10 trở đi, đúng như Bảng 1 quy định và Bảng 5 xác nhận — nếu tính cả giai đoạn khởi động thì mọi phương pháp đều bị trừ điểm oan.</a:t>
+              <a:t>Độ chính xác chỉ được tính từ mốc tau không, bằng một phần mười độ dài luồng, trở đi — đúng như Bảng 1 quy định và Bảng 5 xác nhận. Nếu tính cả giai đoạn khởi động thì mọi phương pháp đều bị trừ điểm oan vì lúc đó mô hình chưa học được gì.</a:t>
             </a:r>
           </a:p>
         </p:txBody>
@@ -1725,31 +1719,31 @@
           <a:lstStyle/>
           <a:p>
             <a:r>
-              <a:t>KẾT QUẢ (~3 phút). Đọc bảng theo hàng, không đọc hết mọi số.</a:t>
+              <a:t>Đây là bảng kết quả, mỗi ô ghi con số của tôi trước và con số bài báo sau.</a:t>
             </a:r>
           </a:p>
           <a:p/>
           <a:p>
             <a:r>
-              <a:t>Electricity là hàng sạch nhất: SAMkNN 78,0 so với 79,8 (lệch 1,8) và RF-HT 84,5 so với 86,2 (lệch 1,7) với đủ 100 cây. Hai trên ba phương pháp nâng cao tái lập trong vòng 2 điểm — đủ để nói bản cài đặt là đúng.</a:t>
+              <a:t>Electricity là hàng sạch nhất. SAMkNN đạt 78,0 so với 79,8, lệch 1,8 điểm. Rừng ngẫu nhiên đạt 84,5 so với 86,2, lệch 1,7 điểm, với đủ một trăm cây như bài báo. Hai trên ba phương pháp nâng cao tái lập được trong phạm vi hai điểm, đủ để tin rằng bản cài đặt là đúng.</a:t>
             </a:r>
           </a:p>
           <a:p/>
           <a:p>
             <a:r>
-              <a:t>RTG: PBF-SGD đạt 82,8 so với 81,8 của bài báo, tức VƯỢT; và thứ hạng bài báo công bố ở hàng này (PBF-SGD dẫn đầu) cũng được giữ nguyên.</a:t>
+              <a:t>Ở luồng RTG, PBF-SGD của tôi đạt 82,8 trong khi bài báo báo cáo 81,8, tức là vượt. Và thứ hạng mà bài báo công bố ở hàng này, PBF-SGD dẫn đầu, cũng được giữ nguyên.</a:t>
             </a:r>
           </a:p>
           <a:p/>
           <a:p>
             <a:r>
-              <a:t>Hai sai lệch có hệ thống, cả hai đều truy được nguyên nhân. Thứ nhất, PBF-SGD trên Electricity lệch 5,2 điểm — nguyên nhân là bậc đa thức chứ không phải λ, chứng minh ở slide 20. Thứ hai, SAMkNN lệch theo thứ tự tăng dần: 1,8 rồi 7,7 rồi 14,9. Chính THỨ TỰ này là bằng chứng: bản cài đặt của mình nén bộ nhớ dài hạn bằng FIFO thay vì kMeans++ như Losing et al., nên sai lệch phải lớn dần ở những luồng mà bộ nhớ dài hạn gánh nhiều việc hơn — và đúng như vậy. Nói rõ: không nên trích dẫn con số SAMkNN này như con số của SAMkNN gốc.</a:t>
+              <a:t>Có hai sai lệch có hệ thống, cả hai đều truy được nguyên nhân. Thứ nhất, PBF-SGD trên Electricity lệch 5,2 điểm; nguyên nhân là bậc đa thức chứ không phải tốc độ học, tôi sẽ chứng minh ở slide sau. Thứ hai, SAMkNN lệch theo thứ tự tăng dần: 1,8 rồi 7,7 rồi 14,9. Chính thứ tự này là bằng chứng. Bản cài đặt của tôi nén bộ nhớ dài hạn bằng cơ chế FIFO đơn giản, trong khi Losing và cộng sự dùng phân cụm kMeans++. Vì vậy sai lệch phải lớn dần ở những luồng mà bộ nhớ dài hạn gánh nhiều việc hơn, và thực tế đúng như vậy. Do đó không nên trích dẫn con số SAMkNN này như con số của SAMkNN gốc.</a:t>
             </a:r>
           </a:p>
           <a:p/>
           <a:p>
             <a:r>
-              <a:t>CoverType không so sánh được: bài báo phân loại đủ 7 lớp, ở đây rút về nhị phân một-chống-tất-cả trên một tập con. Chỉ để xếp hạng tương đối giữa các phương pháp.</a:t>
+              <a:t>Hàng CoverType không so sánh được, vì bài báo phân loại đủ bảy lớp còn tôi rút về bài toán nhị phân một chống tất cả trên một tập con. Tôi để ở đây chỉ để xếp hạng tương đối giữa các phương pháp.</a:t>
             </a:r>
           </a:p>
         </p:txBody>
@@ -1819,37 +1813,31 @@
           <a:lstStyle/>
           <a:p>
             <a:r>
-              <a:t>ĐIỀU KIỆN VỀ λ (~3 phút). Đây là kết quả đáng nói nhất của phần thực nghiệm, vì nó SỬA trực giác.</a:t>
+              <a:t>Bài báo nêu đúng một điều kiện cho phương pháp của mình: không được để tốc độ học lambda giảm dần về không, với lý do là mô hình sẽ phản ứng ngày càng chậm với trôi. Bài báo không có thực nghiệm nào tách riêng điều kiện này, nên tôi làm thử.</a:t>
             </a:r>
           </a:p>
           <a:p/>
           <a:p>
             <a:r>
-              <a:t>Bài báo chỉ nêu điều kiện 'không để λ giảm về 0' với lý do mô hình sẽ phản ứng ngày càng chậm với trôi, và không có thực nghiệm nào tách riêng điều kiện này.</a:t>
+              <a:t>Kết quả là hình phạt lớn nhất xảy ra sau trôi đột ngột, mất 18,6 điểm độ chính xác, và gần như bằng không dưới trôi kéo dài, chỉ mất 0,8 điểm. Điều này ngược với cách diễn đạt của bài báo, vốn gợi ý rằng trôi liên tục mới là nơi một mô hình đóng băng chịu thiệt nhiều nhất.</a:t>
             </a:r>
           </a:p>
           <a:p/>
           <a:p>
             <a:r>
-              <a:t>Kết quả đo được: hình phạt lớn nhất là sau trôi ĐỘT NGỘT (18,6 điểm) và gần như bằng không dưới trôi KÉO DÀI (0,8 điểm). Ngược hẳn với cách diễn đạt của bài báo, vốn gợi ý rằng trôi liên tục mới là nơi mô hình đóng băng chịu thiệt nhất.</a:t>
+              <a:t>Cơ chế giải thích như sau. Dưới trôi kéo dài, khái niệm quay 0,01 radian mỗi bước, tức là di chuyển nhanh hơn mọi bước cập nhật cố định; ngay cả lambda hằng số cũng chỉ đạt 88,1 điểm. Đã không bám được thì việc giảm lambda cũng chẳng làm mất thêm gì mấy. Ngược lại, sau khi khái niệm bị lấy mẫu lại hoàn toàn, một lambda còn sống thì học lại được khái niệm mới, còn lambda đã đóng băng thì không; nên mất trọn 18,6 điểm.</a:t>
             </a:r>
           </a:p>
           <a:p/>
           <a:p>
             <a:r>
-              <a:t>Giải thích cơ chế — đây là phần quan trọng: dưới trôi kéo dài (xoay 0,01 rad mỗi bước), λ hằng số cũng chỉ đạt 88,1 vì khái niệm di chuyển nhanh hơn mọi bước cố định; đã không bám được thì giảm λ cũng chẳng mất thêm gì. Ngược lại, sau khi khái niệm bị lấy mẫu lại, λ còn sống thì học lại được khái niệm mới, λ đóng băng thì không — nên mất trọn 18,6 điểm.</a:t>
+              <a:t>Có thể hỏi liệu đây có phải do lambda ban đầu bằng 0,01 là quá nhỏ hay không. Tôi đã kiểm tra trên dải năm mươi lần, với lambda ban đầu bằng 0,01, 0,1 và 0,5. Hình phạt ở trôi kéo dài giữ nguyên mức nhỏ, lần lượt 1,0, 1,2 và 1,4 điểm. Vậy đây không phải hiện tượng giả do chọn tham số.</a:t>
             </a:r>
           </a:p>
           <a:p/>
           <a:p>
             <a:r>
-              <a:t>Phòng câu hỏi 'có phải do λ_0 = 0,01 quá nhỏ không': đã kiểm tra trên dải 50 lần, λ_0 ∈ {0,01; 0,1; 0,5}. Hình phạt ở trôi kéo dài giữ nguyên mức nhỏ (1,0 / 1,2 / 1,4) ở mọi λ_0, nên không phải hiện tượng giả do tham số.</a:t>
-            </a:r>
-          </a:p>
-          <a:p/>
-          <a:p>
-            <a:r>
-              <a:t>Kết luận cần chốt: điều kiện này thực chất nói về khả năng PHỤC HỒI sau gián đoạn, chứ không phải về việc bám theo trôi liên tục.</a:t>
+              <a:t>Kết luận là điều kiện này thực chất nói về khả năng phục hồi sau một gián đoạn, chứ không phải về việc bám theo trôi liên tục.</a:t>
             </a:r>
           </a:p>
         </p:txBody>
@@ -1919,31 +1907,31 @@
           <a:lstStyle/>
           <a:p>
             <a:r>
-              <a:t>PHƯƠNG PHÁP BỘ ĐỆM (~2 phút). Chỉ vào hình trước khi nói: đường kNN gần như nằm ngang.</a:t>
+              <a:t>Nhìn vào hình, điều đập vào mắt là đường kNN gần như nằm ngang.</a:t>
             </a:r>
           </a:p>
           <a:p/>
           <a:p>
             <a:r>
-              <a:t>Số liệu: kNN dao động 0,6 điểm qua cả năm kịch bản (72,7 đến 73,3), trong khi SGD dao động 9,2 điểm (88,1 đến 97,3).</a:t>
+              <a:t>Cụ thể, kNN dao động 0,6 điểm qua cả năm kịch bản, từ 72,7 đến 73,3. Trong khi đó SGD dao động 9,2 điểm, từ 88,1 đến 97,3.</a:t>
             </a:r>
           </a:p>
           <a:p/>
           <a:p>
             <a:r>
-              <a:t>Giải thích: trôi hầu như không làm kNN tệ đi, vì kNN chưa bao giờ tích lũy được gì để trôi làm hỏng. Mô hình chính là 100 mẫu gần nhất, và 100 mẫu gần nhất thì luôn thuộc khái niệm hiện tại dù có trôi hay không.</a:t>
+              <a:t>Lý do là trôi hầu như không làm kNN tệ đi, bởi vì kNN chưa bao giờ tích lũy được gì để trôi làm hỏng. Mô hình của nó chính là một trăm mẫu gần nhất, mà một trăm mẫu gần nhất thì luôn thuộc về khái niệm hiện tại, dù có trôi hay không.</a:t>
             </a:r>
           </a:p>
           <a:p/>
           <a:p>
             <a:r>
-              <a:t>Điểm đóng góp của slide: bài báo nêu HAI nhận xét riêng biệt — mục 7 nói năng lực bị chặn bởi kích thước bộ đệm, và Hình 5a nhận xét kNN không có xu hướng tăng ngay cả khi khái niệm đứng yên. Thực ra đó là CÙNG một tính chất: không tích lũy được thì vừa bị chặn trên, vừa không bị trôi làm hại. Trần năng lực và tính trơ là một.</a:t>
+              <a:t>Bài báo đưa ra hai nhận xét riêng biệt. Ở mục 7, nó nói năng lực dự báo của phương pháp bộ đệm bị chặn bởi kích thước bộ đệm. Ở Hình 5a, nó nhận xét rằng kNN không có xu hướng đi lên ngay cả khi khái niệm đứng yên và dữ liệu cứ tích lũy thêm. Thực ra đây là cùng một tính chất: cái gì không tích lũy được thì vừa bị chặn trên, vừa không bị trôi làm hại. Trần năng lực và tính trơ trước trôi là hai mặt của một điều.</a:t>
             </a:r>
           </a:p>
           <a:p/>
           <a:p>
             <a:r>
-              <a:t>Nếu bị hỏi về SAMkNN: SAMkNN khắc phục đúng điểm này bằng bộ nhớ dài hạn, và đó là lý do nó tốt hơn kNN thuần trong Bảng 3.</a:t>
+              <a:t>SAMkNN khắc phục đúng điểm này bằng cách thêm một bộ nhớ dài hạn, và đó là lý do nó tốt hơn hẳn kNN thuần trong bảng kết quả.</a:t>
             </a:r>
           </a:p>
         </p:txBody>
@@ -2013,19 +2001,7 @@
           <a:lstStyle/>
           <a:p>
             <a:r>
-              <a:t>DÀN Ý (~30 giây). Đọc lướt sáu mục, không giải thích từng mục.</a:t>
-            </a:r>
-          </a:p>
-          <a:p/>
-          <a:p>
-            <a:r>
-              <a:t>Mạch lập luận cần làm rõ: bài toán (1) → cách xử lý hiện có (2) → một lập luận cụ thể nói rằng cách xử lý phổ biến là sai hướng (3) → kiểm chứng lập luận đó bằng thực nghiệm (4) → những gì đã xảy ra sau đó (5) → những gì còn lại (6).</a:t>
-            </a:r>
-          </a:p>
-          <a:p/>
-          <a:p>
-            <a:r>
-              <a:t>Nếu bị hỏi 'tại sao chọn bài báo 2018 cũ như vậy', trả lời trước: vì đề xuất trong đó mãi đến 2025 mới được hiện thực hóa, và đó chính là nội dung phần 5.</a:t>
+              <a:t>Mạch của bài đi như sau. Trước hết là định nghĩa bài toán cho chính xác. Sau đó là các phương pháp hiện có, chia thành hai nhóm: phát hiện trôi, và thích nghi sau khi trôi. Phần ba là bài báo của Read, lập luận rằng một luồng dữ liệu có trôi thực chất là một chuỗi thời gian. Phần bốn là kết quả tôi tái lập lại bài báo đó. Phần năm là những công trình ra đời sau, trong đó có một công trình năm 2025 đã hiện thực hóa đúng điều Read đề xuất. Và phần sáu là các vấn đề còn mở.</a:t>
             </a:r>
           </a:p>
         </p:txBody>
@@ -2095,31 +2071,31 @@
           <a:lstStyle/>
           <a:p>
             <a:r>
-              <a:t>THAM SỐ KHÔNG ĐƯỢC NÊU (~2 phút). Ba tham số bài báo không ghi, xếp theo mức ảnh hưởng.</a:t>
+              <a:t>Trong quá trình tái lập, tôi gặp ba tham số mà bài báo không ghi rõ.</a:t>
             </a:r>
           </a:p>
           <a:p/>
           <a:p>
             <a:r>
-              <a:t>Quan trọng nhất là số chiều dữ liệu tổng hợp: SGD đạt 57,7 / 74,5 / 83,1 / 92,2 ứng với d = 2 / 5 / 10 / 20. Biên độ này lớn hơn chênh lệch giữa bất kỳ hai phương pháp nào trong Bảng 3.</a:t>
+              <a:t>Quan trọng nhất là số chiều của dữ liệu tổng hợp. SGD đạt 57,7 điểm khi số chiều bằng hai, 74,5 khi bằng năm, 83,1 khi bằng mười, và 92,2 khi bằng hai mươi. Biên độ này lớn hơn chênh lệch giữa bất kỳ hai phương pháp nào trong bảng kết quả.</a:t>
             </a:r>
           </a:p>
           <a:p/>
           <a:p>
             <a:r>
-              <a:t>Hệ quả: hàng Synthetic của bài báo (93,6–96,0) chỉ đạt được ở d lớn, KHÔNG đạt được ở d = 2 như chính Hình 4 của bài báo vẽ. Ai trích dẫn cột đó nên biết nó phụ thuộc vào một tham số tự do không được công bố.</a:t>
+              <a:t>Hệ quả là hàng Synthetic của bài báo, từ 93,6 đến 96,0 điểm, chỉ đạt được khi số chiều lớn. Nó không đạt được ở số chiều bằng hai, mà số chiều bằng hai lại chính là cái Hình 4 của bài báo vẽ ra. Vậy ai trích dẫn cột đó nên biết rằng nó phụ thuộc vào một tham số tự do không được công bố.</a:t>
             </a:r>
           </a:p>
           <a:p/>
           <a:p>
             <a:r>
-              <a:t>Giải thích nguyên nhân nếu có thời gian: phép quay ở đây là quay Givens trong một mặt phẳng tọa độ, nên chỉ làm nhiễu 2 trong d thành phần — d càng lớn thì càng nhiều phần của θ sống sót sau mỗi bước. Cũng có thể bài báo hiểu 'ma trận quay góc 0,01' theo nghĩa khác (quay ngẫu nhiên toàn phần), khi đó phụ thuộc vào d sẽ biến mất. Văn bản không cho phép kết luận, nên nêu là điểm chưa giải quyết chứ đừng khẳng định.</a:t>
+              <a:t>Nguyên nhân có thể là phép quay tôi dùng là quay Givens trong một mặt phẳng tọa độ, nên nó chỉ làm nhiễu hai trong số các thành phần của theta; số chiều càng lớn thì càng nhiều phần của theta sống sót sau mỗi bước. Cũng có thể bài báo hiểu cụm ma trận quay góc 0,01 theo nghĩa khác, chẳng hạn một phép quay ngẫu nhiên toàn phần, và khi đó sự phụ thuộc vào số chiều sẽ biến mất. Văn bản bài báo không cho phép kết luận, nên tôi nêu đây như một điểm chưa giải quyết.</a:t>
             </a:r>
           </a:p>
           <a:p/>
           <a:p>
             <a:r>
-              <a:t>Quan sát kèm theo, khá bất ngờ: trên luồng Synthetic, SGD thuần đạt 92,2 còn PBF-SGD chỉ 88,5 — khai triển cơ sở làm TỆ ĐI. Lý do: khái niệm ở đó là siêu phẳng θᵀx = 0, tuyến tính theo định nghĩa, nên cơ sở đa thức bậc 3 thêm 1.770 tham số chỉ đóng góp phương sai mà không thêm năng lực biểu diễn. Khai triển cơ sở là một canh bạc đặt vào tính phi tuyến, và đây đúng là ô mà canh bạc đó chắc chắn thua.</a:t>
+              <a:t>Còn một quan sát khá bất ngờ. Trên luồng Synthetic, SGD thuần đạt 92,2 điểm, còn PBF-SGD chỉ đạt 88,5. Nghĩa là khai triển cơ sở làm kết quả tệ đi. Lý do là khái niệm ở luồng đó là một siêu phẳng theta chuyển vị nhân x bằng không, tức là tuyến tính theo định nghĩa. Một cơ sở đa thức bậc ba thêm vào 1.770 tham số, mà những tham số này chỉ đóng góp phương sai chứ không thêm năng lực biểu diễn nào. Khai triển cơ sở là một canh bạc đặt vào tính phi tuyến, và đây đúng là ô mà canh bạc ấy chắc chắn thua.</a:t>
             </a:r>
           </a:p>
         </p:txBody>
@@ -2189,7 +2165,7 @@
           <a:lstStyle/>
           <a:p>
             <a:r>
-              <a:t>CHUYỂN MỤC. 'Bài báo 2018 đề xuất dự báo θ nhưng không xây dựng. Phần này xem điều gì đã xảy ra sau đó.'</a:t>
+              <a:t>Bài báo năm 2018 đề xuất dự báo theta nhưng không xây dựng nó. Phần này tôi xem điều gì đã xảy ra sau đó.</a:t>
             </a:r>
           </a:p>
         </p:txBody>
@@ -2259,31 +2235,31 @@
           <a:lstStyle/>
           <a:p>
             <a:r>
-              <a:t>BỐN HƯỚNG TIẾP CẬN (~2 phút). Đọc bảng nhanh, dừng lại ở hàng cuối.</a:t>
+              <a:t>Các công trình sau này chia thành bốn hướng.</a:t>
             </a:r>
           </a:p>
           <a:p/>
           <a:p>
             <a:r>
-              <a:t>Ba hướng đầu đều mang tính phản ứng: chuẩn hóa xử lý phân phối biên; fast/slow cân bằng giữa thích nghi nhanh và nhớ lại mẫu cũ; bể khái niệm giả định khái niệm sẽ quay lại nên lưu sẵn mô hình cho từng khái niệm.</a:t>
+              <a:t>Hướng chuẩn hóa loại bỏ sự dịch chuyển của phân phối biên và để nguyên phân phối có điều kiện; đại diện là RevIN và SAN. Hướng nhanh chậm cân bằng giữa thích nghi nhanh với dữ liệu mới và nhớ lại các mẫu cũ; đại diện là FSNet và OneNet. Hướng bể khái niệm giữ một mô hình cho mỗi khái niệm rồi chọn mô hình gần nhất với mẫu hiện tại; đại diện là CEP, dùng cho trôi lặp lại.</a:t>
             </a:r>
           </a:p>
           <a:p/>
           <a:p>
             <a:r>
-              <a:t>Chỉ Proceed (KDD'25) làm đúng điều Read lập luận. Cơ chế: ước lượng độ trôi giữa dữ liệu huấn luyện gần nhất và mẫu kiểm tra hiện tại, rồi dùng một bộ sinh ĐƯỢC HỌC để chuyển ước lượng đó thành điều chỉnh tham số — tức là một ánh xạ từ dịch chuyển trong không gian khái niệm sang dịch chuyển trong không gian tham số. Bộ sinh được huấn luyện trước trên các kiểu trôi tổng hợp đa dạng.</a:t>
+              <a:t>Ba hướng này đều mang tính phản ứng. Chỉ hướng thứ tư, với công trình Proceed tại KDD 2025, mới làm đúng điều Read lập luận. Proceed ước lượng độ trôi giữa dữ liệu huấn luyện gần nhất và mẫu kiểm tra hiện tại, rồi dùng một bộ sinh được học để chuyển ước lượng đó thành điều chỉnh tham số. Tức là nó học hẳn một ánh xạ từ dịch chuyển trong không gian khái niệm sang dịch chuyển trong không gian tham số. Bộ sinh này được huấn luyện trước trên nhiều kiểu trôi tổng hợp khác nhau để tổng quát hóa tốt hơn.</a:t>
             </a:r>
           </a:p>
           <a:p/>
           <a:p>
             <a:r>
-              <a:t>Câu chốt nên nói rõ ràng: Read lập luận rằng giải bài toán trôi đồng nghĩa với dự báo θ, nhưng không xây dựng. Bảy năm sau Proceed xây dựng đúng ánh xạ đó, theo đúng hướng ông đề xuất. Đây là lý do bài báo 2018 vẫn đáng đọc.</a:t>
+              <a:t>Read lập luận rằng giải bài toán trôi đồng nghĩa với dự báo theta, nhưng ông không xây dựng. Bảy năm sau, Proceed xây dựng đúng ánh xạ đó, theo đúng hướng ông đề xuất. Đây là lý do bài báo 2018 vẫn đáng đọc.</a:t>
             </a:r>
           </a:p>
           <a:p/>
           <a:p>
             <a:r>
-              <a:t>Phân biệt với động lượng (momentum): động lượng ngoại suy tuyến tính trên gradient; Proceed học hẳn một ánh xạ. Đây cũng là nền cho thí nghiệm A ở slide 26.</a:t>
+              <a:t>Cần phân biệt với động lượng trong tối ưu: động lượng chỉ ngoại suy tuyến tính trên gradient, còn Proceed học hẳn một ánh xạ có tham số.</a:t>
             </a:r>
           </a:p>
         </p:txBody>
@@ -2353,31 +2329,31 @@
           <a:lstStyle/>
           <a:p>
             <a:r>
-              <a:t>MÔ HÌNH NỀN TẢNG (~2 phút). Ý chính: trôi khái niệm không biến mất, chỉ đổi vị trí.</a:t>
+              <a:t>Với mô hình nền tảng cho chuỗi thời gian, như Chronos hay Moirai, trôi khái niệm không biến mất; nó chỉ đổi vị trí.</a:t>
             </a:r>
           </a:p>
           <a:p/>
           <a:p>
             <a:r>
-              <a:t>Các mô hình nền tảng cho chuỗi thời gian (Chronos, Moirai và các mô hình kế tiếp) được huấn luyện trước trên kho dữ liệu lớn và dùng ở chế độ zero-shot. Dữ liệu luồng vẫn trôi như thường.</a:t>
+              <a:t>Các mô hình này được huấn luyện trước trên kho dữ liệu rất lớn và dùng ở chế độ zero-shot, tức không huấn luyện lại trên miền đích. Nhưng dữ liệu luồng thì vẫn trôi như thường.</a:t>
             </a:r>
           </a:p>
           <a:p/>
           <a:p>
             <a:r>
-              <a:t>Hướng 1 — thích nghi hộp đen: nếu mô hình được phục vụ qua API thương mại thì không thể sửa trọng số. Công trình gần đây thích nghi bằng cách học CẤU TRÚC SAI SỐ của mô hình theo ngữ cảnh, rồi hiệu chỉnh đầu ra.</a:t>
+              <a:t>Hướng thứ nhất là thích nghi hộp đen. Nếu mô hình được phục vụ qua một API thương mại thì ta không thể sửa trọng số. Công trình gần đây thích nghi bằng cách học cấu trúc sai số của mô hình theo ngữ cảnh, rồi hiệu chỉnh đầu ra dựa trên cấu trúc đó.</a:t>
             </a:r>
           </a:p>
           <a:p/>
           <a:p>
             <a:r>
-              <a:t>Hướng 2 — tiên nghiệm kháng trôi: đưa giả định 'mô hình thay đổi theo thời gian' vào ngay trong tiên nghiệm học trong ngữ cảnh, để mô hình học cách ước lượng, thích nghi và ngoại suy sự thay đổi (Drift-Resilient TabPFN, NeurIPS'24).</a:t>
+              <a:t>Hướng thứ hai là đưa giả định trôi vào ngay trong tiên nghiệm. Drift-Resilient TabPFN tại NeurIPS 2024 xây dựng tiên nghiệm học trong ngữ cảnh với giả định rằng mô hình sinh dữ liệu thay đổi theo thời gian, nhờ đó mô hình học được cách ước lượng, thích nghi và ngoại suy sự thay đổi đó.</a:t>
             </a:r>
           </a:p>
           <a:p/>
           <a:p>
             <a:r>
-              <a:t>Liên hệ ngược về phần 2: cả hai vẫn là thích nghi liên tục theo đúng nghĩa đã định nghĩa — tham số chỉ nằm ở chỗ khác, trong ngữ cảnh hoặc trong bộ hiệu chỉnh phần dư, chứ không nằm trong trọng số.</a:t>
+              <a:t>Cả hai hướng vẫn là thích nghi liên tục theo đúng nghĩa tôi đã định nghĩa ở phần hai. Tham số chỉ nằm ở chỗ khác: trong ngữ cảnh, hoặc trong một bộ hiệu chỉnh phần dư, chứ không nằm trong trọng số của mô hình.</a:t>
             </a:r>
           </a:p>
         </p:txBody>
@@ -2447,7 +2423,7 @@
           <a:lstStyle/>
           <a:p>
             <a:r>
-              <a:t>CHUYỂN MỤC. 'Phần cuối: những gì chưa ai giải quyết, và những thí nghiệm có thể làm ngay trên bộ công cụ hiện có.'</a:t>
+              <a:t>Phần cuối, tôi nói về những gì chưa ai giải quyết, và những thí nghiệm có thể làm ngay trên bộ công cụ tôi đã dựng.</a:t>
             </a:r>
           </a:p>
         </p:txBody>
@@ -2517,25 +2493,25 @@
           <a:lstStyle/>
           <a:p>
             <a:r>
-              <a:t>VẤN ĐỀ MỞ (~2 phút). Ba vấn đề, vấn đề đầu là quan trọng nhất.</a:t>
+              <a:t>Có ba vấn đề còn mở.</a:t>
             </a:r>
           </a:p>
           <a:p/>
           <a:p>
             <a:r>
-              <a:t>(1) Chưa có tiêu chí phân biệt trôi thật với ngữ cảnh bị bỏ sót. CDS cho rằng p(y|x) chỉ CÓ VẺ thay đổi vì thiếu biến c; Read cho rằng θ thật sự di chuyển trong Θ. Nếu c quan sát được và có chu kỳ thì bám theo là lãng phí; nếu c tiềm ẩn và không lặp thì điều kiện hóa là bất khả. Không công trình nào chỉ ra đang ở trường hợp nào — mà đây lại là câu hỏi phải trả lời TRƯỚC khi chọn phương pháp.</a:t>
+              <a:t>Thứ nhất, và quan trọng nhất, là chưa có tiêu chí nào phân biệt trôi thật với ngữ cảnh bị bỏ sót. Phía context-driven shift cho rằng phân phối có điều kiện chỉ có vẻ thay đổi, vì ta thiếu một biến ngữ cảnh. Phía Read cho rằng theta thật sự di chuyển trong không gian tham số. Nếu ngữ cảnh quan sát được và có chu kỳ thì việc bám theo là lãng phí; còn nếu nó tiềm ẩn và không lặp lại thì điều kiện hóa là bất khả. Nhưng không công trình nào cho ta biết đang ở trường hợp nào, trong khi đây lại là câu hỏi phải trả lời trước khi chọn phương pháp.</a:t>
             </a:r>
           </a:p>
           <a:p/>
           <a:p>
             <a:r>
-              <a:t>(2) Trôi lặp lại và trôi kéo dài chia đôi không gian phương pháp: bể khái niệm giả định khái niệm quay lại, bộ bám theo giả định dịch chuyển trơn. Ranh giới giữa hai giả định này chưa được đặc tả.</a:t>
+              <a:t>Thứ hai, trôi lặp lại và trôi kéo dài chia đôi không gian phương pháp. Bể khái niệm giả định khái niệm sẽ quay lại; bộ bám theo giả định khái niệm dịch chuyển trơn. Ranh giới giữa hai giả định này chưa được ai đặc tả.</a:t>
             </a:r>
           </a:p>
           <a:p/>
           <a:p>
             <a:r>
-              <a:t>(3) Đánh giá vẫn tổng hợp và giả định nhãn tức thì, trong khi các ứng dụng làm nên động lực của lĩnh vực đều không như vậy. Nhắc lại slide 10 nếu cần.</a:t>
+              <a:t>Thứ ba, đánh giá vẫn dựa trên dữ liệu tổng hợp và giả định nhãn có ngay, trong khi các ứng dụng làm nên động lực của lĩnh vực thì không như vậy.</a:t>
             </a:r>
           </a:p>
         </p:txBody>
@@ -2605,43 +2581,37 @@
           <a:lstStyle/>
           <a:p>
             <a:r>
-              <a:t>THÍ NGHIỆM ĐỀ XUẤT (~3 phút). Mỗi thí nghiệm kèm một dự đoán CÓ THỂ SAI — đó là điều phân biệt đề xuất nghiên cứu với mong muốn.</a:t>
+              <a:t>Tôi đề xuất bốn thí nghiệm, mỗi thí nghiệm kèm một dự đoán có thể bị bác bỏ.</a:t>
             </a:r>
           </a:p>
           <a:p/>
           <a:p>
             <a:r>
-              <a:t>Thứ tự trình bày nên là D → A → C → B: rẻ nhất và chắc chắn nhất trước, tham vọng nhất sau cùng, vì người nghe thường đánh giá thấp một danh sách mở đầu bằng thí nghiệm khó nhất.</a:t>
+              <a:t>Thí nghiệm D là rẻ nhất: quét lưới tốc độ trôi nhân với lambda, tìm lambda tối ưu cho mỗi tốc độ, rồi khớp số mũ trên đồ thị log-log. Dự đoán là lambda tối ưu tỉ lệ với căn bậc hai của tốc độ trôi. Nếu số mũ khớp ra gần 0,5 thì ta biến một cảnh báo định tính thành một quy tắc chỉnh tham số.</a:t>
             </a:r>
           </a:p>
           <a:p/>
           <a:p>
             <a:r>
-              <a:t>D (rẻ nhất): quét lưới tốc độ trôi × λ, tìm λ tối ưu cho mỗi tốc độ, khớp số mũ trên đồ thị log-log. Nếu ra gần 0,5 thì biến cảnh báo ở mục 5 thành quy tắc chỉnh tham số.</a:t>
+              <a:t>Thí nghiệm A giải thích vì sao động lượng không giúp gì. Quỹ đạo thật là một phép quay, tức một đường cong, trong khi động lượng chỉ ngoại suy tuyến tính; nên về dài hạn tác dụng triệt tiêu. Tôi đề xuất thay bằng một bộ ngoại suy khớp đúng dạng hàm, tức ước lượng ma trận quay từ lịch sử của theta ước lượng. Dự đoán là nó thu hẹp khoảng cách bám ở trôi tăng dần, và không có tác dụng gì ở trôi đột ngột. Nếu nó giúp ở mọi nơi thì tức là nó chỉ đang tăng hệ số khuếch đại, và thí nghiệm không chứng minh được gì.</a:t>
             </a:r>
           </a:p>
           <a:p/>
           <a:p>
             <a:r>
-              <a:t>A: giải thích vì sao động lượng không giúp gì. Quỹ đạo thật là phép QUAY, tức đường cong, còn động lượng ngoại suy TUYẾN TÍNH — nên về dài hạn triệt tiêu. Thay bằng bộ ngoại suy khớp đúng dạng hàm (ước lượng ma trận quay từ lịch sử θ̂). Dự đoán có thể sai: nó phải thu hẹp khoảng cách bám ở trôi tăng dần VÀ không có tác dụng ở trôi đột ngột — nếu giúp ở mọi nơi thì chỉ là tăng hệ số khuếch đại, tức không chứng minh được gì.</a:t>
+              <a:t>Thí nghiệm C quét chu kỳ lặp, so bộ bám theo với bể khái niệm, và tìm điểm giao. Dự đoán là tồn tại một chu kỳ ngưỡng, dưới ngưỡng đó thì bể khái niệm thắng. Đây là một ranh giới trung thực cho chính luận điểm tôi vừa trình bày.</a:t>
             </a:r>
           </a:p>
           <a:p/>
           <a:p>
             <a:r>
-              <a:t>C: quét chu kỳ lặp, so bộ bám theo với bể khái niệm, tìm điểm giao p*. Đây là ranh giới trung thực cho chính luận điểm của mình, nên trình bày nó làm tăng độ tin cậy.</a:t>
+              <a:t>Thí nghiệm B là thí nghiệm tôi quan tâm nhất, vì nó trả lời trực tiếp vấn đề mở thứ nhất. Tôi sẽ thêm một kiểu trôi trong đó theta phụ thuộc vào một ngữ cảnh có chu kỳ quan sát được, rồi so sánh hai chẩn đoán: tự tương quan của phần dư, là chẩn đoán kiểu Read, và thông tin tương hỗ giữa phần dư với ngữ cảnh, là chẩn đoán kiểu context-driven shift. Dự đoán là tự tương quan sẽ báo động ở cả hai trường hợp nên không phân biệt được, còn thông tin tương hỗ chỉ báo ở trường hợp thứ hai. Nếu đúng, ta có một quy tắc quyết định mà chưa ai công bố.</a:t>
             </a:r>
           </a:p>
           <a:p/>
           <a:p>
             <a:r>
-              <a:t>B (để cuối, là thí nghiệm muốn người nghe nhớ): trả lời trực tiếp vấn đề mở thứ nhất. Thêm một kiểu trôi mới trong đó θ phụ thuộc một ngữ cảnh có chu kỳ QUAN SÁT ĐƯỢC, rồi so hai chẩn đoán: tự tương quan của phần dư (chẩn đoán kiểu Read) và thông tin tương hỗ giữa phần dư với ngữ cảnh (chẩn đoán kiểu CDS). Dự đoán: tự tương quan phát hiện CẢ HAI nên không phân biệt được, còn thông tin tương hỗ chỉ phát hiện trường hợp thứ hai. Nếu đúng, ta có một quy tắc quyết định chưa ai công bố.</a:t>
-            </a:r>
-          </a:p>
-          <a:p/>
-          <a:p>
-            <a:r>
-              <a:t>Lý do B khả thi ngay: Electricity đã có sẵn ngữ cảnh chu kỳ quan sát được (48 khung nửa giờ trong ngày, và thứ trong tuần), còn luồng tổng hợp thì cho biết θ thật — nên dựng và tách được cả hai trường hợp trên cùng một bộ công cụ.</a:t>
+              <a:t>Thí nghiệm này làm được ngay, vì dữ liệu Electricity đã có sẵn ngữ cảnh chu kỳ quan sát được, gồm 48 khung nửa giờ trong ngày và thứ trong tuần; còn luồng tổng hợp thì cho biết theta thật. Nên tôi dựng và tách được cả hai trường hợp trên cùng một bộ công cụ.</a:t>
             </a:r>
           </a:p>
         </p:txBody>
@@ -2711,34 +2681,49 @@
           <a:lstStyle/>
           <a:p>
             <a:r>
-              <a:t>TÓM TẮT (~1 phút). Sáu ý, đọc nhanh, không giải thích lại.</a:t>
+              <a:t>Tóm lại.</a:t>
             </a:r>
           </a:p>
           <a:p/>
           <a:p>
             <a:r>
-              <a:t>Nếu còn thời gian, nên kết thúc bằng câu hỏi mở ở slide 26 thay vì bằng slide tóm tắt: kết ở một câu hỏi mà mình có điều kiện trả lời sẽ mở ra trao đổi, và đó cũng là cách xin được buổi làm việc tiếp theo.</a:t>
+              <a:t>Trôi khái niệm là sự thay đổi của phân phối có điều kiện theo thời gian, và nó khác với dịch chuyển hiệp biến; phần lớn công trình gần đây lại xử lý cái thứ hai.</a:t>
             </a:r>
           </a:p>
           <a:p/>
           <a:p>
             <a:r>
-              <a:t>Câu hỏi có thể gặp và hướng trả lời:</a:t>
-            </a:r>
-          </a:p>
-          <a:p>
-            <a:r>
-              <a:t>• 'Sao không dùng scikit-multiflow cho nhanh?' — vì mục tiêu là truy được mọi con số về mã nguồn đọc được, và vì bản cài đặt lại đã phát hiện ra chính những chỗ bài báo không ghi rõ.</a:t>
-            </a:r>
-          </a:p>
-          <a:p>
-            <a:r>
-              <a:t>• 'Kết quả không khớp thì có phải bản cài đặt sai?' — hai trong ba phương pháp khớp trong 2 điểm, ADWIN được kiểm chứng độc lập, và các sai lệch đều truy được nguyên nhân cụ thể (bậc đa thức, cách nén bộ nhớ dài hạn).</a:t>
-            </a:r>
-          </a:p>
-          <a:p>
-            <a:r>
-              <a:t>• 'Bài báo 2018 còn giá trị không?' — luận điểm cấu trúc (cây không có Δθ) vẫn đúng và không cần thực nghiệm; còn đề xuất dự báo θ thì đã được Proceed hiện thực hóa năm 2025.</a:t>
+              <a:t>Cơ chế thích nghi nào khả dụng là do mô hình được cấu tạo từ cái gì. Một cái cây không có delta theta, nên chỉ mô hình có tham số liên tục mới bám theo được.</a:t>
+            </a:r>
+          </a:p>
+          <a:p/>
+          <a:p>
+            <a:r>
+              <a:t>Read lập luận rằng trôi kéo theo phụ thuộc thời gian, nên một luồng có trôi chính là một chuỗi thời gian, và ta nên bám theo khái niệm thay vì phát hiện sự thay đổi.</a:t>
+            </a:r>
+          </a:p>
+          <a:p/>
+          <a:p>
+            <a:r>
+              <a:t>Về tái lập, hai trên ba phương pháp khớp trong phạm vi hai điểm trên Electricity. Điều kiện về lambda đúng, nhưng nó nói về khả năng phục hồi sau gián đoạn chứ không phải về việc bám theo.</a:t>
+            </a:r>
+          </a:p>
+          <a:p/>
+          <a:p>
+            <a:r>
+              <a:t>Đề xuất dự báo theta đã được Proceed hiện thực hóa năm 2025.</a:t>
+            </a:r>
+          </a:p>
+          <a:p/>
+          <a:p>
+            <a:r>
+              <a:t>Và câu hỏi còn mở là làm sao tách được trôi thật với ngữ cảnh chưa bao giờ được mô hình hóa.</a:t>
+            </a:r>
+          </a:p>
+          <a:p/>
+          <a:p>
+            <a:r>
+              <a:t>Tôi xin dừng ở đây và sẵn sàng nhận câu hỏi.</a:t>
             </a:r>
           </a:p>
         </p:txBody>
@@ -2808,7 +2793,7 @@
           <a:lstStyle/>
           <a:p>
             <a:r>
-              <a:t>CHUYỂN MỤC. Một câu: 'Trước hết cần định nghĩa chính xác bài toán, vì thuật ngữ trong lĩnh vực này được dùng khá lỏng lẻo.'</a:t>
+              <a:t>Trước hết ta cần định nghĩa bài toán cho chính xác, bởi vì thuật ngữ trong lĩnh vực này được dùng khá lỏng lẻo và nhiều khi cùng một từ chỉ những hiện tượng khác nhau.</a:t>
             </a:r>
           </a:p>
         </p:txBody>
@@ -2878,25 +2863,31 @@
           <a:lstStyle/>
           <a:p>
             <a:r>
-              <a:t>BÀI TOÁN (~2 phút). Bắt đầu từ giả định của học máy truyền thống: phân phối đồng thời p(x, y) cố định, nên mô hình khớp với mẫu huấn luyện thì cũng khớp với dữ liệu triển khai. Luồng dữ liệu phá vỡ đúng giả định này.</a:t>
+              <a:t>Học máy truyền thống giả định rằng có một phân phối đồng thời p của x và y cố định. Ta lấy một mẫu huấn luyện, khớp mô hình vào đó, rồi triển khai; mô hình tổng quát hóa được là vì mẫu huấn luyện và dữ liệu triển khai cùng tuân theo một quy luật.</a:t>
             </a:r>
           </a:p>
           <a:p/>
           <a:p>
             <a:r>
-              <a:t>Nhấn mạnh cách diễn đạt: mô hình không 'cũ' mà 'sai đặc tả' (misspecified) — nó ước lượng một mục tiêu không còn tồn tại. Đây không phải vấn đề thiếu dữ liệu.</a:t>
+              <a:t>Luồng dữ liệu phá vỡ đúng giả định đó. Quy luật sinh dữ liệu tự nó thay đổi theo thời gian: phân phối có điều kiện của y theo x tại thời điểm t không còn bằng phân phối đó tại thời điểm t cộng k.</a:t>
             </a:r>
           </a:p>
           <a:p/>
           <a:p>
             <a:r>
-              <a:t>Ví dụ thực tế nên nêu 1–2 cái: nhu cầu điện (thói quen tiêu dùng, thời tiết), phát hiện gian lận (đối thủ thay đổi chiến thuật), phát hiện xâm nhập mạng.</a:t>
+              <a:t>Điều này có nghĩa là mô hình đang triển khai không phải là mô hình cũ, mà là mô hình sai đặc tả. Nó ước lượng một mục tiêu không còn tồn tại nữa. Đây không phải vấn đề thiếu dữ liệu, và thêm dữ liệu cũng không giải quyết được.</a:t>
             </a:r>
           </a:p>
           <a:p/>
           <a:p>
             <a:r>
-              <a:t>Hai hệ quả là phần quan trọng nhất slide này: (1) suy giảm âm thầm — không có exception nào được ném ra, chỉ có độ chính xác tụt dần, nên nếu không đo thì không biết; (2) không thể huấn luyện lại từ đầu — luồng vô hạn, và nhãn thường đến muộn (sẽ quay lại ý này ở slide 10).</a:t>
+              <a:t>Ta gặp hiện tượng này ở nhu cầu điện, khi thói quen tiêu dùng và thời tiết thay đổi; ở phát hiện gian lận, khi đối thủ đổi chiến thuật; ở phát hiện xâm nhập mạng.</a:t>
+            </a:r>
+          </a:p>
+          <a:p/>
+          <a:p>
+            <a:r>
+              <a:t>Có hai hệ quả ràng buộc mọi phương pháp về sau. Thứ nhất, sự suy giảm diễn ra âm thầm: không có lỗi nào được báo, hệ thống vẫn chạy bình thường, chỉ có độ chính xác tụt dần. Nếu không đo thì không biết. Thứ hai, ta không thể huấn luyện lại từ đầu, vì luồng là vô hạn và nhãn thường đến rất muộn.</a:t>
             </a:r>
           </a:p>
         </p:txBody>
@@ -2966,25 +2957,19 @@
           <a:lstStyle/>
           <a:p>
             <a:r>
-              <a:t>PHÂN LOẠI (~2 phút). Bốn dạng theo Gama et al. (2014), Read dùng lại ở mục 3.</a:t>
+              <a:t>Trôi khái niệm được phân thành bốn dạng. Trôi đột ngột là khi một khái niệm thay thế khái niệm khác tại một thời điểm, ví dụ một cảm biến được hiệu chuẩn lại. Trôi tăng dần là khi khái niệm dịch chuyển qua từng bước nhỏ, ví dụ máy móc mòn đi theo thời gian. Trôi dần dần là khi hai khái niệm luân phiên nhau, khái niệm mới dần thắng thế, ví dụ thói quen người dùng chuyển từ A sang B. Trôi lặp lại là khi các khái niệm quay trở lại theo chu kỳ, ví dụ nhu cầu điện ngày thường so với cuối tuần.</a:t>
             </a:r>
           </a:p>
           <a:p/>
           <a:p>
             <a:r>
-              <a:t>Ví dụ nhanh cho từng dạng: đột ngột — cảm biến được hiệu chuẩn lại; tăng dần — máy móc mòn đi theo thời gian; dần dần — thói quen người dùng chuyển từ A sang B; lặp lại — nhu cầu điện ngày thường so với cuối tuần.</a:t>
+              <a:t>Cột đáng chú ý là cột cuối. Với trôi tăng dần, các trạng thái trung gian là những khái niệm thật, nghĩa là tồn tại một quỹ đạo liên tục để bám theo. Với trôi dần dần thì không: chỉ có hai khái niệm cố định và một trọng số pha trộn thay đổi. Cái biến thiên trơn ở đây là trọng số pha trộn, chứ không phải bản thân khái niệm. Điểm khác biệt này sẽ quyết định phương pháp nào dùng được, và ta sẽ quay lại nó ở phần ba.</a:t>
             </a:r>
           </a:p>
           <a:p/>
           <a:p>
             <a:r>
-              <a:t>Cột thứ ba mới là cột đáng nói. Với trôi tăng dần, các trạng thái trung gian là khái niệm THẬT, tức tồn tại một quỹ đạo liên tục để bám theo. Với trôi dần dần thì không: chỉ có hai khái niệm cố định và một trọng số pha trộn α thay đổi — nên không có quỹ đạo nào để dự báo. Ý này sẽ được dùng lại ở slide 14, nên cần nói kỹ ở đây.</a:t>
-            </a:r>
-          </a:p>
-          <a:p/>
-          <a:p>
-            <a:r>
-              <a:t>Trôi lặp lại là một trục riêng, không loại trừ ba dạng kia: bất kỳ dạng nào cũng có thể lặp.</a:t>
+              <a:t>Trôi lặp lại là một trục riêng, không loại trừ ba dạng kia; bất kỳ dạng nào cũng có thể lặp.</a:t>
             </a:r>
           </a:p>
         </p:txBody>
@@ -3054,25 +3039,25 @@
           <a:lstStyle/>
           <a:p>
             <a:r>
-              <a:t>HAI VỊ TRÍ THAY ĐỔI (~2 phút). Viết phân tích p(x, y) = p(x)·p(y|x) lên bảng nếu có, vì cả slide này xoay quanh nó: phân phối đồng thời chỉ có đúng hai thừa số, nên chỉ có đúng hai chỗ để thay đổi.</a:t>
+              <a:t>Phân phối đồng thời của x và y phân tích được thành tích của phân phối biên p của x với phân phối có điều kiện p của y theo x. Nó chỉ có hai thừa số, nên chỉ có đúng hai chỗ mà sự thay đổi có thể xảy ra.</a:t>
             </a:r>
           </a:p>
           <a:p/>
           <a:p>
             <a:r>
-              <a:t>Trôi ảo (virtual drift): p(x) đổi nhưng biên quyết định đứng yên — mô hình vẫn đúng, chỉ là dữ liệu đến từ vùng khác. Trôi khái niệm thật: p(y|x) đổi, biên quyết định dịch chuyển, độ chính xác nhất thiết giảm.</a:t>
+              <a:t>Trường hợp thứ nhất gọi là trôi ảo: phân phối biên thay đổi nhưng biên quyết định đứng yên. Mô hình vẫn đúng, chỉ là dữ liệu đến từ một vùng khác của không gian đầu vào. Trường hợp thứ hai là trôi khái niệm thật: phân phối có điều kiện thay đổi, biên quyết định dịch chuyển, và độ chính xác nhất thiết giảm.</a:t>
             </a:r>
           </a:p>
           <a:p/>
           <a:p>
             <a:r>
-              <a:t>Điểm gây ngạc nhiên nên nhấn: phần lớn công trình dự báo chuỗi thời gian 2022–2024 (RevIN, Dish-TS, SAN) xử lý thừa số THỨ NHẤT. Chúng chuẩn hóa phân phối biên rồi khôi phục lại, hoàn toàn không đụng tới p(y|x).</a:t>
+              <a:t>Chỉ trường hợp thứ hai mới nhất thiết gây thiệt hại. Nhưng phần lớn công trình về dự báo chuỗi thời gian trong giai đoạn 2022 đến 2024 — RevIN, Dish-TS, SAN — lại xử lý trường hợp thứ nhất. Chúng chuẩn hóa phân phối biên ở đầu vào rồi khôi phục lại ở đầu ra, và hoàn toàn không đụng tới phân phối có điều kiện.</a:t>
             </a:r>
           </a:p>
           <a:p/>
           <a:p>
             <a:r>
-              <a:t>Hệ quả thực tiễn: một bộ phát hiện không dùng nhãn chỉ quan sát được p(x), nên về nguyên tắc không thể phân biệt hai trường hợp này. Đây là lý do vấn đề nhãn muộn ở slide 10 nghiêm trọng đến vậy.</a:t>
+              <a:t>Hệ quả thực tiễn là: một bộ phát hiện không dùng nhãn thì chỉ quan sát được phân phối biên, nên về nguyên tắc nó không thể phân biệt hai trường hợp này với nhau.</a:t>
             </a:r>
           </a:p>
         </p:txBody>
@@ -3142,25 +3127,25 @@
           <a:lstStyle/>
           <a:p>
             <a:r>
-              <a:t>BA NGHĨA CỦA 'CONTEXT DRIFT' (~2 phút). Slide này để gỡ rối thuật ngữ trước khi đọc tài liệu, vì ba nghĩa bị dùng lẫn lộn.</a:t>
+              <a:t>Cụm từ context drift được dùng cho ba hiện tượng khác nhau, nên tôi muốn tách bạch trước khi đi tiếp.</a:t>
             </a:r>
           </a:p>
           <a:p/>
           <a:p>
             <a:r>
-              <a:t>Nghĩa 1 là trôi khái niệm đúng nghĩa. Nghĩa 2 (CDS) nói rằng p(y|x) chỉ CÓ VẺ thay đổi, thực ra p(y|x, c) vẫn cố định — chỉ là biến ngữ cảnh c không được đưa vào mô hình. Nghĩa 3 thuộc về mô hình nền tảng, sẽ nói ở slide 23.</a:t>
+              <a:t>Nghĩa thứ nhất là trôi khái niệm đúng nghĩa: phân phối có điều kiện thật sự thay đổi theo thời gian. Nghĩa thứ hai gọi là context-driven shift: phân phối có điều kiện của y theo x và theo biến ngữ cảnh c vẫn cố định, chỉ là biến c không được đưa vào mô hình. Nghĩa thứ ba thuộc về mô hình nền tảng, khi cửa sổ suy luận đi ra khỏi phân phối lúc huấn luyện trước; tôi sẽ nói ở phần năm.</a:t>
             </a:r>
           </a:p>
           <a:p/>
           <a:p>
             <a:r>
-              <a:t>Đây là điểm quan trọng nhất: nghĩa 1 và 2 cho CÙNG một triệu chứng — sai số tăng theo thời gian — nhưng đòi hỏi xử lý NGƯỢC nhau. Nếu c là chu kỳ quan sát được (ví dụ giờ trong ngày), thì thích nghi là lãng phí: chu kỳ sau sẽ đảo ngược mọi điều chỉnh vừa làm. Cách đúng là điều kiện hóa theo c, không phải bám theo.</a:t>
+              <a:t>Điều quan trọng là hai nghĩa đầu cho cùng một triệu chứng — sai số tăng dần theo thời gian — nhưng đòi hỏi hai cách xử lý ngược nhau. Nếu c là một ngữ cảnh có chu kỳ mà ta quan sát được, chẳng hạn giờ trong ngày, thì việc cho mô hình thích nghi là lãng phí: chu kỳ sau sẽ đảo ngược mọi điều chỉnh vừa làm. Cách đúng là điều kiện hóa theo c, chứ không phải bám theo sự thay đổi.</a:t>
             </a:r>
           </a:p>
           <a:p/>
           <a:p>
             <a:r>
-              <a:t>SOLID (KDD'24) đo trực tiếp bằng thông tin tương hỗ giữa phần dư dự báo và ngữ cảnh ứng viên. Công thức này sẽ quay lại ở thí nghiệm B, slide 26.</a:t>
+              <a:t>Công trình SOLID tại KDD 2024 đo trực tiếp bằng thông tin tương hỗ giữa phần dư dự báo của mô hình và biến ngữ cảnh ứng viên. Nếu thông tin tương hỗ này cao, nghĩa là mô hình đang thiếu một biến, chứ không phải khái niệm đang trôi.</a:t>
             </a:r>
           </a:p>
         </p:txBody>
@@ -3230,7 +3215,7 @@
           <a:lstStyle/>
           <a:p>
             <a:r>
-              <a:t>CHUYỂN MỤC. 'Đã có bài toán, giờ xem cộng đồng xử lý thế nào — gồm hai câu hỏi tách biệt: làm sao biết trôi đã xảy ra, và làm gì sau khi biết.'</a:t>
+              <a:t>Đã có bài toán, giờ ta xem cộng đồng xử lý nó thế nào. Có hai câu hỏi tách biệt: làm sao biết trôi đã xảy ra, và làm gì sau khi đã biết.</a:t>
             </a:r>
           </a:p>
         </p:txBody>
@@ -3300,25 +3285,25 @@
           <a:lstStyle/>
           <a:p>
             <a:r>
-              <a:t>PHÁT HIỆN TRÔI (~2 phút). Nhấn ngay: các bộ phát hiện KHÔNG quan sát dữ liệu mà quan sát chuỗi sai số của mô hình.</a:t>
+              <a:t>Điểm đầu tiên cần lưu ý là các bộ phát hiện trôi không quan sát dữ liệu, mà quan sát chuỗi sai số của mô hình.</a:t>
             </a:r>
           </a:p>
           <a:p/>
           <a:p>
             <a:r>
-              <a:t>DDM và EDDM dùng ngưỡng mang tính kinh nghiệm. ADWIN là lựa chọn mặc định trên thực tế vì có bảo đảm lý thuyết: giữ một cửa sổ W, xét mọi cách cắt W thành W0·W1, và cắt khi hai nửa khác nhau quá ngưỡng; xác suất báo động giả bị chặn bởi δ.</a:t>
+              <a:t>DDM năm 2004 báo động khi tỷ lệ lỗi vượt quá mức thấp nhất từng ghi nhận một khoảng k lần độ lệch chuẩn. EDDM năm 2006 theo dõi khoảng cách giữa hai lỗi liên tiếp, và làm tốt hơn với trôi dần dần. Cả hai đều dùng ngưỡng mang tính kinh nghiệm.</a:t>
             </a:r>
           </a:p>
           <a:p/>
           <a:p>
             <a:r>
-              <a:t>Chi tiết đáng nói nếu có thời gian: ADWIN lưu cửa sổ dưới dạng exponential histogram nên bộ nhớ chỉ O(log W) thay vì O(W); và độ dài cửa sổ còn lại chính là ước lượng 'khái niệm hiện tại kéo dài bao xa về quá khứ'.</a:t>
+              <a:t>ADWIN năm 2007 là lựa chọn mặc định trên thực tế, vì nó có bảo đảm lý thuyết. Nó giữ một cửa sổ các quan sát gần nhất, xét mọi cách cắt cửa sổ đó thành hai nửa, và cắt bỏ nửa cũ khi trung bình hai nửa khác nhau quá một ngưỡng. Xác suất báo động giả bị chặn bởi tham số delta. Cửa sổ được lưu dưới dạng exponential histogram nên bộ nhớ chỉ là log của độ dài cửa sổ; và độ dài cửa sổ còn lại sau khi cắt chính là ước lượng cho câu hỏi khái niệm hiện tại kéo dài bao xa về quá khứ.</a:t>
             </a:r>
           </a:p>
           <a:p/>
           <a:p>
             <a:r>
-              <a:t>Câu chốt của slide, cũng là cầu nối sang phần 3: một bộ phát hiện đang hỏi 'chuỗi E_t này có thay đổi không' — tức bản thân nó đã là một phương pháp chuỗi thời gian, chỉ là không tự nhận.</a:t>
+              <a:t>Có một điều đáng suy nghĩ ở đây. Một bộ phát hiện trôi đang hỏi rằng chuỗi sai số theo thời gian này có thay đổi hay không. Tức là bản thân nó đã là một phương pháp chuỗi thời gian rồi, chỉ là không tự nhận như vậy. Đây chính là điểm bài báo ở phần ba khai thác.</a:t>
             </a:r>
           </a:p>
         </p:txBody>

--- a/data-drift/seminar.pptx
+++ b/data-drift/seminar.pptx
@@ -32,6 +32,7 @@
     <p:sldId id="280" r:id="rId31"/>
     <p:sldId id="281" r:id="rId32"/>
     <p:sldId id="282" r:id="rId33"/>
+    <p:sldId id="283" r:id="rId34"/>
   </p:sldIdLst>
   <p:sldSz cx="12191695" cy="6858000" type="screen4x3"/>
   <p:notesSz cx="6858000" cy="9144000"/>
@@ -1127,31 +1128,25 @@
           <a:lstStyle/>
           <a:p>
             <a:r>
-              <a:t>Quy trình đánh giá hiện nay có ba hạn chế.</a:t>
+              <a:t>Tôi nói kỹ hơn một chút về ba phép kiểm định này, vì chúng đại diện cho ba cách nghĩ khác nhau về cùng một tín hiệu.</a:t>
             </a:r>
           </a:p>
           <a:p/>
           <a:p>
             <a:r>
-              <a:t>Thứ nhất, dữ liệu tổng hợp chiếm đa số. Các luồng chuẩn thường chuyển giữa những khái niệm định sẵn tại những thời điểm cố định, với phân phối đơn giản và động lực trôi không thực tế. Chưa có bằng chứng cho thấy kết luận rút ra từ đó chuyển được sang dữ liệu thật.</a:t>
+              <a:t>DDM theo dõi trực tiếp tỷ lệ lỗi. Tại mỗi bước nó có tỷ lệ lỗi p chỉ số i và sai số chuẩn nhị thức s chỉ số i, bằng căn của p nhân một trừ p chia i. Nó ghi nhớ giá trị nhỏ nhất từng đạt được trong suốt luồng, và lấy đó làm mốc tham chiếu, với ý là mô hình khi khớp tốt nhất thì sai bao nhiêu. Khi tổng hiện tại vượt mốc đó ba lần độ lệch chuẩn thì báo trôi; ở mức hai lần thì mới chỉ là cảnh báo, và thường được dùng để bắt đầu gom dữ liệu cho mô hình thay thế. Cách này đơn giản và nhạy với trôi đột ngột, nhưng vì mốc tham chiếu là giá trị nhỏ nhất từng thấy nên nó không tự quên đi quá khứ.</a:t>
             </a:r>
           </a:p>
           <a:p/>
           <a:p>
             <a:r>
-              <a:t>Thứ hai, nhiều nghiên cứu đánh giá gián tiếp, tức lấy tiêu chí huấn luyện lại có cải thiện hay không. Cách này trộn lẫn chất lượng của bộ phát hiện với khả năng thích nghi của mô hình, và không cho biết bộ phát hiện chính xác đến đâu hay phát hiện nhanh đến đâu.</a:t>
+              <a:t>EDDM đổi đại lượng quan sát. Thay vì tỷ lệ lỗi, nó theo dõi khoảng cách giữa hai lỗi liên tiếp. Ý tưởng là khi mô hình đang tốt thì các lỗi thưa ra, khoảng cách giữa chúng lớn dần; còn khi khái niệm trôi thì các lỗi dồn lại gần nhau. Nó so tỷ số giữa giá trị hiện tại và giá trị lớn nhất từng đạt, và báo trôi khi tỷ số này tụt xuống dưới ngưỡng beta. Vì đo khoảng cách chứ không đo tỷ lệ, EDDM nhạy hơn với trôi dần dần, là trường hợp mà tỷ lệ lỗi thay đổi quá chậm để DDM kịp nhận ra.</a:t>
             </a:r>
           </a:p>
           <a:p/>
           <a:p>
             <a:r>
-              <a:t>Thứ ba, và nghiêm trọng nhất, là độ trễ nhãn. DDM, EDDM và ADWIN đều giả định nhãn có gần như ngay lập tức. Nhưng trong phát hiện gian lận, nhãn thật chỉ đến sau ba mươi đến một trăm tám mươi ngày. Ở dạng gốc, các phương pháp này không dùng được.</a:t>
-            </a:r>
-          </a:p>
-          <a:p/>
-          <a:p>
-            <a:r>
-              <a:t>Điều này cắt về cả hai phía. Nếu tín hiệu sai số không quan sát được trong nhiều tháng, thì không chỉ bộ phát hiện gặp khó — mọi phương pháp dựa vào sai số, kể cả phương pháp bám theo mà tôi sẽ trình bày ở phần sau, đều gặp khó y như vậy.</a:t>
+              <a:t>ADWIN khác hẳn hai cái trên ở chỗ nó không cần chọn trước kích thước cửa sổ. Nó giữ một cửa sổ các quan sát gần nhất, rồi xét mọi cách cắt cửa sổ đó thành hai phần, phần cũ và phần mới. Nếu trung bình của hai phần chênh nhau quá một ngưỡng epsilon thì nó kết luận rằng đã có thay đổi, và cắt bỏ phần cũ đi. Ngưỡng epsilon được tính từ phương sai trong cửa sổ và kích thước của hai phần, sao cho xác suất báo động giả bị chặn bởi delta. Đây là điểm mạnh của nó: có bảo đảm hình thức, và kích thước cửa sổ tự điều chỉnh theo dữ liệu thay vì do ta đặt tay.</a:t>
             </a:r>
           </a:p>
         </p:txBody>
@@ -1221,31 +1216,31 @@
           <a:lstStyle/>
           <a:p>
             <a:r>
-              <a:t>Sau khi phát hiện được trôi thì làm gì. Có ba cơ chế, và điều đáng nói là cơ chế nào khả dụng không phải do người thiết kế chọn, mà do mô hình được cấu tạo từ cái gì.</a:t>
+              <a:t>Quy trình đánh giá hiện nay có ba hạn chế.</a:t>
             </a:r>
           </a:p>
           <a:p/>
           <a:p>
             <a:r>
-              <a:t>Với k láng giềng gần nhất, mô hình chính là dữ liệu được lưu. Thích nghi nghĩa là thay dữ liệu cũ bằng dữ liệu mới. Đó là một thao tác thay thế, không có mức độ: ta không thể thay một chút.</a:t>
+              <a:t>Thứ nhất, dữ liệu tổng hợp chiếm đa số. Các luồng chuẩn thường chuyển giữa những khái niệm định sẵn tại những thời điểm cố định, với phân phối đơn giản và động lực trôi không thực tế. Chưa có bằng chứng cho thấy kết luận rút ra từ đó chuyển được sang dữ liệu thật.</a:t>
             </a:r>
           </a:p>
           <a:p/>
           <a:p>
             <a:r>
-              <a:t>Với cây Hoeffding, tham số là một cấu trúc rời rạc gồm các nút và các ngưỡng. Không tồn tại phép dịch chuyển nhỏ trên một cấu trúc như vậy. Cây chỉ có thể mọc thêm, hoặc bị phá đi rồi dựng lại từ đầu.</a:t>
+              <a:t>Thứ hai, nhiều nghiên cứu đánh giá gián tiếp, tức lấy tiêu chí huấn luyện lại có cải thiện hay không. Cách này trộn lẫn chất lượng của bộ phát hiện với khả năng thích nghi của mô hình, và không cho biết bộ phát hiện chính xác đến đâu hay phát hiện nhanh đến đâu.</a:t>
             </a:r>
           </a:p>
           <a:p/>
           <a:p>
             <a:r>
-              <a:t>Với hạ gradient ngẫu nhiên, tham số là một vector trong không gian liên tục, nên cộng thêm một lượng nhỏ là thao tác hoàn toàn hợp lệ.</a:t>
+              <a:t>Thứ ba, và nghiêm trọng nhất, là độ trễ nhãn. DDM, EDDM và ADWIN đều giả định nhãn có gần như ngay lập tức. Nhưng trong phát hiện gian lận, nhãn thật chỉ đến sau ba mươi đến một trăm tám mươi ngày. Ở dạng gốc, các phương pháp này không dùng được.</a:t>
             </a:r>
           </a:p>
           <a:p/>
           <a:p>
             <a:r>
-              <a:t>Nói cách khác, một cái cây không có đại lượng delta theta. Đây là tính chất cấu trúc, không cần thực nghiệm nào để chứng minh. Trong phần cài đặt của tôi, điều này hiện ra thành kiểu trả về của hàm: hàm theta_hat trả về một vector đối với SGD và PBF-SGD, và trả về None đối với kNN, SAMkNN, cây Hoeffding và rừng ngẫu nhiên. Đó không phải hàm chưa được cài đặt, mà là không tồn tại tham số nào để trả về.</a:t>
+              <a:t>Điều này cắt về cả hai phía. Nếu tín hiệu sai số không quan sát được trong nhiều tháng, thì không chỉ bộ phát hiện gặp khó — mọi phương pháp dựa vào sai số, kể cả phương pháp bám theo mà tôi sẽ trình bày ở phần sau, đều gặp khó y như vậy.</a:t>
             </a:r>
           </a:p>
         </p:txBody>
@@ -1315,7 +1310,31 @@
           <a:lstStyle/>
           <a:p>
             <a:r>
-              <a:t>Phần vừa rồi cho thấy có ba cơ chế thích nghi. Bài báo sau đây lập luận rằng cộng đồng nghiên cứu đã chọn nhầm cơ chế, và lý do nằm ngay trong giả định nền tảng.</a:t>
+              <a:t>Sau khi phát hiện được trôi thì làm gì. Có ba cơ chế, và điều đáng nói là cơ chế nào khả dụng không phải do người thiết kế chọn, mà do mô hình được cấu tạo từ cái gì.</a:t>
+            </a:r>
+          </a:p>
+          <a:p/>
+          <a:p>
+            <a:r>
+              <a:t>Với k láng giềng gần nhất, mô hình chính là dữ liệu được lưu. Thích nghi nghĩa là thay dữ liệu cũ bằng dữ liệu mới. Đó là một thao tác thay thế, không có mức độ: ta không thể thay một chút.</a:t>
+            </a:r>
+          </a:p>
+          <a:p/>
+          <a:p>
+            <a:r>
+              <a:t>Với cây Hoeffding, tham số là một cấu trúc rời rạc gồm các nút và các ngưỡng. Không tồn tại phép dịch chuyển nhỏ trên một cấu trúc như vậy. Cây chỉ có thể mọc thêm, hoặc bị phá đi rồi dựng lại từ đầu.</a:t>
+            </a:r>
+          </a:p>
+          <a:p/>
+          <a:p>
+            <a:r>
+              <a:t>Với hạ gradient ngẫu nhiên, tham số là một vector trong không gian liên tục, nên cộng thêm một lượng nhỏ là thao tác hoàn toàn hợp lệ.</a:t>
+            </a:r>
+          </a:p>
+          <a:p/>
+          <a:p>
+            <a:r>
+              <a:t>Nói cách khác, một cái cây không có đại lượng delta theta. Đây là tính chất cấu trúc, không cần thực nghiệm nào để chứng minh. Trong phần cài đặt của tôi, điều này hiện ra thành kiểu trả về của hàm: hàm theta_hat trả về một vector đối với SGD và PBF-SGD, và trả về None đối với kNN, SAMkNN, cây Hoeffding và rừng ngẫu nhiên. Đó không phải hàm chưa được cài đặt, mà là không tồn tại tham số nào để trả về.</a:t>
             </a:r>
           </a:p>
         </p:txBody>
@@ -1385,19 +1404,7 @@
           <a:lstStyle/>
           <a:p>
             <a:r>
-              <a:t>Lập luận bắt đầu từ một mâu thuẫn. Tài liệu trong lĩnh vực giả định rằng các mẫu là độc lập cùng phân phối ở trong mỗi khái niệm, rồi coi trôi là một sự kiện cần phát hiện để có thể khởi tạo lại một mô hình độc lập cùng phân phối. Nhưng trôi chính là sự thay đổi của khái niệm, nên giả định này tự mâu thuẫn với chính nó.</a:t>
-            </a:r>
-          </a:p>
-          <a:p/>
-          <a:p>
-            <a:r>
-              <a:t>Bổ đề 1 phát biểu rằng một luồng có trôi khái niệm thì tất yếu có phụ thuộc thời gian. Nếu thật sự độc lập thì xác suất của chỉ số khái niệm tại thời điểm t phải bằng xác suất đó khi đã biết chỉ số tại thời điểm trước. Đếm trực tiếp trên một luồng hai mươi bước với điểm đổi tại bước thứ mười, ta được 0,450 so với 0,000. Xác suất thứ hai bằng đúng không, bởi vì trôi đột ngột là không đảo ngược: một khi đã chuyển sang khái niệm mới thì không quay lại khái niệm cũ nữa.</a:t>
-            </a:r>
-          </a:p>
-          <a:p/>
-          <a:p>
-            <a:r>
-              <a:t>Có một phản biện tự nhiên: khi t đủ lớn thì chỉ số khái niệm trở thành hằng số, nên tính độc lập được khôi phục ở trong từng khái niệm. Câu trả lời nằm ở một điểm duy nhất: ta không quan sát được thời điểm đổi tau. Nếu biết tau thì ta cắt luồng tại đó, mỗi nửa là độc lập cùng phân phối, và toàn bộ bài báo sụp đổ. Vì không biết, một bước nhảy tức thời giữa hai thời điểm lại biểu hiện thành phụ thuộc thời gian kéo dài trong tín hiệu sai số. Chính sự không quan sát được của tau mới biến một bước nhảy thành một chuỗi thời gian.</a:t>
+              <a:t>Phần vừa rồi cho thấy có ba cơ chế thích nghi. Bài báo sau đây lập luận rằng cộng đồng nghiên cứu đã chọn nhầm cơ chế, và lý do nằm ngay trong giả định nền tảng.</a:t>
             </a:r>
           </a:p>
         </p:txBody>
@@ -1467,31 +1474,19 @@
           <a:lstStyle/>
           <a:p>
             <a:r>
-              <a:t>Từ đó bài báo diễn đạt lại bài toán. Mỗi khái niệm là một điểm theta trong không gian tham số, và trôi trở thành một quỹ đạo đi qua không gian đó.</a:t>
+              <a:t>Lập luận bắt đầu từ một mâu thuẫn. Tài liệu trong lĩnh vực giả định rằng các mẫu là độc lập cùng phân phối ở trong mỗi khái niệm, rồi coi trôi là một sự kiện cần phát hiện để có thể khởi tạo lại một mô hình độc lập cùng phân phối. Nhưng trôi chính là sự thay đổi của khái niệm, nên giả định này tự mâu thuẫn với chính nó.</a:t>
             </a:r>
           </a:p>
           <a:p/>
           <a:p>
             <a:r>
-              <a:t>Với trôi đột ngột, theta được lấy mẫu lại từ phân phối tiên nghiệm, nên không có quỹ đạo, chỉ có một điểm gián đoạn. Với trôi tăng dần, theta tại thời điểm t bằng ma trận quay nhân với theta tại thời điểm trước, góc quay là 0,01 radian mỗi bước; đây là một quỹ đạo thật sự. Với trôi dần dần, theta chỉ nhảy qua lại giữa hai điểm cố định, cái biến thiên là trọng số pha trộn, nên không có gì để bám theo; bài báo thừa nhận điều này và để lại cho nghiên cứu sau. Với trôi lặp lại, quỹ đạo là một chu trình.</a:t>
+              <a:t>Bổ đề 1 phát biểu rằng một luồng có trôi khái niệm thì tất yếu có phụ thuộc thời gian. Nếu thật sự độc lập thì xác suất của chỉ số khái niệm tại thời điểm t phải bằng xác suất đó khi đã biết chỉ số tại thời điểm trước. Đếm trực tiếp trên một luồng hai mươi bước với điểm đổi tại bước thứ mười, ta được 0,450 so với 0,000. Xác suất thứ hai bằng đúng không, bởi vì trôi đột ngột là không đảo ngược: một khi đã chuyển sang khái niệm mới thì không quay lại khái niệm cũ nữa.</a:t>
             </a:r>
           </a:p>
           <a:p/>
           <a:p>
             <a:r>
-              <a:t>Bước suy luận then chốt là: nếu trôi là một quỹ đạo thì về nguyên tắc nó dự báo được. Khi đó, theo nguyên văn bài báo, giải bài toán trôi khái niệm đồng nhất với giải bài toán dự báo theta tại thời điểm t.</a:t>
-            </a:r>
-          </a:p>
-          <a:p/>
-          <a:p>
-            <a:r>
-              <a:t>Và đơn thuốc là công thức ở cuối slide: theta mới bằng theta cũ cộng lambda nhân gradient của sai số. Không cần bộ phát hiện, không cần khởi tạo lại mô hình. Chỉ kèm đúng một điều kiện, là lambda không được giảm dần về không — tôi sẽ kiểm chứng điều kiện này bằng thực nghiệm.</a:t>
-            </a:r>
-          </a:p>
-          <a:p/>
-          <a:p>
-            <a:r>
-              <a:t>Cần nói thêm cho công bằng: đây vẫn là bám theo có tính phản ứng, chưa phải dự báo thật sự. Bài báo lập luận cho việc dự báo nhưng không xây dựng nó. Ai đã xây dựng thì tôi sẽ nói ở phần năm.</a:t>
+              <a:t>Có một phản biện tự nhiên: khi t đủ lớn thì chỉ số khái niệm trở thành hằng số, nên tính độc lập được khôi phục ở trong từng khái niệm. Câu trả lời nằm ở một điểm duy nhất: ta không quan sát được thời điểm đổi tau. Nếu biết tau thì ta cắt luồng tại đó, mỗi nửa là độc lập cùng phân phối, và toàn bộ bài báo sụp đổ. Vì không biết, một bước nhảy tức thời giữa hai thời điểm lại biểu hiện thành phụ thuộc thời gian kéo dài trong tín hiệu sai số. Chính sự không quan sát được của tau mới biến một bước nhảy thành một chuỗi thời gian.</a:t>
             </a:r>
           </a:p>
         </p:txBody>
@@ -1561,7 +1556,31 @@
           <a:lstStyle/>
           <a:p>
             <a:r>
-              <a:t>Lập luận đã rõ. Phần này tôi kiểm chứng nó, bằng cách cài đặt lại toàn bộ các phương pháp của bài báo và chạy trên chính dữ liệu mà bài báo dùng.</a:t>
+              <a:t>Từ đó bài báo diễn đạt lại bài toán. Mỗi khái niệm là một điểm theta trong không gian tham số, và trôi trở thành một quỹ đạo đi qua không gian đó.</a:t>
+            </a:r>
+          </a:p>
+          <a:p/>
+          <a:p>
+            <a:r>
+              <a:t>Với trôi đột ngột, theta được lấy mẫu lại từ phân phối tiên nghiệm, nên không có quỹ đạo, chỉ có một điểm gián đoạn. Với trôi tăng dần, theta tại thời điểm t bằng ma trận quay nhân với theta tại thời điểm trước, góc quay là 0,01 radian mỗi bước; đây là một quỹ đạo thật sự. Với trôi dần dần, theta chỉ nhảy qua lại giữa hai điểm cố định, cái biến thiên là trọng số pha trộn, nên không có gì để bám theo; bài báo thừa nhận điều này và để lại cho nghiên cứu sau. Với trôi lặp lại, quỹ đạo là một chu trình.</a:t>
+            </a:r>
+          </a:p>
+          <a:p/>
+          <a:p>
+            <a:r>
+              <a:t>Bước suy luận then chốt là: nếu trôi là một quỹ đạo thì về nguyên tắc nó dự báo được. Khi đó, theo nguyên văn bài báo, giải bài toán trôi khái niệm đồng nhất với giải bài toán dự báo theta tại thời điểm t.</a:t>
+            </a:r>
+          </a:p>
+          <a:p/>
+          <a:p>
+            <a:r>
+              <a:t>Và đơn thuốc là công thức ở cuối slide: theta mới bằng theta cũ cộng lambda nhân gradient của sai số. Không cần bộ phát hiện, không cần khởi tạo lại mô hình. Chỉ kèm đúng một điều kiện, là lambda không được giảm dần về không — tôi sẽ kiểm chứng điều kiện này bằng thực nghiệm.</a:t>
+            </a:r>
+          </a:p>
+          <a:p/>
+          <a:p>
+            <a:r>
+              <a:t>Cần nói thêm cho công bằng: đây vẫn là bám theo có tính phản ứng, chưa phải dự báo thật sự. Bài báo lập luận cho việc dự báo nhưng không xây dựng nó. Ai đã xây dựng thì tôi sẽ nói ở phần năm.</a:t>
             </a:r>
           </a:p>
         </p:txBody>
@@ -1631,25 +1650,7 @@
           <a:lstStyle/>
           <a:p>
             <a:r>
-              <a:t>Dữ liệu tôi lấy từ đúng kho mà bài báo trích dẫn, tức kho MOA của Waikato. Số mẫu khớp chính xác: Electricity có 45.312 mẫu và CoverType có 581.012 mẫu, đúng như bài báo ghi. Đây là kiểm tra đầu tiên cho thấy tôi đang dùng đúng tập dữ liệu.</a:t>
-            </a:r>
-          </a:p>
-          <a:p/>
-          <a:p>
-            <a:r>
-              <a:t>Cả sáu phương pháp trong Bảng 2 đều được cài đặt lại, chứ không thay thế bằng mô hình tương đương. Cụ thể là cây Hoeffding thật, với phép tách theo cận Hoeffding, bộ ước lượng Gauss cho thuộc tính số và naive Bayes ở lá; ADWIN2 thật với exponential histogram; và rừng ngẫu nhiên thích nghi với một trăm cây, không gian con ngẫu nhiên và lấy mẫu Poisson với lambda bằng sáu. Toàn bộ viết bằng thư viện chuẩn của Python, không dùng scikit-multiflow, không dùng numpy. Nhờ vậy mọi con số đều truy ngược được về một dòng mã đọc được.</a:t>
-            </a:r>
-          </a:p>
-          <a:p/>
-          <a:p>
-            <a:r>
-              <a:t>ADWIN2 được kiểm chứng độc lập trước khi đem dùng. Trên một luồng nhảy từ 0,2 lên 0,8 tại bước một nghìn, nó phát hiện sau 55 mẫu. Trên bốn nghìn mẫu ở trạng thái dừng, nó không đưa ra báo động giả nào.</a:t>
-            </a:r>
-          </a:p>
-          <a:p/>
-          <a:p>
-            <a:r>
-              <a:t>Độ chính xác chỉ được tính từ mốc tau không, bằng một phần mười độ dài luồng, trở đi — đúng như Bảng 1 quy định và Bảng 5 xác nhận. Nếu tính cả giai đoạn khởi động thì mọi phương pháp đều bị trừ điểm oan vì lúc đó mô hình chưa học được gì.</a:t>
+              <a:t>Lập luận đã rõ. Phần này tôi kiểm chứng nó, bằng cách cài đặt lại toàn bộ các phương pháp của bài báo và chạy trên chính dữ liệu mà bài báo dùng.</a:t>
             </a:r>
           </a:p>
         </p:txBody>
@@ -1719,31 +1720,25 @@
           <a:lstStyle/>
           <a:p>
             <a:r>
-              <a:t>Đây là bảng kết quả, mỗi ô ghi con số của tôi trước và con số bài báo sau.</a:t>
+              <a:t>Dữ liệu tôi lấy từ đúng kho mà bài báo trích dẫn, tức kho MOA của Waikato. Số mẫu khớp chính xác: Electricity có 45.312 mẫu và CoverType có 581.012 mẫu, đúng như bài báo ghi. Đây là kiểm tra đầu tiên cho thấy tôi đang dùng đúng tập dữ liệu.</a:t>
             </a:r>
           </a:p>
           <a:p/>
           <a:p>
             <a:r>
-              <a:t>Electricity là hàng sạch nhất. SAMkNN đạt 78,0 so với 79,8, lệch 1,8 điểm. Rừng ngẫu nhiên đạt 84,5 so với 86,2, lệch 1,7 điểm, với đủ một trăm cây như bài báo. Hai trên ba phương pháp nâng cao tái lập được trong phạm vi hai điểm, đủ để tin rằng bản cài đặt là đúng.</a:t>
+              <a:t>Cả sáu phương pháp trong Bảng 2 đều được cài đặt lại, chứ không thay thế bằng mô hình tương đương. Cụ thể là cây Hoeffding thật, với phép tách theo cận Hoeffding, bộ ước lượng Gauss cho thuộc tính số và naive Bayes ở lá; ADWIN2 thật với exponential histogram; và rừng ngẫu nhiên thích nghi với một trăm cây, không gian con ngẫu nhiên và lấy mẫu Poisson với lambda bằng sáu. Toàn bộ viết bằng thư viện chuẩn của Python, không dùng scikit-multiflow, không dùng numpy. Nhờ vậy mọi con số đều truy ngược được về một dòng mã đọc được.</a:t>
             </a:r>
           </a:p>
           <a:p/>
           <a:p>
             <a:r>
-              <a:t>Ở luồng RTG, PBF-SGD của tôi đạt 82,8 trong khi bài báo báo cáo 81,8, tức là vượt. Và thứ hạng mà bài báo công bố ở hàng này, PBF-SGD dẫn đầu, cũng được giữ nguyên.</a:t>
+              <a:t>ADWIN2 được kiểm chứng độc lập trước khi đem dùng. Trên một luồng nhảy từ 0,2 lên 0,8 tại bước một nghìn, nó phát hiện sau 55 mẫu. Trên bốn nghìn mẫu ở trạng thái dừng, nó không đưa ra báo động giả nào.</a:t>
             </a:r>
           </a:p>
           <a:p/>
           <a:p>
             <a:r>
-              <a:t>Có hai sai lệch có hệ thống, cả hai đều truy được nguyên nhân. Thứ nhất, PBF-SGD trên Electricity lệch 5,2 điểm; nguyên nhân là bậc đa thức chứ không phải tốc độ học, tôi sẽ chứng minh ở slide sau. Thứ hai, SAMkNN lệch theo thứ tự tăng dần: 1,8 rồi 7,7 rồi 14,9. Chính thứ tự này là bằng chứng. Bản cài đặt của tôi nén bộ nhớ dài hạn bằng cơ chế FIFO đơn giản, trong khi Losing và cộng sự dùng phân cụm kMeans++. Vì vậy sai lệch phải lớn dần ở những luồng mà bộ nhớ dài hạn gánh nhiều việc hơn, và thực tế đúng như vậy. Do đó không nên trích dẫn con số SAMkNN này như con số của SAMkNN gốc.</a:t>
-            </a:r>
-          </a:p>
-          <a:p/>
-          <a:p>
-            <a:r>
-              <a:t>Hàng CoverType không so sánh được, vì bài báo phân loại đủ bảy lớp còn tôi rút về bài toán nhị phân một chống tất cả trên một tập con. Tôi để ở đây chỉ để xếp hạng tương đối giữa các phương pháp.</a:t>
+              <a:t>Độ chính xác chỉ được tính từ mốc tau không, bằng một phần mười độ dài luồng, trở đi — đúng như Bảng 1 quy định và Bảng 5 xác nhận. Nếu tính cả giai đoạn khởi động thì mọi phương pháp đều bị trừ điểm oan vì lúc đó mô hình chưa học được gì.</a:t>
             </a:r>
           </a:p>
         </p:txBody>
@@ -1813,31 +1808,31 @@
           <a:lstStyle/>
           <a:p>
             <a:r>
-              <a:t>Bài báo nêu đúng một điều kiện cho phương pháp của mình: không được để tốc độ học lambda giảm dần về không, với lý do là mô hình sẽ phản ứng ngày càng chậm với trôi. Bài báo không có thực nghiệm nào tách riêng điều kiện này, nên tôi làm thử.</a:t>
+              <a:t>Đây là bảng kết quả, mỗi ô ghi con số của tôi trước và con số bài báo sau.</a:t>
             </a:r>
           </a:p>
           <a:p/>
           <a:p>
             <a:r>
-              <a:t>Kết quả là hình phạt lớn nhất xảy ra sau trôi đột ngột, mất 18,6 điểm độ chính xác, và gần như bằng không dưới trôi kéo dài, chỉ mất 0,8 điểm. Điều này ngược với cách diễn đạt của bài báo, vốn gợi ý rằng trôi liên tục mới là nơi một mô hình đóng băng chịu thiệt nhiều nhất.</a:t>
+              <a:t>Electricity là hàng sạch nhất. SAMkNN đạt 78,0 so với 79,8, lệch 1,8 điểm. Rừng ngẫu nhiên đạt 84,5 so với 86,2, lệch 1,7 điểm, với đủ một trăm cây như bài báo. Hai trên ba phương pháp nâng cao tái lập được trong phạm vi hai điểm, đủ để tin rằng bản cài đặt là đúng.</a:t>
             </a:r>
           </a:p>
           <a:p/>
           <a:p>
             <a:r>
-              <a:t>Cơ chế giải thích như sau. Dưới trôi kéo dài, khái niệm quay 0,01 radian mỗi bước, tức là di chuyển nhanh hơn mọi bước cập nhật cố định; ngay cả lambda hằng số cũng chỉ đạt 88,1 điểm. Đã không bám được thì việc giảm lambda cũng chẳng làm mất thêm gì mấy. Ngược lại, sau khi khái niệm bị lấy mẫu lại hoàn toàn, một lambda còn sống thì học lại được khái niệm mới, còn lambda đã đóng băng thì không; nên mất trọn 18,6 điểm.</a:t>
+              <a:t>Ở luồng RTG, PBF-SGD của tôi đạt 82,8 trong khi bài báo báo cáo 81,8, tức là vượt. Và thứ hạng mà bài báo công bố ở hàng này, PBF-SGD dẫn đầu, cũng được giữ nguyên.</a:t>
             </a:r>
           </a:p>
           <a:p/>
           <a:p>
             <a:r>
-              <a:t>Có thể hỏi liệu đây có phải do lambda ban đầu bằng 0,01 là quá nhỏ hay không. Tôi đã kiểm tra trên dải năm mươi lần, với lambda ban đầu bằng 0,01, 0,1 và 0,5. Hình phạt ở trôi kéo dài giữ nguyên mức nhỏ, lần lượt 1,0, 1,2 và 1,4 điểm. Vậy đây không phải hiện tượng giả do chọn tham số.</a:t>
+              <a:t>Có hai sai lệch có hệ thống, cả hai đều truy được nguyên nhân. Thứ nhất, PBF-SGD trên Electricity lệch 5,2 điểm; nguyên nhân là bậc đa thức chứ không phải tốc độ học, tôi sẽ chứng minh ở slide sau. Thứ hai, SAMkNN lệch theo thứ tự tăng dần: 1,8 rồi 7,7 rồi 14,9. Chính thứ tự này là bằng chứng. Bản cài đặt của tôi nén bộ nhớ dài hạn bằng cơ chế FIFO đơn giản, trong khi Losing và cộng sự dùng phân cụm kMeans++. Vì vậy sai lệch phải lớn dần ở những luồng mà bộ nhớ dài hạn gánh nhiều việc hơn, và thực tế đúng như vậy. Do đó không nên trích dẫn con số SAMkNN này như con số của SAMkNN gốc.</a:t>
             </a:r>
           </a:p>
           <a:p/>
           <a:p>
             <a:r>
-              <a:t>Kết luận là điều kiện này thực chất nói về khả năng phục hồi sau một gián đoạn, chứ không phải về việc bám theo trôi liên tục.</a:t>
+              <a:t>Hàng CoverType không so sánh được, vì bài báo phân loại đủ bảy lớp còn tôi rút về bài toán nhị phân một chống tất cả trên một tập con. Tôi để ở đây chỉ để xếp hạng tương đối giữa các phương pháp.</a:t>
             </a:r>
           </a:p>
         </p:txBody>
@@ -1907,31 +1902,31 @@
           <a:lstStyle/>
           <a:p>
             <a:r>
-              <a:t>Nhìn vào hình, điều đập vào mắt là đường kNN gần như nằm ngang.</a:t>
+              <a:t>Bài báo nêu đúng một điều kiện cho phương pháp của mình: không được để tốc độ học lambda giảm dần về không, với lý do là mô hình sẽ phản ứng ngày càng chậm với trôi. Bài báo không có thực nghiệm nào tách riêng điều kiện này, nên tôi làm thử.</a:t>
             </a:r>
           </a:p>
           <a:p/>
           <a:p>
             <a:r>
-              <a:t>Cụ thể, kNN dao động 0,6 điểm qua cả năm kịch bản, từ 72,7 đến 73,3. Trong khi đó SGD dao động 9,2 điểm, từ 88,1 đến 97,3.</a:t>
+              <a:t>Kết quả là hình phạt lớn nhất xảy ra sau trôi đột ngột, mất 18,6 điểm độ chính xác, và gần như bằng không dưới trôi kéo dài, chỉ mất 0,8 điểm. Điều này ngược với cách diễn đạt của bài báo, vốn gợi ý rằng trôi liên tục mới là nơi một mô hình đóng băng chịu thiệt nhiều nhất.</a:t>
             </a:r>
           </a:p>
           <a:p/>
           <a:p>
             <a:r>
-              <a:t>Lý do là trôi hầu như không làm kNN tệ đi, bởi vì kNN chưa bao giờ tích lũy được gì để trôi làm hỏng. Mô hình của nó chính là một trăm mẫu gần nhất, mà một trăm mẫu gần nhất thì luôn thuộc về khái niệm hiện tại, dù có trôi hay không.</a:t>
+              <a:t>Cơ chế giải thích như sau. Dưới trôi kéo dài, khái niệm quay 0,01 radian mỗi bước, tức là di chuyển nhanh hơn mọi bước cập nhật cố định; ngay cả lambda hằng số cũng chỉ đạt 88,1 điểm. Đã không bám được thì việc giảm lambda cũng chẳng làm mất thêm gì mấy. Ngược lại, sau khi khái niệm bị lấy mẫu lại hoàn toàn, một lambda còn sống thì học lại được khái niệm mới, còn lambda đã đóng băng thì không; nên mất trọn 18,6 điểm.</a:t>
             </a:r>
           </a:p>
           <a:p/>
           <a:p>
             <a:r>
-              <a:t>Bài báo đưa ra hai nhận xét riêng biệt. Ở mục 7, nó nói năng lực dự báo của phương pháp bộ đệm bị chặn bởi kích thước bộ đệm. Ở Hình 5a, nó nhận xét rằng kNN không có xu hướng đi lên ngay cả khi khái niệm đứng yên và dữ liệu cứ tích lũy thêm. Thực ra đây là cùng một tính chất: cái gì không tích lũy được thì vừa bị chặn trên, vừa không bị trôi làm hại. Trần năng lực và tính trơ trước trôi là hai mặt của một điều.</a:t>
+              <a:t>Có thể hỏi liệu đây có phải do lambda ban đầu bằng 0,01 là quá nhỏ hay không. Tôi đã kiểm tra trên dải năm mươi lần, với lambda ban đầu bằng 0,01, 0,1 và 0,5. Hình phạt ở trôi kéo dài giữ nguyên mức nhỏ, lần lượt 1,0, 1,2 và 1,4 điểm. Vậy đây không phải hiện tượng giả do chọn tham số.</a:t>
             </a:r>
           </a:p>
           <a:p/>
           <a:p>
             <a:r>
-              <a:t>SAMkNN khắc phục đúng điểm này bằng cách thêm một bộ nhớ dài hạn, và đó là lý do nó tốt hơn hẳn kNN thuần trong bảng kết quả.</a:t>
+              <a:t>Kết luận là điều kiện này thực chất nói về khả năng phục hồi sau một gián đoạn, chứ không phải về việc bám theo trôi liên tục.</a:t>
             </a:r>
           </a:p>
         </p:txBody>
@@ -2071,31 +2066,31 @@
           <a:lstStyle/>
           <a:p>
             <a:r>
-              <a:t>Trong quá trình tái lập, tôi gặp ba tham số mà bài báo không ghi rõ.</a:t>
+              <a:t>Nhìn vào hình, điều đập vào mắt là đường kNN gần như nằm ngang.</a:t>
             </a:r>
           </a:p>
           <a:p/>
           <a:p>
             <a:r>
-              <a:t>Quan trọng nhất là số chiều của dữ liệu tổng hợp. SGD đạt 57,7 điểm khi số chiều bằng hai, 74,5 khi bằng năm, 83,1 khi bằng mười, và 92,2 khi bằng hai mươi. Biên độ này lớn hơn chênh lệch giữa bất kỳ hai phương pháp nào trong bảng kết quả.</a:t>
+              <a:t>Cụ thể, kNN dao động 0,6 điểm qua cả năm kịch bản, từ 72,7 đến 73,3. Trong khi đó SGD dao động 9,2 điểm, từ 88,1 đến 97,3.</a:t>
             </a:r>
           </a:p>
           <a:p/>
           <a:p>
             <a:r>
-              <a:t>Hệ quả là hàng Synthetic của bài báo, từ 93,6 đến 96,0 điểm, chỉ đạt được khi số chiều lớn. Nó không đạt được ở số chiều bằng hai, mà số chiều bằng hai lại chính là cái Hình 4 của bài báo vẽ ra. Vậy ai trích dẫn cột đó nên biết rằng nó phụ thuộc vào một tham số tự do không được công bố.</a:t>
+              <a:t>Lý do là trôi hầu như không làm kNN tệ đi, bởi vì kNN chưa bao giờ tích lũy được gì để trôi làm hỏng. Mô hình của nó chính là một trăm mẫu gần nhất, mà một trăm mẫu gần nhất thì luôn thuộc về khái niệm hiện tại, dù có trôi hay không.</a:t>
             </a:r>
           </a:p>
           <a:p/>
           <a:p>
             <a:r>
-              <a:t>Nguyên nhân có thể là phép quay tôi dùng là quay Givens trong một mặt phẳng tọa độ, nên nó chỉ làm nhiễu hai trong số các thành phần của theta; số chiều càng lớn thì càng nhiều phần của theta sống sót sau mỗi bước. Cũng có thể bài báo hiểu cụm ma trận quay góc 0,01 theo nghĩa khác, chẳng hạn một phép quay ngẫu nhiên toàn phần, và khi đó sự phụ thuộc vào số chiều sẽ biến mất. Văn bản bài báo không cho phép kết luận, nên tôi nêu đây như một điểm chưa giải quyết.</a:t>
+              <a:t>Bài báo đưa ra hai nhận xét riêng biệt. Ở mục 7, nó nói năng lực dự báo của phương pháp bộ đệm bị chặn bởi kích thước bộ đệm. Ở Hình 5a, nó nhận xét rằng kNN không có xu hướng đi lên ngay cả khi khái niệm đứng yên và dữ liệu cứ tích lũy thêm. Thực ra đây là cùng một tính chất: cái gì không tích lũy được thì vừa bị chặn trên, vừa không bị trôi làm hại. Trần năng lực và tính trơ trước trôi là hai mặt của một điều.</a:t>
             </a:r>
           </a:p>
           <a:p/>
           <a:p>
             <a:r>
-              <a:t>Còn một quan sát khá bất ngờ. Trên luồng Synthetic, SGD thuần đạt 92,2 điểm, còn PBF-SGD chỉ đạt 88,5. Nghĩa là khai triển cơ sở làm kết quả tệ đi. Lý do là khái niệm ở luồng đó là một siêu phẳng theta chuyển vị nhân x bằng không, tức là tuyến tính theo định nghĩa. Một cơ sở đa thức bậc ba thêm vào 1.770 tham số, mà những tham số này chỉ đóng góp phương sai chứ không thêm năng lực biểu diễn nào. Khai triển cơ sở là một canh bạc đặt vào tính phi tuyến, và đây đúng là ô mà canh bạc ấy chắc chắn thua.</a:t>
+              <a:t>SAMkNN khắc phục đúng điểm này bằng cách thêm một bộ nhớ dài hạn, và đó là lý do nó tốt hơn hẳn kNN thuần trong bảng kết quả.</a:t>
             </a:r>
           </a:p>
         </p:txBody>
@@ -2165,7 +2160,31 @@
           <a:lstStyle/>
           <a:p>
             <a:r>
-              <a:t>Bài báo năm 2018 đề xuất dự báo theta nhưng không xây dựng nó. Phần này tôi xem điều gì đã xảy ra sau đó.</a:t>
+              <a:t>Trong quá trình tái lập, tôi gặp ba tham số mà bài báo không ghi rõ.</a:t>
+            </a:r>
+          </a:p>
+          <a:p/>
+          <a:p>
+            <a:r>
+              <a:t>Quan trọng nhất là số chiều của dữ liệu tổng hợp. SGD đạt 57,7 điểm khi số chiều bằng hai, 74,5 khi bằng năm, 83,1 khi bằng mười, và 92,2 khi bằng hai mươi. Biên độ này lớn hơn chênh lệch giữa bất kỳ hai phương pháp nào trong bảng kết quả.</a:t>
+            </a:r>
+          </a:p>
+          <a:p/>
+          <a:p>
+            <a:r>
+              <a:t>Hệ quả là hàng Synthetic của bài báo, từ 93,6 đến 96,0 điểm, chỉ đạt được khi số chiều lớn. Nó không đạt được ở số chiều bằng hai, mà số chiều bằng hai lại chính là cái Hình 4 của bài báo vẽ ra. Vậy ai trích dẫn cột đó nên biết rằng nó phụ thuộc vào một tham số tự do không được công bố.</a:t>
+            </a:r>
+          </a:p>
+          <a:p/>
+          <a:p>
+            <a:r>
+              <a:t>Nguyên nhân có thể là phép quay tôi dùng là quay Givens trong một mặt phẳng tọa độ, nên nó chỉ làm nhiễu hai trong số các thành phần của theta; số chiều càng lớn thì càng nhiều phần của theta sống sót sau mỗi bước. Cũng có thể bài báo hiểu cụm ma trận quay góc 0,01 theo nghĩa khác, chẳng hạn một phép quay ngẫu nhiên toàn phần, và khi đó sự phụ thuộc vào số chiều sẽ biến mất. Văn bản bài báo không cho phép kết luận, nên tôi nêu đây như một điểm chưa giải quyết.</a:t>
+            </a:r>
+          </a:p>
+          <a:p/>
+          <a:p>
+            <a:r>
+              <a:t>Còn một quan sát khá bất ngờ. Trên luồng Synthetic, SGD thuần đạt 92,2 điểm, còn PBF-SGD chỉ đạt 88,5. Nghĩa là khai triển cơ sở làm kết quả tệ đi. Lý do là khái niệm ở luồng đó là một siêu phẳng theta chuyển vị nhân x bằng không, tức là tuyến tính theo định nghĩa. Một cơ sở đa thức bậc ba thêm vào 1.770 tham số, mà những tham số này chỉ đóng góp phương sai chứ không thêm năng lực biểu diễn nào. Khai triển cơ sở là một canh bạc đặt vào tính phi tuyến, và đây đúng là ô mà canh bạc ấy chắc chắn thua.</a:t>
             </a:r>
           </a:p>
         </p:txBody>
@@ -2235,31 +2254,7 @@
           <a:lstStyle/>
           <a:p>
             <a:r>
-              <a:t>Các công trình sau này chia thành bốn hướng.</a:t>
-            </a:r>
-          </a:p>
-          <a:p/>
-          <a:p>
-            <a:r>
-              <a:t>Hướng chuẩn hóa loại bỏ sự dịch chuyển của phân phối biên và để nguyên phân phối có điều kiện; đại diện là RevIN và SAN. Hướng nhanh chậm cân bằng giữa thích nghi nhanh với dữ liệu mới và nhớ lại các mẫu cũ; đại diện là FSNet và OneNet. Hướng bể khái niệm giữ một mô hình cho mỗi khái niệm rồi chọn mô hình gần nhất với mẫu hiện tại; đại diện là CEP, dùng cho trôi lặp lại.</a:t>
-            </a:r>
-          </a:p>
-          <a:p/>
-          <a:p>
-            <a:r>
-              <a:t>Ba hướng này đều mang tính phản ứng. Chỉ hướng thứ tư, với công trình Proceed tại KDD 2025, mới làm đúng điều Read lập luận. Proceed ước lượng độ trôi giữa dữ liệu huấn luyện gần nhất và mẫu kiểm tra hiện tại, rồi dùng một bộ sinh được học để chuyển ước lượng đó thành điều chỉnh tham số. Tức là nó học hẳn một ánh xạ từ dịch chuyển trong không gian khái niệm sang dịch chuyển trong không gian tham số. Bộ sinh này được huấn luyện trước trên nhiều kiểu trôi tổng hợp khác nhau để tổng quát hóa tốt hơn.</a:t>
-            </a:r>
-          </a:p>
-          <a:p/>
-          <a:p>
-            <a:r>
-              <a:t>Read lập luận rằng giải bài toán trôi đồng nghĩa với dự báo theta, nhưng ông không xây dựng. Bảy năm sau, Proceed xây dựng đúng ánh xạ đó, theo đúng hướng ông đề xuất. Đây là lý do bài báo 2018 vẫn đáng đọc.</a:t>
-            </a:r>
-          </a:p>
-          <a:p/>
-          <a:p>
-            <a:r>
-              <a:t>Cần phân biệt với động lượng trong tối ưu: động lượng chỉ ngoại suy tuyến tính trên gradient, còn Proceed học hẳn một ánh xạ có tham số.</a:t>
+              <a:t>Bài báo năm 2018 đề xuất dự báo theta nhưng không xây dựng nó. Phần này tôi xem điều gì đã xảy ra sau đó.</a:t>
             </a:r>
           </a:p>
         </p:txBody>
@@ -2329,31 +2324,31 @@
           <a:lstStyle/>
           <a:p>
             <a:r>
-              <a:t>Với mô hình nền tảng cho chuỗi thời gian, như Chronos hay Moirai, trôi khái niệm không biến mất; nó chỉ đổi vị trí.</a:t>
+              <a:t>Các công trình sau này chia thành bốn hướng.</a:t>
             </a:r>
           </a:p>
           <a:p/>
           <a:p>
             <a:r>
-              <a:t>Các mô hình này được huấn luyện trước trên kho dữ liệu rất lớn và dùng ở chế độ zero-shot, tức không huấn luyện lại trên miền đích. Nhưng dữ liệu luồng thì vẫn trôi như thường.</a:t>
+              <a:t>Hướng chuẩn hóa loại bỏ sự dịch chuyển của phân phối biên và để nguyên phân phối có điều kiện; đại diện là RevIN và SAN. Hướng nhanh chậm cân bằng giữa thích nghi nhanh với dữ liệu mới và nhớ lại các mẫu cũ; đại diện là FSNet và OneNet. Hướng bể khái niệm giữ một mô hình cho mỗi khái niệm rồi chọn mô hình gần nhất với mẫu hiện tại; đại diện là CEP, dùng cho trôi lặp lại.</a:t>
             </a:r>
           </a:p>
           <a:p/>
           <a:p>
             <a:r>
-              <a:t>Hướng thứ nhất là thích nghi hộp đen. Nếu mô hình được phục vụ qua một API thương mại thì ta không thể sửa trọng số. Công trình gần đây thích nghi bằng cách học cấu trúc sai số của mô hình theo ngữ cảnh, rồi hiệu chỉnh đầu ra dựa trên cấu trúc đó.</a:t>
+              <a:t>Ba hướng này đều mang tính phản ứng. Chỉ hướng thứ tư, với công trình Proceed tại KDD 2025, mới làm đúng điều Read lập luận. Proceed ước lượng độ trôi giữa dữ liệu huấn luyện gần nhất và mẫu kiểm tra hiện tại, rồi dùng một bộ sinh được học để chuyển ước lượng đó thành điều chỉnh tham số. Tức là nó học hẳn một ánh xạ từ dịch chuyển trong không gian khái niệm sang dịch chuyển trong không gian tham số. Bộ sinh này được huấn luyện trước trên nhiều kiểu trôi tổng hợp khác nhau để tổng quát hóa tốt hơn.</a:t>
             </a:r>
           </a:p>
           <a:p/>
           <a:p>
             <a:r>
-              <a:t>Hướng thứ hai là đưa giả định trôi vào ngay trong tiên nghiệm. Drift-Resilient TabPFN tại NeurIPS 2024 xây dựng tiên nghiệm học trong ngữ cảnh với giả định rằng mô hình sinh dữ liệu thay đổi theo thời gian, nhờ đó mô hình học được cách ước lượng, thích nghi và ngoại suy sự thay đổi đó.</a:t>
+              <a:t>Read lập luận rằng giải bài toán trôi đồng nghĩa với dự báo theta, nhưng ông không xây dựng. Bảy năm sau, Proceed xây dựng đúng ánh xạ đó, theo đúng hướng ông đề xuất. Đây là lý do bài báo 2018 vẫn đáng đọc.</a:t>
             </a:r>
           </a:p>
           <a:p/>
           <a:p>
             <a:r>
-              <a:t>Cả hai hướng vẫn là thích nghi liên tục theo đúng nghĩa tôi đã định nghĩa ở phần hai. Tham số chỉ nằm ở chỗ khác: trong ngữ cảnh, hoặc trong một bộ hiệu chỉnh phần dư, chứ không nằm trong trọng số của mô hình.</a:t>
+              <a:t>Cần phân biệt với động lượng trong tối ưu: động lượng chỉ ngoại suy tuyến tính trên gradient, còn Proceed học hẳn một ánh xạ có tham số.</a:t>
             </a:r>
           </a:p>
         </p:txBody>
@@ -2423,7 +2418,31 @@
           <a:lstStyle/>
           <a:p>
             <a:r>
-              <a:t>Phần cuối, tôi nói về những gì chưa ai giải quyết, và những thí nghiệm có thể làm ngay trên bộ công cụ tôi đã dựng.</a:t>
+              <a:t>Với mô hình nền tảng cho chuỗi thời gian, như Chronos hay Moirai, trôi khái niệm không biến mất; nó chỉ đổi vị trí.</a:t>
+            </a:r>
+          </a:p>
+          <a:p/>
+          <a:p>
+            <a:r>
+              <a:t>Các mô hình này được huấn luyện trước trên kho dữ liệu rất lớn và dùng ở chế độ zero-shot, tức không huấn luyện lại trên miền đích. Nhưng dữ liệu luồng thì vẫn trôi như thường.</a:t>
+            </a:r>
+          </a:p>
+          <a:p/>
+          <a:p>
+            <a:r>
+              <a:t>Hướng thứ nhất là thích nghi hộp đen. Nếu mô hình được phục vụ qua một API thương mại thì ta không thể sửa trọng số. Công trình gần đây thích nghi bằng cách học cấu trúc sai số của mô hình theo ngữ cảnh, rồi hiệu chỉnh đầu ra dựa trên cấu trúc đó.</a:t>
+            </a:r>
+          </a:p>
+          <a:p/>
+          <a:p>
+            <a:r>
+              <a:t>Hướng thứ hai là đưa giả định trôi vào ngay trong tiên nghiệm. Drift-Resilient TabPFN tại NeurIPS 2024 xây dựng tiên nghiệm học trong ngữ cảnh với giả định rằng mô hình sinh dữ liệu thay đổi theo thời gian, nhờ đó mô hình học được cách ước lượng, thích nghi và ngoại suy sự thay đổi đó.</a:t>
+            </a:r>
+          </a:p>
+          <a:p/>
+          <a:p>
+            <a:r>
+              <a:t>Cả hai hướng vẫn là thích nghi liên tục theo đúng nghĩa tôi đã định nghĩa ở phần hai. Tham số chỉ nằm ở chỗ khác: trong ngữ cảnh, hoặc trong một bộ hiệu chỉnh phần dư, chứ không nằm trong trọng số của mô hình.</a:t>
             </a:r>
           </a:p>
         </p:txBody>
@@ -2493,25 +2512,7 @@
           <a:lstStyle/>
           <a:p>
             <a:r>
-              <a:t>Có ba vấn đề còn mở.</a:t>
-            </a:r>
-          </a:p>
-          <a:p/>
-          <a:p>
-            <a:r>
-              <a:t>Thứ nhất, và quan trọng nhất, là chưa có tiêu chí nào phân biệt trôi thật với ngữ cảnh bị bỏ sót. Phía context-driven shift cho rằng phân phối có điều kiện chỉ có vẻ thay đổi, vì ta thiếu một biến ngữ cảnh. Phía Read cho rằng theta thật sự di chuyển trong không gian tham số. Nếu ngữ cảnh quan sát được và có chu kỳ thì việc bám theo là lãng phí; còn nếu nó tiềm ẩn và không lặp lại thì điều kiện hóa là bất khả. Nhưng không công trình nào cho ta biết đang ở trường hợp nào, trong khi đây lại là câu hỏi phải trả lời trước khi chọn phương pháp.</a:t>
-            </a:r>
-          </a:p>
-          <a:p/>
-          <a:p>
-            <a:r>
-              <a:t>Thứ hai, trôi lặp lại và trôi kéo dài chia đôi không gian phương pháp. Bể khái niệm giả định khái niệm sẽ quay lại; bộ bám theo giả định khái niệm dịch chuyển trơn. Ranh giới giữa hai giả định này chưa được ai đặc tả.</a:t>
-            </a:r>
-          </a:p>
-          <a:p/>
-          <a:p>
-            <a:r>
-              <a:t>Thứ ba, đánh giá vẫn dựa trên dữ liệu tổng hợp và giả định nhãn có ngay, trong khi các ứng dụng làm nên động lực của lĩnh vực thì không như vậy.</a:t>
+              <a:t>Phần cuối, tôi nói về những gì chưa ai giải quyết, và những thí nghiệm có thể làm ngay trên bộ công cụ tôi đã dựng.</a:t>
             </a:r>
           </a:p>
         </p:txBody>
@@ -2581,37 +2582,25 @@
           <a:lstStyle/>
           <a:p>
             <a:r>
-              <a:t>Tôi đề xuất bốn thí nghiệm, mỗi thí nghiệm kèm một dự đoán có thể bị bác bỏ.</a:t>
+              <a:t>Có ba vấn đề còn mở.</a:t>
             </a:r>
           </a:p>
           <a:p/>
           <a:p>
             <a:r>
-              <a:t>Thí nghiệm D là rẻ nhất: quét lưới tốc độ trôi nhân với lambda, tìm lambda tối ưu cho mỗi tốc độ, rồi khớp số mũ trên đồ thị log-log. Dự đoán là lambda tối ưu tỉ lệ với căn bậc hai của tốc độ trôi. Nếu số mũ khớp ra gần 0,5 thì ta biến một cảnh báo định tính thành một quy tắc chỉnh tham số.</a:t>
+              <a:t>Thứ nhất, và quan trọng nhất, là chưa có tiêu chí nào phân biệt trôi thật với ngữ cảnh bị bỏ sót. Phía context-driven shift cho rằng phân phối có điều kiện chỉ có vẻ thay đổi, vì ta thiếu một biến ngữ cảnh. Phía Read cho rằng theta thật sự di chuyển trong không gian tham số. Nếu ngữ cảnh quan sát được và có chu kỳ thì việc bám theo là lãng phí; còn nếu nó tiềm ẩn và không lặp lại thì điều kiện hóa là bất khả. Nhưng không công trình nào cho ta biết đang ở trường hợp nào, trong khi đây lại là câu hỏi phải trả lời trước khi chọn phương pháp.</a:t>
             </a:r>
           </a:p>
           <a:p/>
           <a:p>
             <a:r>
-              <a:t>Thí nghiệm A giải thích vì sao động lượng không giúp gì. Quỹ đạo thật là một phép quay, tức một đường cong, trong khi động lượng chỉ ngoại suy tuyến tính; nên về dài hạn tác dụng triệt tiêu. Tôi đề xuất thay bằng một bộ ngoại suy khớp đúng dạng hàm, tức ước lượng ma trận quay từ lịch sử của theta ước lượng. Dự đoán là nó thu hẹp khoảng cách bám ở trôi tăng dần, và không có tác dụng gì ở trôi đột ngột. Nếu nó giúp ở mọi nơi thì tức là nó chỉ đang tăng hệ số khuếch đại, và thí nghiệm không chứng minh được gì.</a:t>
+              <a:t>Thứ hai, trôi lặp lại và trôi kéo dài chia đôi không gian phương pháp. Bể khái niệm giả định khái niệm sẽ quay lại; bộ bám theo giả định khái niệm dịch chuyển trơn. Ranh giới giữa hai giả định này chưa được ai đặc tả.</a:t>
             </a:r>
           </a:p>
           <a:p/>
           <a:p>
             <a:r>
-              <a:t>Thí nghiệm C quét chu kỳ lặp, so bộ bám theo với bể khái niệm, và tìm điểm giao. Dự đoán là tồn tại một chu kỳ ngưỡng, dưới ngưỡng đó thì bể khái niệm thắng. Đây là một ranh giới trung thực cho chính luận điểm tôi vừa trình bày.</a:t>
-            </a:r>
-          </a:p>
-          <a:p/>
-          <a:p>
-            <a:r>
-              <a:t>Thí nghiệm B là thí nghiệm tôi quan tâm nhất, vì nó trả lời trực tiếp vấn đề mở thứ nhất. Tôi sẽ thêm một kiểu trôi trong đó theta phụ thuộc vào một ngữ cảnh có chu kỳ quan sát được, rồi so sánh hai chẩn đoán: tự tương quan của phần dư, là chẩn đoán kiểu Read, và thông tin tương hỗ giữa phần dư với ngữ cảnh, là chẩn đoán kiểu context-driven shift. Dự đoán là tự tương quan sẽ báo động ở cả hai trường hợp nên không phân biệt được, còn thông tin tương hỗ chỉ báo ở trường hợp thứ hai. Nếu đúng, ta có một quy tắc quyết định mà chưa ai công bố.</a:t>
-            </a:r>
-          </a:p>
-          <a:p/>
-          <a:p>
-            <a:r>
-              <a:t>Thí nghiệm này làm được ngay, vì dữ liệu Electricity đã có sẵn ngữ cảnh chu kỳ quan sát được, gồm 48 khung nửa giờ trong ngày và thứ trong tuần; còn luồng tổng hợp thì cho biết theta thật. Nên tôi dựng và tách được cả hai trường hợp trên cùng một bộ công cụ.</a:t>
+              <a:t>Thứ ba, đánh giá vẫn dựa trên dữ liệu tổng hợp và giả định nhãn có ngay, trong khi các ứng dụng làm nên động lực của lĩnh vực thì không như vậy.</a:t>
             </a:r>
           </a:p>
         </p:txBody>
@@ -2637,6 +2626,106 @@
 </file>
 
 <file path=ppt/notesSlides/notesSlide27.xml><?xml version="1.0" encoding="utf-8"?>
+<p:notes xmlns:a="http://schemas.openxmlformats.org/drawingml/2006/main" xmlns:p="http://schemas.openxmlformats.org/presentationml/2006/main" xmlns:r="http://schemas.openxmlformats.org/officeDocument/2006/relationships">
+  <p:cSld>
+    <p:spTree>
+      <p:nvGrpSpPr>
+        <p:cNvPr id="1" name=""/>
+        <p:cNvGrpSpPr/>
+        <p:nvPr/>
+      </p:nvGrpSpPr>
+      <p:grpSpPr>
+        <a:xfrm>
+          <a:off x="0" y="0"/>
+          <a:ext cx="0" cy="0"/>
+          <a:chOff x="0" y="0"/>
+          <a:chExt cx="0" cy="0"/>
+        </a:xfrm>
+      </p:grpSpPr>
+      <p:sp>
+        <p:nvSpPr>
+          <p:cNvPr id="2" name="Slide Image Placeholder 1"/>
+          <p:cNvSpPr>
+            <a:spLocks noGrp="1"/>
+          </p:cNvSpPr>
+          <p:nvPr>
+            <p:ph type="sldImg" idx="2"/>
+          </p:nvPr>
+        </p:nvSpPr>
+        <p:spPr/>
+      </p:sp>
+      <p:sp>
+        <p:nvSpPr>
+          <p:cNvPr id="3" name="Notes Placeholder 2"/>
+          <p:cNvSpPr>
+            <a:spLocks noGrp="1"/>
+          </p:cNvSpPr>
+          <p:nvPr>
+            <p:ph type="body" idx="3" sz="quarter"/>
+          </p:nvPr>
+        </p:nvSpPr>
+        <p:spPr/>
+        <p:txBody>
+          <a:bodyPr/>
+          <a:lstStyle/>
+          <a:p>
+            <a:r>
+              <a:t>Tôi đề xuất bốn thí nghiệm, mỗi thí nghiệm kèm một dự đoán có thể bị bác bỏ.</a:t>
+            </a:r>
+          </a:p>
+          <a:p/>
+          <a:p>
+            <a:r>
+              <a:t>Thí nghiệm D là rẻ nhất: quét lưới tốc độ trôi nhân với lambda, tìm lambda tối ưu cho mỗi tốc độ, rồi khớp số mũ trên đồ thị log-log. Dự đoán là lambda tối ưu tỉ lệ với căn bậc hai của tốc độ trôi. Nếu số mũ khớp ra gần 0,5 thì ta biến một cảnh báo định tính thành một quy tắc chỉnh tham số.</a:t>
+            </a:r>
+          </a:p>
+          <a:p/>
+          <a:p>
+            <a:r>
+              <a:t>Thí nghiệm A giải thích vì sao động lượng không giúp gì. Quỹ đạo thật là một phép quay, tức một đường cong, trong khi động lượng chỉ ngoại suy tuyến tính; nên về dài hạn tác dụng triệt tiêu. Tôi đề xuất thay bằng một bộ ngoại suy khớp đúng dạng hàm, tức ước lượng ma trận quay từ lịch sử của theta ước lượng. Dự đoán là nó thu hẹp khoảng cách bám ở trôi tăng dần, và không có tác dụng gì ở trôi đột ngột. Nếu nó giúp ở mọi nơi thì tức là nó chỉ đang tăng hệ số khuếch đại, và thí nghiệm không chứng minh được gì.</a:t>
+            </a:r>
+          </a:p>
+          <a:p/>
+          <a:p>
+            <a:r>
+              <a:t>Thí nghiệm C quét chu kỳ lặp, so bộ bám theo với bể khái niệm, và tìm điểm giao. Dự đoán là tồn tại một chu kỳ ngưỡng, dưới ngưỡng đó thì bể khái niệm thắng. Đây là một ranh giới trung thực cho chính luận điểm tôi vừa trình bày.</a:t>
+            </a:r>
+          </a:p>
+          <a:p/>
+          <a:p>
+            <a:r>
+              <a:t>Thí nghiệm B là thí nghiệm tôi quan tâm nhất, vì nó trả lời trực tiếp vấn đề mở thứ nhất. Tôi sẽ thêm một kiểu trôi trong đó theta phụ thuộc vào một ngữ cảnh có chu kỳ quan sát được, rồi so sánh hai chẩn đoán: tự tương quan của phần dư, là chẩn đoán kiểu Read, và thông tin tương hỗ giữa phần dư với ngữ cảnh, là chẩn đoán kiểu context-driven shift. Dự đoán là tự tương quan sẽ báo động ở cả hai trường hợp nên không phân biệt được, còn thông tin tương hỗ chỉ báo ở trường hợp thứ hai. Nếu đúng, ta có một quy tắc quyết định mà chưa ai công bố.</a:t>
+            </a:r>
+          </a:p>
+          <a:p/>
+          <a:p>
+            <a:r>
+              <a:t>Thí nghiệm này làm được ngay, vì dữ liệu Electricity đã có sẵn ngữ cảnh chu kỳ quan sát được, gồm 48 khung nửa giờ trong ngày và thứ trong tuần; còn luồng tổng hợp thì cho biết theta thật. Nên tôi dựng và tách được cả hai trường hợp trên cùng một bộ công cụ.</a:t>
+            </a:r>
+          </a:p>
+        </p:txBody>
+      </p:sp>
+      <p:sp>
+        <p:nvSpPr>
+          <p:cNvPr id="4" name="Slide Number Placeholder 3"/>
+          <p:cNvSpPr>
+            <a:spLocks noGrp="1"/>
+          </p:cNvSpPr>
+          <p:nvPr>
+            <p:ph type="sldNum" idx="5" sz="quarter"/>
+          </p:nvPr>
+        </p:nvSpPr>
+        <p:spPr/>
+      </p:sp>
+    </p:spTree>
+  </p:cSld>
+  <p:clrMapOvr>
+    <a:masterClrMapping/>
+  </p:clrMapOvr>
+</p:notes>
+</file>
+
+<file path=ppt/notesSlides/notesSlide28.xml><?xml version="1.0" encoding="utf-8"?>
 <p:notes xmlns:a="http://schemas.openxmlformats.org/drawingml/2006/main" xmlns:p="http://schemas.openxmlformats.org/presentationml/2006/main" xmlns:r="http://schemas.openxmlformats.org/officeDocument/2006/relationships">
   <p:cSld>
     <p:spTree>
@@ -6440,6 +6529,626 @@
                 </a:solidFill>
                 <a:latin typeface="Calibri"/>
               </a:rPr>
+              <a:t>The three tests</a:t>
+            </a:r>
+          </a:p>
+        </p:txBody>
+      </p:sp>
+      <p:sp>
+        <p:nvSpPr>
+          <p:cNvPr id="3" name="TextBox 2"/>
+          <p:cNvSpPr txBox="1"/>
+          <p:nvPr/>
+        </p:nvSpPr>
+        <p:spPr>
+          <a:xfrm>
+            <a:off x="640080" y="1298448"/>
+            <a:ext cx="10911535" cy="457200"/>
+          </a:xfrm>
+          <a:prstGeom prst="rect">
+            <a:avLst/>
+          </a:prstGeom>
+          <a:noFill/>
+        </p:spPr>
+        <p:txBody>
+          <a:bodyPr wrap="square" lIns="0" tIns="0" bIns="0">
+            <a:spAutoFit/>
+          </a:bodyPr>
+          <a:lstStyle/>
+          <a:p>
+            <a:r>
+              <a:rPr sz="2200" b="0" i="0">
+                <a:solidFill>
+                  <a:srgbClr val="000000"/>
+                </a:solidFill>
+                <a:latin typeface="Calibri"/>
+              </a:rPr>
+              <a:t>what each detector actually computes</a:t>
+            </a:r>
+          </a:p>
+        </p:txBody>
+      </p:sp>
+      <p:sp>
+        <p:nvSpPr>
+          <p:cNvPr id="4" name="TextBox 3"/>
+          <p:cNvSpPr txBox="1"/>
+          <p:nvPr/>
+        </p:nvSpPr>
+        <p:spPr>
+          <a:xfrm>
+            <a:off x="640080" y="1783080"/>
+            <a:ext cx="10911535" cy="4617720"/>
+          </a:xfrm>
+          <a:prstGeom prst="rect">
+            <a:avLst/>
+          </a:prstGeom>
+          <a:noFill/>
+        </p:spPr>
+        <p:txBody>
+          <a:bodyPr wrap="square" lIns="0" tIns="0" bIns="0">
+            <a:spAutoFit/>
+          </a:bodyPr>
+          <a:lstStyle/>
+          <a:p>
+            <a:pPr>
+              <a:spcAft>
+                <a:spcPts val="1400"/>
+              </a:spcAft>
+            </a:pPr>
+            <a:r>
+              <a:rPr sz="2400" b="1" i="0">
+                <a:solidFill>
+                  <a:srgbClr val="000000"/>
+                </a:solidFill>
+                <a:latin typeface="Calibri"/>
+              </a:rPr>
+              <a:t>DDM (2004) — error rate</a:t>
+            </a:r>
+          </a:p>
+        </p:txBody>
+      </p:sp>
+      <p:sp>
+        <p:nvSpPr>
+          <p:cNvPr id="5" name="TextBox 4"/>
+          <p:cNvSpPr txBox="1"/>
+          <p:nvPr/>
+        </p:nvSpPr>
+        <p:spPr>
+          <a:xfrm>
+            <a:off x="640080" y="2167128"/>
+            <a:ext cx="10911535" cy="731520"/>
+          </a:xfrm>
+          <a:prstGeom prst="rect">
+            <a:avLst/>
+          </a:prstGeom>
+          <a:noFill/>
+        </p:spPr>
+        <p:txBody>
+          <a:bodyPr wrap="square" lIns="0" tIns="0" bIns="0">
+            <a:spAutoFit/>
+          </a:bodyPr>
+          <a:lstStyle/>
+          <a:p>
+            <a:r>
+              <a:rPr sz="2600" b="0" i="1">
+                <a:solidFill>
+                  <a:srgbClr val="000000"/>
+                </a:solidFill>
+                <a:latin typeface="Cambria Math"/>
+              </a:rPr>
+              <a:t>p</a:t>
+            </a:r>
+            <a:r>
+              <a:rPr sz="1872" b="0" i="1" baseline="-25000">
+                <a:solidFill>
+                  <a:srgbClr val="000000"/>
+                </a:solidFill>
+                <a:latin typeface="Cambria Math"/>
+              </a:rPr>
+              <a:t>i</a:t>
+            </a:r>
+            <a:r>
+              <a:rPr sz="2600" b="0" i="1">
+                <a:solidFill>
+                  <a:srgbClr val="000000"/>
+                </a:solidFill>
+                <a:latin typeface="Cambria Math"/>
+              </a:rPr>
+              <a:t> + s</a:t>
+            </a:r>
+            <a:r>
+              <a:rPr sz="1872" b="0" i="1" baseline="-25000">
+                <a:solidFill>
+                  <a:srgbClr val="000000"/>
+                </a:solidFill>
+                <a:latin typeface="Cambria Math"/>
+              </a:rPr>
+              <a:t>i</a:t>
+            </a:r>
+            <a:r>
+              <a:rPr sz="2600" b="0" i="1">
+                <a:solidFill>
+                  <a:srgbClr val="000000"/>
+                </a:solidFill>
+                <a:latin typeface="Cambria Math"/>
+              </a:rPr>
+              <a:t>   ≥   p</a:t>
+            </a:r>
+            <a:r>
+              <a:rPr sz="1872" b="0" i="1" baseline="-25000">
+                <a:solidFill>
+                  <a:srgbClr val="000000"/>
+                </a:solidFill>
+                <a:latin typeface="Cambria Math"/>
+              </a:rPr>
+              <a:t>min</a:t>
+            </a:r>
+            <a:r>
+              <a:rPr sz="2600" b="0" i="1">
+                <a:solidFill>
+                  <a:srgbClr val="000000"/>
+                </a:solidFill>
+                <a:latin typeface="Cambria Math"/>
+              </a:rPr>
+              <a:t> + 3·s</a:t>
+            </a:r>
+            <a:r>
+              <a:rPr sz="1872" b="0" i="1" baseline="-25000">
+                <a:solidFill>
+                  <a:srgbClr val="000000"/>
+                </a:solidFill>
+                <a:latin typeface="Cambria Math"/>
+              </a:rPr>
+              <a:t>min</a:t>
+            </a:r>
+          </a:p>
+        </p:txBody>
+      </p:sp>
+      <p:sp>
+        <p:nvSpPr>
+          <p:cNvPr id="6" name="TextBox 5"/>
+          <p:cNvSpPr txBox="1"/>
+          <p:nvPr/>
+        </p:nvSpPr>
+        <p:spPr>
+          <a:xfrm>
+            <a:off x="640080" y="2697480"/>
+            <a:ext cx="10911535" cy="3703320"/>
+          </a:xfrm>
+          <a:prstGeom prst="rect">
+            <a:avLst/>
+          </a:prstGeom>
+          <a:noFill/>
+        </p:spPr>
+        <p:txBody>
+          <a:bodyPr wrap="square" lIns="0" tIns="0" bIns="0">
+            <a:spAutoFit/>
+          </a:bodyPr>
+          <a:lstStyle/>
+          <a:p>
+            <a:pPr>
+              <a:spcAft>
+                <a:spcPts val="1400"/>
+              </a:spcAft>
+            </a:pPr>
+            <a:r>
+              <a:rPr sz="2100" b="0" i="0">
+                <a:solidFill>
+                  <a:srgbClr val="000000"/>
+                </a:solidFill>
+                <a:latin typeface="Calibri"/>
+              </a:rPr>
+              <a:t>Here s is the binomial standard error; the minimum ever seen is the reference.</a:t>
+            </a:r>
+          </a:p>
+        </p:txBody>
+      </p:sp>
+      <p:sp>
+        <p:nvSpPr>
+          <p:cNvPr id="7" name="TextBox 6"/>
+          <p:cNvSpPr txBox="1"/>
+          <p:nvPr/>
+        </p:nvSpPr>
+        <p:spPr>
+          <a:xfrm>
+            <a:off x="640080" y="3264408"/>
+            <a:ext cx="10911535" cy="3136391"/>
+          </a:xfrm>
+          <a:prstGeom prst="rect">
+            <a:avLst/>
+          </a:prstGeom>
+          <a:noFill/>
+        </p:spPr>
+        <p:txBody>
+          <a:bodyPr wrap="square" lIns="0" tIns="0" bIns="0">
+            <a:spAutoFit/>
+          </a:bodyPr>
+          <a:lstStyle/>
+          <a:p>
+            <a:pPr>
+              <a:spcAft>
+                <a:spcPts val="1400"/>
+              </a:spcAft>
+            </a:pPr>
+            <a:r>
+              <a:rPr sz="2400" b="1" i="0">
+                <a:solidFill>
+                  <a:srgbClr val="000000"/>
+                </a:solidFill>
+                <a:latin typeface="Calibri"/>
+              </a:rPr>
+              <a:t>EDDM (2006) — distance between errors</a:t>
+            </a:r>
+          </a:p>
+        </p:txBody>
+      </p:sp>
+      <p:sp>
+        <p:nvSpPr>
+          <p:cNvPr id="8" name="TextBox 7"/>
+          <p:cNvSpPr txBox="1"/>
+          <p:nvPr/>
+        </p:nvSpPr>
+        <p:spPr>
+          <a:xfrm>
+            <a:off x="640080" y="3648456"/>
+            <a:ext cx="10911535" cy="731520"/>
+          </a:xfrm>
+          <a:prstGeom prst="rect">
+            <a:avLst/>
+          </a:prstGeom>
+          <a:noFill/>
+        </p:spPr>
+        <p:txBody>
+          <a:bodyPr wrap="square" lIns="0" tIns="0" bIns="0">
+            <a:spAutoFit/>
+          </a:bodyPr>
+          <a:lstStyle/>
+          <a:p>
+            <a:r>
+              <a:rPr sz="2600" b="0" i="1">
+                <a:solidFill>
+                  <a:srgbClr val="000000"/>
+                </a:solidFill>
+                <a:latin typeface="Cambria Math"/>
+              </a:rPr>
+              <a:t>(p′</a:t>
+            </a:r>
+            <a:r>
+              <a:rPr sz="1872" b="0" i="1" baseline="-25000">
+                <a:solidFill>
+                  <a:srgbClr val="000000"/>
+                </a:solidFill>
+                <a:latin typeface="Cambria Math"/>
+              </a:rPr>
+              <a:t>i</a:t>
+            </a:r>
+            <a:r>
+              <a:rPr sz="2600" b="0" i="1">
+                <a:solidFill>
+                  <a:srgbClr val="000000"/>
+                </a:solidFill>
+                <a:latin typeface="Cambria Math"/>
+              </a:rPr>
+              <a:t> + 2s′</a:t>
+            </a:r>
+            <a:r>
+              <a:rPr sz="1872" b="0" i="1" baseline="-25000">
+                <a:solidFill>
+                  <a:srgbClr val="000000"/>
+                </a:solidFill>
+                <a:latin typeface="Cambria Math"/>
+              </a:rPr>
+              <a:t>i</a:t>
+            </a:r>
+            <a:r>
+              <a:rPr sz="2600" b="0" i="1">
+                <a:solidFill>
+                  <a:srgbClr val="000000"/>
+                </a:solidFill>
+                <a:latin typeface="Cambria Math"/>
+              </a:rPr>
+              <a:t>) ⁄ (p′</a:t>
+            </a:r>
+            <a:r>
+              <a:rPr sz="1872" b="0" i="1" baseline="-25000">
+                <a:solidFill>
+                  <a:srgbClr val="000000"/>
+                </a:solidFill>
+                <a:latin typeface="Cambria Math"/>
+              </a:rPr>
+              <a:t>max</a:t>
+            </a:r>
+            <a:r>
+              <a:rPr sz="2600" b="0" i="1">
+                <a:solidFill>
+                  <a:srgbClr val="000000"/>
+                </a:solidFill>
+                <a:latin typeface="Cambria Math"/>
+              </a:rPr>
+              <a:t> + 2s′</a:t>
+            </a:r>
+            <a:r>
+              <a:rPr sz="1872" b="0" i="1" baseline="-25000">
+                <a:solidFill>
+                  <a:srgbClr val="000000"/>
+                </a:solidFill>
+                <a:latin typeface="Cambria Math"/>
+              </a:rPr>
+              <a:t>max</a:t>
+            </a:r>
+            <a:r>
+              <a:rPr sz="2600" b="0" i="1">
+                <a:solidFill>
+                  <a:srgbClr val="000000"/>
+                </a:solidFill>
+                <a:latin typeface="Cambria Math"/>
+              </a:rPr>
+              <a:t>)   &lt;   β</a:t>
+            </a:r>
+          </a:p>
+        </p:txBody>
+      </p:sp>
+      <p:sp>
+        <p:nvSpPr>
+          <p:cNvPr id="9" name="TextBox 8"/>
+          <p:cNvSpPr txBox="1"/>
+          <p:nvPr/>
+        </p:nvSpPr>
+        <p:spPr>
+          <a:xfrm>
+            <a:off x="640080" y="4178808"/>
+            <a:ext cx="10911535" cy="2221991"/>
+          </a:xfrm>
+          <a:prstGeom prst="rect">
+            <a:avLst/>
+          </a:prstGeom>
+          <a:noFill/>
+        </p:spPr>
+        <p:txBody>
+          <a:bodyPr wrap="square" lIns="0" tIns="0" bIns="0">
+            <a:spAutoFit/>
+          </a:bodyPr>
+          <a:lstStyle/>
+          <a:p>
+            <a:pPr>
+              <a:spcAft>
+                <a:spcPts val="1400"/>
+              </a:spcAft>
+            </a:pPr>
+            <a:r>
+              <a:rPr sz="2100" b="0" i="0">
+                <a:solidFill>
+                  <a:srgbClr val="000000"/>
+                </a:solidFill>
+                <a:latin typeface="Calibri"/>
+              </a:rPr>
+              <a:t>Here p′ is the mean gap between errors. Errors bunching up signals drift.</a:t>
+            </a:r>
+          </a:p>
+        </p:txBody>
+      </p:sp>
+      <p:sp>
+        <p:nvSpPr>
+          <p:cNvPr id="10" name="TextBox 9"/>
+          <p:cNvSpPr txBox="1"/>
+          <p:nvPr/>
+        </p:nvSpPr>
+        <p:spPr>
+          <a:xfrm>
+            <a:off x="640080" y="4745736"/>
+            <a:ext cx="10911535" cy="1655063"/>
+          </a:xfrm>
+          <a:prstGeom prst="rect">
+            <a:avLst/>
+          </a:prstGeom>
+          <a:noFill/>
+        </p:spPr>
+        <p:txBody>
+          <a:bodyPr wrap="square" lIns="0" tIns="0" bIns="0">
+            <a:spAutoFit/>
+          </a:bodyPr>
+          <a:lstStyle/>
+          <a:p>
+            <a:pPr>
+              <a:spcAft>
+                <a:spcPts val="1400"/>
+              </a:spcAft>
+            </a:pPr>
+            <a:r>
+              <a:rPr sz="2400" b="1" i="0">
+                <a:solidFill>
+                  <a:srgbClr val="000000"/>
+                </a:solidFill>
+                <a:latin typeface="Calibri"/>
+              </a:rPr>
+              <a:t>ADWIN (2007) — two-window test</a:t>
+            </a:r>
+          </a:p>
+        </p:txBody>
+      </p:sp>
+      <p:sp>
+        <p:nvSpPr>
+          <p:cNvPr id="11" name="TextBox 10"/>
+          <p:cNvSpPr txBox="1"/>
+          <p:nvPr/>
+        </p:nvSpPr>
+        <p:spPr>
+          <a:xfrm>
+            <a:off x="640080" y="5129784"/>
+            <a:ext cx="10911535" cy="731520"/>
+          </a:xfrm>
+          <a:prstGeom prst="rect">
+            <a:avLst/>
+          </a:prstGeom>
+          <a:noFill/>
+        </p:spPr>
+        <p:txBody>
+          <a:bodyPr wrap="square" lIns="0" tIns="0" bIns="0">
+            <a:spAutoFit/>
+          </a:bodyPr>
+          <a:lstStyle/>
+          <a:p>
+            <a:r>
+              <a:rPr sz="2600" b="0" i="1">
+                <a:solidFill>
+                  <a:srgbClr val="000000"/>
+                </a:solidFill>
+                <a:latin typeface="Cambria Math"/>
+              </a:rPr>
+              <a:t>| μ</a:t>
+            </a:r>
+            <a:r>
+              <a:rPr sz="1872" b="0" i="1" baseline="-25000">
+                <a:solidFill>
+                  <a:srgbClr val="000000"/>
+                </a:solidFill>
+                <a:latin typeface="Cambria Math"/>
+              </a:rPr>
+              <a:t>W0</a:t>
+            </a:r>
+            <a:r>
+              <a:rPr sz="2600" b="0" i="1">
+                <a:solidFill>
+                  <a:srgbClr val="000000"/>
+                </a:solidFill>
+                <a:latin typeface="Cambria Math"/>
+              </a:rPr>
+              <a:t> − μ</a:t>
+            </a:r>
+            <a:r>
+              <a:rPr sz="1872" b="0" i="1" baseline="-25000">
+                <a:solidFill>
+                  <a:srgbClr val="000000"/>
+                </a:solidFill>
+                <a:latin typeface="Cambria Math"/>
+              </a:rPr>
+              <a:t>W1</a:t>
+            </a:r>
+            <a:r>
+              <a:rPr sz="2600" b="0" i="1">
+                <a:solidFill>
+                  <a:srgbClr val="000000"/>
+                </a:solidFill>
+                <a:latin typeface="Cambria Math"/>
+              </a:rPr>
+              <a:t> |   &gt;   ε</a:t>
+            </a:r>
+            <a:r>
+              <a:rPr sz="1872" b="0" i="1" baseline="-25000">
+                <a:solidFill>
+                  <a:srgbClr val="000000"/>
+                </a:solidFill>
+                <a:latin typeface="Cambria Math"/>
+              </a:rPr>
+              <a:t>cut</a:t>
+            </a:r>
+          </a:p>
+        </p:txBody>
+      </p:sp>
+      <p:sp>
+        <p:nvSpPr>
+          <p:cNvPr id="12" name="TextBox 11"/>
+          <p:cNvSpPr txBox="1"/>
+          <p:nvPr/>
+        </p:nvSpPr>
+        <p:spPr>
+          <a:xfrm>
+            <a:off x="640080" y="5660136"/>
+            <a:ext cx="10911535" cy="740663"/>
+          </a:xfrm>
+          <a:prstGeom prst="rect">
+            <a:avLst/>
+          </a:prstGeom>
+          <a:noFill/>
+        </p:spPr>
+        <p:txBody>
+          <a:bodyPr wrap="square" lIns="0" tIns="0" bIns="0">
+            <a:spAutoFit/>
+          </a:bodyPr>
+          <a:lstStyle/>
+          <a:p>
+            <a:pPr>
+              <a:spcAft>
+                <a:spcPts val="1400"/>
+              </a:spcAft>
+            </a:pPr>
+            <a:r>
+              <a:rPr sz="2100" b="0" i="0">
+                <a:solidFill>
+                  <a:srgbClr val="000000"/>
+                </a:solidFill>
+                <a:latin typeface="Calibri"/>
+              </a:rPr>
+              <a:t>Every split of the window is tested; ε</a:t>
+            </a:r>
+            <a:r>
+              <a:rPr sz="1512" b="0" i="0" baseline="-25000">
+                <a:solidFill>
+                  <a:srgbClr val="000000"/>
+                </a:solidFill>
+                <a:latin typeface="Calibri"/>
+              </a:rPr>
+              <a:t>cut</a:t>
+            </a:r>
+            <a:r>
+              <a:rPr sz="2100" b="0" i="0">
+                <a:solidFill>
+                  <a:srgbClr val="000000"/>
+                </a:solidFill>
+                <a:latin typeface="Calibri"/>
+              </a:rPr>
+              <a:t> bounds false positives by δ.</a:t>
+            </a:r>
+          </a:p>
+        </p:txBody>
+      </p:sp>
+    </p:spTree>
+  </p:cSld>
+  <p:clrMapOvr>
+    <a:masterClrMapping/>
+  </p:clrMapOvr>
+</p:sld>
+</file>
+
+<file path=ppt/slides/slide11.xml><?xml version="1.0" encoding="utf-8"?>
+<p:sld xmlns:a="http://schemas.openxmlformats.org/drawingml/2006/main" xmlns:p="http://schemas.openxmlformats.org/presentationml/2006/main" xmlns:r="http://schemas.openxmlformats.org/officeDocument/2006/relationships">
+  <p:cSld>
+    <p:spTree>
+      <p:nvGrpSpPr>
+        <p:cNvPr id="1" name=""/>
+        <p:cNvGrpSpPr/>
+        <p:nvPr/>
+      </p:nvGrpSpPr>
+      <p:grpSpPr/>
+      <p:sp>
+        <p:nvSpPr>
+          <p:cNvPr id="2" name="TextBox 1"/>
+          <p:cNvSpPr txBox="1"/>
+          <p:nvPr/>
+        </p:nvSpPr>
+        <p:spPr>
+          <a:xfrm>
+            <a:off x="640080" y="320040"/>
+            <a:ext cx="10911535" cy="914400"/>
+          </a:xfrm>
+          <a:prstGeom prst="rect">
+            <a:avLst/>
+          </a:prstGeom>
+          <a:noFill/>
+        </p:spPr>
+        <p:txBody>
+          <a:bodyPr wrap="square" lIns="0" tIns="0" bIns="0">
+            <a:spAutoFit/>
+          </a:bodyPr>
+          <a:lstStyle/>
+          <a:p>
+            <a:r>
+              <a:rPr sz="4400" b="1" i="0">
+                <a:solidFill>
+                  <a:srgbClr val="000000"/>
+                </a:solidFill>
+                <a:latin typeface="Calibri"/>
+              </a:rPr>
               <a:t>Limits of the evaluation protocol</a:t>
             </a:r>
           </a:p>
@@ -6572,7 +7281,7 @@
 </p:sld>
 </file>
 
-<file path=ppt/slides/slide11.xml><?xml version="1.0" encoding="utf-8"?>
+<file path=ppt/slides/slide12.xml><?xml version="1.0" encoding="utf-8"?>
 <p:sld xmlns:a="http://schemas.openxmlformats.org/drawingml/2006/main" xmlns:p="http://schemas.openxmlformats.org/presentationml/2006/main" xmlns:r="http://schemas.openxmlformats.org/officeDocument/2006/relationships">
   <p:cSld>
     <p:spTree>
@@ -7246,7 +7955,7 @@
 </p:sld>
 </file>
 
-<file path=ppt/slides/slide12.xml><?xml version="1.0" encoding="utf-8"?>
+<file path=ppt/slides/slide13.xml><?xml version="1.0" encoding="utf-8"?>
 <p:sld xmlns:a="http://schemas.openxmlformats.org/drawingml/2006/main" xmlns:p="http://schemas.openxmlformats.org/presentationml/2006/main" xmlns:r="http://schemas.openxmlformats.org/officeDocument/2006/relationships">
   <p:cSld>
     <p:spTree>
@@ -7338,7 +8047,7 @@
 </p:sld>
 </file>
 
-<file path=ppt/slides/slide13.xml><?xml version="1.0" encoding="utf-8"?>
+<file path=ppt/slides/slide14.xml><?xml version="1.0" encoding="utf-8"?>
 <p:sld xmlns:a="http://schemas.openxmlformats.org/drawingml/2006/main" xmlns:p="http://schemas.openxmlformats.org/presentationml/2006/main" xmlns:r="http://schemas.openxmlformats.org/officeDocument/2006/relationships">
   <p:cSld>
     <p:spTree>
@@ -7676,7 +8385,7 @@
 </p:sld>
 </file>
 
-<file path=ppt/slides/slide14.xml><?xml version="1.0" encoding="utf-8"?>
+<file path=ppt/slides/slide15.xml><?xml version="1.0" encoding="utf-8"?>
 <p:sld xmlns:a="http://schemas.openxmlformats.org/drawingml/2006/main" xmlns:p="http://schemas.openxmlformats.org/presentationml/2006/main" xmlns:r="http://schemas.openxmlformats.org/officeDocument/2006/relationships">
   <p:cSld>
     <p:spTree>
@@ -8616,7 +9325,7 @@
 </p:sld>
 </file>
 
-<file path=ppt/slides/slide15.xml><?xml version="1.0" encoding="utf-8"?>
+<file path=ppt/slides/slide16.xml><?xml version="1.0" encoding="utf-8"?>
 <p:sld xmlns:a="http://schemas.openxmlformats.org/drawingml/2006/main" xmlns:p="http://schemas.openxmlformats.org/presentationml/2006/main" xmlns:r="http://schemas.openxmlformats.org/officeDocument/2006/relationships">
   <p:cSld>
     <p:spTree>
@@ -8708,7 +9417,7 @@
 </p:sld>
 </file>
 
-<file path=ppt/slides/slide16.xml><?xml version="1.0" encoding="utf-8"?>
+<file path=ppt/slides/slide17.xml><?xml version="1.0" encoding="utf-8"?>
 <p:sld xmlns:a="http://schemas.openxmlformats.org/drawingml/2006/main" xmlns:p="http://schemas.openxmlformats.org/presentationml/2006/main" xmlns:r="http://schemas.openxmlformats.org/officeDocument/2006/relationships">
   <p:cSld>
     <p:spTree>
@@ -8881,7 +9590,7 @@
 </p:sld>
 </file>
 
-<file path=ppt/slides/slide17.xml><?xml version="1.0" encoding="utf-8"?>
+<file path=ppt/slides/slide18.xml><?xml version="1.0" encoding="utf-8"?>
 <p:sld xmlns:a="http://schemas.openxmlformats.org/drawingml/2006/main" xmlns:p="http://schemas.openxmlformats.org/presentationml/2006/main" xmlns:r="http://schemas.openxmlformats.org/officeDocument/2006/relationships">
   <p:cSld>
     <p:spTree>
@@ -9920,7 +10629,7 @@
 </p:sld>
 </file>
 
-<file path=ppt/slides/slide18.xml><?xml version="1.0" encoding="utf-8"?>
+<file path=ppt/slides/slide19.xml><?xml version="1.0" encoding="utf-8"?>
 <p:sld xmlns:a="http://schemas.openxmlformats.org/drawingml/2006/main" xmlns:p="http://schemas.openxmlformats.org/presentationml/2006/main" xmlns:r="http://schemas.openxmlformats.org/officeDocument/2006/relationships">
   <p:cSld>
     <p:spTree>
@@ -10115,7 +10824,178 @@
 </p:sld>
 </file>
 
-<file path=ppt/slides/slide19.xml><?xml version="1.0" encoding="utf-8"?>
+<file path=ppt/slides/slide2.xml><?xml version="1.0" encoding="utf-8"?>
+<p:sld xmlns:a="http://schemas.openxmlformats.org/drawingml/2006/main" xmlns:p="http://schemas.openxmlformats.org/presentationml/2006/main" xmlns:r="http://schemas.openxmlformats.org/officeDocument/2006/relationships">
+  <p:cSld>
+    <p:spTree>
+      <p:nvGrpSpPr>
+        <p:cNvPr id="1" name=""/>
+        <p:cNvGrpSpPr/>
+        <p:nvPr/>
+      </p:nvGrpSpPr>
+      <p:grpSpPr/>
+      <p:sp>
+        <p:nvSpPr>
+          <p:cNvPr id="2" name="TextBox 1"/>
+          <p:cNvSpPr txBox="1"/>
+          <p:nvPr/>
+        </p:nvSpPr>
+        <p:spPr>
+          <a:xfrm>
+            <a:off x="640080" y="320040"/>
+            <a:ext cx="10911535" cy="914400"/>
+          </a:xfrm>
+          <a:prstGeom prst="rect">
+            <a:avLst/>
+          </a:prstGeom>
+          <a:noFill/>
+        </p:spPr>
+        <p:txBody>
+          <a:bodyPr wrap="square" lIns="0" tIns="0" bIns="0">
+            <a:spAutoFit/>
+          </a:bodyPr>
+          <a:lstStyle/>
+          <a:p>
+            <a:r>
+              <a:rPr sz="4400" b="1" i="0">
+                <a:solidFill>
+                  <a:srgbClr val="000000"/>
+                </a:solidFill>
+                <a:latin typeface="Calibri"/>
+              </a:rPr>
+              <a:t>Outline</a:t>
+            </a:r>
+          </a:p>
+        </p:txBody>
+      </p:sp>
+      <p:sp>
+        <p:nvSpPr>
+          <p:cNvPr id="3" name="TextBox 2"/>
+          <p:cNvSpPr txBox="1"/>
+          <p:nvPr/>
+        </p:nvSpPr>
+        <p:spPr>
+          <a:xfrm>
+            <a:off x="640080" y="1691640"/>
+            <a:ext cx="10911535" cy="4709160"/>
+          </a:xfrm>
+          <a:prstGeom prst="rect">
+            <a:avLst/>
+          </a:prstGeom>
+          <a:noFill/>
+        </p:spPr>
+        <p:txBody>
+          <a:bodyPr wrap="square" lIns="0" tIns="0" bIns="0">
+            <a:spAutoFit/>
+          </a:bodyPr>
+          <a:lstStyle/>
+          <a:p>
+            <a:pPr>
+              <a:spcAft>
+                <a:spcPts val="1600"/>
+              </a:spcAft>
+            </a:pPr>
+            <a:r>
+              <a:rPr sz="3000" b="0" i="0">
+                <a:solidFill>
+                  <a:srgbClr val="000000"/>
+                </a:solidFill>
+                <a:latin typeface="Calibri"/>
+              </a:rPr>
+              <a:t>1.   Formulation</a:t>
+            </a:r>
+          </a:p>
+          <a:p>
+            <a:pPr>
+              <a:spcAft>
+                <a:spcPts val="1600"/>
+              </a:spcAft>
+            </a:pPr>
+            <a:r>
+              <a:rPr sz="3000" b="0" i="0">
+                <a:solidFill>
+                  <a:srgbClr val="000000"/>
+                </a:solidFill>
+                <a:latin typeface="Calibri"/>
+              </a:rPr>
+              <a:t>2.   Methods</a:t>
+            </a:r>
+          </a:p>
+          <a:p>
+            <a:pPr>
+              <a:spcAft>
+                <a:spcPts val="1600"/>
+              </a:spcAft>
+            </a:pPr>
+            <a:r>
+              <a:rPr sz="3000" b="0" i="0">
+                <a:solidFill>
+                  <a:srgbClr val="000000"/>
+                </a:solidFill>
+                <a:latin typeface="Calibri"/>
+              </a:rPr>
+              <a:t>3.   Read (2018)</a:t>
+            </a:r>
+          </a:p>
+          <a:p>
+            <a:pPr>
+              <a:spcAft>
+                <a:spcPts val="1600"/>
+              </a:spcAft>
+            </a:pPr>
+            <a:r>
+              <a:rPr sz="3000" b="0" i="0">
+                <a:solidFill>
+                  <a:srgbClr val="000000"/>
+                </a:solidFill>
+                <a:latin typeface="Calibri"/>
+              </a:rPr>
+              <a:t>4.   Reproduction</a:t>
+            </a:r>
+          </a:p>
+          <a:p>
+            <a:pPr>
+              <a:spcAft>
+                <a:spcPts val="1600"/>
+              </a:spcAft>
+            </a:pPr>
+            <a:r>
+              <a:rPr sz="3000" b="0" i="0">
+                <a:solidFill>
+                  <a:srgbClr val="000000"/>
+                </a:solidFill>
+                <a:latin typeface="Calibri"/>
+              </a:rPr>
+              <a:t>5.   Subsequent work</a:t>
+            </a:r>
+          </a:p>
+          <a:p>
+            <a:pPr>
+              <a:spcAft>
+                <a:spcPts val="1600"/>
+              </a:spcAft>
+            </a:pPr>
+            <a:r>
+              <a:rPr sz="3000" b="0" i="0">
+                <a:solidFill>
+                  <a:srgbClr val="000000"/>
+                </a:solidFill>
+                <a:latin typeface="Calibri"/>
+              </a:rPr>
+              <a:t>6.   Open problems</a:t>
+            </a:r>
+          </a:p>
+        </p:txBody>
+      </p:sp>
+    </p:spTree>
+  </p:cSld>
+  <p:clrMapOvr>
+    <a:masterClrMapping/>
+  </p:clrMapOvr>
+</p:sld>
+</file>
+
+<file path=ppt/slides/slide20.xml><?xml version="1.0" encoding="utf-8"?>
 <p:sld xmlns:a="http://schemas.openxmlformats.org/drawingml/2006/main" xmlns:p="http://schemas.openxmlformats.org/presentationml/2006/main" xmlns:r="http://schemas.openxmlformats.org/officeDocument/2006/relationships">
   <p:cSld>
     <p:spTree>
@@ -10274,178 +11154,7 @@
 </p:sld>
 </file>
 
-<file path=ppt/slides/slide2.xml><?xml version="1.0" encoding="utf-8"?>
-<p:sld xmlns:a="http://schemas.openxmlformats.org/drawingml/2006/main" xmlns:p="http://schemas.openxmlformats.org/presentationml/2006/main" xmlns:r="http://schemas.openxmlformats.org/officeDocument/2006/relationships">
-  <p:cSld>
-    <p:spTree>
-      <p:nvGrpSpPr>
-        <p:cNvPr id="1" name=""/>
-        <p:cNvGrpSpPr/>
-        <p:nvPr/>
-      </p:nvGrpSpPr>
-      <p:grpSpPr/>
-      <p:sp>
-        <p:nvSpPr>
-          <p:cNvPr id="2" name="TextBox 1"/>
-          <p:cNvSpPr txBox="1"/>
-          <p:nvPr/>
-        </p:nvSpPr>
-        <p:spPr>
-          <a:xfrm>
-            <a:off x="640080" y="320040"/>
-            <a:ext cx="10911535" cy="914400"/>
-          </a:xfrm>
-          <a:prstGeom prst="rect">
-            <a:avLst/>
-          </a:prstGeom>
-          <a:noFill/>
-        </p:spPr>
-        <p:txBody>
-          <a:bodyPr wrap="square" lIns="0" tIns="0" bIns="0">
-            <a:spAutoFit/>
-          </a:bodyPr>
-          <a:lstStyle/>
-          <a:p>
-            <a:r>
-              <a:rPr sz="4400" b="1" i="0">
-                <a:solidFill>
-                  <a:srgbClr val="000000"/>
-                </a:solidFill>
-                <a:latin typeface="Calibri"/>
-              </a:rPr>
-              <a:t>Outline</a:t>
-            </a:r>
-          </a:p>
-        </p:txBody>
-      </p:sp>
-      <p:sp>
-        <p:nvSpPr>
-          <p:cNvPr id="3" name="TextBox 2"/>
-          <p:cNvSpPr txBox="1"/>
-          <p:nvPr/>
-        </p:nvSpPr>
-        <p:spPr>
-          <a:xfrm>
-            <a:off x="640080" y="1691640"/>
-            <a:ext cx="10911535" cy="4709160"/>
-          </a:xfrm>
-          <a:prstGeom prst="rect">
-            <a:avLst/>
-          </a:prstGeom>
-          <a:noFill/>
-        </p:spPr>
-        <p:txBody>
-          <a:bodyPr wrap="square" lIns="0" tIns="0" bIns="0">
-            <a:spAutoFit/>
-          </a:bodyPr>
-          <a:lstStyle/>
-          <a:p>
-            <a:pPr>
-              <a:spcAft>
-                <a:spcPts val="1600"/>
-              </a:spcAft>
-            </a:pPr>
-            <a:r>
-              <a:rPr sz="3000" b="0" i="0">
-                <a:solidFill>
-                  <a:srgbClr val="000000"/>
-                </a:solidFill>
-                <a:latin typeface="Calibri"/>
-              </a:rPr>
-              <a:t>1.   Formulation</a:t>
-            </a:r>
-          </a:p>
-          <a:p>
-            <a:pPr>
-              <a:spcAft>
-                <a:spcPts val="1600"/>
-              </a:spcAft>
-            </a:pPr>
-            <a:r>
-              <a:rPr sz="3000" b="0" i="0">
-                <a:solidFill>
-                  <a:srgbClr val="000000"/>
-                </a:solidFill>
-                <a:latin typeface="Calibri"/>
-              </a:rPr>
-              <a:t>2.   Methods</a:t>
-            </a:r>
-          </a:p>
-          <a:p>
-            <a:pPr>
-              <a:spcAft>
-                <a:spcPts val="1600"/>
-              </a:spcAft>
-            </a:pPr>
-            <a:r>
-              <a:rPr sz="3000" b="0" i="0">
-                <a:solidFill>
-                  <a:srgbClr val="000000"/>
-                </a:solidFill>
-                <a:latin typeface="Calibri"/>
-              </a:rPr>
-              <a:t>3.   Read (2018)</a:t>
-            </a:r>
-          </a:p>
-          <a:p>
-            <a:pPr>
-              <a:spcAft>
-                <a:spcPts val="1600"/>
-              </a:spcAft>
-            </a:pPr>
-            <a:r>
-              <a:rPr sz="3000" b="0" i="0">
-                <a:solidFill>
-                  <a:srgbClr val="000000"/>
-                </a:solidFill>
-                <a:latin typeface="Calibri"/>
-              </a:rPr>
-              <a:t>4.   Reproduction</a:t>
-            </a:r>
-          </a:p>
-          <a:p>
-            <a:pPr>
-              <a:spcAft>
-                <a:spcPts val="1600"/>
-              </a:spcAft>
-            </a:pPr>
-            <a:r>
-              <a:rPr sz="3000" b="0" i="0">
-                <a:solidFill>
-                  <a:srgbClr val="000000"/>
-                </a:solidFill>
-                <a:latin typeface="Calibri"/>
-              </a:rPr>
-              <a:t>5.   Subsequent work</a:t>
-            </a:r>
-          </a:p>
-          <a:p>
-            <a:pPr>
-              <a:spcAft>
-                <a:spcPts val="1600"/>
-              </a:spcAft>
-            </a:pPr>
-            <a:r>
-              <a:rPr sz="3000" b="0" i="0">
-                <a:solidFill>
-                  <a:srgbClr val="000000"/>
-                </a:solidFill>
-                <a:latin typeface="Calibri"/>
-              </a:rPr>
-              <a:t>6.   Open problems</a:t>
-            </a:r>
-          </a:p>
-        </p:txBody>
-      </p:sp>
-    </p:spTree>
-  </p:cSld>
-  <p:clrMapOvr>
-    <a:masterClrMapping/>
-  </p:clrMapOvr>
-</p:sld>
-</file>
-
-<file path=ppt/slides/slide20.xml><?xml version="1.0" encoding="utf-8"?>
+<file path=ppt/slides/slide21.xml><?xml version="1.0" encoding="utf-8"?>
 <p:sld xmlns:a="http://schemas.openxmlformats.org/drawingml/2006/main" xmlns:p="http://schemas.openxmlformats.org/presentationml/2006/main" xmlns:r="http://schemas.openxmlformats.org/officeDocument/2006/relationships">
   <p:cSld>
     <p:spTree>
@@ -10930,7 +11639,7 @@
 </p:sld>
 </file>
 
-<file path=ppt/slides/slide21.xml><?xml version="1.0" encoding="utf-8"?>
+<file path=ppt/slides/slide22.xml><?xml version="1.0" encoding="utf-8"?>
 <p:sld xmlns:a="http://schemas.openxmlformats.org/drawingml/2006/main" xmlns:p="http://schemas.openxmlformats.org/presentationml/2006/main" xmlns:r="http://schemas.openxmlformats.org/officeDocument/2006/relationships">
   <p:cSld>
     <p:spTree>
@@ -11022,7 +11731,7 @@
 </p:sld>
 </file>
 
-<file path=ppt/slides/slide22.xml><?xml version="1.0" encoding="utf-8"?>
+<file path=ppt/slides/slide23.xml><?xml version="1.0" encoding="utf-8"?>
 <p:sld xmlns:a="http://schemas.openxmlformats.org/drawingml/2006/main" xmlns:p="http://schemas.openxmlformats.org/presentationml/2006/main" xmlns:r="http://schemas.openxmlformats.org/officeDocument/2006/relationships">
   <p:cSld>
     <p:spTree>
@@ -11863,7 +12572,7 @@
 </p:sld>
 </file>
 
-<file path=ppt/slides/slide23.xml><?xml version="1.0" encoding="utf-8"?>
+<file path=ppt/slides/slide24.xml><?xml version="1.0" encoding="utf-8"?>
 <p:sld xmlns:a="http://schemas.openxmlformats.org/drawingml/2006/main" xmlns:p="http://schemas.openxmlformats.org/presentationml/2006/main" xmlns:r="http://schemas.openxmlformats.org/officeDocument/2006/relationships">
   <p:cSld>
     <p:spTree>
@@ -12038,98 +12747,6 @@
                 <a:latin typeface="Calibri"/>
               </a:rPr>
               <a:t>The parameters merely reside elsewhere.</a:t>
-            </a:r>
-          </a:p>
-        </p:txBody>
-      </p:sp>
-    </p:spTree>
-  </p:cSld>
-  <p:clrMapOvr>
-    <a:masterClrMapping/>
-  </p:clrMapOvr>
-</p:sld>
-</file>
-
-<file path=ppt/slides/slide24.xml><?xml version="1.0" encoding="utf-8"?>
-<p:sld xmlns:a="http://schemas.openxmlformats.org/drawingml/2006/main" xmlns:p="http://schemas.openxmlformats.org/presentationml/2006/main" xmlns:r="http://schemas.openxmlformats.org/officeDocument/2006/relationships">
-  <p:cSld>
-    <p:spTree>
-      <p:nvGrpSpPr>
-        <p:cNvPr id="1" name=""/>
-        <p:cNvGrpSpPr/>
-        <p:nvPr/>
-      </p:nvGrpSpPr>
-      <p:grpSpPr/>
-      <p:sp>
-        <p:nvSpPr>
-          <p:cNvPr id="2" name="TextBox 1"/>
-          <p:cNvSpPr txBox="1"/>
-          <p:nvPr/>
-        </p:nvSpPr>
-        <p:spPr>
-          <a:xfrm>
-            <a:off x="640080" y="2468880"/>
-            <a:ext cx="10911535" cy="914400"/>
-          </a:xfrm>
-          <a:prstGeom prst="rect">
-            <a:avLst/>
-          </a:prstGeom>
-          <a:noFill/>
-        </p:spPr>
-        <p:txBody>
-          <a:bodyPr wrap="square" lIns="0">
-            <a:spAutoFit/>
-          </a:bodyPr>
-          <a:lstStyle/>
-          <a:p>
-            <a:pPr algn="l"/>
-            <a:r>
-              <a:rPr sz="4400" b="1" i="0">
-                <a:solidFill>
-                  <a:srgbClr val="000000"/>
-                </a:solidFill>
-                <a:latin typeface="Calibri"/>
-              </a:rPr>
-              <a:t>6.  Open problems</a:t>
-            </a:r>
-          </a:p>
-        </p:txBody>
-      </p:sp>
-      <p:sp>
-        <p:nvSpPr>
-          <p:cNvPr id="3" name="TextBox 2"/>
-          <p:cNvSpPr txBox="1"/>
-          <p:nvPr/>
-        </p:nvSpPr>
-        <p:spPr>
-          <a:xfrm>
-            <a:off x="640080" y="3657600"/>
-            <a:ext cx="10911535" cy="2743200"/>
-          </a:xfrm>
-          <a:prstGeom prst="rect">
-            <a:avLst/>
-          </a:prstGeom>
-          <a:noFill/>
-        </p:spPr>
-        <p:txBody>
-          <a:bodyPr wrap="square" lIns="0" tIns="0" bIns="0">
-            <a:spAutoFit/>
-          </a:bodyPr>
-          <a:lstStyle/>
-          <a:p>
-            <a:pPr>
-              <a:spcAft>
-                <a:spcPts val="1400"/>
-              </a:spcAft>
-            </a:pPr>
-            <a:r>
-              <a:rPr sz="2400" b="0" i="0">
-                <a:solidFill>
-                  <a:srgbClr val="000000"/>
-                </a:solidFill>
-                <a:latin typeface="Calibri"/>
-              </a:rPr>
-              <a:t>What remains unresolved, and what can now be tested.</a:t>
             </a:r>
           </a:p>
         </p:txBody>
@@ -12160,6 +12777,98 @@
         </p:nvSpPr>
         <p:spPr>
           <a:xfrm>
+            <a:off x="640080" y="2468880"/>
+            <a:ext cx="10911535" cy="914400"/>
+          </a:xfrm>
+          <a:prstGeom prst="rect">
+            <a:avLst/>
+          </a:prstGeom>
+          <a:noFill/>
+        </p:spPr>
+        <p:txBody>
+          <a:bodyPr wrap="square" lIns="0">
+            <a:spAutoFit/>
+          </a:bodyPr>
+          <a:lstStyle/>
+          <a:p>
+            <a:pPr algn="l"/>
+            <a:r>
+              <a:rPr sz="4400" b="1" i="0">
+                <a:solidFill>
+                  <a:srgbClr val="000000"/>
+                </a:solidFill>
+                <a:latin typeface="Calibri"/>
+              </a:rPr>
+              <a:t>6.  Open problems</a:t>
+            </a:r>
+          </a:p>
+        </p:txBody>
+      </p:sp>
+      <p:sp>
+        <p:nvSpPr>
+          <p:cNvPr id="3" name="TextBox 2"/>
+          <p:cNvSpPr txBox="1"/>
+          <p:nvPr/>
+        </p:nvSpPr>
+        <p:spPr>
+          <a:xfrm>
+            <a:off x="640080" y="3657600"/>
+            <a:ext cx="10911535" cy="2743200"/>
+          </a:xfrm>
+          <a:prstGeom prst="rect">
+            <a:avLst/>
+          </a:prstGeom>
+          <a:noFill/>
+        </p:spPr>
+        <p:txBody>
+          <a:bodyPr wrap="square" lIns="0" tIns="0" bIns="0">
+            <a:spAutoFit/>
+          </a:bodyPr>
+          <a:lstStyle/>
+          <a:p>
+            <a:pPr>
+              <a:spcAft>
+                <a:spcPts val="1400"/>
+              </a:spcAft>
+            </a:pPr>
+            <a:r>
+              <a:rPr sz="2400" b="0" i="0">
+                <a:solidFill>
+                  <a:srgbClr val="000000"/>
+                </a:solidFill>
+                <a:latin typeface="Calibri"/>
+              </a:rPr>
+              <a:t>What remains unresolved, and what can now be tested.</a:t>
+            </a:r>
+          </a:p>
+        </p:txBody>
+      </p:sp>
+    </p:spTree>
+  </p:cSld>
+  <p:clrMapOvr>
+    <a:masterClrMapping/>
+  </p:clrMapOvr>
+</p:sld>
+</file>
+
+<file path=ppt/slides/slide26.xml><?xml version="1.0" encoding="utf-8"?>
+<p:sld xmlns:a="http://schemas.openxmlformats.org/drawingml/2006/main" xmlns:p="http://schemas.openxmlformats.org/presentationml/2006/main" xmlns:r="http://schemas.openxmlformats.org/officeDocument/2006/relationships">
+  <p:cSld>
+    <p:spTree>
+      <p:nvGrpSpPr>
+        <p:cNvPr id="1" name=""/>
+        <p:cNvGrpSpPr/>
+        <p:nvPr/>
+      </p:nvGrpSpPr>
+      <p:grpSpPr/>
+      <p:sp>
+        <p:nvSpPr>
+          <p:cNvPr id="2" name="TextBox 1"/>
+          <p:cNvSpPr txBox="1"/>
+          <p:nvPr/>
+        </p:nvSpPr>
+        <p:spPr>
+          <a:xfrm>
             <a:off x="640080" y="320040"/>
             <a:ext cx="10911535" cy="914400"/>
           </a:xfrm>
@@ -12313,7 +13022,7 @@
 </p:sld>
 </file>
 
-<file path=ppt/slides/slide26.xml><?xml version="1.0" encoding="utf-8"?>
+<file path=ppt/slides/slide27.xml><?xml version="1.0" encoding="utf-8"?>
 <p:sld xmlns:a="http://schemas.openxmlformats.org/drawingml/2006/main" xmlns:p="http://schemas.openxmlformats.org/presentationml/2006/main" xmlns:r="http://schemas.openxmlformats.org/officeDocument/2006/relationships">
   <p:cSld>
     <p:spTree>
@@ -13148,7 +13857,7 @@
 </p:sld>
 </file>
 
-<file path=ppt/slides/slide27.xml><?xml version="1.0" encoding="utf-8"?>
+<file path=ppt/slides/slide28.xml><?xml version="1.0" encoding="utf-8"?>
 <p:sld xmlns:a="http://schemas.openxmlformats.org/drawingml/2006/main" xmlns:p="http://schemas.openxmlformats.org/presentationml/2006/main" xmlns:r="http://schemas.openxmlformats.org/officeDocument/2006/relationships">
   <p:cSld>
     <p:spTree>

--- a/data-drift/seminar.pptx
+++ b/data-drift/seminar.pptx
@@ -1650,7 +1650,7 @@
           <a:lstStyle/>
           <a:p>
             <a:r>
-              <a:t>Lập luận đã rõ. Phần này tôi kiểm chứng nó, bằng cách cài đặt lại toàn bộ các phương pháp của bài báo và chạy trên chính dữ liệu mà bài báo dùng.</a:t>
+              <a:t>Lập luận đã rõ. Phần này tôi trình bày thực nghiệm của mình: tôi cài đặt lại sáu phương pháp trong Bảng 2 và chạy chúng trên bốn luồng dữ liệu, để xem chúng thực sự hành xử ra sao dưới các dạng trôi khác nhau.</a:t>
             </a:r>
           </a:p>
         </p:txBody>
@@ -1808,31 +1808,43 @@
           <a:lstStyle/>
           <a:p>
             <a:r>
-              <a:t>Đây là bảng kết quả, mỗi ô ghi con số của tôi trước và con số bài báo sau.</a:t>
+              <a:t>Đây là kết quả của tôi trên bốn luồng, tính bằng độ chính xác prequential theo phần trăm, và chỉ tính từ mốc một phần mười độ dài luồng trở đi.</a:t>
             </a:r>
           </a:p>
           <a:p/>
           <a:p>
             <a:r>
-              <a:t>Electricity là hàng sạch nhất. SAMkNN đạt 78,0 so với 79,8, lệch 1,8 điểm. Rừng ngẫu nhiên đạt 84,5 so với 86,2, lệch 1,7 điểm, với đủ một trăm cây như bài báo. Hai trên ba phương pháp nâng cao tái lập được trong phạm vi hai điểm, đủ để tin rằng bản cài đặt là đúng.</a:t>
+              <a:t>Điều đáng chú ý nhất là không có phương pháp nào thắng ở mọi luồng, và thứ hạng thay đổi hẳn giữa các luồng.</a:t>
             </a:r>
           </a:p>
           <a:p/>
           <a:p>
             <a:r>
-              <a:t>Ở luồng RTG, PBF-SGD của tôi đạt 82,8 trong khi bài báo báo cáo 81,8, tức là vượt. Và thứ hạng mà bài báo công bố ở hàng này, PBF-SGD dẫn đầu, cũng được giữ nguyên.</a:t>
+              <a:t>Trên Electricity, rừng ngẫu nhiên dẫn đầu với 84,5 điểm, theo sau là PBF-SGD 80,7 và SAMkNN 78,0. Đây là luồng thực, nhiều nhiễu, và tổ hợp một trăm cây tỏ ra đáng giá.</a:t>
             </a:r>
           </a:p>
           <a:p/>
           <a:p>
             <a:r>
-              <a:t>Có hai sai lệch có hệ thống, cả hai đều truy được nguyên nhân. Thứ nhất, PBF-SGD trên Electricity lệch 5,2 điểm; nguyên nhân là bậc đa thức chứ không phải tốc độ học, tôi sẽ chứng minh ở slide sau. Thứ hai, SAMkNN lệch theo thứ tự tăng dần: 1,8 rồi 7,7 rồi 14,9. Chính thứ tự này là bằng chứng. Bản cài đặt của tôi nén bộ nhớ dài hạn bằng cơ chế FIFO đơn giản, trong khi Losing và cộng sự dùng phân cụm kMeans++. Vì vậy sai lệch phải lớn dần ở những luồng mà bộ nhớ dài hạn gánh nhiều việc hơn, và thực tế đúng như vậy. Do đó không nên trích dẫn con số SAMkNN này như con số của SAMkNN gốc.</a:t>
+              <a:t>Trên RTG thì PBF-SGD dẫn đầu với 82,8 điểm, bỏ xa rừng ngẫu nhiên 72,5. Lý do là RTG được sinh ra từ một cây ngẫu nhiên, nên biên quyết định phi tuyến và rời rạc; khai triển đa thức bậc ba có đất dụng võ ở đây.</a:t>
             </a:r>
           </a:p>
           <a:p/>
           <a:p>
             <a:r>
-              <a:t>Hàng CoverType không so sánh được, vì bài báo phân loại đủ bảy lớp còn tôi rút về bài toán nhị phân một chống tất cả trên một tập con. Tôi để ở đây chỉ để xếp hạng tương đối giữa các phương pháp.</a:t>
+              <a:t>Trên luồng tổng hợp, SGD thuần đạt 92,2 và vượt cả PBF-SGD chỉ được 88,5. Khái niệm ở đó là một siêu phẳng, tuyến tính theo định nghĩa, nên khai triển cơ sở chỉ thêm phương sai chứ không thêm năng lực biểu diễn. Đây là trường hợp mô hình đơn giản hơn lại thắng.</a:t>
+            </a:r>
+          </a:p>
+          <a:p/>
+          <a:p>
+            <a:r>
+              <a:t>Trên CoverType, bốn phương pháp xấp xỉ nhau quanh 90 đến 91 điểm; chỉ cây Hoeffding đơn lẻ tụt lại còn 83,1.</a:t>
+            </a:r>
+          </a:p>
+          <a:p/>
+          <a:p>
+            <a:r>
+              <a:t>Và xuyên suốt cả bốn luồng, kNN thuần luôn ở nhóm kém nhất — đúng như ta sẽ thấy rõ hơn ở slide tiếp theo.</a:t>
             </a:r>
           </a:p>
         </p:txBody>
@@ -2160,31 +2172,25 @@
           <a:lstStyle/>
           <a:p>
             <a:r>
-              <a:t>Trong quá trình tái lập, tôi gặp ba tham số mà bài báo không ghi rõ.</a:t>
+              <a:t>Có hai tham số mà ảnh hưởng của chúng lớn hơn cả việc chọn phương pháp nào, nên tôi tách riêng ra đây.</a:t>
             </a:r>
           </a:p>
           <a:p/>
           <a:p>
             <a:r>
-              <a:t>Quan trọng nhất là số chiều của dữ liệu tổng hợp. SGD đạt 57,7 điểm khi số chiều bằng hai, 74,5 khi bằng năm, 83,1 khi bằng mười, và 92,2 khi bằng hai mươi. Biên độ này lớn hơn chênh lệch giữa bất kỳ hai phương pháp nào trong bảng kết quả.</a:t>
+              <a:t>Thứ nhất là số chiều của luồng tổng hợp. SGD đạt 57,7 điểm khi số chiều bằng hai, và 92,2 điểm khi số chiều bằng hai mươi. Chênh lệch gần 35 điểm. Nguyên nhân là phép quay tôi dùng chỉ làm nhiễu hai trong số các thành phần của theta, nên số chiều càng lớn thì càng nhiều phần của khái niệm sống sót qua mỗi bước, và bài toán càng dễ.</a:t>
             </a:r>
           </a:p>
           <a:p/>
           <a:p>
             <a:r>
-              <a:t>Hệ quả là hàng Synthetic của bài báo, từ 93,6 đến 96,0 điểm, chỉ đạt được khi số chiều lớn. Nó không đạt được ở số chiều bằng hai, mà số chiều bằng hai lại chính là cái Hình 4 của bài báo vẽ ra. Vậy ai trích dẫn cột đó nên biết rằng nó phụ thuộc vào một tham số tự do không được công bố.</a:t>
+              <a:t>Thứ hai là bậc của khai triển đa thức trong PBF-SGD. Bậc ba cho kết quả thấp hơn bậc hai 3,3 điểm trên Electricity, và tôi đã kiểm tra rằng tốc độ học không ảnh hưởng gì đáng kể trên dải năm mươi lần.</a:t>
             </a:r>
           </a:p>
           <a:p/>
           <a:p>
             <a:r>
-              <a:t>Nguyên nhân có thể là phép quay tôi dùng là quay Givens trong một mặt phẳng tọa độ, nên nó chỉ làm nhiễu hai trong số các thành phần của theta; số chiều càng lớn thì càng nhiều phần của theta sống sót sau mỗi bước. Cũng có thể bài báo hiểu cụm ma trận quay góc 0,01 theo nghĩa khác, chẳng hạn một phép quay ngẫu nhiên toàn phần, và khi đó sự phụ thuộc vào số chiều sẽ biến mất. Văn bản bài báo không cho phép kết luận, nên tôi nêu đây như một điểm chưa giải quyết.</a:t>
-            </a:r>
-          </a:p>
-          <a:p/>
-          <a:p>
-            <a:r>
-              <a:t>Còn một quan sát khá bất ngờ. Trên luồng Synthetic, SGD thuần đạt 92,2 điểm, còn PBF-SGD chỉ đạt 88,5. Nghĩa là khai triển cơ sở làm kết quả tệ đi. Lý do là khái niệm ở luồng đó là một siêu phẳng theta chuyển vị nhân x bằng không, tức là tuyến tính theo định nghĩa. Một cơ sở đa thức bậc ba thêm vào 1.770 tham số, mà những tham số này chỉ đóng góp phương sai chứ không thêm năng lực biểu diễn nào. Khai triển cơ sở là một canh bạc đặt vào tính phi tuyến, và đây đúng là ô mà canh bạc ấy chắc chắn thua.</a:t>
+              <a:t>Điều cần rút ra là cả hai biên độ này đều lớn hơn khoảng cách giữa hai phương pháp bất kỳ ở bảng trước. Nghĩa là nếu một kết quả được công bố mà không nói rõ hai tham số này thì ta không diễn giải được nó, và cũng không so sánh được với kết quả khác.</a:t>
             </a:r>
           </a:p>
         </p:txBody>
@@ -2794,7 +2800,7 @@
           <a:p/>
           <a:p>
             <a:r>
-              <a:t>Về tái lập, hai trên ba phương pháp khớp trong phạm vi hai điểm trên Electricity. Điều kiện về lambda đúng, nhưng nó nói về khả năng phục hồi sau gián đoạn chứ không phải về việc bám theo.</a:t>
+              <a:t>Về thực nghiệm, không phương pháp nào thắng ở mọi luồng; thứ hạng đổi theo dạng trôi và theo việc biên quyết định là tuyến tính hay phi tuyến. Điều kiện về lambda đúng, nhưng nó nói về khả năng phục hồi sau gián đoạn chứ không phải về việc bám theo.</a:t>
             </a:r>
           </a:p>
           <a:p/>
@@ -9365,7 +9371,7 @@
                 </a:solidFill>
                 <a:latin typeface="Calibri"/>
               </a:rPr>
-              <a:t>4.  Reproduction</a:t>
+              <a:t>4.  Experiment</a:t>
             </a:r>
           </a:p>
         </p:txBody>
@@ -9629,7 +9635,7 @@
                 </a:solidFill>
                 <a:latin typeface="Calibri"/>
               </a:rPr>
-              <a:t>Results: Table 3</a:t>
+              <a:t>Results</a:t>
             </a:r>
           </a:p>
         </p:txBody>
@@ -9663,7 +9669,7 @@
                 </a:solidFill>
                 <a:latin typeface="Calibri"/>
               </a:rPr>
-              <a:t>reproduced / reported</a:t>
+              <a:t>prequential accuracy, %</a:t>
             </a:r>
           </a:p>
         </p:txBody>
@@ -9678,7 +9684,7 @@
         </p:nvGraphicFramePr>
         <p:xfrm>
           <a:off x="640080" y="2057400"/>
-          <a:ext cx="10911534" cy="2743200"/>
+          <a:ext cx="10911533" cy="2743200"/>
         </p:xfrm>
         <a:graphic>
           <a:graphicData uri="http://schemas.openxmlformats.org/drawingml/2006/table">
@@ -9687,10 +9693,13 @@
                 <a:tableStyleId>{5C22544A-7EE6-4342-B048-85BDC9FD1C3A}</a:tableStyleId>
               </a:tblPr>
               <a:tblGrid>
-                <a:gridCol w="3030981"/>
-                <a:gridCol w="2626851"/>
-                <a:gridCol w="2626851"/>
-                <a:gridCol w="2626851"/>
+                <a:gridCol w="2251586"/>
+                <a:gridCol w="1298992"/>
+                <a:gridCol w="1645390"/>
+                <a:gridCol w="1298992"/>
+                <a:gridCol w="1645390"/>
+                <a:gridCol w="1298992"/>
+                <a:gridCol w="1472191"/>
               </a:tblGrid>
               <a:tr h="548640">
                 <a:tc>
@@ -9700,7 +9709,7 @@
                     <a:p>
                       <a:pPr algn="l"/>
                       <a:r>
-                        <a:rPr sz="2400" b="1" i="0">
+                        <a:rPr sz="2100" b="1" i="0">
                           <a:solidFill>
                             <a:srgbClr val="000000"/>
                           </a:solidFill>
@@ -9743,13 +9752,13 @@
                     <a:p>
                       <a:pPr algn="r"/>
                       <a:r>
-                        <a:rPr sz="2400" b="1" i="0">
+                        <a:rPr sz="2100" b="1" i="0">
                           <a:solidFill>
                             <a:srgbClr val="000000"/>
                           </a:solidFill>
                           <a:latin typeface="Calibri"/>
                         </a:rPr>
-                        <a:t>SAMkNN</a:t>
+                        <a:t>kNN</a:t>
                       </a:r>
                     </a:p>
                   </a:txBody>
@@ -9786,13 +9795,13 @@
                     <a:p>
                       <a:pPr algn="r"/>
                       <a:r>
-                        <a:rPr sz="2400" b="1" i="0">
+                        <a:rPr sz="2100" b="1" i="0">
                           <a:solidFill>
                             <a:srgbClr val="000000"/>
                           </a:solidFill>
                           <a:latin typeface="Calibri"/>
                         </a:rPr>
-                        <a:t>PBF-SGD</a:t>
+                        <a:t>SAMkNN</a:t>
                       </a:r>
                     </a:p>
                   </a:txBody>
@@ -9829,7 +9838,136 @@
                     <a:p>
                       <a:pPr algn="r"/>
                       <a:r>
-                        <a:rPr sz="2400" b="1" i="0">
+                        <a:rPr sz="2100" b="1" i="0">
+                          <a:solidFill>
+                            <a:srgbClr val="000000"/>
+                          </a:solidFill>
+                          <a:latin typeface="Calibri"/>
+                        </a:rPr>
+                        <a:t>SGD</a:t>
+                      </a:r>
+                    </a:p>
+                  </a:txBody>
+                  <a:tcPr marL="73152" marR="73152" marT="27432" marB="27432">
+                    <a:lnL w="9525" cap="flat" cmpd="sng" algn="ctr">
+                      <a:solidFill>
+                        <a:srgbClr val="000000"/>
+                      </a:solidFill>
+                    </a:lnL>
+                    <a:lnR w="9525" cap="flat" cmpd="sng" algn="ctr">
+                      <a:solidFill>
+                        <a:srgbClr val="000000"/>
+                      </a:solidFill>
+                    </a:lnR>
+                    <a:lnT w="9525" cap="flat" cmpd="sng" algn="ctr">
+                      <a:solidFill>
+                        <a:srgbClr val="000000"/>
+                      </a:solidFill>
+                    </a:lnT>
+                    <a:lnB w="9525" cap="flat" cmpd="sng" algn="ctr">
+                      <a:solidFill>
+                        <a:srgbClr val="000000"/>
+                      </a:solidFill>
+                    </a:lnB>
+                    <a:solidFill>
+                      <a:srgbClr val="FFFFFF"/>
+                    </a:solidFill>
+                  </a:tcPr>
+                </a:tc>
+                <a:tc>
+                  <a:txBody>
+                    <a:bodyPr/>
+                    <a:lstStyle/>
+                    <a:p>
+                      <a:pPr algn="r"/>
+                      <a:r>
+                        <a:rPr sz="2100" b="1" i="0">
+                          <a:solidFill>
+                            <a:srgbClr val="000000"/>
+                          </a:solidFill>
+                          <a:latin typeface="Calibri"/>
+                        </a:rPr>
+                        <a:t>PBF-SGD</a:t>
+                      </a:r>
+                    </a:p>
+                  </a:txBody>
+                  <a:tcPr marL="73152" marR="73152" marT="27432" marB="27432">
+                    <a:lnL w="9525" cap="flat" cmpd="sng" algn="ctr">
+                      <a:solidFill>
+                        <a:srgbClr val="000000"/>
+                      </a:solidFill>
+                    </a:lnL>
+                    <a:lnR w="9525" cap="flat" cmpd="sng" algn="ctr">
+                      <a:solidFill>
+                        <a:srgbClr val="000000"/>
+                      </a:solidFill>
+                    </a:lnR>
+                    <a:lnT w="9525" cap="flat" cmpd="sng" algn="ctr">
+                      <a:solidFill>
+                        <a:srgbClr val="000000"/>
+                      </a:solidFill>
+                    </a:lnT>
+                    <a:lnB w="9525" cap="flat" cmpd="sng" algn="ctr">
+                      <a:solidFill>
+                        <a:srgbClr val="000000"/>
+                      </a:solidFill>
+                    </a:lnB>
+                    <a:solidFill>
+                      <a:srgbClr val="FFFFFF"/>
+                    </a:solidFill>
+                  </a:tcPr>
+                </a:tc>
+                <a:tc>
+                  <a:txBody>
+                    <a:bodyPr/>
+                    <a:lstStyle/>
+                    <a:p>
+                      <a:pPr algn="r"/>
+                      <a:r>
+                        <a:rPr sz="2100" b="1" i="0">
+                          <a:solidFill>
+                            <a:srgbClr val="000000"/>
+                          </a:solidFill>
+                          <a:latin typeface="Calibri"/>
+                        </a:rPr>
+                        <a:t>HT</a:t>
+                      </a:r>
+                    </a:p>
+                  </a:txBody>
+                  <a:tcPr marL="73152" marR="73152" marT="27432" marB="27432">
+                    <a:lnL w="9525" cap="flat" cmpd="sng" algn="ctr">
+                      <a:solidFill>
+                        <a:srgbClr val="000000"/>
+                      </a:solidFill>
+                    </a:lnL>
+                    <a:lnR w="9525" cap="flat" cmpd="sng" algn="ctr">
+                      <a:solidFill>
+                        <a:srgbClr val="000000"/>
+                      </a:solidFill>
+                    </a:lnR>
+                    <a:lnT w="9525" cap="flat" cmpd="sng" algn="ctr">
+                      <a:solidFill>
+                        <a:srgbClr val="000000"/>
+                      </a:solidFill>
+                    </a:lnT>
+                    <a:lnB w="9525" cap="flat" cmpd="sng" algn="ctr">
+                      <a:solidFill>
+                        <a:srgbClr val="000000"/>
+                      </a:solidFill>
+                    </a:lnB>
+                    <a:solidFill>
+                      <a:srgbClr val="FFFFFF"/>
+                    </a:solidFill>
+                  </a:tcPr>
+                </a:tc>
+                <a:tc>
+                  <a:txBody>
+                    <a:bodyPr/>
+                    <a:lstStyle/>
+                    <a:p>
+                      <a:pPr algn="r"/>
+                      <a:r>
+                        <a:rPr sz="2100" b="1" i="0">
                           <a:solidFill>
                             <a:srgbClr val="000000"/>
                           </a:solidFill>
@@ -9874,7 +10012,7 @@
                     <a:p>
                       <a:pPr algn="l"/>
                       <a:r>
-                        <a:rPr sz="2400" b="0" i="0">
+                        <a:rPr sz="2100" b="0" i="0">
                           <a:solidFill>
                             <a:srgbClr val="000000"/>
                           </a:solidFill>
@@ -9917,13 +10055,13 @@
                     <a:p>
                       <a:pPr algn="r"/>
                       <a:r>
-                        <a:rPr sz="2400" b="0" i="0">
+                        <a:rPr sz="2100" b="0" i="0">
                           <a:solidFill>
                             <a:srgbClr val="000000"/>
                           </a:solidFill>
                           <a:latin typeface="Calibri"/>
                         </a:rPr>
-                        <a:t>78.0 / 79.8</a:t>
+                        <a:t>73.1</a:t>
                       </a:r>
                     </a:p>
                   </a:txBody>
@@ -9960,13 +10098,13 @@
                     <a:p>
                       <a:pPr algn="r"/>
                       <a:r>
-                        <a:rPr sz="2400" b="0" i="0">
+                        <a:rPr sz="2100" b="0" i="0">
                           <a:solidFill>
                             <a:srgbClr val="000000"/>
                           </a:solidFill>
                           <a:latin typeface="Calibri"/>
                         </a:rPr>
-                        <a:t>80.7 / 85.9</a:t>
+                        <a:t>78.0</a:t>
                       </a:r>
                     </a:p>
                   </a:txBody>
@@ -10003,13 +10141,142 @@
                     <a:p>
                       <a:pPr algn="r"/>
                       <a:r>
-                        <a:rPr sz="2400" b="0" i="0">
+                        <a:rPr sz="2100" b="0" i="0">
                           <a:solidFill>
                             <a:srgbClr val="000000"/>
                           </a:solidFill>
                           <a:latin typeface="Calibri"/>
                         </a:rPr>
-                        <a:t>84.5 / 86.2</a:t>
+                        <a:t>74.3</a:t>
+                      </a:r>
+                    </a:p>
+                  </a:txBody>
+                  <a:tcPr marL="73152" marR="73152" marT="27432" marB="27432">
+                    <a:lnL w="9525" cap="flat" cmpd="sng" algn="ctr">
+                      <a:solidFill>
+                        <a:srgbClr val="000000"/>
+                      </a:solidFill>
+                    </a:lnL>
+                    <a:lnR w="9525" cap="flat" cmpd="sng" algn="ctr">
+                      <a:solidFill>
+                        <a:srgbClr val="000000"/>
+                      </a:solidFill>
+                    </a:lnR>
+                    <a:lnT w="9525" cap="flat" cmpd="sng" algn="ctr">
+                      <a:solidFill>
+                        <a:srgbClr val="000000"/>
+                      </a:solidFill>
+                    </a:lnT>
+                    <a:lnB w="9525" cap="flat" cmpd="sng" algn="ctr">
+                      <a:solidFill>
+                        <a:srgbClr val="000000"/>
+                      </a:solidFill>
+                    </a:lnB>
+                    <a:solidFill>
+                      <a:srgbClr val="FFFFFF"/>
+                    </a:solidFill>
+                  </a:tcPr>
+                </a:tc>
+                <a:tc>
+                  <a:txBody>
+                    <a:bodyPr/>
+                    <a:lstStyle/>
+                    <a:p>
+                      <a:pPr algn="r"/>
+                      <a:r>
+                        <a:rPr sz="2100" b="0" i="0">
+                          <a:solidFill>
+                            <a:srgbClr val="000000"/>
+                          </a:solidFill>
+                          <a:latin typeface="Calibri"/>
+                        </a:rPr>
+                        <a:t>80.7</a:t>
+                      </a:r>
+                    </a:p>
+                  </a:txBody>
+                  <a:tcPr marL="73152" marR="73152" marT="27432" marB="27432">
+                    <a:lnL w="9525" cap="flat" cmpd="sng" algn="ctr">
+                      <a:solidFill>
+                        <a:srgbClr val="000000"/>
+                      </a:solidFill>
+                    </a:lnL>
+                    <a:lnR w="9525" cap="flat" cmpd="sng" algn="ctr">
+                      <a:solidFill>
+                        <a:srgbClr val="000000"/>
+                      </a:solidFill>
+                    </a:lnR>
+                    <a:lnT w="9525" cap="flat" cmpd="sng" algn="ctr">
+                      <a:solidFill>
+                        <a:srgbClr val="000000"/>
+                      </a:solidFill>
+                    </a:lnT>
+                    <a:lnB w="9525" cap="flat" cmpd="sng" algn="ctr">
+                      <a:solidFill>
+                        <a:srgbClr val="000000"/>
+                      </a:solidFill>
+                    </a:lnB>
+                    <a:solidFill>
+                      <a:srgbClr val="FFFFFF"/>
+                    </a:solidFill>
+                  </a:tcPr>
+                </a:tc>
+                <a:tc>
+                  <a:txBody>
+                    <a:bodyPr/>
+                    <a:lstStyle/>
+                    <a:p>
+                      <a:pPr algn="r"/>
+                      <a:r>
+                        <a:rPr sz="2100" b="0" i="0">
+                          <a:solidFill>
+                            <a:srgbClr val="000000"/>
+                          </a:solidFill>
+                          <a:latin typeface="Calibri"/>
+                        </a:rPr>
+                        <a:t>75.8</a:t>
+                      </a:r>
+                    </a:p>
+                  </a:txBody>
+                  <a:tcPr marL="73152" marR="73152" marT="27432" marB="27432">
+                    <a:lnL w="9525" cap="flat" cmpd="sng" algn="ctr">
+                      <a:solidFill>
+                        <a:srgbClr val="000000"/>
+                      </a:solidFill>
+                    </a:lnL>
+                    <a:lnR w="9525" cap="flat" cmpd="sng" algn="ctr">
+                      <a:solidFill>
+                        <a:srgbClr val="000000"/>
+                      </a:solidFill>
+                    </a:lnR>
+                    <a:lnT w="9525" cap="flat" cmpd="sng" algn="ctr">
+                      <a:solidFill>
+                        <a:srgbClr val="000000"/>
+                      </a:solidFill>
+                    </a:lnT>
+                    <a:lnB w="9525" cap="flat" cmpd="sng" algn="ctr">
+                      <a:solidFill>
+                        <a:srgbClr val="000000"/>
+                      </a:solidFill>
+                    </a:lnB>
+                    <a:solidFill>
+                      <a:srgbClr val="FFFFFF"/>
+                    </a:solidFill>
+                  </a:tcPr>
+                </a:tc>
+                <a:tc>
+                  <a:txBody>
+                    <a:bodyPr/>
+                    <a:lstStyle/>
+                    <a:p>
+                      <a:pPr algn="r"/>
+                      <a:r>
+                        <a:rPr sz="2100" b="0" i="0">
+                          <a:solidFill>
+                            <a:srgbClr val="000000"/>
+                          </a:solidFill>
+                          <a:latin typeface="Calibri"/>
+                        </a:rPr>
+                        <a:t>84.5</a:t>
                       </a:r>
                     </a:p>
                   </a:txBody>
@@ -10048,7 +10315,7 @@
                     <a:p>
                       <a:pPr algn="l"/>
                       <a:r>
-                        <a:rPr sz="2400" b="0" i="0">
+                        <a:rPr sz="2100" b="0" i="0">
                           <a:solidFill>
                             <a:srgbClr val="000000"/>
                           </a:solidFill>
@@ -10091,13 +10358,13 @@
                     <a:p>
                       <a:pPr algn="r"/>
                       <a:r>
-                        <a:rPr sz="2400" b="0" i="0">
+                        <a:rPr sz="2100" b="0" i="0">
                           <a:solidFill>
                             <a:srgbClr val="000000"/>
                           </a:solidFill>
                           <a:latin typeface="Calibri"/>
                         </a:rPr>
-                        <a:t>71.1 / 78.8</a:t>
+                        <a:t>61.2</a:t>
                       </a:r>
                     </a:p>
                   </a:txBody>
@@ -10134,13 +10401,13 @@
                     <a:p>
                       <a:pPr algn="r"/>
                       <a:r>
-                        <a:rPr sz="2400" b="0" i="0">
+                        <a:rPr sz="2100" b="0" i="0">
                           <a:solidFill>
                             <a:srgbClr val="000000"/>
                           </a:solidFill>
                           <a:latin typeface="Calibri"/>
                         </a:rPr>
-                        <a:t>82.8 / 81.8</a:t>
+                        <a:t>71.1</a:t>
                       </a:r>
                     </a:p>
                   </a:txBody>
@@ -10177,13 +10444,142 @@
                     <a:p>
                       <a:pPr algn="r"/>
                       <a:r>
-                        <a:rPr sz="2400" b="0" i="0">
+                        <a:rPr sz="2100" b="0" i="0">
                           <a:solidFill>
                             <a:srgbClr val="000000"/>
                           </a:solidFill>
                           <a:latin typeface="Calibri"/>
                         </a:rPr>
-                        <a:t>72.5 / 77.9</a:t>
+                        <a:t>66.9</a:t>
+                      </a:r>
+                    </a:p>
+                  </a:txBody>
+                  <a:tcPr marL="73152" marR="73152" marT="27432" marB="27432">
+                    <a:lnL w="9525" cap="flat" cmpd="sng" algn="ctr">
+                      <a:solidFill>
+                        <a:srgbClr val="000000"/>
+                      </a:solidFill>
+                    </a:lnL>
+                    <a:lnR w="9525" cap="flat" cmpd="sng" algn="ctr">
+                      <a:solidFill>
+                        <a:srgbClr val="000000"/>
+                      </a:solidFill>
+                    </a:lnR>
+                    <a:lnT w="9525" cap="flat" cmpd="sng" algn="ctr">
+                      <a:solidFill>
+                        <a:srgbClr val="000000"/>
+                      </a:solidFill>
+                    </a:lnT>
+                    <a:lnB w="9525" cap="flat" cmpd="sng" algn="ctr">
+                      <a:solidFill>
+                        <a:srgbClr val="000000"/>
+                      </a:solidFill>
+                    </a:lnB>
+                    <a:solidFill>
+                      <a:srgbClr val="FFFFFF"/>
+                    </a:solidFill>
+                  </a:tcPr>
+                </a:tc>
+                <a:tc>
+                  <a:txBody>
+                    <a:bodyPr/>
+                    <a:lstStyle/>
+                    <a:p>
+                      <a:pPr algn="r"/>
+                      <a:r>
+                        <a:rPr sz="2100" b="0" i="0">
+                          <a:solidFill>
+                            <a:srgbClr val="000000"/>
+                          </a:solidFill>
+                          <a:latin typeface="Calibri"/>
+                        </a:rPr>
+                        <a:t>82.8</a:t>
+                      </a:r>
+                    </a:p>
+                  </a:txBody>
+                  <a:tcPr marL="73152" marR="73152" marT="27432" marB="27432">
+                    <a:lnL w="9525" cap="flat" cmpd="sng" algn="ctr">
+                      <a:solidFill>
+                        <a:srgbClr val="000000"/>
+                      </a:solidFill>
+                    </a:lnL>
+                    <a:lnR w="9525" cap="flat" cmpd="sng" algn="ctr">
+                      <a:solidFill>
+                        <a:srgbClr val="000000"/>
+                      </a:solidFill>
+                    </a:lnR>
+                    <a:lnT w="9525" cap="flat" cmpd="sng" algn="ctr">
+                      <a:solidFill>
+                        <a:srgbClr val="000000"/>
+                      </a:solidFill>
+                    </a:lnT>
+                    <a:lnB w="9525" cap="flat" cmpd="sng" algn="ctr">
+                      <a:solidFill>
+                        <a:srgbClr val="000000"/>
+                      </a:solidFill>
+                    </a:lnB>
+                    <a:solidFill>
+                      <a:srgbClr val="FFFFFF"/>
+                    </a:solidFill>
+                  </a:tcPr>
+                </a:tc>
+                <a:tc>
+                  <a:txBody>
+                    <a:bodyPr/>
+                    <a:lstStyle/>
+                    <a:p>
+                      <a:pPr algn="r"/>
+                      <a:r>
+                        <a:rPr sz="2100" b="0" i="0">
+                          <a:solidFill>
+                            <a:srgbClr val="000000"/>
+                          </a:solidFill>
+                          <a:latin typeface="Calibri"/>
+                        </a:rPr>
+                        <a:t>68.0</a:t>
+                      </a:r>
+                    </a:p>
+                  </a:txBody>
+                  <a:tcPr marL="73152" marR="73152" marT="27432" marB="27432">
+                    <a:lnL w="9525" cap="flat" cmpd="sng" algn="ctr">
+                      <a:solidFill>
+                        <a:srgbClr val="000000"/>
+                      </a:solidFill>
+                    </a:lnL>
+                    <a:lnR w="9525" cap="flat" cmpd="sng" algn="ctr">
+                      <a:solidFill>
+                        <a:srgbClr val="000000"/>
+                      </a:solidFill>
+                    </a:lnR>
+                    <a:lnT w="9525" cap="flat" cmpd="sng" algn="ctr">
+                      <a:solidFill>
+                        <a:srgbClr val="000000"/>
+                      </a:solidFill>
+                    </a:lnT>
+                    <a:lnB w="9525" cap="flat" cmpd="sng" algn="ctr">
+                      <a:solidFill>
+                        <a:srgbClr val="000000"/>
+                      </a:solidFill>
+                    </a:lnB>
+                    <a:solidFill>
+                      <a:srgbClr val="FFFFFF"/>
+                    </a:solidFill>
+                  </a:tcPr>
+                </a:tc>
+                <a:tc>
+                  <a:txBody>
+                    <a:bodyPr/>
+                    <a:lstStyle/>
+                    <a:p>
+                      <a:pPr algn="r"/>
+                      <a:r>
+                        <a:rPr sz="2100" b="0" i="0">
+                          <a:solidFill>
+                            <a:srgbClr val="000000"/>
+                          </a:solidFill>
+                          <a:latin typeface="Calibri"/>
+                        </a:rPr>
+                        <a:t>72.5</a:t>
                       </a:r>
                     </a:p>
                   </a:txBody>
@@ -10222,7 +10618,7 @@
                     <a:p>
                       <a:pPr algn="l"/>
                       <a:r>
-                        <a:rPr sz="2400" b="0" i="0">
+                        <a:rPr sz="2100" b="0" i="0">
                           <a:solidFill>
                             <a:srgbClr val="000000"/>
                           </a:solidFill>
@@ -10265,13 +10661,13 @@
                     <a:p>
                       <a:pPr algn="r"/>
                       <a:r>
-                        <a:rPr sz="2400" b="0" i="0">
+                        <a:rPr sz="2100" b="0" i="0">
                           <a:solidFill>
                             <a:srgbClr val="000000"/>
                           </a:solidFill>
                           <a:latin typeface="Calibri"/>
                         </a:rPr>
-                        <a:t>81.1 / 96.0</a:t>
+                        <a:t>73.6</a:t>
                       </a:r>
                     </a:p>
                   </a:txBody>
@@ -10308,13 +10704,13 @@
                     <a:p>
                       <a:pPr algn="r"/>
                       <a:r>
-                        <a:rPr sz="2400" b="0" i="0">
+                        <a:rPr sz="2100" b="0" i="0">
                           <a:solidFill>
                             <a:srgbClr val="000000"/>
                           </a:solidFill>
                           <a:latin typeface="Calibri"/>
                         </a:rPr>
-                        <a:t>88.5 / 95.1</a:t>
+                        <a:t>81.1</a:t>
                       </a:r>
                     </a:p>
                   </a:txBody>
@@ -10351,13 +10747,142 @@
                     <a:p>
                       <a:pPr algn="r"/>
                       <a:r>
-                        <a:rPr sz="2400" b="0" i="0">
+                        <a:rPr sz="2100" b="0" i="0">
                           <a:solidFill>
                             <a:srgbClr val="000000"/>
                           </a:solidFill>
                           <a:latin typeface="Calibri"/>
                         </a:rPr>
-                        <a:t>86.7 / 93.6</a:t>
+                        <a:t>92.2</a:t>
+                      </a:r>
+                    </a:p>
+                  </a:txBody>
+                  <a:tcPr marL="73152" marR="73152" marT="27432" marB="27432">
+                    <a:lnL w="9525" cap="flat" cmpd="sng" algn="ctr">
+                      <a:solidFill>
+                        <a:srgbClr val="000000"/>
+                      </a:solidFill>
+                    </a:lnL>
+                    <a:lnR w="9525" cap="flat" cmpd="sng" algn="ctr">
+                      <a:solidFill>
+                        <a:srgbClr val="000000"/>
+                      </a:solidFill>
+                    </a:lnR>
+                    <a:lnT w="9525" cap="flat" cmpd="sng" algn="ctr">
+                      <a:solidFill>
+                        <a:srgbClr val="000000"/>
+                      </a:solidFill>
+                    </a:lnT>
+                    <a:lnB w="9525" cap="flat" cmpd="sng" algn="ctr">
+                      <a:solidFill>
+                        <a:srgbClr val="000000"/>
+                      </a:solidFill>
+                    </a:lnB>
+                    <a:solidFill>
+                      <a:srgbClr val="FFFFFF"/>
+                    </a:solidFill>
+                  </a:tcPr>
+                </a:tc>
+                <a:tc>
+                  <a:txBody>
+                    <a:bodyPr/>
+                    <a:lstStyle/>
+                    <a:p>
+                      <a:pPr algn="r"/>
+                      <a:r>
+                        <a:rPr sz="2100" b="0" i="0">
+                          <a:solidFill>
+                            <a:srgbClr val="000000"/>
+                          </a:solidFill>
+                          <a:latin typeface="Calibri"/>
+                        </a:rPr>
+                        <a:t>88.5</a:t>
+                      </a:r>
+                    </a:p>
+                  </a:txBody>
+                  <a:tcPr marL="73152" marR="73152" marT="27432" marB="27432">
+                    <a:lnL w="9525" cap="flat" cmpd="sng" algn="ctr">
+                      <a:solidFill>
+                        <a:srgbClr val="000000"/>
+                      </a:solidFill>
+                    </a:lnL>
+                    <a:lnR w="9525" cap="flat" cmpd="sng" algn="ctr">
+                      <a:solidFill>
+                        <a:srgbClr val="000000"/>
+                      </a:solidFill>
+                    </a:lnR>
+                    <a:lnT w="9525" cap="flat" cmpd="sng" algn="ctr">
+                      <a:solidFill>
+                        <a:srgbClr val="000000"/>
+                      </a:solidFill>
+                    </a:lnT>
+                    <a:lnB w="9525" cap="flat" cmpd="sng" algn="ctr">
+                      <a:solidFill>
+                        <a:srgbClr val="000000"/>
+                      </a:solidFill>
+                    </a:lnB>
+                    <a:solidFill>
+                      <a:srgbClr val="FFFFFF"/>
+                    </a:solidFill>
+                  </a:tcPr>
+                </a:tc>
+                <a:tc>
+                  <a:txBody>
+                    <a:bodyPr/>
+                    <a:lstStyle/>
+                    <a:p>
+                      <a:pPr algn="r"/>
+                      <a:r>
+                        <a:rPr sz="2100" b="0" i="0">
+                          <a:solidFill>
+                            <a:srgbClr val="000000"/>
+                          </a:solidFill>
+                          <a:latin typeface="Calibri"/>
+                        </a:rPr>
+                        <a:t>88.0</a:t>
+                      </a:r>
+                    </a:p>
+                  </a:txBody>
+                  <a:tcPr marL="73152" marR="73152" marT="27432" marB="27432">
+                    <a:lnL w="9525" cap="flat" cmpd="sng" algn="ctr">
+                      <a:solidFill>
+                        <a:srgbClr val="000000"/>
+                      </a:solidFill>
+                    </a:lnL>
+                    <a:lnR w="9525" cap="flat" cmpd="sng" algn="ctr">
+                      <a:solidFill>
+                        <a:srgbClr val="000000"/>
+                      </a:solidFill>
+                    </a:lnR>
+                    <a:lnT w="9525" cap="flat" cmpd="sng" algn="ctr">
+                      <a:solidFill>
+                        <a:srgbClr val="000000"/>
+                      </a:solidFill>
+                    </a:lnT>
+                    <a:lnB w="9525" cap="flat" cmpd="sng" algn="ctr">
+                      <a:solidFill>
+                        <a:srgbClr val="000000"/>
+                      </a:solidFill>
+                    </a:lnB>
+                    <a:solidFill>
+                      <a:srgbClr val="FFFFFF"/>
+                    </a:solidFill>
+                  </a:tcPr>
+                </a:tc>
+                <a:tc>
+                  <a:txBody>
+                    <a:bodyPr/>
+                    <a:lstStyle/>
+                    <a:p>
+                      <a:pPr algn="r"/>
+                      <a:r>
+                        <a:rPr sz="2100" b="0" i="0">
+                          <a:solidFill>
+                            <a:srgbClr val="000000"/>
+                          </a:solidFill>
+                          <a:latin typeface="Calibri"/>
+                        </a:rPr>
+                        <a:t>86.7</a:t>
                       </a:r>
                     </a:p>
                   </a:txBody>
@@ -10396,13 +10921,13 @@
                     <a:p>
                       <a:pPr algn="l"/>
                       <a:r>
-                        <a:rPr sz="2400" b="0" i="0">
+                        <a:rPr sz="2100" b="0" i="0">
                           <a:solidFill>
                             <a:srgbClr val="000000"/>
                           </a:solidFill>
                           <a:latin typeface="Calibri"/>
                         </a:rPr>
-                        <a:t>CoverType †</a:t>
+                        <a:t>CoverType</a:t>
                       </a:r>
                     </a:p>
                   </a:txBody>
@@ -10439,13 +10964,13 @@
                     <a:p>
                       <a:pPr algn="r"/>
                       <a:r>
-                        <a:rPr sz="2400" b="0" i="0">
+                        <a:rPr sz="2100" b="0" i="0">
                           <a:solidFill>
                             <a:srgbClr val="000000"/>
                           </a:solidFill>
                           <a:latin typeface="Calibri"/>
                         </a:rPr>
-                        <a:t>91.2 / 93.3</a:t>
+                        <a:t>90.9</a:t>
                       </a:r>
                     </a:p>
                   </a:txBody>
@@ -10482,13 +11007,13 @@
                     <a:p>
                       <a:pPr algn="r"/>
                       <a:r>
-                        <a:rPr sz="2400" b="0" i="0">
+                        <a:rPr sz="2100" b="0" i="0">
                           <a:solidFill>
                             <a:srgbClr val="000000"/>
                           </a:solidFill>
                           <a:latin typeface="Calibri"/>
                         </a:rPr>
-                        <a:t>91.0 / 92.6</a:t>
+                        <a:t>91.2</a:t>
                       </a:r>
                     </a:p>
                   </a:txBody>
@@ -10525,13 +11050,142 @@
                     <a:p>
                       <a:pPr algn="r"/>
                       <a:r>
-                        <a:rPr sz="2400" b="0" i="0">
+                        <a:rPr sz="2100" b="0" i="0">
                           <a:solidFill>
                             <a:srgbClr val="000000"/>
                           </a:solidFill>
                           <a:latin typeface="Calibri"/>
                         </a:rPr>
-                        <a:t>90.5 / 93.9</a:t>
+                        <a:t>90.2</a:t>
+                      </a:r>
+                    </a:p>
+                  </a:txBody>
+                  <a:tcPr marL="73152" marR="73152" marT="27432" marB="27432">
+                    <a:lnL w="9525" cap="flat" cmpd="sng" algn="ctr">
+                      <a:solidFill>
+                        <a:srgbClr val="000000"/>
+                      </a:solidFill>
+                    </a:lnL>
+                    <a:lnR w="9525" cap="flat" cmpd="sng" algn="ctr">
+                      <a:solidFill>
+                        <a:srgbClr val="000000"/>
+                      </a:solidFill>
+                    </a:lnR>
+                    <a:lnT w="9525" cap="flat" cmpd="sng" algn="ctr">
+                      <a:solidFill>
+                        <a:srgbClr val="000000"/>
+                      </a:solidFill>
+                    </a:lnT>
+                    <a:lnB w="9525" cap="flat" cmpd="sng" algn="ctr">
+                      <a:solidFill>
+                        <a:srgbClr val="000000"/>
+                      </a:solidFill>
+                    </a:lnB>
+                    <a:solidFill>
+                      <a:srgbClr val="FFFFFF"/>
+                    </a:solidFill>
+                  </a:tcPr>
+                </a:tc>
+                <a:tc>
+                  <a:txBody>
+                    <a:bodyPr/>
+                    <a:lstStyle/>
+                    <a:p>
+                      <a:pPr algn="r"/>
+                      <a:r>
+                        <a:rPr sz="2100" b="0" i="0">
+                          <a:solidFill>
+                            <a:srgbClr val="000000"/>
+                          </a:solidFill>
+                          <a:latin typeface="Calibri"/>
+                        </a:rPr>
+                        <a:t>91.0</a:t>
+                      </a:r>
+                    </a:p>
+                  </a:txBody>
+                  <a:tcPr marL="73152" marR="73152" marT="27432" marB="27432">
+                    <a:lnL w="9525" cap="flat" cmpd="sng" algn="ctr">
+                      <a:solidFill>
+                        <a:srgbClr val="000000"/>
+                      </a:solidFill>
+                    </a:lnL>
+                    <a:lnR w="9525" cap="flat" cmpd="sng" algn="ctr">
+                      <a:solidFill>
+                        <a:srgbClr val="000000"/>
+                      </a:solidFill>
+                    </a:lnR>
+                    <a:lnT w="9525" cap="flat" cmpd="sng" algn="ctr">
+                      <a:solidFill>
+                        <a:srgbClr val="000000"/>
+                      </a:solidFill>
+                    </a:lnT>
+                    <a:lnB w="9525" cap="flat" cmpd="sng" algn="ctr">
+                      <a:solidFill>
+                        <a:srgbClr val="000000"/>
+                      </a:solidFill>
+                    </a:lnB>
+                    <a:solidFill>
+                      <a:srgbClr val="FFFFFF"/>
+                    </a:solidFill>
+                  </a:tcPr>
+                </a:tc>
+                <a:tc>
+                  <a:txBody>
+                    <a:bodyPr/>
+                    <a:lstStyle/>
+                    <a:p>
+                      <a:pPr algn="r"/>
+                      <a:r>
+                        <a:rPr sz="2100" b="0" i="0">
+                          <a:solidFill>
+                            <a:srgbClr val="000000"/>
+                          </a:solidFill>
+                          <a:latin typeface="Calibri"/>
+                        </a:rPr>
+                        <a:t>83.1</a:t>
+                      </a:r>
+                    </a:p>
+                  </a:txBody>
+                  <a:tcPr marL="73152" marR="73152" marT="27432" marB="27432">
+                    <a:lnL w="9525" cap="flat" cmpd="sng" algn="ctr">
+                      <a:solidFill>
+                        <a:srgbClr val="000000"/>
+                      </a:solidFill>
+                    </a:lnL>
+                    <a:lnR w="9525" cap="flat" cmpd="sng" algn="ctr">
+                      <a:solidFill>
+                        <a:srgbClr val="000000"/>
+                      </a:solidFill>
+                    </a:lnR>
+                    <a:lnT w="9525" cap="flat" cmpd="sng" algn="ctr">
+                      <a:solidFill>
+                        <a:srgbClr val="000000"/>
+                      </a:solidFill>
+                    </a:lnT>
+                    <a:lnB w="9525" cap="flat" cmpd="sng" algn="ctr">
+                      <a:solidFill>
+                        <a:srgbClr val="000000"/>
+                      </a:solidFill>
+                    </a:lnB>
+                    <a:solidFill>
+                      <a:srgbClr val="FFFFFF"/>
+                    </a:solidFill>
+                  </a:tcPr>
+                </a:tc>
+                <a:tc>
+                  <a:txBody>
+                    <a:bodyPr/>
+                    <a:lstStyle/>
+                    <a:p>
+                      <a:pPr algn="r"/>
+                      <a:r>
+                        <a:rPr sz="2100" b="0" i="0">
+                          <a:solidFill>
+                            <a:srgbClr val="000000"/>
+                          </a:solidFill>
+                          <a:latin typeface="Calibri"/>
+                        </a:rPr>
+                        <a:t>90.5</a:t>
                       </a:r>
                     </a:p>
                   </a:txBody>
@@ -10590,33 +11244,33 @@
           <a:p>
             <a:pPr>
               <a:spcAft>
-                <a:spcPts val="800"/>
+                <a:spcPts val="600"/>
               </a:spcAft>
             </a:pPr>
             <a:r>
-              <a:rPr sz="2600" b="0" i="0">
+              <a:rPr sz="2500" b="0" i="0">
                 <a:solidFill>
                   <a:srgbClr val="000000"/>
                 </a:solidFill>
                 <a:latin typeface="Calibri"/>
               </a:rPr>
-              <a:t>Electricity reproduces within 2 points.</a:t>
+              <a:t>No method wins everywhere: RF-HT leads on Electricity,</a:t>
             </a:r>
           </a:p>
           <a:p>
             <a:pPr>
               <a:spcAft>
-                <a:spcPts val="800"/>
+                <a:spcPts val="600"/>
               </a:spcAft>
             </a:pPr>
             <a:r>
-              <a:rPr sz="2600" b="0" i="0">
+              <a:rPr sz="2500" b="0" i="0">
                 <a:solidFill>
                   <a:srgbClr val="000000"/>
                 </a:solidFill>
                 <a:latin typeface="Calibri"/>
               </a:rPr>
-              <a:t>PBF-SGD (−5.2) is the deviation; the cause is the degree.</a:t>
+              <a:t>PBF-SGD on RTG, plain SGD on the linear synthetic stream.</a:t>
             </a:r>
           </a:p>
         </p:txBody>
@@ -10950,7 +11604,7 @@
                 </a:solidFill>
                 <a:latin typeface="Calibri"/>
               </a:rPr>
-              <a:t>4.   Reproduction</a:t>
+              <a:t>4.   Experiment</a:t>
             </a:r>
           </a:p>
           <a:p>
@@ -11193,22 +11847,56 @@
                 </a:solidFill>
                 <a:latin typeface="Calibri"/>
               </a:rPr>
-              <a:t>Unstated parameters</a:t>
+              <a:t>Sensitivity</a:t>
+            </a:r>
+          </a:p>
+        </p:txBody>
+      </p:sp>
+      <p:sp>
+        <p:nvSpPr>
+          <p:cNvPr id="3" name="TextBox 2"/>
+          <p:cNvSpPr txBox="1"/>
+          <p:nvPr/>
+        </p:nvSpPr>
+        <p:spPr>
+          <a:xfrm>
+            <a:off x="640080" y="1298448"/>
+            <a:ext cx="10911535" cy="457200"/>
+          </a:xfrm>
+          <a:prstGeom prst="rect">
+            <a:avLst/>
+          </a:prstGeom>
+          <a:noFill/>
+        </p:spPr>
+        <p:txBody>
+          <a:bodyPr wrap="square" lIns="0" tIns="0" bIns="0">
+            <a:spAutoFit/>
+          </a:bodyPr>
+          <a:lstStyle/>
+          <a:p>
+            <a:r>
+              <a:rPr sz="2200" b="0" i="0">
+                <a:solidFill>
+                  <a:srgbClr val="000000"/>
+                </a:solidFill>
+                <a:latin typeface="Calibri"/>
+              </a:rPr>
+              <a:t>two parameters dominate the results</a:t>
             </a:r>
           </a:p>
         </p:txBody>
       </p:sp>
       <p:graphicFrame>
         <p:nvGraphicFramePr>
-          <p:cNvPr id="3" name="Table 2"/>
+          <p:cNvPr id="4" name="Table 3"/>
           <p:cNvGraphicFramePr>
             <a:graphicFrameLocks noGrp="1"/>
           </p:cNvGraphicFramePr>
           <p:nvPr/>
         </p:nvGraphicFramePr>
         <p:xfrm>
-          <a:off x="640080" y="1737360"/>
-          <a:ext cx="10911534" cy="2377440"/>
+          <a:off x="640080" y="2011680"/>
+          <a:ext cx="10911534" cy="1828800"/>
         </p:xfrm>
         <a:graphic>
           <a:graphicData uri="http://schemas.openxmlformats.org/drawingml/2006/table">
@@ -11217,10 +11905,10 @@
                 <a:tableStyleId>{5C22544A-7EE6-4342-B048-85BDC9FD1C3A}</a:tableStyleId>
               </a:tblPr>
               <a:tblGrid>
-                <a:gridCol w="3762598"/>
-                <a:gridCol w="7148936"/>
+                <a:gridCol w="3950728"/>
+                <a:gridCol w="6960806"/>
               </a:tblGrid>
-              <a:tr h="594360">
+              <a:tr h="609600">
                 <a:tc>
                   <a:txBody>
                     <a:bodyPr/>
@@ -11308,7 +11996,7 @@
                   </a:tcPr>
                 </a:tc>
               </a:tr>
-              <a:tr h="594360">
+              <a:tr h="609600">
                 <a:tc>
                   <a:txBody>
                     <a:bodyPr/>
@@ -11322,7 +12010,7 @@
                           </a:solidFill>
                           <a:latin typeface="Calibri"/>
                         </a:rPr>
-                        <a:t>Synthetic dimension</a:t>
+                        <a:t>Synthetic dimension d</a:t>
                       </a:r>
                     </a:p>
                   </a:txBody>
@@ -11365,7 +12053,7 @@
                           </a:solidFill>
                           <a:latin typeface="Calibri"/>
                         </a:rPr>
-                        <a:t>SGD 57.7 → 92.2 as d = 2 → 20</a:t>
+                        <a:t>SGD 57.7 → 92.2 as d goes 2 → 20</a:t>
                       </a:r>
                     </a:p>
                   </a:txBody>
@@ -11396,7 +12084,7 @@
                   </a:tcPr>
                 </a:tc>
               </a:tr>
-              <a:tr h="594360">
+              <a:tr h="609600">
                 <a:tc>
                   <a:txBody>
                     <a:bodyPr/>
@@ -11410,7 +12098,7 @@
                           </a:solidFill>
                           <a:latin typeface="Calibri"/>
                         </a:rPr>
-                        <a:t>PBF-SGD degree</a:t>
+                        <a:t>PBF-SGD basis degree</a:t>
                       </a:r>
                     </a:p>
                   </a:txBody>
@@ -11453,95 +12141,7 @@
                           </a:solidFill>
                           <a:latin typeface="Calibri"/>
                         </a:rPr>
-                        <a:t>Degree 3 is 3.3 points below degree 2</a:t>
-                      </a:r>
-                    </a:p>
-                  </a:txBody>
-                  <a:tcPr marL="73152" marR="73152" marT="27432" marB="27432">
-                    <a:lnL w="9525" cap="flat" cmpd="sng" algn="ctr">
-                      <a:solidFill>
-                        <a:srgbClr val="000000"/>
-                      </a:solidFill>
-                    </a:lnL>
-                    <a:lnR w="9525" cap="flat" cmpd="sng" algn="ctr">
-                      <a:solidFill>
-                        <a:srgbClr val="000000"/>
-                      </a:solidFill>
-                    </a:lnR>
-                    <a:lnT w="9525" cap="flat" cmpd="sng" algn="ctr">
-                      <a:solidFill>
-                        <a:srgbClr val="000000"/>
-                      </a:solidFill>
-                    </a:lnT>
-                    <a:lnB w="9525" cap="flat" cmpd="sng" algn="ctr">
-                      <a:solidFill>
-                        <a:srgbClr val="000000"/>
-                      </a:solidFill>
-                    </a:lnB>
-                    <a:solidFill>
-                      <a:srgbClr val="FFFFFF"/>
-                    </a:solidFill>
-                  </a:tcPr>
-                </a:tc>
-              </a:tr>
-              <a:tr h="594360">
-                <a:tc>
-                  <a:txBody>
-                    <a:bodyPr/>
-                    <a:lstStyle/>
-                    <a:p>
-                      <a:pPr algn="l"/>
-                      <a:r>
-                        <a:rPr sz="2400" b="0" i="0">
-                          <a:solidFill>
-                            <a:srgbClr val="000000"/>
-                          </a:solidFill>
-                          <a:latin typeface="Calibri"/>
-                        </a:rPr>
-                        <a:t>Electricity attributes</a:t>
-                      </a:r>
-                    </a:p>
-                  </a:txBody>
-                  <a:tcPr marL="73152" marR="73152" marT="27432" marB="27432">
-                    <a:lnL w="9525" cap="flat" cmpd="sng" algn="ctr">
-                      <a:solidFill>
-                        <a:srgbClr val="000000"/>
-                      </a:solidFill>
-                    </a:lnL>
-                    <a:lnR w="9525" cap="flat" cmpd="sng" algn="ctr">
-                      <a:solidFill>
-                        <a:srgbClr val="000000"/>
-                      </a:solidFill>
-                    </a:lnR>
-                    <a:lnT w="9525" cap="flat" cmpd="sng" algn="ctr">
-                      <a:solidFill>
-                        <a:srgbClr val="000000"/>
-                      </a:solidFill>
-                    </a:lnT>
-                    <a:lnB w="9525" cap="flat" cmpd="sng" algn="ctr">
-                      <a:solidFill>
-                        <a:srgbClr val="000000"/>
-                      </a:solidFill>
-                    </a:lnB>
-                    <a:solidFill>
-                      <a:srgbClr val="FFFFFF"/>
-                    </a:solidFill>
-                  </a:tcPr>
-                </a:tc>
-                <a:tc>
-                  <a:txBody>
-                    <a:bodyPr/>
-                    <a:lstStyle/>
-                    <a:p>
-                      <a:pPr algn="l"/>
-                      <a:r>
-                        <a:rPr sz="2400" b="0" i="0">
-                          <a:solidFill>
-                            <a:srgbClr val="000000"/>
-                          </a:solidFill>
-                          <a:latin typeface="Calibri"/>
-                        </a:rPr>
-                        <a:t>Stated as 6; the file declares 8</a:t>
+                        <a:t>Degree 3 scores 3.3 points below degree 2</a:t>
                       </a:r>
                     </a:p>
                   </a:txBody>
@@ -11578,14 +12178,14 @@
       </p:graphicFrame>
       <p:sp>
         <p:nvSpPr>
-          <p:cNvPr id="4" name="TextBox 3"/>
+          <p:cNvPr id="5" name="TextBox 4"/>
           <p:cNvSpPr txBox="1"/>
           <p:nvPr/>
         </p:nvSpPr>
         <p:spPr>
           <a:xfrm>
-            <a:off x="640080" y="4434840"/>
-            <a:ext cx="10911535" cy="1965960"/>
+            <a:off x="640080" y="4389120"/>
+            <a:ext cx="10911535" cy="2011680"/>
           </a:xfrm>
           <a:prstGeom prst="rect">
             <a:avLst/>
@@ -11604,13 +12204,13 @@
               </a:spcAft>
             </a:pPr>
             <a:r>
-              <a:rPr sz="2700" b="0" i="0">
+              <a:rPr sz="2600" b="1" i="0">
                 <a:solidFill>
                   <a:srgbClr val="000000"/>
                 </a:solidFill>
                 <a:latin typeface="Calibri"/>
               </a:rPr>
-              <a:t>The reported Synthetic row needs large d.</a:t>
+              <a:t>Either swing exceeds the gap between methods.</a:t>
             </a:r>
           </a:p>
           <a:p>
@@ -11620,13 +12220,13 @@
               </a:spcAft>
             </a:pPr>
             <a:r>
-              <a:rPr sz="2700" b="0" i="0">
+              <a:rPr sz="2600" b="0" i="0">
                 <a:solidFill>
                   <a:srgbClr val="000000"/>
                 </a:solidFill>
                 <a:latin typeface="Calibri"/>
               </a:rPr>
-              <a:t>It is not attainable at the d = 2 of Figure 4.</a:t>
+              <a:t>A result quoted without these settings is not interpretable.</a:t>
             </a:r>
           </a:p>
         </p:txBody>
@@ -13967,7 +14567,7 @@
                 </a:solidFill>
                 <a:latin typeface="Calibri"/>
               </a:rPr>
-              <a:t>Two of three methods reproduce within 2 points.</a:t>
+              <a:t>No method wins on every stream; the ranking flips.</a:t>
             </a:r>
           </a:p>
           <a:p>

--- a/data-drift/seminar.pptx
+++ b/data-drift/seminar.pptx
@@ -1838,7 +1838,13 @@
           <a:p/>
           <a:p>
             <a:r>
-              <a:t>Trên CoverType, bốn phương pháp xấp xỉ nhau quanh 90 đến 91 điểm; chỉ cây Hoeffding đơn lẻ tụt lại còn 83,1.</a:t>
+              <a:t>Tôi có chạy cả CoverType nhưng đã bỏ khỏi bảng này. Lý do là sau khi cắt phần khởi động, tỷ lệ lớp dương trong phần được chấm chỉ còn 9,7 phần trăm, nên đoán bừa theo lớp đa số đã được 90,3 điểm. Mọi phương pháp đều nằm trong khoảng một điểm quanh mức đó, thậm chí hai phương pháp còn thấp hơn. Con số trông đẹp nhưng không nói lên điều gì, nên tôi không đưa vào.</a:t>
+            </a:r>
+          </a:p>
+          <a:p/>
+          <a:p>
+            <a:r>
+              <a:t>Ngược lại, ba luồng còn lại đều có mức đoán bừa quanh 50 đến 57 điểm, nên các con số ở bảng đều là kết quả học thật sự chứ không phải hiệu ứng mất cân bằng lớp.</a:t>
             </a:r>
           </a:p>
           <a:p/>
@@ -9683,8 +9689,8 @@
           <p:nvPr/>
         </p:nvGraphicFramePr>
         <p:xfrm>
-          <a:off x="640080" y="2057400"/>
-          <a:ext cx="10911533" cy="2743200"/>
+          <a:off x="640080" y="2148840"/>
+          <a:ext cx="10911533" cy="2286000"/>
         </p:xfrm>
         <a:graphic>
           <a:graphicData uri="http://schemas.openxmlformats.org/drawingml/2006/table">
@@ -9701,7 +9707,7 @@
                 <a:gridCol w="1298992"/>
                 <a:gridCol w="1472191"/>
               </a:tblGrid>
-              <a:tr h="548640">
+              <a:tr h="571500">
                 <a:tc>
                   <a:txBody>
                     <a:bodyPr/>
@@ -9709,7 +9715,7 @@
                     <a:p>
                       <a:pPr algn="l"/>
                       <a:r>
-                        <a:rPr sz="2100" b="1" i="0">
+                        <a:rPr sz="2200" b="1" i="0">
                           <a:solidFill>
                             <a:srgbClr val="000000"/>
                           </a:solidFill>
@@ -9752,7 +9758,7 @@
                     <a:p>
                       <a:pPr algn="r"/>
                       <a:r>
-                        <a:rPr sz="2100" b="1" i="0">
+                        <a:rPr sz="2200" b="1" i="0">
                           <a:solidFill>
                             <a:srgbClr val="000000"/>
                           </a:solidFill>
@@ -9795,7 +9801,7 @@
                     <a:p>
                       <a:pPr algn="r"/>
                       <a:r>
-                        <a:rPr sz="2100" b="1" i="0">
+                        <a:rPr sz="2200" b="1" i="0">
                           <a:solidFill>
                             <a:srgbClr val="000000"/>
                           </a:solidFill>
@@ -9838,7 +9844,7 @@
                     <a:p>
                       <a:pPr algn="r"/>
                       <a:r>
-                        <a:rPr sz="2100" b="1" i="0">
+                        <a:rPr sz="2200" b="1" i="0">
                           <a:solidFill>
                             <a:srgbClr val="000000"/>
                           </a:solidFill>
@@ -9881,7 +9887,7 @@
                     <a:p>
                       <a:pPr algn="r"/>
                       <a:r>
-                        <a:rPr sz="2100" b="1" i="0">
+                        <a:rPr sz="2200" b="1" i="0">
                           <a:solidFill>
                             <a:srgbClr val="000000"/>
                           </a:solidFill>
@@ -9924,7 +9930,7 @@
                     <a:p>
                       <a:pPr algn="r"/>
                       <a:r>
-                        <a:rPr sz="2100" b="1" i="0">
+                        <a:rPr sz="2200" b="1" i="0">
                           <a:solidFill>
                             <a:srgbClr val="000000"/>
                           </a:solidFill>
@@ -9967,7 +9973,7 @@
                     <a:p>
                       <a:pPr algn="r"/>
                       <a:r>
-                        <a:rPr sz="2100" b="1" i="0">
+                        <a:rPr sz="2200" b="1" i="0">
                           <a:solidFill>
                             <a:srgbClr val="000000"/>
                           </a:solidFill>
@@ -10004,7 +10010,7 @@
                   </a:tcPr>
                 </a:tc>
               </a:tr>
-              <a:tr h="548640">
+              <a:tr h="571500">
                 <a:tc>
                   <a:txBody>
                     <a:bodyPr/>
@@ -10012,7 +10018,7 @@
                     <a:p>
                       <a:pPr algn="l"/>
                       <a:r>
-                        <a:rPr sz="2100" b="0" i="0">
+                        <a:rPr sz="2200" b="0" i="0">
                           <a:solidFill>
                             <a:srgbClr val="000000"/>
                           </a:solidFill>
@@ -10055,7 +10061,7 @@
                     <a:p>
                       <a:pPr algn="r"/>
                       <a:r>
-                        <a:rPr sz="2100" b="0" i="0">
+                        <a:rPr sz="2200" b="0" i="0">
                           <a:solidFill>
                             <a:srgbClr val="000000"/>
                           </a:solidFill>
@@ -10098,7 +10104,7 @@
                     <a:p>
                       <a:pPr algn="r"/>
                       <a:r>
-                        <a:rPr sz="2100" b="0" i="0">
+                        <a:rPr sz="2200" b="0" i="0">
                           <a:solidFill>
                             <a:srgbClr val="000000"/>
                           </a:solidFill>
@@ -10141,7 +10147,7 @@
                     <a:p>
                       <a:pPr algn="r"/>
                       <a:r>
-                        <a:rPr sz="2100" b="0" i="0">
+                        <a:rPr sz="2200" b="0" i="0">
                           <a:solidFill>
                             <a:srgbClr val="000000"/>
                           </a:solidFill>
@@ -10184,7 +10190,7 @@
                     <a:p>
                       <a:pPr algn="r"/>
                       <a:r>
-                        <a:rPr sz="2100" b="0" i="0">
+                        <a:rPr sz="2200" b="0" i="0">
                           <a:solidFill>
                             <a:srgbClr val="000000"/>
                           </a:solidFill>
@@ -10227,7 +10233,7 @@
                     <a:p>
                       <a:pPr algn="r"/>
                       <a:r>
-                        <a:rPr sz="2100" b="0" i="0">
+                        <a:rPr sz="2200" b="0" i="0">
                           <a:solidFill>
                             <a:srgbClr val="000000"/>
                           </a:solidFill>
@@ -10270,7 +10276,7 @@
                     <a:p>
                       <a:pPr algn="r"/>
                       <a:r>
-                        <a:rPr sz="2100" b="0" i="0">
+                        <a:rPr sz="2200" b="0" i="0">
                           <a:solidFill>
                             <a:srgbClr val="000000"/>
                           </a:solidFill>
@@ -10307,7 +10313,7 @@
                   </a:tcPr>
                 </a:tc>
               </a:tr>
-              <a:tr h="548640">
+              <a:tr h="571500">
                 <a:tc>
                   <a:txBody>
                     <a:bodyPr/>
@@ -10315,7 +10321,7 @@
                     <a:p>
                       <a:pPr algn="l"/>
                       <a:r>
-                        <a:rPr sz="2100" b="0" i="0">
+                        <a:rPr sz="2200" b="0" i="0">
                           <a:solidFill>
                             <a:srgbClr val="000000"/>
                           </a:solidFill>
@@ -10358,7 +10364,7 @@
                     <a:p>
                       <a:pPr algn="r"/>
                       <a:r>
-                        <a:rPr sz="2100" b="0" i="0">
+                        <a:rPr sz="2200" b="0" i="0">
                           <a:solidFill>
                             <a:srgbClr val="000000"/>
                           </a:solidFill>
@@ -10401,7 +10407,7 @@
                     <a:p>
                       <a:pPr algn="r"/>
                       <a:r>
-                        <a:rPr sz="2100" b="0" i="0">
+                        <a:rPr sz="2200" b="0" i="0">
                           <a:solidFill>
                             <a:srgbClr val="000000"/>
                           </a:solidFill>
@@ -10444,7 +10450,7 @@
                     <a:p>
                       <a:pPr algn="r"/>
                       <a:r>
-                        <a:rPr sz="2100" b="0" i="0">
+                        <a:rPr sz="2200" b="0" i="0">
                           <a:solidFill>
                             <a:srgbClr val="000000"/>
                           </a:solidFill>
@@ -10487,7 +10493,7 @@
                     <a:p>
                       <a:pPr algn="r"/>
                       <a:r>
-                        <a:rPr sz="2100" b="0" i="0">
+                        <a:rPr sz="2200" b="0" i="0">
                           <a:solidFill>
                             <a:srgbClr val="000000"/>
                           </a:solidFill>
@@ -10530,7 +10536,7 @@
                     <a:p>
                       <a:pPr algn="r"/>
                       <a:r>
-                        <a:rPr sz="2100" b="0" i="0">
+                        <a:rPr sz="2200" b="0" i="0">
                           <a:solidFill>
                             <a:srgbClr val="000000"/>
                           </a:solidFill>
@@ -10573,7 +10579,7 @@
                     <a:p>
                       <a:pPr algn="r"/>
                       <a:r>
-                        <a:rPr sz="2100" b="0" i="0">
+                        <a:rPr sz="2200" b="0" i="0">
                           <a:solidFill>
                             <a:srgbClr val="000000"/>
                           </a:solidFill>
@@ -10610,7 +10616,7 @@
                   </a:tcPr>
                 </a:tc>
               </a:tr>
-              <a:tr h="548640">
+              <a:tr h="571500">
                 <a:tc>
                   <a:txBody>
                     <a:bodyPr/>
@@ -10618,7 +10624,7 @@
                     <a:p>
                       <a:pPr algn="l"/>
                       <a:r>
-                        <a:rPr sz="2100" b="0" i="0">
+                        <a:rPr sz="2200" b="0" i="0">
                           <a:solidFill>
                             <a:srgbClr val="000000"/>
                           </a:solidFill>
@@ -10661,7 +10667,7 @@
                     <a:p>
                       <a:pPr algn="r"/>
                       <a:r>
-                        <a:rPr sz="2100" b="0" i="0">
+                        <a:rPr sz="2200" b="0" i="0">
                           <a:solidFill>
                             <a:srgbClr val="000000"/>
                           </a:solidFill>
@@ -10704,7 +10710,7 @@
                     <a:p>
                       <a:pPr algn="r"/>
                       <a:r>
-                        <a:rPr sz="2100" b="0" i="0">
+                        <a:rPr sz="2200" b="0" i="0">
                           <a:solidFill>
                             <a:srgbClr val="000000"/>
                           </a:solidFill>
@@ -10747,7 +10753,7 @@
                     <a:p>
                       <a:pPr algn="r"/>
                       <a:r>
-                        <a:rPr sz="2100" b="0" i="0">
+                        <a:rPr sz="2200" b="0" i="0">
                           <a:solidFill>
                             <a:srgbClr val="000000"/>
                           </a:solidFill>
@@ -10790,7 +10796,7 @@
                     <a:p>
                       <a:pPr algn="r"/>
                       <a:r>
-                        <a:rPr sz="2100" b="0" i="0">
+                        <a:rPr sz="2200" b="0" i="0">
                           <a:solidFill>
                             <a:srgbClr val="000000"/>
                           </a:solidFill>
@@ -10833,7 +10839,7 @@
                     <a:p>
                       <a:pPr algn="r"/>
                       <a:r>
-                        <a:rPr sz="2100" b="0" i="0">
+                        <a:rPr sz="2200" b="0" i="0">
                           <a:solidFill>
                             <a:srgbClr val="000000"/>
                           </a:solidFill>
@@ -10876,7 +10882,7 @@
                     <a:p>
                       <a:pPr algn="r"/>
                       <a:r>
-                        <a:rPr sz="2100" b="0" i="0">
+                        <a:rPr sz="2200" b="0" i="0">
                           <a:solidFill>
                             <a:srgbClr val="000000"/>
                           </a:solidFill>
@@ -10913,309 +10919,6 @@
                   </a:tcPr>
                 </a:tc>
               </a:tr>
-              <a:tr h="548640">
-                <a:tc>
-                  <a:txBody>
-                    <a:bodyPr/>
-                    <a:lstStyle/>
-                    <a:p>
-                      <a:pPr algn="l"/>
-                      <a:r>
-                        <a:rPr sz="2100" b="0" i="0">
-                          <a:solidFill>
-                            <a:srgbClr val="000000"/>
-                          </a:solidFill>
-                          <a:latin typeface="Calibri"/>
-                        </a:rPr>
-                        <a:t>CoverType</a:t>
-                      </a:r>
-                    </a:p>
-                  </a:txBody>
-                  <a:tcPr marL="73152" marR="73152" marT="27432" marB="27432">
-                    <a:lnL w="9525" cap="flat" cmpd="sng" algn="ctr">
-                      <a:solidFill>
-                        <a:srgbClr val="000000"/>
-                      </a:solidFill>
-                    </a:lnL>
-                    <a:lnR w="9525" cap="flat" cmpd="sng" algn="ctr">
-                      <a:solidFill>
-                        <a:srgbClr val="000000"/>
-                      </a:solidFill>
-                    </a:lnR>
-                    <a:lnT w="9525" cap="flat" cmpd="sng" algn="ctr">
-                      <a:solidFill>
-                        <a:srgbClr val="000000"/>
-                      </a:solidFill>
-                    </a:lnT>
-                    <a:lnB w="9525" cap="flat" cmpd="sng" algn="ctr">
-                      <a:solidFill>
-                        <a:srgbClr val="000000"/>
-                      </a:solidFill>
-                    </a:lnB>
-                    <a:solidFill>
-                      <a:srgbClr val="FFFFFF"/>
-                    </a:solidFill>
-                  </a:tcPr>
-                </a:tc>
-                <a:tc>
-                  <a:txBody>
-                    <a:bodyPr/>
-                    <a:lstStyle/>
-                    <a:p>
-                      <a:pPr algn="r"/>
-                      <a:r>
-                        <a:rPr sz="2100" b="0" i="0">
-                          <a:solidFill>
-                            <a:srgbClr val="000000"/>
-                          </a:solidFill>
-                          <a:latin typeface="Calibri"/>
-                        </a:rPr>
-                        <a:t>90.9</a:t>
-                      </a:r>
-                    </a:p>
-                  </a:txBody>
-                  <a:tcPr marL="73152" marR="73152" marT="27432" marB="27432">
-                    <a:lnL w="9525" cap="flat" cmpd="sng" algn="ctr">
-                      <a:solidFill>
-                        <a:srgbClr val="000000"/>
-                      </a:solidFill>
-                    </a:lnL>
-                    <a:lnR w="9525" cap="flat" cmpd="sng" algn="ctr">
-                      <a:solidFill>
-                        <a:srgbClr val="000000"/>
-                      </a:solidFill>
-                    </a:lnR>
-                    <a:lnT w="9525" cap="flat" cmpd="sng" algn="ctr">
-                      <a:solidFill>
-                        <a:srgbClr val="000000"/>
-                      </a:solidFill>
-                    </a:lnT>
-                    <a:lnB w="9525" cap="flat" cmpd="sng" algn="ctr">
-                      <a:solidFill>
-                        <a:srgbClr val="000000"/>
-                      </a:solidFill>
-                    </a:lnB>
-                    <a:solidFill>
-                      <a:srgbClr val="FFFFFF"/>
-                    </a:solidFill>
-                  </a:tcPr>
-                </a:tc>
-                <a:tc>
-                  <a:txBody>
-                    <a:bodyPr/>
-                    <a:lstStyle/>
-                    <a:p>
-                      <a:pPr algn="r"/>
-                      <a:r>
-                        <a:rPr sz="2100" b="0" i="0">
-                          <a:solidFill>
-                            <a:srgbClr val="000000"/>
-                          </a:solidFill>
-                          <a:latin typeface="Calibri"/>
-                        </a:rPr>
-                        <a:t>91.2</a:t>
-                      </a:r>
-                    </a:p>
-                  </a:txBody>
-                  <a:tcPr marL="73152" marR="73152" marT="27432" marB="27432">
-                    <a:lnL w="9525" cap="flat" cmpd="sng" algn="ctr">
-                      <a:solidFill>
-                        <a:srgbClr val="000000"/>
-                      </a:solidFill>
-                    </a:lnL>
-                    <a:lnR w="9525" cap="flat" cmpd="sng" algn="ctr">
-                      <a:solidFill>
-                        <a:srgbClr val="000000"/>
-                      </a:solidFill>
-                    </a:lnR>
-                    <a:lnT w="9525" cap="flat" cmpd="sng" algn="ctr">
-                      <a:solidFill>
-                        <a:srgbClr val="000000"/>
-                      </a:solidFill>
-                    </a:lnT>
-                    <a:lnB w="9525" cap="flat" cmpd="sng" algn="ctr">
-                      <a:solidFill>
-                        <a:srgbClr val="000000"/>
-                      </a:solidFill>
-                    </a:lnB>
-                    <a:solidFill>
-                      <a:srgbClr val="FFFFFF"/>
-                    </a:solidFill>
-                  </a:tcPr>
-                </a:tc>
-                <a:tc>
-                  <a:txBody>
-                    <a:bodyPr/>
-                    <a:lstStyle/>
-                    <a:p>
-                      <a:pPr algn="r"/>
-                      <a:r>
-                        <a:rPr sz="2100" b="0" i="0">
-                          <a:solidFill>
-                            <a:srgbClr val="000000"/>
-                          </a:solidFill>
-                          <a:latin typeface="Calibri"/>
-                        </a:rPr>
-                        <a:t>90.2</a:t>
-                      </a:r>
-                    </a:p>
-                  </a:txBody>
-                  <a:tcPr marL="73152" marR="73152" marT="27432" marB="27432">
-                    <a:lnL w="9525" cap="flat" cmpd="sng" algn="ctr">
-                      <a:solidFill>
-                        <a:srgbClr val="000000"/>
-                      </a:solidFill>
-                    </a:lnL>
-                    <a:lnR w="9525" cap="flat" cmpd="sng" algn="ctr">
-                      <a:solidFill>
-                        <a:srgbClr val="000000"/>
-                      </a:solidFill>
-                    </a:lnR>
-                    <a:lnT w="9525" cap="flat" cmpd="sng" algn="ctr">
-                      <a:solidFill>
-                        <a:srgbClr val="000000"/>
-                      </a:solidFill>
-                    </a:lnT>
-                    <a:lnB w="9525" cap="flat" cmpd="sng" algn="ctr">
-                      <a:solidFill>
-                        <a:srgbClr val="000000"/>
-                      </a:solidFill>
-                    </a:lnB>
-                    <a:solidFill>
-                      <a:srgbClr val="FFFFFF"/>
-                    </a:solidFill>
-                  </a:tcPr>
-                </a:tc>
-                <a:tc>
-                  <a:txBody>
-                    <a:bodyPr/>
-                    <a:lstStyle/>
-                    <a:p>
-                      <a:pPr algn="r"/>
-                      <a:r>
-                        <a:rPr sz="2100" b="0" i="0">
-                          <a:solidFill>
-                            <a:srgbClr val="000000"/>
-                          </a:solidFill>
-                          <a:latin typeface="Calibri"/>
-                        </a:rPr>
-                        <a:t>91.0</a:t>
-                      </a:r>
-                    </a:p>
-                  </a:txBody>
-                  <a:tcPr marL="73152" marR="73152" marT="27432" marB="27432">
-                    <a:lnL w="9525" cap="flat" cmpd="sng" algn="ctr">
-                      <a:solidFill>
-                        <a:srgbClr val="000000"/>
-                      </a:solidFill>
-                    </a:lnL>
-                    <a:lnR w="9525" cap="flat" cmpd="sng" algn="ctr">
-                      <a:solidFill>
-                        <a:srgbClr val="000000"/>
-                      </a:solidFill>
-                    </a:lnR>
-                    <a:lnT w="9525" cap="flat" cmpd="sng" algn="ctr">
-                      <a:solidFill>
-                        <a:srgbClr val="000000"/>
-                      </a:solidFill>
-                    </a:lnT>
-                    <a:lnB w="9525" cap="flat" cmpd="sng" algn="ctr">
-                      <a:solidFill>
-                        <a:srgbClr val="000000"/>
-                      </a:solidFill>
-                    </a:lnB>
-                    <a:solidFill>
-                      <a:srgbClr val="FFFFFF"/>
-                    </a:solidFill>
-                  </a:tcPr>
-                </a:tc>
-                <a:tc>
-                  <a:txBody>
-                    <a:bodyPr/>
-                    <a:lstStyle/>
-                    <a:p>
-                      <a:pPr algn="r"/>
-                      <a:r>
-                        <a:rPr sz="2100" b="0" i="0">
-                          <a:solidFill>
-                            <a:srgbClr val="000000"/>
-                          </a:solidFill>
-                          <a:latin typeface="Calibri"/>
-                        </a:rPr>
-                        <a:t>83.1</a:t>
-                      </a:r>
-                    </a:p>
-                  </a:txBody>
-                  <a:tcPr marL="73152" marR="73152" marT="27432" marB="27432">
-                    <a:lnL w="9525" cap="flat" cmpd="sng" algn="ctr">
-                      <a:solidFill>
-                        <a:srgbClr val="000000"/>
-                      </a:solidFill>
-                    </a:lnL>
-                    <a:lnR w="9525" cap="flat" cmpd="sng" algn="ctr">
-                      <a:solidFill>
-                        <a:srgbClr val="000000"/>
-                      </a:solidFill>
-                    </a:lnR>
-                    <a:lnT w="9525" cap="flat" cmpd="sng" algn="ctr">
-                      <a:solidFill>
-                        <a:srgbClr val="000000"/>
-                      </a:solidFill>
-                    </a:lnT>
-                    <a:lnB w="9525" cap="flat" cmpd="sng" algn="ctr">
-                      <a:solidFill>
-                        <a:srgbClr val="000000"/>
-                      </a:solidFill>
-                    </a:lnB>
-                    <a:solidFill>
-                      <a:srgbClr val="FFFFFF"/>
-                    </a:solidFill>
-                  </a:tcPr>
-                </a:tc>
-                <a:tc>
-                  <a:txBody>
-                    <a:bodyPr/>
-                    <a:lstStyle/>
-                    <a:p>
-                      <a:pPr algn="r"/>
-                      <a:r>
-                        <a:rPr sz="2100" b="0" i="0">
-                          <a:solidFill>
-                            <a:srgbClr val="000000"/>
-                          </a:solidFill>
-                          <a:latin typeface="Calibri"/>
-                        </a:rPr>
-                        <a:t>90.5</a:t>
-                      </a:r>
-                    </a:p>
-                  </a:txBody>
-                  <a:tcPr marL="73152" marR="73152" marT="27432" marB="27432">
-                    <a:lnL w="9525" cap="flat" cmpd="sng" algn="ctr">
-                      <a:solidFill>
-                        <a:srgbClr val="000000"/>
-                      </a:solidFill>
-                    </a:lnL>
-                    <a:lnR w="9525" cap="flat" cmpd="sng" algn="ctr">
-                      <a:solidFill>
-                        <a:srgbClr val="000000"/>
-                      </a:solidFill>
-                    </a:lnR>
-                    <a:lnT w="9525" cap="flat" cmpd="sng" algn="ctr">
-                      <a:solidFill>
-                        <a:srgbClr val="000000"/>
-                      </a:solidFill>
-                    </a:lnT>
-                    <a:lnB w="9525" cap="flat" cmpd="sng" algn="ctr">
-                      <a:solidFill>
-                        <a:srgbClr val="000000"/>
-                      </a:solidFill>
-                    </a:lnB>
-                    <a:solidFill>
-                      <a:srgbClr val="FFFFFF"/>
-                    </a:solidFill>
-                  </a:tcPr>
-                </a:tc>
-              </a:tr>
             </a:tbl>
           </a:graphicData>
         </a:graphic>
@@ -11228,8 +10931,8 @@
         </p:nvSpPr>
         <p:spPr>
           <a:xfrm>
-            <a:off x="640080" y="5120640"/>
-            <a:ext cx="10911535" cy="1280160"/>
+            <a:off x="640080" y="4800600"/>
+            <a:ext cx="10911535" cy="1600200"/>
           </a:xfrm>
           <a:prstGeom prst="rect">
             <a:avLst/>
@@ -11248,7 +10951,7 @@
               </a:spcAft>
             </a:pPr>
             <a:r>
-              <a:rPr sz="2500" b="0" i="0">
+              <a:rPr sz="2400" b="0" i="0">
                 <a:solidFill>
                   <a:srgbClr val="000000"/>
                 </a:solidFill>
@@ -11264,13 +10967,29 @@
               </a:spcAft>
             </a:pPr>
             <a:r>
-              <a:rPr sz="2500" b="0" i="0">
+              <a:rPr sz="2400" b="0" i="0">
                 <a:solidFill>
                   <a:srgbClr val="000000"/>
                 </a:solidFill>
                 <a:latin typeface="Calibri"/>
               </a:rPr>
               <a:t>PBF-SGD on RTG, plain SGD on the linear synthetic stream.</a:t>
+            </a:r>
+          </a:p>
+          <a:p>
+            <a:pPr>
+              <a:spcAft>
+                <a:spcPts val="600"/>
+              </a:spcAft>
+            </a:pPr>
+            <a:r>
+              <a:rPr sz="2400" b="0" i="0">
+                <a:solidFill>
+                  <a:srgbClr val="000000"/>
+                </a:solidFill>
+                <a:latin typeface="Calibri"/>
+              </a:rPr>
+              <a:t>Majority-class baselines: 57.2, 50.8, 50.9 — all beaten.</a:t>
             </a:r>
           </a:p>
         </p:txBody>
